--- a/presentacion/presentacion-2.pptx
+++ b/presentacion/presentacion-2.pptx
@@ -133,7 +133,7 @@
           <a:lstStyle/>
           <a:p>
             <a:pPr>
-              <a:defRPr sz="900" b="0" i="0" u="none" strike="noStrike">
+              <a:defRPr sz="800" b="0" i="0" u="none" strike="noStrike">
                 <a:solidFill>
                   <a:srgbClr val="1E2B37"/>
                 </a:solidFill>
@@ -141,13 +141,13 @@
               </a:defRPr>
             </a:pPr>
             <a:r>
-              <a:rPr sz="900" b="0" i="0" u="none" strike="noStrike">
+              <a:rPr sz="800" b="0" i="0" u="none" strike="noStrike">
                 <a:solidFill>
                   <a:srgbClr val="1E2B37"/>
                 </a:solidFill>
                 <a:latin typeface="Arial"/>
               </a:rPr>
-              <a:t>Coste por rol (USD, 3 evals)</a:t>
+              <a:t>Coste por rol, novela publicada (USD)</a:t>
             </a:r>
           </a:p>
         </c:rich>
@@ -209,9 +209,9 @@
           </c:dLbls>
           <c:cat>
             <c:multiLvlStrRef>
-              <c:f>Sheet1!$A$2:$A$6</c:f>
+              <c:f>Sheet1!$A$2:$A$5</c:f>
               <c:multiLvlStrCache>
-                <c:ptCount val="5"/>
+                <c:ptCount val="4"/>
                 <c:lvl>
                   <c:pt idx="0">
                     <c:v>writer</c:v>
@@ -225,33 +225,27 @@
                   <c:pt idx="3">
                     <c:v>planner</c:v>
                   </c:pt>
-                  <c:pt idx="4">
-                    <c:v>interviewer</c:v>
-                  </c:pt>
                 </c:lvl>
               </c:multiLvlStrCache>
             </c:multiLvlStrRef>
           </c:cat>
           <c:val>
             <c:numRef>
-              <c:f>Sheet1!$B$2:$B$6</c:f>
+              <c:f>Sheet1!$B$2:$B$5</c:f>
               <c:numCache>
                 <c:formatCode>General</c:formatCode>
-                <c:ptCount val="5"/>
+                <c:ptCount val="4"/>
                 <c:pt idx="0">
-                  <c:v>1.3</c:v>
+                  <c:v>1.49</c:v>
                 </c:pt>
                 <c:pt idx="1">
-                  <c:v>1.13</c:v>
+                  <c:v>0.97</c:v>
                 </c:pt>
                 <c:pt idx="2">
-                  <c:v>0.91</c:v>
+                  <c:v>0.52</c:v>
                 </c:pt>
                 <c:pt idx="3">
-                  <c:v>0.57</c:v>
-                </c:pt>
-                <c:pt idx="4">
-                  <c:v>0.01</c:v>
+                  <c:v>0.11</c:v>
                 </c:pt>
               </c:numCache>
             </c:numRef>
@@ -966,6 +960,7 @@
             <a:r>
               <a:rPr lang="en-US" dirty="0"/>
               <a:t>[7:00–8:00] Coste medido: la novela de diez capítulos publicada costó 3,10 USD de modelo y 69 minutos; un cambio del lector, unos 0,94 USD. El writer es el rol más caro, luego editor y juez: son los que producen y leen más texto.
+Gasto real de todo el desarrollo con modelo: 27,03 USD, contando los tres intentos bloqueados, las evals antes y después del tuning y el experimento de Lean.
 Como los bucles están acotados, el coste también: el peor intento medido costó 6,05 USD, y ese riesgo lo asumimos nosotros: solo se factura lo publicado.
 Propuesta: un piloto de ocho semanas por 28.800 euros (integración, marca blanca, QA editorial con 50 novelas y el trabajo de RGPD), 600 euros al mes de plataforma y 12 euros por novela publicada. Con un precio de venta de 39 euros, a Cuentalia le quedan 27 de margen bruto.</a:t>
             </a:r>
@@ -2417,7 +2412,7 @@
       </p:grpSpPr>
       <p:pic>
         <p:nvPicPr>
-          <p:cNvPr id="2" name="Image 0" descr="C:\Users\student\Documents\Academy Repo\Curso Harness\Novela Ciencia Ficción\My-Story-Marker\presentacion\build\img2\logo-white.png">    </p:cNvPr>
+          <p:cNvPr id="2" name="Image 0" descr="/home/user/My-Story-Marker/presentacion/build/img2/logo-white.png">    </p:cNvPr>
           <p:cNvPicPr>
             <a:picLocks noChangeAspect="1"/>
           </p:cNvPicPr>
@@ -2892,7 +2887,7 @@
       </p:sp>
       <p:pic>
         <p:nvPicPr>
-          <p:cNvPr id="15" name="Image 1" descr="C:\Users\student\Documents\Academy Repo\Curso Harness\Novela Ciencia Ficción\My-Story-Marker\presentacion\build\img2\crops\portada.png">    </p:cNvPr>
+          <p:cNvPr id="15" name="Image 1" descr="/home/user/My-Story-Marker/presentacion/build/img2/crops/portada.png">    </p:cNvPr>
           <p:cNvPicPr>
             <a:picLocks noChangeAspect="1"/>
           </p:cNvPicPr>
@@ -2987,7 +2982,7 @@
       </p:grpSpPr>
       <p:pic>
         <p:nvPicPr>
-          <p:cNvPr id="2" name="Image 0" descr="C:\Users\student\Documents\Academy Repo\Curso Harness\Novela Ciencia Ficción\My-Story-Marker\presentacion\build\img2\mark.png">    </p:cNvPr>
+          <p:cNvPr id="2" name="Image 0" descr="/home/user/My-Story-Marker/presentacion/build/img2/mark.png">    </p:cNvPr>
           <p:cNvPicPr>
             <a:picLocks noChangeAspect="1"/>
           </p:cNvPicPr>
@@ -3089,7 +3084,7 @@
       </p:sp>
       <p:pic>
         <p:nvPicPr>
-          <p:cNvPr id="5" name="Image 1" descr="C:\Users\student\Documents\Academy Repo\Curso Harness\Novela Ciencia Ficción\My-Story-Marker\presentacion\build\img2\logo.png">    </p:cNvPr>
+          <p:cNvPr id="5" name="Image 1" descr="/home/user/My-Story-Marker/presentacion/build/img2/logo.png">    </p:cNvPr>
           <p:cNvPicPr>
             <a:picLocks noChangeAspect="1"/>
           </p:cNvPicPr>
@@ -4331,7 +4326,7 @@
       </p:grpSpPr>
       <p:pic>
         <p:nvPicPr>
-          <p:cNvPr id="2" name="Image 0" descr="C:\Users\student\Documents\Academy Repo\Curso Harness\Novela Ciencia Ficción\My-Story-Marker\presentacion\build\img2\mark.png">    </p:cNvPr>
+          <p:cNvPr id="2" name="Image 0" descr="/home/user/My-Story-Marker/presentacion/build/img2/mark.png">    </p:cNvPr>
           <p:cNvPicPr>
             <a:picLocks noChangeAspect="1"/>
           </p:cNvPicPr>
@@ -4433,7 +4428,7 @@
       </p:sp>
       <p:pic>
         <p:nvPicPr>
-          <p:cNvPr id="5" name="Image 1" descr="C:\Users\student\Documents\Academy Repo\Curso Harness\Novela Ciencia Ficción\My-Story-Marker\presentacion\build\img2\logo.png">    </p:cNvPr>
+          <p:cNvPr id="5" name="Image 1" descr="/home/user/My-Story-Marker/presentacion/build/img2/logo.png">    </p:cNvPr>
           <p:cNvPicPr>
             <a:picLocks noChangeAspect="1"/>
           </p:cNvPicPr>
@@ -4774,8 +4769,8 @@
           <p:nvPr/>
         </p:nvGraphicFramePr>
         <p:xfrm>
-          <a:off x="457200" y="2057400"/>
-          <a:ext cx="4023360" cy="2103120"/>
+          <a:off x="457200" y="2011680"/>
+          <a:ext cx="1965960" cy="2148840"/>
         </p:xfrm>
         <a:graphic xmlns:a="http://schemas.openxmlformats.org/drawingml/2006/main">
           <a:graphicData uri="http://schemas.openxmlformats.org/drawingml/2006/chart">
@@ -4791,8 +4786,8 @@
         </p:nvSpPr>
         <p:spPr>
           <a:xfrm>
-            <a:off x="457200" y="4206240"/>
-            <a:ext cx="4023360" cy="411480"/>
+            <a:off x="2560320" y="2029968"/>
+            <a:ext cx="1920240" cy="182880"/>
           </a:xfrm>
           <a:prstGeom prst="rect">
             <a:avLst/>
@@ -4808,15 +4803,15 @@
               <a:buNone/>
             </a:pPr>
             <a:r>
-              <a:rPr lang="en-US" sz="750" i="1" dirty="0">
-                <a:solidFill>
-                  <a:srgbClr val="5E6A77"/>
+              <a:rPr lang="en-US" sz="750" b="1" spc="100" kern="0" dirty="0">
+                <a:solidFill>
+                  <a:srgbClr val="AE4E14"/>
                 </a:solidFill>
                 <a:latin typeface="Arial" pitchFamily="34" charset="0"/>
                 <a:ea typeface="Arial" pitchFamily="34" charset="-122"/>
                 <a:cs typeface="Arial" pitchFamily="34" charset="-120"/>
               </a:rPr>
-              <a:t>Techo por bucles acotados: el peor intento medido costó 6,05 USD y no se cobra (solo se factura lo publicado). Haiku 4.5: 1 USD/M tokens de entrada, 5 USD/M de salida.</a:t>
+              <a:t>GASTO REAL MEDIDO</a:t>
             </a:r>
             <a:endParaRPr lang="en-US" sz="750" dirty="0"/>
           </a:p>
@@ -4824,7 +4819,592 @@
       </p:sp>
       <p:sp>
         <p:nvSpPr>
-          <p:cNvPr id="16" name="Shape 11"/>
+          <p:cNvPr id="16" name="Text 11"/>
+          <p:cNvSpPr txBox="1"/>
+          <p:nvPr/>
+        </p:nvSpPr>
+        <p:spPr>
+          <a:xfrm>
+            <a:off x="2560320" y="2231136"/>
+            <a:ext cx="1371600" cy="219456"/>
+          </a:xfrm>
+          <a:prstGeom prst="rect">
+            <a:avLst/>
+          </a:prstGeom>
+          <a:noFill/>
+          <a:ln/>
+        </p:spPr>
+        <p:txBody>
+          <a:bodyPr wrap="square" lIns="0" tIns="0" rIns="0" bIns="0" rtlCol="0" anchor="ctr"/>
+          <a:lstStyle/>
+          <a:p>
+            <a:pPr indent="0" marL="0">
+              <a:buNone/>
+            </a:pPr>
+            <a:r>
+              <a:rPr lang="en-US" sz="750" dirty="0">
+                <a:solidFill>
+                  <a:srgbClr val="3D4A56"/>
+                </a:solidFill>
+                <a:latin typeface="Arial" pitchFamily="34" charset="0"/>
+                <a:ea typeface="Arial" pitchFamily="34" charset="-122"/>
+                <a:cs typeface="Arial" pitchFamily="34" charset="-120"/>
+              </a:rPr>
+              <a:t>Novela 10 cap. publicada</a:t>
+            </a:r>
+            <a:endParaRPr lang="en-US" sz="750" dirty="0"/>
+          </a:p>
+        </p:txBody>
+      </p:sp>
+      <p:sp>
+        <p:nvSpPr>
+          <p:cNvPr id="17" name="Text 12"/>
+          <p:cNvSpPr txBox="1"/>
+          <p:nvPr/>
+        </p:nvSpPr>
+        <p:spPr>
+          <a:xfrm>
+            <a:off x="3886200" y="2231136"/>
+            <a:ext cx="594360" cy="219456"/>
+          </a:xfrm>
+          <a:prstGeom prst="rect">
+            <a:avLst/>
+          </a:prstGeom>
+          <a:noFill/>
+          <a:ln/>
+        </p:spPr>
+        <p:txBody>
+          <a:bodyPr wrap="square" lIns="0" tIns="0" rIns="0" bIns="0" rtlCol="0" anchor="ctr"/>
+          <a:lstStyle/>
+          <a:p>
+            <a:pPr algn="r" indent="0" marL="0">
+              <a:buNone/>
+            </a:pPr>
+            <a:r>
+              <a:rPr lang="en-US" sz="750" dirty="0">
+                <a:solidFill>
+                  <a:srgbClr val="1E2B37"/>
+                </a:solidFill>
+                <a:latin typeface="Arial" pitchFamily="34" charset="0"/>
+                <a:ea typeface="Arial" pitchFamily="34" charset="-122"/>
+                <a:cs typeface="Arial" pitchFamily="34" charset="-120"/>
+              </a:rPr>
+              <a:t>3,09</a:t>
+            </a:r>
+            <a:endParaRPr lang="en-US" sz="750" dirty="0"/>
+          </a:p>
+        </p:txBody>
+      </p:sp>
+      <p:sp>
+        <p:nvSpPr>
+          <p:cNvPr id="18" name="Text 13"/>
+          <p:cNvSpPr txBox="1"/>
+          <p:nvPr/>
+        </p:nvSpPr>
+        <p:spPr>
+          <a:xfrm>
+            <a:off x="2560320" y="2459736"/>
+            <a:ext cx="1371600" cy="219456"/>
+          </a:xfrm>
+          <a:prstGeom prst="rect">
+            <a:avLst/>
+          </a:prstGeom>
+          <a:noFill/>
+          <a:ln/>
+        </p:spPr>
+        <p:txBody>
+          <a:bodyPr wrap="square" lIns="0" tIns="0" rIns="0" bIns="0" rtlCol="0" anchor="ctr"/>
+          <a:lstStyle/>
+          <a:p>
+            <a:pPr indent="0" marL="0">
+              <a:buNone/>
+            </a:pPr>
+            <a:r>
+              <a:rPr lang="en-US" sz="750" dirty="0">
+                <a:solidFill>
+                  <a:srgbClr val="3D4A56"/>
+                </a:solidFill>
+                <a:latin typeface="Arial" pitchFamily="34" charset="0"/>
+                <a:ea typeface="Arial" pitchFamily="34" charset="-122"/>
+                <a:cs typeface="Arial" pitchFamily="34" charset="-120"/>
+              </a:rPr>
+              <a:t>Cambio del lector (v2)</a:t>
+            </a:r>
+            <a:endParaRPr lang="en-US" sz="750" dirty="0"/>
+          </a:p>
+        </p:txBody>
+      </p:sp>
+      <p:sp>
+        <p:nvSpPr>
+          <p:cNvPr id="19" name="Text 14"/>
+          <p:cNvSpPr txBox="1"/>
+          <p:nvPr/>
+        </p:nvSpPr>
+        <p:spPr>
+          <a:xfrm>
+            <a:off x="3886200" y="2459736"/>
+            <a:ext cx="594360" cy="219456"/>
+          </a:xfrm>
+          <a:prstGeom prst="rect">
+            <a:avLst/>
+          </a:prstGeom>
+          <a:noFill/>
+          <a:ln/>
+        </p:spPr>
+        <p:txBody>
+          <a:bodyPr wrap="square" lIns="0" tIns="0" rIns="0" bIns="0" rtlCol="0" anchor="ctr"/>
+          <a:lstStyle/>
+          <a:p>
+            <a:pPr algn="r" indent="0" marL="0">
+              <a:buNone/>
+            </a:pPr>
+            <a:r>
+              <a:rPr lang="en-US" sz="750" dirty="0">
+                <a:solidFill>
+                  <a:srgbClr val="1E2B37"/>
+                </a:solidFill>
+                <a:latin typeface="Arial" pitchFamily="34" charset="0"/>
+                <a:ea typeface="Arial" pitchFamily="34" charset="-122"/>
+                <a:cs typeface="Arial" pitchFamily="34" charset="-120"/>
+              </a:rPr>
+              <a:t>0,94</a:t>
+            </a:r>
+            <a:endParaRPr lang="en-US" sz="750" dirty="0"/>
+          </a:p>
+        </p:txBody>
+      </p:sp>
+      <p:sp>
+        <p:nvSpPr>
+          <p:cNvPr id="20" name="Text 15"/>
+          <p:cNvSpPr txBox="1"/>
+          <p:nvPr/>
+        </p:nvSpPr>
+        <p:spPr>
+          <a:xfrm>
+            <a:off x="2560320" y="2688336"/>
+            <a:ext cx="1371600" cy="219456"/>
+          </a:xfrm>
+          <a:prstGeom prst="rect">
+            <a:avLst/>
+          </a:prstGeom>
+          <a:noFill/>
+          <a:ln/>
+        </p:spPr>
+        <p:txBody>
+          <a:bodyPr wrap="square" lIns="0" tIns="0" rIns="0" bIns="0" rtlCol="0" anchor="ctr"/>
+          <a:lstStyle/>
+          <a:p>
+            <a:pPr indent="0" marL="0">
+              <a:buNone/>
+            </a:pPr>
+            <a:r>
+              <a:rPr lang="en-US" sz="750" dirty="0">
+                <a:solidFill>
+                  <a:srgbClr val="3D4A56"/>
+                </a:solidFill>
+                <a:latin typeface="Arial" pitchFamily="34" charset="0"/>
+                <a:ea typeface="Arial" pitchFamily="34" charset="-122"/>
+                <a:cs typeface="Arial" pitchFamily="34" charset="-120"/>
+              </a:rPr>
+              <a:t>Novela 3 capítulos</a:t>
+            </a:r>
+            <a:endParaRPr lang="en-US" sz="750" dirty="0"/>
+          </a:p>
+        </p:txBody>
+      </p:sp>
+      <p:sp>
+        <p:nvSpPr>
+          <p:cNvPr id="21" name="Text 16"/>
+          <p:cNvSpPr txBox="1"/>
+          <p:nvPr/>
+        </p:nvSpPr>
+        <p:spPr>
+          <a:xfrm>
+            <a:off x="3886200" y="2688336"/>
+            <a:ext cx="594360" cy="219456"/>
+          </a:xfrm>
+          <a:prstGeom prst="rect">
+            <a:avLst/>
+          </a:prstGeom>
+          <a:noFill/>
+          <a:ln/>
+        </p:spPr>
+        <p:txBody>
+          <a:bodyPr wrap="square" lIns="0" tIns="0" rIns="0" bIns="0" rtlCol="0" anchor="ctr"/>
+          <a:lstStyle/>
+          <a:p>
+            <a:pPr algn="r" indent="0" marL="0">
+              <a:buNone/>
+            </a:pPr>
+            <a:r>
+              <a:rPr lang="en-US" sz="750" dirty="0">
+                <a:solidFill>
+                  <a:srgbClr val="1E2B37"/>
+                </a:solidFill>
+                <a:latin typeface="Arial" pitchFamily="34" charset="0"/>
+                <a:ea typeface="Arial" pitchFamily="34" charset="-122"/>
+                <a:cs typeface="Arial" pitchFamily="34" charset="-120"/>
+              </a:rPr>
+              <a:t>0,85</a:t>
+            </a:r>
+            <a:endParaRPr lang="en-US" sz="750" dirty="0"/>
+          </a:p>
+        </p:txBody>
+      </p:sp>
+      <p:sp>
+        <p:nvSpPr>
+          <p:cNvPr id="22" name="Text 17"/>
+          <p:cNvSpPr txBox="1"/>
+          <p:nvPr/>
+        </p:nvSpPr>
+        <p:spPr>
+          <a:xfrm>
+            <a:off x="2560320" y="2916936"/>
+            <a:ext cx="1371600" cy="219456"/>
+          </a:xfrm>
+          <a:prstGeom prst="rect">
+            <a:avLst/>
+          </a:prstGeom>
+          <a:noFill/>
+          <a:ln/>
+        </p:spPr>
+        <p:txBody>
+          <a:bodyPr wrap="square" lIns="0" tIns="0" rIns="0" bIns="0" rtlCol="0" anchor="ctr"/>
+          <a:lstStyle/>
+          <a:p>
+            <a:pPr indent="0" marL="0">
+              <a:buNone/>
+            </a:pPr>
+            <a:r>
+              <a:rPr lang="en-US" sz="750" dirty="0">
+                <a:solidFill>
+                  <a:srgbClr val="3D4A56"/>
+                </a:solidFill>
+                <a:latin typeface="Arial" pitchFamily="34" charset="0"/>
+                <a:ea typeface="Arial" pitchFamily="34" charset="-122"/>
+                <a:cs typeface="Arial" pitchFamily="34" charset="-120"/>
+              </a:rPr>
+              <a:t>3 intentos bloqueados</a:t>
+            </a:r>
+            <a:endParaRPr lang="en-US" sz="750" dirty="0"/>
+          </a:p>
+        </p:txBody>
+      </p:sp>
+      <p:sp>
+        <p:nvSpPr>
+          <p:cNvPr id="23" name="Text 18"/>
+          <p:cNvSpPr txBox="1"/>
+          <p:nvPr/>
+        </p:nvSpPr>
+        <p:spPr>
+          <a:xfrm>
+            <a:off x="3886200" y="2916936"/>
+            <a:ext cx="594360" cy="219456"/>
+          </a:xfrm>
+          <a:prstGeom prst="rect">
+            <a:avLst/>
+          </a:prstGeom>
+          <a:noFill/>
+          <a:ln/>
+        </p:spPr>
+        <p:txBody>
+          <a:bodyPr wrap="square" lIns="0" tIns="0" rIns="0" bIns="0" rtlCol="0" anchor="ctr"/>
+          <a:lstStyle/>
+          <a:p>
+            <a:pPr algn="r" indent="0" marL="0">
+              <a:buNone/>
+            </a:pPr>
+            <a:r>
+              <a:rPr lang="en-US" sz="750" dirty="0">
+                <a:solidFill>
+                  <a:srgbClr val="1E2B37"/>
+                </a:solidFill>
+                <a:latin typeface="Arial" pitchFamily="34" charset="0"/>
+                <a:ea typeface="Arial" pitchFamily="34" charset="-122"/>
+                <a:cs typeface="Arial" pitchFamily="34" charset="-120"/>
+              </a:rPr>
+              <a:t>14,33</a:t>
+            </a:r>
+            <a:endParaRPr lang="en-US" sz="750" dirty="0"/>
+          </a:p>
+        </p:txBody>
+      </p:sp>
+      <p:sp>
+        <p:nvSpPr>
+          <p:cNvPr id="24" name="Text 19"/>
+          <p:cNvSpPr txBox="1"/>
+          <p:nvPr/>
+        </p:nvSpPr>
+        <p:spPr>
+          <a:xfrm>
+            <a:off x="2560320" y="3145536"/>
+            <a:ext cx="1371600" cy="219456"/>
+          </a:xfrm>
+          <a:prstGeom prst="rect">
+            <a:avLst/>
+          </a:prstGeom>
+          <a:noFill/>
+          <a:ln/>
+        </p:spPr>
+        <p:txBody>
+          <a:bodyPr wrap="square" lIns="0" tIns="0" rIns="0" bIns="0" rtlCol="0" anchor="ctr"/>
+          <a:lstStyle/>
+          <a:p>
+            <a:pPr indent="0" marL="0">
+              <a:buNone/>
+            </a:pPr>
+            <a:r>
+              <a:rPr lang="en-US" sz="750" dirty="0">
+                <a:solidFill>
+                  <a:srgbClr val="3D4A56"/>
+                </a:solidFill>
+                <a:latin typeface="Arial" pitchFamily="34" charset="0"/>
+                <a:ea typeface="Arial" pitchFamily="34" charset="-122"/>
+                <a:cs typeface="Arial" pitchFamily="34" charset="-120"/>
+              </a:rPr>
+              <a:t>Evals antes + después</a:t>
+            </a:r>
+            <a:endParaRPr lang="en-US" sz="750" dirty="0"/>
+          </a:p>
+        </p:txBody>
+      </p:sp>
+      <p:sp>
+        <p:nvSpPr>
+          <p:cNvPr id="25" name="Text 20"/>
+          <p:cNvSpPr txBox="1"/>
+          <p:nvPr/>
+        </p:nvSpPr>
+        <p:spPr>
+          <a:xfrm>
+            <a:off x="3886200" y="3145536"/>
+            <a:ext cx="594360" cy="219456"/>
+          </a:xfrm>
+          <a:prstGeom prst="rect">
+            <a:avLst/>
+          </a:prstGeom>
+          <a:noFill/>
+          <a:ln/>
+        </p:spPr>
+        <p:txBody>
+          <a:bodyPr wrap="square" lIns="0" tIns="0" rIns="0" bIns="0" rtlCol="0" anchor="ctr"/>
+          <a:lstStyle/>
+          <a:p>
+            <a:pPr algn="r" indent="0" marL="0">
+              <a:buNone/>
+            </a:pPr>
+            <a:r>
+              <a:rPr lang="en-US" sz="750" dirty="0">
+                <a:solidFill>
+                  <a:srgbClr val="1E2B37"/>
+                </a:solidFill>
+                <a:latin typeface="Arial" pitchFamily="34" charset="0"/>
+                <a:ea typeface="Arial" pitchFamily="34" charset="-122"/>
+                <a:cs typeface="Arial" pitchFamily="34" charset="-120"/>
+              </a:rPr>
+              <a:t>6,53</a:t>
+            </a:r>
+            <a:endParaRPr lang="en-US" sz="750" dirty="0"/>
+          </a:p>
+        </p:txBody>
+      </p:sp>
+      <p:sp>
+        <p:nvSpPr>
+          <p:cNvPr id="26" name="Text 21"/>
+          <p:cNvSpPr txBox="1"/>
+          <p:nvPr/>
+        </p:nvSpPr>
+        <p:spPr>
+          <a:xfrm>
+            <a:off x="2560320" y="3374136"/>
+            <a:ext cx="1371600" cy="219456"/>
+          </a:xfrm>
+          <a:prstGeom prst="rect">
+            <a:avLst/>
+          </a:prstGeom>
+          <a:noFill/>
+          <a:ln/>
+        </p:spPr>
+        <p:txBody>
+          <a:bodyPr wrap="square" lIns="0" tIns="0" rIns="0" bIns="0" rtlCol="0" anchor="ctr"/>
+          <a:lstStyle/>
+          <a:p>
+            <a:pPr indent="0" marL="0">
+              <a:buNone/>
+            </a:pPr>
+            <a:r>
+              <a:rPr lang="en-US" sz="750" dirty="0">
+                <a:solidFill>
+                  <a:srgbClr val="3D4A56"/>
+                </a:solidFill>
+                <a:latin typeface="Arial" pitchFamily="34" charset="0"/>
+                <a:ea typeface="Arial" pitchFamily="34" charset="-122"/>
+                <a:cs typeface="Arial" pitchFamily="34" charset="-120"/>
+              </a:rPr>
+              <a:t>Experimento Lean (L04)</a:t>
+            </a:r>
+            <a:endParaRPr lang="en-US" sz="750" dirty="0"/>
+          </a:p>
+        </p:txBody>
+      </p:sp>
+      <p:sp>
+        <p:nvSpPr>
+          <p:cNvPr id="27" name="Text 22"/>
+          <p:cNvSpPr txBox="1"/>
+          <p:nvPr/>
+        </p:nvSpPr>
+        <p:spPr>
+          <a:xfrm>
+            <a:off x="3886200" y="3374136"/>
+            <a:ext cx="594360" cy="219456"/>
+          </a:xfrm>
+          <a:prstGeom prst="rect">
+            <a:avLst/>
+          </a:prstGeom>
+          <a:noFill/>
+          <a:ln/>
+        </p:spPr>
+        <p:txBody>
+          <a:bodyPr wrap="square" lIns="0" tIns="0" rIns="0" bIns="0" rtlCol="0" anchor="ctr"/>
+          <a:lstStyle/>
+          <a:p>
+            <a:pPr algn="r" indent="0" marL="0">
+              <a:buNone/>
+            </a:pPr>
+            <a:r>
+              <a:rPr lang="en-US" sz="750" dirty="0">
+                <a:solidFill>
+                  <a:srgbClr val="1E2B37"/>
+                </a:solidFill>
+                <a:latin typeface="Arial" pitchFamily="34" charset="0"/>
+                <a:ea typeface="Arial" pitchFamily="34" charset="-122"/>
+                <a:cs typeface="Arial" pitchFamily="34" charset="-120"/>
+              </a:rPr>
+              <a:t>1,29</a:t>
+            </a:r>
+            <a:endParaRPr lang="en-US" sz="750" dirty="0"/>
+          </a:p>
+        </p:txBody>
+      </p:sp>
+      <p:sp>
+        <p:nvSpPr>
+          <p:cNvPr id="28" name="Text 23"/>
+          <p:cNvSpPr txBox="1"/>
+          <p:nvPr/>
+        </p:nvSpPr>
+        <p:spPr>
+          <a:xfrm>
+            <a:off x="2560320" y="3602736"/>
+            <a:ext cx="1371600" cy="219456"/>
+          </a:xfrm>
+          <a:prstGeom prst="rect">
+            <a:avLst/>
+          </a:prstGeom>
+          <a:noFill/>
+          <a:ln/>
+        </p:spPr>
+        <p:txBody>
+          <a:bodyPr wrap="square" lIns="0" tIns="0" rIns="0" bIns="0" rtlCol="0" anchor="ctr"/>
+          <a:lstStyle/>
+          <a:p>
+            <a:pPr indent="0" marL="0">
+              <a:buNone/>
+            </a:pPr>
+            <a:r>
+              <a:rPr lang="en-US" sz="750" b="1" dirty="0">
+                <a:solidFill>
+                  <a:srgbClr val="1E2B37"/>
+                </a:solidFill>
+                <a:latin typeface="Arial" pitchFamily="34" charset="0"/>
+                <a:ea typeface="Arial" pitchFamily="34" charset="-122"/>
+                <a:cs typeface="Arial" pitchFamily="34" charset="-120"/>
+              </a:rPr>
+              <a:t>Total medido</a:t>
+            </a:r>
+            <a:endParaRPr lang="en-US" sz="750" dirty="0"/>
+          </a:p>
+        </p:txBody>
+      </p:sp>
+      <p:sp>
+        <p:nvSpPr>
+          <p:cNvPr id="29" name="Text 24"/>
+          <p:cNvSpPr txBox="1"/>
+          <p:nvPr/>
+        </p:nvSpPr>
+        <p:spPr>
+          <a:xfrm>
+            <a:off x="3886200" y="3602736"/>
+            <a:ext cx="594360" cy="219456"/>
+          </a:xfrm>
+          <a:prstGeom prst="rect">
+            <a:avLst/>
+          </a:prstGeom>
+          <a:noFill/>
+          <a:ln/>
+        </p:spPr>
+        <p:txBody>
+          <a:bodyPr wrap="square" lIns="0" tIns="0" rIns="0" bIns="0" rtlCol="0" anchor="ctr"/>
+          <a:lstStyle/>
+          <a:p>
+            <a:pPr algn="r" indent="0" marL="0">
+              <a:buNone/>
+            </a:pPr>
+            <a:r>
+              <a:rPr lang="en-US" sz="750" b="1" dirty="0">
+                <a:solidFill>
+                  <a:srgbClr val="AE4E14"/>
+                </a:solidFill>
+                <a:latin typeface="Arial" pitchFamily="34" charset="0"/>
+                <a:ea typeface="Arial" pitchFamily="34" charset="-122"/>
+                <a:cs typeface="Arial" pitchFamily="34" charset="-120"/>
+              </a:rPr>
+              <a:t>27,03</a:t>
+            </a:r>
+            <a:endParaRPr lang="en-US" sz="750" dirty="0"/>
+          </a:p>
+        </p:txBody>
+      </p:sp>
+      <p:sp>
+        <p:nvSpPr>
+          <p:cNvPr id="30" name="Text 25"/>
+          <p:cNvSpPr txBox="1"/>
+          <p:nvPr/>
+        </p:nvSpPr>
+        <p:spPr>
+          <a:xfrm>
+            <a:off x="457200" y="4187952"/>
+            <a:ext cx="4023360" cy="457200"/>
+          </a:xfrm>
+          <a:prstGeom prst="rect">
+            <a:avLst/>
+          </a:prstGeom>
+          <a:noFill/>
+          <a:ln/>
+        </p:spPr>
+        <p:txBody>
+          <a:bodyPr wrap="square" lIns="0" tIns="0" rIns="0" bIns="0" rtlCol="0" anchor="t"/>
+          <a:lstStyle/>
+          <a:p>
+            <a:pPr indent="0" marL="0">
+              <a:buNone/>
+            </a:pPr>
+            <a:r>
+              <a:rPr lang="en-US" sz="700" i="1" dirty="0">
+                <a:solidFill>
+                  <a:srgbClr val="5E6A77"/>
+                </a:solidFill>
+                <a:latin typeface="Arial" pitchFamily="34" charset="0"/>
+                <a:ea typeface="Arial" pitchFamily="34" charset="-122"/>
+                <a:cs typeface="Arial" pitchFamily="34" charset="-120"/>
+              </a:rPr>
+              <a:t>Novela publicada: 0,20–0,49 USD por capítulo, 55 llamadas, 472.436 tokens de salida. Techo por bucles acotados: el peor intento costó 6,05 USD y no se cobra (solo se factura lo publicado). Haiku 4.5: 1 USD/M tokens de entrada, 5 USD/M de salida.</a:t>
+            </a:r>
+            <a:endParaRPr lang="en-US" sz="700" dirty="0"/>
+          </a:p>
+        </p:txBody>
+      </p:sp>
+      <p:sp>
+        <p:nvSpPr>
+          <p:cNvPr id="31" name="Shape 26"/>
           <p:cNvSpPr/>
           <p:nvPr/>
         </p:nvSpPr>
@@ -4846,7 +5426,7 @@
       </p:sp>
       <p:sp>
         <p:nvSpPr>
-          <p:cNvPr id="17" name="Text 12"/>
+          <p:cNvPr id="32" name="Text 27"/>
           <p:cNvSpPr txBox="1"/>
           <p:nvPr/>
         </p:nvSpPr>
@@ -4885,7 +5465,7 @@
       </p:sp>
       <p:sp>
         <p:nvSpPr>
-          <p:cNvPr id="18" name="Text 13"/>
+          <p:cNvPr id="33" name="Text 28"/>
           <p:cNvSpPr txBox="1"/>
           <p:nvPr/>
         </p:nvSpPr>
@@ -4924,7 +5504,7 @@
       </p:sp>
       <p:sp>
         <p:nvSpPr>
-          <p:cNvPr id="19" name="Text 14"/>
+          <p:cNvPr id="34" name="Text 29"/>
           <p:cNvSpPr txBox="1"/>
           <p:nvPr/>
         </p:nvSpPr>
@@ -4963,7 +5543,7 @@
       </p:sp>
       <p:sp>
         <p:nvSpPr>
-          <p:cNvPr id="20" name="Text 15"/>
+          <p:cNvPr id="35" name="Text 30"/>
           <p:cNvSpPr txBox="1"/>
           <p:nvPr/>
         </p:nvSpPr>
@@ -5002,7 +5582,7 @@
       </p:sp>
       <p:sp>
         <p:nvSpPr>
-          <p:cNvPr id="21" name="Text 16"/>
+          <p:cNvPr id="36" name="Text 31"/>
           <p:cNvSpPr txBox="1"/>
           <p:nvPr/>
         </p:nvSpPr>
@@ -5041,7 +5621,7 @@
       </p:sp>
       <p:sp>
         <p:nvSpPr>
-          <p:cNvPr id="22" name="Text 17"/>
+          <p:cNvPr id="37" name="Text 32"/>
           <p:cNvSpPr txBox="1"/>
           <p:nvPr/>
         </p:nvSpPr>
@@ -5080,7 +5660,7 @@
       </p:sp>
       <p:sp>
         <p:nvSpPr>
-          <p:cNvPr id="23" name="Text 18"/>
+          <p:cNvPr id="38" name="Text 33"/>
           <p:cNvSpPr txBox="1"/>
           <p:nvPr/>
         </p:nvSpPr>
@@ -5119,7 +5699,7 @@
       </p:sp>
       <p:sp>
         <p:nvSpPr>
-          <p:cNvPr id="24" name="Text 19"/>
+          <p:cNvPr id="39" name="Text 34"/>
           <p:cNvSpPr txBox="1"/>
           <p:nvPr/>
         </p:nvSpPr>
@@ -5158,7 +5738,7 @@
       </p:sp>
       <p:sp>
         <p:nvSpPr>
-          <p:cNvPr id="25" name="Text 20"/>
+          <p:cNvPr id="40" name="Text 35"/>
           <p:cNvSpPr txBox="1"/>
           <p:nvPr/>
         </p:nvSpPr>
@@ -5197,7 +5777,7 @@
       </p:sp>
       <p:sp>
         <p:nvSpPr>
-          <p:cNvPr id="26" name="Text 21"/>
+          <p:cNvPr id="41" name="Text 36"/>
           <p:cNvSpPr txBox="1"/>
           <p:nvPr/>
         </p:nvSpPr>
@@ -5236,7 +5816,7 @@
       </p:sp>
       <p:sp>
         <p:nvSpPr>
-          <p:cNvPr id="27" name="Text 22"/>
+          <p:cNvPr id="42" name="Text 37"/>
           <p:cNvSpPr txBox="1"/>
           <p:nvPr/>
         </p:nvSpPr>
@@ -5275,7 +5855,7 @@
       </p:sp>
       <p:sp>
         <p:nvSpPr>
-          <p:cNvPr id="28" name="Text 23"/>
+          <p:cNvPr id="43" name="Text 38"/>
           <p:cNvSpPr txBox="1"/>
           <p:nvPr/>
         </p:nvSpPr>
@@ -5314,7 +5894,7 @@
       </p:sp>
       <p:sp>
         <p:nvSpPr>
-          <p:cNvPr id="29" name="Text 24"/>
+          <p:cNvPr id="44" name="Text 39"/>
           <p:cNvSpPr txBox="1"/>
           <p:nvPr/>
         </p:nvSpPr>
@@ -5353,7 +5933,7 @@
       </p:sp>
       <p:sp>
         <p:nvSpPr>
-          <p:cNvPr id="30" name="Text 25"/>
+          <p:cNvPr id="45" name="Text 40"/>
           <p:cNvSpPr txBox="1"/>
           <p:nvPr/>
         </p:nvSpPr>
@@ -5392,7 +5972,7 @@
       </p:sp>
       <p:sp>
         <p:nvSpPr>
-          <p:cNvPr id="31" name="Text 26"/>
+          <p:cNvPr id="46" name="Text 41"/>
           <p:cNvSpPr txBox="1"/>
           <p:nvPr/>
         </p:nvSpPr>
@@ -5431,7 +6011,7 @@
       </p:sp>
       <p:sp>
         <p:nvSpPr>
-          <p:cNvPr id="32" name="Text 27"/>
+          <p:cNvPr id="47" name="Text 42"/>
           <p:cNvSpPr txBox="1"/>
           <p:nvPr/>
         </p:nvSpPr>
@@ -5470,7 +6050,7 @@
       </p:sp>
       <p:sp>
         <p:nvSpPr>
-          <p:cNvPr id="33" name="Text 28"/>
+          <p:cNvPr id="48" name="Text 43"/>
           <p:cNvSpPr txBox="1"/>
           <p:nvPr/>
         </p:nvSpPr>
@@ -5509,7 +6089,7 @@
       </p:sp>
       <p:sp>
         <p:nvSpPr>
-          <p:cNvPr id="34" name="Text 29"/>
+          <p:cNvPr id="49" name="Text 44"/>
           <p:cNvSpPr txBox="1"/>
           <p:nvPr/>
         </p:nvSpPr>
@@ -5548,7 +6128,7 @@
       </p:sp>
       <p:sp>
         <p:nvSpPr>
-          <p:cNvPr id="35" name="Text 30"/>
+          <p:cNvPr id="50" name="Text 45"/>
           <p:cNvSpPr txBox="1"/>
           <p:nvPr/>
         </p:nvSpPr>
@@ -5587,7 +6167,7 @@
       </p:sp>
       <p:sp>
         <p:nvSpPr>
-          <p:cNvPr id="36" name="Shape 31"/>
+          <p:cNvPr id="51" name="Shape 46"/>
           <p:cNvSpPr/>
           <p:nvPr/>
         </p:nvSpPr>
@@ -5609,7 +6189,7 @@
       </p:sp>
       <p:sp>
         <p:nvSpPr>
-          <p:cNvPr id="37" name="Text 32"/>
+          <p:cNvPr id="52" name="Text 47"/>
           <p:cNvSpPr txBox="1"/>
           <p:nvPr/>
         </p:nvSpPr>
@@ -5694,7 +6274,7 @@
       </p:grpSpPr>
       <p:pic>
         <p:nvPicPr>
-          <p:cNvPr id="2" name="Image 0" descr="C:\Users\student\Documents\Academy Repo\Curso Harness\Novela Ciencia Ficción\My-Story-Marker\presentacion\build\img2\mark.png">    </p:cNvPr>
+          <p:cNvPr id="2" name="Image 0" descr="/home/user/My-Story-Marker/presentacion/build/img2/mark.png">    </p:cNvPr>
           <p:cNvPicPr>
             <a:picLocks noChangeAspect="1"/>
           </p:cNvPicPr>
@@ -5796,7 +6376,7 @@
       </p:sp>
       <p:pic>
         <p:nvPicPr>
-          <p:cNvPr id="5" name="Image 1" descr="C:\Users\student\Documents\Academy Repo\Curso Harness\Novela Ciencia Ficción\My-Story-Marker\presentacion\build\img2\logo.png">    </p:cNvPr>
+          <p:cNvPr id="5" name="Image 1" descr="/home/user/My-Story-Marker/presentacion/build/img2/logo.png">    </p:cNvPr>
           <p:cNvPicPr>
             <a:picLocks noChangeAspect="1"/>
           </p:cNvPicPr>
@@ -5932,7 +6512,7 @@
       </p:sp>
       <p:pic>
         <p:nvPicPr>
-          <p:cNvPr id="9" name="Image 2" descr="C:\Users\student\Documents\Academy Repo\Curso Harness\Novela Ciencia Ficción\My-Story-Marker\presentacion\build\img2\v1-zoom.png">    </p:cNvPr>
+          <p:cNvPr id="9" name="Image 2" descr="/home/user/My-Story-Marker/presentacion/build/img2/v1-zoom.png">    </p:cNvPr>
           <p:cNvPicPr>
             <a:picLocks noChangeAspect="1"/>
           </p:cNvPicPr>
@@ -6051,7 +6631,7 @@
       </p:sp>
       <p:pic>
         <p:nvPicPr>
-          <p:cNvPr id="13" name="Image 3" descr="C:\Users\student\Documents\Academy Repo\Curso Harness\Novela Ciencia Ficción\My-Story-Marker\presentacion\build\img2\v2-zoom.png">    </p:cNvPr>
+          <p:cNvPr id="13" name="Image 3" descr="/home/user/My-Story-Marker/presentacion/build/img2/v2-zoom.png">    </p:cNvPr>
           <p:cNvPicPr>
             <a:picLocks noChangeAspect="1"/>
           </p:cNvPicPr>
@@ -7007,7 +7587,7 @@
       </p:grpSpPr>
       <p:pic>
         <p:nvPicPr>
-          <p:cNvPr id="2" name="Image 0" descr="C:\Users\student\Documents\Academy Repo\Curso Harness\Novela Ciencia Ficción\My-Story-Marker\presentacion\build\img2\mark.png">    </p:cNvPr>
+          <p:cNvPr id="2" name="Image 0" descr="/home/user/My-Story-Marker/presentacion/build/img2/mark.png">    </p:cNvPr>
           <p:cNvPicPr>
             <a:picLocks noChangeAspect="1"/>
           </p:cNvPicPr>
@@ -7109,7 +7689,7 @@
       </p:sp>
       <p:pic>
         <p:nvPicPr>
-          <p:cNvPr id="5" name="Image 1" descr="C:\Users\student\Documents\Academy Repo\Curso Harness\Novela Ciencia Ficción\My-Story-Marker\presentacion\build\img2\logo.png">    </p:cNvPr>
+          <p:cNvPr id="5" name="Image 1" descr="/home/user/My-Story-Marker/presentacion/build/img2/logo.png">    </p:cNvPr>
           <p:cNvPicPr>
             <a:picLocks noChangeAspect="1"/>
           </p:cNvPicPr>
@@ -8903,7 +9483,7 @@
       </p:grpSpPr>
       <p:pic>
         <p:nvPicPr>
-          <p:cNvPr id="2" name="Image 0" descr="C:\Users\student\Documents\Academy Repo\Curso Harness\Novela Ciencia Ficción\My-Story-Marker\presentacion\build\img2\mark.png">    </p:cNvPr>
+          <p:cNvPr id="2" name="Image 0" descr="/home/user/My-Story-Marker/presentacion/build/img2/mark.png">    </p:cNvPr>
           <p:cNvPicPr>
             <a:picLocks noChangeAspect="1"/>
           </p:cNvPicPr>
@@ -8929,7 +9509,7 @@
       </p:pic>
       <p:pic>
         <p:nvPicPr>
-          <p:cNvPr id="3" name="Image 1" descr="C:\Users\student\Documents\Academy Repo\Curso Harness\Novela Ciencia Ficción\My-Story-Marker\presentacion\build\img2\logo-white.png">    </p:cNvPr>
+          <p:cNvPr id="3" name="Image 1" descr="/home/user/My-Story-Marker/presentacion/build/img2/logo-white.png">    </p:cNvPr>
           <p:cNvPicPr>
             <a:picLocks noChangeAspect="1"/>
           </p:cNvPicPr>
@@ -9336,7 +9916,7 @@
       </p:grpSpPr>
       <p:pic>
         <p:nvPicPr>
-          <p:cNvPr id="2" name="Image 0" descr="C:\Users\student\Documents\Academy Repo\Curso Harness\Novela Ciencia Ficción\My-Story-Marker\presentacion\build\img2\mark.png">    </p:cNvPr>
+          <p:cNvPr id="2" name="Image 0" descr="/home/user/My-Story-Marker/presentacion/build/img2/mark.png">    </p:cNvPr>
           <p:cNvPicPr>
             <a:picLocks noChangeAspect="1"/>
           </p:cNvPicPr>
@@ -9438,7 +10018,7 @@
       </p:sp>
       <p:pic>
         <p:nvPicPr>
-          <p:cNvPr id="5" name="Image 1" descr="C:\Users\student\Documents\Academy Repo\Curso Harness\Novela Ciencia Ficción\My-Story-Marker\presentacion\build\img2\logo.png">    </p:cNvPr>
+          <p:cNvPr id="5" name="Image 1" descr="/home/user/My-Story-Marker/presentacion/build/img2/logo.png">    </p:cNvPr>
           <p:cNvPicPr>
             <a:picLocks noChangeAspect="1"/>
           </p:cNvPicPr>
@@ -16745,7 +17325,7 @@
       </p:grpSpPr>
       <p:pic>
         <p:nvPicPr>
-          <p:cNvPr id="2" name="Image 0" descr="C:\Users\student\Documents\Academy Repo\Curso Harness\Novela Ciencia Ficción\My-Story-Marker\presentacion\build\img2\mark.png">    </p:cNvPr>
+          <p:cNvPr id="2" name="Image 0" descr="/home/user/My-Story-Marker/presentacion/build/img2/mark.png">    </p:cNvPr>
           <p:cNvPicPr>
             <a:picLocks noChangeAspect="1"/>
           </p:cNvPicPr>
@@ -16847,7 +17427,7 @@
       </p:sp>
       <p:pic>
         <p:nvPicPr>
-          <p:cNvPr id="5" name="Image 1" descr="C:\Users\student\Documents\Academy Repo\Curso Harness\Novela Ciencia Ficción\My-Story-Marker\presentacion\build\img2\logo.png">    </p:cNvPr>
+          <p:cNvPr id="5" name="Image 1" descr="/home/user/My-Story-Marker/presentacion/build/img2/logo.png">    </p:cNvPr>
           <p:cNvPicPr>
             <a:picLocks noChangeAspect="1"/>
           </p:cNvPicPr>
@@ -18238,7 +18818,7 @@
       </p:grpSpPr>
       <p:pic>
         <p:nvPicPr>
-          <p:cNvPr id="2" name="Image 0" descr="C:\Users\student\Documents\Academy Repo\Curso Harness\Novela Ciencia Ficción\My-Story-Marker\presentacion\build\img2\mark.png">    </p:cNvPr>
+          <p:cNvPr id="2" name="Image 0" descr="/home/user/My-Story-Marker/presentacion/build/img2/mark.png">    </p:cNvPr>
           <p:cNvPicPr>
             <a:picLocks noChangeAspect="1"/>
           </p:cNvPicPr>
@@ -18340,7 +18920,7 @@
       </p:sp>
       <p:pic>
         <p:nvPicPr>
-          <p:cNvPr id="5" name="Image 1" descr="C:\Users\student\Documents\Academy Repo\Curso Harness\Novela Ciencia Ficción\My-Story-Marker\presentacion\build\img2\logo.png">    </p:cNvPr>
+          <p:cNvPr id="5" name="Image 1" descr="/home/user/My-Story-Marker/presentacion/build/img2/logo.png">    </p:cNvPr>
           <p:cNvPicPr>
             <a:picLocks noChangeAspect="1"/>
           </p:cNvPicPr>
@@ -18476,7 +19056,7 @@
       </p:sp>
       <p:pic>
         <p:nvPicPr>
-          <p:cNvPr id="9" name="Image 2" descr="C:\Users\student\Documents\Academy Repo\Curso Harness\Novela Ciencia Ficción\My-Story-Marker\presentacion\build\img2\crops\wizard.png">    </p:cNvPr>
+          <p:cNvPr id="9" name="Image 2" descr="/home/user/My-Story-Marker/presentacion/build/img2/crops/wizard.png">    </p:cNvPr>
           <p:cNvPicPr>
             <a:picLocks noChangeAspect="1"/>
           </p:cNvPicPr>
@@ -18673,7 +19253,7 @@
       </p:sp>
       <p:pic>
         <p:nvPicPr>
-          <p:cNvPr id="15" name="Image 3" descr="C:\Users\student\Documents\Academy Repo\Curso Harness\Novela Ciencia Ficción\My-Story-Marker\presentacion\build\img2\crops\reader.png">    </p:cNvPr>
+          <p:cNvPr id="15" name="Image 3" descr="/home/user/My-Story-Marker/presentacion/build/img2/crops/reader.png">    </p:cNvPr>
           <p:cNvPicPr>
             <a:picLocks noChangeAspect="1"/>
           </p:cNvPicPr>
@@ -18870,7 +19450,7 @@
       </p:sp>
       <p:pic>
         <p:nvPicPr>
-          <p:cNvPr id="21" name="Image 4" descr="C:\Users\student\Documents\Academy Repo\Curso Harness\Novela Ciencia Ficción\My-Story-Marker\presentacion\build\img2\crops\v2n.png">    </p:cNvPr>
+          <p:cNvPr id="21" name="Image 4" descr="/home/user/My-Story-Marker/presentacion/build/img2/crops/v2n.png">    </p:cNvPr>
           <p:cNvPicPr>
             <a:picLocks noChangeAspect="1"/>
           </p:cNvPicPr>
@@ -19104,7 +19684,7 @@
       </p:grpSpPr>
       <p:pic>
         <p:nvPicPr>
-          <p:cNvPr id="2" name="Image 0" descr="C:\Users\student\Documents\Academy Repo\Curso Harness\Novela Ciencia Ficción\My-Story-Marker\presentacion\build\img2\mark.png">    </p:cNvPr>
+          <p:cNvPr id="2" name="Image 0" descr="/home/user/My-Story-Marker/presentacion/build/img2/mark.png">    </p:cNvPr>
           <p:cNvPicPr>
             <a:picLocks noChangeAspect="1"/>
           </p:cNvPicPr>
@@ -19206,7 +19786,7 @@
       </p:sp>
       <p:pic>
         <p:nvPicPr>
-          <p:cNvPr id="5" name="Image 1" descr="C:\Users\student\Documents\Academy Repo\Curso Harness\Novela Ciencia Ficción\My-Story-Marker\presentacion\build\img2\logo.png">    </p:cNvPr>
+          <p:cNvPr id="5" name="Image 1" descr="/home/user/My-Story-Marker/presentacion/build/img2/logo.png">    </p:cNvPr>
           <p:cNvPicPr>
             <a:picLocks noChangeAspect="1"/>
           </p:cNvPicPr>
@@ -20960,7 +21540,7 @@
       </p:grpSpPr>
       <p:pic>
         <p:nvPicPr>
-          <p:cNvPr id="2" name="Image 0" descr="C:\Users\student\Documents\Academy Repo\Curso Harness\Novela Ciencia Ficción\My-Story-Marker\presentacion\build\img2\mark.png">    </p:cNvPr>
+          <p:cNvPr id="2" name="Image 0" descr="/home/user/My-Story-Marker/presentacion/build/img2/mark.png">    </p:cNvPr>
           <p:cNvPicPr>
             <a:picLocks noChangeAspect="1"/>
           </p:cNvPicPr>
@@ -21062,7 +21642,7 @@
       </p:sp>
       <p:pic>
         <p:nvPicPr>
-          <p:cNvPr id="5" name="Image 1" descr="C:\Users\student\Documents\Academy Repo\Curso Harness\Novela Ciencia Ficción\My-Story-Marker\presentacion\build\img2\logo.png">    </p:cNvPr>
+          <p:cNvPr id="5" name="Image 1" descr="/home/user/My-Story-Marker/presentacion/build/img2/logo.png">    </p:cNvPr>
           <p:cNvPicPr>
             <a:picLocks noChangeAspect="1"/>
           </p:cNvPicPr>
@@ -22213,7 +22793,7 @@
       </p:grpSpPr>
       <p:pic>
         <p:nvPicPr>
-          <p:cNvPr id="2" name="Image 0" descr="C:\Users\student\Documents\Academy Repo\Curso Harness\Novela Ciencia Ficción\My-Story-Marker\presentacion\build\img2\mark.png">    </p:cNvPr>
+          <p:cNvPr id="2" name="Image 0" descr="/home/user/My-Story-Marker/presentacion/build/img2/mark.png">    </p:cNvPr>
           <p:cNvPicPr>
             <a:picLocks noChangeAspect="1"/>
           </p:cNvPicPr>
@@ -22315,7 +22895,7 @@
       </p:sp>
       <p:pic>
         <p:nvPicPr>
-          <p:cNvPr id="5" name="Image 1" descr="C:\Users\student\Documents\Academy Repo\Curso Harness\Novela Ciencia Ficción\My-Story-Marker\presentacion\build\img2\logo.png">    </p:cNvPr>
+          <p:cNvPr id="5" name="Image 1" descr="/home/user/My-Story-Marker/presentacion/build/img2/logo.png">    </p:cNvPr>
           <p:cNvPicPr>
             <a:picLocks noChangeAspect="1"/>
           </p:cNvPicPr>
@@ -24132,7 +24712,7 @@
       </p:grpSpPr>
       <p:pic>
         <p:nvPicPr>
-          <p:cNvPr id="2" name="Image 0" descr="C:\Users\student\Documents\Academy Repo\Curso Harness\Novela Ciencia Ficción\My-Story-Marker\presentacion\build\img2\mark.png">    </p:cNvPr>
+          <p:cNvPr id="2" name="Image 0" descr="/home/user/My-Story-Marker/presentacion/build/img2/mark.png">    </p:cNvPr>
           <p:cNvPicPr>
             <a:picLocks noChangeAspect="1"/>
           </p:cNvPicPr>
@@ -24234,7 +24814,7 @@
       </p:sp>
       <p:pic>
         <p:nvPicPr>
-          <p:cNvPr id="5" name="Image 1" descr="C:\Users\student\Documents\Academy Repo\Curso Harness\Novela Ciencia Ficción\My-Story-Marker\presentacion\build\img2\logo.png">    </p:cNvPr>
+          <p:cNvPr id="5" name="Image 1" descr="/home/user/My-Story-Marker/presentacion/build/img2/logo.png">    </p:cNvPr>
           <p:cNvPicPr>
             <a:picLocks noChangeAspect="1"/>
           </p:cNvPicPr>
@@ -26552,7 +27132,7 @@
       </p:grpSpPr>
       <p:pic>
         <p:nvPicPr>
-          <p:cNvPr id="2" name="Image 0" descr="C:\Users\student\Documents\Academy Repo\Curso Harness\Novela Ciencia Ficción\My-Story-Marker\presentacion\build\img2\mark.png">    </p:cNvPr>
+          <p:cNvPr id="2" name="Image 0" descr="/home/user/My-Story-Marker/presentacion/build/img2/mark.png">    </p:cNvPr>
           <p:cNvPicPr>
             <a:picLocks noChangeAspect="1"/>
           </p:cNvPicPr>
@@ -26654,7 +27234,7 @@
       </p:sp>
       <p:pic>
         <p:nvPicPr>
-          <p:cNvPr id="5" name="Image 1" descr="C:\Users\student\Documents\Academy Repo\Curso Harness\Novela Ciencia Ficción\My-Story-Marker\presentacion\build\img2\logo.png">    </p:cNvPr>
+          <p:cNvPr id="5" name="Image 1" descr="/home/user/My-Story-Marker/presentacion/build/img2/logo.png">    </p:cNvPr>
           <p:cNvPicPr>
             <a:picLocks noChangeAspect="1"/>
           </p:cNvPicPr>
@@ -28697,7 +29277,7 @@
       </p:grpSpPr>
       <p:pic>
         <p:nvPicPr>
-          <p:cNvPr id="2" name="Image 0" descr="C:\Users\student\Documents\Academy Repo\Curso Harness\Novela Ciencia Ficción\My-Story-Marker\presentacion\build\img2\mark.png">    </p:cNvPr>
+          <p:cNvPr id="2" name="Image 0" descr="/home/user/My-Story-Marker/presentacion/build/img2/mark.png">    </p:cNvPr>
           <p:cNvPicPr>
             <a:picLocks noChangeAspect="1"/>
           </p:cNvPicPr>
@@ -28799,7 +29379,7 @@
       </p:sp>
       <p:pic>
         <p:nvPicPr>
-          <p:cNvPr id="5" name="Image 1" descr="C:\Users\student\Documents\Academy Repo\Curso Harness\Novela Ciencia Ficción\My-Story-Marker\presentacion\build\img2\logo.png">    </p:cNvPr>
+          <p:cNvPr id="5" name="Image 1" descr="/home/user/My-Story-Marker/presentacion/build/img2/logo.png">    </p:cNvPr>
           <p:cNvPicPr>
             <a:picLocks noChangeAspect="1"/>
           </p:cNvPicPr>

--- a/presentacion/presentacion-2.pptx
+++ b/presentacion/presentacion-2.pptx
@@ -2035,7 +2035,7 @@
           <a:p>
             <a:r>
               <a:rPr lang="en-US" dirty="0"/>
-              <a:t>[6:00–6:30] Así se ve una novela en Langfuse: una sesión por novela, una traza por generación, spans por fase, por capítulo, por rol y por tool, con tokens, coste y latencia. Esta es la del brief con inyección: 19 llamadas, 1,02 USD, unos 24 minutos.
+              <a:t>[6:00–6:30] Así se ve una novela en Langfuse, captura real: una sesión por novela, una traza por generación, spans por fase, por capítulo, por rol y por tool, con tokens, coste y latencia. La captura es una novela de un capítulo lanzada desde la página Nueva novela: 9 minutos 42 segundos, 0,43 USD. A la derecha, los scores del brief con inyección: 19 llamadas, 1,02 USD, unos 24 minutos.
 Cada validador llega como score: aquí se ve la inyección marcada dos veces, por el prescan y por el modelo, y aun así todos los validadores en verde: no se siguió.
 Y los prompts están versionados: sabemos qué versión produjo cada resultado, que es lo que hace creíble el antes y el después del tuning.</a:t>
             </a:r>
@@ -29371,7 +29371,7 @@
                 <a:ea typeface="Arial" pitchFamily="34" charset="-122"/>
                 <a:cs typeface="Arial" pitchFamily="34" charset="-120"/>
               </a:rPr>
-              <a:t>Una traza real del brief de inyección</a:t>
+              <a:t>Una traza real en Langfuse</a:t>
             </a:r>
             <a:endParaRPr lang="en-US" sz="2300" dirty="0"/>
           </a:p>
@@ -29488,75 +29488,77 @@
         <p:spPr>
           <a:xfrm>
             <a:off x="457200" y="1188720"/>
-            <a:ext cx="5120640" cy="3401568"/>
+            <a:ext cx="4800600" cy="3148385"/>
           </a:xfrm>
           <a:prstGeom prst="roundRect">
             <a:avLst>
-              <a:gd name="adj" fmla="val 2151"/>
+              <a:gd name="adj" fmla="val 2323"/>
             </a:avLst>
           </a:prstGeom>
           <a:solidFill>
-            <a:srgbClr val="1E2B37"/>
+            <a:srgbClr val="FFFFFF"/>
           </a:solidFill>
           <a:ln/>
         </p:spPr>
       </p:sp>
-      <p:sp>
-        <p:nvSpPr>
-          <p:cNvPr id="9" name="Shape 5"/>
-          <p:cNvSpPr/>
-          <p:nvPr/>
-        </p:nvSpPr>
-        <p:spPr>
-          <a:xfrm>
-            <a:off x="594360" y="1335024"/>
-            <a:ext cx="566928" cy="219456"/>
-          </a:xfrm>
-          <a:prstGeom prst="roundRect">
-            <a:avLst>
-              <a:gd name="adj" fmla="val 50000"/>
-            </a:avLst>
-          </a:prstGeom>
-          <a:solidFill>
-            <a:srgbClr val="FF7A2F"/>
-          </a:solidFill>
-          <a:ln/>
-        </p:spPr>
-      </p:sp>
-      <p:sp>
-        <p:nvSpPr>
-          <p:cNvPr id="10" name="Text 6"/>
+      <p:pic>
+        <p:nvPicPr>
+          <p:cNvPr id="9" name="Image 2" descr="/home/user/My-Story-Marker/presentacion/build/img2/langfuse-trace.png">    </p:cNvPr>
+          <p:cNvPicPr>
+            <a:picLocks noChangeAspect="1"/>
+          </p:cNvPicPr>
+          <p:nvPr/>
+        </p:nvPicPr>
+        <p:blipFill>
+          <a:blip r:embed="rId3"/>
+          <a:stretch>
+            <a:fillRect/>
+          </a:stretch>
+        </p:blipFill>
+        <p:spPr>
+          <a:xfrm>
+            <a:off x="493776" y="1225296"/>
+            <a:ext cx="4727448" cy="3075233"/>
+          </a:xfrm>
+          <a:prstGeom prst="rect">
+            <a:avLst/>
+          </a:prstGeom>
+        </p:spPr>
+      </p:pic>
+      <p:sp>
+        <p:nvSpPr>
+          <p:cNvPr id="10" name="Text 5"/>
           <p:cNvSpPr txBox="1"/>
           <p:nvPr/>
         </p:nvSpPr>
         <p:spPr>
           <a:xfrm>
-            <a:off x="640080" y="1335024"/>
-            <a:ext cx="475488" cy="219456"/>
-          </a:xfrm>
-          <a:prstGeom prst="rect">
-            <a:avLst/>
-          </a:prstGeom>
-          <a:noFill/>
-          <a:ln/>
-        </p:spPr>
-        <p:txBody>
-          <a:bodyPr wrap="square" lIns="0" tIns="0" rIns="0" bIns="0" rtlCol="0" anchor="ctr"/>
-          <a:lstStyle/>
-          <a:p>
-            <a:pPr algn="ctr" indent="0" marL="0">
+            <a:off x="457200" y="4391969"/>
+            <a:ext cx="4800600" cy="182880"/>
+          </a:xfrm>
+          <a:prstGeom prst="rect">
+            <a:avLst/>
+          </a:prstGeom>
+          <a:noFill/>
+          <a:ln/>
+        </p:spPr>
+        <p:txBody>
+          <a:bodyPr wrap="square" lIns="0" tIns="0" rIns="0" bIns="0" rtlCol="0" anchor="t"/>
+          <a:lstStyle/>
+          <a:p>
+            <a:pPr indent="0" marL="0">
               <a:buNone/>
             </a:pPr>
             <a:r>
-              <a:rPr lang="en-US" sz="700" b="1" dirty="0">
+              <a:rPr lang="en-US" sz="700" i="1" dirty="0">
                 <a:solidFill>
-                  <a:srgbClr val="FFFFFF"/>
+                  <a:srgbClr val="5E6A77"/>
                 </a:solidFill>
                 <a:latin typeface="Arial" pitchFamily="34" charset="0"/>
                 <a:ea typeface="Arial" pitchFamily="34" charset="-122"/>
                 <a:cs typeface="Arial" pitchFamily="34" charset="-120"/>
               </a:rPr>
-              <a:t>session</a:t>
+              <a:t>Captura real de Langfuse: spans por fase, capítulo, rol, tool y validador. 9 min 42 s · 0,43 USD · 155.212 tokens.</a:t>
             </a:r>
             <a:endParaRPr lang="en-US" sz="700" dirty="0"/>
           </a:p>
@@ -29564,1058 +29566,7 @@
       </p:sp>
       <p:sp>
         <p:nvSpPr>
-          <p:cNvPr id="11" name="Text 7"/>
-          <p:cNvSpPr txBox="1"/>
-          <p:nvPr/>
-        </p:nvSpPr>
-        <p:spPr>
-          <a:xfrm>
-            <a:off x="1234440" y="1298448"/>
-            <a:ext cx="4297680" cy="182880"/>
-          </a:xfrm>
-          <a:prstGeom prst="rect">
-            <a:avLst/>
-          </a:prstGeom>
-          <a:noFill/>
-          <a:ln/>
-        </p:spPr>
-        <p:txBody>
-          <a:bodyPr wrap="square" lIns="0" tIns="0" rIns="0" bIns="0" rtlCol="0" anchor="t"/>
-          <a:lstStyle/>
-          <a:p>
-            <a:pPr indent="0" marL="0">
-              <a:buNone/>
-            </a:pPr>
-            <a:r>
-              <a:rPr lang="en-US" sz="850" b="1" dirty="0">
-                <a:solidFill>
-                  <a:srgbClr val="FFFFFF"/>
-                </a:solidFill>
-                <a:latin typeface="Courier New" pitchFamily="34" charset="0"/>
-                <a:ea typeface="Courier New" pitchFamily="34" charset="-122"/>
-                <a:cs typeface="Courier New" pitchFamily="34" charset="-120"/>
-              </a:rPr>
-              <a:t>eval-after-b3-injection</a:t>
-            </a:r>
-            <a:endParaRPr lang="en-US" sz="850" dirty="0"/>
-          </a:p>
-        </p:txBody>
-      </p:sp>
-      <p:sp>
-        <p:nvSpPr>
-          <p:cNvPr id="12" name="Text 8"/>
-          <p:cNvSpPr txBox="1"/>
-          <p:nvPr/>
-        </p:nvSpPr>
-        <p:spPr>
-          <a:xfrm>
-            <a:off x="1234440" y="1481328"/>
-            <a:ext cx="4297680" cy="164592"/>
-          </a:xfrm>
-          <a:prstGeom prst="rect">
-            <a:avLst/>
-          </a:prstGeom>
-          <a:noFill/>
-          <a:ln/>
-        </p:spPr>
-        <p:txBody>
-          <a:bodyPr wrap="square" lIns="0" tIns="0" rIns="0" bIns="0" rtlCol="0" anchor="t"/>
-          <a:lstStyle/>
-          <a:p>
-            <a:pPr indent="0" marL="0">
-              <a:buNone/>
-            </a:pPr>
-            <a:r>
-              <a:rPr lang="en-US" sz="750" dirty="0">
-                <a:solidFill>
-                  <a:srgbClr val="AEB8C2"/>
-                </a:solidFill>
-                <a:latin typeface="Arial" pitchFamily="34" charset="0"/>
-                <a:ea typeface="Arial" pitchFamily="34" charset="-122"/>
-                <a:cs typeface="Arial" pitchFamily="34" charset="-120"/>
-              </a:rPr>
-              <a:t>una por novela</a:t>
-            </a:r>
-            <a:endParaRPr lang="en-US" sz="750" dirty="0"/>
-          </a:p>
-        </p:txBody>
-      </p:sp>
-      <p:sp>
-        <p:nvSpPr>
-          <p:cNvPr id="13" name="Shape 9"/>
-          <p:cNvSpPr/>
-          <p:nvPr/>
-        </p:nvSpPr>
-        <p:spPr>
-          <a:xfrm>
-            <a:off x="868680" y="1737360"/>
-            <a:ext cx="566928" cy="219456"/>
-          </a:xfrm>
-          <a:prstGeom prst="roundRect">
-            <a:avLst>
-              <a:gd name="adj" fmla="val 50000"/>
-            </a:avLst>
-          </a:prstGeom>
-          <a:solidFill>
-            <a:srgbClr val="FF7A2F"/>
-          </a:solidFill>
-          <a:ln/>
-        </p:spPr>
-      </p:sp>
-      <p:sp>
-        <p:nvSpPr>
-          <p:cNvPr id="14" name="Text 10"/>
-          <p:cNvSpPr txBox="1"/>
-          <p:nvPr/>
-        </p:nvSpPr>
-        <p:spPr>
-          <a:xfrm>
-            <a:off x="914400" y="1737360"/>
-            <a:ext cx="475488" cy="219456"/>
-          </a:xfrm>
-          <a:prstGeom prst="rect">
-            <a:avLst/>
-          </a:prstGeom>
-          <a:noFill/>
-          <a:ln/>
-        </p:spPr>
-        <p:txBody>
-          <a:bodyPr wrap="square" lIns="0" tIns="0" rIns="0" bIns="0" rtlCol="0" anchor="ctr"/>
-          <a:lstStyle/>
-          <a:p>
-            <a:pPr algn="ctr" indent="0" marL="0">
-              <a:buNone/>
-            </a:pPr>
-            <a:r>
-              <a:rPr lang="en-US" sz="700" b="1" dirty="0">
-                <a:solidFill>
-                  <a:srgbClr val="FFFFFF"/>
-                </a:solidFill>
-                <a:latin typeface="Arial" pitchFamily="34" charset="0"/>
-                <a:ea typeface="Arial" pitchFamily="34" charset="-122"/>
-                <a:cs typeface="Arial" pitchFamily="34" charset="-120"/>
-              </a:rPr>
-              <a:t>trace</a:t>
-            </a:r>
-            <a:endParaRPr lang="en-US" sz="700" dirty="0"/>
-          </a:p>
-        </p:txBody>
-      </p:sp>
-      <p:sp>
-        <p:nvSpPr>
-          <p:cNvPr id="15" name="Text 11"/>
-          <p:cNvSpPr txBox="1"/>
-          <p:nvPr/>
-        </p:nvSpPr>
-        <p:spPr>
-          <a:xfrm>
-            <a:off x="1508760" y="1700784"/>
-            <a:ext cx="4023360" cy="182880"/>
-          </a:xfrm>
-          <a:prstGeom prst="rect">
-            <a:avLst/>
-          </a:prstGeom>
-          <a:noFill/>
-          <a:ln/>
-        </p:spPr>
-        <p:txBody>
-          <a:bodyPr wrap="square" lIns="0" tIns="0" rIns="0" bIns="0" rtlCol="0" anchor="t"/>
-          <a:lstStyle/>
-          <a:p>
-            <a:pPr indent="0" marL="0">
-              <a:buNone/>
-            </a:pPr>
-            <a:r>
-              <a:rPr lang="en-US" sz="850" b="1" dirty="0">
-                <a:solidFill>
-                  <a:srgbClr val="FFFFFF"/>
-                </a:solidFill>
-                <a:latin typeface="Courier New" pitchFamily="34" charset="0"/>
-                <a:ea typeface="Courier New" pitchFamily="34" charset="-122"/>
-                <a:cs typeface="Courier New" pitchFamily="34" charset="-120"/>
-              </a:rPr>
-              <a:t>generate</a:t>
-            </a:r>
-            <a:endParaRPr lang="en-US" sz="850" dirty="0"/>
-          </a:p>
-        </p:txBody>
-      </p:sp>
-      <p:sp>
-        <p:nvSpPr>
-          <p:cNvPr id="16" name="Text 12"/>
-          <p:cNvSpPr txBox="1"/>
-          <p:nvPr/>
-        </p:nvSpPr>
-        <p:spPr>
-          <a:xfrm>
-            <a:off x="1508760" y="1883664"/>
-            <a:ext cx="4023360" cy="164592"/>
-          </a:xfrm>
-          <a:prstGeom prst="rect">
-            <a:avLst/>
-          </a:prstGeom>
-          <a:noFill/>
-          <a:ln/>
-        </p:spPr>
-        <p:txBody>
-          <a:bodyPr wrap="square" lIns="0" tIns="0" rIns="0" bIns="0" rtlCol="0" anchor="t"/>
-          <a:lstStyle/>
-          <a:p>
-            <a:pPr indent="0" marL="0">
-              <a:buNone/>
-            </a:pPr>
-            <a:r>
-              <a:rPr lang="en-US" sz="750" dirty="0">
-                <a:solidFill>
-                  <a:srgbClr val="AEB8C2"/>
-                </a:solidFill>
-                <a:latin typeface="Arial" pitchFamily="34" charset="0"/>
-                <a:ea typeface="Arial" pitchFamily="34" charset="-122"/>
-                <a:cs typeface="Arial" pitchFamily="34" charset="-120"/>
-              </a:rPr>
-              <a:t>19 llamadas · 1,02 USD · 1466 s</a:t>
-            </a:r>
-            <a:endParaRPr lang="en-US" sz="750" dirty="0"/>
-          </a:p>
-        </p:txBody>
-      </p:sp>
-      <p:sp>
-        <p:nvSpPr>
-          <p:cNvPr id="17" name="Shape 13"/>
-          <p:cNvSpPr/>
-          <p:nvPr/>
-        </p:nvSpPr>
-        <p:spPr>
-          <a:xfrm>
-            <a:off x="1143000" y="2139696"/>
-            <a:ext cx="566928" cy="219456"/>
-          </a:xfrm>
-          <a:prstGeom prst="roundRect">
-            <a:avLst>
-              <a:gd name="adj" fmla="val 50000"/>
-            </a:avLst>
-          </a:prstGeom>
-          <a:solidFill>
-            <a:srgbClr val="2A3B4A"/>
-          </a:solidFill>
-          <a:ln/>
-        </p:spPr>
-      </p:sp>
-      <p:sp>
-        <p:nvSpPr>
-          <p:cNvPr id="18" name="Text 14"/>
-          <p:cNvSpPr txBox="1"/>
-          <p:nvPr/>
-        </p:nvSpPr>
-        <p:spPr>
-          <a:xfrm>
-            <a:off x="1188720" y="2139696"/>
-            <a:ext cx="475488" cy="219456"/>
-          </a:xfrm>
-          <a:prstGeom prst="rect">
-            <a:avLst/>
-          </a:prstGeom>
-          <a:noFill/>
-          <a:ln/>
-        </p:spPr>
-        <p:txBody>
-          <a:bodyPr wrap="square" lIns="0" tIns="0" rIns="0" bIns="0" rtlCol="0" anchor="ctr"/>
-          <a:lstStyle/>
-          <a:p>
-            <a:pPr algn="ctr" indent="0" marL="0">
-              <a:buNone/>
-            </a:pPr>
-            <a:r>
-              <a:rPr lang="en-US" sz="700" b="1" dirty="0">
-                <a:solidFill>
-                  <a:srgbClr val="FFFFFF"/>
-                </a:solidFill>
-                <a:latin typeface="Arial" pitchFamily="34" charset="0"/>
-                <a:ea typeface="Arial" pitchFamily="34" charset="-122"/>
-                <a:cs typeface="Arial" pitchFamily="34" charset="-120"/>
-              </a:rPr>
-              <a:t>span</a:t>
-            </a:r>
-            <a:endParaRPr lang="en-US" sz="700" dirty="0"/>
-          </a:p>
-        </p:txBody>
-      </p:sp>
-      <p:sp>
-        <p:nvSpPr>
-          <p:cNvPr id="19" name="Text 15"/>
-          <p:cNvSpPr txBox="1"/>
-          <p:nvPr/>
-        </p:nvSpPr>
-        <p:spPr>
-          <a:xfrm>
-            <a:off x="1783080" y="2103120"/>
-            <a:ext cx="3749040" cy="182880"/>
-          </a:xfrm>
-          <a:prstGeom prst="rect">
-            <a:avLst/>
-          </a:prstGeom>
-          <a:noFill/>
-          <a:ln/>
-        </p:spPr>
-        <p:txBody>
-          <a:bodyPr wrap="square" lIns="0" tIns="0" rIns="0" bIns="0" rtlCol="0" anchor="t"/>
-          <a:lstStyle/>
-          <a:p>
-            <a:pPr indent="0" marL="0">
-              <a:buNone/>
-            </a:pPr>
-            <a:r>
-              <a:rPr lang="en-US" sz="850" b="1" dirty="0">
-                <a:solidFill>
-                  <a:srgbClr val="FFFFFF"/>
-                </a:solidFill>
-                <a:latin typeface="Courier New" pitchFamily="34" charset="0"/>
-                <a:ea typeface="Courier New" pitchFamily="34" charset="-122"/>
-                <a:cs typeface="Courier New" pitchFamily="34" charset="-120"/>
-              </a:rPr>
-              <a:t>phase:plan · role:interviewer, role:planner</a:t>
-            </a:r>
-            <a:endParaRPr lang="en-US" sz="850" dirty="0"/>
-          </a:p>
-        </p:txBody>
-      </p:sp>
-      <p:sp>
-        <p:nvSpPr>
-          <p:cNvPr id="20" name="Text 16"/>
-          <p:cNvSpPr txBox="1"/>
-          <p:nvPr/>
-        </p:nvSpPr>
-        <p:spPr>
-          <a:xfrm>
-            <a:off x="1783080" y="2286000"/>
-            <a:ext cx="3749040" cy="164592"/>
-          </a:xfrm>
-          <a:prstGeom prst="rect">
-            <a:avLst/>
-          </a:prstGeom>
-          <a:noFill/>
-          <a:ln/>
-        </p:spPr>
-        <p:txBody>
-          <a:bodyPr wrap="square" lIns="0" tIns="0" rIns="0" bIns="0" rtlCol="0" anchor="t"/>
-          <a:lstStyle/>
-          <a:p>
-            <a:pPr indent="0" marL="0">
-              <a:buNone/>
-            </a:pPr>
-            <a:r>
-              <a:rPr lang="en-US" sz="750" dirty="0">
-                <a:solidFill>
-                  <a:srgbClr val="AEB8C2"/>
-                </a:solidFill>
-                <a:latin typeface="Arial" pitchFamily="34" charset="0"/>
-                <a:ea typeface="Arial" pitchFamily="34" charset="-122"/>
-                <a:cs typeface="Arial" pitchFamily="34" charset="-120"/>
-              </a:rPr>
-              <a:t>3 llamadas · 0,23 USD</a:t>
-            </a:r>
-            <a:endParaRPr lang="en-US" sz="750" dirty="0"/>
-          </a:p>
-        </p:txBody>
-      </p:sp>
-      <p:sp>
-        <p:nvSpPr>
-          <p:cNvPr id="21" name="Shape 17"/>
-          <p:cNvSpPr/>
-          <p:nvPr/>
-        </p:nvSpPr>
-        <p:spPr>
-          <a:xfrm>
-            <a:off x="1143000" y="2542032"/>
-            <a:ext cx="566928" cy="219456"/>
-          </a:xfrm>
-          <a:prstGeom prst="roundRect">
-            <a:avLst>
-              <a:gd name="adj" fmla="val 50000"/>
-            </a:avLst>
-          </a:prstGeom>
-          <a:solidFill>
-            <a:srgbClr val="2A3B4A"/>
-          </a:solidFill>
-          <a:ln/>
-        </p:spPr>
-      </p:sp>
-      <p:sp>
-        <p:nvSpPr>
-          <p:cNvPr id="22" name="Text 18"/>
-          <p:cNvSpPr txBox="1"/>
-          <p:nvPr/>
-        </p:nvSpPr>
-        <p:spPr>
-          <a:xfrm>
-            <a:off x="1188720" y="2542032"/>
-            <a:ext cx="475488" cy="219456"/>
-          </a:xfrm>
-          <a:prstGeom prst="rect">
-            <a:avLst/>
-          </a:prstGeom>
-          <a:noFill/>
-          <a:ln/>
-        </p:spPr>
-        <p:txBody>
-          <a:bodyPr wrap="square" lIns="0" tIns="0" rIns="0" bIns="0" rtlCol="0" anchor="ctr"/>
-          <a:lstStyle/>
-          <a:p>
-            <a:pPr algn="ctr" indent="0" marL="0">
-              <a:buNone/>
-            </a:pPr>
-            <a:r>
-              <a:rPr lang="en-US" sz="700" b="1" dirty="0">
-                <a:solidFill>
-                  <a:srgbClr val="FFFFFF"/>
-                </a:solidFill>
-                <a:latin typeface="Arial" pitchFamily="34" charset="0"/>
-                <a:ea typeface="Arial" pitchFamily="34" charset="-122"/>
-                <a:cs typeface="Arial" pitchFamily="34" charset="-120"/>
-              </a:rPr>
-              <a:t>span</a:t>
-            </a:r>
-            <a:endParaRPr lang="en-US" sz="700" dirty="0"/>
-          </a:p>
-        </p:txBody>
-      </p:sp>
-      <p:sp>
-        <p:nvSpPr>
-          <p:cNvPr id="23" name="Text 19"/>
-          <p:cNvSpPr txBox="1"/>
-          <p:nvPr/>
-        </p:nvSpPr>
-        <p:spPr>
-          <a:xfrm>
-            <a:off x="1783080" y="2505456"/>
-            <a:ext cx="3749040" cy="182880"/>
-          </a:xfrm>
-          <a:prstGeom prst="rect">
-            <a:avLst/>
-          </a:prstGeom>
-          <a:noFill/>
-          <a:ln/>
-        </p:spPr>
-        <p:txBody>
-          <a:bodyPr wrap="square" lIns="0" tIns="0" rIns="0" bIns="0" rtlCol="0" anchor="t"/>
-          <a:lstStyle/>
-          <a:p>
-            <a:pPr indent="0" marL="0">
-              <a:buNone/>
-            </a:pPr>
-            <a:r>
-              <a:rPr lang="en-US" sz="850" b="1" dirty="0">
-                <a:solidFill>
-                  <a:srgbClr val="FFFFFF"/>
-                </a:solidFill>
-                <a:latin typeface="Courier New" pitchFamily="34" charset="0"/>
-                <a:ea typeface="Courier New" pitchFamily="34" charset="-122"/>
-                <a:cs typeface="Courier New" pitchFamily="34" charset="-120"/>
-              </a:rPr>
-              <a:t>chapter:1 · role:writer ×3, editor, judge</a:t>
-            </a:r>
-            <a:endParaRPr lang="en-US" sz="850" dirty="0"/>
-          </a:p>
-        </p:txBody>
-      </p:sp>
-      <p:sp>
-        <p:nvSpPr>
-          <p:cNvPr id="24" name="Text 20"/>
-          <p:cNvSpPr txBox="1"/>
-          <p:nvPr/>
-        </p:nvSpPr>
-        <p:spPr>
-          <a:xfrm>
-            <a:off x="1783080" y="2688336"/>
-            <a:ext cx="3749040" cy="164592"/>
-          </a:xfrm>
-          <a:prstGeom prst="rect">
-            <a:avLst/>
-          </a:prstGeom>
-          <a:noFill/>
-          <a:ln/>
-        </p:spPr>
-        <p:txBody>
-          <a:bodyPr wrap="square" lIns="0" tIns="0" rIns="0" bIns="0" rtlCol="0" anchor="t"/>
-          <a:lstStyle/>
-          <a:p>
-            <a:pPr indent="0" marL="0">
-              <a:buNone/>
-            </a:pPr>
-            <a:r>
-              <a:rPr lang="en-US" sz="750" dirty="0">
-                <a:solidFill>
-                  <a:srgbClr val="AEB8C2"/>
-                </a:solidFill>
-                <a:latin typeface="Arial" pitchFamily="34" charset="0"/>
-                <a:ea typeface="Arial" pitchFamily="34" charset="-122"/>
-                <a:cs typeface="Arial" pitchFamily="34" charset="-120"/>
-              </a:rPr>
-              <a:t>6 llamadas · 0,30 USD · 411 s</a:t>
-            </a:r>
-            <a:endParaRPr lang="en-US" sz="750" dirty="0"/>
-          </a:p>
-        </p:txBody>
-      </p:sp>
-      <p:sp>
-        <p:nvSpPr>
-          <p:cNvPr id="25" name="Shape 21"/>
-          <p:cNvSpPr/>
-          <p:nvPr/>
-        </p:nvSpPr>
-        <p:spPr>
-          <a:xfrm>
-            <a:off x="1143000" y="2944368"/>
-            <a:ext cx="566928" cy="219456"/>
-          </a:xfrm>
-          <a:prstGeom prst="roundRect">
-            <a:avLst>
-              <a:gd name="adj" fmla="val 50000"/>
-            </a:avLst>
-          </a:prstGeom>
-          <a:solidFill>
-            <a:srgbClr val="2A3B4A"/>
-          </a:solidFill>
-          <a:ln/>
-        </p:spPr>
-      </p:sp>
-      <p:sp>
-        <p:nvSpPr>
-          <p:cNvPr id="26" name="Text 22"/>
-          <p:cNvSpPr txBox="1"/>
-          <p:nvPr/>
-        </p:nvSpPr>
-        <p:spPr>
-          <a:xfrm>
-            <a:off x="1188720" y="2944368"/>
-            <a:ext cx="475488" cy="219456"/>
-          </a:xfrm>
-          <a:prstGeom prst="rect">
-            <a:avLst/>
-          </a:prstGeom>
-          <a:noFill/>
-          <a:ln/>
-        </p:spPr>
-        <p:txBody>
-          <a:bodyPr wrap="square" lIns="0" tIns="0" rIns="0" bIns="0" rtlCol="0" anchor="ctr"/>
-          <a:lstStyle/>
-          <a:p>
-            <a:pPr algn="ctr" indent="0" marL="0">
-              <a:buNone/>
-            </a:pPr>
-            <a:r>
-              <a:rPr lang="en-US" sz="700" b="1" dirty="0">
-                <a:solidFill>
-                  <a:srgbClr val="FFFFFF"/>
-                </a:solidFill>
-                <a:latin typeface="Arial" pitchFamily="34" charset="0"/>
-                <a:ea typeface="Arial" pitchFamily="34" charset="-122"/>
-                <a:cs typeface="Arial" pitchFamily="34" charset="-120"/>
-              </a:rPr>
-              <a:t>span</a:t>
-            </a:r>
-            <a:endParaRPr lang="en-US" sz="700" dirty="0"/>
-          </a:p>
-        </p:txBody>
-      </p:sp>
-      <p:sp>
-        <p:nvSpPr>
-          <p:cNvPr id="27" name="Text 23"/>
-          <p:cNvSpPr txBox="1"/>
-          <p:nvPr/>
-        </p:nvSpPr>
-        <p:spPr>
-          <a:xfrm>
-            <a:off x="1783080" y="2907792"/>
-            <a:ext cx="3749040" cy="182880"/>
-          </a:xfrm>
-          <a:prstGeom prst="rect">
-            <a:avLst/>
-          </a:prstGeom>
-          <a:noFill/>
-          <a:ln/>
-        </p:spPr>
-        <p:txBody>
-          <a:bodyPr wrap="square" lIns="0" tIns="0" rIns="0" bIns="0" rtlCol="0" anchor="t"/>
-          <a:lstStyle/>
-          <a:p>
-            <a:pPr indent="0" marL="0">
-              <a:buNone/>
-            </a:pPr>
-            <a:r>
-              <a:rPr lang="en-US" sz="850" b="1" dirty="0">
-                <a:solidFill>
-                  <a:srgbClr val="FFFFFF"/>
-                </a:solidFill>
-                <a:latin typeface="Courier New" pitchFamily="34" charset="0"/>
-                <a:ea typeface="Courier New" pitchFamily="34" charset="-122"/>
-                <a:cs typeface="Courier New" pitchFamily="34" charset="-120"/>
-              </a:rPr>
-              <a:t>chapter:2 · role:writer ×3, editor, judge</a:t>
-            </a:r>
-            <a:endParaRPr lang="en-US" sz="850" dirty="0"/>
-          </a:p>
-        </p:txBody>
-      </p:sp>
-      <p:sp>
-        <p:nvSpPr>
-          <p:cNvPr id="28" name="Text 24"/>
-          <p:cNvSpPr txBox="1"/>
-          <p:nvPr/>
-        </p:nvSpPr>
-        <p:spPr>
-          <a:xfrm>
-            <a:off x="1783080" y="3090672"/>
-            <a:ext cx="3749040" cy="164592"/>
-          </a:xfrm>
-          <a:prstGeom prst="rect">
-            <a:avLst/>
-          </a:prstGeom>
-          <a:noFill/>
-          <a:ln/>
-        </p:spPr>
-        <p:txBody>
-          <a:bodyPr wrap="square" lIns="0" tIns="0" rIns="0" bIns="0" rtlCol="0" anchor="t"/>
-          <a:lstStyle/>
-          <a:p>
-            <a:pPr indent="0" marL="0">
-              <a:buNone/>
-            </a:pPr>
-            <a:r>
-              <a:rPr lang="en-US" sz="750" dirty="0">
-                <a:solidFill>
-                  <a:srgbClr val="AEB8C2"/>
-                </a:solidFill>
-                <a:latin typeface="Arial" pitchFamily="34" charset="0"/>
-                <a:ea typeface="Arial" pitchFamily="34" charset="-122"/>
-                <a:cs typeface="Arial" pitchFamily="34" charset="-120"/>
-              </a:rPr>
-              <a:t>5 llamadas · 0,23 USD · 342 s</a:t>
-            </a:r>
-            <a:endParaRPr lang="en-US" sz="750" dirty="0"/>
-          </a:p>
-        </p:txBody>
-      </p:sp>
-      <p:sp>
-        <p:nvSpPr>
-          <p:cNvPr id="29" name="Shape 25"/>
-          <p:cNvSpPr/>
-          <p:nvPr/>
-        </p:nvSpPr>
-        <p:spPr>
-          <a:xfrm>
-            <a:off x="1143000" y="3346704"/>
-            <a:ext cx="566928" cy="219456"/>
-          </a:xfrm>
-          <a:prstGeom prst="roundRect">
-            <a:avLst>
-              <a:gd name="adj" fmla="val 50000"/>
-            </a:avLst>
-          </a:prstGeom>
-          <a:solidFill>
-            <a:srgbClr val="2A3B4A"/>
-          </a:solidFill>
-          <a:ln/>
-        </p:spPr>
-      </p:sp>
-      <p:sp>
-        <p:nvSpPr>
-          <p:cNvPr id="30" name="Text 26"/>
-          <p:cNvSpPr txBox="1"/>
-          <p:nvPr/>
-        </p:nvSpPr>
-        <p:spPr>
-          <a:xfrm>
-            <a:off x="1188720" y="3346704"/>
-            <a:ext cx="475488" cy="219456"/>
-          </a:xfrm>
-          <a:prstGeom prst="rect">
-            <a:avLst/>
-          </a:prstGeom>
-          <a:noFill/>
-          <a:ln/>
-        </p:spPr>
-        <p:txBody>
-          <a:bodyPr wrap="square" lIns="0" tIns="0" rIns="0" bIns="0" rtlCol="0" anchor="ctr"/>
-          <a:lstStyle/>
-          <a:p>
-            <a:pPr algn="ctr" indent="0" marL="0">
-              <a:buNone/>
-            </a:pPr>
-            <a:r>
-              <a:rPr lang="en-US" sz="700" b="1" dirty="0">
-                <a:solidFill>
-                  <a:srgbClr val="FFFFFF"/>
-                </a:solidFill>
-                <a:latin typeface="Arial" pitchFamily="34" charset="0"/>
-                <a:ea typeface="Arial" pitchFamily="34" charset="-122"/>
-                <a:cs typeface="Arial" pitchFamily="34" charset="-120"/>
-              </a:rPr>
-              <a:t>span</a:t>
-            </a:r>
-            <a:endParaRPr lang="en-US" sz="700" dirty="0"/>
-          </a:p>
-        </p:txBody>
-      </p:sp>
-      <p:sp>
-        <p:nvSpPr>
-          <p:cNvPr id="31" name="Text 27"/>
-          <p:cNvSpPr txBox="1"/>
-          <p:nvPr/>
-        </p:nvSpPr>
-        <p:spPr>
-          <a:xfrm>
-            <a:off x="1783080" y="3310128"/>
-            <a:ext cx="3749040" cy="182880"/>
-          </a:xfrm>
-          <a:prstGeom prst="rect">
-            <a:avLst/>
-          </a:prstGeom>
-          <a:noFill/>
-          <a:ln/>
-        </p:spPr>
-        <p:txBody>
-          <a:bodyPr wrap="square" lIns="0" tIns="0" rIns="0" bIns="0" rtlCol="0" anchor="t"/>
-          <a:lstStyle/>
-          <a:p>
-            <a:pPr indent="0" marL="0">
-              <a:buNone/>
-            </a:pPr>
-            <a:r>
-              <a:rPr lang="en-US" sz="850" b="1" dirty="0">
-                <a:solidFill>
-                  <a:srgbClr val="FFFFFF"/>
-                </a:solidFill>
-                <a:latin typeface="Courier New" pitchFamily="34" charset="0"/>
-                <a:ea typeface="Courier New" pitchFamily="34" charset="-122"/>
-                <a:cs typeface="Courier New" pitchFamily="34" charset="-120"/>
-              </a:rPr>
-              <a:t>chapter:3 · role:writer ×3, editor, judge</a:t>
-            </a:r>
-            <a:endParaRPr lang="en-US" sz="850" dirty="0"/>
-          </a:p>
-        </p:txBody>
-      </p:sp>
-      <p:sp>
-        <p:nvSpPr>
-          <p:cNvPr id="32" name="Text 28"/>
-          <p:cNvSpPr txBox="1"/>
-          <p:nvPr/>
-        </p:nvSpPr>
-        <p:spPr>
-          <a:xfrm>
-            <a:off x="1783080" y="3493008"/>
-            <a:ext cx="3749040" cy="164592"/>
-          </a:xfrm>
-          <a:prstGeom prst="rect">
-            <a:avLst/>
-          </a:prstGeom>
-          <a:noFill/>
-          <a:ln/>
-        </p:spPr>
-        <p:txBody>
-          <a:bodyPr wrap="square" lIns="0" tIns="0" rIns="0" bIns="0" rtlCol="0" anchor="t"/>
-          <a:lstStyle/>
-          <a:p>
-            <a:pPr indent="0" marL="0">
-              <a:buNone/>
-            </a:pPr>
-            <a:r>
-              <a:rPr lang="en-US" sz="750" dirty="0">
-                <a:solidFill>
-                  <a:srgbClr val="AEB8C2"/>
-                </a:solidFill>
-                <a:latin typeface="Arial" pitchFamily="34" charset="0"/>
-                <a:ea typeface="Arial" pitchFamily="34" charset="-122"/>
-                <a:cs typeface="Arial" pitchFamily="34" charset="-120"/>
-              </a:rPr>
-              <a:t>5 llamadas · 0,26 USD · 358 s</a:t>
-            </a:r>
-            <a:endParaRPr lang="en-US" sz="750" dirty="0"/>
-          </a:p>
-        </p:txBody>
-      </p:sp>
-      <p:sp>
-        <p:nvSpPr>
-          <p:cNvPr id="33" name="Shape 29"/>
-          <p:cNvSpPr/>
-          <p:nvPr/>
-        </p:nvSpPr>
-        <p:spPr>
-          <a:xfrm>
-            <a:off x="1417320" y="3749040"/>
-            <a:ext cx="566928" cy="219456"/>
-          </a:xfrm>
-          <a:prstGeom prst="roundRect">
-            <a:avLst>
-              <a:gd name="adj" fmla="val 50000"/>
-            </a:avLst>
-          </a:prstGeom>
-          <a:solidFill>
-            <a:srgbClr val="2A3B4A"/>
-          </a:solidFill>
-          <a:ln/>
-        </p:spPr>
-      </p:sp>
-      <p:sp>
-        <p:nvSpPr>
-          <p:cNvPr id="34" name="Text 30"/>
-          <p:cNvSpPr txBox="1"/>
-          <p:nvPr/>
-        </p:nvSpPr>
-        <p:spPr>
-          <a:xfrm>
-            <a:off x="1463040" y="3749040"/>
-            <a:ext cx="475488" cy="219456"/>
-          </a:xfrm>
-          <a:prstGeom prst="rect">
-            <a:avLst/>
-          </a:prstGeom>
-          <a:noFill/>
-          <a:ln/>
-        </p:spPr>
-        <p:txBody>
-          <a:bodyPr wrap="square" lIns="0" tIns="0" rIns="0" bIns="0" rtlCol="0" anchor="ctr"/>
-          <a:lstStyle/>
-          <a:p>
-            <a:pPr algn="ctr" indent="0" marL="0">
-              <a:buNone/>
-            </a:pPr>
-            <a:r>
-              <a:rPr lang="en-US" sz="700" b="1" dirty="0">
-                <a:solidFill>
-                  <a:srgbClr val="FFFFFF"/>
-                </a:solidFill>
-                <a:latin typeface="Arial" pitchFamily="34" charset="0"/>
-                <a:ea typeface="Arial" pitchFamily="34" charset="-122"/>
-                <a:cs typeface="Arial" pitchFamily="34" charset="-120"/>
-              </a:rPr>
-              <a:t>span</a:t>
-            </a:r>
-            <a:endParaRPr lang="en-US" sz="700" dirty="0"/>
-          </a:p>
-        </p:txBody>
-      </p:sp>
-      <p:sp>
-        <p:nvSpPr>
-          <p:cNvPr id="35" name="Text 31"/>
-          <p:cNvSpPr txBox="1"/>
-          <p:nvPr/>
-        </p:nvSpPr>
-        <p:spPr>
-          <a:xfrm>
-            <a:off x="2057400" y="3712464"/>
-            <a:ext cx="3474720" cy="182880"/>
-          </a:xfrm>
-          <a:prstGeom prst="rect">
-            <a:avLst/>
-          </a:prstGeom>
-          <a:noFill/>
-          <a:ln/>
-        </p:spPr>
-        <p:txBody>
-          <a:bodyPr wrap="square" lIns="0" tIns="0" rIns="0" bIns="0" rtlCol="0" anchor="t"/>
-          <a:lstStyle/>
-          <a:p>
-            <a:pPr indent="0" marL="0">
-              <a:buNone/>
-            </a:pPr>
-            <a:r>
-              <a:rPr lang="en-US" sz="850" b="1" dirty="0">
-                <a:solidFill>
-                  <a:srgbClr val="FFFFFF"/>
-                </a:solidFill>
-                <a:latin typeface="Courier New" pitchFamily="34" charset="0"/>
-                <a:ea typeface="Courier New" pitchFamily="34" charset="-122"/>
-                <a:cs typeface="Courier New" pitchFamily="34" charset="-120"/>
-              </a:rPr>
-              <a:t>tool:get_chapter_summary · tool:query_story_bible</a:t>
-            </a:r>
-            <a:endParaRPr lang="en-US" sz="850" dirty="0"/>
-          </a:p>
-        </p:txBody>
-      </p:sp>
-      <p:sp>
-        <p:nvSpPr>
-          <p:cNvPr id="36" name="Text 32"/>
-          <p:cNvSpPr txBox="1"/>
-          <p:nvPr/>
-        </p:nvSpPr>
-        <p:spPr>
-          <a:xfrm>
-            <a:off x="2057400" y="3895344"/>
-            <a:ext cx="3474720" cy="164592"/>
-          </a:xfrm>
-          <a:prstGeom prst="rect">
-            <a:avLst/>
-          </a:prstGeom>
-          <a:noFill/>
-          <a:ln/>
-        </p:spPr>
-        <p:txBody>
-          <a:bodyPr wrap="square" lIns="0" tIns="0" rIns="0" bIns="0" rtlCol="0" anchor="t"/>
-          <a:lstStyle/>
-          <a:p>
-            <a:pPr indent="0" marL="0">
-              <a:buNone/>
-            </a:pPr>
-            <a:r>
-              <a:rPr lang="en-US" sz="750" dirty="0">
-                <a:solidFill>
-                  <a:srgbClr val="AEB8C2"/>
-                </a:solidFill>
-                <a:latin typeface="Arial" pitchFamily="34" charset="0"/>
-                <a:ea typeface="Arial" pitchFamily="34" charset="-122"/>
-                <a:cs typeface="Arial" pitchFamily="34" charset="-120"/>
-              </a:rPr>
-              <a:t>contexto del writer</a:t>
-            </a:r>
-            <a:endParaRPr lang="en-US" sz="750" dirty="0"/>
-          </a:p>
-        </p:txBody>
-      </p:sp>
-      <p:sp>
-        <p:nvSpPr>
-          <p:cNvPr id="37" name="Shape 33"/>
-          <p:cNvSpPr/>
-          <p:nvPr/>
-        </p:nvSpPr>
-        <p:spPr>
-          <a:xfrm>
-            <a:off x="1143000" y="4151376"/>
-            <a:ext cx="566928" cy="219456"/>
-          </a:xfrm>
-          <a:prstGeom prst="roundRect">
-            <a:avLst>
-              <a:gd name="adj" fmla="val 50000"/>
-            </a:avLst>
-          </a:prstGeom>
-          <a:solidFill>
-            <a:srgbClr val="2A3B4A"/>
-          </a:solidFill>
-          <a:ln/>
-        </p:spPr>
-      </p:sp>
-      <p:sp>
-        <p:nvSpPr>
-          <p:cNvPr id="38" name="Text 34"/>
-          <p:cNvSpPr txBox="1"/>
-          <p:nvPr/>
-        </p:nvSpPr>
-        <p:spPr>
-          <a:xfrm>
-            <a:off x="1188720" y="4151376"/>
-            <a:ext cx="475488" cy="219456"/>
-          </a:xfrm>
-          <a:prstGeom prst="rect">
-            <a:avLst/>
-          </a:prstGeom>
-          <a:noFill/>
-          <a:ln/>
-        </p:spPr>
-        <p:txBody>
-          <a:bodyPr wrap="square" lIns="0" tIns="0" rIns="0" bIns="0" rtlCol="0" anchor="ctr"/>
-          <a:lstStyle/>
-          <a:p>
-            <a:pPr algn="ctr" indent="0" marL="0">
-              <a:buNone/>
-            </a:pPr>
-            <a:r>
-              <a:rPr lang="en-US" sz="700" b="1" dirty="0">
-                <a:solidFill>
-                  <a:srgbClr val="FFFFFF"/>
-                </a:solidFill>
-                <a:latin typeface="Arial" pitchFamily="34" charset="0"/>
-                <a:ea typeface="Arial" pitchFamily="34" charset="-122"/>
-                <a:cs typeface="Arial" pitchFamily="34" charset="-120"/>
-              </a:rPr>
-              <a:t>span</a:t>
-            </a:r>
-            <a:endParaRPr lang="en-US" sz="700" dirty="0"/>
-          </a:p>
-        </p:txBody>
-      </p:sp>
-      <p:sp>
-        <p:nvSpPr>
-          <p:cNvPr id="39" name="Text 35"/>
-          <p:cNvSpPr txBox="1"/>
-          <p:nvPr/>
-        </p:nvSpPr>
-        <p:spPr>
-          <a:xfrm>
-            <a:off x="1783080" y="4114800"/>
-            <a:ext cx="3749040" cy="182880"/>
-          </a:xfrm>
-          <a:prstGeom prst="rect">
-            <a:avLst/>
-          </a:prstGeom>
-          <a:noFill/>
-          <a:ln/>
-        </p:spPr>
-        <p:txBody>
-          <a:bodyPr wrap="square" lIns="0" tIns="0" rIns="0" bIns="0" rtlCol="0" anchor="t"/>
-          <a:lstStyle/>
-          <a:p>
-            <a:pPr indent="0" marL="0">
-              <a:buNone/>
-            </a:pPr>
-            <a:r>
-              <a:rPr lang="en-US" sz="850" b="1" dirty="0">
-                <a:solidFill>
-                  <a:srgbClr val="FFFFFF"/>
-                </a:solidFill>
-                <a:latin typeface="Courier New" pitchFamily="34" charset="0"/>
-                <a:ea typeface="Courier New" pitchFamily="34" charset="-122"/>
-                <a:cs typeface="Courier New" pitchFamily="34" charset="-120"/>
-              </a:rPr>
-              <a:t>phase:pre_publish · judge_novel · lean · visual</a:t>
-            </a:r>
-            <a:endParaRPr lang="en-US" sz="850" dirty="0"/>
-          </a:p>
-        </p:txBody>
-      </p:sp>
-      <p:sp>
-        <p:nvSpPr>
-          <p:cNvPr id="40" name="Text 36"/>
-          <p:cNvSpPr txBox="1"/>
-          <p:nvPr/>
-        </p:nvSpPr>
-        <p:spPr>
-          <a:xfrm>
-            <a:off x="1783080" y="4297680"/>
-            <a:ext cx="3749040" cy="164592"/>
-          </a:xfrm>
-          <a:prstGeom prst="rect">
-            <a:avLst/>
-          </a:prstGeom>
-          <a:noFill/>
-          <a:ln/>
-        </p:spPr>
-        <p:txBody>
-          <a:bodyPr wrap="square" lIns="0" tIns="0" rIns="0" bIns="0" rtlCol="0" anchor="t"/>
-          <a:lstStyle/>
-          <a:p>
-            <a:pPr indent="0" marL="0">
-              <a:buNone/>
-            </a:pPr>
-            <a:r>
-              <a:rPr lang="en-US" sz="750" dirty="0">
-                <a:solidFill>
-                  <a:srgbClr val="AEB8C2"/>
-                </a:solidFill>
-                <a:latin typeface="Arial" pitchFamily="34" charset="0"/>
-                <a:ea typeface="Arial" pitchFamily="34" charset="-122"/>
-                <a:cs typeface="Arial" pitchFamily="34" charset="-120"/>
-              </a:rPr>
-              <a:t>versión 1 publicada</a:t>
-            </a:r>
-            <a:endParaRPr lang="en-US" sz="750" dirty="0"/>
-          </a:p>
-        </p:txBody>
-      </p:sp>
-      <p:sp>
-        <p:nvSpPr>
-          <p:cNvPr id="41" name="Text 37"/>
+          <p:cNvPr id="11" name="Text 6"/>
           <p:cNvSpPr txBox="1"/>
           <p:nvPr/>
         </p:nvSpPr>
@@ -30646,7 +29597,7 @@
                 <a:ea typeface="Arial" pitchFamily="34" charset="-122"/>
                 <a:cs typeface="Arial" pitchFamily="34" charset="-120"/>
               </a:rPr>
-              <a:t>Scores de la traza</a:t>
+              <a:t>Scores (brief de inyección)</a:t>
             </a:r>
             <a:endParaRPr lang="en-US" sz="1100" dirty="0"/>
           </a:p>
@@ -30654,7 +29605,7 @@
       </p:sp>
       <p:sp>
         <p:nvSpPr>
-          <p:cNvPr id="42" name="Text 38"/>
+          <p:cNvPr id="12" name="Text 7"/>
           <p:cNvSpPr txBox="1"/>
           <p:nvPr/>
         </p:nvSpPr>
@@ -30693,7 +29644,7 @@
       </p:sp>
       <p:sp>
         <p:nvSpPr>
-          <p:cNvPr id="43" name="Shape 39"/>
+          <p:cNvPr id="13" name="Shape 8"/>
           <p:cNvSpPr/>
           <p:nvPr/>
         </p:nvSpPr>
@@ -30715,7 +29666,7 @@
       </p:sp>
       <p:sp>
         <p:nvSpPr>
-          <p:cNvPr id="44" name="Text 40"/>
+          <p:cNvPr id="14" name="Text 9"/>
           <p:cNvSpPr txBox="1"/>
           <p:nvPr/>
         </p:nvSpPr>
@@ -30754,7 +29705,7 @@
       </p:sp>
       <p:sp>
         <p:nvSpPr>
-          <p:cNvPr id="45" name="Text 41"/>
+          <p:cNvPr id="15" name="Text 10"/>
           <p:cNvSpPr txBox="1"/>
           <p:nvPr/>
         </p:nvSpPr>
@@ -30793,7 +29744,7 @@
       </p:sp>
       <p:sp>
         <p:nvSpPr>
-          <p:cNvPr id="46" name="Shape 42"/>
+          <p:cNvPr id="16" name="Shape 11"/>
           <p:cNvSpPr/>
           <p:nvPr/>
         </p:nvSpPr>
@@ -30815,7 +29766,7 @@
       </p:sp>
       <p:sp>
         <p:nvSpPr>
-          <p:cNvPr id="47" name="Text 43"/>
+          <p:cNvPr id="17" name="Text 12"/>
           <p:cNvSpPr txBox="1"/>
           <p:nvPr/>
         </p:nvSpPr>
@@ -30854,7 +29805,7 @@
       </p:sp>
       <p:sp>
         <p:nvSpPr>
-          <p:cNvPr id="48" name="Text 44"/>
+          <p:cNvPr id="18" name="Text 13"/>
           <p:cNvSpPr txBox="1"/>
           <p:nvPr/>
         </p:nvSpPr>
@@ -30893,7 +29844,7 @@
       </p:sp>
       <p:sp>
         <p:nvSpPr>
-          <p:cNvPr id="49" name="Shape 45"/>
+          <p:cNvPr id="19" name="Shape 14"/>
           <p:cNvSpPr/>
           <p:nvPr/>
         </p:nvSpPr>
@@ -30915,7 +29866,7 @@
       </p:sp>
       <p:sp>
         <p:nvSpPr>
-          <p:cNvPr id="50" name="Text 46"/>
+          <p:cNvPr id="20" name="Text 15"/>
           <p:cNvSpPr txBox="1"/>
           <p:nvPr/>
         </p:nvSpPr>
@@ -30954,7 +29905,7 @@
       </p:sp>
       <p:sp>
         <p:nvSpPr>
-          <p:cNvPr id="51" name="Text 47"/>
+          <p:cNvPr id="21" name="Text 16"/>
           <p:cNvSpPr txBox="1"/>
           <p:nvPr/>
         </p:nvSpPr>
@@ -30993,7 +29944,7 @@
       </p:sp>
       <p:sp>
         <p:nvSpPr>
-          <p:cNvPr id="52" name="Shape 48"/>
+          <p:cNvPr id="22" name="Shape 17"/>
           <p:cNvSpPr/>
           <p:nvPr/>
         </p:nvSpPr>
@@ -31015,7 +29966,7 @@
       </p:sp>
       <p:sp>
         <p:nvSpPr>
-          <p:cNvPr id="53" name="Text 49"/>
+          <p:cNvPr id="23" name="Text 18"/>
           <p:cNvSpPr txBox="1"/>
           <p:nvPr/>
         </p:nvSpPr>
@@ -31054,7 +30005,7 @@
       </p:sp>
       <p:sp>
         <p:nvSpPr>
-          <p:cNvPr id="54" name="Text 50"/>
+          <p:cNvPr id="24" name="Text 19"/>
           <p:cNvSpPr txBox="1"/>
           <p:nvPr/>
         </p:nvSpPr>
@@ -31093,7 +30044,7 @@
       </p:sp>
       <p:sp>
         <p:nvSpPr>
-          <p:cNvPr id="55" name="Shape 51"/>
+          <p:cNvPr id="25" name="Shape 20"/>
           <p:cNvSpPr/>
           <p:nvPr/>
         </p:nvSpPr>
@@ -31115,7 +30066,7 @@
       </p:sp>
       <p:sp>
         <p:nvSpPr>
-          <p:cNvPr id="56" name="Text 52"/>
+          <p:cNvPr id="26" name="Text 21"/>
           <p:cNvSpPr txBox="1"/>
           <p:nvPr/>
         </p:nvSpPr>
@@ -31154,7 +30105,7 @@
       </p:sp>
       <p:sp>
         <p:nvSpPr>
-          <p:cNvPr id="57" name="Text 53"/>
+          <p:cNvPr id="27" name="Text 22"/>
           <p:cNvSpPr txBox="1"/>
           <p:nvPr/>
         </p:nvSpPr>
@@ -31193,7 +30144,7 @@
       </p:sp>
       <p:sp>
         <p:nvSpPr>
-          <p:cNvPr id="58" name="Text 54"/>
+          <p:cNvPr id="28" name="Text 23"/>
           <p:cNvSpPr txBox="1"/>
           <p:nvPr/>
         </p:nvSpPr>
@@ -31232,7 +30183,7 @@
       </p:sp>
       <p:sp>
         <p:nvSpPr>
-          <p:cNvPr id="59" name="Text 55"/>
+          <p:cNvPr id="29" name="Text 24"/>
           <p:cNvSpPr txBox="1"/>
           <p:nvPr/>
         </p:nvSpPr>

--- a/presentacion/presentacion-2.pptx
+++ b/presentacion/presentacion-2.pptx
@@ -20,9 +20,11 @@
     <p:sldId id="268" r:id="rId14"/>
     <p:sldId id="269" r:id="rId15"/>
     <p:sldId id="270" r:id="rId16"/>
+    <p:sldId id="271" r:id="rId17"/>
+    <p:sldId id="272" r:id="rId18"/>
   </p:sldIdLst>
   <p:notesMasterIdLst>
-    <p:notesMasterId r:id="rId17"/>
+    <p:notesMasterId r:id="rId19"/>
   </p:notesMasterIdLst>
   <p:sldSz cx="9144000" cy="5143500"/>
   <p:notesSz cx="5143500" cy="9144000"/>
@@ -959,7 +961,7 @@
           <a:p>
             <a:r>
               <a:rPr lang="en-US" dirty="0"/>
-              <a:t>[7:00–8:00] Coste medido: la novela de diez capítulos publicada costó 3,10 USD de modelo y 69 minutos; un cambio del lector, unos 0,94 USD. El writer es el rol más caro, luego editor y juez: son los que producen y leen más texto.
+              <a:t>[7:00–7:30] Coste medido: la novela de diez capítulos publicada costó 3,10 USD de modelo y 69 minutos; un cambio del lector, unos 0,94 USD. El writer es el rol más caro, luego editor y juez: son los que producen y leen más texto.
 Gasto real de todo el desarrollo con modelo: 27,03 USD, contando los tres intentos bloqueados, las evals antes y después del tuning y el experimento de Lean.
 Como los bucles están acotados, el coste también: el peor intento medido costó 6,05 USD, y ese riesgo lo asumimos nosotros: solo se factura lo publicado.
 Propuesta: un piloto de ocho semanas por 28.800 euros (integración, marca blanca, QA editorial con 50 novelas y el trabajo de RGPD), 600 euros al mes de plataforma y 12 euros por novela publicada. Con un precio de venta de 39 euros, a Cuentalia le quedan 27 de margen bruto.</a:t>
@@ -1050,9 +1052,10 @@
           <a:p>
             <a:r>
               <a:rPr lang="en-US" dirty="0"/>
-              <a:t>[8:00–8:30] DEMO. Abrir el lector en la novela de ejemplo, capítulo 1, y pedir «la perra se llama Nala» (o mostrar el PDF regenerado si no hay tiempo).
-El sistema busca el hecho, ve en fact_usage que lo usan los capítulos 1 y 3 a 10, y regenera solo esos en la versión 2; el capítulo 2 se copia tal cual. Pasan los mismos validadores y el PDF sale con una página de novedades.
-Resultado: Canela aparecía 44 veces en la versión 1 y 0 en la 2; Nala 45 veces. La versión 1 sigue intacta. Unos 27 minutos y menos de un dólar.</a:t>
+              <a:t>[7:30–8:00] Desglose por novela: 3,10 USD de tokens medidos en Langfuse, un 30 % de contingencia por reintentos, el cambio incluido y la infraestructura: unos 4,77 euros. Cobramos 12, así que nos queda un margen operativo de unos 7,23 euros.
+El proyecto: 360 horas a 80 euros, 28.800 euros, que es exactamente el piloto.
+Volumen: con 500 novelas al mes, Cuentalia gana unos 12.900 euros al mes.
+Sensibilidad: si los tokens suben un 50 %, nuestro margen baja pero sigue positivo; si el cliente pide más de tres revisiones y no se cobran, el margen se come; por eso los cambios adicionales se cobran a 2 euros.</a:t>
             </a:r>
             <a:endParaRPr lang="en-US" dirty="0"/>
           </a:p>
@@ -1140,8 +1143,9 @@
           <a:p>
             <a:r>
               <a:rPr lang="en-US" dirty="0"/>
-              <a:t>[8:30–9:30] Prefiero decir yo lo que no está demostrado: el calendario solo se valida junto a una fecha; Lean solo prueba lo que el planner registra; un brief contradictorio se bloquea bien pero caro; las fichas no están versionadas; y antes de producción hay que enmascarar los datos personales en las trazas y calibrar el juez con revisión humana.
-Todo eso está en el plan del piloto: ocho semanas hasta el catálogo de Navidad.</a:t>
+              <a:t>[8:00–8:30] DEMO. Abrir el lector en la novela de ejemplo, capítulo 1, y pedir «la perra se llama Nala» (o mostrar el PDF regenerado si no hay tiempo).
+El sistema busca el hecho, ve en fact_usage que lo usan los capítulos 1 y 3 a 10, y regenera solo esos en la versión 2; el capítulo 2 se copia tal cual. Pasan los mismos validadores y el PDF sale con una página de novedades.
+Resultado: Canela aparecía 44 veces en la versión 1 y 0 en la 2; Nala 45 veces. La versión 1 sigue intacta. Unos 27 minutos y menos de un dólar.</a:t>
             </a:r>
             <a:endParaRPr lang="en-US" dirty="0"/>
           </a:p>
@@ -1229,8 +1233,8 @@
           <a:p>
             <a:r>
               <a:rPr lang="en-US" dirty="0"/>
-              <a:t>[9:30–10:00] Si me tengo que quedar con una decisión: separar la verdad de la prosa. Lo que es cierto sobre la historia vive en una base de datos y lo comprueban validadores deterministas, Lean y TLA+; los modelos solo redactan, y solo se publica lo que pasa todo.
-Muchas gracias. En el anexo está la tabla completa de evals, y el resto del detalle en los anexos PDF; encantado de responder preguntas.</a:t>
+              <a:t>[8:30–9:30] Prefiero decir yo lo que no está demostrado: el calendario solo se valida junto a una fecha; Lean solo prueba lo que el planner registra; un brief contradictorio se bloquea bien pero caro; las fichas no están versionadas; y antes de producción hay que enmascarar los datos personales en las trazas y calibrar el juez con revisión humana.
+Todo eso está en el plan del piloto: ocho semanas hasta el catálogo de Navidad.</a:t>
             </a:r>
             <a:endParaRPr lang="en-US" dirty="0"/>
           </a:p>
@@ -1318,7 +1322,8 @@
           <a:p>
             <a:r>
               <a:rPr lang="en-US" dirty="0"/>
-              <a:t>Anexo: la tabla completa de evals.</a:t>
+              <a:t>[9:30–10:00] Si me tengo que quedar con una decisión: separar la verdad de la prosa. Lo que es cierto sobre la historia vive en una base de datos y lo comprueban validadores deterministas, Lean y TLA+; los modelos solo redactan, y solo se publica lo que pasa todo.
+Muchas gracias. En el anexo está la tabla completa de evals, y el resto del detalle en los anexos PDF; encantado de responder preguntas.</a:t>
             </a:r>
             <a:endParaRPr lang="en-US" dirty="0"/>
           </a:p>
@@ -1342,6 +1347,182 @@
             <a:fld id="{F7021451-1387-4CA6-816F-3879F97B5CBC}" type="slidenum">
               <a:rPr lang="en-US"/>
               <a:t>15</a:t>
+            </a:fld>
+            <a:endParaRPr lang="en-US"/>
+          </a:p>
+        </p:txBody>
+      </p:sp>
+    </p:spTree>
+    <p:extLst>
+      <p:ext uri="{BB962C8B-B14F-4D97-AF65-F5344CB8AC3E}">
+        <p14:creationId xmlns:p14="http://schemas.microsoft.com/office/powerpoint/2010/main" val="1024086991"/>
+      </p:ext>
+    </p:extLst>
+  </p:cSld>
+  <p:clrMapOvr>
+    <a:masterClrMapping/>
+  </p:clrMapOvr>
+</p:notes>
+</file>
+
+<file path=ppt/notesSlides/notesSlide16.xml><?xml version="1.0" encoding="utf-8"?>
+<p:notes xmlns:a="http://schemas.openxmlformats.org/drawingml/2006/main" xmlns:r="http://schemas.openxmlformats.org/officeDocument/2006/relationships" xmlns:p="http://schemas.openxmlformats.org/presentationml/2006/main">
+  <p:cSld>
+    <p:spTree>
+      <p:nvGrpSpPr>
+        <p:cNvPr id="1" name=""/>
+        <p:cNvGrpSpPr/>
+        <p:nvPr/>
+      </p:nvGrpSpPr>
+      <p:grpSpPr>
+        <a:xfrm>
+          <a:off x="0" y="0"/>
+          <a:ext cx="0" cy="0"/>
+          <a:chOff x="0" y="0"/>
+          <a:chExt cx="0" cy="0"/>
+        </a:xfrm>
+      </p:grpSpPr>
+      <p:sp>
+        <p:nvSpPr>
+          <p:cNvPr id="2" name="Slide Image Placeholder 1"/>
+          <p:cNvSpPr>
+            <a:spLocks noGrp="1" noRot="1" noChangeAspect="1"/>
+          </p:cNvSpPr>
+          <p:nvPr>
+            <p:ph type="sldImg"/>
+          </p:nvPr>
+        </p:nvSpPr>
+        <p:spPr/>
+      </p:sp>
+      <p:sp>
+        <p:nvSpPr>
+          <p:cNvPr id="3" name="Notes Placeholder 2"/>
+          <p:cNvSpPr>
+            <a:spLocks noGrp="1"/>
+          </p:cNvSpPr>
+          <p:nvPr>
+            <p:ph type="body" idx="1"/>
+          </p:nvPr>
+        </p:nvSpPr>
+        <p:spPr/>
+        <p:txBody>
+          <a:bodyPr/>
+          <a:lstStyle/>
+          <a:p>
+            <a:r>
+              <a:rPr lang="en-US" dirty="0"/>
+              <a:t>Anexo: la tabla completa de evals.</a:t>
+            </a:r>
+            <a:endParaRPr lang="en-US" dirty="0"/>
+          </a:p>
+        </p:txBody>
+      </p:sp>
+      <p:sp>
+        <p:nvSpPr>
+          <p:cNvPr id="4" name="Slide Number Placeholder 3"/>
+          <p:cNvSpPr>
+            <a:spLocks noGrp="1"/>
+          </p:cNvSpPr>
+          <p:nvPr>
+            <p:ph type="sldNum" sz="quarter" idx="10"/>
+          </p:nvPr>
+        </p:nvSpPr>
+        <p:spPr/>
+        <p:txBody>
+          <a:bodyPr/>
+          <a:lstStyle/>
+          <a:p>
+            <a:fld id="{F7021451-1387-4CA6-816F-3879F97B5CBC}" type="slidenum">
+              <a:rPr lang="en-US"/>
+              <a:t>16</a:t>
+            </a:fld>
+            <a:endParaRPr lang="en-US"/>
+          </a:p>
+        </p:txBody>
+      </p:sp>
+    </p:spTree>
+    <p:extLst>
+      <p:ext uri="{BB962C8B-B14F-4D97-AF65-F5344CB8AC3E}">
+        <p14:creationId xmlns:p14="http://schemas.microsoft.com/office/powerpoint/2010/main" val="1024086991"/>
+      </p:ext>
+    </p:extLst>
+  </p:cSld>
+  <p:clrMapOvr>
+    <a:masterClrMapping/>
+  </p:clrMapOvr>
+</p:notes>
+</file>
+
+<file path=ppt/notesSlides/notesSlide17.xml><?xml version="1.0" encoding="utf-8"?>
+<p:notes xmlns:a="http://schemas.openxmlformats.org/drawingml/2006/main" xmlns:r="http://schemas.openxmlformats.org/officeDocument/2006/relationships" xmlns:p="http://schemas.openxmlformats.org/presentationml/2006/main">
+  <p:cSld>
+    <p:spTree>
+      <p:nvGrpSpPr>
+        <p:cNvPr id="1" name=""/>
+        <p:cNvGrpSpPr/>
+        <p:nvPr/>
+      </p:nvGrpSpPr>
+      <p:grpSpPr>
+        <a:xfrm>
+          <a:off x="0" y="0"/>
+          <a:ext cx="0" cy="0"/>
+          <a:chOff x="0" y="0"/>
+          <a:chExt cx="0" cy="0"/>
+        </a:xfrm>
+      </p:grpSpPr>
+      <p:sp>
+        <p:nvSpPr>
+          <p:cNvPr id="2" name="Slide Image Placeholder 1"/>
+          <p:cNvSpPr>
+            <a:spLocks noGrp="1" noRot="1" noChangeAspect="1"/>
+          </p:cNvSpPr>
+          <p:nvPr>
+            <p:ph type="sldImg"/>
+          </p:nvPr>
+        </p:nvSpPr>
+        <p:spPr/>
+      </p:sp>
+      <p:sp>
+        <p:nvSpPr>
+          <p:cNvPr id="3" name="Notes Placeholder 2"/>
+          <p:cNvSpPr>
+            <a:spLocks noGrp="1"/>
+          </p:cNvSpPr>
+          <p:nvPr>
+            <p:ph type="body" idx="1"/>
+          </p:nvPr>
+        </p:nvSpPr>
+        <p:spPr/>
+        <p:txBody>
+          <a:bodyPr/>
+          <a:lstStyle/>
+          <a:p>
+            <a:r>
+              <a:rPr lang="en-US" dirty="0"/>
+              <a:t>Anexo: cómo reducir el coste de desarrollo. Datos reales: 27 USD de modelo, más de la mitad en intentos bloqueados de 10 capítulos que se podían haber descubierto con 1–3 capítulos. La idea: fijar la spec antes del código, iterar en pequeño y mover a código determinista todo lo que el modelo no tiene por qué decidir.</a:t>
+            </a:r>
+            <a:endParaRPr lang="en-US" dirty="0"/>
+          </a:p>
+        </p:txBody>
+      </p:sp>
+      <p:sp>
+        <p:nvSpPr>
+          <p:cNvPr id="4" name="Slide Number Placeholder 3"/>
+          <p:cNvSpPr>
+            <a:spLocks noGrp="1"/>
+          </p:cNvSpPr>
+          <p:nvPr>
+            <p:ph type="sldNum" sz="quarter" idx="10"/>
+          </p:nvPr>
+        </p:nvSpPr>
+        <p:spPr/>
+        <p:txBody>
+          <a:bodyPr/>
+          <a:lstStyle/>
+          <a:p>
+            <a:fld id="{F7021451-1387-4CA6-816F-3879F97B5CBC}" type="slidenum">
+              <a:rPr lang="en-US"/>
+              <a:t>17</a:t>
             </a:fld>
             <a:endParaRPr lang="en-US"/>
           </a:p>
@@ -6329,7 +6510,7 @@
                 <a:ea typeface="Arial" pitchFamily="34" charset="-122"/>
                 <a:cs typeface="Arial" pitchFamily="34" charset="-120"/>
               </a:rPr>
-              <a:t>DEMO</a:t>
+              <a:t>PRESUPUESTO Y COSTE · 2/2</a:t>
             </a:r>
             <a:endParaRPr lang="en-US" sz="950" dirty="0"/>
           </a:p>
@@ -6368,7 +6549,7 @@
                 <a:ea typeface="Arial" pitchFamily="34" charset="-122"/>
                 <a:cs typeface="Arial" pitchFamily="34" charset="-120"/>
               </a:rPr>
-              <a:t>«La perra se llama Nala»: solo cambia lo afectado</a:t>
+              <a:t>Coste unitario, proyecto, volumen y sensibilidad</a:t>
             </a:r>
             <a:endParaRPr lang="en-US" sz="2300" dirty="0"/>
           </a:p>
@@ -6478,94 +6659,14 @@
       </p:sp>
       <p:sp>
         <p:nvSpPr>
-          <p:cNvPr id="8" name="Shape 4"/>
-          <p:cNvSpPr/>
-          <p:nvPr/>
-        </p:nvSpPr>
-        <p:spPr>
-          <a:xfrm>
-            <a:off x="420624" y="1197864"/>
-            <a:ext cx="3639312" cy="1590667"/>
-          </a:xfrm>
-          <a:prstGeom prst="roundRect">
-            <a:avLst>
-              <a:gd name="adj" fmla="val 3449"/>
-            </a:avLst>
-          </a:prstGeom>
-          <a:solidFill>
-            <a:srgbClr val="FFFFFF"/>
-          </a:solidFill>
-          <a:ln w="9525">
-            <a:solidFill>
-              <a:srgbClr val="E6E9EC"/>
-            </a:solidFill>
-            <a:prstDash val="solid"/>
-          </a:ln>
-          <a:effectLst>
-            <a:outerShdw sx="100000" sy="100000" kx="0" ky="0" algn="bl" rotWithShape="0" blurRad="76200" dist="25400" dir="5400000">
-              <a:srgbClr val="1E2B37">
-                <a:alpha val="12000"/>
-              </a:srgbClr>
-            </a:outerShdw>
-          </a:effectLst>
-        </p:spPr>
-      </p:sp>
-      <p:pic>
-        <p:nvPicPr>
-          <p:cNvPr id="9" name="Image 2" descr="/home/user/My-Story-Marker/presentacion/build/img2/v1-zoom.png">    </p:cNvPr>
-          <p:cNvPicPr>
-            <a:picLocks noChangeAspect="1"/>
-          </p:cNvPicPr>
-          <p:nvPr/>
-        </p:nvPicPr>
-        <p:blipFill>
-          <a:blip r:embed="rId3"/>
-          <a:stretch>
-            <a:fillRect/>
-          </a:stretch>
-        </p:blipFill>
-        <p:spPr>
-          <a:xfrm>
-            <a:off x="457200" y="1234440"/>
-            <a:ext cx="3566160" cy="1517515"/>
-          </a:xfrm>
-          <a:prstGeom prst="rect">
-            <a:avLst/>
-          </a:prstGeom>
-        </p:spPr>
-      </p:pic>
-      <p:sp>
-        <p:nvSpPr>
-          <p:cNvPr id="10" name="Shape 5"/>
-          <p:cNvSpPr/>
-          <p:nvPr/>
-        </p:nvSpPr>
-        <p:spPr>
-          <a:xfrm>
-            <a:off x="2377440" y="1106424"/>
-            <a:ext cx="1508760" cy="237744"/>
-          </a:xfrm>
-          <a:prstGeom prst="roundRect">
-            <a:avLst>
-              <a:gd name="adj" fmla="val 46154"/>
-            </a:avLst>
-          </a:prstGeom>
-          <a:solidFill>
-            <a:srgbClr val="1E2B37"/>
-          </a:solidFill>
-          <a:ln/>
-        </p:spPr>
-      </p:sp>
-      <p:sp>
-        <p:nvSpPr>
-          <p:cNvPr id="11" name="Text 6"/>
+          <p:cNvPr id="8" name="Text 4"/>
           <p:cNvSpPr txBox="1"/>
           <p:nvPr/>
         </p:nvSpPr>
         <p:spPr>
           <a:xfrm>
-            <a:off x="2423160" y="1106424"/>
-            <a:ext cx="1417320" cy="237744"/>
+            <a:off x="457200" y="1115568"/>
+            <a:ext cx="4023360" cy="182880"/>
           </a:xfrm>
           <a:prstGeom prst="rect">
             <a:avLst/>
@@ -6574,594 +6675,14 @@
           <a:ln/>
         </p:spPr>
         <p:txBody>
-          <a:bodyPr wrap="square" lIns="0" tIns="0" rIns="0" bIns="0" rtlCol="0" anchor="ctr"/>
-          <a:lstStyle/>
-          <a:p>
-            <a:pPr algn="ctr" indent="0" marL="0">
-              <a:buNone/>
-            </a:pPr>
-            <a:r>
-              <a:rPr lang="en-US" sz="800" b="1" dirty="0">
-                <a:solidFill>
-                  <a:srgbClr val="FFFFFF"/>
-                </a:solidFill>
-                <a:latin typeface="Arial" pitchFamily="34" charset="0"/>
-                <a:ea typeface="Arial" pitchFamily="34" charset="-122"/>
-                <a:cs typeface="Arial" pitchFamily="34" charset="-120"/>
-              </a:rPr>
-              <a:t>versión 1 · «Canela»</a:t>
-            </a:r>
-            <a:endParaRPr lang="en-US" sz="800" dirty="0"/>
-          </a:p>
-        </p:txBody>
-      </p:sp>
-      <p:sp>
-        <p:nvSpPr>
-          <p:cNvPr id="12" name="Shape 7"/>
-          <p:cNvSpPr/>
-          <p:nvPr/>
-        </p:nvSpPr>
-        <p:spPr>
-          <a:xfrm>
-            <a:off x="420624" y="2989699"/>
-            <a:ext cx="3639312" cy="1590667"/>
-          </a:xfrm>
-          <a:prstGeom prst="roundRect">
-            <a:avLst>
-              <a:gd name="adj" fmla="val 3449"/>
-            </a:avLst>
-          </a:prstGeom>
-          <a:solidFill>
-            <a:srgbClr val="FFFFFF"/>
-          </a:solidFill>
-          <a:ln w="9525">
-            <a:solidFill>
-              <a:srgbClr val="E6E9EC"/>
-            </a:solidFill>
-            <a:prstDash val="solid"/>
-          </a:ln>
-          <a:effectLst>
-            <a:outerShdw sx="100000" sy="100000" kx="0" ky="0" algn="bl" rotWithShape="0" blurRad="76200" dist="25400" dir="5400000">
-              <a:srgbClr val="1E2B37">
-                <a:alpha val="12000"/>
-              </a:srgbClr>
-            </a:outerShdw>
-          </a:effectLst>
-        </p:spPr>
-      </p:sp>
-      <p:pic>
-        <p:nvPicPr>
-          <p:cNvPr id="13" name="Image 3" descr="/home/user/My-Story-Marker/presentacion/build/img2/v2-zoom.png">    </p:cNvPr>
-          <p:cNvPicPr>
-            <a:picLocks noChangeAspect="1"/>
-          </p:cNvPicPr>
-          <p:nvPr/>
-        </p:nvPicPr>
-        <p:blipFill>
-          <a:blip r:embed="rId4"/>
-          <a:stretch>
-            <a:fillRect/>
-          </a:stretch>
-        </p:blipFill>
-        <p:spPr>
-          <a:xfrm>
-            <a:off x="457200" y="3026275"/>
-            <a:ext cx="3566160" cy="1517515"/>
-          </a:xfrm>
-          <a:prstGeom prst="rect">
-            <a:avLst/>
-          </a:prstGeom>
-        </p:spPr>
-      </p:pic>
-      <p:sp>
-        <p:nvSpPr>
-          <p:cNvPr id="14" name="Shape 8"/>
-          <p:cNvSpPr/>
-          <p:nvPr/>
-        </p:nvSpPr>
-        <p:spPr>
-          <a:xfrm>
-            <a:off x="2377440" y="2898259"/>
-            <a:ext cx="1508760" cy="237744"/>
-          </a:xfrm>
-          <a:prstGeom prst="roundRect">
-            <a:avLst>
-              <a:gd name="adj" fmla="val 46154"/>
-            </a:avLst>
-          </a:prstGeom>
-          <a:solidFill>
-            <a:srgbClr val="FF7A2F"/>
-          </a:solidFill>
-          <a:ln/>
-        </p:spPr>
-      </p:sp>
-      <p:sp>
-        <p:nvSpPr>
-          <p:cNvPr id="15" name="Text 9"/>
-          <p:cNvSpPr txBox="1"/>
-          <p:nvPr/>
-        </p:nvSpPr>
-        <p:spPr>
-          <a:xfrm>
-            <a:off x="2423160" y="2898259"/>
-            <a:ext cx="1417320" cy="237744"/>
-          </a:xfrm>
-          <a:prstGeom prst="rect">
-            <a:avLst/>
-          </a:prstGeom>
-          <a:noFill/>
-          <a:ln/>
-        </p:spPr>
-        <p:txBody>
-          <a:bodyPr wrap="square" lIns="0" tIns="0" rIns="0" bIns="0" rtlCol="0" anchor="ctr"/>
-          <a:lstStyle/>
-          <a:p>
-            <a:pPr algn="ctr" indent="0" marL="0">
-              <a:buNone/>
-            </a:pPr>
-            <a:r>
-              <a:rPr lang="en-US" sz="800" b="1" dirty="0">
-                <a:solidFill>
-                  <a:srgbClr val="FFFFFF"/>
-                </a:solidFill>
-                <a:latin typeface="Arial" pitchFamily="34" charset="0"/>
-                <a:ea typeface="Arial" pitchFamily="34" charset="-122"/>
-                <a:cs typeface="Arial" pitchFamily="34" charset="-120"/>
-              </a:rPr>
-              <a:t>versión 2 · «Nala»</a:t>
-            </a:r>
-            <a:endParaRPr lang="en-US" sz="800" dirty="0"/>
-          </a:p>
-        </p:txBody>
-      </p:sp>
-      <p:sp>
-        <p:nvSpPr>
-          <p:cNvPr id="16" name="Shape 10"/>
-          <p:cNvSpPr/>
-          <p:nvPr/>
-        </p:nvSpPr>
-        <p:spPr>
-          <a:xfrm>
-            <a:off x="4434840" y="1234440"/>
-            <a:ext cx="292608" cy="292608"/>
-          </a:xfrm>
-          <a:prstGeom prst="roundRect">
-            <a:avLst>
-              <a:gd name="adj" fmla="val 25000"/>
-            </a:avLst>
-          </a:prstGeom>
-          <a:solidFill>
-            <a:srgbClr val="FF7A2F"/>
-          </a:solidFill>
-          <a:ln/>
-        </p:spPr>
-      </p:sp>
-      <p:sp>
-        <p:nvSpPr>
-          <p:cNvPr id="17" name="Text 11"/>
-          <p:cNvSpPr txBox="1"/>
-          <p:nvPr/>
-        </p:nvSpPr>
-        <p:spPr>
-          <a:xfrm>
-            <a:off x="4434840" y="1234440"/>
-            <a:ext cx="292608" cy="292608"/>
-          </a:xfrm>
-          <a:prstGeom prst="rect">
-            <a:avLst/>
-          </a:prstGeom>
-          <a:noFill/>
-          <a:ln/>
-        </p:spPr>
-        <p:txBody>
-          <a:bodyPr wrap="square" lIns="0" tIns="0" rIns="0" bIns="0" rtlCol="0" anchor="ctr"/>
-          <a:lstStyle/>
-          <a:p>
-            <a:pPr algn="ctr" indent="0" marL="0">
-              <a:buNone/>
-            </a:pPr>
-            <a:r>
-              <a:rPr lang="en-US" sz="1000" b="1" dirty="0">
-                <a:solidFill>
-                  <a:srgbClr val="FFFFFF"/>
-                </a:solidFill>
-                <a:latin typeface="Arial" pitchFamily="34" charset="0"/>
-                <a:ea typeface="Arial" pitchFamily="34" charset="-122"/>
-                <a:cs typeface="Arial" pitchFamily="34" charset="-120"/>
-              </a:rPr>
-              <a:t>1</a:t>
-            </a:r>
-            <a:endParaRPr lang="en-US" sz="1000" dirty="0"/>
-          </a:p>
-        </p:txBody>
-      </p:sp>
-      <p:sp>
-        <p:nvSpPr>
-          <p:cNvPr id="18" name="Text 12"/>
-          <p:cNvSpPr txBox="1"/>
-          <p:nvPr/>
-        </p:nvSpPr>
-        <p:spPr>
-          <a:xfrm>
-            <a:off x="4846320" y="1234440"/>
-            <a:ext cx="3840480" cy="292608"/>
-          </a:xfrm>
-          <a:prstGeom prst="rect">
-            <a:avLst/>
-          </a:prstGeom>
-          <a:noFill/>
-          <a:ln/>
-        </p:spPr>
-        <p:txBody>
-          <a:bodyPr wrap="square" lIns="0" tIns="0" rIns="0" bIns="0" rtlCol="0" anchor="ctr"/>
+          <a:bodyPr wrap="square" lIns="0" tIns="0" rIns="0" bIns="0" rtlCol="0" anchor="t"/>
           <a:lstStyle/>
           <a:p>
             <a:pPr indent="0" marL="0">
               <a:buNone/>
             </a:pPr>
             <a:r>
-              <a:rPr lang="en-US" sz="950" dirty="0">
-                <a:solidFill>
-                  <a:srgbClr val="1E2B37"/>
-                </a:solidFill>
-                <a:latin typeface="Arial" pitchFamily="34" charset="0"/>
-                <a:ea typeface="Arial" pitchFamily="34" charset="-122"/>
-                <a:cs typeface="Arial" pitchFamily="34" charset="-120"/>
-              </a:rPr>
-              <a:t>Petición en el lector: pet.canela.name → «Nala»</a:t>
-            </a:r>
-            <a:endParaRPr lang="en-US" sz="950" dirty="0"/>
-          </a:p>
-        </p:txBody>
-      </p:sp>
-      <p:sp>
-        <p:nvSpPr>
-          <p:cNvPr id="19" name="Shape 13"/>
-          <p:cNvSpPr/>
-          <p:nvPr/>
-        </p:nvSpPr>
-        <p:spPr>
-          <a:xfrm>
-            <a:off x="4434840" y="1691640"/>
-            <a:ext cx="292608" cy="292608"/>
-          </a:xfrm>
-          <a:prstGeom prst="roundRect">
-            <a:avLst>
-              <a:gd name="adj" fmla="val 25000"/>
-            </a:avLst>
-          </a:prstGeom>
-          <a:solidFill>
-            <a:srgbClr val="FF7A2F"/>
-          </a:solidFill>
-          <a:ln/>
-        </p:spPr>
-      </p:sp>
-      <p:sp>
-        <p:nvSpPr>
-          <p:cNvPr id="20" name="Text 14"/>
-          <p:cNvSpPr txBox="1"/>
-          <p:nvPr/>
-        </p:nvSpPr>
-        <p:spPr>
-          <a:xfrm>
-            <a:off x="4434840" y="1691640"/>
-            <a:ext cx="292608" cy="292608"/>
-          </a:xfrm>
-          <a:prstGeom prst="rect">
-            <a:avLst/>
-          </a:prstGeom>
-          <a:noFill/>
-          <a:ln/>
-        </p:spPr>
-        <p:txBody>
-          <a:bodyPr wrap="square" lIns="0" tIns="0" rIns="0" bIns="0" rtlCol="0" anchor="ctr"/>
-          <a:lstStyle/>
-          <a:p>
-            <a:pPr algn="ctr" indent="0" marL="0">
-              <a:buNone/>
-            </a:pPr>
-            <a:r>
-              <a:rPr lang="en-US" sz="1000" b="1" dirty="0">
-                <a:solidFill>
-                  <a:srgbClr val="FFFFFF"/>
-                </a:solidFill>
-                <a:latin typeface="Arial" pitchFamily="34" charset="0"/>
-                <a:ea typeface="Arial" pitchFamily="34" charset="-122"/>
-                <a:cs typeface="Arial" pitchFamily="34" charset="-120"/>
-              </a:rPr>
-              <a:t>2</a:t>
-            </a:r>
-            <a:endParaRPr lang="en-US" sz="1000" dirty="0"/>
-          </a:p>
-        </p:txBody>
-      </p:sp>
-      <p:sp>
-        <p:nvSpPr>
-          <p:cNvPr id="21" name="Text 15"/>
-          <p:cNvSpPr txBox="1"/>
-          <p:nvPr/>
-        </p:nvSpPr>
-        <p:spPr>
-          <a:xfrm>
-            <a:off x="4846320" y="1691640"/>
-            <a:ext cx="3840480" cy="292608"/>
-          </a:xfrm>
-          <a:prstGeom prst="rect">
-            <a:avLst/>
-          </a:prstGeom>
-          <a:noFill/>
-          <a:ln/>
-        </p:spPr>
-        <p:txBody>
-          <a:bodyPr wrap="square" lIns="0" tIns="0" rIns="0" bIns="0" rtlCol="0" anchor="ctr"/>
-          <a:lstStyle/>
-          <a:p>
-            <a:pPr indent="0" marL="0">
-              <a:buNone/>
-            </a:pPr>
-            <a:r>
-              <a:rPr lang="en-US" sz="950" dirty="0">
-                <a:solidFill>
-                  <a:srgbClr val="1E2B37"/>
-                </a:solidFill>
-                <a:latin typeface="Arial" pitchFamily="34" charset="0"/>
-                <a:ea typeface="Arial" pitchFamily="34" charset="-122"/>
-                <a:cs typeface="Arial" pitchFamily="34" charset="-120"/>
-              </a:rPr>
-              <a:t>fact_usage dice qué capítulos usan el hecho: 1 y 3–10</a:t>
-            </a:r>
-            <a:endParaRPr lang="en-US" sz="950" dirty="0"/>
-          </a:p>
-        </p:txBody>
-      </p:sp>
-      <p:sp>
-        <p:nvSpPr>
-          <p:cNvPr id="22" name="Shape 16"/>
-          <p:cNvSpPr/>
-          <p:nvPr/>
-        </p:nvSpPr>
-        <p:spPr>
-          <a:xfrm>
-            <a:off x="4434840" y="2148840"/>
-            <a:ext cx="292608" cy="292608"/>
-          </a:xfrm>
-          <a:prstGeom prst="roundRect">
-            <a:avLst>
-              <a:gd name="adj" fmla="val 25000"/>
-            </a:avLst>
-          </a:prstGeom>
-          <a:solidFill>
-            <a:srgbClr val="FF7A2F"/>
-          </a:solidFill>
-          <a:ln/>
-        </p:spPr>
-      </p:sp>
-      <p:sp>
-        <p:nvSpPr>
-          <p:cNvPr id="23" name="Text 17"/>
-          <p:cNvSpPr txBox="1"/>
-          <p:nvPr/>
-        </p:nvSpPr>
-        <p:spPr>
-          <a:xfrm>
-            <a:off x="4434840" y="2148840"/>
-            <a:ext cx="292608" cy="292608"/>
-          </a:xfrm>
-          <a:prstGeom prst="rect">
-            <a:avLst/>
-          </a:prstGeom>
-          <a:noFill/>
-          <a:ln/>
-        </p:spPr>
-        <p:txBody>
-          <a:bodyPr wrap="square" lIns="0" tIns="0" rIns="0" bIns="0" rtlCol="0" anchor="ctr"/>
-          <a:lstStyle/>
-          <a:p>
-            <a:pPr algn="ctr" indent="0" marL="0">
-              <a:buNone/>
-            </a:pPr>
-            <a:r>
-              <a:rPr lang="en-US" sz="1000" b="1" dirty="0">
-                <a:solidFill>
-                  <a:srgbClr val="FFFFFF"/>
-                </a:solidFill>
-                <a:latin typeface="Arial" pitchFamily="34" charset="0"/>
-                <a:ea typeface="Arial" pitchFamily="34" charset="-122"/>
-                <a:cs typeface="Arial" pitchFamily="34" charset="-120"/>
-              </a:rPr>
-              <a:t>3</a:t>
-            </a:r>
-            <a:endParaRPr lang="en-US" sz="1000" dirty="0"/>
-          </a:p>
-        </p:txBody>
-      </p:sp>
-      <p:sp>
-        <p:nvSpPr>
-          <p:cNvPr id="24" name="Text 18"/>
-          <p:cNvSpPr txBox="1"/>
-          <p:nvPr/>
-        </p:nvSpPr>
-        <p:spPr>
-          <a:xfrm>
-            <a:off x="4846320" y="2148840"/>
-            <a:ext cx="3840480" cy="292608"/>
-          </a:xfrm>
-          <a:prstGeom prst="rect">
-            <a:avLst/>
-          </a:prstGeom>
-          <a:noFill/>
-          <a:ln/>
-        </p:spPr>
-        <p:txBody>
-          <a:bodyPr wrap="square" lIns="0" tIns="0" rIns="0" bIns="0" rtlCol="0" anchor="ctr"/>
-          <a:lstStyle/>
-          <a:p>
-            <a:pPr indent="0" marL="0">
-              <a:buNone/>
-            </a:pPr>
-            <a:r>
-              <a:rPr lang="en-US" sz="950" dirty="0">
-                <a:solidFill>
-                  <a:srgbClr val="1E2B37"/>
-                </a:solidFill>
-                <a:latin typeface="Arial" pitchFamily="34" charset="0"/>
-                <a:ea typeface="Arial" pitchFamily="34" charset="-122"/>
-                <a:cs typeface="Arial" pitchFamily="34" charset="-120"/>
-              </a:rPr>
-              <a:t>Se regeneran solo esos, en la versión 2; el 2 se copia</a:t>
-            </a:r>
-            <a:endParaRPr lang="en-US" sz="950" dirty="0"/>
-          </a:p>
-        </p:txBody>
-      </p:sp>
-      <p:sp>
-        <p:nvSpPr>
-          <p:cNvPr id="25" name="Shape 19"/>
-          <p:cNvSpPr/>
-          <p:nvPr/>
-        </p:nvSpPr>
-        <p:spPr>
-          <a:xfrm>
-            <a:off x="4434840" y="2606040"/>
-            <a:ext cx="292608" cy="292608"/>
-          </a:xfrm>
-          <a:prstGeom prst="roundRect">
-            <a:avLst>
-              <a:gd name="adj" fmla="val 25000"/>
-            </a:avLst>
-          </a:prstGeom>
-          <a:solidFill>
-            <a:srgbClr val="FF7A2F"/>
-          </a:solidFill>
-          <a:ln/>
-        </p:spPr>
-      </p:sp>
-      <p:sp>
-        <p:nvSpPr>
-          <p:cNvPr id="26" name="Text 20"/>
-          <p:cNvSpPr txBox="1"/>
-          <p:nvPr/>
-        </p:nvSpPr>
-        <p:spPr>
-          <a:xfrm>
-            <a:off x="4434840" y="2606040"/>
-            <a:ext cx="292608" cy="292608"/>
-          </a:xfrm>
-          <a:prstGeom prst="rect">
-            <a:avLst/>
-          </a:prstGeom>
-          <a:noFill/>
-          <a:ln/>
-        </p:spPr>
-        <p:txBody>
-          <a:bodyPr wrap="square" lIns="0" tIns="0" rIns="0" bIns="0" rtlCol="0" anchor="ctr"/>
-          <a:lstStyle/>
-          <a:p>
-            <a:pPr algn="ctr" indent="0" marL="0">
-              <a:buNone/>
-            </a:pPr>
-            <a:r>
-              <a:rPr lang="en-US" sz="1000" b="1" dirty="0">
-                <a:solidFill>
-                  <a:srgbClr val="FFFFFF"/>
-                </a:solidFill>
-                <a:latin typeface="Arial" pitchFamily="34" charset="0"/>
-                <a:ea typeface="Arial" pitchFamily="34" charset="-122"/>
-                <a:cs typeface="Arial" pitchFamily="34" charset="-120"/>
-              </a:rPr>
-              <a:t>4</a:t>
-            </a:r>
-            <a:endParaRPr lang="en-US" sz="1000" dirty="0"/>
-          </a:p>
-        </p:txBody>
-      </p:sp>
-      <p:sp>
-        <p:nvSpPr>
-          <p:cNvPr id="27" name="Text 21"/>
-          <p:cNvSpPr txBox="1"/>
-          <p:nvPr/>
-        </p:nvSpPr>
-        <p:spPr>
-          <a:xfrm>
-            <a:off x="4846320" y="2606040"/>
-            <a:ext cx="3840480" cy="292608"/>
-          </a:xfrm>
-          <a:prstGeom prst="rect">
-            <a:avLst/>
-          </a:prstGeom>
-          <a:noFill/>
-          <a:ln/>
-        </p:spPr>
-        <p:txBody>
-          <a:bodyPr wrap="square" lIns="0" tIns="0" rIns="0" bIns="0" rtlCol="0" anchor="ctr"/>
-          <a:lstStyle/>
-          <a:p>
-            <a:pPr indent="0" marL="0">
-              <a:buNone/>
-            </a:pPr>
-            <a:r>
-              <a:rPr lang="en-US" sz="950" dirty="0">
-                <a:solidFill>
-                  <a:srgbClr val="1E2B37"/>
-                </a:solidFill>
-                <a:latin typeface="Arial" pitchFamily="34" charset="0"/>
-                <a:ea typeface="Arial" pitchFamily="34" charset="-122"/>
-                <a:cs typeface="Arial" pitchFamily="34" charset="-120"/>
-              </a:rPr>
-              <a:t>Mismos validadores; se exporta el PDF con «Novedades»</a:t>
-            </a:r>
-            <a:endParaRPr lang="en-US" sz="950" dirty="0"/>
-          </a:p>
-        </p:txBody>
-      </p:sp>
-      <p:sp>
-        <p:nvSpPr>
-          <p:cNvPr id="28" name="Shape 22"/>
-          <p:cNvSpPr/>
-          <p:nvPr/>
-        </p:nvSpPr>
-        <p:spPr>
-          <a:xfrm>
-            <a:off x="4434840" y="3154680"/>
-            <a:ext cx="969264" cy="822960"/>
-          </a:xfrm>
-          <a:prstGeom prst="roundRect">
-            <a:avLst>
-              <a:gd name="adj" fmla="val 8889"/>
-            </a:avLst>
-          </a:prstGeom>
-          <a:solidFill>
-            <a:srgbClr val="FFF5EE"/>
-          </a:solidFill>
-          <a:ln/>
-        </p:spPr>
-      </p:sp>
-      <p:sp>
-        <p:nvSpPr>
-          <p:cNvPr id="29" name="Text 23"/>
-          <p:cNvSpPr txBox="1"/>
-          <p:nvPr/>
-        </p:nvSpPr>
-        <p:spPr>
-          <a:xfrm>
-            <a:off x="4434840" y="3218688"/>
-            <a:ext cx="969264" cy="365760"/>
-          </a:xfrm>
-          <a:prstGeom prst="rect">
-            <a:avLst/>
-          </a:prstGeom>
-          <a:noFill/>
-          <a:ln/>
-        </p:spPr>
-        <p:txBody>
-          <a:bodyPr wrap="square" lIns="0" tIns="0" rIns="0" bIns="0" rtlCol="0" anchor="ctr"/>
-          <a:lstStyle/>
-          <a:p>
-            <a:pPr algn="ctr" indent="0" marL="0">
-              <a:buNone/>
-            </a:pPr>
-            <a:r>
-              <a:rPr lang="en-US" sz="1400" b="1" dirty="0">
+              <a:rPr lang="en-US" sz="750" b="1" spc="100" kern="0" dirty="0">
                 <a:solidFill>
                   <a:srgbClr val="AE4E14"/>
                 </a:solidFill>
@@ -7169,22 +6690,1018 @@
                 <a:ea typeface="Arial" pitchFamily="34" charset="-122"/>
                 <a:cs typeface="Arial" pitchFamily="34" charset="-120"/>
               </a:rPr>
-              <a:t>44 → 0</a:t>
+              <a:t>COSTE UNITARIO POR NOVELA</a:t>
             </a:r>
-            <a:endParaRPr lang="en-US" sz="1400" dirty="0"/>
-          </a:p>
-        </p:txBody>
-      </p:sp>
-      <p:sp>
-        <p:nvSpPr>
-          <p:cNvPr id="30" name="Text 24"/>
+            <a:endParaRPr lang="en-US" sz="750" dirty="0"/>
+          </a:p>
+        </p:txBody>
+      </p:sp>
+      <p:graphicFrame>
+        <p:nvGraphicFramePr>
+          <p:cNvPr id="13" name="Table 0"/>
+          <p:cNvGraphicFramePr>
+            <a:graphicFrameLocks noGrp="1"/>
+          </p:cNvGraphicFramePr>
+          <p:nvPr>
+            <p:extLst>
+              <p:ext uri="{D42A27DB-BD31-4B8C-83A1-F6EECF244321}">
+                <p14:modId xmlns:p14="http://schemas.microsoft.com/office/powerpoint/2010/main" val="1579011935"/>
+              </p:ext>
+            </p:extLst>
+          </p:nvPr>
+        </p:nvGraphicFramePr>
+        <p:xfrm>
+          <a:off x="457200" y="1325880"/>
+          <a:ext cx="4023360" cy="914400"/>
+        </p:xfrm>
+        <a:graphic>
+          <a:graphicData uri="http://schemas.openxmlformats.org/drawingml/2006/table">
+            <a:tbl>
+              <a:tblPr/>
+              <a:tblGrid>
+                <a:gridCol w="2834640"/>
+                <a:gridCol w="1188720"/>
+              </a:tblGrid>
+              <a:tr h="219456">
+                <a:tc>
+                  <a:txBody>
+                    <a:bodyPr/>
+                    <a:lstStyle/>
+                    <a:p>
+                      <a:pPr indent="0" marL="0">
+                        <a:buNone/>
+                      </a:pPr>
+                      <a:r>
+                        <a:rPr lang="en-US" sz="750" b="1" dirty="0">
+                          <a:solidFill>
+                            <a:srgbClr val="FFFFFF"/>
+                          </a:solidFill>
+                          <a:latin typeface="Arial" pitchFamily="34" charset="0"/>
+                          <a:ea typeface="Arial" pitchFamily="34" charset="-122"/>
+                          <a:cs typeface="Arial" pitchFamily="34" charset="-120"/>
+                        </a:rPr>
+                        <a:t>Concepto</a:t>
+                      </a:r>
+                      <a:endParaRPr lang="en-US" sz="750" dirty="0">
+                        <a:latin typeface="Arial" charset="0"/>
+                        <a:ea typeface="Arial" charset="0"/>
+                        <a:cs typeface="Arial" charset="0"/>
+                      </a:endParaRPr>
+                    </a:p>
+                  </a:txBody>
+                  <a:tcPr marL="45720" marR="45720" marT="45720" marB="45720" anchor="ctr">
+                    <a:lnL w="6350" cap="flat" cmpd="sng" algn="ctr">
+                      <a:solidFill>
+                        <a:srgbClr val="E6E9EC"/>
+                      </a:solidFill>
+                      <a:prstDash val="solid"/>
+                      <a:round/>
+                      <a:headEnd type="none" w="med" len="med"/>
+                      <a:tailEnd type="none" w="med" len="med"/>
+                    </a:lnL>
+                    <a:lnR w="6350" cap="flat" cmpd="sng" algn="ctr">
+                      <a:solidFill>
+                        <a:srgbClr val="E6E9EC"/>
+                      </a:solidFill>
+                      <a:prstDash val="solid"/>
+                      <a:round/>
+                      <a:headEnd type="none" w="med" len="med"/>
+                      <a:tailEnd type="none" w="med" len="med"/>
+                    </a:lnR>
+                    <a:lnT w="6350" cap="flat" cmpd="sng" algn="ctr">
+                      <a:solidFill>
+                        <a:srgbClr val="E6E9EC"/>
+                      </a:solidFill>
+                      <a:prstDash val="solid"/>
+                      <a:round/>
+                      <a:headEnd type="none" w="med" len="med"/>
+                      <a:tailEnd type="none" w="med" len="med"/>
+                    </a:lnT>
+                    <a:lnB w="6350" cap="flat" cmpd="sng" algn="ctr">
+                      <a:solidFill>
+                        <a:srgbClr val="E6E9EC"/>
+                      </a:solidFill>
+                      <a:prstDash val="solid"/>
+                      <a:round/>
+                      <a:headEnd type="none" w="med" len="med"/>
+                      <a:tailEnd type="none" w="med" len="med"/>
+                    </a:lnB>
+                    <a:solidFill>
+                      <a:srgbClr val="1E2B37"/>
+                    </a:solidFill>
+                  </a:tcPr>
+                </a:tc>
+                <a:tc>
+                  <a:txBody>
+                    <a:bodyPr/>
+                    <a:lstStyle/>
+                    <a:p>
+                      <a:pPr indent="0" marL="0">
+                        <a:buNone/>
+                      </a:pPr>
+                      <a:r>
+                        <a:rPr lang="en-US" sz="750" b="1" dirty="0">
+                          <a:solidFill>
+                            <a:srgbClr val="FFFFFF"/>
+                          </a:solidFill>
+                          <a:latin typeface="Arial" pitchFamily="34" charset="0"/>
+                          <a:ea typeface="Arial" pitchFamily="34" charset="-122"/>
+                          <a:cs typeface="Arial" pitchFamily="34" charset="-120"/>
+                        </a:rPr>
+                        <a:t>€</a:t>
+                      </a:r>
+                      <a:endParaRPr lang="en-US" sz="750" dirty="0">
+                        <a:latin typeface="Arial" charset="0"/>
+                        <a:ea typeface="Arial" charset="0"/>
+                        <a:cs typeface="Arial" charset="0"/>
+                      </a:endParaRPr>
+                    </a:p>
+                  </a:txBody>
+                  <a:tcPr marL="45720" marR="45720" marT="45720" marB="45720" anchor="ctr">
+                    <a:lnL w="6350" cap="flat" cmpd="sng" algn="ctr">
+                      <a:solidFill>
+                        <a:srgbClr val="E6E9EC"/>
+                      </a:solidFill>
+                      <a:prstDash val="solid"/>
+                      <a:round/>
+                      <a:headEnd type="none" w="med" len="med"/>
+                      <a:tailEnd type="none" w="med" len="med"/>
+                    </a:lnL>
+                    <a:lnR w="6350" cap="flat" cmpd="sng" algn="ctr">
+                      <a:solidFill>
+                        <a:srgbClr val="E6E9EC"/>
+                      </a:solidFill>
+                      <a:prstDash val="solid"/>
+                      <a:round/>
+                      <a:headEnd type="none" w="med" len="med"/>
+                      <a:tailEnd type="none" w="med" len="med"/>
+                    </a:lnR>
+                    <a:lnT w="6350" cap="flat" cmpd="sng" algn="ctr">
+                      <a:solidFill>
+                        <a:srgbClr val="E6E9EC"/>
+                      </a:solidFill>
+                      <a:prstDash val="solid"/>
+                      <a:round/>
+                      <a:headEnd type="none" w="med" len="med"/>
+                      <a:tailEnd type="none" w="med" len="med"/>
+                    </a:lnT>
+                    <a:lnB w="6350" cap="flat" cmpd="sng" algn="ctr">
+                      <a:solidFill>
+                        <a:srgbClr val="E6E9EC"/>
+                      </a:solidFill>
+                      <a:prstDash val="solid"/>
+                      <a:round/>
+                      <a:headEnd type="none" w="med" len="med"/>
+                      <a:tailEnd type="none" w="med" len="med"/>
+                    </a:lnB>
+                    <a:solidFill>
+                      <a:srgbClr val="1E2B37"/>
+                    </a:solidFill>
+                  </a:tcPr>
+                </a:tc>
+              </a:tr>
+              <a:tr h="219456">
+                <a:tc>
+                  <a:txBody>
+                    <a:bodyPr/>
+                    <a:lstStyle/>
+                    <a:p>
+                      <a:pPr indent="0" marL="0">
+                        <a:buNone/>
+                      </a:pPr>
+                      <a:r>
+                        <a:rPr lang="en-US" sz="750" dirty="0">
+                          <a:solidFill>
+                            <a:srgbClr val="1E2B37"/>
+                          </a:solidFill>
+                          <a:latin typeface="Arial" pitchFamily="34" charset="0"/>
+                          <a:ea typeface="Arial" pitchFamily="34" charset="-122"/>
+                          <a:cs typeface="Arial" pitchFamily="34" charset="-120"/>
+                        </a:rPr>
+                        <a:t>Tokens medidos en Langfuse (3,10 USD)</a:t>
+                      </a:r>
+                      <a:endParaRPr lang="en-US" sz="750" dirty="0">
+                        <a:latin typeface="Arial" charset="0"/>
+                        <a:ea typeface="Arial" charset="0"/>
+                        <a:cs typeface="Arial" charset="0"/>
+                      </a:endParaRPr>
+                    </a:p>
+                  </a:txBody>
+                  <a:tcPr marL="45720" marR="45720" marT="45720" marB="45720" anchor="ctr">
+                    <a:lnL w="6350" cap="flat" cmpd="sng" algn="ctr">
+                      <a:solidFill>
+                        <a:srgbClr val="E6E9EC"/>
+                      </a:solidFill>
+                      <a:prstDash val="solid"/>
+                      <a:round/>
+                      <a:headEnd type="none" w="med" len="med"/>
+                      <a:tailEnd type="none" w="med" len="med"/>
+                    </a:lnL>
+                    <a:lnR w="6350" cap="flat" cmpd="sng" algn="ctr">
+                      <a:solidFill>
+                        <a:srgbClr val="E6E9EC"/>
+                      </a:solidFill>
+                      <a:prstDash val="solid"/>
+                      <a:round/>
+                      <a:headEnd type="none" w="med" len="med"/>
+                      <a:tailEnd type="none" w="med" len="med"/>
+                    </a:lnR>
+                    <a:lnT w="6350" cap="flat" cmpd="sng" algn="ctr">
+                      <a:solidFill>
+                        <a:srgbClr val="E6E9EC"/>
+                      </a:solidFill>
+                      <a:prstDash val="solid"/>
+                      <a:round/>
+                      <a:headEnd type="none" w="med" len="med"/>
+                      <a:tailEnd type="none" w="med" len="med"/>
+                    </a:lnT>
+                    <a:lnB w="6350" cap="flat" cmpd="sng" algn="ctr">
+                      <a:solidFill>
+                        <a:srgbClr val="E6E9EC"/>
+                      </a:solidFill>
+                      <a:prstDash val="solid"/>
+                      <a:round/>
+                      <a:headEnd type="none" w="med" len="med"/>
+                      <a:tailEnd type="none" w="med" len="med"/>
+                    </a:lnB>
+                    <a:solidFill>
+                      <a:srgbClr val="FFFFFF"/>
+                    </a:solidFill>
+                  </a:tcPr>
+                </a:tc>
+                <a:tc>
+                  <a:txBody>
+                    <a:bodyPr/>
+                    <a:lstStyle/>
+                    <a:p>
+                      <a:pPr indent="0" marL="0">
+                        <a:buNone/>
+                      </a:pPr>
+                      <a:r>
+                        <a:rPr lang="en-US" sz="750" dirty="0">
+                          <a:solidFill>
+                            <a:srgbClr val="1E2B37"/>
+                          </a:solidFill>
+                          <a:latin typeface="Arial" pitchFamily="34" charset="0"/>
+                          <a:ea typeface="Arial" pitchFamily="34" charset="-122"/>
+                          <a:cs typeface="Arial" pitchFamily="34" charset="-120"/>
+                        </a:rPr>
+                        <a:t>2,79</a:t>
+                      </a:r>
+                      <a:endParaRPr lang="en-US" sz="750" dirty="0">
+                        <a:latin typeface="Arial" charset="0"/>
+                        <a:ea typeface="Arial" charset="0"/>
+                        <a:cs typeface="Arial" charset="0"/>
+                      </a:endParaRPr>
+                    </a:p>
+                  </a:txBody>
+                  <a:tcPr marL="45720" marR="45720" marT="45720" marB="45720" anchor="ctr">
+                    <a:lnL w="6350" cap="flat" cmpd="sng" algn="ctr">
+                      <a:solidFill>
+                        <a:srgbClr val="E6E9EC"/>
+                      </a:solidFill>
+                      <a:prstDash val="solid"/>
+                      <a:round/>
+                      <a:headEnd type="none" w="med" len="med"/>
+                      <a:tailEnd type="none" w="med" len="med"/>
+                    </a:lnL>
+                    <a:lnR w="6350" cap="flat" cmpd="sng" algn="ctr">
+                      <a:solidFill>
+                        <a:srgbClr val="E6E9EC"/>
+                      </a:solidFill>
+                      <a:prstDash val="solid"/>
+                      <a:round/>
+                      <a:headEnd type="none" w="med" len="med"/>
+                      <a:tailEnd type="none" w="med" len="med"/>
+                    </a:lnR>
+                    <a:lnT w="6350" cap="flat" cmpd="sng" algn="ctr">
+                      <a:solidFill>
+                        <a:srgbClr val="E6E9EC"/>
+                      </a:solidFill>
+                      <a:prstDash val="solid"/>
+                      <a:round/>
+                      <a:headEnd type="none" w="med" len="med"/>
+                      <a:tailEnd type="none" w="med" len="med"/>
+                    </a:lnT>
+                    <a:lnB w="6350" cap="flat" cmpd="sng" algn="ctr">
+                      <a:solidFill>
+                        <a:srgbClr val="E6E9EC"/>
+                      </a:solidFill>
+                      <a:prstDash val="solid"/>
+                      <a:round/>
+                      <a:headEnd type="none" w="med" len="med"/>
+                      <a:tailEnd type="none" w="med" len="med"/>
+                    </a:lnB>
+                    <a:solidFill>
+                      <a:srgbClr val="FFFFFF"/>
+                    </a:solidFill>
+                  </a:tcPr>
+                </a:tc>
+              </a:tr>
+              <a:tr h="219456">
+                <a:tc>
+                  <a:txBody>
+                    <a:bodyPr/>
+                    <a:lstStyle/>
+                    <a:p>
+                      <a:pPr indent="0" marL="0">
+                        <a:buNone/>
+                      </a:pPr>
+                      <a:r>
+                        <a:rPr lang="en-US" sz="750" dirty="0">
+                          <a:solidFill>
+                            <a:srgbClr val="1E2B37"/>
+                          </a:solidFill>
+                          <a:latin typeface="Arial" pitchFamily="34" charset="0"/>
+                          <a:ea typeface="Arial" pitchFamily="34" charset="-122"/>
+                          <a:cs typeface="Arial" pitchFamily="34" charset="-120"/>
+                        </a:rPr>
+                        <a:t>Contingencia de reintentos (+30 %)</a:t>
+                      </a:r>
+                      <a:endParaRPr lang="en-US" sz="750" dirty="0">
+                        <a:latin typeface="Arial" charset="0"/>
+                        <a:ea typeface="Arial" charset="0"/>
+                        <a:cs typeface="Arial" charset="0"/>
+                      </a:endParaRPr>
+                    </a:p>
+                  </a:txBody>
+                  <a:tcPr marL="45720" marR="45720" marT="45720" marB="45720" anchor="ctr">
+                    <a:lnL w="6350" cap="flat" cmpd="sng" algn="ctr">
+                      <a:solidFill>
+                        <a:srgbClr val="E6E9EC"/>
+                      </a:solidFill>
+                      <a:prstDash val="solid"/>
+                      <a:round/>
+                      <a:headEnd type="none" w="med" len="med"/>
+                      <a:tailEnd type="none" w="med" len="med"/>
+                    </a:lnL>
+                    <a:lnR w="6350" cap="flat" cmpd="sng" algn="ctr">
+                      <a:solidFill>
+                        <a:srgbClr val="E6E9EC"/>
+                      </a:solidFill>
+                      <a:prstDash val="solid"/>
+                      <a:round/>
+                      <a:headEnd type="none" w="med" len="med"/>
+                      <a:tailEnd type="none" w="med" len="med"/>
+                    </a:lnR>
+                    <a:lnT w="6350" cap="flat" cmpd="sng" algn="ctr">
+                      <a:solidFill>
+                        <a:srgbClr val="E6E9EC"/>
+                      </a:solidFill>
+                      <a:prstDash val="solid"/>
+                      <a:round/>
+                      <a:headEnd type="none" w="med" len="med"/>
+                      <a:tailEnd type="none" w="med" len="med"/>
+                    </a:lnT>
+                    <a:lnB w="6350" cap="flat" cmpd="sng" algn="ctr">
+                      <a:solidFill>
+                        <a:srgbClr val="E6E9EC"/>
+                      </a:solidFill>
+                      <a:prstDash val="solid"/>
+                      <a:round/>
+                      <a:headEnd type="none" w="med" len="med"/>
+                      <a:tailEnd type="none" w="med" len="med"/>
+                    </a:lnB>
+                    <a:solidFill>
+                      <a:srgbClr val="F7F8FA"/>
+                    </a:solidFill>
+                  </a:tcPr>
+                </a:tc>
+                <a:tc>
+                  <a:txBody>
+                    <a:bodyPr/>
+                    <a:lstStyle/>
+                    <a:p>
+                      <a:pPr indent="0" marL="0">
+                        <a:buNone/>
+                      </a:pPr>
+                      <a:r>
+                        <a:rPr lang="en-US" sz="750" dirty="0">
+                          <a:solidFill>
+                            <a:srgbClr val="1E2B37"/>
+                          </a:solidFill>
+                          <a:latin typeface="Arial" pitchFamily="34" charset="0"/>
+                          <a:ea typeface="Arial" pitchFamily="34" charset="-122"/>
+                          <a:cs typeface="Arial" pitchFamily="34" charset="-120"/>
+                        </a:rPr>
+                        <a:t>0,84</a:t>
+                      </a:r>
+                      <a:endParaRPr lang="en-US" sz="750" dirty="0">
+                        <a:latin typeface="Arial" charset="0"/>
+                        <a:ea typeface="Arial" charset="0"/>
+                        <a:cs typeface="Arial" charset="0"/>
+                      </a:endParaRPr>
+                    </a:p>
+                  </a:txBody>
+                  <a:tcPr marL="45720" marR="45720" marT="45720" marB="45720" anchor="ctr">
+                    <a:lnL w="6350" cap="flat" cmpd="sng" algn="ctr">
+                      <a:solidFill>
+                        <a:srgbClr val="E6E9EC"/>
+                      </a:solidFill>
+                      <a:prstDash val="solid"/>
+                      <a:round/>
+                      <a:headEnd type="none" w="med" len="med"/>
+                      <a:tailEnd type="none" w="med" len="med"/>
+                    </a:lnL>
+                    <a:lnR w="6350" cap="flat" cmpd="sng" algn="ctr">
+                      <a:solidFill>
+                        <a:srgbClr val="E6E9EC"/>
+                      </a:solidFill>
+                      <a:prstDash val="solid"/>
+                      <a:round/>
+                      <a:headEnd type="none" w="med" len="med"/>
+                      <a:tailEnd type="none" w="med" len="med"/>
+                    </a:lnR>
+                    <a:lnT w="6350" cap="flat" cmpd="sng" algn="ctr">
+                      <a:solidFill>
+                        <a:srgbClr val="E6E9EC"/>
+                      </a:solidFill>
+                      <a:prstDash val="solid"/>
+                      <a:round/>
+                      <a:headEnd type="none" w="med" len="med"/>
+                      <a:tailEnd type="none" w="med" len="med"/>
+                    </a:lnT>
+                    <a:lnB w="6350" cap="flat" cmpd="sng" algn="ctr">
+                      <a:solidFill>
+                        <a:srgbClr val="E6E9EC"/>
+                      </a:solidFill>
+                      <a:prstDash val="solid"/>
+                      <a:round/>
+                      <a:headEnd type="none" w="med" len="med"/>
+                      <a:tailEnd type="none" w="med" len="med"/>
+                    </a:lnB>
+                    <a:solidFill>
+                      <a:srgbClr val="F7F8FA"/>
+                    </a:solidFill>
+                  </a:tcPr>
+                </a:tc>
+              </a:tr>
+              <a:tr h="219456">
+                <a:tc>
+                  <a:txBody>
+                    <a:bodyPr/>
+                    <a:lstStyle/>
+                    <a:p>
+                      <a:pPr indent="0" marL="0">
+                        <a:buNone/>
+                      </a:pPr>
+                      <a:r>
+                        <a:rPr lang="en-US" sz="750" dirty="0">
+                          <a:solidFill>
+                            <a:srgbClr val="1E2B37"/>
+                          </a:solidFill>
+                          <a:latin typeface="Arial" pitchFamily="34" charset="0"/>
+                          <a:ea typeface="Arial" pitchFamily="34" charset="-122"/>
+                          <a:cs typeface="Arial" pitchFamily="34" charset="-120"/>
+                        </a:rPr>
+                        <a:t>1 cambio del lector incluido (0,94 USD)</a:t>
+                      </a:r>
+                      <a:endParaRPr lang="en-US" sz="750" dirty="0">
+                        <a:latin typeface="Arial" charset="0"/>
+                        <a:ea typeface="Arial" charset="0"/>
+                        <a:cs typeface="Arial" charset="0"/>
+                      </a:endParaRPr>
+                    </a:p>
+                  </a:txBody>
+                  <a:tcPr marL="45720" marR="45720" marT="45720" marB="45720" anchor="ctr">
+                    <a:lnL w="6350" cap="flat" cmpd="sng" algn="ctr">
+                      <a:solidFill>
+                        <a:srgbClr val="E6E9EC"/>
+                      </a:solidFill>
+                      <a:prstDash val="solid"/>
+                      <a:round/>
+                      <a:headEnd type="none" w="med" len="med"/>
+                      <a:tailEnd type="none" w="med" len="med"/>
+                    </a:lnL>
+                    <a:lnR w="6350" cap="flat" cmpd="sng" algn="ctr">
+                      <a:solidFill>
+                        <a:srgbClr val="E6E9EC"/>
+                      </a:solidFill>
+                      <a:prstDash val="solid"/>
+                      <a:round/>
+                      <a:headEnd type="none" w="med" len="med"/>
+                      <a:tailEnd type="none" w="med" len="med"/>
+                    </a:lnR>
+                    <a:lnT w="6350" cap="flat" cmpd="sng" algn="ctr">
+                      <a:solidFill>
+                        <a:srgbClr val="E6E9EC"/>
+                      </a:solidFill>
+                      <a:prstDash val="solid"/>
+                      <a:round/>
+                      <a:headEnd type="none" w="med" len="med"/>
+                      <a:tailEnd type="none" w="med" len="med"/>
+                    </a:lnT>
+                    <a:lnB w="6350" cap="flat" cmpd="sng" algn="ctr">
+                      <a:solidFill>
+                        <a:srgbClr val="E6E9EC"/>
+                      </a:solidFill>
+                      <a:prstDash val="solid"/>
+                      <a:round/>
+                      <a:headEnd type="none" w="med" len="med"/>
+                      <a:tailEnd type="none" w="med" len="med"/>
+                    </a:lnB>
+                    <a:solidFill>
+                      <a:srgbClr val="FFFFFF"/>
+                    </a:solidFill>
+                  </a:tcPr>
+                </a:tc>
+                <a:tc>
+                  <a:txBody>
+                    <a:bodyPr/>
+                    <a:lstStyle/>
+                    <a:p>
+                      <a:pPr indent="0" marL="0">
+                        <a:buNone/>
+                      </a:pPr>
+                      <a:r>
+                        <a:rPr lang="en-US" sz="750" dirty="0">
+                          <a:solidFill>
+                            <a:srgbClr val="1E2B37"/>
+                          </a:solidFill>
+                          <a:latin typeface="Arial" pitchFamily="34" charset="0"/>
+                          <a:ea typeface="Arial" pitchFamily="34" charset="-122"/>
+                          <a:cs typeface="Arial" pitchFamily="34" charset="-120"/>
+                        </a:rPr>
+                        <a:t>0,85</a:t>
+                      </a:r>
+                      <a:endParaRPr lang="en-US" sz="750" dirty="0">
+                        <a:latin typeface="Arial" charset="0"/>
+                        <a:ea typeface="Arial" charset="0"/>
+                        <a:cs typeface="Arial" charset="0"/>
+                      </a:endParaRPr>
+                    </a:p>
+                  </a:txBody>
+                  <a:tcPr marL="45720" marR="45720" marT="45720" marB="45720" anchor="ctr">
+                    <a:lnL w="6350" cap="flat" cmpd="sng" algn="ctr">
+                      <a:solidFill>
+                        <a:srgbClr val="E6E9EC"/>
+                      </a:solidFill>
+                      <a:prstDash val="solid"/>
+                      <a:round/>
+                      <a:headEnd type="none" w="med" len="med"/>
+                      <a:tailEnd type="none" w="med" len="med"/>
+                    </a:lnL>
+                    <a:lnR w="6350" cap="flat" cmpd="sng" algn="ctr">
+                      <a:solidFill>
+                        <a:srgbClr val="E6E9EC"/>
+                      </a:solidFill>
+                      <a:prstDash val="solid"/>
+                      <a:round/>
+                      <a:headEnd type="none" w="med" len="med"/>
+                      <a:tailEnd type="none" w="med" len="med"/>
+                    </a:lnR>
+                    <a:lnT w="6350" cap="flat" cmpd="sng" algn="ctr">
+                      <a:solidFill>
+                        <a:srgbClr val="E6E9EC"/>
+                      </a:solidFill>
+                      <a:prstDash val="solid"/>
+                      <a:round/>
+                      <a:headEnd type="none" w="med" len="med"/>
+                      <a:tailEnd type="none" w="med" len="med"/>
+                    </a:lnT>
+                    <a:lnB w="6350" cap="flat" cmpd="sng" algn="ctr">
+                      <a:solidFill>
+                        <a:srgbClr val="E6E9EC"/>
+                      </a:solidFill>
+                      <a:prstDash val="solid"/>
+                      <a:round/>
+                      <a:headEnd type="none" w="med" len="med"/>
+                      <a:tailEnd type="none" w="med" len="med"/>
+                    </a:lnB>
+                    <a:solidFill>
+                      <a:srgbClr val="FFFFFF"/>
+                    </a:solidFill>
+                  </a:tcPr>
+                </a:tc>
+              </a:tr>
+              <a:tr h="219456">
+                <a:tc>
+                  <a:txBody>
+                    <a:bodyPr/>
+                    <a:lstStyle/>
+                    <a:p>
+                      <a:pPr indent="0" marL="0">
+                        <a:buNone/>
+                      </a:pPr>
+                      <a:r>
+                        <a:rPr lang="en-US" sz="750" dirty="0">
+                          <a:solidFill>
+                            <a:srgbClr val="1E2B37"/>
+                          </a:solidFill>
+                          <a:latin typeface="Arial" pitchFamily="34" charset="0"/>
+                          <a:ea typeface="Arial" pitchFamily="34" charset="-122"/>
+                          <a:cs typeface="Arial" pitchFamily="34" charset="-120"/>
+                        </a:rPr>
+                        <a:t>Infraestructura (150 €/mes ÷ 500 novelas)</a:t>
+                      </a:r>
+                      <a:endParaRPr lang="en-US" sz="750" dirty="0">
+                        <a:latin typeface="Arial" charset="0"/>
+                        <a:ea typeface="Arial" charset="0"/>
+                        <a:cs typeface="Arial" charset="0"/>
+                      </a:endParaRPr>
+                    </a:p>
+                  </a:txBody>
+                  <a:tcPr marL="45720" marR="45720" marT="45720" marB="45720" anchor="ctr">
+                    <a:lnL w="6350" cap="flat" cmpd="sng" algn="ctr">
+                      <a:solidFill>
+                        <a:srgbClr val="E6E9EC"/>
+                      </a:solidFill>
+                      <a:prstDash val="solid"/>
+                      <a:round/>
+                      <a:headEnd type="none" w="med" len="med"/>
+                      <a:tailEnd type="none" w="med" len="med"/>
+                    </a:lnL>
+                    <a:lnR w="6350" cap="flat" cmpd="sng" algn="ctr">
+                      <a:solidFill>
+                        <a:srgbClr val="E6E9EC"/>
+                      </a:solidFill>
+                      <a:prstDash val="solid"/>
+                      <a:round/>
+                      <a:headEnd type="none" w="med" len="med"/>
+                      <a:tailEnd type="none" w="med" len="med"/>
+                    </a:lnR>
+                    <a:lnT w="6350" cap="flat" cmpd="sng" algn="ctr">
+                      <a:solidFill>
+                        <a:srgbClr val="E6E9EC"/>
+                      </a:solidFill>
+                      <a:prstDash val="solid"/>
+                      <a:round/>
+                      <a:headEnd type="none" w="med" len="med"/>
+                      <a:tailEnd type="none" w="med" len="med"/>
+                    </a:lnT>
+                    <a:lnB w="6350" cap="flat" cmpd="sng" algn="ctr">
+                      <a:solidFill>
+                        <a:srgbClr val="E6E9EC"/>
+                      </a:solidFill>
+                      <a:prstDash val="solid"/>
+                      <a:round/>
+                      <a:headEnd type="none" w="med" len="med"/>
+                      <a:tailEnd type="none" w="med" len="med"/>
+                    </a:lnB>
+                    <a:solidFill>
+                      <a:srgbClr val="F7F8FA"/>
+                    </a:solidFill>
+                  </a:tcPr>
+                </a:tc>
+                <a:tc>
+                  <a:txBody>
+                    <a:bodyPr/>
+                    <a:lstStyle/>
+                    <a:p>
+                      <a:pPr indent="0" marL="0">
+                        <a:buNone/>
+                      </a:pPr>
+                      <a:r>
+                        <a:rPr lang="en-US" sz="750" dirty="0">
+                          <a:solidFill>
+                            <a:srgbClr val="1E2B37"/>
+                          </a:solidFill>
+                          <a:latin typeface="Arial" pitchFamily="34" charset="0"/>
+                          <a:ea typeface="Arial" pitchFamily="34" charset="-122"/>
+                          <a:cs typeface="Arial" pitchFamily="34" charset="-120"/>
+                        </a:rPr>
+                        <a:t>0,30</a:t>
+                      </a:r>
+                      <a:endParaRPr lang="en-US" sz="750" dirty="0">
+                        <a:latin typeface="Arial" charset="0"/>
+                        <a:ea typeface="Arial" charset="0"/>
+                        <a:cs typeface="Arial" charset="0"/>
+                      </a:endParaRPr>
+                    </a:p>
+                  </a:txBody>
+                  <a:tcPr marL="45720" marR="45720" marT="45720" marB="45720" anchor="ctr">
+                    <a:lnL w="6350" cap="flat" cmpd="sng" algn="ctr">
+                      <a:solidFill>
+                        <a:srgbClr val="E6E9EC"/>
+                      </a:solidFill>
+                      <a:prstDash val="solid"/>
+                      <a:round/>
+                      <a:headEnd type="none" w="med" len="med"/>
+                      <a:tailEnd type="none" w="med" len="med"/>
+                    </a:lnL>
+                    <a:lnR w="6350" cap="flat" cmpd="sng" algn="ctr">
+                      <a:solidFill>
+                        <a:srgbClr val="E6E9EC"/>
+                      </a:solidFill>
+                      <a:prstDash val="solid"/>
+                      <a:round/>
+                      <a:headEnd type="none" w="med" len="med"/>
+                      <a:tailEnd type="none" w="med" len="med"/>
+                    </a:lnR>
+                    <a:lnT w="6350" cap="flat" cmpd="sng" algn="ctr">
+                      <a:solidFill>
+                        <a:srgbClr val="E6E9EC"/>
+                      </a:solidFill>
+                      <a:prstDash val="solid"/>
+                      <a:round/>
+                      <a:headEnd type="none" w="med" len="med"/>
+                      <a:tailEnd type="none" w="med" len="med"/>
+                    </a:lnT>
+                    <a:lnB w="6350" cap="flat" cmpd="sng" algn="ctr">
+                      <a:solidFill>
+                        <a:srgbClr val="E6E9EC"/>
+                      </a:solidFill>
+                      <a:prstDash val="solid"/>
+                      <a:round/>
+                      <a:headEnd type="none" w="med" len="med"/>
+                      <a:tailEnd type="none" w="med" len="med"/>
+                    </a:lnB>
+                    <a:solidFill>
+                      <a:srgbClr val="F7F8FA"/>
+                    </a:solidFill>
+                  </a:tcPr>
+                </a:tc>
+              </a:tr>
+              <a:tr h="219456">
+                <a:tc>
+                  <a:txBody>
+                    <a:bodyPr/>
+                    <a:lstStyle/>
+                    <a:p>
+                      <a:pPr indent="0" marL="0">
+                        <a:buNone/>
+                      </a:pPr>
+                      <a:r>
+                        <a:rPr lang="en-US" sz="750" b="1" dirty="0">
+                          <a:solidFill>
+                            <a:srgbClr val="1E2B37"/>
+                          </a:solidFill>
+                          <a:latin typeface="Arial" pitchFamily="34" charset="0"/>
+                          <a:ea typeface="Arial" pitchFamily="34" charset="-122"/>
+                          <a:cs typeface="Arial" pitchFamily="34" charset="-120"/>
+                        </a:rPr>
+                        <a:t>Coste total</a:t>
+                      </a:r>
+                      <a:endParaRPr lang="en-US" sz="750" dirty="0">
+                        <a:latin typeface="Arial" charset="0"/>
+                        <a:ea typeface="Arial" charset="0"/>
+                        <a:cs typeface="Arial" charset="0"/>
+                      </a:endParaRPr>
+                    </a:p>
+                  </a:txBody>
+                  <a:tcPr marL="45720" marR="45720" marT="45720" marB="45720" anchor="ctr">
+                    <a:lnL w="6350" cap="flat" cmpd="sng" algn="ctr">
+                      <a:solidFill>
+                        <a:srgbClr val="E6E9EC"/>
+                      </a:solidFill>
+                      <a:prstDash val="solid"/>
+                      <a:round/>
+                      <a:headEnd type="none" w="med" len="med"/>
+                      <a:tailEnd type="none" w="med" len="med"/>
+                    </a:lnL>
+                    <a:lnR w="6350" cap="flat" cmpd="sng" algn="ctr">
+                      <a:solidFill>
+                        <a:srgbClr val="E6E9EC"/>
+                      </a:solidFill>
+                      <a:prstDash val="solid"/>
+                      <a:round/>
+                      <a:headEnd type="none" w="med" len="med"/>
+                      <a:tailEnd type="none" w="med" len="med"/>
+                    </a:lnR>
+                    <a:lnT w="6350" cap="flat" cmpd="sng" algn="ctr">
+                      <a:solidFill>
+                        <a:srgbClr val="E6E9EC"/>
+                      </a:solidFill>
+                      <a:prstDash val="solid"/>
+                      <a:round/>
+                      <a:headEnd type="none" w="med" len="med"/>
+                      <a:tailEnd type="none" w="med" len="med"/>
+                    </a:lnT>
+                    <a:lnB w="6350" cap="flat" cmpd="sng" algn="ctr">
+                      <a:solidFill>
+                        <a:srgbClr val="E6E9EC"/>
+                      </a:solidFill>
+                      <a:prstDash val="solid"/>
+                      <a:round/>
+                      <a:headEnd type="none" w="med" len="med"/>
+                      <a:tailEnd type="none" w="med" len="med"/>
+                    </a:lnB>
+                    <a:solidFill>
+                      <a:srgbClr val="FFFFFF"/>
+                    </a:solidFill>
+                  </a:tcPr>
+                </a:tc>
+                <a:tc>
+                  <a:txBody>
+                    <a:bodyPr/>
+                    <a:lstStyle/>
+                    <a:p>
+                      <a:pPr indent="0" marL="0">
+                        <a:buNone/>
+                      </a:pPr>
+                      <a:r>
+                        <a:rPr lang="en-US" sz="750" b="1" dirty="0">
+                          <a:solidFill>
+                            <a:srgbClr val="1E2B37"/>
+                          </a:solidFill>
+                          <a:latin typeface="Arial" pitchFamily="34" charset="0"/>
+                          <a:ea typeface="Arial" pitchFamily="34" charset="-122"/>
+                          <a:cs typeface="Arial" pitchFamily="34" charset="-120"/>
+                        </a:rPr>
+                        <a:t>4,77</a:t>
+                      </a:r>
+                      <a:endParaRPr lang="en-US" sz="750" dirty="0">
+                        <a:latin typeface="Arial" charset="0"/>
+                        <a:ea typeface="Arial" charset="0"/>
+                        <a:cs typeface="Arial" charset="0"/>
+                      </a:endParaRPr>
+                    </a:p>
+                  </a:txBody>
+                  <a:tcPr marL="45720" marR="45720" marT="45720" marB="45720" anchor="ctr">
+                    <a:lnL w="6350" cap="flat" cmpd="sng" algn="ctr">
+                      <a:solidFill>
+                        <a:srgbClr val="E6E9EC"/>
+                      </a:solidFill>
+                      <a:prstDash val="solid"/>
+                      <a:round/>
+                      <a:headEnd type="none" w="med" len="med"/>
+                      <a:tailEnd type="none" w="med" len="med"/>
+                    </a:lnL>
+                    <a:lnR w="6350" cap="flat" cmpd="sng" algn="ctr">
+                      <a:solidFill>
+                        <a:srgbClr val="E6E9EC"/>
+                      </a:solidFill>
+                      <a:prstDash val="solid"/>
+                      <a:round/>
+                      <a:headEnd type="none" w="med" len="med"/>
+                      <a:tailEnd type="none" w="med" len="med"/>
+                    </a:lnR>
+                    <a:lnT w="6350" cap="flat" cmpd="sng" algn="ctr">
+                      <a:solidFill>
+                        <a:srgbClr val="E6E9EC"/>
+                      </a:solidFill>
+                      <a:prstDash val="solid"/>
+                      <a:round/>
+                      <a:headEnd type="none" w="med" len="med"/>
+                      <a:tailEnd type="none" w="med" len="med"/>
+                    </a:lnT>
+                    <a:lnB w="6350" cap="flat" cmpd="sng" algn="ctr">
+                      <a:solidFill>
+                        <a:srgbClr val="E6E9EC"/>
+                      </a:solidFill>
+                      <a:prstDash val="solid"/>
+                      <a:round/>
+                      <a:headEnd type="none" w="med" len="med"/>
+                      <a:tailEnd type="none" w="med" len="med"/>
+                    </a:lnB>
+                    <a:solidFill>
+                      <a:srgbClr val="FFFFFF"/>
+                    </a:solidFill>
+                  </a:tcPr>
+                </a:tc>
+              </a:tr>
+              <a:tr h="219456">
+                <a:tc>
+                  <a:txBody>
+                    <a:bodyPr/>
+                    <a:lstStyle/>
+                    <a:p>
+                      <a:pPr indent="0" marL="0">
+                        <a:buNone/>
+                      </a:pPr>
+                      <a:r>
+                        <a:rPr lang="en-US" sz="750" b="1" dirty="0">
+                          <a:solidFill>
+                            <a:srgbClr val="AE4E14"/>
+                          </a:solidFill>
+                          <a:latin typeface="Arial" pitchFamily="34" charset="0"/>
+                          <a:ea typeface="Arial" pitchFamily="34" charset="-122"/>
+                          <a:cs typeface="Arial" pitchFamily="34" charset="-120"/>
+                        </a:rPr>
+                        <a:t>Precio a Cuentalia · margen operativo Qaracter</a:t>
+                      </a:r>
+                      <a:endParaRPr lang="en-US" sz="750" dirty="0">
+                        <a:latin typeface="Arial" charset="0"/>
+                        <a:ea typeface="Arial" charset="0"/>
+                        <a:cs typeface="Arial" charset="0"/>
+                      </a:endParaRPr>
+                    </a:p>
+                  </a:txBody>
+                  <a:tcPr marL="45720" marR="45720" marT="45720" marB="45720" anchor="ctr">
+                    <a:lnL w="6350" cap="flat" cmpd="sng" algn="ctr">
+                      <a:solidFill>
+                        <a:srgbClr val="E6E9EC"/>
+                      </a:solidFill>
+                      <a:prstDash val="solid"/>
+                      <a:round/>
+                      <a:headEnd type="none" w="med" len="med"/>
+                      <a:tailEnd type="none" w="med" len="med"/>
+                    </a:lnL>
+                    <a:lnR w="6350" cap="flat" cmpd="sng" algn="ctr">
+                      <a:solidFill>
+                        <a:srgbClr val="E6E9EC"/>
+                      </a:solidFill>
+                      <a:prstDash val="solid"/>
+                      <a:round/>
+                      <a:headEnd type="none" w="med" len="med"/>
+                      <a:tailEnd type="none" w="med" len="med"/>
+                    </a:lnR>
+                    <a:lnT w="6350" cap="flat" cmpd="sng" algn="ctr">
+                      <a:solidFill>
+                        <a:srgbClr val="E6E9EC"/>
+                      </a:solidFill>
+                      <a:prstDash val="solid"/>
+                      <a:round/>
+                      <a:headEnd type="none" w="med" len="med"/>
+                      <a:tailEnd type="none" w="med" len="med"/>
+                    </a:lnT>
+                    <a:lnB w="6350" cap="flat" cmpd="sng" algn="ctr">
+                      <a:solidFill>
+                        <a:srgbClr val="E6E9EC"/>
+                      </a:solidFill>
+                      <a:prstDash val="solid"/>
+                      <a:round/>
+                      <a:headEnd type="none" w="med" len="med"/>
+                      <a:tailEnd type="none" w="med" len="med"/>
+                    </a:lnB>
+                    <a:solidFill>
+                      <a:srgbClr val="F7F8FA"/>
+                    </a:solidFill>
+                  </a:tcPr>
+                </a:tc>
+                <a:tc>
+                  <a:txBody>
+                    <a:bodyPr/>
+                    <a:lstStyle/>
+                    <a:p>
+                      <a:pPr indent="0" marL="0">
+                        <a:buNone/>
+                      </a:pPr>
+                      <a:r>
+                        <a:rPr lang="en-US" sz="750" b="1" dirty="0">
+                          <a:solidFill>
+                            <a:srgbClr val="AE4E14"/>
+                          </a:solidFill>
+                          <a:latin typeface="Arial" pitchFamily="34" charset="0"/>
+                          <a:ea typeface="Arial" pitchFamily="34" charset="-122"/>
+                          <a:cs typeface="Arial" pitchFamily="34" charset="-120"/>
+                        </a:rPr>
+                        <a:t>12 · 7,23 (60 %)</a:t>
+                      </a:r>
+                      <a:endParaRPr lang="en-US" sz="750" dirty="0">
+                        <a:latin typeface="Arial" charset="0"/>
+                        <a:ea typeface="Arial" charset="0"/>
+                        <a:cs typeface="Arial" charset="0"/>
+                      </a:endParaRPr>
+                    </a:p>
+                  </a:txBody>
+                  <a:tcPr marL="45720" marR="45720" marT="45720" marB="45720" anchor="ctr">
+                    <a:lnL w="6350" cap="flat" cmpd="sng" algn="ctr">
+                      <a:solidFill>
+                        <a:srgbClr val="E6E9EC"/>
+                      </a:solidFill>
+                      <a:prstDash val="solid"/>
+                      <a:round/>
+                      <a:headEnd type="none" w="med" len="med"/>
+                      <a:tailEnd type="none" w="med" len="med"/>
+                    </a:lnL>
+                    <a:lnR w="6350" cap="flat" cmpd="sng" algn="ctr">
+                      <a:solidFill>
+                        <a:srgbClr val="E6E9EC"/>
+                      </a:solidFill>
+                      <a:prstDash val="solid"/>
+                      <a:round/>
+                      <a:headEnd type="none" w="med" len="med"/>
+                      <a:tailEnd type="none" w="med" len="med"/>
+                    </a:lnR>
+                    <a:lnT w="6350" cap="flat" cmpd="sng" algn="ctr">
+                      <a:solidFill>
+                        <a:srgbClr val="E6E9EC"/>
+                      </a:solidFill>
+                      <a:prstDash val="solid"/>
+                      <a:round/>
+                      <a:headEnd type="none" w="med" len="med"/>
+                      <a:tailEnd type="none" w="med" len="med"/>
+                    </a:lnT>
+                    <a:lnB w="6350" cap="flat" cmpd="sng" algn="ctr">
+                      <a:solidFill>
+                        <a:srgbClr val="E6E9EC"/>
+                      </a:solidFill>
+                      <a:prstDash val="solid"/>
+                      <a:round/>
+                      <a:headEnd type="none" w="med" len="med"/>
+                      <a:tailEnd type="none" w="med" len="med"/>
+                    </a:lnB>
+                    <a:solidFill>
+                      <a:srgbClr val="F7F8FA"/>
+                    </a:solidFill>
+                  </a:tcPr>
+                </a:tc>
+              </a:tr>
+            </a:tbl>
+          </a:graphicData>
+        </a:graphic>
+      </p:graphicFrame>
+      <p:sp>
+        <p:nvSpPr>
+          <p:cNvPr id="10" name="Text 5"/>
           <p:cNvSpPr txBox="1"/>
           <p:nvPr/>
         </p:nvSpPr>
         <p:spPr>
           <a:xfrm>
-            <a:off x="4471416" y="3584448"/>
-            <a:ext cx="896112" cy="347472"/>
+            <a:off x="4709160" y="1115568"/>
+            <a:ext cx="3977640" cy="182880"/>
           </a:xfrm>
           <a:prstGeom prst="rect">
             <a:avLst/>
@@ -7196,72 +7713,11 @@
           <a:bodyPr wrap="square" lIns="0" tIns="0" rIns="0" bIns="0" rtlCol="0" anchor="t"/>
           <a:lstStyle/>
           <a:p>
-            <a:pPr algn="ctr" indent="0" marL="0">
+            <a:pPr indent="0" marL="0">
               <a:buNone/>
             </a:pPr>
             <a:r>
-              <a:rPr lang="en-US" sz="750" dirty="0">
-                <a:solidFill>
-                  <a:srgbClr val="3D4A56"/>
-                </a:solidFill>
-                <a:latin typeface="Arial" pitchFamily="34" charset="0"/>
-                <a:ea typeface="Arial" pitchFamily="34" charset="-122"/>
-                <a:cs typeface="Arial" pitchFamily="34" charset="-120"/>
-              </a:rPr>
-              <a:t>«Canela» en v1 → v2</a:t>
-            </a:r>
-            <a:endParaRPr lang="en-US" sz="750" dirty="0"/>
-          </a:p>
-        </p:txBody>
-      </p:sp>
-      <p:sp>
-        <p:nvSpPr>
-          <p:cNvPr id="31" name="Shape 25"/>
-          <p:cNvSpPr/>
-          <p:nvPr/>
-        </p:nvSpPr>
-        <p:spPr>
-          <a:xfrm>
-            <a:off x="5513832" y="3154680"/>
-            <a:ext cx="969264" cy="822960"/>
-          </a:xfrm>
-          <a:prstGeom prst="roundRect">
-            <a:avLst>
-              <a:gd name="adj" fmla="val 8889"/>
-            </a:avLst>
-          </a:prstGeom>
-          <a:solidFill>
-            <a:srgbClr val="FFF5EE"/>
-          </a:solidFill>
-          <a:ln/>
-        </p:spPr>
-      </p:sp>
-      <p:sp>
-        <p:nvSpPr>
-          <p:cNvPr id="32" name="Text 26"/>
-          <p:cNvSpPr txBox="1"/>
-          <p:nvPr/>
-        </p:nvSpPr>
-        <p:spPr>
-          <a:xfrm>
-            <a:off x="5513832" y="3218688"/>
-            <a:ext cx="969264" cy="365760"/>
-          </a:xfrm>
-          <a:prstGeom prst="rect">
-            <a:avLst/>
-          </a:prstGeom>
-          <a:noFill/>
-          <a:ln/>
-        </p:spPr>
-        <p:txBody>
-          <a:bodyPr wrap="square" lIns="0" tIns="0" rIns="0" bIns="0" rtlCol="0" anchor="ctr"/>
-          <a:lstStyle/>
-          <a:p>
-            <a:pPr algn="ctr" indent="0" marL="0">
-              <a:buNone/>
-            </a:pPr>
-            <a:r>
-              <a:rPr lang="en-US" sz="1400" b="1" dirty="0">
+              <a:rPr lang="en-US" sz="750" b="1" spc="100" kern="0" dirty="0">
                 <a:solidFill>
                   <a:srgbClr val="AE4E14"/>
                 </a:solidFill>
@@ -7269,22 +7725,1289 @@
                 <a:ea typeface="Arial" pitchFamily="34" charset="-122"/>
                 <a:cs typeface="Arial" pitchFamily="34" charset="-120"/>
               </a:rPr>
-              <a:t>0 → 45</a:t>
+              <a:t>PROYECTO DE DESARROLLO</a:t>
             </a:r>
-            <a:endParaRPr lang="en-US" sz="1400" dirty="0"/>
-          </a:p>
-        </p:txBody>
-      </p:sp>
-      <p:sp>
-        <p:nvSpPr>
-          <p:cNvPr id="33" name="Text 27"/>
+            <a:endParaRPr lang="en-US" sz="750" dirty="0"/>
+          </a:p>
+        </p:txBody>
+      </p:sp>
+      <p:graphicFrame>
+        <p:nvGraphicFramePr>
+          <p:cNvPr id="25" name="Table 1"/>
+          <p:cNvGraphicFramePr>
+            <a:graphicFrameLocks noGrp="1"/>
+          </p:cNvGraphicFramePr>
+          <p:nvPr>
+            <p:extLst>
+              <p:ext uri="{D42A27DB-BD31-4B8C-83A1-F6EECF244321}">
+                <p14:modId xmlns:p14="http://schemas.microsoft.com/office/powerpoint/2010/main" val="1579011935"/>
+              </p:ext>
+            </p:extLst>
+          </p:nvPr>
+        </p:nvGraphicFramePr>
+        <p:xfrm>
+          <a:off x="4709160" y="1325880"/>
+          <a:ext cx="3977640" cy="914400"/>
+        </p:xfrm>
+        <a:graphic>
+          <a:graphicData uri="http://schemas.openxmlformats.org/drawingml/2006/table">
+            <a:tbl>
+              <a:tblPr/>
+              <a:tblGrid>
+                <a:gridCol w="2514600"/>
+                <a:gridCol w="548640"/>
+                <a:gridCol w="914400"/>
+              </a:tblGrid>
+              <a:tr h="219456">
+                <a:tc>
+                  <a:txBody>
+                    <a:bodyPr/>
+                    <a:lstStyle/>
+                    <a:p>
+                      <a:pPr indent="0" marL="0">
+                        <a:buNone/>
+                      </a:pPr>
+                      <a:r>
+                        <a:rPr lang="en-US" sz="750" b="1" dirty="0">
+                          <a:solidFill>
+                            <a:srgbClr val="FFFFFF"/>
+                          </a:solidFill>
+                          <a:latin typeface="Arial" pitchFamily="34" charset="0"/>
+                          <a:ea typeface="Arial" pitchFamily="34" charset="-122"/>
+                          <a:cs typeface="Arial" pitchFamily="34" charset="-120"/>
+                        </a:rPr>
+                        <a:t>Fase</a:t>
+                      </a:r>
+                      <a:endParaRPr lang="en-US" sz="750" dirty="0">
+                        <a:latin typeface="Arial" charset="0"/>
+                        <a:ea typeface="Arial" charset="0"/>
+                        <a:cs typeface="Arial" charset="0"/>
+                      </a:endParaRPr>
+                    </a:p>
+                  </a:txBody>
+                  <a:tcPr marL="45720" marR="45720" marT="45720" marB="45720" anchor="ctr">
+                    <a:lnL w="6350" cap="flat" cmpd="sng" algn="ctr">
+                      <a:solidFill>
+                        <a:srgbClr val="E6E9EC"/>
+                      </a:solidFill>
+                      <a:prstDash val="solid"/>
+                      <a:round/>
+                      <a:headEnd type="none" w="med" len="med"/>
+                      <a:tailEnd type="none" w="med" len="med"/>
+                    </a:lnL>
+                    <a:lnR w="6350" cap="flat" cmpd="sng" algn="ctr">
+                      <a:solidFill>
+                        <a:srgbClr val="E6E9EC"/>
+                      </a:solidFill>
+                      <a:prstDash val="solid"/>
+                      <a:round/>
+                      <a:headEnd type="none" w="med" len="med"/>
+                      <a:tailEnd type="none" w="med" len="med"/>
+                    </a:lnR>
+                    <a:lnT w="6350" cap="flat" cmpd="sng" algn="ctr">
+                      <a:solidFill>
+                        <a:srgbClr val="E6E9EC"/>
+                      </a:solidFill>
+                      <a:prstDash val="solid"/>
+                      <a:round/>
+                      <a:headEnd type="none" w="med" len="med"/>
+                      <a:tailEnd type="none" w="med" len="med"/>
+                    </a:lnT>
+                    <a:lnB w="6350" cap="flat" cmpd="sng" algn="ctr">
+                      <a:solidFill>
+                        <a:srgbClr val="E6E9EC"/>
+                      </a:solidFill>
+                      <a:prstDash val="solid"/>
+                      <a:round/>
+                      <a:headEnd type="none" w="med" len="med"/>
+                      <a:tailEnd type="none" w="med" len="med"/>
+                    </a:lnB>
+                    <a:solidFill>
+                      <a:srgbClr val="1E2B37"/>
+                    </a:solidFill>
+                  </a:tcPr>
+                </a:tc>
+                <a:tc>
+                  <a:txBody>
+                    <a:bodyPr/>
+                    <a:lstStyle/>
+                    <a:p>
+                      <a:pPr indent="0" marL="0">
+                        <a:buNone/>
+                      </a:pPr>
+                      <a:r>
+                        <a:rPr lang="en-US" sz="750" b="1" dirty="0">
+                          <a:solidFill>
+                            <a:srgbClr val="FFFFFF"/>
+                          </a:solidFill>
+                          <a:latin typeface="Arial" pitchFamily="34" charset="0"/>
+                          <a:ea typeface="Arial" pitchFamily="34" charset="-122"/>
+                          <a:cs typeface="Arial" pitchFamily="34" charset="-120"/>
+                        </a:rPr>
+                        <a:t>Horas</a:t>
+                      </a:r>
+                      <a:endParaRPr lang="en-US" sz="750" dirty="0">
+                        <a:latin typeface="Arial" charset="0"/>
+                        <a:ea typeface="Arial" charset="0"/>
+                        <a:cs typeface="Arial" charset="0"/>
+                      </a:endParaRPr>
+                    </a:p>
+                  </a:txBody>
+                  <a:tcPr marL="45720" marR="45720" marT="45720" marB="45720" anchor="ctr">
+                    <a:lnL w="6350" cap="flat" cmpd="sng" algn="ctr">
+                      <a:solidFill>
+                        <a:srgbClr val="E6E9EC"/>
+                      </a:solidFill>
+                      <a:prstDash val="solid"/>
+                      <a:round/>
+                      <a:headEnd type="none" w="med" len="med"/>
+                      <a:tailEnd type="none" w="med" len="med"/>
+                    </a:lnL>
+                    <a:lnR w="6350" cap="flat" cmpd="sng" algn="ctr">
+                      <a:solidFill>
+                        <a:srgbClr val="E6E9EC"/>
+                      </a:solidFill>
+                      <a:prstDash val="solid"/>
+                      <a:round/>
+                      <a:headEnd type="none" w="med" len="med"/>
+                      <a:tailEnd type="none" w="med" len="med"/>
+                    </a:lnR>
+                    <a:lnT w="6350" cap="flat" cmpd="sng" algn="ctr">
+                      <a:solidFill>
+                        <a:srgbClr val="E6E9EC"/>
+                      </a:solidFill>
+                      <a:prstDash val="solid"/>
+                      <a:round/>
+                      <a:headEnd type="none" w="med" len="med"/>
+                      <a:tailEnd type="none" w="med" len="med"/>
+                    </a:lnT>
+                    <a:lnB w="6350" cap="flat" cmpd="sng" algn="ctr">
+                      <a:solidFill>
+                        <a:srgbClr val="E6E9EC"/>
+                      </a:solidFill>
+                      <a:prstDash val="solid"/>
+                      <a:round/>
+                      <a:headEnd type="none" w="med" len="med"/>
+                      <a:tailEnd type="none" w="med" len="med"/>
+                    </a:lnB>
+                    <a:solidFill>
+                      <a:srgbClr val="1E2B37"/>
+                    </a:solidFill>
+                  </a:tcPr>
+                </a:tc>
+                <a:tc>
+                  <a:txBody>
+                    <a:bodyPr/>
+                    <a:lstStyle/>
+                    <a:p>
+                      <a:pPr indent="0" marL="0">
+                        <a:buNone/>
+                      </a:pPr>
+                      <a:r>
+                        <a:rPr lang="en-US" sz="750" b="1" dirty="0">
+                          <a:solidFill>
+                            <a:srgbClr val="FFFFFF"/>
+                          </a:solidFill>
+                          <a:latin typeface="Arial" pitchFamily="34" charset="0"/>
+                          <a:ea typeface="Arial" pitchFamily="34" charset="-122"/>
+                          <a:cs typeface="Arial" pitchFamily="34" charset="-120"/>
+                        </a:rPr>
+                        <a:t>€</a:t>
+                      </a:r>
+                      <a:endParaRPr lang="en-US" sz="750" dirty="0">
+                        <a:latin typeface="Arial" charset="0"/>
+                        <a:ea typeface="Arial" charset="0"/>
+                        <a:cs typeface="Arial" charset="0"/>
+                      </a:endParaRPr>
+                    </a:p>
+                  </a:txBody>
+                  <a:tcPr marL="45720" marR="45720" marT="45720" marB="45720" anchor="ctr">
+                    <a:lnL w="6350" cap="flat" cmpd="sng" algn="ctr">
+                      <a:solidFill>
+                        <a:srgbClr val="E6E9EC"/>
+                      </a:solidFill>
+                      <a:prstDash val="solid"/>
+                      <a:round/>
+                      <a:headEnd type="none" w="med" len="med"/>
+                      <a:tailEnd type="none" w="med" len="med"/>
+                    </a:lnL>
+                    <a:lnR w="6350" cap="flat" cmpd="sng" algn="ctr">
+                      <a:solidFill>
+                        <a:srgbClr val="E6E9EC"/>
+                      </a:solidFill>
+                      <a:prstDash val="solid"/>
+                      <a:round/>
+                      <a:headEnd type="none" w="med" len="med"/>
+                      <a:tailEnd type="none" w="med" len="med"/>
+                    </a:lnR>
+                    <a:lnT w="6350" cap="flat" cmpd="sng" algn="ctr">
+                      <a:solidFill>
+                        <a:srgbClr val="E6E9EC"/>
+                      </a:solidFill>
+                      <a:prstDash val="solid"/>
+                      <a:round/>
+                      <a:headEnd type="none" w="med" len="med"/>
+                      <a:tailEnd type="none" w="med" len="med"/>
+                    </a:lnT>
+                    <a:lnB w="6350" cap="flat" cmpd="sng" algn="ctr">
+                      <a:solidFill>
+                        <a:srgbClr val="E6E9EC"/>
+                      </a:solidFill>
+                      <a:prstDash val="solid"/>
+                      <a:round/>
+                      <a:headEnd type="none" w="med" len="med"/>
+                      <a:tailEnd type="none" w="med" len="med"/>
+                    </a:lnB>
+                    <a:solidFill>
+                      <a:srgbClr val="1E2B37"/>
+                    </a:solidFill>
+                  </a:tcPr>
+                </a:tc>
+              </a:tr>
+              <a:tr h="219456">
+                <a:tc>
+                  <a:txBody>
+                    <a:bodyPr/>
+                    <a:lstStyle/>
+                    <a:p>
+                      <a:pPr indent="0" marL="0">
+                        <a:buNone/>
+                      </a:pPr>
+                      <a:r>
+                        <a:rPr lang="en-US" sz="750" dirty="0">
+                          <a:solidFill>
+                            <a:srgbClr val="1E2B37"/>
+                          </a:solidFill>
+                          <a:latin typeface="Arial" pitchFamily="34" charset="0"/>
+                          <a:ea typeface="Arial" pitchFamily="34" charset="-122"/>
+                          <a:cs typeface="Arial" pitchFamily="34" charset="-120"/>
+                        </a:rPr>
+                        <a:t>Diseño (specs, arquitectura, TLA+)</a:t>
+                      </a:r>
+                      <a:endParaRPr lang="en-US" sz="750" dirty="0">
+                        <a:latin typeface="Arial" charset="0"/>
+                        <a:ea typeface="Arial" charset="0"/>
+                        <a:cs typeface="Arial" charset="0"/>
+                      </a:endParaRPr>
+                    </a:p>
+                  </a:txBody>
+                  <a:tcPr marL="45720" marR="45720" marT="45720" marB="45720" anchor="ctr">
+                    <a:lnL w="6350" cap="flat" cmpd="sng" algn="ctr">
+                      <a:solidFill>
+                        <a:srgbClr val="E6E9EC"/>
+                      </a:solidFill>
+                      <a:prstDash val="solid"/>
+                      <a:round/>
+                      <a:headEnd type="none" w="med" len="med"/>
+                      <a:tailEnd type="none" w="med" len="med"/>
+                    </a:lnL>
+                    <a:lnR w="6350" cap="flat" cmpd="sng" algn="ctr">
+                      <a:solidFill>
+                        <a:srgbClr val="E6E9EC"/>
+                      </a:solidFill>
+                      <a:prstDash val="solid"/>
+                      <a:round/>
+                      <a:headEnd type="none" w="med" len="med"/>
+                      <a:tailEnd type="none" w="med" len="med"/>
+                    </a:lnR>
+                    <a:lnT w="6350" cap="flat" cmpd="sng" algn="ctr">
+                      <a:solidFill>
+                        <a:srgbClr val="E6E9EC"/>
+                      </a:solidFill>
+                      <a:prstDash val="solid"/>
+                      <a:round/>
+                      <a:headEnd type="none" w="med" len="med"/>
+                      <a:tailEnd type="none" w="med" len="med"/>
+                    </a:lnT>
+                    <a:lnB w="6350" cap="flat" cmpd="sng" algn="ctr">
+                      <a:solidFill>
+                        <a:srgbClr val="E6E9EC"/>
+                      </a:solidFill>
+                      <a:prstDash val="solid"/>
+                      <a:round/>
+                      <a:headEnd type="none" w="med" len="med"/>
+                      <a:tailEnd type="none" w="med" len="med"/>
+                    </a:lnB>
+                    <a:solidFill>
+                      <a:srgbClr val="FFFFFF"/>
+                    </a:solidFill>
+                  </a:tcPr>
+                </a:tc>
+                <a:tc>
+                  <a:txBody>
+                    <a:bodyPr/>
+                    <a:lstStyle/>
+                    <a:p>
+                      <a:pPr indent="0" marL="0">
+                        <a:buNone/>
+                      </a:pPr>
+                      <a:r>
+                        <a:rPr lang="en-US" sz="750" dirty="0">
+                          <a:solidFill>
+                            <a:srgbClr val="1E2B37"/>
+                          </a:solidFill>
+                          <a:latin typeface="Arial" pitchFamily="34" charset="0"/>
+                          <a:ea typeface="Arial" pitchFamily="34" charset="-122"/>
+                          <a:cs typeface="Arial" pitchFamily="34" charset="-120"/>
+                        </a:rPr>
+                        <a:t>60</a:t>
+                      </a:r>
+                      <a:endParaRPr lang="en-US" sz="750" dirty="0">
+                        <a:latin typeface="Arial" charset="0"/>
+                        <a:ea typeface="Arial" charset="0"/>
+                        <a:cs typeface="Arial" charset="0"/>
+                      </a:endParaRPr>
+                    </a:p>
+                  </a:txBody>
+                  <a:tcPr marL="45720" marR="45720" marT="45720" marB="45720" anchor="ctr">
+                    <a:lnL w="6350" cap="flat" cmpd="sng" algn="ctr">
+                      <a:solidFill>
+                        <a:srgbClr val="E6E9EC"/>
+                      </a:solidFill>
+                      <a:prstDash val="solid"/>
+                      <a:round/>
+                      <a:headEnd type="none" w="med" len="med"/>
+                      <a:tailEnd type="none" w="med" len="med"/>
+                    </a:lnL>
+                    <a:lnR w="6350" cap="flat" cmpd="sng" algn="ctr">
+                      <a:solidFill>
+                        <a:srgbClr val="E6E9EC"/>
+                      </a:solidFill>
+                      <a:prstDash val="solid"/>
+                      <a:round/>
+                      <a:headEnd type="none" w="med" len="med"/>
+                      <a:tailEnd type="none" w="med" len="med"/>
+                    </a:lnR>
+                    <a:lnT w="6350" cap="flat" cmpd="sng" algn="ctr">
+                      <a:solidFill>
+                        <a:srgbClr val="E6E9EC"/>
+                      </a:solidFill>
+                      <a:prstDash val="solid"/>
+                      <a:round/>
+                      <a:headEnd type="none" w="med" len="med"/>
+                      <a:tailEnd type="none" w="med" len="med"/>
+                    </a:lnT>
+                    <a:lnB w="6350" cap="flat" cmpd="sng" algn="ctr">
+                      <a:solidFill>
+                        <a:srgbClr val="E6E9EC"/>
+                      </a:solidFill>
+                      <a:prstDash val="solid"/>
+                      <a:round/>
+                      <a:headEnd type="none" w="med" len="med"/>
+                      <a:tailEnd type="none" w="med" len="med"/>
+                    </a:lnB>
+                    <a:solidFill>
+                      <a:srgbClr val="FFFFFF"/>
+                    </a:solidFill>
+                  </a:tcPr>
+                </a:tc>
+                <a:tc>
+                  <a:txBody>
+                    <a:bodyPr/>
+                    <a:lstStyle/>
+                    <a:p>
+                      <a:pPr indent="0" marL="0">
+                        <a:buNone/>
+                      </a:pPr>
+                      <a:r>
+                        <a:rPr lang="en-US" sz="750" dirty="0">
+                          <a:solidFill>
+                            <a:srgbClr val="1E2B37"/>
+                          </a:solidFill>
+                          <a:latin typeface="Arial" pitchFamily="34" charset="0"/>
+                          <a:ea typeface="Arial" pitchFamily="34" charset="-122"/>
+                          <a:cs typeface="Arial" pitchFamily="34" charset="-120"/>
+                        </a:rPr>
+                        <a:t>4.800</a:t>
+                      </a:r>
+                      <a:endParaRPr lang="en-US" sz="750" dirty="0">
+                        <a:latin typeface="Arial" charset="0"/>
+                        <a:ea typeface="Arial" charset="0"/>
+                        <a:cs typeface="Arial" charset="0"/>
+                      </a:endParaRPr>
+                    </a:p>
+                  </a:txBody>
+                  <a:tcPr marL="45720" marR="45720" marT="45720" marB="45720" anchor="ctr">
+                    <a:lnL w="6350" cap="flat" cmpd="sng" algn="ctr">
+                      <a:solidFill>
+                        <a:srgbClr val="E6E9EC"/>
+                      </a:solidFill>
+                      <a:prstDash val="solid"/>
+                      <a:round/>
+                      <a:headEnd type="none" w="med" len="med"/>
+                      <a:tailEnd type="none" w="med" len="med"/>
+                    </a:lnL>
+                    <a:lnR w="6350" cap="flat" cmpd="sng" algn="ctr">
+                      <a:solidFill>
+                        <a:srgbClr val="E6E9EC"/>
+                      </a:solidFill>
+                      <a:prstDash val="solid"/>
+                      <a:round/>
+                      <a:headEnd type="none" w="med" len="med"/>
+                      <a:tailEnd type="none" w="med" len="med"/>
+                    </a:lnR>
+                    <a:lnT w="6350" cap="flat" cmpd="sng" algn="ctr">
+                      <a:solidFill>
+                        <a:srgbClr val="E6E9EC"/>
+                      </a:solidFill>
+                      <a:prstDash val="solid"/>
+                      <a:round/>
+                      <a:headEnd type="none" w="med" len="med"/>
+                      <a:tailEnd type="none" w="med" len="med"/>
+                    </a:lnT>
+                    <a:lnB w="6350" cap="flat" cmpd="sng" algn="ctr">
+                      <a:solidFill>
+                        <a:srgbClr val="E6E9EC"/>
+                      </a:solidFill>
+                      <a:prstDash val="solid"/>
+                      <a:round/>
+                      <a:headEnd type="none" w="med" len="med"/>
+                      <a:tailEnd type="none" w="med" len="med"/>
+                    </a:lnB>
+                    <a:solidFill>
+                      <a:srgbClr val="FFFFFF"/>
+                    </a:solidFill>
+                  </a:tcPr>
+                </a:tc>
+              </a:tr>
+              <a:tr h="219456">
+                <a:tc>
+                  <a:txBody>
+                    <a:bodyPr/>
+                    <a:lstStyle/>
+                    <a:p>
+                      <a:pPr indent="0" marL="0">
+                        <a:buNone/>
+                      </a:pPr>
+                      <a:r>
+                        <a:rPr lang="en-US" sz="750" dirty="0">
+                          <a:solidFill>
+                            <a:srgbClr val="1E2B37"/>
+                          </a:solidFill>
+                          <a:latin typeface="Arial" pitchFamily="34" charset="0"/>
+                          <a:ea typeface="Arial" pitchFamily="34" charset="-122"/>
+                          <a:cs typeface="Arial" pitchFamily="34" charset="-120"/>
+                        </a:rPr>
+                        <a:t>Desarrollo (pipeline, lector, integración)</a:t>
+                      </a:r>
+                      <a:endParaRPr lang="en-US" sz="750" dirty="0">
+                        <a:latin typeface="Arial" charset="0"/>
+                        <a:ea typeface="Arial" charset="0"/>
+                        <a:cs typeface="Arial" charset="0"/>
+                      </a:endParaRPr>
+                    </a:p>
+                  </a:txBody>
+                  <a:tcPr marL="45720" marR="45720" marT="45720" marB="45720" anchor="ctr">
+                    <a:lnL w="6350" cap="flat" cmpd="sng" algn="ctr">
+                      <a:solidFill>
+                        <a:srgbClr val="E6E9EC"/>
+                      </a:solidFill>
+                      <a:prstDash val="solid"/>
+                      <a:round/>
+                      <a:headEnd type="none" w="med" len="med"/>
+                      <a:tailEnd type="none" w="med" len="med"/>
+                    </a:lnL>
+                    <a:lnR w="6350" cap="flat" cmpd="sng" algn="ctr">
+                      <a:solidFill>
+                        <a:srgbClr val="E6E9EC"/>
+                      </a:solidFill>
+                      <a:prstDash val="solid"/>
+                      <a:round/>
+                      <a:headEnd type="none" w="med" len="med"/>
+                      <a:tailEnd type="none" w="med" len="med"/>
+                    </a:lnR>
+                    <a:lnT w="6350" cap="flat" cmpd="sng" algn="ctr">
+                      <a:solidFill>
+                        <a:srgbClr val="E6E9EC"/>
+                      </a:solidFill>
+                      <a:prstDash val="solid"/>
+                      <a:round/>
+                      <a:headEnd type="none" w="med" len="med"/>
+                      <a:tailEnd type="none" w="med" len="med"/>
+                    </a:lnT>
+                    <a:lnB w="6350" cap="flat" cmpd="sng" algn="ctr">
+                      <a:solidFill>
+                        <a:srgbClr val="E6E9EC"/>
+                      </a:solidFill>
+                      <a:prstDash val="solid"/>
+                      <a:round/>
+                      <a:headEnd type="none" w="med" len="med"/>
+                      <a:tailEnd type="none" w="med" len="med"/>
+                    </a:lnB>
+                    <a:solidFill>
+                      <a:srgbClr val="F7F8FA"/>
+                    </a:solidFill>
+                  </a:tcPr>
+                </a:tc>
+                <a:tc>
+                  <a:txBody>
+                    <a:bodyPr/>
+                    <a:lstStyle/>
+                    <a:p>
+                      <a:pPr indent="0" marL="0">
+                        <a:buNone/>
+                      </a:pPr>
+                      <a:r>
+                        <a:rPr lang="en-US" sz="750" dirty="0">
+                          <a:solidFill>
+                            <a:srgbClr val="1E2B37"/>
+                          </a:solidFill>
+                          <a:latin typeface="Arial" pitchFamily="34" charset="0"/>
+                          <a:ea typeface="Arial" pitchFamily="34" charset="-122"/>
+                          <a:cs typeface="Arial" pitchFamily="34" charset="-120"/>
+                        </a:rPr>
+                        <a:t>180</a:t>
+                      </a:r>
+                      <a:endParaRPr lang="en-US" sz="750" dirty="0">
+                        <a:latin typeface="Arial" charset="0"/>
+                        <a:ea typeface="Arial" charset="0"/>
+                        <a:cs typeface="Arial" charset="0"/>
+                      </a:endParaRPr>
+                    </a:p>
+                  </a:txBody>
+                  <a:tcPr marL="45720" marR="45720" marT="45720" marB="45720" anchor="ctr">
+                    <a:lnL w="6350" cap="flat" cmpd="sng" algn="ctr">
+                      <a:solidFill>
+                        <a:srgbClr val="E6E9EC"/>
+                      </a:solidFill>
+                      <a:prstDash val="solid"/>
+                      <a:round/>
+                      <a:headEnd type="none" w="med" len="med"/>
+                      <a:tailEnd type="none" w="med" len="med"/>
+                    </a:lnL>
+                    <a:lnR w="6350" cap="flat" cmpd="sng" algn="ctr">
+                      <a:solidFill>
+                        <a:srgbClr val="E6E9EC"/>
+                      </a:solidFill>
+                      <a:prstDash val="solid"/>
+                      <a:round/>
+                      <a:headEnd type="none" w="med" len="med"/>
+                      <a:tailEnd type="none" w="med" len="med"/>
+                    </a:lnR>
+                    <a:lnT w="6350" cap="flat" cmpd="sng" algn="ctr">
+                      <a:solidFill>
+                        <a:srgbClr val="E6E9EC"/>
+                      </a:solidFill>
+                      <a:prstDash val="solid"/>
+                      <a:round/>
+                      <a:headEnd type="none" w="med" len="med"/>
+                      <a:tailEnd type="none" w="med" len="med"/>
+                    </a:lnT>
+                    <a:lnB w="6350" cap="flat" cmpd="sng" algn="ctr">
+                      <a:solidFill>
+                        <a:srgbClr val="E6E9EC"/>
+                      </a:solidFill>
+                      <a:prstDash val="solid"/>
+                      <a:round/>
+                      <a:headEnd type="none" w="med" len="med"/>
+                      <a:tailEnd type="none" w="med" len="med"/>
+                    </a:lnB>
+                    <a:solidFill>
+                      <a:srgbClr val="F7F8FA"/>
+                    </a:solidFill>
+                  </a:tcPr>
+                </a:tc>
+                <a:tc>
+                  <a:txBody>
+                    <a:bodyPr/>
+                    <a:lstStyle/>
+                    <a:p>
+                      <a:pPr indent="0" marL="0">
+                        <a:buNone/>
+                      </a:pPr>
+                      <a:r>
+                        <a:rPr lang="en-US" sz="750" dirty="0">
+                          <a:solidFill>
+                            <a:srgbClr val="1E2B37"/>
+                          </a:solidFill>
+                          <a:latin typeface="Arial" pitchFamily="34" charset="0"/>
+                          <a:ea typeface="Arial" pitchFamily="34" charset="-122"/>
+                          <a:cs typeface="Arial" pitchFamily="34" charset="-120"/>
+                        </a:rPr>
+                        <a:t>14.400</a:t>
+                      </a:r>
+                      <a:endParaRPr lang="en-US" sz="750" dirty="0">
+                        <a:latin typeface="Arial" charset="0"/>
+                        <a:ea typeface="Arial" charset="0"/>
+                        <a:cs typeface="Arial" charset="0"/>
+                      </a:endParaRPr>
+                    </a:p>
+                  </a:txBody>
+                  <a:tcPr marL="45720" marR="45720" marT="45720" marB="45720" anchor="ctr">
+                    <a:lnL w="6350" cap="flat" cmpd="sng" algn="ctr">
+                      <a:solidFill>
+                        <a:srgbClr val="E6E9EC"/>
+                      </a:solidFill>
+                      <a:prstDash val="solid"/>
+                      <a:round/>
+                      <a:headEnd type="none" w="med" len="med"/>
+                      <a:tailEnd type="none" w="med" len="med"/>
+                    </a:lnL>
+                    <a:lnR w="6350" cap="flat" cmpd="sng" algn="ctr">
+                      <a:solidFill>
+                        <a:srgbClr val="E6E9EC"/>
+                      </a:solidFill>
+                      <a:prstDash val="solid"/>
+                      <a:round/>
+                      <a:headEnd type="none" w="med" len="med"/>
+                      <a:tailEnd type="none" w="med" len="med"/>
+                    </a:lnR>
+                    <a:lnT w="6350" cap="flat" cmpd="sng" algn="ctr">
+                      <a:solidFill>
+                        <a:srgbClr val="E6E9EC"/>
+                      </a:solidFill>
+                      <a:prstDash val="solid"/>
+                      <a:round/>
+                      <a:headEnd type="none" w="med" len="med"/>
+                      <a:tailEnd type="none" w="med" len="med"/>
+                    </a:lnT>
+                    <a:lnB w="6350" cap="flat" cmpd="sng" algn="ctr">
+                      <a:solidFill>
+                        <a:srgbClr val="E6E9EC"/>
+                      </a:solidFill>
+                      <a:prstDash val="solid"/>
+                      <a:round/>
+                      <a:headEnd type="none" w="med" len="med"/>
+                      <a:tailEnd type="none" w="med" len="med"/>
+                    </a:lnB>
+                    <a:solidFill>
+                      <a:srgbClr val="F7F8FA"/>
+                    </a:solidFill>
+                  </a:tcPr>
+                </a:tc>
+              </a:tr>
+              <a:tr h="219456">
+                <a:tc>
+                  <a:txBody>
+                    <a:bodyPr/>
+                    <a:lstStyle/>
+                    <a:p>
+                      <a:pPr indent="0" marL="0">
+                        <a:buNone/>
+                      </a:pPr>
+                      <a:r>
+                        <a:rPr lang="en-US" sz="750" dirty="0">
+                          <a:solidFill>
+                            <a:srgbClr val="1E2B37"/>
+                          </a:solidFill>
+                          <a:latin typeface="Arial" pitchFamily="34" charset="0"/>
+                          <a:ea typeface="Arial" pitchFamily="34" charset="-122"/>
+                          <a:cs typeface="Arial" pitchFamily="34" charset="-120"/>
+                        </a:rPr>
+                        <a:t>Validación (evals, Lean, QA editorial)</a:t>
+                      </a:r>
+                      <a:endParaRPr lang="en-US" sz="750" dirty="0">
+                        <a:latin typeface="Arial" charset="0"/>
+                        <a:ea typeface="Arial" charset="0"/>
+                        <a:cs typeface="Arial" charset="0"/>
+                      </a:endParaRPr>
+                    </a:p>
+                  </a:txBody>
+                  <a:tcPr marL="45720" marR="45720" marT="45720" marB="45720" anchor="ctr">
+                    <a:lnL w="6350" cap="flat" cmpd="sng" algn="ctr">
+                      <a:solidFill>
+                        <a:srgbClr val="E6E9EC"/>
+                      </a:solidFill>
+                      <a:prstDash val="solid"/>
+                      <a:round/>
+                      <a:headEnd type="none" w="med" len="med"/>
+                      <a:tailEnd type="none" w="med" len="med"/>
+                    </a:lnL>
+                    <a:lnR w="6350" cap="flat" cmpd="sng" algn="ctr">
+                      <a:solidFill>
+                        <a:srgbClr val="E6E9EC"/>
+                      </a:solidFill>
+                      <a:prstDash val="solid"/>
+                      <a:round/>
+                      <a:headEnd type="none" w="med" len="med"/>
+                      <a:tailEnd type="none" w="med" len="med"/>
+                    </a:lnR>
+                    <a:lnT w="6350" cap="flat" cmpd="sng" algn="ctr">
+                      <a:solidFill>
+                        <a:srgbClr val="E6E9EC"/>
+                      </a:solidFill>
+                      <a:prstDash val="solid"/>
+                      <a:round/>
+                      <a:headEnd type="none" w="med" len="med"/>
+                      <a:tailEnd type="none" w="med" len="med"/>
+                    </a:lnT>
+                    <a:lnB w="6350" cap="flat" cmpd="sng" algn="ctr">
+                      <a:solidFill>
+                        <a:srgbClr val="E6E9EC"/>
+                      </a:solidFill>
+                      <a:prstDash val="solid"/>
+                      <a:round/>
+                      <a:headEnd type="none" w="med" len="med"/>
+                      <a:tailEnd type="none" w="med" len="med"/>
+                    </a:lnB>
+                    <a:solidFill>
+                      <a:srgbClr val="FFFFFF"/>
+                    </a:solidFill>
+                  </a:tcPr>
+                </a:tc>
+                <a:tc>
+                  <a:txBody>
+                    <a:bodyPr/>
+                    <a:lstStyle/>
+                    <a:p>
+                      <a:pPr indent="0" marL="0">
+                        <a:buNone/>
+                      </a:pPr>
+                      <a:r>
+                        <a:rPr lang="en-US" sz="750" dirty="0">
+                          <a:solidFill>
+                            <a:srgbClr val="1E2B37"/>
+                          </a:solidFill>
+                          <a:latin typeface="Arial" pitchFamily="34" charset="0"/>
+                          <a:ea typeface="Arial" pitchFamily="34" charset="-122"/>
+                          <a:cs typeface="Arial" pitchFamily="34" charset="-120"/>
+                        </a:rPr>
+                        <a:t>90</a:t>
+                      </a:r>
+                      <a:endParaRPr lang="en-US" sz="750" dirty="0">
+                        <a:latin typeface="Arial" charset="0"/>
+                        <a:ea typeface="Arial" charset="0"/>
+                        <a:cs typeface="Arial" charset="0"/>
+                      </a:endParaRPr>
+                    </a:p>
+                  </a:txBody>
+                  <a:tcPr marL="45720" marR="45720" marT="45720" marB="45720" anchor="ctr">
+                    <a:lnL w="6350" cap="flat" cmpd="sng" algn="ctr">
+                      <a:solidFill>
+                        <a:srgbClr val="E6E9EC"/>
+                      </a:solidFill>
+                      <a:prstDash val="solid"/>
+                      <a:round/>
+                      <a:headEnd type="none" w="med" len="med"/>
+                      <a:tailEnd type="none" w="med" len="med"/>
+                    </a:lnL>
+                    <a:lnR w="6350" cap="flat" cmpd="sng" algn="ctr">
+                      <a:solidFill>
+                        <a:srgbClr val="E6E9EC"/>
+                      </a:solidFill>
+                      <a:prstDash val="solid"/>
+                      <a:round/>
+                      <a:headEnd type="none" w="med" len="med"/>
+                      <a:tailEnd type="none" w="med" len="med"/>
+                    </a:lnR>
+                    <a:lnT w="6350" cap="flat" cmpd="sng" algn="ctr">
+                      <a:solidFill>
+                        <a:srgbClr val="E6E9EC"/>
+                      </a:solidFill>
+                      <a:prstDash val="solid"/>
+                      <a:round/>
+                      <a:headEnd type="none" w="med" len="med"/>
+                      <a:tailEnd type="none" w="med" len="med"/>
+                    </a:lnT>
+                    <a:lnB w="6350" cap="flat" cmpd="sng" algn="ctr">
+                      <a:solidFill>
+                        <a:srgbClr val="E6E9EC"/>
+                      </a:solidFill>
+                      <a:prstDash val="solid"/>
+                      <a:round/>
+                      <a:headEnd type="none" w="med" len="med"/>
+                      <a:tailEnd type="none" w="med" len="med"/>
+                    </a:lnB>
+                    <a:solidFill>
+                      <a:srgbClr val="FFFFFF"/>
+                    </a:solidFill>
+                  </a:tcPr>
+                </a:tc>
+                <a:tc>
+                  <a:txBody>
+                    <a:bodyPr/>
+                    <a:lstStyle/>
+                    <a:p>
+                      <a:pPr indent="0" marL="0">
+                        <a:buNone/>
+                      </a:pPr>
+                      <a:r>
+                        <a:rPr lang="en-US" sz="750" dirty="0">
+                          <a:solidFill>
+                            <a:srgbClr val="1E2B37"/>
+                          </a:solidFill>
+                          <a:latin typeface="Arial" pitchFamily="34" charset="0"/>
+                          <a:ea typeface="Arial" pitchFamily="34" charset="-122"/>
+                          <a:cs typeface="Arial" pitchFamily="34" charset="-120"/>
+                        </a:rPr>
+                        <a:t>7.200</a:t>
+                      </a:r>
+                      <a:endParaRPr lang="en-US" sz="750" dirty="0">
+                        <a:latin typeface="Arial" charset="0"/>
+                        <a:ea typeface="Arial" charset="0"/>
+                        <a:cs typeface="Arial" charset="0"/>
+                      </a:endParaRPr>
+                    </a:p>
+                  </a:txBody>
+                  <a:tcPr marL="45720" marR="45720" marT="45720" marB="45720" anchor="ctr">
+                    <a:lnL w="6350" cap="flat" cmpd="sng" algn="ctr">
+                      <a:solidFill>
+                        <a:srgbClr val="E6E9EC"/>
+                      </a:solidFill>
+                      <a:prstDash val="solid"/>
+                      <a:round/>
+                      <a:headEnd type="none" w="med" len="med"/>
+                      <a:tailEnd type="none" w="med" len="med"/>
+                    </a:lnL>
+                    <a:lnR w="6350" cap="flat" cmpd="sng" algn="ctr">
+                      <a:solidFill>
+                        <a:srgbClr val="E6E9EC"/>
+                      </a:solidFill>
+                      <a:prstDash val="solid"/>
+                      <a:round/>
+                      <a:headEnd type="none" w="med" len="med"/>
+                      <a:tailEnd type="none" w="med" len="med"/>
+                    </a:lnR>
+                    <a:lnT w="6350" cap="flat" cmpd="sng" algn="ctr">
+                      <a:solidFill>
+                        <a:srgbClr val="E6E9EC"/>
+                      </a:solidFill>
+                      <a:prstDash val="solid"/>
+                      <a:round/>
+                      <a:headEnd type="none" w="med" len="med"/>
+                      <a:tailEnd type="none" w="med" len="med"/>
+                    </a:lnT>
+                    <a:lnB w="6350" cap="flat" cmpd="sng" algn="ctr">
+                      <a:solidFill>
+                        <a:srgbClr val="E6E9EC"/>
+                      </a:solidFill>
+                      <a:prstDash val="solid"/>
+                      <a:round/>
+                      <a:headEnd type="none" w="med" len="med"/>
+                      <a:tailEnd type="none" w="med" len="med"/>
+                    </a:lnB>
+                    <a:solidFill>
+                      <a:srgbClr val="FFFFFF"/>
+                    </a:solidFill>
+                  </a:tcPr>
+                </a:tc>
+              </a:tr>
+              <a:tr h="219456">
+                <a:tc>
+                  <a:txBody>
+                    <a:bodyPr/>
+                    <a:lstStyle/>
+                    <a:p>
+                      <a:pPr indent="0" marL="0">
+                        <a:buNone/>
+                      </a:pPr>
+                      <a:r>
+                        <a:rPr lang="en-US" sz="750" dirty="0">
+                          <a:solidFill>
+                            <a:srgbClr val="1E2B37"/>
+                          </a:solidFill>
+                          <a:latin typeface="Arial" pitchFamily="34" charset="0"/>
+                          <a:ea typeface="Arial" pitchFamily="34" charset="-122"/>
+                          <a:cs typeface="Arial" pitchFamily="34" charset="-120"/>
+                        </a:rPr>
+                        <a:t>Despliegue (RGPD, puesta en marcha)</a:t>
+                      </a:r>
+                      <a:endParaRPr lang="en-US" sz="750" dirty="0">
+                        <a:latin typeface="Arial" charset="0"/>
+                        <a:ea typeface="Arial" charset="0"/>
+                        <a:cs typeface="Arial" charset="0"/>
+                      </a:endParaRPr>
+                    </a:p>
+                  </a:txBody>
+                  <a:tcPr marL="45720" marR="45720" marT="45720" marB="45720" anchor="ctr">
+                    <a:lnL w="6350" cap="flat" cmpd="sng" algn="ctr">
+                      <a:solidFill>
+                        <a:srgbClr val="E6E9EC"/>
+                      </a:solidFill>
+                      <a:prstDash val="solid"/>
+                      <a:round/>
+                      <a:headEnd type="none" w="med" len="med"/>
+                      <a:tailEnd type="none" w="med" len="med"/>
+                    </a:lnL>
+                    <a:lnR w="6350" cap="flat" cmpd="sng" algn="ctr">
+                      <a:solidFill>
+                        <a:srgbClr val="E6E9EC"/>
+                      </a:solidFill>
+                      <a:prstDash val="solid"/>
+                      <a:round/>
+                      <a:headEnd type="none" w="med" len="med"/>
+                      <a:tailEnd type="none" w="med" len="med"/>
+                    </a:lnR>
+                    <a:lnT w="6350" cap="flat" cmpd="sng" algn="ctr">
+                      <a:solidFill>
+                        <a:srgbClr val="E6E9EC"/>
+                      </a:solidFill>
+                      <a:prstDash val="solid"/>
+                      <a:round/>
+                      <a:headEnd type="none" w="med" len="med"/>
+                      <a:tailEnd type="none" w="med" len="med"/>
+                    </a:lnT>
+                    <a:lnB w="6350" cap="flat" cmpd="sng" algn="ctr">
+                      <a:solidFill>
+                        <a:srgbClr val="E6E9EC"/>
+                      </a:solidFill>
+                      <a:prstDash val="solid"/>
+                      <a:round/>
+                      <a:headEnd type="none" w="med" len="med"/>
+                      <a:tailEnd type="none" w="med" len="med"/>
+                    </a:lnB>
+                    <a:solidFill>
+                      <a:srgbClr val="F7F8FA"/>
+                    </a:solidFill>
+                  </a:tcPr>
+                </a:tc>
+                <a:tc>
+                  <a:txBody>
+                    <a:bodyPr/>
+                    <a:lstStyle/>
+                    <a:p>
+                      <a:pPr indent="0" marL="0">
+                        <a:buNone/>
+                      </a:pPr>
+                      <a:r>
+                        <a:rPr lang="en-US" sz="750" dirty="0">
+                          <a:solidFill>
+                            <a:srgbClr val="1E2B37"/>
+                          </a:solidFill>
+                          <a:latin typeface="Arial" pitchFamily="34" charset="0"/>
+                          <a:ea typeface="Arial" pitchFamily="34" charset="-122"/>
+                          <a:cs typeface="Arial" pitchFamily="34" charset="-120"/>
+                        </a:rPr>
+                        <a:t>30</a:t>
+                      </a:r>
+                      <a:endParaRPr lang="en-US" sz="750" dirty="0">
+                        <a:latin typeface="Arial" charset="0"/>
+                        <a:ea typeface="Arial" charset="0"/>
+                        <a:cs typeface="Arial" charset="0"/>
+                      </a:endParaRPr>
+                    </a:p>
+                  </a:txBody>
+                  <a:tcPr marL="45720" marR="45720" marT="45720" marB="45720" anchor="ctr">
+                    <a:lnL w="6350" cap="flat" cmpd="sng" algn="ctr">
+                      <a:solidFill>
+                        <a:srgbClr val="E6E9EC"/>
+                      </a:solidFill>
+                      <a:prstDash val="solid"/>
+                      <a:round/>
+                      <a:headEnd type="none" w="med" len="med"/>
+                      <a:tailEnd type="none" w="med" len="med"/>
+                    </a:lnL>
+                    <a:lnR w="6350" cap="flat" cmpd="sng" algn="ctr">
+                      <a:solidFill>
+                        <a:srgbClr val="E6E9EC"/>
+                      </a:solidFill>
+                      <a:prstDash val="solid"/>
+                      <a:round/>
+                      <a:headEnd type="none" w="med" len="med"/>
+                      <a:tailEnd type="none" w="med" len="med"/>
+                    </a:lnR>
+                    <a:lnT w="6350" cap="flat" cmpd="sng" algn="ctr">
+                      <a:solidFill>
+                        <a:srgbClr val="E6E9EC"/>
+                      </a:solidFill>
+                      <a:prstDash val="solid"/>
+                      <a:round/>
+                      <a:headEnd type="none" w="med" len="med"/>
+                      <a:tailEnd type="none" w="med" len="med"/>
+                    </a:lnT>
+                    <a:lnB w="6350" cap="flat" cmpd="sng" algn="ctr">
+                      <a:solidFill>
+                        <a:srgbClr val="E6E9EC"/>
+                      </a:solidFill>
+                      <a:prstDash val="solid"/>
+                      <a:round/>
+                      <a:headEnd type="none" w="med" len="med"/>
+                      <a:tailEnd type="none" w="med" len="med"/>
+                    </a:lnB>
+                    <a:solidFill>
+                      <a:srgbClr val="F7F8FA"/>
+                    </a:solidFill>
+                  </a:tcPr>
+                </a:tc>
+                <a:tc>
+                  <a:txBody>
+                    <a:bodyPr/>
+                    <a:lstStyle/>
+                    <a:p>
+                      <a:pPr indent="0" marL="0">
+                        <a:buNone/>
+                      </a:pPr>
+                      <a:r>
+                        <a:rPr lang="en-US" sz="750" dirty="0">
+                          <a:solidFill>
+                            <a:srgbClr val="1E2B37"/>
+                          </a:solidFill>
+                          <a:latin typeface="Arial" pitchFamily="34" charset="0"/>
+                          <a:ea typeface="Arial" pitchFamily="34" charset="-122"/>
+                          <a:cs typeface="Arial" pitchFamily="34" charset="-120"/>
+                        </a:rPr>
+                        <a:t>2.400</a:t>
+                      </a:r>
+                      <a:endParaRPr lang="en-US" sz="750" dirty="0">
+                        <a:latin typeface="Arial" charset="0"/>
+                        <a:ea typeface="Arial" charset="0"/>
+                        <a:cs typeface="Arial" charset="0"/>
+                      </a:endParaRPr>
+                    </a:p>
+                  </a:txBody>
+                  <a:tcPr marL="45720" marR="45720" marT="45720" marB="45720" anchor="ctr">
+                    <a:lnL w="6350" cap="flat" cmpd="sng" algn="ctr">
+                      <a:solidFill>
+                        <a:srgbClr val="E6E9EC"/>
+                      </a:solidFill>
+                      <a:prstDash val="solid"/>
+                      <a:round/>
+                      <a:headEnd type="none" w="med" len="med"/>
+                      <a:tailEnd type="none" w="med" len="med"/>
+                    </a:lnL>
+                    <a:lnR w="6350" cap="flat" cmpd="sng" algn="ctr">
+                      <a:solidFill>
+                        <a:srgbClr val="E6E9EC"/>
+                      </a:solidFill>
+                      <a:prstDash val="solid"/>
+                      <a:round/>
+                      <a:headEnd type="none" w="med" len="med"/>
+                      <a:tailEnd type="none" w="med" len="med"/>
+                    </a:lnR>
+                    <a:lnT w="6350" cap="flat" cmpd="sng" algn="ctr">
+                      <a:solidFill>
+                        <a:srgbClr val="E6E9EC"/>
+                      </a:solidFill>
+                      <a:prstDash val="solid"/>
+                      <a:round/>
+                      <a:headEnd type="none" w="med" len="med"/>
+                      <a:tailEnd type="none" w="med" len="med"/>
+                    </a:lnT>
+                    <a:lnB w="6350" cap="flat" cmpd="sng" algn="ctr">
+                      <a:solidFill>
+                        <a:srgbClr val="E6E9EC"/>
+                      </a:solidFill>
+                      <a:prstDash val="solid"/>
+                      <a:round/>
+                      <a:headEnd type="none" w="med" len="med"/>
+                      <a:tailEnd type="none" w="med" len="med"/>
+                    </a:lnB>
+                    <a:solidFill>
+                      <a:srgbClr val="F7F8FA"/>
+                    </a:solidFill>
+                  </a:tcPr>
+                </a:tc>
+              </a:tr>
+              <a:tr h="219456">
+                <a:tc>
+                  <a:txBody>
+                    <a:bodyPr/>
+                    <a:lstStyle/>
+                    <a:p>
+                      <a:pPr indent="0" marL="0">
+                        <a:buNone/>
+                      </a:pPr>
+                      <a:r>
+                        <a:rPr lang="en-US" sz="750" b="1" dirty="0">
+                          <a:solidFill>
+                            <a:srgbClr val="1E2B37"/>
+                          </a:solidFill>
+                          <a:latin typeface="Arial" pitchFamily="34" charset="0"/>
+                          <a:ea typeface="Arial" pitchFamily="34" charset="-122"/>
+                          <a:cs typeface="Arial" pitchFamily="34" charset="-120"/>
+                        </a:rPr>
+                        <a:t>Total a 80 €/h</a:t>
+                      </a:r>
+                      <a:endParaRPr lang="en-US" sz="750" dirty="0">
+                        <a:latin typeface="Arial" charset="0"/>
+                        <a:ea typeface="Arial" charset="0"/>
+                        <a:cs typeface="Arial" charset="0"/>
+                      </a:endParaRPr>
+                    </a:p>
+                  </a:txBody>
+                  <a:tcPr marL="45720" marR="45720" marT="45720" marB="45720" anchor="ctr">
+                    <a:lnL w="6350" cap="flat" cmpd="sng" algn="ctr">
+                      <a:solidFill>
+                        <a:srgbClr val="E6E9EC"/>
+                      </a:solidFill>
+                      <a:prstDash val="solid"/>
+                      <a:round/>
+                      <a:headEnd type="none" w="med" len="med"/>
+                      <a:tailEnd type="none" w="med" len="med"/>
+                    </a:lnL>
+                    <a:lnR w="6350" cap="flat" cmpd="sng" algn="ctr">
+                      <a:solidFill>
+                        <a:srgbClr val="E6E9EC"/>
+                      </a:solidFill>
+                      <a:prstDash val="solid"/>
+                      <a:round/>
+                      <a:headEnd type="none" w="med" len="med"/>
+                      <a:tailEnd type="none" w="med" len="med"/>
+                    </a:lnR>
+                    <a:lnT w="6350" cap="flat" cmpd="sng" algn="ctr">
+                      <a:solidFill>
+                        <a:srgbClr val="E6E9EC"/>
+                      </a:solidFill>
+                      <a:prstDash val="solid"/>
+                      <a:round/>
+                      <a:headEnd type="none" w="med" len="med"/>
+                      <a:tailEnd type="none" w="med" len="med"/>
+                    </a:lnT>
+                    <a:lnB w="6350" cap="flat" cmpd="sng" algn="ctr">
+                      <a:solidFill>
+                        <a:srgbClr val="E6E9EC"/>
+                      </a:solidFill>
+                      <a:prstDash val="solid"/>
+                      <a:round/>
+                      <a:headEnd type="none" w="med" len="med"/>
+                      <a:tailEnd type="none" w="med" len="med"/>
+                    </a:lnB>
+                    <a:solidFill>
+                      <a:srgbClr val="FFFFFF"/>
+                    </a:solidFill>
+                  </a:tcPr>
+                </a:tc>
+                <a:tc>
+                  <a:txBody>
+                    <a:bodyPr/>
+                    <a:lstStyle/>
+                    <a:p>
+                      <a:pPr indent="0" marL="0">
+                        <a:buNone/>
+                      </a:pPr>
+                      <a:r>
+                        <a:rPr lang="en-US" sz="750" b="1" dirty="0">
+                          <a:solidFill>
+                            <a:srgbClr val="1E2B37"/>
+                          </a:solidFill>
+                          <a:latin typeface="Arial" pitchFamily="34" charset="0"/>
+                          <a:ea typeface="Arial" pitchFamily="34" charset="-122"/>
+                          <a:cs typeface="Arial" pitchFamily="34" charset="-120"/>
+                        </a:rPr>
+                        <a:t>360</a:t>
+                      </a:r>
+                      <a:endParaRPr lang="en-US" sz="750" dirty="0">
+                        <a:latin typeface="Arial" charset="0"/>
+                        <a:ea typeface="Arial" charset="0"/>
+                        <a:cs typeface="Arial" charset="0"/>
+                      </a:endParaRPr>
+                    </a:p>
+                  </a:txBody>
+                  <a:tcPr marL="45720" marR="45720" marT="45720" marB="45720" anchor="ctr">
+                    <a:lnL w="6350" cap="flat" cmpd="sng" algn="ctr">
+                      <a:solidFill>
+                        <a:srgbClr val="E6E9EC"/>
+                      </a:solidFill>
+                      <a:prstDash val="solid"/>
+                      <a:round/>
+                      <a:headEnd type="none" w="med" len="med"/>
+                      <a:tailEnd type="none" w="med" len="med"/>
+                    </a:lnL>
+                    <a:lnR w="6350" cap="flat" cmpd="sng" algn="ctr">
+                      <a:solidFill>
+                        <a:srgbClr val="E6E9EC"/>
+                      </a:solidFill>
+                      <a:prstDash val="solid"/>
+                      <a:round/>
+                      <a:headEnd type="none" w="med" len="med"/>
+                      <a:tailEnd type="none" w="med" len="med"/>
+                    </a:lnR>
+                    <a:lnT w="6350" cap="flat" cmpd="sng" algn="ctr">
+                      <a:solidFill>
+                        <a:srgbClr val="E6E9EC"/>
+                      </a:solidFill>
+                      <a:prstDash val="solid"/>
+                      <a:round/>
+                      <a:headEnd type="none" w="med" len="med"/>
+                      <a:tailEnd type="none" w="med" len="med"/>
+                    </a:lnT>
+                    <a:lnB w="6350" cap="flat" cmpd="sng" algn="ctr">
+                      <a:solidFill>
+                        <a:srgbClr val="E6E9EC"/>
+                      </a:solidFill>
+                      <a:prstDash val="solid"/>
+                      <a:round/>
+                      <a:headEnd type="none" w="med" len="med"/>
+                      <a:tailEnd type="none" w="med" len="med"/>
+                    </a:lnB>
+                    <a:solidFill>
+                      <a:srgbClr val="FFFFFF"/>
+                    </a:solidFill>
+                  </a:tcPr>
+                </a:tc>
+                <a:tc>
+                  <a:txBody>
+                    <a:bodyPr/>
+                    <a:lstStyle/>
+                    <a:p>
+                      <a:pPr indent="0" marL="0">
+                        <a:buNone/>
+                      </a:pPr>
+                      <a:r>
+                        <a:rPr lang="en-US" sz="750" b="1" dirty="0">
+                          <a:solidFill>
+                            <a:srgbClr val="AE4E14"/>
+                          </a:solidFill>
+                          <a:latin typeface="Arial" pitchFamily="34" charset="0"/>
+                          <a:ea typeface="Arial" pitchFamily="34" charset="-122"/>
+                          <a:cs typeface="Arial" pitchFamily="34" charset="-120"/>
+                        </a:rPr>
+                        <a:t>28.800 €</a:t>
+                      </a:r>
+                      <a:endParaRPr lang="en-US" sz="750" dirty="0">
+                        <a:latin typeface="Arial" charset="0"/>
+                        <a:ea typeface="Arial" charset="0"/>
+                        <a:cs typeface="Arial" charset="0"/>
+                      </a:endParaRPr>
+                    </a:p>
+                  </a:txBody>
+                  <a:tcPr marL="45720" marR="45720" marT="45720" marB="45720" anchor="ctr">
+                    <a:lnL w="6350" cap="flat" cmpd="sng" algn="ctr">
+                      <a:solidFill>
+                        <a:srgbClr val="E6E9EC"/>
+                      </a:solidFill>
+                      <a:prstDash val="solid"/>
+                      <a:round/>
+                      <a:headEnd type="none" w="med" len="med"/>
+                      <a:tailEnd type="none" w="med" len="med"/>
+                    </a:lnL>
+                    <a:lnR w="6350" cap="flat" cmpd="sng" algn="ctr">
+                      <a:solidFill>
+                        <a:srgbClr val="E6E9EC"/>
+                      </a:solidFill>
+                      <a:prstDash val="solid"/>
+                      <a:round/>
+                      <a:headEnd type="none" w="med" len="med"/>
+                      <a:tailEnd type="none" w="med" len="med"/>
+                    </a:lnR>
+                    <a:lnT w="6350" cap="flat" cmpd="sng" algn="ctr">
+                      <a:solidFill>
+                        <a:srgbClr val="E6E9EC"/>
+                      </a:solidFill>
+                      <a:prstDash val="solid"/>
+                      <a:round/>
+                      <a:headEnd type="none" w="med" len="med"/>
+                      <a:tailEnd type="none" w="med" len="med"/>
+                    </a:lnT>
+                    <a:lnB w="6350" cap="flat" cmpd="sng" algn="ctr">
+                      <a:solidFill>
+                        <a:srgbClr val="E6E9EC"/>
+                      </a:solidFill>
+                      <a:prstDash val="solid"/>
+                      <a:round/>
+                      <a:headEnd type="none" w="med" len="med"/>
+                      <a:tailEnd type="none" w="med" len="med"/>
+                    </a:lnB>
+                    <a:solidFill>
+                      <a:srgbClr val="FFFFFF"/>
+                    </a:solidFill>
+                  </a:tcPr>
+                </a:tc>
+              </a:tr>
+            </a:tbl>
+          </a:graphicData>
+        </a:graphic>
+      </p:graphicFrame>
+      <p:sp>
+        <p:nvSpPr>
+          <p:cNvPr id="12" name="Text 6"/>
           <p:cNvSpPr txBox="1"/>
           <p:nvPr/>
         </p:nvSpPr>
         <p:spPr>
           <a:xfrm>
-            <a:off x="5550408" y="3584448"/>
-            <a:ext cx="896112" cy="347472"/>
+            <a:off x="457200" y="2971800"/>
+            <a:ext cx="4023360" cy="182880"/>
           </a:xfrm>
           <a:prstGeom prst="rect">
             <a:avLst/>
@@ -7296,172 +9019,11 @@
           <a:bodyPr wrap="square" lIns="0" tIns="0" rIns="0" bIns="0" rtlCol="0" anchor="t"/>
           <a:lstStyle/>
           <a:p>
-            <a:pPr algn="ctr" indent="0" marL="0">
+            <a:pPr indent="0" marL="0">
               <a:buNone/>
             </a:pPr>
             <a:r>
-              <a:rPr lang="en-US" sz="750" dirty="0">
-                <a:solidFill>
-                  <a:srgbClr val="3D4A56"/>
-                </a:solidFill>
-                <a:latin typeface="Arial" pitchFamily="34" charset="0"/>
-                <a:ea typeface="Arial" pitchFamily="34" charset="-122"/>
-                <a:cs typeface="Arial" pitchFamily="34" charset="-120"/>
-              </a:rPr>
-              <a:t>«Nala» en v1 → v2</a:t>
-            </a:r>
-            <a:endParaRPr lang="en-US" sz="750" dirty="0"/>
-          </a:p>
-        </p:txBody>
-      </p:sp>
-      <p:sp>
-        <p:nvSpPr>
-          <p:cNvPr id="34" name="Shape 28"/>
-          <p:cNvSpPr/>
-          <p:nvPr/>
-        </p:nvSpPr>
-        <p:spPr>
-          <a:xfrm>
-            <a:off x="6592824" y="3154680"/>
-            <a:ext cx="969264" cy="822960"/>
-          </a:xfrm>
-          <a:prstGeom prst="roundRect">
-            <a:avLst>
-              <a:gd name="adj" fmla="val 8889"/>
-            </a:avLst>
-          </a:prstGeom>
-          <a:solidFill>
-            <a:srgbClr val="E4F5EA"/>
-          </a:solidFill>
-          <a:ln/>
-        </p:spPr>
-      </p:sp>
-      <p:sp>
-        <p:nvSpPr>
-          <p:cNvPr id="35" name="Text 29"/>
-          <p:cNvSpPr txBox="1"/>
-          <p:nvPr/>
-        </p:nvSpPr>
-        <p:spPr>
-          <a:xfrm>
-            <a:off x="6592824" y="3218688"/>
-            <a:ext cx="969264" cy="365760"/>
-          </a:xfrm>
-          <a:prstGeom prst="rect">
-            <a:avLst/>
-          </a:prstGeom>
-          <a:noFill/>
-          <a:ln/>
-        </p:spPr>
-        <p:txBody>
-          <a:bodyPr wrap="square" lIns="0" tIns="0" rIns="0" bIns="0" rtlCol="0" anchor="ctr"/>
-          <a:lstStyle/>
-          <a:p>
-            <a:pPr algn="ctr" indent="0" marL="0">
-              <a:buNone/>
-            </a:pPr>
-            <a:r>
-              <a:rPr lang="en-US" sz="1400" b="1" dirty="0">
-                <a:solidFill>
-                  <a:srgbClr val="16794A"/>
-                </a:solidFill>
-                <a:latin typeface="Arial" pitchFamily="34" charset="0"/>
-                <a:ea typeface="Arial" pitchFamily="34" charset="-122"/>
-                <a:cs typeface="Arial" pitchFamily="34" charset="-120"/>
-              </a:rPr>
-              <a:t>v1</a:t>
-            </a:r>
-            <a:endParaRPr lang="en-US" sz="1400" dirty="0"/>
-          </a:p>
-        </p:txBody>
-      </p:sp>
-      <p:sp>
-        <p:nvSpPr>
-          <p:cNvPr id="36" name="Text 30"/>
-          <p:cNvSpPr txBox="1"/>
-          <p:nvPr/>
-        </p:nvSpPr>
-        <p:spPr>
-          <a:xfrm>
-            <a:off x="6629400" y="3584448"/>
-            <a:ext cx="896112" cy="347472"/>
-          </a:xfrm>
-          <a:prstGeom prst="rect">
-            <a:avLst/>
-          </a:prstGeom>
-          <a:noFill/>
-          <a:ln/>
-        </p:spPr>
-        <p:txBody>
-          <a:bodyPr wrap="square" lIns="0" tIns="0" rIns="0" bIns="0" rtlCol="0" anchor="t"/>
-          <a:lstStyle/>
-          <a:p>
-            <a:pPr algn="ctr" indent="0" marL="0">
-              <a:buNone/>
-            </a:pPr>
-            <a:r>
-              <a:rPr lang="en-US" sz="750" dirty="0">
-                <a:solidFill>
-                  <a:srgbClr val="3D4A56"/>
-                </a:solidFill>
-                <a:latin typeface="Arial" pitchFamily="34" charset="0"/>
-                <a:ea typeface="Arial" pitchFamily="34" charset="-122"/>
-                <a:cs typeface="Arial" pitchFamily="34" charset="-120"/>
-              </a:rPr>
-              <a:t>intacta</a:t>
-            </a:r>
-            <a:endParaRPr lang="en-US" sz="750" dirty="0"/>
-          </a:p>
-        </p:txBody>
-      </p:sp>
-      <p:sp>
-        <p:nvSpPr>
-          <p:cNvPr id="37" name="Shape 31"/>
-          <p:cNvSpPr/>
-          <p:nvPr/>
-        </p:nvSpPr>
-        <p:spPr>
-          <a:xfrm>
-            <a:off x="7671816" y="3154680"/>
-            <a:ext cx="969264" cy="822960"/>
-          </a:xfrm>
-          <a:prstGeom prst="roundRect">
-            <a:avLst>
-              <a:gd name="adj" fmla="val 8889"/>
-            </a:avLst>
-          </a:prstGeom>
-          <a:solidFill>
-            <a:srgbClr val="FFF5EE"/>
-          </a:solidFill>
-          <a:ln/>
-        </p:spPr>
-      </p:sp>
-      <p:sp>
-        <p:nvSpPr>
-          <p:cNvPr id="38" name="Text 32"/>
-          <p:cNvSpPr txBox="1"/>
-          <p:nvPr/>
-        </p:nvSpPr>
-        <p:spPr>
-          <a:xfrm>
-            <a:off x="7671816" y="3218688"/>
-            <a:ext cx="969264" cy="365760"/>
-          </a:xfrm>
-          <a:prstGeom prst="rect">
-            <a:avLst/>
-          </a:prstGeom>
-          <a:noFill/>
-          <a:ln/>
-        </p:spPr>
-        <p:txBody>
-          <a:bodyPr wrap="square" lIns="0" tIns="0" rIns="0" bIns="0" rtlCol="0" anchor="ctr"/>
-          <a:lstStyle/>
-          <a:p>
-            <a:pPr algn="ctr" indent="0" marL="0">
-              <a:buNone/>
-            </a:pPr>
-            <a:r>
-              <a:rPr lang="en-US" sz="1400" b="1" dirty="0">
+              <a:rPr lang="en-US" sz="750" b="1" spc="100" kern="0" dirty="0">
                 <a:solidFill>
                   <a:srgbClr val="AE4E14"/>
                 </a:solidFill>
@@ -7469,22 +9031,1150 @@
                 <a:ea typeface="Arial" pitchFamily="34" charset="-122"/>
                 <a:cs typeface="Arial" pitchFamily="34" charset="-120"/>
               </a:rPr>
-              <a:t>~27 min</a:t>
+              <a:t>ESCENARIOS DE VOLUMEN (€/MES)</a:t>
             </a:r>
-            <a:endParaRPr lang="en-US" sz="1400" dirty="0"/>
-          </a:p>
-        </p:txBody>
-      </p:sp>
-      <p:sp>
-        <p:nvSpPr>
-          <p:cNvPr id="39" name="Text 33"/>
+            <a:endParaRPr lang="en-US" sz="750" dirty="0"/>
+          </a:p>
+        </p:txBody>
+      </p:sp>
+      <p:graphicFrame>
+        <p:nvGraphicFramePr>
+          <p:cNvPr id="37" name="Table 2"/>
+          <p:cNvGraphicFramePr>
+            <a:graphicFrameLocks noGrp="1"/>
+          </p:cNvGraphicFramePr>
+          <p:nvPr>
+            <p:extLst>
+              <p:ext uri="{D42A27DB-BD31-4B8C-83A1-F6EECF244321}">
+                <p14:modId xmlns:p14="http://schemas.microsoft.com/office/powerpoint/2010/main" val="1579011935"/>
+              </p:ext>
+            </p:extLst>
+          </p:nvPr>
+        </p:nvGraphicFramePr>
+        <p:xfrm>
+          <a:off x="457200" y="3182112"/>
+          <a:ext cx="4023360" cy="914400"/>
+        </p:xfrm>
+        <a:graphic>
+          <a:graphicData uri="http://schemas.openxmlformats.org/drawingml/2006/table">
+            <a:tbl>
+              <a:tblPr/>
+              <a:tblGrid>
+                <a:gridCol w="1737360"/>
+                <a:gridCol w="758952"/>
+                <a:gridCol w="758952"/>
+                <a:gridCol w="768096"/>
+              </a:tblGrid>
+              <a:tr h="237744">
+                <a:tc>
+                  <a:txBody>
+                    <a:bodyPr/>
+                    <a:lstStyle/>
+                    <a:p>
+                      <a:pPr indent="0" marL="0">
+                        <a:buNone/>
+                      </a:pPr>
+                      <a:r>
+                        <a:rPr lang="en-US" sz="750" b="1" dirty="0">
+                          <a:solidFill>
+                            <a:srgbClr val="FFFFFF"/>
+                          </a:solidFill>
+                          <a:latin typeface="Arial" pitchFamily="34" charset="0"/>
+                          <a:ea typeface="Arial" pitchFamily="34" charset="-122"/>
+                          <a:cs typeface="Arial" pitchFamily="34" charset="-120"/>
+                        </a:rPr>
+                        <a:t>Novelas/mes</a:t>
+                      </a:r>
+                      <a:endParaRPr lang="en-US" sz="750" dirty="0">
+                        <a:latin typeface="Arial" charset="0"/>
+                        <a:ea typeface="Arial" charset="0"/>
+                        <a:cs typeface="Arial" charset="0"/>
+                      </a:endParaRPr>
+                    </a:p>
+                  </a:txBody>
+                  <a:tcPr marL="45720" marR="45720" marT="45720" marB="45720" anchor="ctr">
+                    <a:lnL w="6350" cap="flat" cmpd="sng" algn="ctr">
+                      <a:solidFill>
+                        <a:srgbClr val="E6E9EC"/>
+                      </a:solidFill>
+                      <a:prstDash val="solid"/>
+                      <a:round/>
+                      <a:headEnd type="none" w="med" len="med"/>
+                      <a:tailEnd type="none" w="med" len="med"/>
+                    </a:lnL>
+                    <a:lnR w="6350" cap="flat" cmpd="sng" algn="ctr">
+                      <a:solidFill>
+                        <a:srgbClr val="E6E9EC"/>
+                      </a:solidFill>
+                      <a:prstDash val="solid"/>
+                      <a:round/>
+                      <a:headEnd type="none" w="med" len="med"/>
+                      <a:tailEnd type="none" w="med" len="med"/>
+                    </a:lnR>
+                    <a:lnT w="6350" cap="flat" cmpd="sng" algn="ctr">
+                      <a:solidFill>
+                        <a:srgbClr val="E6E9EC"/>
+                      </a:solidFill>
+                      <a:prstDash val="solid"/>
+                      <a:round/>
+                      <a:headEnd type="none" w="med" len="med"/>
+                      <a:tailEnd type="none" w="med" len="med"/>
+                    </a:lnT>
+                    <a:lnB w="6350" cap="flat" cmpd="sng" algn="ctr">
+                      <a:solidFill>
+                        <a:srgbClr val="E6E9EC"/>
+                      </a:solidFill>
+                      <a:prstDash val="solid"/>
+                      <a:round/>
+                      <a:headEnd type="none" w="med" len="med"/>
+                      <a:tailEnd type="none" w="med" len="med"/>
+                    </a:lnB>
+                    <a:solidFill>
+                      <a:srgbClr val="1E2B37"/>
+                    </a:solidFill>
+                  </a:tcPr>
+                </a:tc>
+                <a:tc>
+                  <a:txBody>
+                    <a:bodyPr/>
+                    <a:lstStyle/>
+                    <a:p>
+                      <a:pPr indent="0" marL="0">
+                        <a:buNone/>
+                      </a:pPr>
+                      <a:r>
+                        <a:rPr lang="en-US" sz="750" b="1" dirty="0">
+                          <a:solidFill>
+                            <a:srgbClr val="FFFFFF"/>
+                          </a:solidFill>
+                          <a:latin typeface="Arial" pitchFamily="34" charset="0"/>
+                          <a:ea typeface="Arial" pitchFamily="34" charset="-122"/>
+                          <a:cs typeface="Arial" pitchFamily="34" charset="-120"/>
+                        </a:rPr>
+                        <a:t>100</a:t>
+                      </a:r>
+                      <a:endParaRPr lang="en-US" sz="750" dirty="0">
+                        <a:latin typeface="Arial" charset="0"/>
+                        <a:ea typeface="Arial" charset="0"/>
+                        <a:cs typeface="Arial" charset="0"/>
+                      </a:endParaRPr>
+                    </a:p>
+                  </a:txBody>
+                  <a:tcPr marL="45720" marR="45720" marT="45720" marB="45720" anchor="ctr">
+                    <a:lnL w="6350" cap="flat" cmpd="sng" algn="ctr">
+                      <a:solidFill>
+                        <a:srgbClr val="E6E9EC"/>
+                      </a:solidFill>
+                      <a:prstDash val="solid"/>
+                      <a:round/>
+                      <a:headEnd type="none" w="med" len="med"/>
+                      <a:tailEnd type="none" w="med" len="med"/>
+                    </a:lnL>
+                    <a:lnR w="6350" cap="flat" cmpd="sng" algn="ctr">
+                      <a:solidFill>
+                        <a:srgbClr val="E6E9EC"/>
+                      </a:solidFill>
+                      <a:prstDash val="solid"/>
+                      <a:round/>
+                      <a:headEnd type="none" w="med" len="med"/>
+                      <a:tailEnd type="none" w="med" len="med"/>
+                    </a:lnR>
+                    <a:lnT w="6350" cap="flat" cmpd="sng" algn="ctr">
+                      <a:solidFill>
+                        <a:srgbClr val="E6E9EC"/>
+                      </a:solidFill>
+                      <a:prstDash val="solid"/>
+                      <a:round/>
+                      <a:headEnd type="none" w="med" len="med"/>
+                      <a:tailEnd type="none" w="med" len="med"/>
+                    </a:lnT>
+                    <a:lnB w="6350" cap="flat" cmpd="sng" algn="ctr">
+                      <a:solidFill>
+                        <a:srgbClr val="E6E9EC"/>
+                      </a:solidFill>
+                      <a:prstDash val="solid"/>
+                      <a:round/>
+                      <a:headEnd type="none" w="med" len="med"/>
+                      <a:tailEnd type="none" w="med" len="med"/>
+                    </a:lnB>
+                    <a:solidFill>
+                      <a:srgbClr val="1E2B37"/>
+                    </a:solidFill>
+                  </a:tcPr>
+                </a:tc>
+                <a:tc>
+                  <a:txBody>
+                    <a:bodyPr/>
+                    <a:lstStyle/>
+                    <a:p>
+                      <a:pPr indent="0" marL="0">
+                        <a:buNone/>
+                      </a:pPr>
+                      <a:r>
+                        <a:rPr lang="en-US" sz="750" b="1" dirty="0">
+                          <a:solidFill>
+                            <a:srgbClr val="FFFFFF"/>
+                          </a:solidFill>
+                          <a:latin typeface="Arial" pitchFamily="34" charset="0"/>
+                          <a:ea typeface="Arial" pitchFamily="34" charset="-122"/>
+                          <a:cs typeface="Arial" pitchFamily="34" charset="-120"/>
+                        </a:rPr>
+                        <a:t>500</a:t>
+                      </a:r>
+                      <a:endParaRPr lang="en-US" sz="750" dirty="0">
+                        <a:latin typeface="Arial" charset="0"/>
+                        <a:ea typeface="Arial" charset="0"/>
+                        <a:cs typeface="Arial" charset="0"/>
+                      </a:endParaRPr>
+                    </a:p>
+                  </a:txBody>
+                  <a:tcPr marL="45720" marR="45720" marT="45720" marB="45720" anchor="ctr">
+                    <a:lnL w="6350" cap="flat" cmpd="sng" algn="ctr">
+                      <a:solidFill>
+                        <a:srgbClr val="E6E9EC"/>
+                      </a:solidFill>
+                      <a:prstDash val="solid"/>
+                      <a:round/>
+                      <a:headEnd type="none" w="med" len="med"/>
+                      <a:tailEnd type="none" w="med" len="med"/>
+                    </a:lnL>
+                    <a:lnR w="6350" cap="flat" cmpd="sng" algn="ctr">
+                      <a:solidFill>
+                        <a:srgbClr val="E6E9EC"/>
+                      </a:solidFill>
+                      <a:prstDash val="solid"/>
+                      <a:round/>
+                      <a:headEnd type="none" w="med" len="med"/>
+                      <a:tailEnd type="none" w="med" len="med"/>
+                    </a:lnR>
+                    <a:lnT w="6350" cap="flat" cmpd="sng" algn="ctr">
+                      <a:solidFill>
+                        <a:srgbClr val="E6E9EC"/>
+                      </a:solidFill>
+                      <a:prstDash val="solid"/>
+                      <a:round/>
+                      <a:headEnd type="none" w="med" len="med"/>
+                      <a:tailEnd type="none" w="med" len="med"/>
+                    </a:lnT>
+                    <a:lnB w="6350" cap="flat" cmpd="sng" algn="ctr">
+                      <a:solidFill>
+                        <a:srgbClr val="E6E9EC"/>
+                      </a:solidFill>
+                      <a:prstDash val="solid"/>
+                      <a:round/>
+                      <a:headEnd type="none" w="med" len="med"/>
+                      <a:tailEnd type="none" w="med" len="med"/>
+                    </a:lnB>
+                    <a:solidFill>
+                      <a:srgbClr val="1E2B37"/>
+                    </a:solidFill>
+                  </a:tcPr>
+                </a:tc>
+                <a:tc>
+                  <a:txBody>
+                    <a:bodyPr/>
+                    <a:lstStyle/>
+                    <a:p>
+                      <a:pPr indent="0" marL="0">
+                        <a:buNone/>
+                      </a:pPr>
+                      <a:r>
+                        <a:rPr lang="en-US" sz="750" b="1" dirty="0">
+                          <a:solidFill>
+                            <a:srgbClr val="FFFFFF"/>
+                          </a:solidFill>
+                          <a:latin typeface="Arial" pitchFamily="34" charset="0"/>
+                          <a:ea typeface="Arial" pitchFamily="34" charset="-122"/>
+                          <a:cs typeface="Arial" pitchFamily="34" charset="-120"/>
+                        </a:rPr>
+                        <a:t>2.000</a:t>
+                      </a:r>
+                      <a:endParaRPr lang="en-US" sz="750" dirty="0">
+                        <a:latin typeface="Arial" charset="0"/>
+                        <a:ea typeface="Arial" charset="0"/>
+                        <a:cs typeface="Arial" charset="0"/>
+                      </a:endParaRPr>
+                    </a:p>
+                  </a:txBody>
+                  <a:tcPr marL="45720" marR="45720" marT="45720" marB="45720" anchor="ctr">
+                    <a:lnL w="6350" cap="flat" cmpd="sng" algn="ctr">
+                      <a:solidFill>
+                        <a:srgbClr val="E6E9EC"/>
+                      </a:solidFill>
+                      <a:prstDash val="solid"/>
+                      <a:round/>
+                      <a:headEnd type="none" w="med" len="med"/>
+                      <a:tailEnd type="none" w="med" len="med"/>
+                    </a:lnL>
+                    <a:lnR w="6350" cap="flat" cmpd="sng" algn="ctr">
+                      <a:solidFill>
+                        <a:srgbClr val="E6E9EC"/>
+                      </a:solidFill>
+                      <a:prstDash val="solid"/>
+                      <a:round/>
+                      <a:headEnd type="none" w="med" len="med"/>
+                      <a:tailEnd type="none" w="med" len="med"/>
+                    </a:lnR>
+                    <a:lnT w="6350" cap="flat" cmpd="sng" algn="ctr">
+                      <a:solidFill>
+                        <a:srgbClr val="E6E9EC"/>
+                      </a:solidFill>
+                      <a:prstDash val="solid"/>
+                      <a:round/>
+                      <a:headEnd type="none" w="med" len="med"/>
+                      <a:tailEnd type="none" w="med" len="med"/>
+                    </a:lnT>
+                    <a:lnB w="6350" cap="flat" cmpd="sng" algn="ctr">
+                      <a:solidFill>
+                        <a:srgbClr val="E6E9EC"/>
+                      </a:solidFill>
+                      <a:prstDash val="solid"/>
+                      <a:round/>
+                      <a:headEnd type="none" w="med" len="med"/>
+                      <a:tailEnd type="none" w="med" len="med"/>
+                    </a:lnB>
+                    <a:solidFill>
+                      <a:srgbClr val="1E2B37"/>
+                    </a:solidFill>
+                  </a:tcPr>
+                </a:tc>
+              </a:tr>
+              <a:tr h="237744">
+                <a:tc>
+                  <a:txBody>
+                    <a:bodyPr/>
+                    <a:lstStyle/>
+                    <a:p>
+                      <a:pPr indent="0" marL="0">
+                        <a:buNone/>
+                      </a:pPr>
+                      <a:r>
+                        <a:rPr lang="en-US" sz="750" dirty="0">
+                          <a:solidFill>
+                            <a:srgbClr val="1E2B37"/>
+                          </a:solidFill>
+                          <a:latin typeface="Arial" pitchFamily="34" charset="0"/>
+                          <a:ea typeface="Arial" pitchFamily="34" charset="-122"/>
+                          <a:cs typeface="Arial" pitchFamily="34" charset="-120"/>
+                        </a:rPr>
+                        <a:t>Ventas Cuentalia (PVP 39 €)</a:t>
+                      </a:r>
+                      <a:endParaRPr lang="en-US" sz="750" dirty="0">
+                        <a:latin typeface="Arial" charset="0"/>
+                        <a:ea typeface="Arial" charset="0"/>
+                        <a:cs typeface="Arial" charset="0"/>
+                      </a:endParaRPr>
+                    </a:p>
+                  </a:txBody>
+                  <a:tcPr marL="45720" marR="45720" marT="45720" marB="45720" anchor="ctr">
+                    <a:lnL w="6350" cap="flat" cmpd="sng" algn="ctr">
+                      <a:solidFill>
+                        <a:srgbClr val="E6E9EC"/>
+                      </a:solidFill>
+                      <a:prstDash val="solid"/>
+                      <a:round/>
+                      <a:headEnd type="none" w="med" len="med"/>
+                      <a:tailEnd type="none" w="med" len="med"/>
+                    </a:lnL>
+                    <a:lnR w="6350" cap="flat" cmpd="sng" algn="ctr">
+                      <a:solidFill>
+                        <a:srgbClr val="E6E9EC"/>
+                      </a:solidFill>
+                      <a:prstDash val="solid"/>
+                      <a:round/>
+                      <a:headEnd type="none" w="med" len="med"/>
+                      <a:tailEnd type="none" w="med" len="med"/>
+                    </a:lnR>
+                    <a:lnT w="6350" cap="flat" cmpd="sng" algn="ctr">
+                      <a:solidFill>
+                        <a:srgbClr val="E6E9EC"/>
+                      </a:solidFill>
+                      <a:prstDash val="solid"/>
+                      <a:round/>
+                      <a:headEnd type="none" w="med" len="med"/>
+                      <a:tailEnd type="none" w="med" len="med"/>
+                    </a:lnT>
+                    <a:lnB w="6350" cap="flat" cmpd="sng" algn="ctr">
+                      <a:solidFill>
+                        <a:srgbClr val="E6E9EC"/>
+                      </a:solidFill>
+                      <a:prstDash val="solid"/>
+                      <a:round/>
+                      <a:headEnd type="none" w="med" len="med"/>
+                      <a:tailEnd type="none" w="med" len="med"/>
+                    </a:lnB>
+                    <a:solidFill>
+                      <a:srgbClr val="FFFFFF"/>
+                    </a:solidFill>
+                  </a:tcPr>
+                </a:tc>
+                <a:tc>
+                  <a:txBody>
+                    <a:bodyPr/>
+                    <a:lstStyle/>
+                    <a:p>
+                      <a:pPr indent="0" marL="0">
+                        <a:buNone/>
+                      </a:pPr>
+                      <a:r>
+                        <a:rPr lang="en-US" sz="750" dirty="0">
+                          <a:solidFill>
+                            <a:srgbClr val="1E2B37"/>
+                          </a:solidFill>
+                          <a:latin typeface="Arial" pitchFamily="34" charset="0"/>
+                          <a:ea typeface="Arial" pitchFamily="34" charset="-122"/>
+                          <a:cs typeface="Arial" pitchFamily="34" charset="-120"/>
+                        </a:rPr>
+                        <a:t>3.900</a:t>
+                      </a:r>
+                      <a:endParaRPr lang="en-US" sz="750" dirty="0">
+                        <a:latin typeface="Arial" charset="0"/>
+                        <a:ea typeface="Arial" charset="0"/>
+                        <a:cs typeface="Arial" charset="0"/>
+                      </a:endParaRPr>
+                    </a:p>
+                  </a:txBody>
+                  <a:tcPr marL="45720" marR="45720" marT="45720" marB="45720" anchor="ctr">
+                    <a:lnL w="6350" cap="flat" cmpd="sng" algn="ctr">
+                      <a:solidFill>
+                        <a:srgbClr val="E6E9EC"/>
+                      </a:solidFill>
+                      <a:prstDash val="solid"/>
+                      <a:round/>
+                      <a:headEnd type="none" w="med" len="med"/>
+                      <a:tailEnd type="none" w="med" len="med"/>
+                    </a:lnL>
+                    <a:lnR w="6350" cap="flat" cmpd="sng" algn="ctr">
+                      <a:solidFill>
+                        <a:srgbClr val="E6E9EC"/>
+                      </a:solidFill>
+                      <a:prstDash val="solid"/>
+                      <a:round/>
+                      <a:headEnd type="none" w="med" len="med"/>
+                      <a:tailEnd type="none" w="med" len="med"/>
+                    </a:lnR>
+                    <a:lnT w="6350" cap="flat" cmpd="sng" algn="ctr">
+                      <a:solidFill>
+                        <a:srgbClr val="E6E9EC"/>
+                      </a:solidFill>
+                      <a:prstDash val="solid"/>
+                      <a:round/>
+                      <a:headEnd type="none" w="med" len="med"/>
+                      <a:tailEnd type="none" w="med" len="med"/>
+                    </a:lnT>
+                    <a:lnB w="6350" cap="flat" cmpd="sng" algn="ctr">
+                      <a:solidFill>
+                        <a:srgbClr val="E6E9EC"/>
+                      </a:solidFill>
+                      <a:prstDash val="solid"/>
+                      <a:round/>
+                      <a:headEnd type="none" w="med" len="med"/>
+                      <a:tailEnd type="none" w="med" len="med"/>
+                    </a:lnB>
+                    <a:solidFill>
+                      <a:srgbClr val="FFFFFF"/>
+                    </a:solidFill>
+                  </a:tcPr>
+                </a:tc>
+                <a:tc>
+                  <a:txBody>
+                    <a:bodyPr/>
+                    <a:lstStyle/>
+                    <a:p>
+                      <a:pPr indent="0" marL="0">
+                        <a:buNone/>
+                      </a:pPr>
+                      <a:r>
+                        <a:rPr lang="en-US" sz="750" dirty="0">
+                          <a:solidFill>
+                            <a:srgbClr val="1E2B37"/>
+                          </a:solidFill>
+                          <a:latin typeface="Arial" pitchFamily="34" charset="0"/>
+                          <a:ea typeface="Arial" pitchFamily="34" charset="-122"/>
+                          <a:cs typeface="Arial" pitchFamily="34" charset="-120"/>
+                        </a:rPr>
+                        <a:t>19.500</a:t>
+                      </a:r>
+                      <a:endParaRPr lang="en-US" sz="750" dirty="0">
+                        <a:latin typeface="Arial" charset="0"/>
+                        <a:ea typeface="Arial" charset="0"/>
+                        <a:cs typeface="Arial" charset="0"/>
+                      </a:endParaRPr>
+                    </a:p>
+                  </a:txBody>
+                  <a:tcPr marL="45720" marR="45720" marT="45720" marB="45720" anchor="ctr">
+                    <a:lnL w="6350" cap="flat" cmpd="sng" algn="ctr">
+                      <a:solidFill>
+                        <a:srgbClr val="E6E9EC"/>
+                      </a:solidFill>
+                      <a:prstDash val="solid"/>
+                      <a:round/>
+                      <a:headEnd type="none" w="med" len="med"/>
+                      <a:tailEnd type="none" w="med" len="med"/>
+                    </a:lnL>
+                    <a:lnR w="6350" cap="flat" cmpd="sng" algn="ctr">
+                      <a:solidFill>
+                        <a:srgbClr val="E6E9EC"/>
+                      </a:solidFill>
+                      <a:prstDash val="solid"/>
+                      <a:round/>
+                      <a:headEnd type="none" w="med" len="med"/>
+                      <a:tailEnd type="none" w="med" len="med"/>
+                    </a:lnR>
+                    <a:lnT w="6350" cap="flat" cmpd="sng" algn="ctr">
+                      <a:solidFill>
+                        <a:srgbClr val="E6E9EC"/>
+                      </a:solidFill>
+                      <a:prstDash val="solid"/>
+                      <a:round/>
+                      <a:headEnd type="none" w="med" len="med"/>
+                      <a:tailEnd type="none" w="med" len="med"/>
+                    </a:lnT>
+                    <a:lnB w="6350" cap="flat" cmpd="sng" algn="ctr">
+                      <a:solidFill>
+                        <a:srgbClr val="E6E9EC"/>
+                      </a:solidFill>
+                      <a:prstDash val="solid"/>
+                      <a:round/>
+                      <a:headEnd type="none" w="med" len="med"/>
+                      <a:tailEnd type="none" w="med" len="med"/>
+                    </a:lnB>
+                    <a:solidFill>
+                      <a:srgbClr val="FFFFFF"/>
+                    </a:solidFill>
+                  </a:tcPr>
+                </a:tc>
+                <a:tc>
+                  <a:txBody>
+                    <a:bodyPr/>
+                    <a:lstStyle/>
+                    <a:p>
+                      <a:pPr indent="0" marL="0">
+                        <a:buNone/>
+                      </a:pPr>
+                      <a:r>
+                        <a:rPr lang="en-US" sz="750" dirty="0">
+                          <a:solidFill>
+                            <a:srgbClr val="1E2B37"/>
+                          </a:solidFill>
+                          <a:latin typeface="Arial" pitchFamily="34" charset="0"/>
+                          <a:ea typeface="Arial" pitchFamily="34" charset="-122"/>
+                          <a:cs typeface="Arial" pitchFamily="34" charset="-120"/>
+                        </a:rPr>
+                        <a:t>78.000</a:t>
+                      </a:r>
+                      <a:endParaRPr lang="en-US" sz="750" dirty="0">
+                        <a:latin typeface="Arial" charset="0"/>
+                        <a:ea typeface="Arial" charset="0"/>
+                        <a:cs typeface="Arial" charset="0"/>
+                      </a:endParaRPr>
+                    </a:p>
+                  </a:txBody>
+                  <a:tcPr marL="45720" marR="45720" marT="45720" marB="45720" anchor="ctr">
+                    <a:lnL w="6350" cap="flat" cmpd="sng" algn="ctr">
+                      <a:solidFill>
+                        <a:srgbClr val="E6E9EC"/>
+                      </a:solidFill>
+                      <a:prstDash val="solid"/>
+                      <a:round/>
+                      <a:headEnd type="none" w="med" len="med"/>
+                      <a:tailEnd type="none" w="med" len="med"/>
+                    </a:lnL>
+                    <a:lnR w="6350" cap="flat" cmpd="sng" algn="ctr">
+                      <a:solidFill>
+                        <a:srgbClr val="E6E9EC"/>
+                      </a:solidFill>
+                      <a:prstDash val="solid"/>
+                      <a:round/>
+                      <a:headEnd type="none" w="med" len="med"/>
+                      <a:tailEnd type="none" w="med" len="med"/>
+                    </a:lnR>
+                    <a:lnT w="6350" cap="flat" cmpd="sng" algn="ctr">
+                      <a:solidFill>
+                        <a:srgbClr val="E6E9EC"/>
+                      </a:solidFill>
+                      <a:prstDash val="solid"/>
+                      <a:round/>
+                      <a:headEnd type="none" w="med" len="med"/>
+                      <a:tailEnd type="none" w="med" len="med"/>
+                    </a:lnT>
+                    <a:lnB w="6350" cap="flat" cmpd="sng" algn="ctr">
+                      <a:solidFill>
+                        <a:srgbClr val="E6E9EC"/>
+                      </a:solidFill>
+                      <a:prstDash val="solid"/>
+                      <a:round/>
+                      <a:headEnd type="none" w="med" len="med"/>
+                      <a:tailEnd type="none" w="med" len="med"/>
+                    </a:lnB>
+                    <a:solidFill>
+                      <a:srgbClr val="FFFFFF"/>
+                    </a:solidFill>
+                  </a:tcPr>
+                </a:tc>
+              </a:tr>
+              <a:tr h="237744">
+                <a:tc>
+                  <a:txBody>
+                    <a:bodyPr/>
+                    <a:lstStyle/>
+                    <a:p>
+                      <a:pPr indent="0" marL="0">
+                        <a:buNone/>
+                      </a:pPr>
+                      <a:r>
+                        <a:rPr lang="en-US" sz="750" dirty="0">
+                          <a:solidFill>
+                            <a:srgbClr val="1E2B37"/>
+                          </a:solidFill>
+                          <a:latin typeface="Arial" pitchFamily="34" charset="0"/>
+                          <a:ea typeface="Arial" pitchFamily="34" charset="-122"/>
+                          <a:cs typeface="Arial" pitchFamily="34" charset="-120"/>
+                        </a:rPr>
+                        <a:t>Margen Cuentalia</a:t>
+                      </a:r>
+                      <a:endParaRPr lang="en-US" sz="750" dirty="0">
+                        <a:latin typeface="Arial" charset="0"/>
+                        <a:ea typeface="Arial" charset="0"/>
+                        <a:cs typeface="Arial" charset="0"/>
+                      </a:endParaRPr>
+                    </a:p>
+                  </a:txBody>
+                  <a:tcPr marL="45720" marR="45720" marT="45720" marB="45720" anchor="ctr">
+                    <a:lnL w="6350" cap="flat" cmpd="sng" algn="ctr">
+                      <a:solidFill>
+                        <a:srgbClr val="E6E9EC"/>
+                      </a:solidFill>
+                      <a:prstDash val="solid"/>
+                      <a:round/>
+                      <a:headEnd type="none" w="med" len="med"/>
+                      <a:tailEnd type="none" w="med" len="med"/>
+                    </a:lnL>
+                    <a:lnR w="6350" cap="flat" cmpd="sng" algn="ctr">
+                      <a:solidFill>
+                        <a:srgbClr val="E6E9EC"/>
+                      </a:solidFill>
+                      <a:prstDash val="solid"/>
+                      <a:round/>
+                      <a:headEnd type="none" w="med" len="med"/>
+                      <a:tailEnd type="none" w="med" len="med"/>
+                    </a:lnR>
+                    <a:lnT w="6350" cap="flat" cmpd="sng" algn="ctr">
+                      <a:solidFill>
+                        <a:srgbClr val="E6E9EC"/>
+                      </a:solidFill>
+                      <a:prstDash val="solid"/>
+                      <a:round/>
+                      <a:headEnd type="none" w="med" len="med"/>
+                      <a:tailEnd type="none" w="med" len="med"/>
+                    </a:lnT>
+                    <a:lnB w="6350" cap="flat" cmpd="sng" algn="ctr">
+                      <a:solidFill>
+                        <a:srgbClr val="E6E9EC"/>
+                      </a:solidFill>
+                      <a:prstDash val="solid"/>
+                      <a:round/>
+                      <a:headEnd type="none" w="med" len="med"/>
+                      <a:tailEnd type="none" w="med" len="med"/>
+                    </a:lnB>
+                    <a:solidFill>
+                      <a:srgbClr val="F7F8FA"/>
+                    </a:solidFill>
+                  </a:tcPr>
+                </a:tc>
+                <a:tc>
+                  <a:txBody>
+                    <a:bodyPr/>
+                    <a:lstStyle/>
+                    <a:p>
+                      <a:pPr indent="0" marL="0">
+                        <a:buNone/>
+                      </a:pPr>
+                      <a:r>
+                        <a:rPr lang="en-US" sz="750" b="1" dirty="0">
+                          <a:solidFill>
+                            <a:srgbClr val="1E2B37"/>
+                          </a:solidFill>
+                          <a:latin typeface="Arial" pitchFamily="34" charset="0"/>
+                          <a:ea typeface="Arial" pitchFamily="34" charset="-122"/>
+                          <a:cs typeface="Arial" pitchFamily="34" charset="-120"/>
+                        </a:rPr>
+                        <a:t>2.100</a:t>
+                      </a:r>
+                      <a:endParaRPr lang="en-US" sz="750" dirty="0">
+                        <a:latin typeface="Arial" charset="0"/>
+                        <a:ea typeface="Arial" charset="0"/>
+                        <a:cs typeface="Arial" charset="0"/>
+                      </a:endParaRPr>
+                    </a:p>
+                  </a:txBody>
+                  <a:tcPr marL="45720" marR="45720" marT="45720" marB="45720" anchor="ctr">
+                    <a:lnL w="6350" cap="flat" cmpd="sng" algn="ctr">
+                      <a:solidFill>
+                        <a:srgbClr val="E6E9EC"/>
+                      </a:solidFill>
+                      <a:prstDash val="solid"/>
+                      <a:round/>
+                      <a:headEnd type="none" w="med" len="med"/>
+                      <a:tailEnd type="none" w="med" len="med"/>
+                    </a:lnL>
+                    <a:lnR w="6350" cap="flat" cmpd="sng" algn="ctr">
+                      <a:solidFill>
+                        <a:srgbClr val="E6E9EC"/>
+                      </a:solidFill>
+                      <a:prstDash val="solid"/>
+                      <a:round/>
+                      <a:headEnd type="none" w="med" len="med"/>
+                      <a:tailEnd type="none" w="med" len="med"/>
+                    </a:lnR>
+                    <a:lnT w="6350" cap="flat" cmpd="sng" algn="ctr">
+                      <a:solidFill>
+                        <a:srgbClr val="E6E9EC"/>
+                      </a:solidFill>
+                      <a:prstDash val="solid"/>
+                      <a:round/>
+                      <a:headEnd type="none" w="med" len="med"/>
+                      <a:tailEnd type="none" w="med" len="med"/>
+                    </a:lnT>
+                    <a:lnB w="6350" cap="flat" cmpd="sng" algn="ctr">
+                      <a:solidFill>
+                        <a:srgbClr val="E6E9EC"/>
+                      </a:solidFill>
+                      <a:prstDash val="solid"/>
+                      <a:round/>
+                      <a:headEnd type="none" w="med" len="med"/>
+                      <a:tailEnd type="none" w="med" len="med"/>
+                    </a:lnB>
+                    <a:solidFill>
+                      <a:srgbClr val="F7F8FA"/>
+                    </a:solidFill>
+                  </a:tcPr>
+                </a:tc>
+                <a:tc>
+                  <a:txBody>
+                    <a:bodyPr/>
+                    <a:lstStyle/>
+                    <a:p>
+                      <a:pPr indent="0" marL="0">
+                        <a:buNone/>
+                      </a:pPr>
+                      <a:r>
+                        <a:rPr lang="en-US" sz="750" b="1" dirty="0">
+                          <a:solidFill>
+                            <a:srgbClr val="1E2B37"/>
+                          </a:solidFill>
+                          <a:latin typeface="Arial" pitchFamily="34" charset="0"/>
+                          <a:ea typeface="Arial" pitchFamily="34" charset="-122"/>
+                          <a:cs typeface="Arial" pitchFamily="34" charset="-120"/>
+                        </a:rPr>
+                        <a:t>12.900</a:t>
+                      </a:r>
+                      <a:endParaRPr lang="en-US" sz="750" dirty="0">
+                        <a:latin typeface="Arial" charset="0"/>
+                        <a:ea typeface="Arial" charset="0"/>
+                        <a:cs typeface="Arial" charset="0"/>
+                      </a:endParaRPr>
+                    </a:p>
+                  </a:txBody>
+                  <a:tcPr marL="45720" marR="45720" marT="45720" marB="45720" anchor="ctr">
+                    <a:lnL w="6350" cap="flat" cmpd="sng" algn="ctr">
+                      <a:solidFill>
+                        <a:srgbClr val="E6E9EC"/>
+                      </a:solidFill>
+                      <a:prstDash val="solid"/>
+                      <a:round/>
+                      <a:headEnd type="none" w="med" len="med"/>
+                      <a:tailEnd type="none" w="med" len="med"/>
+                    </a:lnL>
+                    <a:lnR w="6350" cap="flat" cmpd="sng" algn="ctr">
+                      <a:solidFill>
+                        <a:srgbClr val="E6E9EC"/>
+                      </a:solidFill>
+                      <a:prstDash val="solid"/>
+                      <a:round/>
+                      <a:headEnd type="none" w="med" len="med"/>
+                      <a:tailEnd type="none" w="med" len="med"/>
+                    </a:lnR>
+                    <a:lnT w="6350" cap="flat" cmpd="sng" algn="ctr">
+                      <a:solidFill>
+                        <a:srgbClr val="E6E9EC"/>
+                      </a:solidFill>
+                      <a:prstDash val="solid"/>
+                      <a:round/>
+                      <a:headEnd type="none" w="med" len="med"/>
+                      <a:tailEnd type="none" w="med" len="med"/>
+                    </a:lnT>
+                    <a:lnB w="6350" cap="flat" cmpd="sng" algn="ctr">
+                      <a:solidFill>
+                        <a:srgbClr val="E6E9EC"/>
+                      </a:solidFill>
+                      <a:prstDash val="solid"/>
+                      <a:round/>
+                      <a:headEnd type="none" w="med" len="med"/>
+                      <a:tailEnd type="none" w="med" len="med"/>
+                    </a:lnB>
+                    <a:solidFill>
+                      <a:srgbClr val="F7F8FA"/>
+                    </a:solidFill>
+                  </a:tcPr>
+                </a:tc>
+                <a:tc>
+                  <a:txBody>
+                    <a:bodyPr/>
+                    <a:lstStyle/>
+                    <a:p>
+                      <a:pPr indent="0" marL="0">
+                        <a:buNone/>
+                      </a:pPr>
+                      <a:r>
+                        <a:rPr lang="en-US" sz="750" b="1" dirty="0">
+                          <a:solidFill>
+                            <a:srgbClr val="1E2B37"/>
+                          </a:solidFill>
+                          <a:latin typeface="Arial" pitchFamily="34" charset="0"/>
+                          <a:ea typeface="Arial" pitchFamily="34" charset="-122"/>
+                          <a:cs typeface="Arial" pitchFamily="34" charset="-120"/>
+                        </a:rPr>
+                        <a:t>53.400</a:t>
+                      </a:r>
+                      <a:endParaRPr lang="en-US" sz="750" dirty="0">
+                        <a:latin typeface="Arial" charset="0"/>
+                        <a:ea typeface="Arial" charset="0"/>
+                        <a:cs typeface="Arial" charset="0"/>
+                      </a:endParaRPr>
+                    </a:p>
+                  </a:txBody>
+                  <a:tcPr marL="45720" marR="45720" marT="45720" marB="45720" anchor="ctr">
+                    <a:lnL w="6350" cap="flat" cmpd="sng" algn="ctr">
+                      <a:solidFill>
+                        <a:srgbClr val="E6E9EC"/>
+                      </a:solidFill>
+                      <a:prstDash val="solid"/>
+                      <a:round/>
+                      <a:headEnd type="none" w="med" len="med"/>
+                      <a:tailEnd type="none" w="med" len="med"/>
+                    </a:lnL>
+                    <a:lnR w="6350" cap="flat" cmpd="sng" algn="ctr">
+                      <a:solidFill>
+                        <a:srgbClr val="E6E9EC"/>
+                      </a:solidFill>
+                      <a:prstDash val="solid"/>
+                      <a:round/>
+                      <a:headEnd type="none" w="med" len="med"/>
+                      <a:tailEnd type="none" w="med" len="med"/>
+                    </a:lnR>
+                    <a:lnT w="6350" cap="flat" cmpd="sng" algn="ctr">
+                      <a:solidFill>
+                        <a:srgbClr val="E6E9EC"/>
+                      </a:solidFill>
+                      <a:prstDash val="solid"/>
+                      <a:round/>
+                      <a:headEnd type="none" w="med" len="med"/>
+                      <a:tailEnd type="none" w="med" len="med"/>
+                    </a:lnT>
+                    <a:lnB w="6350" cap="flat" cmpd="sng" algn="ctr">
+                      <a:solidFill>
+                        <a:srgbClr val="E6E9EC"/>
+                      </a:solidFill>
+                      <a:prstDash val="solid"/>
+                      <a:round/>
+                      <a:headEnd type="none" w="med" len="med"/>
+                      <a:tailEnd type="none" w="med" len="med"/>
+                    </a:lnB>
+                    <a:solidFill>
+                      <a:srgbClr val="F7F8FA"/>
+                    </a:solidFill>
+                  </a:tcPr>
+                </a:tc>
+              </a:tr>
+              <a:tr h="237744">
+                <a:tc>
+                  <a:txBody>
+                    <a:bodyPr/>
+                    <a:lstStyle/>
+                    <a:p>
+                      <a:pPr indent="0" marL="0">
+                        <a:buNone/>
+                      </a:pPr>
+                      <a:r>
+                        <a:rPr lang="en-US" sz="750" dirty="0">
+                          <a:solidFill>
+                            <a:srgbClr val="1E2B37"/>
+                          </a:solidFill>
+                          <a:latin typeface="Arial" pitchFamily="34" charset="0"/>
+                          <a:ea typeface="Arial" pitchFamily="34" charset="-122"/>
+                          <a:cs typeface="Arial" pitchFamily="34" charset="-120"/>
+                        </a:rPr>
+                        <a:t>Margen Qaracter</a:t>
+                      </a:r>
+                      <a:endParaRPr lang="en-US" sz="750" dirty="0">
+                        <a:latin typeface="Arial" charset="0"/>
+                        <a:ea typeface="Arial" charset="0"/>
+                        <a:cs typeface="Arial" charset="0"/>
+                      </a:endParaRPr>
+                    </a:p>
+                  </a:txBody>
+                  <a:tcPr marL="45720" marR="45720" marT="45720" marB="45720" anchor="ctr">
+                    <a:lnL w="6350" cap="flat" cmpd="sng" algn="ctr">
+                      <a:solidFill>
+                        <a:srgbClr val="E6E9EC"/>
+                      </a:solidFill>
+                      <a:prstDash val="solid"/>
+                      <a:round/>
+                      <a:headEnd type="none" w="med" len="med"/>
+                      <a:tailEnd type="none" w="med" len="med"/>
+                    </a:lnL>
+                    <a:lnR w="6350" cap="flat" cmpd="sng" algn="ctr">
+                      <a:solidFill>
+                        <a:srgbClr val="E6E9EC"/>
+                      </a:solidFill>
+                      <a:prstDash val="solid"/>
+                      <a:round/>
+                      <a:headEnd type="none" w="med" len="med"/>
+                      <a:tailEnd type="none" w="med" len="med"/>
+                    </a:lnR>
+                    <a:lnT w="6350" cap="flat" cmpd="sng" algn="ctr">
+                      <a:solidFill>
+                        <a:srgbClr val="E6E9EC"/>
+                      </a:solidFill>
+                      <a:prstDash val="solid"/>
+                      <a:round/>
+                      <a:headEnd type="none" w="med" len="med"/>
+                      <a:tailEnd type="none" w="med" len="med"/>
+                    </a:lnT>
+                    <a:lnB w="6350" cap="flat" cmpd="sng" algn="ctr">
+                      <a:solidFill>
+                        <a:srgbClr val="E6E9EC"/>
+                      </a:solidFill>
+                      <a:prstDash val="solid"/>
+                      <a:round/>
+                      <a:headEnd type="none" w="med" len="med"/>
+                      <a:tailEnd type="none" w="med" len="med"/>
+                    </a:lnB>
+                    <a:solidFill>
+                      <a:srgbClr val="FFFFFF"/>
+                    </a:solidFill>
+                  </a:tcPr>
+                </a:tc>
+                <a:tc>
+                  <a:txBody>
+                    <a:bodyPr/>
+                    <a:lstStyle/>
+                    <a:p>
+                      <a:pPr indent="0" marL="0">
+                        <a:buNone/>
+                      </a:pPr>
+                      <a:r>
+                        <a:rPr lang="en-US" sz="750" b="1" dirty="0">
+                          <a:solidFill>
+                            <a:srgbClr val="AE4E14"/>
+                          </a:solidFill>
+                          <a:latin typeface="Arial" pitchFamily="34" charset="0"/>
+                          <a:ea typeface="Arial" pitchFamily="34" charset="-122"/>
+                          <a:cs typeface="Arial" pitchFamily="34" charset="-120"/>
+                        </a:rPr>
+                        <a:t>1.203</a:t>
+                      </a:r>
+                      <a:endParaRPr lang="en-US" sz="750" dirty="0">
+                        <a:latin typeface="Arial" charset="0"/>
+                        <a:ea typeface="Arial" charset="0"/>
+                        <a:cs typeface="Arial" charset="0"/>
+                      </a:endParaRPr>
+                    </a:p>
+                  </a:txBody>
+                  <a:tcPr marL="45720" marR="45720" marT="45720" marB="45720" anchor="ctr">
+                    <a:lnL w="6350" cap="flat" cmpd="sng" algn="ctr">
+                      <a:solidFill>
+                        <a:srgbClr val="E6E9EC"/>
+                      </a:solidFill>
+                      <a:prstDash val="solid"/>
+                      <a:round/>
+                      <a:headEnd type="none" w="med" len="med"/>
+                      <a:tailEnd type="none" w="med" len="med"/>
+                    </a:lnL>
+                    <a:lnR w="6350" cap="flat" cmpd="sng" algn="ctr">
+                      <a:solidFill>
+                        <a:srgbClr val="E6E9EC"/>
+                      </a:solidFill>
+                      <a:prstDash val="solid"/>
+                      <a:round/>
+                      <a:headEnd type="none" w="med" len="med"/>
+                      <a:tailEnd type="none" w="med" len="med"/>
+                    </a:lnR>
+                    <a:lnT w="6350" cap="flat" cmpd="sng" algn="ctr">
+                      <a:solidFill>
+                        <a:srgbClr val="E6E9EC"/>
+                      </a:solidFill>
+                      <a:prstDash val="solid"/>
+                      <a:round/>
+                      <a:headEnd type="none" w="med" len="med"/>
+                      <a:tailEnd type="none" w="med" len="med"/>
+                    </a:lnT>
+                    <a:lnB w="6350" cap="flat" cmpd="sng" algn="ctr">
+                      <a:solidFill>
+                        <a:srgbClr val="E6E9EC"/>
+                      </a:solidFill>
+                      <a:prstDash val="solid"/>
+                      <a:round/>
+                      <a:headEnd type="none" w="med" len="med"/>
+                      <a:tailEnd type="none" w="med" len="med"/>
+                    </a:lnB>
+                    <a:solidFill>
+                      <a:srgbClr val="FFFFFF"/>
+                    </a:solidFill>
+                  </a:tcPr>
+                </a:tc>
+                <a:tc>
+                  <a:txBody>
+                    <a:bodyPr/>
+                    <a:lstStyle/>
+                    <a:p>
+                      <a:pPr indent="0" marL="0">
+                        <a:buNone/>
+                      </a:pPr>
+                      <a:r>
+                        <a:rPr lang="en-US" sz="750" b="1" dirty="0">
+                          <a:solidFill>
+                            <a:srgbClr val="AE4E14"/>
+                          </a:solidFill>
+                          <a:latin typeface="Arial" pitchFamily="34" charset="0"/>
+                          <a:ea typeface="Arial" pitchFamily="34" charset="-122"/>
+                          <a:cs typeface="Arial" pitchFamily="34" charset="-120"/>
+                        </a:rPr>
+                        <a:t>4.214</a:t>
+                      </a:r>
+                      <a:endParaRPr lang="en-US" sz="750" dirty="0">
+                        <a:latin typeface="Arial" charset="0"/>
+                        <a:ea typeface="Arial" charset="0"/>
+                        <a:cs typeface="Arial" charset="0"/>
+                      </a:endParaRPr>
+                    </a:p>
+                  </a:txBody>
+                  <a:tcPr marL="45720" marR="45720" marT="45720" marB="45720" anchor="ctr">
+                    <a:lnL w="6350" cap="flat" cmpd="sng" algn="ctr">
+                      <a:solidFill>
+                        <a:srgbClr val="E6E9EC"/>
+                      </a:solidFill>
+                      <a:prstDash val="solid"/>
+                      <a:round/>
+                      <a:headEnd type="none" w="med" len="med"/>
+                      <a:tailEnd type="none" w="med" len="med"/>
+                    </a:lnL>
+                    <a:lnR w="6350" cap="flat" cmpd="sng" algn="ctr">
+                      <a:solidFill>
+                        <a:srgbClr val="E6E9EC"/>
+                      </a:solidFill>
+                      <a:prstDash val="solid"/>
+                      <a:round/>
+                      <a:headEnd type="none" w="med" len="med"/>
+                      <a:tailEnd type="none" w="med" len="med"/>
+                    </a:lnR>
+                    <a:lnT w="6350" cap="flat" cmpd="sng" algn="ctr">
+                      <a:solidFill>
+                        <a:srgbClr val="E6E9EC"/>
+                      </a:solidFill>
+                      <a:prstDash val="solid"/>
+                      <a:round/>
+                      <a:headEnd type="none" w="med" len="med"/>
+                      <a:tailEnd type="none" w="med" len="med"/>
+                    </a:lnT>
+                    <a:lnB w="6350" cap="flat" cmpd="sng" algn="ctr">
+                      <a:solidFill>
+                        <a:srgbClr val="E6E9EC"/>
+                      </a:solidFill>
+                      <a:prstDash val="solid"/>
+                      <a:round/>
+                      <a:headEnd type="none" w="med" len="med"/>
+                      <a:tailEnd type="none" w="med" len="med"/>
+                    </a:lnB>
+                    <a:solidFill>
+                      <a:srgbClr val="FFFFFF"/>
+                    </a:solidFill>
+                  </a:tcPr>
+                </a:tc>
+                <a:tc>
+                  <a:txBody>
+                    <a:bodyPr/>
+                    <a:lstStyle/>
+                    <a:p>
+                      <a:pPr indent="0" marL="0">
+                        <a:buNone/>
+                      </a:pPr>
+                      <a:r>
+                        <a:rPr lang="en-US" sz="750" b="1" dirty="0">
+                          <a:solidFill>
+                            <a:srgbClr val="AE4E14"/>
+                          </a:solidFill>
+                          <a:latin typeface="Arial" pitchFamily="34" charset="0"/>
+                          <a:ea typeface="Arial" pitchFamily="34" charset="-122"/>
+                          <a:cs typeface="Arial" pitchFamily="34" charset="-120"/>
+                        </a:rPr>
+                        <a:t>15.504</a:t>
+                      </a:r>
+                      <a:endParaRPr lang="en-US" sz="750" dirty="0">
+                        <a:latin typeface="Arial" charset="0"/>
+                        <a:ea typeface="Arial" charset="0"/>
+                        <a:cs typeface="Arial" charset="0"/>
+                      </a:endParaRPr>
+                    </a:p>
+                  </a:txBody>
+                  <a:tcPr marL="45720" marR="45720" marT="45720" marB="45720" anchor="ctr">
+                    <a:lnL w="6350" cap="flat" cmpd="sng" algn="ctr">
+                      <a:solidFill>
+                        <a:srgbClr val="E6E9EC"/>
+                      </a:solidFill>
+                      <a:prstDash val="solid"/>
+                      <a:round/>
+                      <a:headEnd type="none" w="med" len="med"/>
+                      <a:tailEnd type="none" w="med" len="med"/>
+                    </a:lnL>
+                    <a:lnR w="6350" cap="flat" cmpd="sng" algn="ctr">
+                      <a:solidFill>
+                        <a:srgbClr val="E6E9EC"/>
+                      </a:solidFill>
+                      <a:prstDash val="solid"/>
+                      <a:round/>
+                      <a:headEnd type="none" w="med" len="med"/>
+                      <a:tailEnd type="none" w="med" len="med"/>
+                    </a:lnR>
+                    <a:lnT w="6350" cap="flat" cmpd="sng" algn="ctr">
+                      <a:solidFill>
+                        <a:srgbClr val="E6E9EC"/>
+                      </a:solidFill>
+                      <a:prstDash val="solid"/>
+                      <a:round/>
+                      <a:headEnd type="none" w="med" len="med"/>
+                      <a:tailEnd type="none" w="med" len="med"/>
+                    </a:lnT>
+                    <a:lnB w="6350" cap="flat" cmpd="sng" algn="ctr">
+                      <a:solidFill>
+                        <a:srgbClr val="E6E9EC"/>
+                      </a:solidFill>
+                      <a:prstDash val="solid"/>
+                      <a:round/>
+                      <a:headEnd type="none" w="med" len="med"/>
+                      <a:tailEnd type="none" w="med" len="med"/>
+                    </a:lnB>
+                    <a:solidFill>
+                      <a:srgbClr val="FFFFFF"/>
+                    </a:solidFill>
+                  </a:tcPr>
+                </a:tc>
+              </a:tr>
+            </a:tbl>
+          </a:graphicData>
+        </a:graphic>
+      </p:graphicFrame>
+      <p:sp>
+        <p:nvSpPr>
+          <p:cNvPr id="14" name="Text 7"/>
           <p:cNvSpPr txBox="1"/>
           <p:nvPr/>
         </p:nvSpPr>
         <p:spPr>
           <a:xfrm>
-            <a:off x="7708392" y="3584448"/>
-            <a:ext cx="896112" cy="347472"/>
+            <a:off x="4709160" y="2971800"/>
+            <a:ext cx="3977640" cy="182880"/>
           </a:xfrm>
           <a:prstGeom prst="rect">
             <a:avLst/>
@@ -7496,34 +10186,1301 @@
           <a:bodyPr wrap="square" lIns="0" tIns="0" rIns="0" bIns="0" rtlCol="0" anchor="t"/>
           <a:lstStyle/>
           <a:p>
-            <a:pPr algn="ctr" indent="0" marL="0">
+            <a:pPr indent="0" marL="0">
               <a:buNone/>
             </a:pPr>
             <a:r>
-              <a:rPr lang="en-US" sz="750" dirty="0">
+              <a:rPr lang="en-US" sz="750" b="1" spc="100" kern="0" dirty="0">
                 <a:solidFill>
-                  <a:srgbClr val="3D4A56"/>
+                  <a:srgbClr val="AE4E14"/>
                 </a:solidFill>
                 <a:latin typeface="Arial" pitchFamily="34" charset="0"/>
                 <a:ea typeface="Arial" pitchFamily="34" charset="-122"/>
                 <a:cs typeface="Arial" pitchFamily="34" charset="-120"/>
               </a:rPr>
-              <a:t>~0,94 USD</a:t>
+              <a:t>SENSIBILIDAD (POR NOVELA)</a:t>
             </a:r>
             <a:endParaRPr lang="en-US" sz="750" dirty="0"/>
           </a:p>
         </p:txBody>
       </p:sp>
-      <p:sp>
-        <p:nvSpPr>
-          <p:cNvPr id="40" name="Text 34"/>
+      <p:graphicFrame>
+        <p:nvGraphicFramePr>
+          <p:cNvPr id="49" name="Table 3"/>
+          <p:cNvGraphicFramePr>
+            <a:graphicFrameLocks noGrp="1"/>
+          </p:cNvGraphicFramePr>
+          <p:nvPr>
+            <p:extLst>
+              <p:ext uri="{D42A27DB-BD31-4B8C-83A1-F6EECF244321}">
+                <p14:modId xmlns:p14="http://schemas.microsoft.com/office/powerpoint/2010/main" val="1579011935"/>
+              </p:ext>
+            </p:extLst>
+          </p:nvPr>
+        </p:nvGraphicFramePr>
+        <p:xfrm>
+          <a:off x="4709160" y="3182112"/>
+          <a:ext cx="3977640" cy="914400"/>
+        </p:xfrm>
+        <a:graphic>
+          <a:graphicData uri="http://schemas.openxmlformats.org/drawingml/2006/table">
+            <a:tbl>
+              <a:tblPr/>
+              <a:tblGrid>
+                <a:gridCol w="1965960"/>
+                <a:gridCol w="868680"/>
+                <a:gridCol w="1143000"/>
+              </a:tblGrid>
+              <a:tr h="219456">
+                <a:tc>
+                  <a:txBody>
+                    <a:bodyPr/>
+                    <a:lstStyle/>
+                    <a:p>
+                      <a:pPr indent="0" marL="0">
+                        <a:buNone/>
+                      </a:pPr>
+                      <a:r>
+                        <a:rPr lang="en-US" sz="750" b="1" dirty="0">
+                          <a:solidFill>
+                            <a:srgbClr val="FFFFFF"/>
+                          </a:solidFill>
+                          <a:latin typeface="Arial" pitchFamily="34" charset="0"/>
+                          <a:ea typeface="Arial" pitchFamily="34" charset="-122"/>
+                          <a:cs typeface="Arial" pitchFamily="34" charset="-120"/>
+                        </a:rPr>
+                        <a:t>Escenario</a:t>
+                      </a:r>
+                      <a:endParaRPr lang="en-US" sz="750" dirty="0">
+                        <a:latin typeface="Arial" charset="0"/>
+                        <a:ea typeface="Arial" charset="0"/>
+                        <a:cs typeface="Arial" charset="0"/>
+                      </a:endParaRPr>
+                    </a:p>
+                  </a:txBody>
+                  <a:tcPr marL="45720" marR="45720" marT="45720" marB="45720" anchor="ctr">
+                    <a:lnL w="6350" cap="flat" cmpd="sng" algn="ctr">
+                      <a:solidFill>
+                        <a:srgbClr val="E6E9EC"/>
+                      </a:solidFill>
+                      <a:prstDash val="solid"/>
+                      <a:round/>
+                      <a:headEnd type="none" w="med" len="med"/>
+                      <a:tailEnd type="none" w="med" len="med"/>
+                    </a:lnL>
+                    <a:lnR w="6350" cap="flat" cmpd="sng" algn="ctr">
+                      <a:solidFill>
+                        <a:srgbClr val="E6E9EC"/>
+                      </a:solidFill>
+                      <a:prstDash val="solid"/>
+                      <a:round/>
+                      <a:headEnd type="none" w="med" len="med"/>
+                      <a:tailEnd type="none" w="med" len="med"/>
+                    </a:lnR>
+                    <a:lnT w="6350" cap="flat" cmpd="sng" algn="ctr">
+                      <a:solidFill>
+                        <a:srgbClr val="E6E9EC"/>
+                      </a:solidFill>
+                      <a:prstDash val="solid"/>
+                      <a:round/>
+                      <a:headEnd type="none" w="med" len="med"/>
+                      <a:tailEnd type="none" w="med" len="med"/>
+                    </a:lnT>
+                    <a:lnB w="6350" cap="flat" cmpd="sng" algn="ctr">
+                      <a:solidFill>
+                        <a:srgbClr val="E6E9EC"/>
+                      </a:solidFill>
+                      <a:prstDash val="solid"/>
+                      <a:round/>
+                      <a:headEnd type="none" w="med" len="med"/>
+                      <a:tailEnd type="none" w="med" len="med"/>
+                    </a:lnB>
+                    <a:solidFill>
+                      <a:srgbClr val="1E2B37"/>
+                    </a:solidFill>
+                  </a:tcPr>
+                </a:tc>
+                <a:tc>
+                  <a:txBody>
+                    <a:bodyPr/>
+                    <a:lstStyle/>
+                    <a:p>
+                      <a:pPr indent="0" marL="0">
+                        <a:buNone/>
+                      </a:pPr>
+                      <a:r>
+                        <a:rPr lang="en-US" sz="750" b="1" dirty="0">
+                          <a:solidFill>
+                            <a:srgbClr val="FFFFFF"/>
+                          </a:solidFill>
+                          <a:latin typeface="Arial" pitchFamily="34" charset="0"/>
+                          <a:ea typeface="Arial" pitchFamily="34" charset="-122"/>
+                          <a:cs typeface="Arial" pitchFamily="34" charset="-120"/>
+                        </a:rPr>
+                        <a:t>Coste</a:t>
+                      </a:r>
+                      <a:endParaRPr lang="en-US" sz="750" dirty="0">
+                        <a:latin typeface="Arial" charset="0"/>
+                        <a:ea typeface="Arial" charset="0"/>
+                        <a:cs typeface="Arial" charset="0"/>
+                      </a:endParaRPr>
+                    </a:p>
+                  </a:txBody>
+                  <a:tcPr marL="45720" marR="45720" marT="45720" marB="45720" anchor="ctr">
+                    <a:lnL w="6350" cap="flat" cmpd="sng" algn="ctr">
+                      <a:solidFill>
+                        <a:srgbClr val="E6E9EC"/>
+                      </a:solidFill>
+                      <a:prstDash val="solid"/>
+                      <a:round/>
+                      <a:headEnd type="none" w="med" len="med"/>
+                      <a:tailEnd type="none" w="med" len="med"/>
+                    </a:lnL>
+                    <a:lnR w="6350" cap="flat" cmpd="sng" algn="ctr">
+                      <a:solidFill>
+                        <a:srgbClr val="E6E9EC"/>
+                      </a:solidFill>
+                      <a:prstDash val="solid"/>
+                      <a:round/>
+                      <a:headEnd type="none" w="med" len="med"/>
+                      <a:tailEnd type="none" w="med" len="med"/>
+                    </a:lnR>
+                    <a:lnT w="6350" cap="flat" cmpd="sng" algn="ctr">
+                      <a:solidFill>
+                        <a:srgbClr val="E6E9EC"/>
+                      </a:solidFill>
+                      <a:prstDash val="solid"/>
+                      <a:round/>
+                      <a:headEnd type="none" w="med" len="med"/>
+                      <a:tailEnd type="none" w="med" len="med"/>
+                    </a:lnT>
+                    <a:lnB w="6350" cap="flat" cmpd="sng" algn="ctr">
+                      <a:solidFill>
+                        <a:srgbClr val="E6E9EC"/>
+                      </a:solidFill>
+                      <a:prstDash val="solid"/>
+                      <a:round/>
+                      <a:headEnd type="none" w="med" len="med"/>
+                      <a:tailEnd type="none" w="med" len="med"/>
+                    </a:lnB>
+                    <a:solidFill>
+                      <a:srgbClr val="1E2B37"/>
+                    </a:solidFill>
+                  </a:tcPr>
+                </a:tc>
+                <a:tc>
+                  <a:txBody>
+                    <a:bodyPr/>
+                    <a:lstStyle/>
+                    <a:p>
+                      <a:pPr indent="0" marL="0">
+                        <a:buNone/>
+                      </a:pPr>
+                      <a:r>
+                        <a:rPr lang="en-US" sz="750" b="1" dirty="0">
+                          <a:solidFill>
+                            <a:srgbClr val="FFFFFF"/>
+                          </a:solidFill>
+                          <a:latin typeface="Arial" pitchFamily="34" charset="0"/>
+                          <a:ea typeface="Arial" pitchFamily="34" charset="-122"/>
+                          <a:cs typeface="Arial" pitchFamily="34" charset="-120"/>
+                        </a:rPr>
+                        <a:t>Margen Qaracter</a:t>
+                      </a:r>
+                      <a:endParaRPr lang="en-US" sz="750" dirty="0">
+                        <a:latin typeface="Arial" charset="0"/>
+                        <a:ea typeface="Arial" charset="0"/>
+                        <a:cs typeface="Arial" charset="0"/>
+                      </a:endParaRPr>
+                    </a:p>
+                  </a:txBody>
+                  <a:tcPr marL="45720" marR="45720" marT="45720" marB="45720" anchor="ctr">
+                    <a:lnL w="6350" cap="flat" cmpd="sng" algn="ctr">
+                      <a:solidFill>
+                        <a:srgbClr val="E6E9EC"/>
+                      </a:solidFill>
+                      <a:prstDash val="solid"/>
+                      <a:round/>
+                      <a:headEnd type="none" w="med" len="med"/>
+                      <a:tailEnd type="none" w="med" len="med"/>
+                    </a:lnL>
+                    <a:lnR w="6350" cap="flat" cmpd="sng" algn="ctr">
+                      <a:solidFill>
+                        <a:srgbClr val="E6E9EC"/>
+                      </a:solidFill>
+                      <a:prstDash val="solid"/>
+                      <a:round/>
+                      <a:headEnd type="none" w="med" len="med"/>
+                      <a:tailEnd type="none" w="med" len="med"/>
+                    </a:lnR>
+                    <a:lnT w="6350" cap="flat" cmpd="sng" algn="ctr">
+                      <a:solidFill>
+                        <a:srgbClr val="E6E9EC"/>
+                      </a:solidFill>
+                      <a:prstDash val="solid"/>
+                      <a:round/>
+                      <a:headEnd type="none" w="med" len="med"/>
+                      <a:tailEnd type="none" w="med" len="med"/>
+                    </a:lnT>
+                    <a:lnB w="6350" cap="flat" cmpd="sng" algn="ctr">
+                      <a:solidFill>
+                        <a:srgbClr val="E6E9EC"/>
+                      </a:solidFill>
+                      <a:prstDash val="solid"/>
+                      <a:round/>
+                      <a:headEnd type="none" w="med" len="med"/>
+                      <a:tailEnd type="none" w="med" len="med"/>
+                    </a:lnB>
+                    <a:solidFill>
+                      <a:srgbClr val="1E2B37"/>
+                    </a:solidFill>
+                  </a:tcPr>
+                </a:tc>
+              </a:tr>
+              <a:tr h="219456">
+                <a:tc>
+                  <a:txBody>
+                    <a:bodyPr/>
+                    <a:lstStyle/>
+                    <a:p>
+                      <a:pPr indent="0" marL="0">
+                        <a:buNone/>
+                      </a:pPr>
+                      <a:r>
+                        <a:rPr lang="en-US" sz="750" dirty="0">
+                          <a:solidFill>
+                            <a:srgbClr val="1E2B37"/>
+                          </a:solidFill>
+                          <a:latin typeface="Arial" pitchFamily="34" charset="0"/>
+                          <a:ea typeface="Arial" pitchFamily="34" charset="-122"/>
+                          <a:cs typeface="Arial" pitchFamily="34" charset="-120"/>
+                        </a:rPr>
+                        <a:t>Base (1 cambio)</a:t>
+                      </a:r>
+                      <a:endParaRPr lang="en-US" sz="750" dirty="0">
+                        <a:latin typeface="Arial" charset="0"/>
+                        <a:ea typeface="Arial" charset="0"/>
+                        <a:cs typeface="Arial" charset="0"/>
+                      </a:endParaRPr>
+                    </a:p>
+                  </a:txBody>
+                  <a:tcPr marL="45720" marR="45720" marT="45720" marB="45720" anchor="ctr">
+                    <a:lnL w="6350" cap="flat" cmpd="sng" algn="ctr">
+                      <a:solidFill>
+                        <a:srgbClr val="E6E9EC"/>
+                      </a:solidFill>
+                      <a:prstDash val="solid"/>
+                      <a:round/>
+                      <a:headEnd type="none" w="med" len="med"/>
+                      <a:tailEnd type="none" w="med" len="med"/>
+                    </a:lnL>
+                    <a:lnR w="6350" cap="flat" cmpd="sng" algn="ctr">
+                      <a:solidFill>
+                        <a:srgbClr val="E6E9EC"/>
+                      </a:solidFill>
+                      <a:prstDash val="solid"/>
+                      <a:round/>
+                      <a:headEnd type="none" w="med" len="med"/>
+                      <a:tailEnd type="none" w="med" len="med"/>
+                    </a:lnR>
+                    <a:lnT w="6350" cap="flat" cmpd="sng" algn="ctr">
+                      <a:solidFill>
+                        <a:srgbClr val="E6E9EC"/>
+                      </a:solidFill>
+                      <a:prstDash val="solid"/>
+                      <a:round/>
+                      <a:headEnd type="none" w="med" len="med"/>
+                      <a:tailEnd type="none" w="med" len="med"/>
+                    </a:lnT>
+                    <a:lnB w="6350" cap="flat" cmpd="sng" algn="ctr">
+                      <a:solidFill>
+                        <a:srgbClr val="E6E9EC"/>
+                      </a:solidFill>
+                      <a:prstDash val="solid"/>
+                      <a:round/>
+                      <a:headEnd type="none" w="med" len="med"/>
+                      <a:tailEnd type="none" w="med" len="med"/>
+                    </a:lnB>
+                    <a:solidFill>
+                      <a:srgbClr val="FFFFFF"/>
+                    </a:solidFill>
+                  </a:tcPr>
+                </a:tc>
+                <a:tc>
+                  <a:txBody>
+                    <a:bodyPr/>
+                    <a:lstStyle/>
+                    <a:p>
+                      <a:pPr indent="0" marL="0">
+                        <a:buNone/>
+                      </a:pPr>
+                      <a:r>
+                        <a:rPr lang="en-US" sz="750" dirty="0">
+                          <a:solidFill>
+                            <a:srgbClr val="1E2B37"/>
+                          </a:solidFill>
+                          <a:latin typeface="Arial" pitchFamily="34" charset="0"/>
+                          <a:ea typeface="Arial" pitchFamily="34" charset="-122"/>
+                          <a:cs typeface="Arial" pitchFamily="34" charset="-120"/>
+                        </a:rPr>
+                        <a:t>4,77 €</a:t>
+                      </a:r>
+                      <a:endParaRPr lang="en-US" sz="750" dirty="0">
+                        <a:latin typeface="Arial" charset="0"/>
+                        <a:ea typeface="Arial" charset="0"/>
+                        <a:cs typeface="Arial" charset="0"/>
+                      </a:endParaRPr>
+                    </a:p>
+                  </a:txBody>
+                  <a:tcPr marL="45720" marR="45720" marT="45720" marB="45720" anchor="ctr">
+                    <a:lnL w="6350" cap="flat" cmpd="sng" algn="ctr">
+                      <a:solidFill>
+                        <a:srgbClr val="E6E9EC"/>
+                      </a:solidFill>
+                      <a:prstDash val="solid"/>
+                      <a:round/>
+                      <a:headEnd type="none" w="med" len="med"/>
+                      <a:tailEnd type="none" w="med" len="med"/>
+                    </a:lnL>
+                    <a:lnR w="6350" cap="flat" cmpd="sng" algn="ctr">
+                      <a:solidFill>
+                        <a:srgbClr val="E6E9EC"/>
+                      </a:solidFill>
+                      <a:prstDash val="solid"/>
+                      <a:round/>
+                      <a:headEnd type="none" w="med" len="med"/>
+                      <a:tailEnd type="none" w="med" len="med"/>
+                    </a:lnR>
+                    <a:lnT w="6350" cap="flat" cmpd="sng" algn="ctr">
+                      <a:solidFill>
+                        <a:srgbClr val="E6E9EC"/>
+                      </a:solidFill>
+                      <a:prstDash val="solid"/>
+                      <a:round/>
+                      <a:headEnd type="none" w="med" len="med"/>
+                      <a:tailEnd type="none" w="med" len="med"/>
+                    </a:lnT>
+                    <a:lnB w="6350" cap="flat" cmpd="sng" algn="ctr">
+                      <a:solidFill>
+                        <a:srgbClr val="E6E9EC"/>
+                      </a:solidFill>
+                      <a:prstDash val="solid"/>
+                      <a:round/>
+                      <a:headEnd type="none" w="med" len="med"/>
+                      <a:tailEnd type="none" w="med" len="med"/>
+                    </a:lnB>
+                    <a:solidFill>
+                      <a:srgbClr val="FFFFFF"/>
+                    </a:solidFill>
+                  </a:tcPr>
+                </a:tc>
+                <a:tc>
+                  <a:txBody>
+                    <a:bodyPr/>
+                    <a:lstStyle/>
+                    <a:p>
+                      <a:pPr indent="0" marL="0">
+                        <a:buNone/>
+                      </a:pPr>
+                      <a:r>
+                        <a:rPr lang="en-US" sz="750" b="1" dirty="0">
+                          <a:solidFill>
+                            <a:srgbClr val="1E2B37"/>
+                          </a:solidFill>
+                          <a:latin typeface="Arial" pitchFamily="34" charset="0"/>
+                          <a:ea typeface="Arial" pitchFamily="34" charset="-122"/>
+                          <a:cs typeface="Arial" pitchFamily="34" charset="-120"/>
+                        </a:rPr>
+                        <a:t>7,23 €</a:t>
+                      </a:r>
+                      <a:endParaRPr lang="en-US" sz="750" dirty="0">
+                        <a:latin typeface="Arial" charset="0"/>
+                        <a:ea typeface="Arial" charset="0"/>
+                        <a:cs typeface="Arial" charset="0"/>
+                      </a:endParaRPr>
+                    </a:p>
+                  </a:txBody>
+                  <a:tcPr marL="45720" marR="45720" marT="45720" marB="45720" anchor="ctr">
+                    <a:lnL w="6350" cap="flat" cmpd="sng" algn="ctr">
+                      <a:solidFill>
+                        <a:srgbClr val="E6E9EC"/>
+                      </a:solidFill>
+                      <a:prstDash val="solid"/>
+                      <a:round/>
+                      <a:headEnd type="none" w="med" len="med"/>
+                      <a:tailEnd type="none" w="med" len="med"/>
+                    </a:lnL>
+                    <a:lnR w="6350" cap="flat" cmpd="sng" algn="ctr">
+                      <a:solidFill>
+                        <a:srgbClr val="E6E9EC"/>
+                      </a:solidFill>
+                      <a:prstDash val="solid"/>
+                      <a:round/>
+                      <a:headEnd type="none" w="med" len="med"/>
+                      <a:tailEnd type="none" w="med" len="med"/>
+                    </a:lnR>
+                    <a:lnT w="6350" cap="flat" cmpd="sng" algn="ctr">
+                      <a:solidFill>
+                        <a:srgbClr val="E6E9EC"/>
+                      </a:solidFill>
+                      <a:prstDash val="solid"/>
+                      <a:round/>
+                      <a:headEnd type="none" w="med" len="med"/>
+                      <a:tailEnd type="none" w="med" len="med"/>
+                    </a:lnT>
+                    <a:lnB w="6350" cap="flat" cmpd="sng" algn="ctr">
+                      <a:solidFill>
+                        <a:srgbClr val="E6E9EC"/>
+                      </a:solidFill>
+                      <a:prstDash val="solid"/>
+                      <a:round/>
+                      <a:headEnd type="none" w="med" len="med"/>
+                      <a:tailEnd type="none" w="med" len="med"/>
+                    </a:lnB>
+                    <a:solidFill>
+                      <a:srgbClr val="FFFFFF"/>
+                    </a:solidFill>
+                  </a:tcPr>
+                </a:tc>
+              </a:tr>
+              <a:tr h="219456">
+                <a:tc>
+                  <a:txBody>
+                    <a:bodyPr/>
+                    <a:lstStyle/>
+                    <a:p>
+                      <a:pPr indent="0" marL="0">
+                        <a:buNone/>
+                      </a:pPr>
+                      <a:r>
+                        <a:rPr lang="en-US" sz="750" dirty="0">
+                          <a:solidFill>
+                            <a:srgbClr val="1E2B37"/>
+                          </a:solidFill>
+                          <a:latin typeface="Arial" pitchFamily="34" charset="0"/>
+                          <a:ea typeface="Arial" pitchFamily="34" charset="-122"/>
+                          <a:cs typeface="Arial" pitchFamily="34" charset="-120"/>
+                        </a:rPr>
+                        <a:t>Tokens +50 %</a:t>
+                      </a:r>
+                      <a:endParaRPr lang="en-US" sz="750" dirty="0">
+                        <a:latin typeface="Arial" charset="0"/>
+                        <a:ea typeface="Arial" charset="0"/>
+                        <a:cs typeface="Arial" charset="0"/>
+                      </a:endParaRPr>
+                    </a:p>
+                  </a:txBody>
+                  <a:tcPr marL="45720" marR="45720" marT="45720" marB="45720" anchor="ctr">
+                    <a:lnL w="6350" cap="flat" cmpd="sng" algn="ctr">
+                      <a:solidFill>
+                        <a:srgbClr val="E6E9EC"/>
+                      </a:solidFill>
+                      <a:prstDash val="solid"/>
+                      <a:round/>
+                      <a:headEnd type="none" w="med" len="med"/>
+                      <a:tailEnd type="none" w="med" len="med"/>
+                    </a:lnL>
+                    <a:lnR w="6350" cap="flat" cmpd="sng" algn="ctr">
+                      <a:solidFill>
+                        <a:srgbClr val="E6E9EC"/>
+                      </a:solidFill>
+                      <a:prstDash val="solid"/>
+                      <a:round/>
+                      <a:headEnd type="none" w="med" len="med"/>
+                      <a:tailEnd type="none" w="med" len="med"/>
+                    </a:lnR>
+                    <a:lnT w="6350" cap="flat" cmpd="sng" algn="ctr">
+                      <a:solidFill>
+                        <a:srgbClr val="E6E9EC"/>
+                      </a:solidFill>
+                      <a:prstDash val="solid"/>
+                      <a:round/>
+                      <a:headEnd type="none" w="med" len="med"/>
+                      <a:tailEnd type="none" w="med" len="med"/>
+                    </a:lnT>
+                    <a:lnB w="6350" cap="flat" cmpd="sng" algn="ctr">
+                      <a:solidFill>
+                        <a:srgbClr val="E6E9EC"/>
+                      </a:solidFill>
+                      <a:prstDash val="solid"/>
+                      <a:round/>
+                      <a:headEnd type="none" w="med" len="med"/>
+                      <a:tailEnd type="none" w="med" len="med"/>
+                    </a:lnB>
+                    <a:solidFill>
+                      <a:srgbClr val="F7F8FA"/>
+                    </a:solidFill>
+                  </a:tcPr>
+                </a:tc>
+                <a:tc>
+                  <a:txBody>
+                    <a:bodyPr/>
+                    <a:lstStyle/>
+                    <a:p>
+                      <a:pPr indent="0" marL="0">
+                        <a:buNone/>
+                      </a:pPr>
+                      <a:r>
+                        <a:rPr lang="en-US" sz="750" dirty="0">
+                          <a:solidFill>
+                            <a:srgbClr val="1E2B37"/>
+                          </a:solidFill>
+                          <a:latin typeface="Arial" pitchFamily="34" charset="0"/>
+                          <a:ea typeface="Arial" pitchFamily="34" charset="-122"/>
+                          <a:cs typeface="Arial" pitchFamily="34" charset="-120"/>
+                        </a:rPr>
+                        <a:t>7,01 €</a:t>
+                      </a:r>
+                      <a:endParaRPr lang="en-US" sz="750" dirty="0">
+                        <a:latin typeface="Arial" charset="0"/>
+                        <a:ea typeface="Arial" charset="0"/>
+                        <a:cs typeface="Arial" charset="0"/>
+                      </a:endParaRPr>
+                    </a:p>
+                  </a:txBody>
+                  <a:tcPr marL="45720" marR="45720" marT="45720" marB="45720" anchor="ctr">
+                    <a:lnL w="6350" cap="flat" cmpd="sng" algn="ctr">
+                      <a:solidFill>
+                        <a:srgbClr val="E6E9EC"/>
+                      </a:solidFill>
+                      <a:prstDash val="solid"/>
+                      <a:round/>
+                      <a:headEnd type="none" w="med" len="med"/>
+                      <a:tailEnd type="none" w="med" len="med"/>
+                    </a:lnL>
+                    <a:lnR w="6350" cap="flat" cmpd="sng" algn="ctr">
+                      <a:solidFill>
+                        <a:srgbClr val="E6E9EC"/>
+                      </a:solidFill>
+                      <a:prstDash val="solid"/>
+                      <a:round/>
+                      <a:headEnd type="none" w="med" len="med"/>
+                      <a:tailEnd type="none" w="med" len="med"/>
+                    </a:lnR>
+                    <a:lnT w="6350" cap="flat" cmpd="sng" algn="ctr">
+                      <a:solidFill>
+                        <a:srgbClr val="E6E9EC"/>
+                      </a:solidFill>
+                      <a:prstDash val="solid"/>
+                      <a:round/>
+                      <a:headEnd type="none" w="med" len="med"/>
+                      <a:tailEnd type="none" w="med" len="med"/>
+                    </a:lnT>
+                    <a:lnB w="6350" cap="flat" cmpd="sng" algn="ctr">
+                      <a:solidFill>
+                        <a:srgbClr val="E6E9EC"/>
+                      </a:solidFill>
+                      <a:prstDash val="solid"/>
+                      <a:round/>
+                      <a:headEnd type="none" w="med" len="med"/>
+                      <a:tailEnd type="none" w="med" len="med"/>
+                    </a:lnB>
+                    <a:solidFill>
+                      <a:srgbClr val="F7F8FA"/>
+                    </a:solidFill>
+                  </a:tcPr>
+                </a:tc>
+                <a:tc>
+                  <a:txBody>
+                    <a:bodyPr/>
+                    <a:lstStyle/>
+                    <a:p>
+                      <a:pPr indent="0" marL="0">
+                        <a:buNone/>
+                      </a:pPr>
+                      <a:r>
+                        <a:rPr lang="en-US" sz="750" b="1" dirty="0">
+                          <a:solidFill>
+                            <a:srgbClr val="1E2B37"/>
+                          </a:solidFill>
+                          <a:latin typeface="Arial" pitchFamily="34" charset="0"/>
+                          <a:ea typeface="Arial" pitchFamily="34" charset="-122"/>
+                          <a:cs typeface="Arial" pitchFamily="34" charset="-120"/>
+                        </a:rPr>
+                        <a:t>4,99 €</a:t>
+                      </a:r>
+                      <a:endParaRPr lang="en-US" sz="750" dirty="0">
+                        <a:latin typeface="Arial" charset="0"/>
+                        <a:ea typeface="Arial" charset="0"/>
+                        <a:cs typeface="Arial" charset="0"/>
+                      </a:endParaRPr>
+                    </a:p>
+                  </a:txBody>
+                  <a:tcPr marL="45720" marR="45720" marT="45720" marB="45720" anchor="ctr">
+                    <a:lnL w="6350" cap="flat" cmpd="sng" algn="ctr">
+                      <a:solidFill>
+                        <a:srgbClr val="E6E9EC"/>
+                      </a:solidFill>
+                      <a:prstDash val="solid"/>
+                      <a:round/>
+                      <a:headEnd type="none" w="med" len="med"/>
+                      <a:tailEnd type="none" w="med" len="med"/>
+                    </a:lnL>
+                    <a:lnR w="6350" cap="flat" cmpd="sng" algn="ctr">
+                      <a:solidFill>
+                        <a:srgbClr val="E6E9EC"/>
+                      </a:solidFill>
+                      <a:prstDash val="solid"/>
+                      <a:round/>
+                      <a:headEnd type="none" w="med" len="med"/>
+                      <a:tailEnd type="none" w="med" len="med"/>
+                    </a:lnR>
+                    <a:lnT w="6350" cap="flat" cmpd="sng" algn="ctr">
+                      <a:solidFill>
+                        <a:srgbClr val="E6E9EC"/>
+                      </a:solidFill>
+                      <a:prstDash val="solid"/>
+                      <a:round/>
+                      <a:headEnd type="none" w="med" len="med"/>
+                      <a:tailEnd type="none" w="med" len="med"/>
+                    </a:lnT>
+                    <a:lnB w="6350" cap="flat" cmpd="sng" algn="ctr">
+                      <a:solidFill>
+                        <a:srgbClr val="E6E9EC"/>
+                      </a:solidFill>
+                      <a:prstDash val="solid"/>
+                      <a:round/>
+                      <a:headEnd type="none" w="med" len="med"/>
+                      <a:tailEnd type="none" w="med" len="med"/>
+                    </a:lnB>
+                    <a:solidFill>
+                      <a:srgbClr val="F7F8FA"/>
+                    </a:solidFill>
+                  </a:tcPr>
+                </a:tc>
+              </a:tr>
+              <a:tr h="219456">
+                <a:tc>
+                  <a:txBody>
+                    <a:bodyPr/>
+                    <a:lstStyle/>
+                    <a:p>
+                      <a:pPr indent="0" marL="0">
+                        <a:buNone/>
+                      </a:pPr>
+                      <a:r>
+                        <a:rPr lang="en-US" sz="750" dirty="0">
+                          <a:solidFill>
+                            <a:srgbClr val="1E2B37"/>
+                          </a:solidFill>
+                          <a:latin typeface="Arial" pitchFamily="34" charset="0"/>
+                          <a:ea typeface="Arial" pitchFamily="34" charset="-122"/>
+                          <a:cs typeface="Arial" pitchFamily="34" charset="-120"/>
+                        </a:rPr>
+                        <a:t>4 revisiones (3 extra a 2 €)</a:t>
+                      </a:r>
+                      <a:endParaRPr lang="en-US" sz="750" dirty="0">
+                        <a:latin typeface="Arial" charset="0"/>
+                        <a:ea typeface="Arial" charset="0"/>
+                        <a:cs typeface="Arial" charset="0"/>
+                      </a:endParaRPr>
+                    </a:p>
+                  </a:txBody>
+                  <a:tcPr marL="45720" marR="45720" marT="45720" marB="45720" anchor="ctr">
+                    <a:lnL w="6350" cap="flat" cmpd="sng" algn="ctr">
+                      <a:solidFill>
+                        <a:srgbClr val="E6E9EC"/>
+                      </a:solidFill>
+                      <a:prstDash val="solid"/>
+                      <a:round/>
+                      <a:headEnd type="none" w="med" len="med"/>
+                      <a:tailEnd type="none" w="med" len="med"/>
+                    </a:lnL>
+                    <a:lnR w="6350" cap="flat" cmpd="sng" algn="ctr">
+                      <a:solidFill>
+                        <a:srgbClr val="E6E9EC"/>
+                      </a:solidFill>
+                      <a:prstDash val="solid"/>
+                      <a:round/>
+                      <a:headEnd type="none" w="med" len="med"/>
+                      <a:tailEnd type="none" w="med" len="med"/>
+                    </a:lnR>
+                    <a:lnT w="6350" cap="flat" cmpd="sng" algn="ctr">
+                      <a:solidFill>
+                        <a:srgbClr val="E6E9EC"/>
+                      </a:solidFill>
+                      <a:prstDash val="solid"/>
+                      <a:round/>
+                      <a:headEnd type="none" w="med" len="med"/>
+                      <a:tailEnd type="none" w="med" len="med"/>
+                    </a:lnT>
+                    <a:lnB w="6350" cap="flat" cmpd="sng" algn="ctr">
+                      <a:solidFill>
+                        <a:srgbClr val="E6E9EC"/>
+                      </a:solidFill>
+                      <a:prstDash val="solid"/>
+                      <a:round/>
+                      <a:headEnd type="none" w="med" len="med"/>
+                      <a:tailEnd type="none" w="med" len="med"/>
+                    </a:lnB>
+                    <a:solidFill>
+                      <a:srgbClr val="FFFFFF"/>
+                    </a:solidFill>
+                  </a:tcPr>
+                </a:tc>
+                <a:tc>
+                  <a:txBody>
+                    <a:bodyPr/>
+                    <a:lstStyle/>
+                    <a:p>
+                      <a:pPr indent="0" marL="0">
+                        <a:buNone/>
+                      </a:pPr>
+                      <a:r>
+                        <a:rPr lang="en-US" sz="750" dirty="0">
+                          <a:solidFill>
+                            <a:srgbClr val="1E2B37"/>
+                          </a:solidFill>
+                          <a:latin typeface="Arial" pitchFamily="34" charset="0"/>
+                          <a:ea typeface="Arial" pitchFamily="34" charset="-122"/>
+                          <a:cs typeface="Arial" pitchFamily="34" charset="-120"/>
+                        </a:rPr>
+                        <a:t>7,31 €</a:t>
+                      </a:r>
+                      <a:endParaRPr lang="en-US" sz="750" dirty="0">
+                        <a:latin typeface="Arial" charset="0"/>
+                        <a:ea typeface="Arial" charset="0"/>
+                        <a:cs typeface="Arial" charset="0"/>
+                      </a:endParaRPr>
+                    </a:p>
+                  </a:txBody>
+                  <a:tcPr marL="45720" marR="45720" marT="45720" marB="45720" anchor="ctr">
+                    <a:lnL w="6350" cap="flat" cmpd="sng" algn="ctr">
+                      <a:solidFill>
+                        <a:srgbClr val="E6E9EC"/>
+                      </a:solidFill>
+                      <a:prstDash val="solid"/>
+                      <a:round/>
+                      <a:headEnd type="none" w="med" len="med"/>
+                      <a:tailEnd type="none" w="med" len="med"/>
+                    </a:lnL>
+                    <a:lnR w="6350" cap="flat" cmpd="sng" algn="ctr">
+                      <a:solidFill>
+                        <a:srgbClr val="E6E9EC"/>
+                      </a:solidFill>
+                      <a:prstDash val="solid"/>
+                      <a:round/>
+                      <a:headEnd type="none" w="med" len="med"/>
+                      <a:tailEnd type="none" w="med" len="med"/>
+                    </a:lnR>
+                    <a:lnT w="6350" cap="flat" cmpd="sng" algn="ctr">
+                      <a:solidFill>
+                        <a:srgbClr val="E6E9EC"/>
+                      </a:solidFill>
+                      <a:prstDash val="solid"/>
+                      <a:round/>
+                      <a:headEnd type="none" w="med" len="med"/>
+                      <a:tailEnd type="none" w="med" len="med"/>
+                    </a:lnT>
+                    <a:lnB w="6350" cap="flat" cmpd="sng" algn="ctr">
+                      <a:solidFill>
+                        <a:srgbClr val="E6E9EC"/>
+                      </a:solidFill>
+                      <a:prstDash val="solid"/>
+                      <a:round/>
+                      <a:headEnd type="none" w="med" len="med"/>
+                      <a:tailEnd type="none" w="med" len="med"/>
+                    </a:lnB>
+                    <a:solidFill>
+                      <a:srgbClr val="FFFFFF"/>
+                    </a:solidFill>
+                  </a:tcPr>
+                </a:tc>
+                <a:tc>
+                  <a:txBody>
+                    <a:bodyPr/>
+                    <a:lstStyle/>
+                    <a:p>
+                      <a:pPr indent="0" marL="0">
+                        <a:buNone/>
+                      </a:pPr>
+                      <a:r>
+                        <a:rPr lang="en-US" sz="750" b="1" dirty="0">
+                          <a:solidFill>
+                            <a:srgbClr val="1E2B37"/>
+                          </a:solidFill>
+                          <a:latin typeface="Arial" pitchFamily="34" charset="0"/>
+                          <a:ea typeface="Arial" pitchFamily="34" charset="-122"/>
+                          <a:cs typeface="Arial" pitchFamily="34" charset="-120"/>
+                        </a:rPr>
+                        <a:t>10,69 €</a:t>
+                      </a:r>
+                      <a:endParaRPr lang="en-US" sz="750" dirty="0">
+                        <a:latin typeface="Arial" charset="0"/>
+                        <a:ea typeface="Arial" charset="0"/>
+                        <a:cs typeface="Arial" charset="0"/>
+                      </a:endParaRPr>
+                    </a:p>
+                  </a:txBody>
+                  <a:tcPr marL="45720" marR="45720" marT="45720" marB="45720" anchor="ctr">
+                    <a:lnL w="6350" cap="flat" cmpd="sng" algn="ctr">
+                      <a:solidFill>
+                        <a:srgbClr val="E6E9EC"/>
+                      </a:solidFill>
+                      <a:prstDash val="solid"/>
+                      <a:round/>
+                      <a:headEnd type="none" w="med" len="med"/>
+                      <a:tailEnd type="none" w="med" len="med"/>
+                    </a:lnL>
+                    <a:lnR w="6350" cap="flat" cmpd="sng" algn="ctr">
+                      <a:solidFill>
+                        <a:srgbClr val="E6E9EC"/>
+                      </a:solidFill>
+                      <a:prstDash val="solid"/>
+                      <a:round/>
+                      <a:headEnd type="none" w="med" len="med"/>
+                      <a:tailEnd type="none" w="med" len="med"/>
+                    </a:lnR>
+                    <a:lnT w="6350" cap="flat" cmpd="sng" algn="ctr">
+                      <a:solidFill>
+                        <a:srgbClr val="E6E9EC"/>
+                      </a:solidFill>
+                      <a:prstDash val="solid"/>
+                      <a:round/>
+                      <a:headEnd type="none" w="med" len="med"/>
+                      <a:tailEnd type="none" w="med" len="med"/>
+                    </a:lnT>
+                    <a:lnB w="6350" cap="flat" cmpd="sng" algn="ctr">
+                      <a:solidFill>
+                        <a:srgbClr val="E6E9EC"/>
+                      </a:solidFill>
+                      <a:prstDash val="solid"/>
+                      <a:round/>
+                      <a:headEnd type="none" w="med" len="med"/>
+                      <a:tailEnd type="none" w="med" len="med"/>
+                    </a:lnB>
+                    <a:solidFill>
+                      <a:srgbClr val="FFFFFF"/>
+                    </a:solidFill>
+                  </a:tcPr>
+                </a:tc>
+              </a:tr>
+              <a:tr h="219456">
+                <a:tc>
+                  <a:txBody>
+                    <a:bodyPr/>
+                    <a:lstStyle/>
+                    <a:p>
+                      <a:pPr indent="0" marL="0">
+                        <a:buNone/>
+                      </a:pPr>
+                      <a:r>
+                        <a:rPr lang="en-US" sz="750" dirty="0">
+                          <a:solidFill>
+                            <a:srgbClr val="1E2B37"/>
+                          </a:solidFill>
+                          <a:latin typeface="Arial" pitchFamily="34" charset="0"/>
+                          <a:ea typeface="Arial" pitchFamily="34" charset="-122"/>
+                          <a:cs typeface="Arial" pitchFamily="34" charset="-120"/>
+                        </a:rPr>
+                        <a:t>6 revisiones sin cobrar</a:t>
+                      </a:r>
+                      <a:endParaRPr lang="en-US" sz="750" dirty="0">
+                        <a:latin typeface="Arial" charset="0"/>
+                        <a:ea typeface="Arial" charset="0"/>
+                        <a:cs typeface="Arial" charset="0"/>
+                      </a:endParaRPr>
+                    </a:p>
+                  </a:txBody>
+                  <a:tcPr marL="45720" marR="45720" marT="45720" marB="45720" anchor="ctr">
+                    <a:lnL w="6350" cap="flat" cmpd="sng" algn="ctr">
+                      <a:solidFill>
+                        <a:srgbClr val="E6E9EC"/>
+                      </a:solidFill>
+                      <a:prstDash val="solid"/>
+                      <a:round/>
+                      <a:headEnd type="none" w="med" len="med"/>
+                      <a:tailEnd type="none" w="med" len="med"/>
+                    </a:lnL>
+                    <a:lnR w="6350" cap="flat" cmpd="sng" algn="ctr">
+                      <a:solidFill>
+                        <a:srgbClr val="E6E9EC"/>
+                      </a:solidFill>
+                      <a:prstDash val="solid"/>
+                      <a:round/>
+                      <a:headEnd type="none" w="med" len="med"/>
+                      <a:tailEnd type="none" w="med" len="med"/>
+                    </a:lnR>
+                    <a:lnT w="6350" cap="flat" cmpd="sng" algn="ctr">
+                      <a:solidFill>
+                        <a:srgbClr val="E6E9EC"/>
+                      </a:solidFill>
+                      <a:prstDash val="solid"/>
+                      <a:round/>
+                      <a:headEnd type="none" w="med" len="med"/>
+                      <a:tailEnd type="none" w="med" len="med"/>
+                    </a:lnT>
+                    <a:lnB w="6350" cap="flat" cmpd="sng" algn="ctr">
+                      <a:solidFill>
+                        <a:srgbClr val="E6E9EC"/>
+                      </a:solidFill>
+                      <a:prstDash val="solid"/>
+                      <a:round/>
+                      <a:headEnd type="none" w="med" len="med"/>
+                      <a:tailEnd type="none" w="med" len="med"/>
+                    </a:lnB>
+                    <a:solidFill>
+                      <a:srgbClr val="F7F8FA"/>
+                    </a:solidFill>
+                  </a:tcPr>
+                </a:tc>
+                <a:tc>
+                  <a:txBody>
+                    <a:bodyPr/>
+                    <a:lstStyle/>
+                    <a:p>
+                      <a:pPr indent="0" marL="0">
+                        <a:buNone/>
+                      </a:pPr>
+                      <a:r>
+                        <a:rPr lang="en-US" sz="750" dirty="0">
+                          <a:solidFill>
+                            <a:srgbClr val="1E2B37"/>
+                          </a:solidFill>
+                          <a:latin typeface="Arial" pitchFamily="34" charset="0"/>
+                          <a:ea typeface="Arial" pitchFamily="34" charset="-122"/>
+                          <a:cs typeface="Arial" pitchFamily="34" charset="-120"/>
+                        </a:rPr>
+                        <a:t>9,00 €</a:t>
+                      </a:r>
+                      <a:endParaRPr lang="en-US" sz="750" dirty="0">
+                        <a:latin typeface="Arial" charset="0"/>
+                        <a:ea typeface="Arial" charset="0"/>
+                        <a:cs typeface="Arial" charset="0"/>
+                      </a:endParaRPr>
+                    </a:p>
+                  </a:txBody>
+                  <a:tcPr marL="45720" marR="45720" marT="45720" marB="45720" anchor="ctr">
+                    <a:lnL w="6350" cap="flat" cmpd="sng" algn="ctr">
+                      <a:solidFill>
+                        <a:srgbClr val="E6E9EC"/>
+                      </a:solidFill>
+                      <a:prstDash val="solid"/>
+                      <a:round/>
+                      <a:headEnd type="none" w="med" len="med"/>
+                      <a:tailEnd type="none" w="med" len="med"/>
+                    </a:lnL>
+                    <a:lnR w="6350" cap="flat" cmpd="sng" algn="ctr">
+                      <a:solidFill>
+                        <a:srgbClr val="E6E9EC"/>
+                      </a:solidFill>
+                      <a:prstDash val="solid"/>
+                      <a:round/>
+                      <a:headEnd type="none" w="med" len="med"/>
+                      <a:tailEnd type="none" w="med" len="med"/>
+                    </a:lnR>
+                    <a:lnT w="6350" cap="flat" cmpd="sng" algn="ctr">
+                      <a:solidFill>
+                        <a:srgbClr val="E6E9EC"/>
+                      </a:solidFill>
+                      <a:prstDash val="solid"/>
+                      <a:round/>
+                      <a:headEnd type="none" w="med" len="med"/>
+                      <a:tailEnd type="none" w="med" len="med"/>
+                    </a:lnT>
+                    <a:lnB w="6350" cap="flat" cmpd="sng" algn="ctr">
+                      <a:solidFill>
+                        <a:srgbClr val="E6E9EC"/>
+                      </a:solidFill>
+                      <a:prstDash val="solid"/>
+                      <a:round/>
+                      <a:headEnd type="none" w="med" len="med"/>
+                      <a:tailEnd type="none" w="med" len="med"/>
+                    </a:lnB>
+                    <a:solidFill>
+                      <a:srgbClr val="F7F8FA"/>
+                    </a:solidFill>
+                  </a:tcPr>
+                </a:tc>
+                <a:tc>
+                  <a:txBody>
+                    <a:bodyPr/>
+                    <a:lstStyle/>
+                    <a:p>
+                      <a:pPr indent="0" marL="0">
+                        <a:buNone/>
+                      </a:pPr>
+                      <a:r>
+                        <a:rPr lang="en-US" sz="750" b="1" dirty="0">
+                          <a:solidFill>
+                            <a:srgbClr val="1E2B37"/>
+                          </a:solidFill>
+                          <a:latin typeface="Arial" pitchFamily="34" charset="0"/>
+                          <a:ea typeface="Arial" pitchFamily="34" charset="-122"/>
+                          <a:cs typeface="Arial" pitchFamily="34" charset="-120"/>
+                        </a:rPr>
+                        <a:t>3,00 €</a:t>
+                      </a:r>
+                      <a:endParaRPr lang="en-US" sz="750" dirty="0">
+                        <a:latin typeface="Arial" charset="0"/>
+                        <a:ea typeface="Arial" charset="0"/>
+                        <a:cs typeface="Arial" charset="0"/>
+                      </a:endParaRPr>
+                    </a:p>
+                  </a:txBody>
+                  <a:tcPr marL="45720" marR="45720" marT="45720" marB="45720" anchor="ctr">
+                    <a:lnL w="6350" cap="flat" cmpd="sng" algn="ctr">
+                      <a:solidFill>
+                        <a:srgbClr val="E6E9EC"/>
+                      </a:solidFill>
+                      <a:prstDash val="solid"/>
+                      <a:round/>
+                      <a:headEnd type="none" w="med" len="med"/>
+                      <a:tailEnd type="none" w="med" len="med"/>
+                    </a:lnL>
+                    <a:lnR w="6350" cap="flat" cmpd="sng" algn="ctr">
+                      <a:solidFill>
+                        <a:srgbClr val="E6E9EC"/>
+                      </a:solidFill>
+                      <a:prstDash val="solid"/>
+                      <a:round/>
+                      <a:headEnd type="none" w="med" len="med"/>
+                      <a:tailEnd type="none" w="med" len="med"/>
+                    </a:lnR>
+                    <a:lnT w="6350" cap="flat" cmpd="sng" algn="ctr">
+                      <a:solidFill>
+                        <a:srgbClr val="E6E9EC"/>
+                      </a:solidFill>
+                      <a:prstDash val="solid"/>
+                      <a:round/>
+                      <a:headEnd type="none" w="med" len="med"/>
+                      <a:tailEnd type="none" w="med" len="med"/>
+                    </a:lnT>
+                    <a:lnB w="6350" cap="flat" cmpd="sng" algn="ctr">
+                      <a:solidFill>
+                        <a:srgbClr val="E6E9EC"/>
+                      </a:solidFill>
+                      <a:prstDash val="solid"/>
+                      <a:round/>
+                      <a:headEnd type="none" w="med" len="med"/>
+                      <a:tailEnd type="none" w="med" len="med"/>
+                    </a:lnB>
+                    <a:solidFill>
+                      <a:srgbClr val="F7F8FA"/>
+                    </a:solidFill>
+                  </a:tcPr>
+                </a:tc>
+              </a:tr>
+              <a:tr h="219456">
+                <a:tc>
+                  <a:txBody>
+                    <a:bodyPr/>
+                    <a:lstStyle/>
+                    <a:p>
+                      <a:pPr indent="0" marL="0">
+                        <a:buNone/>
+                      </a:pPr>
+                      <a:r>
+                        <a:rPr lang="en-US" sz="750" dirty="0">
+                          <a:solidFill>
+                            <a:srgbClr val="1E2B37"/>
+                          </a:solidFill>
+                          <a:latin typeface="Arial" pitchFamily="34" charset="0"/>
+                          <a:ea typeface="Arial" pitchFamily="34" charset="-122"/>
+                          <a:cs typeface="Arial" pitchFamily="34" charset="-120"/>
+                        </a:rPr>
+                        <a:t>Tokens +50 % y 6 sin cobrar</a:t>
+                      </a:r>
+                      <a:endParaRPr lang="en-US" sz="750" dirty="0">
+                        <a:latin typeface="Arial" charset="0"/>
+                        <a:ea typeface="Arial" charset="0"/>
+                        <a:cs typeface="Arial" charset="0"/>
+                      </a:endParaRPr>
+                    </a:p>
+                  </a:txBody>
+                  <a:tcPr marL="45720" marR="45720" marT="45720" marB="45720" anchor="ctr">
+                    <a:lnL w="6350" cap="flat" cmpd="sng" algn="ctr">
+                      <a:solidFill>
+                        <a:srgbClr val="E6E9EC"/>
+                      </a:solidFill>
+                      <a:prstDash val="solid"/>
+                      <a:round/>
+                      <a:headEnd type="none" w="med" len="med"/>
+                      <a:tailEnd type="none" w="med" len="med"/>
+                    </a:lnL>
+                    <a:lnR w="6350" cap="flat" cmpd="sng" algn="ctr">
+                      <a:solidFill>
+                        <a:srgbClr val="E6E9EC"/>
+                      </a:solidFill>
+                      <a:prstDash val="solid"/>
+                      <a:round/>
+                      <a:headEnd type="none" w="med" len="med"/>
+                      <a:tailEnd type="none" w="med" len="med"/>
+                    </a:lnR>
+                    <a:lnT w="6350" cap="flat" cmpd="sng" algn="ctr">
+                      <a:solidFill>
+                        <a:srgbClr val="E6E9EC"/>
+                      </a:solidFill>
+                      <a:prstDash val="solid"/>
+                      <a:round/>
+                      <a:headEnd type="none" w="med" len="med"/>
+                      <a:tailEnd type="none" w="med" len="med"/>
+                    </a:lnT>
+                    <a:lnB w="6350" cap="flat" cmpd="sng" algn="ctr">
+                      <a:solidFill>
+                        <a:srgbClr val="E6E9EC"/>
+                      </a:solidFill>
+                      <a:prstDash val="solid"/>
+                      <a:round/>
+                      <a:headEnd type="none" w="med" len="med"/>
+                      <a:tailEnd type="none" w="med" len="med"/>
+                    </a:lnB>
+                    <a:solidFill>
+                      <a:srgbClr val="FFFFFF"/>
+                    </a:solidFill>
+                  </a:tcPr>
+                </a:tc>
+                <a:tc>
+                  <a:txBody>
+                    <a:bodyPr/>
+                    <a:lstStyle/>
+                    <a:p>
+                      <a:pPr indent="0" marL="0">
+                        <a:buNone/>
+                      </a:pPr>
+                      <a:r>
+                        <a:rPr lang="en-US" sz="750" dirty="0">
+                          <a:solidFill>
+                            <a:srgbClr val="1E2B37"/>
+                          </a:solidFill>
+                          <a:latin typeface="Arial" pitchFamily="34" charset="0"/>
+                          <a:ea typeface="Arial" pitchFamily="34" charset="-122"/>
+                          <a:cs typeface="Arial" pitchFamily="34" charset="-120"/>
+                        </a:rPr>
+                        <a:t>13,35 €</a:t>
+                      </a:r>
+                      <a:endParaRPr lang="en-US" sz="750" dirty="0">
+                        <a:latin typeface="Arial" charset="0"/>
+                        <a:ea typeface="Arial" charset="0"/>
+                        <a:cs typeface="Arial" charset="0"/>
+                      </a:endParaRPr>
+                    </a:p>
+                  </a:txBody>
+                  <a:tcPr marL="45720" marR="45720" marT="45720" marB="45720" anchor="ctr">
+                    <a:lnL w="6350" cap="flat" cmpd="sng" algn="ctr">
+                      <a:solidFill>
+                        <a:srgbClr val="E6E9EC"/>
+                      </a:solidFill>
+                      <a:prstDash val="solid"/>
+                      <a:round/>
+                      <a:headEnd type="none" w="med" len="med"/>
+                      <a:tailEnd type="none" w="med" len="med"/>
+                    </a:lnL>
+                    <a:lnR w="6350" cap="flat" cmpd="sng" algn="ctr">
+                      <a:solidFill>
+                        <a:srgbClr val="E6E9EC"/>
+                      </a:solidFill>
+                      <a:prstDash val="solid"/>
+                      <a:round/>
+                      <a:headEnd type="none" w="med" len="med"/>
+                      <a:tailEnd type="none" w="med" len="med"/>
+                    </a:lnR>
+                    <a:lnT w="6350" cap="flat" cmpd="sng" algn="ctr">
+                      <a:solidFill>
+                        <a:srgbClr val="E6E9EC"/>
+                      </a:solidFill>
+                      <a:prstDash val="solid"/>
+                      <a:round/>
+                      <a:headEnd type="none" w="med" len="med"/>
+                      <a:tailEnd type="none" w="med" len="med"/>
+                    </a:lnT>
+                    <a:lnB w="6350" cap="flat" cmpd="sng" algn="ctr">
+                      <a:solidFill>
+                        <a:srgbClr val="E6E9EC"/>
+                      </a:solidFill>
+                      <a:prstDash val="solid"/>
+                      <a:round/>
+                      <a:headEnd type="none" w="med" len="med"/>
+                      <a:tailEnd type="none" w="med" len="med"/>
+                    </a:lnB>
+                    <a:solidFill>
+                      <a:srgbClr val="FFFFFF"/>
+                    </a:solidFill>
+                  </a:tcPr>
+                </a:tc>
+                <a:tc>
+                  <a:txBody>
+                    <a:bodyPr/>
+                    <a:lstStyle/>
+                    <a:p>
+                      <a:pPr indent="0" marL="0">
+                        <a:buNone/>
+                      </a:pPr>
+                      <a:r>
+                        <a:rPr lang="en-US" sz="750" b="1" dirty="0">
+                          <a:solidFill>
+                            <a:srgbClr val="B83232"/>
+                          </a:solidFill>
+                          <a:latin typeface="Arial" pitchFamily="34" charset="0"/>
+                          <a:ea typeface="Arial" pitchFamily="34" charset="-122"/>
+                          <a:cs typeface="Arial" pitchFamily="34" charset="-120"/>
+                        </a:rPr>
+                        <a:t>-1,35 €</a:t>
+                      </a:r>
+                      <a:endParaRPr lang="en-US" sz="750" dirty="0">
+                        <a:latin typeface="Arial" charset="0"/>
+                        <a:ea typeface="Arial" charset="0"/>
+                        <a:cs typeface="Arial" charset="0"/>
+                      </a:endParaRPr>
+                    </a:p>
+                  </a:txBody>
+                  <a:tcPr marL="45720" marR="45720" marT="45720" marB="45720" anchor="ctr">
+                    <a:lnL w="6350" cap="flat" cmpd="sng" algn="ctr">
+                      <a:solidFill>
+                        <a:srgbClr val="E6E9EC"/>
+                      </a:solidFill>
+                      <a:prstDash val="solid"/>
+                      <a:round/>
+                      <a:headEnd type="none" w="med" len="med"/>
+                      <a:tailEnd type="none" w="med" len="med"/>
+                    </a:lnL>
+                    <a:lnR w="6350" cap="flat" cmpd="sng" algn="ctr">
+                      <a:solidFill>
+                        <a:srgbClr val="E6E9EC"/>
+                      </a:solidFill>
+                      <a:prstDash val="solid"/>
+                      <a:round/>
+                      <a:headEnd type="none" w="med" len="med"/>
+                      <a:tailEnd type="none" w="med" len="med"/>
+                    </a:lnR>
+                    <a:lnT w="6350" cap="flat" cmpd="sng" algn="ctr">
+                      <a:solidFill>
+                        <a:srgbClr val="E6E9EC"/>
+                      </a:solidFill>
+                      <a:prstDash val="solid"/>
+                      <a:round/>
+                      <a:headEnd type="none" w="med" len="med"/>
+                      <a:tailEnd type="none" w="med" len="med"/>
+                    </a:lnT>
+                    <a:lnB w="6350" cap="flat" cmpd="sng" algn="ctr">
+                      <a:solidFill>
+                        <a:srgbClr val="E6E9EC"/>
+                      </a:solidFill>
+                      <a:prstDash val="solid"/>
+                      <a:round/>
+                      <a:headEnd type="none" w="med" len="med"/>
+                      <a:tailEnd type="none" w="med" len="med"/>
+                    </a:lnB>
+                    <a:solidFill>
+                      <a:srgbClr val="FFFFFF"/>
+                    </a:solidFill>
+                  </a:tcPr>
+                </a:tc>
+              </a:tr>
+            </a:tbl>
+          </a:graphicData>
+        </a:graphic>
+      </p:graphicFrame>
+      <p:sp>
+        <p:nvSpPr>
+          <p:cNvPr id="16" name="Text 8"/>
           <p:cNvSpPr txBox="1"/>
           <p:nvPr/>
         </p:nvSpPr>
         <p:spPr>
           <a:xfrm>
-            <a:off x="4434840" y="4069080"/>
-            <a:ext cx="4251960" cy="457200"/>
+            <a:off x="4709160" y="4553712"/>
+            <a:ext cx="3977640" cy="182880"/>
           </a:xfrm>
           <a:prstGeom prst="rect">
             <a:avLst/>
@@ -7539,7 +11496,7 @@
               <a:buNone/>
             </a:pPr>
             <a:r>
-              <a:rPr lang="en-US" sz="800" i="1" dirty="0">
+              <a:rPr lang="en-US" sz="650" i="1" dirty="0">
                 <a:solidFill>
                   <a:srgbClr val="5E6A77"/>
                 </a:solidFill>
@@ -7547,9 +11504,9 @@
                 <a:ea typeface="Arial" pitchFamily="34" charset="-122"/>
                 <a:cs typeface="Arial" pitchFamily="34" charset="-120"/>
               </a:rPr>
-              <a:t>Misma página en ejemplos/novela-ejemplo.pdf (v1) y ejemplos/novela-ejemplo-v2-cambio-nala.pdf (v2). El índice de la v2 marca cada capítulo «(modificado)».</a:t>
+              <a:t>Con un precio fijo por novela, la subida de tokens la absorbe Qaracter; cobrar los cambios adicionales protege el margen. Tope recomendado: 3 revisiones incluidas.</a:t>
             </a:r>
-            <a:endParaRPr lang="en-US" sz="800" dirty="0"/>
+            <a:endParaRPr lang="en-US" sz="650" dirty="0"/>
           </a:p>
         </p:txBody>
       </p:sp>
@@ -7642,6 +11599,1319 @@
                 <a:ea typeface="Arial" pitchFamily="34" charset="-122"/>
                 <a:cs typeface="Arial" pitchFamily="34" charset="-120"/>
               </a:rPr>
+              <a:t>DEMO</a:t>
+            </a:r>
+            <a:endParaRPr lang="en-US" sz="950" dirty="0"/>
+          </a:p>
+        </p:txBody>
+      </p:sp>
+      <p:sp>
+        <p:nvSpPr>
+          <p:cNvPr id="4" name="Text 1"/>
+          <p:cNvSpPr txBox="1"/>
+          <p:nvPr/>
+        </p:nvSpPr>
+        <p:spPr>
+          <a:xfrm>
+            <a:off x="457200" y="530352"/>
+            <a:ext cx="8229600" cy="502920"/>
+          </a:xfrm>
+          <a:prstGeom prst="rect">
+            <a:avLst/>
+          </a:prstGeom>
+          <a:noFill/>
+          <a:ln/>
+        </p:spPr>
+        <p:txBody>
+          <a:bodyPr wrap="square" lIns="0" tIns="0" rIns="0" bIns="0" rtlCol="0" anchor="ctr"/>
+          <a:lstStyle/>
+          <a:p>
+            <a:pPr indent="0" marL="0">
+              <a:buNone/>
+            </a:pPr>
+            <a:r>
+              <a:rPr lang="en-US" sz="2300" b="1" dirty="0">
+                <a:solidFill>
+                  <a:srgbClr val="1E2B37"/>
+                </a:solidFill>
+                <a:latin typeface="Arial" pitchFamily="34" charset="0"/>
+                <a:ea typeface="Arial" pitchFamily="34" charset="-122"/>
+                <a:cs typeface="Arial" pitchFamily="34" charset="-120"/>
+              </a:rPr>
+              <a:t>«La perra se llama Nala»: solo cambia lo afectado</a:t>
+            </a:r>
+            <a:endParaRPr lang="en-US" sz="2300" dirty="0"/>
+          </a:p>
+        </p:txBody>
+      </p:sp>
+      <p:pic>
+        <p:nvPicPr>
+          <p:cNvPr id="5" name="Image 1" descr="/home/user/My-Story-Marker/presentacion/build/img2/logo.png">    </p:cNvPr>
+          <p:cNvPicPr>
+            <a:picLocks noChangeAspect="1"/>
+          </p:cNvPicPr>
+          <p:nvPr/>
+        </p:nvPicPr>
+        <p:blipFill>
+          <a:blip r:embed="rId2"/>
+          <a:stretch>
+            <a:fillRect/>
+          </a:stretch>
+        </p:blipFill>
+        <p:spPr>
+          <a:xfrm>
+            <a:off x="457200" y="4754880"/>
+            <a:ext cx="426720" cy="100584"/>
+          </a:xfrm>
+          <a:prstGeom prst="rect">
+            <a:avLst/>
+          </a:prstGeom>
+        </p:spPr>
+      </p:pic>
+      <p:sp>
+        <p:nvSpPr>
+          <p:cNvPr id="6" name="Text 2"/>
+          <p:cNvSpPr txBox="1"/>
+          <p:nvPr/>
+        </p:nvSpPr>
+        <p:spPr>
+          <a:xfrm>
+            <a:off x="1024128" y="4736592"/>
+            <a:ext cx="5486400" cy="146304"/>
+          </a:xfrm>
+          <a:prstGeom prst="rect">
+            <a:avLst/>
+          </a:prstGeom>
+          <a:noFill/>
+          <a:ln/>
+        </p:spPr>
+        <p:txBody>
+          <a:bodyPr wrap="square" lIns="0" tIns="0" rIns="0" bIns="0" rtlCol="0" anchor="ctr"/>
+          <a:lstStyle/>
+          <a:p>
+            <a:pPr indent="0" marL="0">
+              <a:buNone/>
+            </a:pPr>
+            <a:r>
+              <a:rPr lang="en-US" sz="750" dirty="0">
+                <a:solidFill>
+                  <a:srgbClr val="5E6A77"/>
+                </a:solidFill>
+                <a:latin typeface="Arial" pitchFamily="34" charset="0"/>
+                <a:ea typeface="Arial" pitchFamily="34" charset="-122"/>
+                <a:cs typeface="Arial" pitchFamily="34" charset="-120"/>
+              </a:rPr>
+              <a:t>My Story Marker · propuesta para Cuentalia</a:t>
+            </a:r>
+            <a:endParaRPr lang="en-US" sz="750" dirty="0"/>
+          </a:p>
+        </p:txBody>
+      </p:sp>
+      <p:sp>
+        <p:nvSpPr>
+          <p:cNvPr id="7" name="Text 3"/>
+          <p:cNvSpPr txBox="1"/>
+          <p:nvPr/>
+        </p:nvSpPr>
+        <p:spPr>
+          <a:xfrm>
+            <a:off x="8138160" y="4736592"/>
+            <a:ext cx="548640" cy="146304"/>
+          </a:xfrm>
+          <a:prstGeom prst="rect">
+            <a:avLst/>
+          </a:prstGeom>
+          <a:noFill/>
+          <a:ln/>
+        </p:spPr>
+        <p:txBody>
+          <a:bodyPr wrap="square" lIns="0" tIns="0" rIns="0" bIns="0" rtlCol="0" anchor="ctr"/>
+          <a:lstStyle/>
+          <a:p>
+            <a:pPr algn="r" indent="0" marL="0">
+              <a:buNone/>
+            </a:pPr>
+            <a:r>
+              <a:rPr lang="en-US" sz="750" dirty="0">
+                <a:solidFill>
+                  <a:srgbClr val="5E6A77"/>
+                </a:solidFill>
+                <a:latin typeface="Arial" pitchFamily="34" charset="0"/>
+                <a:ea typeface="Arial" pitchFamily="34" charset="-122"/>
+                <a:cs typeface="Arial" pitchFamily="34" charset="-120"/>
+              </a:rPr>
+              <a:t>13</a:t>
+            </a:r>
+            <a:endParaRPr lang="en-US" sz="750" dirty="0"/>
+          </a:p>
+        </p:txBody>
+      </p:sp>
+      <p:sp>
+        <p:nvSpPr>
+          <p:cNvPr id="8" name="Shape 4"/>
+          <p:cNvSpPr/>
+          <p:nvPr/>
+        </p:nvSpPr>
+        <p:spPr>
+          <a:xfrm>
+            <a:off x="420624" y="1197864"/>
+            <a:ext cx="3639312" cy="1590667"/>
+          </a:xfrm>
+          <a:prstGeom prst="roundRect">
+            <a:avLst>
+              <a:gd name="adj" fmla="val 3449"/>
+            </a:avLst>
+          </a:prstGeom>
+          <a:solidFill>
+            <a:srgbClr val="FFFFFF"/>
+          </a:solidFill>
+          <a:ln w="9525">
+            <a:solidFill>
+              <a:srgbClr val="E6E9EC"/>
+            </a:solidFill>
+            <a:prstDash val="solid"/>
+          </a:ln>
+          <a:effectLst>
+            <a:outerShdw sx="100000" sy="100000" kx="0" ky="0" algn="bl" rotWithShape="0" blurRad="76200" dist="25400" dir="5400000">
+              <a:srgbClr val="1E2B37">
+                <a:alpha val="12000"/>
+              </a:srgbClr>
+            </a:outerShdw>
+          </a:effectLst>
+        </p:spPr>
+      </p:sp>
+      <p:pic>
+        <p:nvPicPr>
+          <p:cNvPr id="9" name="Image 2" descr="/home/user/My-Story-Marker/presentacion/build/img2/v1-zoom.png">    </p:cNvPr>
+          <p:cNvPicPr>
+            <a:picLocks noChangeAspect="1"/>
+          </p:cNvPicPr>
+          <p:nvPr/>
+        </p:nvPicPr>
+        <p:blipFill>
+          <a:blip r:embed="rId3"/>
+          <a:stretch>
+            <a:fillRect/>
+          </a:stretch>
+        </p:blipFill>
+        <p:spPr>
+          <a:xfrm>
+            <a:off x="457200" y="1234440"/>
+            <a:ext cx="3566160" cy="1517515"/>
+          </a:xfrm>
+          <a:prstGeom prst="rect">
+            <a:avLst/>
+          </a:prstGeom>
+        </p:spPr>
+      </p:pic>
+      <p:sp>
+        <p:nvSpPr>
+          <p:cNvPr id="10" name="Shape 5"/>
+          <p:cNvSpPr/>
+          <p:nvPr/>
+        </p:nvSpPr>
+        <p:spPr>
+          <a:xfrm>
+            <a:off x="2377440" y="1106424"/>
+            <a:ext cx="1508760" cy="237744"/>
+          </a:xfrm>
+          <a:prstGeom prst="roundRect">
+            <a:avLst>
+              <a:gd name="adj" fmla="val 46154"/>
+            </a:avLst>
+          </a:prstGeom>
+          <a:solidFill>
+            <a:srgbClr val="1E2B37"/>
+          </a:solidFill>
+          <a:ln/>
+        </p:spPr>
+      </p:sp>
+      <p:sp>
+        <p:nvSpPr>
+          <p:cNvPr id="11" name="Text 6"/>
+          <p:cNvSpPr txBox="1"/>
+          <p:nvPr/>
+        </p:nvSpPr>
+        <p:spPr>
+          <a:xfrm>
+            <a:off x="2423160" y="1106424"/>
+            <a:ext cx="1417320" cy="237744"/>
+          </a:xfrm>
+          <a:prstGeom prst="rect">
+            <a:avLst/>
+          </a:prstGeom>
+          <a:noFill/>
+          <a:ln/>
+        </p:spPr>
+        <p:txBody>
+          <a:bodyPr wrap="square" lIns="0" tIns="0" rIns="0" bIns="0" rtlCol="0" anchor="ctr"/>
+          <a:lstStyle/>
+          <a:p>
+            <a:pPr algn="ctr" indent="0" marL="0">
+              <a:buNone/>
+            </a:pPr>
+            <a:r>
+              <a:rPr lang="en-US" sz="800" b="1" dirty="0">
+                <a:solidFill>
+                  <a:srgbClr val="FFFFFF"/>
+                </a:solidFill>
+                <a:latin typeface="Arial" pitchFamily="34" charset="0"/>
+                <a:ea typeface="Arial" pitchFamily="34" charset="-122"/>
+                <a:cs typeface="Arial" pitchFamily="34" charset="-120"/>
+              </a:rPr>
+              <a:t>versión 1 · «Canela»</a:t>
+            </a:r>
+            <a:endParaRPr lang="en-US" sz="800" dirty="0"/>
+          </a:p>
+        </p:txBody>
+      </p:sp>
+      <p:sp>
+        <p:nvSpPr>
+          <p:cNvPr id="12" name="Shape 7"/>
+          <p:cNvSpPr/>
+          <p:nvPr/>
+        </p:nvSpPr>
+        <p:spPr>
+          <a:xfrm>
+            <a:off x="420624" y="2989699"/>
+            <a:ext cx="3639312" cy="1590667"/>
+          </a:xfrm>
+          <a:prstGeom prst="roundRect">
+            <a:avLst>
+              <a:gd name="adj" fmla="val 3449"/>
+            </a:avLst>
+          </a:prstGeom>
+          <a:solidFill>
+            <a:srgbClr val="FFFFFF"/>
+          </a:solidFill>
+          <a:ln w="9525">
+            <a:solidFill>
+              <a:srgbClr val="E6E9EC"/>
+            </a:solidFill>
+            <a:prstDash val="solid"/>
+          </a:ln>
+          <a:effectLst>
+            <a:outerShdw sx="100000" sy="100000" kx="0" ky="0" algn="bl" rotWithShape="0" blurRad="76200" dist="25400" dir="5400000">
+              <a:srgbClr val="1E2B37">
+                <a:alpha val="12000"/>
+              </a:srgbClr>
+            </a:outerShdw>
+          </a:effectLst>
+        </p:spPr>
+      </p:sp>
+      <p:pic>
+        <p:nvPicPr>
+          <p:cNvPr id="13" name="Image 3" descr="/home/user/My-Story-Marker/presentacion/build/img2/v2-zoom.png">    </p:cNvPr>
+          <p:cNvPicPr>
+            <a:picLocks noChangeAspect="1"/>
+          </p:cNvPicPr>
+          <p:nvPr/>
+        </p:nvPicPr>
+        <p:blipFill>
+          <a:blip r:embed="rId4"/>
+          <a:stretch>
+            <a:fillRect/>
+          </a:stretch>
+        </p:blipFill>
+        <p:spPr>
+          <a:xfrm>
+            <a:off x="457200" y="3026275"/>
+            <a:ext cx="3566160" cy="1517515"/>
+          </a:xfrm>
+          <a:prstGeom prst="rect">
+            <a:avLst/>
+          </a:prstGeom>
+        </p:spPr>
+      </p:pic>
+      <p:sp>
+        <p:nvSpPr>
+          <p:cNvPr id="14" name="Shape 8"/>
+          <p:cNvSpPr/>
+          <p:nvPr/>
+        </p:nvSpPr>
+        <p:spPr>
+          <a:xfrm>
+            <a:off x="2377440" y="2898259"/>
+            <a:ext cx="1508760" cy="237744"/>
+          </a:xfrm>
+          <a:prstGeom prst="roundRect">
+            <a:avLst>
+              <a:gd name="adj" fmla="val 46154"/>
+            </a:avLst>
+          </a:prstGeom>
+          <a:solidFill>
+            <a:srgbClr val="FF7A2F"/>
+          </a:solidFill>
+          <a:ln/>
+        </p:spPr>
+      </p:sp>
+      <p:sp>
+        <p:nvSpPr>
+          <p:cNvPr id="15" name="Text 9"/>
+          <p:cNvSpPr txBox="1"/>
+          <p:nvPr/>
+        </p:nvSpPr>
+        <p:spPr>
+          <a:xfrm>
+            <a:off x="2423160" y="2898259"/>
+            <a:ext cx="1417320" cy="237744"/>
+          </a:xfrm>
+          <a:prstGeom prst="rect">
+            <a:avLst/>
+          </a:prstGeom>
+          <a:noFill/>
+          <a:ln/>
+        </p:spPr>
+        <p:txBody>
+          <a:bodyPr wrap="square" lIns="0" tIns="0" rIns="0" bIns="0" rtlCol="0" anchor="ctr"/>
+          <a:lstStyle/>
+          <a:p>
+            <a:pPr algn="ctr" indent="0" marL="0">
+              <a:buNone/>
+            </a:pPr>
+            <a:r>
+              <a:rPr lang="en-US" sz="800" b="1" dirty="0">
+                <a:solidFill>
+                  <a:srgbClr val="FFFFFF"/>
+                </a:solidFill>
+                <a:latin typeface="Arial" pitchFamily="34" charset="0"/>
+                <a:ea typeface="Arial" pitchFamily="34" charset="-122"/>
+                <a:cs typeface="Arial" pitchFamily="34" charset="-120"/>
+              </a:rPr>
+              <a:t>versión 2 · «Nala»</a:t>
+            </a:r>
+            <a:endParaRPr lang="en-US" sz="800" dirty="0"/>
+          </a:p>
+        </p:txBody>
+      </p:sp>
+      <p:sp>
+        <p:nvSpPr>
+          <p:cNvPr id="16" name="Shape 10"/>
+          <p:cNvSpPr/>
+          <p:nvPr/>
+        </p:nvSpPr>
+        <p:spPr>
+          <a:xfrm>
+            <a:off x="4434840" y="1234440"/>
+            <a:ext cx="292608" cy="292608"/>
+          </a:xfrm>
+          <a:prstGeom prst="roundRect">
+            <a:avLst>
+              <a:gd name="adj" fmla="val 25000"/>
+            </a:avLst>
+          </a:prstGeom>
+          <a:solidFill>
+            <a:srgbClr val="FF7A2F"/>
+          </a:solidFill>
+          <a:ln/>
+        </p:spPr>
+      </p:sp>
+      <p:sp>
+        <p:nvSpPr>
+          <p:cNvPr id="17" name="Text 11"/>
+          <p:cNvSpPr txBox="1"/>
+          <p:nvPr/>
+        </p:nvSpPr>
+        <p:spPr>
+          <a:xfrm>
+            <a:off x="4434840" y="1234440"/>
+            <a:ext cx="292608" cy="292608"/>
+          </a:xfrm>
+          <a:prstGeom prst="rect">
+            <a:avLst/>
+          </a:prstGeom>
+          <a:noFill/>
+          <a:ln/>
+        </p:spPr>
+        <p:txBody>
+          <a:bodyPr wrap="square" lIns="0" tIns="0" rIns="0" bIns="0" rtlCol="0" anchor="ctr"/>
+          <a:lstStyle/>
+          <a:p>
+            <a:pPr algn="ctr" indent="0" marL="0">
+              <a:buNone/>
+            </a:pPr>
+            <a:r>
+              <a:rPr lang="en-US" sz="1000" b="1" dirty="0">
+                <a:solidFill>
+                  <a:srgbClr val="FFFFFF"/>
+                </a:solidFill>
+                <a:latin typeface="Arial" pitchFamily="34" charset="0"/>
+                <a:ea typeface="Arial" pitchFamily="34" charset="-122"/>
+                <a:cs typeface="Arial" pitchFamily="34" charset="-120"/>
+              </a:rPr>
+              <a:t>1</a:t>
+            </a:r>
+            <a:endParaRPr lang="en-US" sz="1000" dirty="0"/>
+          </a:p>
+        </p:txBody>
+      </p:sp>
+      <p:sp>
+        <p:nvSpPr>
+          <p:cNvPr id="18" name="Text 12"/>
+          <p:cNvSpPr txBox="1"/>
+          <p:nvPr/>
+        </p:nvSpPr>
+        <p:spPr>
+          <a:xfrm>
+            <a:off x="4846320" y="1234440"/>
+            <a:ext cx="3840480" cy="292608"/>
+          </a:xfrm>
+          <a:prstGeom prst="rect">
+            <a:avLst/>
+          </a:prstGeom>
+          <a:noFill/>
+          <a:ln/>
+        </p:spPr>
+        <p:txBody>
+          <a:bodyPr wrap="square" lIns="0" tIns="0" rIns="0" bIns="0" rtlCol="0" anchor="ctr"/>
+          <a:lstStyle/>
+          <a:p>
+            <a:pPr indent="0" marL="0">
+              <a:buNone/>
+            </a:pPr>
+            <a:r>
+              <a:rPr lang="en-US" sz="950" dirty="0">
+                <a:solidFill>
+                  <a:srgbClr val="1E2B37"/>
+                </a:solidFill>
+                <a:latin typeface="Arial" pitchFamily="34" charset="0"/>
+                <a:ea typeface="Arial" pitchFamily="34" charset="-122"/>
+                <a:cs typeface="Arial" pitchFamily="34" charset="-120"/>
+              </a:rPr>
+              <a:t>Petición en el lector: pet.canela.name → «Nala»</a:t>
+            </a:r>
+            <a:endParaRPr lang="en-US" sz="950" dirty="0"/>
+          </a:p>
+        </p:txBody>
+      </p:sp>
+      <p:sp>
+        <p:nvSpPr>
+          <p:cNvPr id="19" name="Shape 13"/>
+          <p:cNvSpPr/>
+          <p:nvPr/>
+        </p:nvSpPr>
+        <p:spPr>
+          <a:xfrm>
+            <a:off x="4434840" y="1691640"/>
+            <a:ext cx="292608" cy="292608"/>
+          </a:xfrm>
+          <a:prstGeom prst="roundRect">
+            <a:avLst>
+              <a:gd name="adj" fmla="val 25000"/>
+            </a:avLst>
+          </a:prstGeom>
+          <a:solidFill>
+            <a:srgbClr val="FF7A2F"/>
+          </a:solidFill>
+          <a:ln/>
+        </p:spPr>
+      </p:sp>
+      <p:sp>
+        <p:nvSpPr>
+          <p:cNvPr id="20" name="Text 14"/>
+          <p:cNvSpPr txBox="1"/>
+          <p:nvPr/>
+        </p:nvSpPr>
+        <p:spPr>
+          <a:xfrm>
+            <a:off x="4434840" y="1691640"/>
+            <a:ext cx="292608" cy="292608"/>
+          </a:xfrm>
+          <a:prstGeom prst="rect">
+            <a:avLst/>
+          </a:prstGeom>
+          <a:noFill/>
+          <a:ln/>
+        </p:spPr>
+        <p:txBody>
+          <a:bodyPr wrap="square" lIns="0" tIns="0" rIns="0" bIns="0" rtlCol="0" anchor="ctr"/>
+          <a:lstStyle/>
+          <a:p>
+            <a:pPr algn="ctr" indent="0" marL="0">
+              <a:buNone/>
+            </a:pPr>
+            <a:r>
+              <a:rPr lang="en-US" sz="1000" b="1" dirty="0">
+                <a:solidFill>
+                  <a:srgbClr val="FFFFFF"/>
+                </a:solidFill>
+                <a:latin typeface="Arial" pitchFamily="34" charset="0"/>
+                <a:ea typeface="Arial" pitchFamily="34" charset="-122"/>
+                <a:cs typeface="Arial" pitchFamily="34" charset="-120"/>
+              </a:rPr>
+              <a:t>2</a:t>
+            </a:r>
+            <a:endParaRPr lang="en-US" sz="1000" dirty="0"/>
+          </a:p>
+        </p:txBody>
+      </p:sp>
+      <p:sp>
+        <p:nvSpPr>
+          <p:cNvPr id="21" name="Text 15"/>
+          <p:cNvSpPr txBox="1"/>
+          <p:nvPr/>
+        </p:nvSpPr>
+        <p:spPr>
+          <a:xfrm>
+            <a:off x="4846320" y="1691640"/>
+            <a:ext cx="3840480" cy="292608"/>
+          </a:xfrm>
+          <a:prstGeom prst="rect">
+            <a:avLst/>
+          </a:prstGeom>
+          <a:noFill/>
+          <a:ln/>
+        </p:spPr>
+        <p:txBody>
+          <a:bodyPr wrap="square" lIns="0" tIns="0" rIns="0" bIns="0" rtlCol="0" anchor="ctr"/>
+          <a:lstStyle/>
+          <a:p>
+            <a:pPr indent="0" marL="0">
+              <a:buNone/>
+            </a:pPr>
+            <a:r>
+              <a:rPr lang="en-US" sz="950" dirty="0">
+                <a:solidFill>
+                  <a:srgbClr val="1E2B37"/>
+                </a:solidFill>
+                <a:latin typeface="Arial" pitchFamily="34" charset="0"/>
+                <a:ea typeface="Arial" pitchFamily="34" charset="-122"/>
+                <a:cs typeface="Arial" pitchFamily="34" charset="-120"/>
+              </a:rPr>
+              <a:t>fact_usage dice qué capítulos usan el hecho: 1 y 3–10</a:t>
+            </a:r>
+            <a:endParaRPr lang="en-US" sz="950" dirty="0"/>
+          </a:p>
+        </p:txBody>
+      </p:sp>
+      <p:sp>
+        <p:nvSpPr>
+          <p:cNvPr id="22" name="Shape 16"/>
+          <p:cNvSpPr/>
+          <p:nvPr/>
+        </p:nvSpPr>
+        <p:spPr>
+          <a:xfrm>
+            <a:off x="4434840" y="2148840"/>
+            <a:ext cx="292608" cy="292608"/>
+          </a:xfrm>
+          <a:prstGeom prst="roundRect">
+            <a:avLst>
+              <a:gd name="adj" fmla="val 25000"/>
+            </a:avLst>
+          </a:prstGeom>
+          <a:solidFill>
+            <a:srgbClr val="FF7A2F"/>
+          </a:solidFill>
+          <a:ln/>
+        </p:spPr>
+      </p:sp>
+      <p:sp>
+        <p:nvSpPr>
+          <p:cNvPr id="23" name="Text 17"/>
+          <p:cNvSpPr txBox="1"/>
+          <p:nvPr/>
+        </p:nvSpPr>
+        <p:spPr>
+          <a:xfrm>
+            <a:off x="4434840" y="2148840"/>
+            <a:ext cx="292608" cy="292608"/>
+          </a:xfrm>
+          <a:prstGeom prst="rect">
+            <a:avLst/>
+          </a:prstGeom>
+          <a:noFill/>
+          <a:ln/>
+        </p:spPr>
+        <p:txBody>
+          <a:bodyPr wrap="square" lIns="0" tIns="0" rIns="0" bIns="0" rtlCol="0" anchor="ctr"/>
+          <a:lstStyle/>
+          <a:p>
+            <a:pPr algn="ctr" indent="0" marL="0">
+              <a:buNone/>
+            </a:pPr>
+            <a:r>
+              <a:rPr lang="en-US" sz="1000" b="1" dirty="0">
+                <a:solidFill>
+                  <a:srgbClr val="FFFFFF"/>
+                </a:solidFill>
+                <a:latin typeface="Arial" pitchFamily="34" charset="0"/>
+                <a:ea typeface="Arial" pitchFamily="34" charset="-122"/>
+                <a:cs typeface="Arial" pitchFamily="34" charset="-120"/>
+              </a:rPr>
+              <a:t>3</a:t>
+            </a:r>
+            <a:endParaRPr lang="en-US" sz="1000" dirty="0"/>
+          </a:p>
+        </p:txBody>
+      </p:sp>
+      <p:sp>
+        <p:nvSpPr>
+          <p:cNvPr id="24" name="Text 18"/>
+          <p:cNvSpPr txBox="1"/>
+          <p:nvPr/>
+        </p:nvSpPr>
+        <p:spPr>
+          <a:xfrm>
+            <a:off x="4846320" y="2148840"/>
+            <a:ext cx="3840480" cy="292608"/>
+          </a:xfrm>
+          <a:prstGeom prst="rect">
+            <a:avLst/>
+          </a:prstGeom>
+          <a:noFill/>
+          <a:ln/>
+        </p:spPr>
+        <p:txBody>
+          <a:bodyPr wrap="square" lIns="0" tIns="0" rIns="0" bIns="0" rtlCol="0" anchor="ctr"/>
+          <a:lstStyle/>
+          <a:p>
+            <a:pPr indent="0" marL="0">
+              <a:buNone/>
+            </a:pPr>
+            <a:r>
+              <a:rPr lang="en-US" sz="950" dirty="0">
+                <a:solidFill>
+                  <a:srgbClr val="1E2B37"/>
+                </a:solidFill>
+                <a:latin typeface="Arial" pitchFamily="34" charset="0"/>
+                <a:ea typeface="Arial" pitchFamily="34" charset="-122"/>
+                <a:cs typeface="Arial" pitchFamily="34" charset="-120"/>
+              </a:rPr>
+              <a:t>Se regeneran solo esos, en la versión 2; el 2 se copia</a:t>
+            </a:r>
+            <a:endParaRPr lang="en-US" sz="950" dirty="0"/>
+          </a:p>
+        </p:txBody>
+      </p:sp>
+      <p:sp>
+        <p:nvSpPr>
+          <p:cNvPr id="25" name="Shape 19"/>
+          <p:cNvSpPr/>
+          <p:nvPr/>
+        </p:nvSpPr>
+        <p:spPr>
+          <a:xfrm>
+            <a:off x="4434840" y="2606040"/>
+            <a:ext cx="292608" cy="292608"/>
+          </a:xfrm>
+          <a:prstGeom prst="roundRect">
+            <a:avLst>
+              <a:gd name="adj" fmla="val 25000"/>
+            </a:avLst>
+          </a:prstGeom>
+          <a:solidFill>
+            <a:srgbClr val="FF7A2F"/>
+          </a:solidFill>
+          <a:ln/>
+        </p:spPr>
+      </p:sp>
+      <p:sp>
+        <p:nvSpPr>
+          <p:cNvPr id="26" name="Text 20"/>
+          <p:cNvSpPr txBox="1"/>
+          <p:nvPr/>
+        </p:nvSpPr>
+        <p:spPr>
+          <a:xfrm>
+            <a:off x="4434840" y="2606040"/>
+            <a:ext cx="292608" cy="292608"/>
+          </a:xfrm>
+          <a:prstGeom prst="rect">
+            <a:avLst/>
+          </a:prstGeom>
+          <a:noFill/>
+          <a:ln/>
+        </p:spPr>
+        <p:txBody>
+          <a:bodyPr wrap="square" lIns="0" tIns="0" rIns="0" bIns="0" rtlCol="0" anchor="ctr"/>
+          <a:lstStyle/>
+          <a:p>
+            <a:pPr algn="ctr" indent="0" marL="0">
+              <a:buNone/>
+            </a:pPr>
+            <a:r>
+              <a:rPr lang="en-US" sz="1000" b="1" dirty="0">
+                <a:solidFill>
+                  <a:srgbClr val="FFFFFF"/>
+                </a:solidFill>
+                <a:latin typeface="Arial" pitchFamily="34" charset="0"/>
+                <a:ea typeface="Arial" pitchFamily="34" charset="-122"/>
+                <a:cs typeface="Arial" pitchFamily="34" charset="-120"/>
+              </a:rPr>
+              <a:t>4</a:t>
+            </a:r>
+            <a:endParaRPr lang="en-US" sz="1000" dirty="0"/>
+          </a:p>
+        </p:txBody>
+      </p:sp>
+      <p:sp>
+        <p:nvSpPr>
+          <p:cNvPr id="27" name="Text 21"/>
+          <p:cNvSpPr txBox="1"/>
+          <p:nvPr/>
+        </p:nvSpPr>
+        <p:spPr>
+          <a:xfrm>
+            <a:off x="4846320" y="2606040"/>
+            <a:ext cx="3840480" cy="292608"/>
+          </a:xfrm>
+          <a:prstGeom prst="rect">
+            <a:avLst/>
+          </a:prstGeom>
+          <a:noFill/>
+          <a:ln/>
+        </p:spPr>
+        <p:txBody>
+          <a:bodyPr wrap="square" lIns="0" tIns="0" rIns="0" bIns="0" rtlCol="0" anchor="ctr"/>
+          <a:lstStyle/>
+          <a:p>
+            <a:pPr indent="0" marL="0">
+              <a:buNone/>
+            </a:pPr>
+            <a:r>
+              <a:rPr lang="en-US" sz="950" dirty="0">
+                <a:solidFill>
+                  <a:srgbClr val="1E2B37"/>
+                </a:solidFill>
+                <a:latin typeface="Arial" pitchFamily="34" charset="0"/>
+                <a:ea typeface="Arial" pitchFamily="34" charset="-122"/>
+                <a:cs typeface="Arial" pitchFamily="34" charset="-120"/>
+              </a:rPr>
+              <a:t>Mismos validadores; se exporta el PDF con «Novedades»</a:t>
+            </a:r>
+            <a:endParaRPr lang="en-US" sz="950" dirty="0"/>
+          </a:p>
+        </p:txBody>
+      </p:sp>
+      <p:sp>
+        <p:nvSpPr>
+          <p:cNvPr id="28" name="Shape 22"/>
+          <p:cNvSpPr/>
+          <p:nvPr/>
+        </p:nvSpPr>
+        <p:spPr>
+          <a:xfrm>
+            <a:off x="4434840" y="3154680"/>
+            <a:ext cx="969264" cy="822960"/>
+          </a:xfrm>
+          <a:prstGeom prst="roundRect">
+            <a:avLst>
+              <a:gd name="adj" fmla="val 8889"/>
+            </a:avLst>
+          </a:prstGeom>
+          <a:solidFill>
+            <a:srgbClr val="FFF5EE"/>
+          </a:solidFill>
+          <a:ln/>
+        </p:spPr>
+      </p:sp>
+      <p:sp>
+        <p:nvSpPr>
+          <p:cNvPr id="29" name="Text 23"/>
+          <p:cNvSpPr txBox="1"/>
+          <p:nvPr/>
+        </p:nvSpPr>
+        <p:spPr>
+          <a:xfrm>
+            <a:off x="4434840" y="3218688"/>
+            <a:ext cx="969264" cy="365760"/>
+          </a:xfrm>
+          <a:prstGeom prst="rect">
+            <a:avLst/>
+          </a:prstGeom>
+          <a:noFill/>
+          <a:ln/>
+        </p:spPr>
+        <p:txBody>
+          <a:bodyPr wrap="square" lIns="0" tIns="0" rIns="0" bIns="0" rtlCol="0" anchor="ctr"/>
+          <a:lstStyle/>
+          <a:p>
+            <a:pPr algn="ctr" indent="0" marL="0">
+              <a:buNone/>
+            </a:pPr>
+            <a:r>
+              <a:rPr lang="en-US" sz="1400" b="1" dirty="0">
+                <a:solidFill>
+                  <a:srgbClr val="AE4E14"/>
+                </a:solidFill>
+                <a:latin typeface="Arial" pitchFamily="34" charset="0"/>
+                <a:ea typeface="Arial" pitchFamily="34" charset="-122"/>
+                <a:cs typeface="Arial" pitchFamily="34" charset="-120"/>
+              </a:rPr>
+              <a:t>44 → 0</a:t>
+            </a:r>
+            <a:endParaRPr lang="en-US" sz="1400" dirty="0"/>
+          </a:p>
+        </p:txBody>
+      </p:sp>
+      <p:sp>
+        <p:nvSpPr>
+          <p:cNvPr id="30" name="Text 24"/>
+          <p:cNvSpPr txBox="1"/>
+          <p:nvPr/>
+        </p:nvSpPr>
+        <p:spPr>
+          <a:xfrm>
+            <a:off x="4471416" y="3584448"/>
+            <a:ext cx="896112" cy="347472"/>
+          </a:xfrm>
+          <a:prstGeom prst="rect">
+            <a:avLst/>
+          </a:prstGeom>
+          <a:noFill/>
+          <a:ln/>
+        </p:spPr>
+        <p:txBody>
+          <a:bodyPr wrap="square" lIns="0" tIns="0" rIns="0" bIns="0" rtlCol="0" anchor="t"/>
+          <a:lstStyle/>
+          <a:p>
+            <a:pPr algn="ctr" indent="0" marL="0">
+              <a:buNone/>
+            </a:pPr>
+            <a:r>
+              <a:rPr lang="en-US" sz="750" dirty="0">
+                <a:solidFill>
+                  <a:srgbClr val="3D4A56"/>
+                </a:solidFill>
+                <a:latin typeface="Arial" pitchFamily="34" charset="0"/>
+                <a:ea typeface="Arial" pitchFamily="34" charset="-122"/>
+                <a:cs typeface="Arial" pitchFamily="34" charset="-120"/>
+              </a:rPr>
+              <a:t>«Canela» en v1 → v2</a:t>
+            </a:r>
+            <a:endParaRPr lang="en-US" sz="750" dirty="0"/>
+          </a:p>
+        </p:txBody>
+      </p:sp>
+      <p:sp>
+        <p:nvSpPr>
+          <p:cNvPr id="31" name="Shape 25"/>
+          <p:cNvSpPr/>
+          <p:nvPr/>
+        </p:nvSpPr>
+        <p:spPr>
+          <a:xfrm>
+            <a:off x="5513832" y="3154680"/>
+            <a:ext cx="969264" cy="822960"/>
+          </a:xfrm>
+          <a:prstGeom prst="roundRect">
+            <a:avLst>
+              <a:gd name="adj" fmla="val 8889"/>
+            </a:avLst>
+          </a:prstGeom>
+          <a:solidFill>
+            <a:srgbClr val="FFF5EE"/>
+          </a:solidFill>
+          <a:ln/>
+        </p:spPr>
+      </p:sp>
+      <p:sp>
+        <p:nvSpPr>
+          <p:cNvPr id="32" name="Text 26"/>
+          <p:cNvSpPr txBox="1"/>
+          <p:nvPr/>
+        </p:nvSpPr>
+        <p:spPr>
+          <a:xfrm>
+            <a:off x="5513832" y="3218688"/>
+            <a:ext cx="969264" cy="365760"/>
+          </a:xfrm>
+          <a:prstGeom prst="rect">
+            <a:avLst/>
+          </a:prstGeom>
+          <a:noFill/>
+          <a:ln/>
+        </p:spPr>
+        <p:txBody>
+          <a:bodyPr wrap="square" lIns="0" tIns="0" rIns="0" bIns="0" rtlCol="0" anchor="ctr"/>
+          <a:lstStyle/>
+          <a:p>
+            <a:pPr algn="ctr" indent="0" marL="0">
+              <a:buNone/>
+            </a:pPr>
+            <a:r>
+              <a:rPr lang="en-US" sz="1400" b="1" dirty="0">
+                <a:solidFill>
+                  <a:srgbClr val="AE4E14"/>
+                </a:solidFill>
+                <a:latin typeface="Arial" pitchFamily="34" charset="0"/>
+                <a:ea typeface="Arial" pitchFamily="34" charset="-122"/>
+                <a:cs typeface="Arial" pitchFamily="34" charset="-120"/>
+              </a:rPr>
+              <a:t>0 → 45</a:t>
+            </a:r>
+            <a:endParaRPr lang="en-US" sz="1400" dirty="0"/>
+          </a:p>
+        </p:txBody>
+      </p:sp>
+      <p:sp>
+        <p:nvSpPr>
+          <p:cNvPr id="33" name="Text 27"/>
+          <p:cNvSpPr txBox="1"/>
+          <p:nvPr/>
+        </p:nvSpPr>
+        <p:spPr>
+          <a:xfrm>
+            <a:off x="5550408" y="3584448"/>
+            <a:ext cx="896112" cy="347472"/>
+          </a:xfrm>
+          <a:prstGeom prst="rect">
+            <a:avLst/>
+          </a:prstGeom>
+          <a:noFill/>
+          <a:ln/>
+        </p:spPr>
+        <p:txBody>
+          <a:bodyPr wrap="square" lIns="0" tIns="0" rIns="0" bIns="0" rtlCol="0" anchor="t"/>
+          <a:lstStyle/>
+          <a:p>
+            <a:pPr algn="ctr" indent="0" marL="0">
+              <a:buNone/>
+            </a:pPr>
+            <a:r>
+              <a:rPr lang="en-US" sz="750" dirty="0">
+                <a:solidFill>
+                  <a:srgbClr val="3D4A56"/>
+                </a:solidFill>
+                <a:latin typeface="Arial" pitchFamily="34" charset="0"/>
+                <a:ea typeface="Arial" pitchFamily="34" charset="-122"/>
+                <a:cs typeface="Arial" pitchFamily="34" charset="-120"/>
+              </a:rPr>
+              <a:t>«Nala» en v1 → v2</a:t>
+            </a:r>
+            <a:endParaRPr lang="en-US" sz="750" dirty="0"/>
+          </a:p>
+        </p:txBody>
+      </p:sp>
+      <p:sp>
+        <p:nvSpPr>
+          <p:cNvPr id="34" name="Shape 28"/>
+          <p:cNvSpPr/>
+          <p:nvPr/>
+        </p:nvSpPr>
+        <p:spPr>
+          <a:xfrm>
+            <a:off x="6592824" y="3154680"/>
+            <a:ext cx="969264" cy="822960"/>
+          </a:xfrm>
+          <a:prstGeom prst="roundRect">
+            <a:avLst>
+              <a:gd name="adj" fmla="val 8889"/>
+            </a:avLst>
+          </a:prstGeom>
+          <a:solidFill>
+            <a:srgbClr val="E4F5EA"/>
+          </a:solidFill>
+          <a:ln/>
+        </p:spPr>
+      </p:sp>
+      <p:sp>
+        <p:nvSpPr>
+          <p:cNvPr id="35" name="Text 29"/>
+          <p:cNvSpPr txBox="1"/>
+          <p:nvPr/>
+        </p:nvSpPr>
+        <p:spPr>
+          <a:xfrm>
+            <a:off x="6592824" y="3218688"/>
+            <a:ext cx="969264" cy="365760"/>
+          </a:xfrm>
+          <a:prstGeom prst="rect">
+            <a:avLst/>
+          </a:prstGeom>
+          <a:noFill/>
+          <a:ln/>
+        </p:spPr>
+        <p:txBody>
+          <a:bodyPr wrap="square" lIns="0" tIns="0" rIns="0" bIns="0" rtlCol="0" anchor="ctr"/>
+          <a:lstStyle/>
+          <a:p>
+            <a:pPr algn="ctr" indent="0" marL="0">
+              <a:buNone/>
+            </a:pPr>
+            <a:r>
+              <a:rPr lang="en-US" sz="1400" b="1" dirty="0">
+                <a:solidFill>
+                  <a:srgbClr val="16794A"/>
+                </a:solidFill>
+                <a:latin typeface="Arial" pitchFamily="34" charset="0"/>
+                <a:ea typeface="Arial" pitchFamily="34" charset="-122"/>
+                <a:cs typeface="Arial" pitchFamily="34" charset="-120"/>
+              </a:rPr>
+              <a:t>v1</a:t>
+            </a:r>
+            <a:endParaRPr lang="en-US" sz="1400" dirty="0"/>
+          </a:p>
+        </p:txBody>
+      </p:sp>
+      <p:sp>
+        <p:nvSpPr>
+          <p:cNvPr id="36" name="Text 30"/>
+          <p:cNvSpPr txBox="1"/>
+          <p:nvPr/>
+        </p:nvSpPr>
+        <p:spPr>
+          <a:xfrm>
+            <a:off x="6629400" y="3584448"/>
+            <a:ext cx="896112" cy="347472"/>
+          </a:xfrm>
+          <a:prstGeom prst="rect">
+            <a:avLst/>
+          </a:prstGeom>
+          <a:noFill/>
+          <a:ln/>
+        </p:spPr>
+        <p:txBody>
+          <a:bodyPr wrap="square" lIns="0" tIns="0" rIns="0" bIns="0" rtlCol="0" anchor="t"/>
+          <a:lstStyle/>
+          <a:p>
+            <a:pPr algn="ctr" indent="0" marL="0">
+              <a:buNone/>
+            </a:pPr>
+            <a:r>
+              <a:rPr lang="en-US" sz="750" dirty="0">
+                <a:solidFill>
+                  <a:srgbClr val="3D4A56"/>
+                </a:solidFill>
+                <a:latin typeface="Arial" pitchFamily="34" charset="0"/>
+                <a:ea typeface="Arial" pitchFamily="34" charset="-122"/>
+                <a:cs typeface="Arial" pitchFamily="34" charset="-120"/>
+              </a:rPr>
+              <a:t>intacta</a:t>
+            </a:r>
+            <a:endParaRPr lang="en-US" sz="750" dirty="0"/>
+          </a:p>
+        </p:txBody>
+      </p:sp>
+      <p:sp>
+        <p:nvSpPr>
+          <p:cNvPr id="37" name="Shape 31"/>
+          <p:cNvSpPr/>
+          <p:nvPr/>
+        </p:nvSpPr>
+        <p:spPr>
+          <a:xfrm>
+            <a:off x="7671816" y="3154680"/>
+            <a:ext cx="969264" cy="822960"/>
+          </a:xfrm>
+          <a:prstGeom prst="roundRect">
+            <a:avLst>
+              <a:gd name="adj" fmla="val 8889"/>
+            </a:avLst>
+          </a:prstGeom>
+          <a:solidFill>
+            <a:srgbClr val="FFF5EE"/>
+          </a:solidFill>
+          <a:ln/>
+        </p:spPr>
+      </p:sp>
+      <p:sp>
+        <p:nvSpPr>
+          <p:cNvPr id="38" name="Text 32"/>
+          <p:cNvSpPr txBox="1"/>
+          <p:nvPr/>
+        </p:nvSpPr>
+        <p:spPr>
+          <a:xfrm>
+            <a:off x="7671816" y="3218688"/>
+            <a:ext cx="969264" cy="365760"/>
+          </a:xfrm>
+          <a:prstGeom prst="rect">
+            <a:avLst/>
+          </a:prstGeom>
+          <a:noFill/>
+          <a:ln/>
+        </p:spPr>
+        <p:txBody>
+          <a:bodyPr wrap="square" lIns="0" tIns="0" rIns="0" bIns="0" rtlCol="0" anchor="ctr"/>
+          <a:lstStyle/>
+          <a:p>
+            <a:pPr algn="ctr" indent="0" marL="0">
+              <a:buNone/>
+            </a:pPr>
+            <a:r>
+              <a:rPr lang="en-US" sz="1400" b="1" dirty="0">
+                <a:solidFill>
+                  <a:srgbClr val="AE4E14"/>
+                </a:solidFill>
+                <a:latin typeface="Arial" pitchFamily="34" charset="0"/>
+                <a:ea typeface="Arial" pitchFamily="34" charset="-122"/>
+                <a:cs typeface="Arial" pitchFamily="34" charset="-120"/>
+              </a:rPr>
+              <a:t>~27 min</a:t>
+            </a:r>
+            <a:endParaRPr lang="en-US" sz="1400" dirty="0"/>
+          </a:p>
+        </p:txBody>
+      </p:sp>
+      <p:sp>
+        <p:nvSpPr>
+          <p:cNvPr id="39" name="Text 33"/>
+          <p:cNvSpPr txBox="1"/>
+          <p:nvPr/>
+        </p:nvSpPr>
+        <p:spPr>
+          <a:xfrm>
+            <a:off x="7708392" y="3584448"/>
+            <a:ext cx="896112" cy="347472"/>
+          </a:xfrm>
+          <a:prstGeom prst="rect">
+            <a:avLst/>
+          </a:prstGeom>
+          <a:noFill/>
+          <a:ln/>
+        </p:spPr>
+        <p:txBody>
+          <a:bodyPr wrap="square" lIns="0" tIns="0" rIns="0" bIns="0" rtlCol="0" anchor="t"/>
+          <a:lstStyle/>
+          <a:p>
+            <a:pPr algn="ctr" indent="0" marL="0">
+              <a:buNone/>
+            </a:pPr>
+            <a:r>
+              <a:rPr lang="en-US" sz="750" dirty="0">
+                <a:solidFill>
+                  <a:srgbClr val="3D4A56"/>
+                </a:solidFill>
+                <a:latin typeface="Arial" pitchFamily="34" charset="0"/>
+                <a:ea typeface="Arial" pitchFamily="34" charset="-122"/>
+                <a:cs typeface="Arial" pitchFamily="34" charset="-120"/>
+              </a:rPr>
+              <a:t>~0,94 USD</a:t>
+            </a:r>
+            <a:endParaRPr lang="en-US" sz="750" dirty="0"/>
+          </a:p>
+        </p:txBody>
+      </p:sp>
+      <p:sp>
+        <p:nvSpPr>
+          <p:cNvPr id="40" name="Text 34"/>
+          <p:cNvSpPr txBox="1"/>
+          <p:nvPr/>
+        </p:nvSpPr>
+        <p:spPr>
+          <a:xfrm>
+            <a:off x="4434840" y="4069080"/>
+            <a:ext cx="4251960" cy="457200"/>
+          </a:xfrm>
+          <a:prstGeom prst="rect">
+            <a:avLst/>
+          </a:prstGeom>
+          <a:noFill/>
+          <a:ln/>
+        </p:spPr>
+        <p:txBody>
+          <a:bodyPr wrap="square" lIns="0" tIns="0" rIns="0" bIns="0" rtlCol="0" anchor="t"/>
+          <a:lstStyle/>
+          <a:p>
+            <a:pPr indent="0" marL="0">
+              <a:buNone/>
+            </a:pPr>
+            <a:r>
+              <a:rPr lang="en-US" sz="800" i="1" dirty="0">
+                <a:solidFill>
+                  <a:srgbClr val="5E6A77"/>
+                </a:solidFill>
+                <a:latin typeface="Arial" pitchFamily="34" charset="0"/>
+                <a:ea typeface="Arial" pitchFamily="34" charset="-122"/>
+                <a:cs typeface="Arial" pitchFamily="34" charset="-120"/>
+              </a:rPr>
+              <a:t>Misma página en ejemplos/novela-ejemplo.pdf (v1) y ejemplos/novela-ejemplo-v2-cambio-nala.pdf (v2). El índice de la v2 marca cada capítulo «(modificado)».</a:t>
+            </a:r>
+            <a:endParaRPr lang="en-US" sz="800" dirty="0"/>
+          </a:p>
+        </p:txBody>
+      </p:sp>
+    </p:spTree>
+  </p:cSld>
+  <p:clrMapOvr>
+    <a:masterClrMapping/>
+  </p:clrMapOvr>
+</p:sld>
+</file>
+
+<file path=ppt/slides/slide14.xml><?xml version="1.0" encoding="utf-8"?>
+<p:sld xmlns:a="http://schemas.openxmlformats.org/drawingml/2006/main" xmlns:r="http://schemas.openxmlformats.org/officeDocument/2006/relationships" xmlns:p="http://schemas.openxmlformats.org/presentationml/2006/main">
+  <p:cSld name="Slide 14">
+    <p:bg>
+      <p:bgPr>
+        <a:solidFill>
+          <a:srgbClr val="FFFFFF"/>
+        </a:solidFill>
+      </p:bgPr>
+    </p:bg>
+    <p:spTree>
+      <p:nvGrpSpPr>
+        <p:cNvPr id="1" name=""/>
+        <p:cNvGrpSpPr/>
+        <p:nvPr/>
+      </p:nvGrpSpPr>
+      <p:grpSpPr>
+        <a:xfrm>
+          <a:off x="0" y="0"/>
+          <a:ext cx="0" cy="0"/>
+          <a:chOff x="0" y="0"/>
+          <a:chExt cx="0" cy="0"/>
+        </a:xfrm>
+      </p:grpSpPr>
+      <p:pic>
+        <p:nvPicPr>
+          <p:cNvPr id="2" name="Image 0" descr="/home/user/My-Story-Marker/presentacion/build/img2/mark.png">    </p:cNvPr>
+          <p:cNvPicPr>
+            <a:picLocks noChangeAspect="1"/>
+          </p:cNvPicPr>
+          <p:nvPr/>
+        </p:nvPicPr>
+        <p:blipFill>
+          <a:blip r:embed="rId1"/>
+          <a:stretch>
+            <a:fillRect/>
+          </a:stretch>
+        </p:blipFill>
+        <p:spPr>
+          <a:xfrm>
+            <a:off x="457200" y="301752"/>
+            <a:ext cx="155448" cy="155448"/>
+          </a:xfrm>
+          <a:prstGeom prst="rect">
+            <a:avLst/>
+          </a:prstGeom>
+        </p:spPr>
+      </p:pic>
+      <p:sp>
+        <p:nvSpPr>
+          <p:cNvPr id="3" name="Text 0"/>
+          <p:cNvSpPr txBox="1"/>
+          <p:nvPr/>
+        </p:nvSpPr>
+        <p:spPr>
+          <a:xfrm>
+            <a:off x="694944" y="274320"/>
+            <a:ext cx="6400800" cy="219456"/>
+          </a:xfrm>
+          <a:prstGeom prst="rect">
+            <a:avLst/>
+          </a:prstGeom>
+          <a:noFill/>
+          <a:ln/>
+        </p:spPr>
+        <p:txBody>
+          <a:bodyPr wrap="square" lIns="0" tIns="0" rIns="0" bIns="0" rtlCol="0" anchor="t"/>
+          <a:lstStyle/>
+          <a:p>
+            <a:pPr indent="0" marL="0">
+              <a:buNone/>
+            </a:pPr>
+            <a:r>
+              <a:rPr lang="en-US" sz="950" b="1" spc="150" kern="0" dirty="0">
+                <a:solidFill>
+                  <a:srgbClr val="AE4E14"/>
+                </a:solidFill>
+                <a:latin typeface="Arial" pitchFamily="34" charset="0"/>
+                <a:ea typeface="Arial" pitchFamily="34" charset="-122"/>
+                <a:cs typeface="Arial" pitchFamily="34" charset="-120"/>
+              </a:rPr>
               <a:t>RIESGOS Y SIGUIENTES PASOS</a:t>
             </a:r>
             <a:endParaRPr lang="en-US" sz="950" dirty="0"/>
@@ -7783,7 +13053,7 @@
                 <a:ea typeface="Arial" pitchFamily="34" charset="-122"/>
                 <a:cs typeface="Arial" pitchFamily="34" charset="-120"/>
               </a:rPr>
-              <a:t>13</a:t>
+              <a:t>14</a:t>
             </a:r>
             <a:endParaRPr lang="en-US" sz="750" dirty="0"/>
           </a:p>
@@ -7791,7 +13061,7 @@
       </p:sp>
       <p:graphicFrame>
         <p:nvGraphicFramePr>
-          <p:cNvPr id="14" name="Table 0"/>
+          <p:cNvPr id="15" name="Table 0"/>
           <p:cNvGraphicFramePr>
             <a:graphicFrameLocks noGrp="1"/>
           </p:cNvGraphicFramePr>
@@ -9457,9 +14727,9 @@
 </p:sld>
 </file>
 
-<file path=ppt/slides/slide14.xml><?xml version="1.0" encoding="utf-8"?>
+<file path=ppt/slides/slide15.xml><?xml version="1.0" encoding="utf-8"?>
 <p:sld xmlns:a="http://schemas.openxmlformats.org/drawingml/2006/main" xmlns:r="http://schemas.openxmlformats.org/officeDocument/2006/relationships" xmlns:p="http://schemas.openxmlformats.org/presentationml/2006/main">
-  <p:cSld name="Slide 14">
+  <p:cSld name="Slide 15">
     <p:bg>
       <p:bgPr>
         <a:solidFill>
@@ -9876,7 +15146,7 @@
                 <a:ea typeface="Arial" pitchFamily="34" charset="-122"/>
                 <a:cs typeface="Arial" pitchFamily="34" charset="-120"/>
               </a:rPr>
-              <a:t>Anexo: tabla completa de evals</a:t>
+              <a:t>Anexos: tabla completa de evals · coste de desarrollo</a:t>
             </a:r>
             <a:endParaRPr lang="en-US" sz="900" dirty="0"/>
           </a:p>
@@ -9890,9 +15160,9 @@
 </p:sld>
 </file>
 
-<file path=ppt/slides/slide15.xml><?xml version="1.0" encoding="utf-8"?>
+<file path=ppt/slides/slide16.xml><?xml version="1.0" encoding="utf-8"?>
 <p:sld xmlns:a="http://schemas.openxmlformats.org/drawingml/2006/main" xmlns:r="http://schemas.openxmlformats.org/officeDocument/2006/relationships" xmlns:p="http://schemas.openxmlformats.org/presentationml/2006/main">
-  <p:cSld name="Slide 15">
+  <p:cSld name="Slide 16">
     <p:bg>
       <p:bgPr>
         <a:solidFill>
@@ -10112,7 +15382,7 @@
                 <a:ea typeface="Arial" pitchFamily="34" charset="-122"/>
                 <a:cs typeface="Arial" pitchFamily="34" charset="-120"/>
               </a:rPr>
-              <a:t>15</a:t>
+              <a:t>16</a:t>
             </a:r>
             <a:endParaRPr lang="en-US" sz="750" dirty="0"/>
           </a:p>
@@ -10120,7 +15390,7 @@
       </p:sp>
       <p:graphicFrame>
         <p:nvGraphicFramePr>
-          <p:cNvPr id="16" name="Table 0"/>
+          <p:cNvPr id="17" name="Table 0"/>
           <p:cNvGraphicFramePr>
             <a:graphicFrameLocks noGrp="1"/>
           </p:cNvGraphicFramePr>
@@ -17286,6 +22556,1688 @@
                 <a:cs typeface="Arial" pitchFamily="34" charset="-120"/>
               </a:rPr>
               <a:t>b2 infantil · b3 inyección · b4 trampas temporales · b5 contradictorio (rechazado en el brief). Fuente: evals/results.md y evals/results/{before,after}/*.json. Detalle: presentacion/anexo-evals-tabla.pdf.</a:t>
+            </a:r>
+            <a:endParaRPr lang="en-US" sz="750" dirty="0"/>
+          </a:p>
+        </p:txBody>
+      </p:sp>
+    </p:spTree>
+  </p:cSld>
+  <p:clrMapOvr>
+    <a:masterClrMapping/>
+  </p:clrMapOvr>
+</p:sld>
+</file>
+
+<file path=ppt/slides/slide17.xml><?xml version="1.0" encoding="utf-8"?>
+<p:sld xmlns:a="http://schemas.openxmlformats.org/drawingml/2006/main" xmlns:r="http://schemas.openxmlformats.org/officeDocument/2006/relationships" xmlns:p="http://schemas.openxmlformats.org/presentationml/2006/main">
+  <p:cSld name="Slide 17">
+    <p:bg>
+      <p:bgPr>
+        <a:solidFill>
+          <a:srgbClr val="FFFFFF"/>
+        </a:solidFill>
+      </p:bgPr>
+    </p:bg>
+    <p:spTree>
+      <p:nvGrpSpPr>
+        <p:cNvPr id="1" name=""/>
+        <p:cNvGrpSpPr/>
+        <p:nvPr/>
+      </p:nvGrpSpPr>
+      <p:grpSpPr>
+        <a:xfrm>
+          <a:off x="0" y="0"/>
+          <a:ext cx="0" cy="0"/>
+          <a:chOff x="0" y="0"/>
+          <a:chExt cx="0" cy="0"/>
+        </a:xfrm>
+      </p:grpSpPr>
+      <p:pic>
+        <p:nvPicPr>
+          <p:cNvPr id="2" name="Image 0" descr="/home/user/My-Story-Marker/presentacion/build/img2/mark.png">    </p:cNvPr>
+          <p:cNvPicPr>
+            <a:picLocks noChangeAspect="1"/>
+          </p:cNvPicPr>
+          <p:nvPr/>
+        </p:nvPicPr>
+        <p:blipFill>
+          <a:blip r:embed="rId1"/>
+          <a:stretch>
+            <a:fillRect/>
+          </a:stretch>
+        </p:blipFill>
+        <p:spPr>
+          <a:xfrm>
+            <a:off x="457200" y="301752"/>
+            <a:ext cx="155448" cy="155448"/>
+          </a:xfrm>
+          <a:prstGeom prst="rect">
+            <a:avLst/>
+          </a:prstGeom>
+        </p:spPr>
+      </p:pic>
+      <p:sp>
+        <p:nvSpPr>
+          <p:cNvPr id="3" name="Text 0"/>
+          <p:cNvSpPr txBox="1"/>
+          <p:nvPr/>
+        </p:nvSpPr>
+        <p:spPr>
+          <a:xfrm>
+            <a:off x="694944" y="274320"/>
+            <a:ext cx="6400800" cy="219456"/>
+          </a:xfrm>
+          <a:prstGeom prst="rect">
+            <a:avLst/>
+          </a:prstGeom>
+          <a:noFill/>
+          <a:ln/>
+        </p:spPr>
+        <p:txBody>
+          <a:bodyPr wrap="square" lIns="0" tIns="0" rIns="0" bIns="0" rtlCol="0" anchor="t"/>
+          <a:lstStyle/>
+          <a:p>
+            <a:pPr indent="0" marL="0">
+              <a:buNone/>
+            </a:pPr>
+            <a:r>
+              <a:rPr lang="en-US" sz="950" b="1" spc="150" kern="0" dirty="0">
+                <a:solidFill>
+                  <a:srgbClr val="AE4E14"/>
+                </a:solidFill>
+                <a:latin typeface="Arial" pitchFamily="34" charset="0"/>
+                <a:ea typeface="Arial" pitchFamily="34" charset="-122"/>
+                <a:cs typeface="Arial" pitchFamily="34" charset="-120"/>
+              </a:rPr>
+              <a:t>ANEXO · COSTE DE DESARROLLO</a:t>
+            </a:r>
+            <a:endParaRPr lang="en-US" sz="950" dirty="0"/>
+          </a:p>
+        </p:txBody>
+      </p:sp>
+      <p:sp>
+        <p:nvSpPr>
+          <p:cNvPr id="4" name="Text 1"/>
+          <p:cNvSpPr txBox="1"/>
+          <p:nvPr/>
+        </p:nvSpPr>
+        <p:spPr>
+          <a:xfrm>
+            <a:off x="457200" y="530352"/>
+            <a:ext cx="8229600" cy="502920"/>
+          </a:xfrm>
+          <a:prstGeom prst="rect">
+            <a:avLst/>
+          </a:prstGeom>
+          <a:noFill/>
+          <a:ln/>
+        </p:spPr>
+        <p:txBody>
+          <a:bodyPr wrap="square" lIns="0" tIns="0" rIns="0" bIns="0" rtlCol="0" anchor="ctr"/>
+          <a:lstStyle/>
+          <a:p>
+            <a:pPr indent="0" marL="0">
+              <a:buNone/>
+            </a:pPr>
+            <a:r>
+              <a:rPr lang="en-US" sz="2000" b="1" dirty="0">
+                <a:solidFill>
+                  <a:srgbClr val="1E2B37"/>
+                </a:solidFill>
+                <a:latin typeface="Arial" pitchFamily="34" charset="0"/>
+                <a:ea typeface="Arial" pitchFamily="34" charset="-122"/>
+                <a:cs typeface="Arial" pitchFamily="34" charset="-120"/>
+              </a:rPr>
+              <a:t>Cómo reduciríamos el coste de desarrollo del harness</a:t>
+            </a:r>
+            <a:endParaRPr lang="en-US" sz="2000" dirty="0"/>
+          </a:p>
+        </p:txBody>
+      </p:sp>
+      <p:pic>
+        <p:nvPicPr>
+          <p:cNvPr id="5" name="Image 1" descr="/home/user/My-Story-Marker/presentacion/build/img2/logo.png">    </p:cNvPr>
+          <p:cNvPicPr>
+            <a:picLocks noChangeAspect="1"/>
+          </p:cNvPicPr>
+          <p:nvPr/>
+        </p:nvPicPr>
+        <p:blipFill>
+          <a:blip r:embed="rId2"/>
+          <a:stretch>
+            <a:fillRect/>
+          </a:stretch>
+        </p:blipFill>
+        <p:spPr>
+          <a:xfrm>
+            <a:off x="457200" y="4754880"/>
+            <a:ext cx="426720" cy="100584"/>
+          </a:xfrm>
+          <a:prstGeom prst="rect">
+            <a:avLst/>
+          </a:prstGeom>
+        </p:spPr>
+      </p:pic>
+      <p:sp>
+        <p:nvSpPr>
+          <p:cNvPr id="6" name="Text 2"/>
+          <p:cNvSpPr txBox="1"/>
+          <p:nvPr/>
+        </p:nvSpPr>
+        <p:spPr>
+          <a:xfrm>
+            <a:off x="1024128" y="4736592"/>
+            <a:ext cx="5486400" cy="146304"/>
+          </a:xfrm>
+          <a:prstGeom prst="rect">
+            <a:avLst/>
+          </a:prstGeom>
+          <a:noFill/>
+          <a:ln/>
+        </p:spPr>
+        <p:txBody>
+          <a:bodyPr wrap="square" lIns="0" tIns="0" rIns="0" bIns="0" rtlCol="0" anchor="ctr"/>
+          <a:lstStyle/>
+          <a:p>
+            <a:pPr indent="0" marL="0">
+              <a:buNone/>
+            </a:pPr>
+            <a:r>
+              <a:rPr lang="en-US" sz="750" dirty="0">
+                <a:solidFill>
+                  <a:srgbClr val="5E6A77"/>
+                </a:solidFill>
+                <a:latin typeface="Arial" pitchFamily="34" charset="0"/>
+                <a:ea typeface="Arial" pitchFamily="34" charset="-122"/>
+                <a:cs typeface="Arial" pitchFamily="34" charset="-120"/>
+              </a:rPr>
+              <a:t>My Story Marker · propuesta para Cuentalia · anexo</a:t>
+            </a:r>
+            <a:endParaRPr lang="en-US" sz="750" dirty="0"/>
+          </a:p>
+        </p:txBody>
+      </p:sp>
+      <p:sp>
+        <p:nvSpPr>
+          <p:cNvPr id="7" name="Text 3"/>
+          <p:cNvSpPr txBox="1"/>
+          <p:nvPr/>
+        </p:nvSpPr>
+        <p:spPr>
+          <a:xfrm>
+            <a:off x="8138160" y="4736592"/>
+            <a:ext cx="548640" cy="146304"/>
+          </a:xfrm>
+          <a:prstGeom prst="rect">
+            <a:avLst/>
+          </a:prstGeom>
+          <a:noFill/>
+          <a:ln/>
+        </p:spPr>
+        <p:txBody>
+          <a:bodyPr wrap="square" lIns="0" tIns="0" rIns="0" bIns="0" rtlCol="0" anchor="ctr"/>
+          <a:lstStyle/>
+          <a:p>
+            <a:pPr algn="r" indent="0" marL="0">
+              <a:buNone/>
+            </a:pPr>
+            <a:r>
+              <a:rPr lang="en-US" sz="750" dirty="0">
+                <a:solidFill>
+                  <a:srgbClr val="5E6A77"/>
+                </a:solidFill>
+                <a:latin typeface="Arial" pitchFamily="34" charset="0"/>
+                <a:ea typeface="Arial" pitchFamily="34" charset="-122"/>
+                <a:cs typeface="Arial" pitchFamily="34" charset="-120"/>
+              </a:rPr>
+              <a:t>17</a:t>
+            </a:r>
+            <a:endParaRPr lang="en-US" sz="750" dirty="0"/>
+          </a:p>
+        </p:txBody>
+      </p:sp>
+      <p:sp>
+        <p:nvSpPr>
+          <p:cNvPr id="8" name="Text 4"/>
+          <p:cNvSpPr txBox="1"/>
+          <p:nvPr/>
+        </p:nvSpPr>
+        <p:spPr>
+          <a:xfrm>
+            <a:off x="457200" y="1097280"/>
+            <a:ext cx="1920240" cy="411480"/>
+          </a:xfrm>
+          <a:prstGeom prst="rect">
+            <a:avLst/>
+          </a:prstGeom>
+          <a:noFill/>
+          <a:ln/>
+        </p:spPr>
+        <p:txBody>
+          <a:bodyPr wrap="square" lIns="0" tIns="0" rIns="0" bIns="0" rtlCol="0" anchor="b"/>
+          <a:lstStyle/>
+          <a:p>
+            <a:pPr indent="0" marL="0">
+              <a:buNone/>
+            </a:pPr>
+            <a:r>
+              <a:rPr lang="en-US" sz="2200" b="1" dirty="0">
+                <a:solidFill>
+                  <a:srgbClr val="AE4E14"/>
+                </a:solidFill>
+                <a:latin typeface="Arial" pitchFamily="34" charset="0"/>
+                <a:ea typeface="Arial" pitchFamily="34" charset="-122"/>
+                <a:cs typeface="Arial" pitchFamily="34" charset="-120"/>
+              </a:rPr>
+              <a:t>27,03 USD</a:t>
+            </a:r>
+            <a:endParaRPr lang="en-US" sz="2200" dirty="0"/>
+          </a:p>
+        </p:txBody>
+      </p:sp>
+      <p:sp>
+        <p:nvSpPr>
+          <p:cNvPr id="9" name="Text 5"/>
+          <p:cNvSpPr txBox="1"/>
+          <p:nvPr/>
+        </p:nvSpPr>
+        <p:spPr>
+          <a:xfrm>
+            <a:off x="457200" y="1536192"/>
+            <a:ext cx="1920240" cy="365760"/>
+          </a:xfrm>
+          <a:prstGeom prst="rect">
+            <a:avLst/>
+          </a:prstGeom>
+          <a:noFill/>
+          <a:ln/>
+        </p:spPr>
+        <p:txBody>
+          <a:bodyPr wrap="square" lIns="0" tIns="0" rIns="0" bIns="0" rtlCol="0" anchor="t"/>
+          <a:lstStyle/>
+          <a:p>
+            <a:pPr indent="0" marL="0">
+              <a:buNone/>
+            </a:pPr>
+            <a:r>
+              <a:rPr lang="en-US" sz="850" dirty="0">
+                <a:solidFill>
+                  <a:srgbClr val="5E6A77"/>
+                </a:solidFill>
+                <a:latin typeface="Arial" pitchFamily="34" charset="0"/>
+                <a:ea typeface="Arial" pitchFamily="34" charset="-122"/>
+                <a:cs typeface="Arial" pitchFamily="34" charset="-120"/>
+              </a:rPr>
+              <a:t>gasto real de modelo en todo el desarrollo</a:t>
+            </a:r>
+            <a:endParaRPr lang="en-US" sz="850" dirty="0"/>
+          </a:p>
+        </p:txBody>
+      </p:sp>
+      <p:sp>
+        <p:nvSpPr>
+          <p:cNvPr id="10" name="Text 6"/>
+          <p:cNvSpPr txBox="1"/>
+          <p:nvPr/>
+        </p:nvSpPr>
+        <p:spPr>
+          <a:xfrm>
+            <a:off x="457200" y="1965960"/>
+            <a:ext cx="1920240" cy="411480"/>
+          </a:xfrm>
+          <a:prstGeom prst="rect">
+            <a:avLst/>
+          </a:prstGeom>
+          <a:noFill/>
+          <a:ln/>
+        </p:spPr>
+        <p:txBody>
+          <a:bodyPr wrap="square" lIns="0" tIns="0" rIns="0" bIns="0" rtlCol="0" anchor="b"/>
+          <a:lstStyle/>
+          <a:p>
+            <a:pPr indent="0" marL="0">
+              <a:buNone/>
+            </a:pPr>
+            <a:r>
+              <a:rPr lang="en-US" sz="2200" b="1" dirty="0">
+                <a:solidFill>
+                  <a:srgbClr val="1E2B37"/>
+                </a:solidFill>
+                <a:latin typeface="Arial" pitchFamily="34" charset="0"/>
+                <a:ea typeface="Arial" pitchFamily="34" charset="-122"/>
+                <a:cs typeface="Arial" pitchFamily="34" charset="-120"/>
+              </a:rPr>
+              <a:t>53 %</a:t>
+            </a:r>
+            <a:endParaRPr lang="en-US" sz="2200" dirty="0"/>
+          </a:p>
+        </p:txBody>
+      </p:sp>
+      <p:sp>
+        <p:nvSpPr>
+          <p:cNvPr id="11" name="Text 7"/>
+          <p:cNvSpPr txBox="1"/>
+          <p:nvPr/>
+        </p:nvSpPr>
+        <p:spPr>
+          <a:xfrm>
+            <a:off x="457200" y="2404872"/>
+            <a:ext cx="1920240" cy="365760"/>
+          </a:xfrm>
+          <a:prstGeom prst="rect">
+            <a:avLst/>
+          </a:prstGeom>
+          <a:noFill/>
+          <a:ln/>
+        </p:spPr>
+        <p:txBody>
+          <a:bodyPr wrap="square" lIns="0" tIns="0" rIns="0" bIns="0" rtlCol="0" anchor="t"/>
+          <a:lstStyle/>
+          <a:p>
+            <a:pPr indent="0" marL="0">
+              <a:buNone/>
+            </a:pPr>
+            <a:r>
+              <a:rPr lang="en-US" sz="850" dirty="0">
+                <a:solidFill>
+                  <a:srgbClr val="5E6A77"/>
+                </a:solidFill>
+                <a:latin typeface="Arial" pitchFamily="34" charset="0"/>
+                <a:ea typeface="Arial" pitchFamily="34" charset="-122"/>
+                <a:cs typeface="Arial" pitchFamily="34" charset="-120"/>
+              </a:rPr>
+              <a:t>en intentos bloqueados de 10 capítulos (14,33 USD)</a:t>
+            </a:r>
+            <a:endParaRPr lang="en-US" sz="850" dirty="0"/>
+          </a:p>
+        </p:txBody>
+      </p:sp>
+      <p:sp>
+        <p:nvSpPr>
+          <p:cNvPr id="12" name="Text 8"/>
+          <p:cNvSpPr txBox="1"/>
+          <p:nvPr/>
+        </p:nvSpPr>
+        <p:spPr>
+          <a:xfrm>
+            <a:off x="457200" y="2971800"/>
+            <a:ext cx="1920240" cy="1097280"/>
+          </a:xfrm>
+          <a:prstGeom prst="rect">
+            <a:avLst/>
+          </a:prstGeom>
+          <a:noFill/>
+          <a:ln/>
+        </p:spPr>
+        <p:txBody>
+          <a:bodyPr wrap="square" lIns="0" tIns="0" rIns="0" bIns="0" rtlCol="0" anchor="t"/>
+          <a:lstStyle/>
+          <a:p>
+            <a:pPr indent="0" marL="0">
+              <a:buNone/>
+            </a:pPr>
+            <a:r>
+              <a:rPr lang="en-US" sz="1100" b="1" i="1" dirty="0">
+                <a:solidFill>
+                  <a:srgbClr val="3D4A56"/>
+                </a:solidFill>
+                <a:latin typeface="Arial" pitchFamily="34" charset="0"/>
+                <a:ea typeface="Arial" pitchFamily="34" charset="-122"/>
+                <a:cs typeface="Arial" pitchFamily="34" charset="-120"/>
+              </a:rPr>
+              <a:t>«El coste de desarrollo no está en los tokens; está en el retrabajo.»</a:t>
+            </a:r>
+            <a:endParaRPr lang="en-US" sz="1100" dirty="0"/>
+          </a:p>
+        </p:txBody>
+      </p:sp>
+      <p:sp>
+        <p:nvSpPr>
+          <p:cNvPr id="13" name="Shape 9"/>
+          <p:cNvSpPr/>
+          <p:nvPr/>
+        </p:nvSpPr>
+        <p:spPr>
+          <a:xfrm>
+            <a:off x="2606040" y="1097280"/>
+            <a:ext cx="274320" cy="274320"/>
+          </a:xfrm>
+          <a:prstGeom prst="roundRect">
+            <a:avLst>
+              <a:gd name="adj" fmla="val 26667"/>
+            </a:avLst>
+          </a:prstGeom>
+          <a:solidFill>
+            <a:srgbClr val="1E2B37"/>
+          </a:solidFill>
+          <a:ln/>
+        </p:spPr>
+      </p:sp>
+      <p:sp>
+        <p:nvSpPr>
+          <p:cNvPr id="14" name="Text 10"/>
+          <p:cNvSpPr txBox="1"/>
+          <p:nvPr/>
+        </p:nvSpPr>
+        <p:spPr>
+          <a:xfrm>
+            <a:off x="2606040" y="1097280"/>
+            <a:ext cx="274320" cy="274320"/>
+          </a:xfrm>
+          <a:prstGeom prst="rect">
+            <a:avLst/>
+          </a:prstGeom>
+          <a:noFill/>
+          <a:ln/>
+        </p:spPr>
+        <p:txBody>
+          <a:bodyPr wrap="square" lIns="0" tIns="0" rIns="0" bIns="0" rtlCol="0" anchor="ctr"/>
+          <a:lstStyle/>
+          <a:p>
+            <a:pPr algn="ctr" indent="0" marL="0">
+              <a:buNone/>
+            </a:pPr>
+            <a:r>
+              <a:rPr lang="en-US" sz="900" b="1" dirty="0">
+                <a:solidFill>
+                  <a:srgbClr val="FFFFFF"/>
+                </a:solidFill>
+                <a:latin typeface="Arial" pitchFamily="34" charset="0"/>
+                <a:ea typeface="Arial" pitchFamily="34" charset="-122"/>
+                <a:cs typeface="Arial" pitchFamily="34" charset="-120"/>
+              </a:rPr>
+              <a:t>1</a:t>
+            </a:r>
+            <a:endParaRPr lang="en-US" sz="900" dirty="0"/>
+          </a:p>
+        </p:txBody>
+      </p:sp>
+      <p:sp>
+        <p:nvSpPr>
+          <p:cNvPr id="15" name="Text 11"/>
+          <p:cNvSpPr txBox="1"/>
+          <p:nvPr/>
+        </p:nvSpPr>
+        <p:spPr>
+          <a:xfrm>
+            <a:off x="2971800" y="1078992"/>
+            <a:ext cx="2606040" cy="201168"/>
+          </a:xfrm>
+          <a:prstGeom prst="rect">
+            <a:avLst/>
+          </a:prstGeom>
+          <a:noFill/>
+          <a:ln/>
+        </p:spPr>
+        <p:txBody>
+          <a:bodyPr wrap="square" lIns="0" tIns="0" rIns="0" bIns="0" rtlCol="0" anchor="t"/>
+          <a:lstStyle/>
+          <a:p>
+            <a:pPr indent="0" marL="0">
+              <a:buNone/>
+            </a:pPr>
+            <a:r>
+              <a:rPr lang="en-US" sz="850" b="1" dirty="0">
+                <a:solidFill>
+                  <a:srgbClr val="1E2B37"/>
+                </a:solidFill>
+                <a:latin typeface="Arial" pitchFamily="34" charset="0"/>
+                <a:ea typeface="Arial" pitchFamily="34" charset="-122"/>
+                <a:cs typeface="Arial" pitchFamily="34" charset="-120"/>
+              </a:rPr>
+              <a:t>Spec del producto antes que harness genérico</a:t>
+            </a:r>
+            <a:endParaRPr lang="en-US" sz="850" dirty="0"/>
+          </a:p>
+        </p:txBody>
+      </p:sp>
+      <p:sp>
+        <p:nvSpPr>
+          <p:cNvPr id="16" name="Text 12"/>
+          <p:cNvSpPr txBox="1"/>
+          <p:nvPr/>
+        </p:nvSpPr>
+        <p:spPr>
+          <a:xfrm>
+            <a:off x="2971800" y="1280160"/>
+            <a:ext cx="2606040" cy="457200"/>
+          </a:xfrm>
+          <a:prstGeom prst="rect">
+            <a:avLst/>
+          </a:prstGeom>
+          <a:noFill/>
+          <a:ln/>
+        </p:spPr>
+        <p:txBody>
+          <a:bodyPr wrap="square" lIns="0" tIns="0" rIns="0" bIns="0" rtlCol="0" anchor="t"/>
+          <a:lstStyle/>
+          <a:p>
+            <a:pPr indent="0" marL="0">
+              <a:buNone/>
+            </a:pPr>
+            <a:r>
+              <a:rPr lang="en-US" sz="750" dirty="0">
+                <a:solidFill>
+                  <a:srgbClr val="3D4A56"/>
+                </a:solidFill>
+                <a:latin typeface="Arial" pitchFamily="34" charset="0"/>
+                <a:ea typeface="Arial" pitchFamily="34" charset="-122"/>
+                <a:cs typeface="Arial" pitchFamily="34" charset="-120"/>
+              </a:rPr>
+              <a:t>el harness de partida (~20.000 líneas, novela larga genérica) hubo que adaptarlo casi entero; empezar por spec + esqueleto de punta a punta</a:t>
+            </a:r>
+            <a:endParaRPr lang="en-US" sz="750" dirty="0"/>
+          </a:p>
+        </p:txBody>
+      </p:sp>
+      <p:sp>
+        <p:nvSpPr>
+          <p:cNvPr id="17" name="Shape 13"/>
+          <p:cNvSpPr/>
+          <p:nvPr/>
+        </p:nvSpPr>
+        <p:spPr>
+          <a:xfrm>
+            <a:off x="2606040" y="1783080"/>
+            <a:ext cx="274320" cy="274320"/>
+          </a:xfrm>
+          <a:prstGeom prst="roundRect">
+            <a:avLst>
+              <a:gd name="adj" fmla="val 26667"/>
+            </a:avLst>
+          </a:prstGeom>
+          <a:solidFill>
+            <a:srgbClr val="1E2B37"/>
+          </a:solidFill>
+          <a:ln/>
+        </p:spPr>
+      </p:sp>
+      <p:sp>
+        <p:nvSpPr>
+          <p:cNvPr id="18" name="Text 14"/>
+          <p:cNvSpPr txBox="1"/>
+          <p:nvPr/>
+        </p:nvSpPr>
+        <p:spPr>
+          <a:xfrm>
+            <a:off x="2606040" y="1783080"/>
+            <a:ext cx="274320" cy="274320"/>
+          </a:xfrm>
+          <a:prstGeom prst="rect">
+            <a:avLst/>
+          </a:prstGeom>
+          <a:noFill/>
+          <a:ln/>
+        </p:spPr>
+        <p:txBody>
+          <a:bodyPr wrap="square" lIns="0" tIns="0" rIns="0" bIns="0" rtlCol="0" anchor="ctr"/>
+          <a:lstStyle/>
+          <a:p>
+            <a:pPr algn="ctr" indent="0" marL="0">
+              <a:buNone/>
+            </a:pPr>
+            <a:r>
+              <a:rPr lang="en-US" sz="900" b="1" dirty="0">
+                <a:solidFill>
+                  <a:srgbClr val="FFFFFF"/>
+                </a:solidFill>
+                <a:latin typeface="Arial" pitchFamily="34" charset="0"/>
+                <a:ea typeface="Arial" pitchFamily="34" charset="-122"/>
+                <a:cs typeface="Arial" pitchFamily="34" charset="-120"/>
+              </a:rPr>
+              <a:t>2</a:t>
+            </a:r>
+            <a:endParaRPr lang="en-US" sz="900" dirty="0"/>
+          </a:p>
+        </p:txBody>
+      </p:sp>
+      <p:sp>
+        <p:nvSpPr>
+          <p:cNvPr id="19" name="Text 15"/>
+          <p:cNvSpPr txBox="1"/>
+          <p:nvPr/>
+        </p:nvSpPr>
+        <p:spPr>
+          <a:xfrm>
+            <a:off x="2971800" y="1764792"/>
+            <a:ext cx="2606040" cy="201168"/>
+          </a:xfrm>
+          <a:prstGeom prst="rect">
+            <a:avLst/>
+          </a:prstGeom>
+          <a:noFill/>
+          <a:ln/>
+        </p:spPr>
+        <p:txBody>
+          <a:bodyPr wrap="square" lIns="0" tIns="0" rIns="0" bIns="0" rtlCol="0" anchor="t"/>
+          <a:lstStyle/>
+          <a:p>
+            <a:pPr indent="0" marL="0">
+              <a:buNone/>
+            </a:pPr>
+            <a:r>
+              <a:rPr lang="en-US" sz="850" b="1" dirty="0">
+                <a:solidFill>
+                  <a:srgbClr val="1E2B37"/>
+                </a:solidFill>
+                <a:latin typeface="Arial" pitchFamily="34" charset="0"/>
+                <a:ea typeface="Arial" pitchFamily="34" charset="-122"/>
+                <a:cs typeface="Arial" pitchFamily="34" charset="-120"/>
+              </a:rPr>
+              <a:t>Iterar con novelas cortas</a:t>
+            </a:r>
+            <a:endParaRPr lang="en-US" sz="850" dirty="0"/>
+          </a:p>
+        </p:txBody>
+      </p:sp>
+      <p:sp>
+        <p:nvSpPr>
+          <p:cNvPr id="20" name="Text 16"/>
+          <p:cNvSpPr txBox="1"/>
+          <p:nvPr/>
+        </p:nvSpPr>
+        <p:spPr>
+          <a:xfrm>
+            <a:off x="2971800" y="1965960"/>
+            <a:ext cx="2606040" cy="457200"/>
+          </a:xfrm>
+          <a:prstGeom prst="rect">
+            <a:avLst/>
+          </a:prstGeom>
+          <a:noFill/>
+          <a:ln/>
+        </p:spPr>
+        <p:txBody>
+          <a:bodyPr wrap="square" lIns="0" tIns="0" rIns="0" bIns="0" rtlCol="0" anchor="t"/>
+          <a:lstStyle/>
+          <a:p>
+            <a:pPr indent="0" marL="0">
+              <a:buNone/>
+            </a:pPr>
+            <a:r>
+              <a:rPr lang="en-US" sz="750" dirty="0">
+                <a:solidFill>
+                  <a:srgbClr val="3D4A56"/>
+                </a:solidFill>
+                <a:latin typeface="Arial" pitchFamily="34" charset="0"/>
+                <a:ea typeface="Arial" pitchFamily="34" charset="-122"/>
+                <a:cs typeface="Arial" pitchFamily="34" charset="-120"/>
+              </a:rPr>
+              <a:t>los fallos ya salían en 1–3 capítulos (0,4–0,9 USD); la de 10 solo al final</a:t>
+            </a:r>
+            <a:endParaRPr lang="en-US" sz="750" dirty="0"/>
+          </a:p>
+        </p:txBody>
+      </p:sp>
+      <p:sp>
+        <p:nvSpPr>
+          <p:cNvPr id="21" name="Shape 17"/>
+          <p:cNvSpPr/>
+          <p:nvPr/>
+        </p:nvSpPr>
+        <p:spPr>
+          <a:xfrm>
+            <a:off x="2606040" y="2468880"/>
+            <a:ext cx="274320" cy="274320"/>
+          </a:xfrm>
+          <a:prstGeom prst="roundRect">
+            <a:avLst>
+              <a:gd name="adj" fmla="val 26667"/>
+            </a:avLst>
+          </a:prstGeom>
+          <a:solidFill>
+            <a:srgbClr val="1E2B37"/>
+          </a:solidFill>
+          <a:ln/>
+        </p:spPr>
+      </p:sp>
+      <p:sp>
+        <p:nvSpPr>
+          <p:cNvPr id="22" name="Text 18"/>
+          <p:cNvSpPr txBox="1"/>
+          <p:nvPr/>
+        </p:nvSpPr>
+        <p:spPr>
+          <a:xfrm>
+            <a:off x="2606040" y="2468880"/>
+            <a:ext cx="274320" cy="274320"/>
+          </a:xfrm>
+          <a:prstGeom prst="rect">
+            <a:avLst/>
+          </a:prstGeom>
+          <a:noFill/>
+          <a:ln/>
+        </p:spPr>
+        <p:txBody>
+          <a:bodyPr wrap="square" lIns="0" tIns="0" rIns="0" bIns="0" rtlCol="0" anchor="ctr"/>
+          <a:lstStyle/>
+          <a:p>
+            <a:pPr algn="ctr" indent="0" marL="0">
+              <a:buNone/>
+            </a:pPr>
+            <a:r>
+              <a:rPr lang="en-US" sz="900" b="1" dirty="0">
+                <a:solidFill>
+                  <a:srgbClr val="FFFFFF"/>
+                </a:solidFill>
+                <a:latin typeface="Arial" pitchFamily="34" charset="0"/>
+                <a:ea typeface="Arial" pitchFamily="34" charset="-122"/>
+                <a:cs typeface="Arial" pitchFamily="34" charset="-120"/>
+              </a:rPr>
+              <a:t>3</a:t>
+            </a:r>
+            <a:endParaRPr lang="en-US" sz="900" dirty="0"/>
+          </a:p>
+        </p:txBody>
+      </p:sp>
+      <p:sp>
+        <p:nvSpPr>
+          <p:cNvPr id="23" name="Text 19"/>
+          <p:cNvSpPr txBox="1"/>
+          <p:nvPr/>
+        </p:nvSpPr>
+        <p:spPr>
+          <a:xfrm>
+            <a:off x="2971800" y="2450592"/>
+            <a:ext cx="2606040" cy="201168"/>
+          </a:xfrm>
+          <a:prstGeom prst="rect">
+            <a:avLst/>
+          </a:prstGeom>
+          <a:noFill/>
+          <a:ln/>
+        </p:spPr>
+        <p:txBody>
+          <a:bodyPr wrap="square" lIns="0" tIns="0" rIns="0" bIns="0" rtlCol="0" anchor="t"/>
+          <a:lstStyle/>
+          <a:p>
+            <a:pPr indent="0" marL="0">
+              <a:buNone/>
+            </a:pPr>
+            <a:r>
+              <a:rPr lang="en-US" sz="850" b="1" dirty="0">
+                <a:solidFill>
+                  <a:srgbClr val="1E2B37"/>
+                </a:solidFill>
+                <a:latin typeface="Arial" pitchFamily="34" charset="0"/>
+                <a:ea typeface="Arial" pitchFamily="34" charset="-122"/>
+                <a:cs typeface="Arial" pitchFamily="34" charset="-120"/>
+              </a:rPr>
+              <a:t>Lo determinista, antes de escribir</a:t>
+            </a:r>
+            <a:endParaRPr lang="en-US" sz="850" dirty="0"/>
+          </a:p>
+        </p:txBody>
+      </p:sp>
+      <p:sp>
+        <p:nvSpPr>
+          <p:cNvPr id="24" name="Text 20"/>
+          <p:cNvSpPr txBox="1"/>
+          <p:nvPr/>
+        </p:nvSpPr>
+        <p:spPr>
+          <a:xfrm>
+            <a:off x="2971800" y="2651760"/>
+            <a:ext cx="2606040" cy="457200"/>
+          </a:xfrm>
+          <a:prstGeom prst="rect">
+            <a:avLst/>
+          </a:prstGeom>
+          <a:noFill/>
+          <a:ln/>
+        </p:spPr>
+        <p:txBody>
+          <a:bodyPr wrap="square" lIns="0" tIns="0" rIns="0" bIns="0" rtlCol="0" anchor="t"/>
+          <a:lstStyle/>
+          <a:p>
+            <a:pPr indent="0" marL="0">
+              <a:buNone/>
+            </a:pPr>
+            <a:r>
+              <a:rPr lang="en-US" sz="750" dirty="0">
+                <a:solidFill>
+                  <a:srgbClr val="3D4A56"/>
+                </a:solidFill>
+                <a:latin typeface="Arial" pitchFamily="34" charset="0"/>
+                <a:ea typeface="Arial" pitchFamily="34" charset="-122"/>
+                <a:cs typeface="Arial" pitchFamily="34" charset="-120"/>
+              </a:rPr>
+              <a:t>fechas, cronología y lugares validados en el plan: segundos y céntimos, frente a una novela entera</a:t>
+            </a:r>
+            <a:endParaRPr lang="en-US" sz="750" dirty="0"/>
+          </a:p>
+        </p:txBody>
+      </p:sp>
+      <p:sp>
+        <p:nvSpPr>
+          <p:cNvPr id="25" name="Shape 21"/>
+          <p:cNvSpPr/>
+          <p:nvPr/>
+        </p:nvSpPr>
+        <p:spPr>
+          <a:xfrm>
+            <a:off x="2606040" y="3154680"/>
+            <a:ext cx="274320" cy="274320"/>
+          </a:xfrm>
+          <a:prstGeom prst="roundRect">
+            <a:avLst>
+              <a:gd name="adj" fmla="val 26667"/>
+            </a:avLst>
+          </a:prstGeom>
+          <a:solidFill>
+            <a:srgbClr val="1E2B37"/>
+          </a:solidFill>
+          <a:ln/>
+        </p:spPr>
+      </p:sp>
+      <p:sp>
+        <p:nvSpPr>
+          <p:cNvPr id="26" name="Text 22"/>
+          <p:cNvSpPr txBox="1"/>
+          <p:nvPr/>
+        </p:nvSpPr>
+        <p:spPr>
+          <a:xfrm>
+            <a:off x="2606040" y="3154680"/>
+            <a:ext cx="274320" cy="274320"/>
+          </a:xfrm>
+          <a:prstGeom prst="rect">
+            <a:avLst/>
+          </a:prstGeom>
+          <a:noFill/>
+          <a:ln/>
+        </p:spPr>
+        <p:txBody>
+          <a:bodyPr wrap="square" lIns="0" tIns="0" rIns="0" bIns="0" rtlCol="0" anchor="ctr"/>
+          <a:lstStyle/>
+          <a:p>
+            <a:pPr algn="ctr" indent="0" marL="0">
+              <a:buNone/>
+            </a:pPr>
+            <a:r>
+              <a:rPr lang="en-US" sz="900" b="1" dirty="0">
+                <a:solidFill>
+                  <a:srgbClr val="FFFFFF"/>
+                </a:solidFill>
+                <a:latin typeface="Arial" pitchFamily="34" charset="0"/>
+                <a:ea typeface="Arial" pitchFamily="34" charset="-122"/>
+                <a:cs typeface="Arial" pitchFamily="34" charset="-120"/>
+              </a:rPr>
+              <a:t>4</a:t>
+            </a:r>
+            <a:endParaRPr lang="en-US" sz="900" dirty="0"/>
+          </a:p>
+        </p:txBody>
+      </p:sp>
+      <p:sp>
+        <p:nvSpPr>
+          <p:cNvPr id="27" name="Text 23"/>
+          <p:cNvSpPr txBox="1"/>
+          <p:nvPr/>
+        </p:nvSpPr>
+        <p:spPr>
+          <a:xfrm>
+            <a:off x="2971800" y="3136392"/>
+            <a:ext cx="2606040" cy="201168"/>
+          </a:xfrm>
+          <a:prstGeom prst="rect">
+            <a:avLst/>
+          </a:prstGeom>
+          <a:noFill/>
+          <a:ln/>
+        </p:spPr>
+        <p:txBody>
+          <a:bodyPr wrap="square" lIns="0" tIns="0" rIns="0" bIns="0" rtlCol="0" anchor="t"/>
+          <a:lstStyle/>
+          <a:p>
+            <a:pPr indent="0" marL="0">
+              <a:buNone/>
+            </a:pPr>
+            <a:r>
+              <a:rPr lang="en-US" sz="850" b="1" dirty="0">
+                <a:solidFill>
+                  <a:srgbClr val="1E2B37"/>
+                </a:solidFill>
+                <a:latin typeface="Arial" pitchFamily="34" charset="0"/>
+                <a:ea typeface="Arial" pitchFamily="34" charset="-122"/>
+                <a:cs typeface="Arial" pitchFamily="34" charset="-120"/>
+              </a:rPr>
+              <a:t>Tests sin modelo</a:t>
+            </a:r>
+            <a:endParaRPr lang="en-US" sz="850" dirty="0"/>
+          </a:p>
+        </p:txBody>
+      </p:sp>
+      <p:sp>
+        <p:nvSpPr>
+          <p:cNvPr id="28" name="Text 24"/>
+          <p:cNvSpPr txBox="1"/>
+          <p:nvPr/>
+        </p:nvSpPr>
+        <p:spPr>
+          <a:xfrm>
+            <a:off x="2971800" y="3337560"/>
+            <a:ext cx="2606040" cy="457200"/>
+          </a:xfrm>
+          <a:prstGeom prst="rect">
+            <a:avLst/>
+          </a:prstGeom>
+          <a:noFill/>
+          <a:ln/>
+        </p:spPr>
+        <p:txBody>
+          <a:bodyPr wrap="square" lIns="0" tIns="0" rIns="0" bIns="0" rtlCol="0" anchor="t"/>
+          <a:lstStyle/>
+          <a:p>
+            <a:pPr indent="0" marL="0">
+              <a:buNone/>
+            </a:pPr>
+            <a:r>
+              <a:rPr lang="en-US" sz="750" dirty="0">
+                <a:solidFill>
+                  <a:srgbClr val="3D4A56"/>
+                </a:solidFill>
+                <a:latin typeface="Arial" pitchFamily="34" charset="0"/>
+                <a:ea typeface="Arial" pitchFamily="34" charset="-122"/>
+                <a:cs typeface="Arial" pitchFamily="34" charset="-120"/>
+              </a:rPr>
+              <a:t>FakeModelClient y respuestas grabadas; en vivo solo un smoke pequeño</a:t>
+            </a:r>
+            <a:endParaRPr lang="en-US" sz="750" dirty="0"/>
+          </a:p>
+        </p:txBody>
+      </p:sp>
+      <p:sp>
+        <p:nvSpPr>
+          <p:cNvPr id="29" name="Shape 25"/>
+          <p:cNvSpPr/>
+          <p:nvPr/>
+        </p:nvSpPr>
+        <p:spPr>
+          <a:xfrm>
+            <a:off x="2606040" y="3840480"/>
+            <a:ext cx="274320" cy="274320"/>
+          </a:xfrm>
+          <a:prstGeom prst="roundRect">
+            <a:avLst>
+              <a:gd name="adj" fmla="val 26667"/>
+            </a:avLst>
+          </a:prstGeom>
+          <a:solidFill>
+            <a:srgbClr val="1E2B37"/>
+          </a:solidFill>
+          <a:ln/>
+        </p:spPr>
+      </p:sp>
+      <p:sp>
+        <p:nvSpPr>
+          <p:cNvPr id="30" name="Text 26"/>
+          <p:cNvSpPr txBox="1"/>
+          <p:nvPr/>
+        </p:nvSpPr>
+        <p:spPr>
+          <a:xfrm>
+            <a:off x="2606040" y="3840480"/>
+            <a:ext cx="274320" cy="274320"/>
+          </a:xfrm>
+          <a:prstGeom prst="rect">
+            <a:avLst/>
+          </a:prstGeom>
+          <a:noFill/>
+          <a:ln/>
+        </p:spPr>
+        <p:txBody>
+          <a:bodyPr wrap="square" lIns="0" tIns="0" rIns="0" bIns="0" rtlCol="0" anchor="ctr"/>
+          <a:lstStyle/>
+          <a:p>
+            <a:pPr algn="ctr" indent="0" marL="0">
+              <a:buNone/>
+            </a:pPr>
+            <a:r>
+              <a:rPr lang="en-US" sz="900" b="1" dirty="0">
+                <a:solidFill>
+                  <a:srgbClr val="FFFFFF"/>
+                </a:solidFill>
+                <a:latin typeface="Arial" pitchFamily="34" charset="0"/>
+                <a:ea typeface="Arial" pitchFamily="34" charset="-122"/>
+                <a:cs typeface="Arial" pitchFamily="34" charset="-120"/>
+              </a:rPr>
+              <a:t>5</a:t>
+            </a:r>
+            <a:endParaRPr lang="en-US" sz="900" dirty="0"/>
+          </a:p>
+        </p:txBody>
+      </p:sp>
+      <p:sp>
+        <p:nvSpPr>
+          <p:cNvPr id="31" name="Text 27"/>
+          <p:cNvSpPr txBox="1"/>
+          <p:nvPr/>
+        </p:nvSpPr>
+        <p:spPr>
+          <a:xfrm>
+            <a:off x="2971800" y="3822192"/>
+            <a:ext cx="2606040" cy="201168"/>
+          </a:xfrm>
+          <a:prstGeom prst="rect">
+            <a:avLst/>
+          </a:prstGeom>
+          <a:noFill/>
+          <a:ln/>
+        </p:spPr>
+        <p:txBody>
+          <a:bodyPr wrap="square" lIns="0" tIns="0" rIns="0" bIns="0" rtlCol="0" anchor="t"/>
+          <a:lstStyle/>
+          <a:p>
+            <a:pPr indent="0" marL="0">
+              <a:buNone/>
+            </a:pPr>
+            <a:r>
+              <a:rPr lang="en-US" sz="850" b="1" dirty="0">
+                <a:solidFill>
+                  <a:srgbClr val="1E2B37"/>
+                </a:solidFill>
+                <a:latin typeface="Arial" pitchFamily="34" charset="0"/>
+                <a:ea typeface="Arial" pitchFamily="34" charset="-122"/>
+                <a:cs typeface="Arial" pitchFamily="34" charset="-120"/>
+              </a:rPr>
+              <a:t>Modelo según la tarea</a:t>
+            </a:r>
+            <a:endParaRPr lang="en-US" sz="850" dirty="0"/>
+          </a:p>
+        </p:txBody>
+      </p:sp>
+      <p:sp>
+        <p:nvSpPr>
+          <p:cNvPr id="32" name="Text 28"/>
+          <p:cNvSpPr txBox="1"/>
+          <p:nvPr/>
+        </p:nvSpPr>
+        <p:spPr>
+          <a:xfrm>
+            <a:off x="2971800" y="4023360"/>
+            <a:ext cx="2606040" cy="457200"/>
+          </a:xfrm>
+          <a:prstGeom prst="rect">
+            <a:avLst/>
+          </a:prstGeom>
+          <a:noFill/>
+          <a:ln/>
+        </p:spPr>
+        <p:txBody>
+          <a:bodyPr wrap="square" lIns="0" tIns="0" rIns="0" bIns="0" rtlCol="0" anchor="t"/>
+          <a:lstStyle/>
+          <a:p>
+            <a:pPr indent="0" marL="0">
+              <a:buNone/>
+            </a:pPr>
+            <a:r>
+              <a:rPr lang="en-US" sz="750" dirty="0">
+                <a:solidFill>
+                  <a:srgbClr val="3D4A56"/>
+                </a:solidFill>
+                <a:latin typeface="Arial" pitchFamily="34" charset="0"/>
+                <a:ea typeface="Arial" pitchFamily="34" charset="-122"/>
+                <a:cs typeface="Arial" pitchFamily="34" charset="-120"/>
+              </a:rPr>
+              <a:t>potente para diseño y specs; barato para tests, docs y regenerar tipos; presupuesto por agente</a:t>
+            </a:r>
+            <a:endParaRPr lang="en-US" sz="750" dirty="0"/>
+          </a:p>
+        </p:txBody>
+      </p:sp>
+      <p:sp>
+        <p:nvSpPr>
+          <p:cNvPr id="33" name="Shape 29"/>
+          <p:cNvSpPr/>
+          <p:nvPr/>
+        </p:nvSpPr>
+        <p:spPr>
+          <a:xfrm>
+            <a:off x="5669280" y="1097280"/>
+            <a:ext cx="274320" cy="274320"/>
+          </a:xfrm>
+          <a:prstGeom prst="roundRect">
+            <a:avLst>
+              <a:gd name="adj" fmla="val 26667"/>
+            </a:avLst>
+          </a:prstGeom>
+          <a:solidFill>
+            <a:srgbClr val="1E2B37"/>
+          </a:solidFill>
+          <a:ln/>
+        </p:spPr>
+      </p:sp>
+      <p:sp>
+        <p:nvSpPr>
+          <p:cNvPr id="34" name="Text 30"/>
+          <p:cNvSpPr txBox="1"/>
+          <p:nvPr/>
+        </p:nvSpPr>
+        <p:spPr>
+          <a:xfrm>
+            <a:off x="5669280" y="1097280"/>
+            <a:ext cx="274320" cy="274320"/>
+          </a:xfrm>
+          <a:prstGeom prst="rect">
+            <a:avLst/>
+          </a:prstGeom>
+          <a:noFill/>
+          <a:ln/>
+        </p:spPr>
+        <p:txBody>
+          <a:bodyPr wrap="square" lIns="0" tIns="0" rIns="0" bIns="0" rtlCol="0" anchor="ctr"/>
+          <a:lstStyle/>
+          <a:p>
+            <a:pPr algn="ctr" indent="0" marL="0">
+              <a:buNone/>
+            </a:pPr>
+            <a:r>
+              <a:rPr lang="en-US" sz="900" b="1" dirty="0">
+                <a:solidFill>
+                  <a:srgbClr val="FFFFFF"/>
+                </a:solidFill>
+                <a:latin typeface="Arial" pitchFamily="34" charset="0"/>
+                <a:ea typeface="Arial" pitchFamily="34" charset="-122"/>
+                <a:cs typeface="Arial" pitchFamily="34" charset="-120"/>
+              </a:rPr>
+              <a:t>6</a:t>
+            </a:r>
+            <a:endParaRPr lang="en-US" sz="900" dirty="0"/>
+          </a:p>
+        </p:txBody>
+      </p:sp>
+      <p:sp>
+        <p:nvSpPr>
+          <p:cNvPr id="35" name="Text 31"/>
+          <p:cNvSpPr txBox="1"/>
+          <p:nvPr/>
+        </p:nvSpPr>
+        <p:spPr>
+          <a:xfrm>
+            <a:off x="6035040" y="1078992"/>
+            <a:ext cx="2606040" cy="201168"/>
+          </a:xfrm>
+          <a:prstGeom prst="rect">
+            <a:avLst/>
+          </a:prstGeom>
+          <a:noFill/>
+          <a:ln/>
+        </p:spPr>
+        <p:txBody>
+          <a:bodyPr wrap="square" lIns="0" tIns="0" rIns="0" bIns="0" rtlCol="0" anchor="t"/>
+          <a:lstStyle/>
+          <a:p>
+            <a:pPr indent="0" marL="0">
+              <a:buNone/>
+            </a:pPr>
+            <a:r>
+              <a:rPr lang="en-US" sz="850" b="1" dirty="0">
+                <a:solidFill>
+                  <a:srgbClr val="1E2B37"/>
+                </a:solidFill>
+                <a:latin typeface="Arial" pitchFamily="34" charset="0"/>
+                <a:ea typeface="Arial" pitchFamily="34" charset="-122"/>
+                <a:cs typeface="Arial" pitchFamily="34" charset="-120"/>
+              </a:rPr>
+              <a:t>Contratos primero, pocos ficheros compartidos</a:t>
+            </a:r>
+            <a:endParaRPr lang="en-US" sz="850" dirty="0"/>
+          </a:p>
+        </p:txBody>
+      </p:sp>
+      <p:sp>
+        <p:nvSpPr>
+          <p:cNvPr id="36" name="Text 32"/>
+          <p:cNvSpPr txBox="1"/>
+          <p:nvPr/>
+        </p:nvSpPr>
+        <p:spPr>
+          <a:xfrm>
+            <a:off x="6035040" y="1280160"/>
+            <a:ext cx="2606040" cy="457200"/>
+          </a:xfrm>
+          <a:prstGeom prst="rect">
+            <a:avLst/>
+          </a:prstGeom>
+          <a:noFill/>
+          <a:ln/>
+        </p:spPr>
+        <p:txBody>
+          <a:bodyPr wrap="square" lIns="0" tIns="0" rIns="0" bIns="0" rtlCol="0" anchor="t"/>
+          <a:lstStyle/>
+          <a:p>
+            <a:pPr indent="0" marL="0">
+              <a:buNone/>
+            </a:pPr>
+            <a:r>
+              <a:rPr lang="en-US" sz="750" dirty="0">
+                <a:solidFill>
+                  <a:srgbClr val="3D4A56"/>
+                </a:solidFill>
+                <a:latin typeface="Arial" pitchFamily="34" charset="0"/>
+                <a:ea typeface="Arial" pitchFamily="34" charset="-122"/>
+                <a:cs typeface="Arial" pitchFamily="34" charset="-120"/>
+              </a:rPr>
+              <a:t>K1–K5 evitaron retrabajo; rutas y dependencias compartidas costaron fusiones</a:t>
+            </a:r>
+            <a:endParaRPr lang="en-US" sz="750" dirty="0"/>
+          </a:p>
+        </p:txBody>
+      </p:sp>
+      <p:sp>
+        <p:nvSpPr>
+          <p:cNvPr id="37" name="Shape 33"/>
+          <p:cNvSpPr/>
+          <p:nvPr/>
+        </p:nvSpPr>
+        <p:spPr>
+          <a:xfrm>
+            <a:off x="5669280" y="1783080"/>
+            <a:ext cx="274320" cy="274320"/>
+          </a:xfrm>
+          <a:prstGeom prst="roundRect">
+            <a:avLst>
+              <a:gd name="adj" fmla="val 26667"/>
+            </a:avLst>
+          </a:prstGeom>
+          <a:solidFill>
+            <a:srgbClr val="1E2B37"/>
+          </a:solidFill>
+          <a:ln/>
+        </p:spPr>
+      </p:sp>
+      <p:sp>
+        <p:nvSpPr>
+          <p:cNvPr id="38" name="Text 34"/>
+          <p:cNvSpPr txBox="1"/>
+          <p:nvPr/>
+        </p:nvSpPr>
+        <p:spPr>
+          <a:xfrm>
+            <a:off x="5669280" y="1783080"/>
+            <a:ext cx="274320" cy="274320"/>
+          </a:xfrm>
+          <a:prstGeom prst="rect">
+            <a:avLst/>
+          </a:prstGeom>
+          <a:noFill/>
+          <a:ln/>
+        </p:spPr>
+        <p:txBody>
+          <a:bodyPr wrap="square" lIns="0" tIns="0" rIns="0" bIns="0" rtlCol="0" anchor="ctr"/>
+          <a:lstStyle/>
+          <a:p>
+            <a:pPr algn="ctr" indent="0" marL="0">
+              <a:buNone/>
+            </a:pPr>
+            <a:r>
+              <a:rPr lang="en-US" sz="900" b="1" dirty="0">
+                <a:solidFill>
+                  <a:srgbClr val="FFFFFF"/>
+                </a:solidFill>
+                <a:latin typeface="Arial" pitchFamily="34" charset="0"/>
+                <a:ea typeface="Arial" pitchFamily="34" charset="-122"/>
+                <a:cs typeface="Arial" pitchFamily="34" charset="-120"/>
+              </a:rPr>
+              <a:t>7</a:t>
+            </a:r>
+            <a:endParaRPr lang="en-US" sz="900" dirty="0"/>
+          </a:p>
+        </p:txBody>
+      </p:sp>
+      <p:sp>
+        <p:nvSpPr>
+          <p:cNvPr id="39" name="Text 35"/>
+          <p:cNvSpPr txBox="1"/>
+          <p:nvPr/>
+        </p:nvSpPr>
+        <p:spPr>
+          <a:xfrm>
+            <a:off x="6035040" y="1764792"/>
+            <a:ext cx="2606040" cy="201168"/>
+          </a:xfrm>
+          <a:prstGeom prst="rect">
+            <a:avLst/>
+          </a:prstGeom>
+          <a:noFill/>
+          <a:ln/>
+        </p:spPr>
+        <p:txBody>
+          <a:bodyPr wrap="square" lIns="0" tIns="0" rIns="0" bIns="0" rtlCol="0" anchor="t"/>
+          <a:lstStyle/>
+          <a:p>
+            <a:pPr indent="0" marL="0">
+              <a:buNone/>
+            </a:pPr>
+            <a:r>
+              <a:rPr lang="en-US" sz="850" b="1" dirty="0">
+                <a:solidFill>
+                  <a:srgbClr val="1E2B37"/>
+                </a:solidFill>
+                <a:latin typeface="Arial" pitchFamily="34" charset="0"/>
+                <a:ea typeface="Arial" pitchFamily="34" charset="-122"/>
+                <a:cs typeface="Arial" pitchFamily="34" charset="-120"/>
+              </a:rPr>
+              <a:t>Verificación proporcional al riesgo</a:t>
+            </a:r>
+            <a:endParaRPr lang="en-US" sz="850" dirty="0"/>
+          </a:p>
+        </p:txBody>
+      </p:sp>
+      <p:sp>
+        <p:nvSpPr>
+          <p:cNvPr id="40" name="Text 36"/>
+          <p:cNvSpPr txBox="1"/>
+          <p:nvPr/>
+        </p:nvSpPr>
+        <p:spPr>
+          <a:xfrm>
+            <a:off x="6035040" y="1965960"/>
+            <a:ext cx="2606040" cy="457200"/>
+          </a:xfrm>
+          <a:prstGeom prst="rect">
+            <a:avLst/>
+          </a:prstGeom>
+          <a:noFill/>
+          <a:ln/>
+        </p:spPr>
+        <p:txBody>
+          <a:bodyPr wrap="square" lIns="0" tIns="0" rIns="0" bIns="0" rtlCol="0" anchor="t"/>
+          <a:lstStyle/>
+          <a:p>
+            <a:pPr indent="0" marL="0">
+              <a:buNone/>
+            </a:pPr>
+            <a:r>
+              <a:rPr lang="en-US" sz="750" dirty="0">
+                <a:solidFill>
+                  <a:srgbClr val="3D4A56"/>
+                </a:solidFill>
+                <a:latin typeface="Arial" pitchFamily="34" charset="0"/>
+                <a:ea typeface="Arial" pitchFamily="34" charset="-122"/>
+                <a:cs typeface="Arial" pitchFamily="34" charset="-120"/>
+              </a:rPr>
+              <a:t>TLC y Lean con modelos pequeños; gate estricto solo en el núcleo</a:t>
+            </a:r>
+            <a:endParaRPr lang="en-US" sz="750" dirty="0"/>
+          </a:p>
+        </p:txBody>
+      </p:sp>
+      <p:sp>
+        <p:nvSpPr>
+          <p:cNvPr id="41" name="Shape 37"/>
+          <p:cNvSpPr/>
+          <p:nvPr/>
+        </p:nvSpPr>
+        <p:spPr>
+          <a:xfrm>
+            <a:off x="5669280" y="2468880"/>
+            <a:ext cx="274320" cy="274320"/>
+          </a:xfrm>
+          <a:prstGeom prst="roundRect">
+            <a:avLst>
+              <a:gd name="adj" fmla="val 26667"/>
+            </a:avLst>
+          </a:prstGeom>
+          <a:solidFill>
+            <a:srgbClr val="1E2B37"/>
+          </a:solidFill>
+          <a:ln/>
+        </p:spPr>
+      </p:sp>
+      <p:sp>
+        <p:nvSpPr>
+          <p:cNvPr id="42" name="Text 38"/>
+          <p:cNvSpPr txBox="1"/>
+          <p:nvPr/>
+        </p:nvSpPr>
+        <p:spPr>
+          <a:xfrm>
+            <a:off x="5669280" y="2468880"/>
+            <a:ext cx="274320" cy="274320"/>
+          </a:xfrm>
+          <a:prstGeom prst="rect">
+            <a:avLst/>
+          </a:prstGeom>
+          <a:noFill/>
+          <a:ln/>
+        </p:spPr>
+        <p:txBody>
+          <a:bodyPr wrap="square" lIns="0" tIns="0" rIns="0" bIns="0" rtlCol="0" anchor="ctr"/>
+          <a:lstStyle/>
+          <a:p>
+            <a:pPr algn="ctr" indent="0" marL="0">
+              <a:buNone/>
+            </a:pPr>
+            <a:r>
+              <a:rPr lang="en-US" sz="900" b="1" dirty="0">
+                <a:solidFill>
+                  <a:srgbClr val="FFFFFF"/>
+                </a:solidFill>
+                <a:latin typeface="Arial" pitchFamily="34" charset="0"/>
+                <a:ea typeface="Arial" pitchFamily="34" charset="-122"/>
+                <a:cs typeface="Arial" pitchFamily="34" charset="-120"/>
+              </a:rPr>
+              <a:t>8</a:t>
+            </a:r>
+            <a:endParaRPr lang="en-US" sz="900" dirty="0"/>
+          </a:p>
+        </p:txBody>
+      </p:sp>
+      <p:sp>
+        <p:nvSpPr>
+          <p:cNvPr id="43" name="Text 39"/>
+          <p:cNvSpPr txBox="1"/>
+          <p:nvPr/>
+        </p:nvSpPr>
+        <p:spPr>
+          <a:xfrm>
+            <a:off x="6035040" y="2450592"/>
+            <a:ext cx="2606040" cy="201168"/>
+          </a:xfrm>
+          <a:prstGeom prst="rect">
+            <a:avLst/>
+          </a:prstGeom>
+          <a:noFill/>
+          <a:ln/>
+        </p:spPr>
+        <p:txBody>
+          <a:bodyPr wrap="square" lIns="0" tIns="0" rIns="0" bIns="0" rtlCol="0" anchor="t"/>
+          <a:lstStyle/>
+          <a:p>
+            <a:pPr indent="0" marL="0">
+              <a:buNone/>
+            </a:pPr>
+            <a:r>
+              <a:rPr lang="en-US" sz="850" b="1" dirty="0">
+                <a:solidFill>
+                  <a:srgbClr val="1E2B37"/>
+                </a:solidFill>
+                <a:latin typeface="Arial" pitchFamily="34" charset="0"/>
+                <a:ea typeface="Arial" pitchFamily="34" charset="-122"/>
+                <a:cs typeface="Arial" pitchFamily="34" charset="-120"/>
+              </a:rPr>
+              <a:t>Reutilizar</a:t>
+            </a:r>
+            <a:endParaRPr lang="en-US" sz="850" dirty="0"/>
+          </a:p>
+        </p:txBody>
+      </p:sp>
+      <p:sp>
+        <p:nvSpPr>
+          <p:cNvPr id="44" name="Text 40"/>
+          <p:cNvSpPr txBox="1"/>
+          <p:nvPr/>
+        </p:nvSpPr>
+        <p:spPr>
+          <a:xfrm>
+            <a:off x="6035040" y="2651760"/>
+            <a:ext cx="2606040" cy="457200"/>
+          </a:xfrm>
+          <a:prstGeom prst="rect">
+            <a:avLst/>
+          </a:prstGeom>
+          <a:noFill/>
+          <a:ln/>
+        </p:spPr>
+        <p:txBody>
+          <a:bodyPr wrap="square" lIns="0" tIns="0" rIns="0" bIns="0" rtlCol="0" anchor="t"/>
+          <a:lstStyle/>
+          <a:p>
+            <a:pPr indent="0" marL="0">
+              <a:buNone/>
+            </a:pPr>
+            <a:r>
+              <a:rPr lang="en-US" sz="750" dirty="0">
+                <a:solidFill>
+                  <a:srgbClr val="3D4A56"/>
+                </a:solidFill>
+                <a:latin typeface="Arial" pitchFamily="34" charset="0"/>
+                <a:ea typeface="Arial" pitchFamily="34" charset="-122"/>
+                <a:cs typeface="Arial" pitchFamily="34" charset="-120"/>
+              </a:rPr>
+              <a:t>Langfuse, FastMCP, Playwright MCP, reportlab; llevar hooks, skills y el runner de evals a MyFactory</a:t>
+            </a:r>
+            <a:endParaRPr lang="en-US" sz="750" dirty="0"/>
+          </a:p>
+        </p:txBody>
+      </p:sp>
+      <p:sp>
+        <p:nvSpPr>
+          <p:cNvPr id="45" name="Shape 41"/>
+          <p:cNvSpPr/>
+          <p:nvPr/>
+        </p:nvSpPr>
+        <p:spPr>
+          <a:xfrm>
+            <a:off x="5669280" y="3154680"/>
+            <a:ext cx="274320" cy="274320"/>
+          </a:xfrm>
+          <a:prstGeom prst="roundRect">
+            <a:avLst>
+              <a:gd name="adj" fmla="val 26667"/>
+            </a:avLst>
+          </a:prstGeom>
+          <a:solidFill>
+            <a:srgbClr val="1E2B37"/>
+          </a:solidFill>
+          <a:ln/>
+        </p:spPr>
+      </p:sp>
+      <p:sp>
+        <p:nvSpPr>
+          <p:cNvPr id="46" name="Text 42"/>
+          <p:cNvSpPr txBox="1"/>
+          <p:nvPr/>
+        </p:nvSpPr>
+        <p:spPr>
+          <a:xfrm>
+            <a:off x="5669280" y="3154680"/>
+            <a:ext cx="274320" cy="274320"/>
+          </a:xfrm>
+          <a:prstGeom prst="rect">
+            <a:avLst/>
+          </a:prstGeom>
+          <a:noFill/>
+          <a:ln/>
+        </p:spPr>
+        <p:txBody>
+          <a:bodyPr wrap="square" lIns="0" tIns="0" rIns="0" bIns="0" rtlCol="0" anchor="ctr"/>
+          <a:lstStyle/>
+          <a:p>
+            <a:pPr algn="ctr" indent="0" marL="0">
+              <a:buNone/>
+            </a:pPr>
+            <a:r>
+              <a:rPr lang="en-US" sz="900" b="1" dirty="0">
+                <a:solidFill>
+                  <a:srgbClr val="FFFFFF"/>
+                </a:solidFill>
+                <a:latin typeface="Arial" pitchFamily="34" charset="0"/>
+                <a:ea typeface="Arial" pitchFamily="34" charset="-122"/>
+                <a:cs typeface="Arial" pitchFamily="34" charset="-120"/>
+              </a:rPr>
+              <a:t>9</a:t>
+            </a:r>
+            <a:endParaRPr lang="en-US" sz="900" dirty="0"/>
+          </a:p>
+        </p:txBody>
+      </p:sp>
+      <p:sp>
+        <p:nvSpPr>
+          <p:cNvPr id="47" name="Text 43"/>
+          <p:cNvSpPr txBox="1"/>
+          <p:nvPr/>
+        </p:nvSpPr>
+        <p:spPr>
+          <a:xfrm>
+            <a:off x="6035040" y="3136392"/>
+            <a:ext cx="2606040" cy="201168"/>
+          </a:xfrm>
+          <a:prstGeom prst="rect">
+            <a:avLst/>
+          </a:prstGeom>
+          <a:noFill/>
+          <a:ln/>
+        </p:spPr>
+        <p:txBody>
+          <a:bodyPr wrap="square" lIns="0" tIns="0" rIns="0" bIns="0" rtlCol="0" anchor="t"/>
+          <a:lstStyle/>
+          <a:p>
+            <a:pPr indent="0" marL="0">
+              <a:buNone/>
+            </a:pPr>
+            <a:r>
+              <a:rPr lang="en-US" sz="850" b="1" dirty="0">
+                <a:solidFill>
+                  <a:srgbClr val="1E2B37"/>
+                </a:solidFill>
+                <a:latin typeface="Arial" pitchFamily="34" charset="0"/>
+                <a:ea typeface="Arial" pitchFamily="34" charset="-122"/>
+                <a:cs typeface="Arial" pitchFamily="34" charset="-120"/>
+              </a:rPr>
+              <a:t>Observabilidad desde el día 1</a:t>
+            </a:r>
+            <a:endParaRPr lang="en-US" sz="850" dirty="0"/>
+          </a:p>
+        </p:txBody>
+      </p:sp>
+      <p:sp>
+        <p:nvSpPr>
+          <p:cNvPr id="48" name="Text 44"/>
+          <p:cNvSpPr txBox="1"/>
+          <p:nvPr/>
+        </p:nvSpPr>
+        <p:spPr>
+          <a:xfrm>
+            <a:off x="6035040" y="3337560"/>
+            <a:ext cx="2606040" cy="457200"/>
+          </a:xfrm>
+          <a:prstGeom prst="rect">
+            <a:avLst/>
+          </a:prstGeom>
+          <a:noFill/>
+          <a:ln/>
+        </p:spPr>
+        <p:txBody>
+          <a:bodyPr wrap="square" lIns="0" tIns="0" rIns="0" bIns="0" rtlCol="0" anchor="t"/>
+          <a:lstStyle/>
+          <a:p>
+            <a:pPr indent="0" marL="0">
+              <a:buNone/>
+            </a:pPr>
+            <a:r>
+              <a:rPr lang="en-US" sz="750" dirty="0">
+                <a:solidFill>
+                  <a:srgbClr val="3D4A56"/>
+                </a:solidFill>
+                <a:latin typeface="Arial" pitchFamily="34" charset="0"/>
+                <a:ea typeface="Arial" pitchFamily="34" charset="-122"/>
+                <a:cs typeface="Arial" pitchFamily="34" charset="-120"/>
+              </a:rPr>
+              <a:t>coste por llamada y por rol: se optimiza donde está el gasto (writer y editor)</a:t>
             </a:r>
             <a:endParaRPr lang="en-US" sz="750" dirty="0"/>
           </a:p>

--- a/presentacion/presentacion-2.pptx
+++ b/presentacion/presentacion-2.pptx
@@ -2765,162 +2765,6 @@
                 <a:ea typeface="Arial" pitchFamily="34" charset="-122"/>
                 <a:cs typeface="Arial" pitchFamily="34" charset="-120"/>
               </a:rPr>
-              <a:t>CLIENTE</a:t>
-            </a:r>
-            <a:endParaRPr lang="en-US" sz="850" dirty="0"/>
-          </a:p>
-        </p:txBody>
-      </p:sp>
-      <p:sp>
-        <p:nvSpPr>
-          <p:cNvPr id="7" name="Text 4"/>
-          <p:cNvSpPr txBox="1"/>
-          <p:nvPr/>
-        </p:nvSpPr>
-        <p:spPr>
-          <a:xfrm>
-            <a:off x="1508760" y="3017520"/>
-            <a:ext cx="4206240" cy="274320"/>
-          </a:xfrm>
-          <a:prstGeom prst="rect">
-            <a:avLst/>
-          </a:prstGeom>
-          <a:noFill/>
-          <a:ln/>
-        </p:spPr>
-        <p:txBody>
-          <a:bodyPr wrap="square" lIns="0" tIns="0" rIns="0" bIns="0" rtlCol="0" anchor="ctr"/>
-          <a:lstStyle/>
-          <a:p>
-            <a:pPr indent="0" marL="0">
-              <a:buNone/>
-            </a:pPr>
-            <a:r>
-              <a:rPr lang="en-US" sz="1150" dirty="0">
-                <a:solidFill>
-                  <a:srgbClr val="FFFFFF"/>
-                </a:solidFill>
-                <a:latin typeface="Arial" pitchFamily="34" charset="0"/>
-                <a:ea typeface="Arial" pitchFamily="34" charset="-122"/>
-                <a:cs typeface="Arial" pitchFamily="34" charset="-120"/>
-              </a:rPr>
-              <a:t>Cuentalia Regalos, S.L.</a:t>
-            </a:r>
-            <a:endParaRPr lang="en-US" sz="1150" dirty="0"/>
-          </a:p>
-        </p:txBody>
-      </p:sp>
-      <p:sp>
-        <p:nvSpPr>
-          <p:cNvPr id="8" name="Text 5"/>
-          <p:cNvSpPr txBox="1"/>
-          <p:nvPr/>
-        </p:nvSpPr>
-        <p:spPr>
-          <a:xfrm>
-            <a:off x="457200" y="3364992"/>
-            <a:ext cx="1005840" cy="274320"/>
-          </a:xfrm>
-          <a:prstGeom prst="rect">
-            <a:avLst/>
-          </a:prstGeom>
-          <a:noFill/>
-          <a:ln/>
-        </p:spPr>
-        <p:txBody>
-          <a:bodyPr wrap="square" lIns="0" tIns="0" rIns="0" bIns="0" rtlCol="0" anchor="ctr"/>
-          <a:lstStyle/>
-          <a:p>
-            <a:pPr indent="0" marL="0">
-              <a:buNone/>
-            </a:pPr>
-            <a:r>
-              <a:rPr lang="en-US" sz="850" b="1" spc="100" kern="0" dirty="0">
-                <a:solidFill>
-                  <a:srgbClr val="FF7A2F"/>
-                </a:solidFill>
-                <a:latin typeface="Arial" pitchFamily="34" charset="0"/>
-                <a:ea typeface="Arial" pitchFamily="34" charset="-122"/>
-                <a:cs typeface="Arial" pitchFamily="34" charset="-120"/>
-              </a:rPr>
-              <a:t>OCASIÓN</a:t>
-            </a:r>
-            <a:endParaRPr lang="en-US" sz="850" dirty="0"/>
-          </a:p>
-        </p:txBody>
-      </p:sp>
-      <p:sp>
-        <p:nvSpPr>
-          <p:cNvPr id="9" name="Text 6"/>
-          <p:cNvSpPr txBox="1"/>
-          <p:nvPr/>
-        </p:nvSpPr>
-        <p:spPr>
-          <a:xfrm>
-            <a:off x="1508760" y="3364992"/>
-            <a:ext cx="4206240" cy="274320"/>
-          </a:xfrm>
-          <a:prstGeom prst="rect">
-            <a:avLst/>
-          </a:prstGeom>
-          <a:noFill/>
-          <a:ln/>
-        </p:spPr>
-        <p:txBody>
-          <a:bodyPr wrap="square" lIns="0" tIns="0" rIns="0" bIns="0" rtlCol="0" anchor="ctr"/>
-          <a:lstStyle/>
-          <a:p>
-            <a:pPr indent="0" marL="0">
-              <a:buNone/>
-            </a:pPr>
-            <a:r>
-              <a:rPr lang="en-US" sz="1150" dirty="0">
-                <a:solidFill>
-                  <a:srgbClr val="FFFFFF"/>
-                </a:solidFill>
-                <a:latin typeface="Arial" pitchFamily="34" charset="0"/>
-                <a:ea typeface="Arial" pitchFamily="34" charset="-122"/>
-                <a:cs typeface="Arial" pitchFamily="34" charset="-120"/>
-              </a:rPr>
-              <a:t>Catálogo de Navidad 2026: la novela-regalo personalizada</a:t>
-            </a:r>
-            <a:endParaRPr lang="en-US" sz="1150" dirty="0"/>
-          </a:p>
-        </p:txBody>
-      </p:sp>
-      <p:sp>
-        <p:nvSpPr>
-          <p:cNvPr id="10" name="Text 7"/>
-          <p:cNvSpPr txBox="1"/>
-          <p:nvPr/>
-        </p:nvSpPr>
-        <p:spPr>
-          <a:xfrm>
-            <a:off x="457200" y="3712464"/>
-            <a:ext cx="1005840" cy="274320"/>
-          </a:xfrm>
-          <a:prstGeom prst="rect">
-            <a:avLst/>
-          </a:prstGeom>
-          <a:noFill/>
-          <a:ln/>
-        </p:spPr>
-        <p:txBody>
-          <a:bodyPr wrap="square" lIns="0" tIns="0" rIns="0" bIns="0" rtlCol="0" anchor="ctr"/>
-          <a:lstStyle/>
-          <a:p>
-            <a:pPr indent="0" marL="0">
-              <a:buNone/>
-            </a:pPr>
-            <a:r>
-              <a:rPr lang="en-US" sz="850" b="1" spc="100" kern="0" dirty="0">
-                <a:solidFill>
-                  <a:srgbClr val="FF7A2F"/>
-                </a:solidFill>
-                <a:latin typeface="Arial" pitchFamily="34" charset="0"/>
-                <a:ea typeface="Arial" pitchFamily="34" charset="-122"/>
-                <a:cs typeface="Arial" pitchFamily="34" charset="-120"/>
-              </a:rPr>
               <a:t>FECHA</a:t>
             </a:r>
             <a:endParaRPr lang="en-US" sz="850" dirty="0"/>
@@ -2929,13 +2773,13 @@
       </p:sp>
       <p:sp>
         <p:nvSpPr>
-          <p:cNvPr id="11" name="Text 8"/>
+          <p:cNvPr id="7" name="Text 4"/>
           <p:cNvSpPr txBox="1"/>
           <p:nvPr/>
         </p:nvSpPr>
         <p:spPr>
           <a:xfrm>
-            <a:off x="1508760" y="3712464"/>
+            <a:off x="1508760" y="3017520"/>
             <a:ext cx="4206240" cy="274320"/>
           </a:xfrm>
           <a:prstGeom prst="rect">
@@ -2968,85 +2812,7 @@
       </p:sp>
       <p:sp>
         <p:nvSpPr>
-          <p:cNvPr id="12" name="Text 9"/>
-          <p:cNvSpPr txBox="1"/>
-          <p:nvPr/>
-        </p:nvSpPr>
-        <p:spPr>
-          <a:xfrm>
-            <a:off x="457200" y="4059936"/>
-            <a:ext cx="1005840" cy="274320"/>
-          </a:xfrm>
-          <a:prstGeom prst="rect">
-            <a:avLst/>
-          </a:prstGeom>
-          <a:noFill/>
-          <a:ln/>
-        </p:spPr>
-        <p:txBody>
-          <a:bodyPr wrap="square" lIns="0" tIns="0" rIns="0" bIns="0" rtlCol="0" anchor="ctr"/>
-          <a:lstStyle/>
-          <a:p>
-            <a:pPr indent="0" marL="0">
-              <a:buNone/>
-            </a:pPr>
-            <a:r>
-              <a:rPr lang="en-US" sz="850" b="1" spc="100" kern="0" dirty="0">
-                <a:solidFill>
-                  <a:srgbClr val="FF7A2F"/>
-                </a:solidFill>
-                <a:latin typeface="Arial" pitchFamily="34" charset="0"/>
-                <a:ea typeface="Arial" pitchFamily="34" charset="-122"/>
-                <a:cs typeface="Arial" pitchFamily="34" charset="-120"/>
-              </a:rPr>
-              <a:t>PRESENTA</a:t>
-            </a:r>
-            <a:endParaRPr lang="en-US" sz="850" dirty="0"/>
-          </a:p>
-        </p:txBody>
-      </p:sp>
-      <p:sp>
-        <p:nvSpPr>
-          <p:cNvPr id="13" name="Text 10"/>
-          <p:cNvSpPr txBox="1"/>
-          <p:nvPr/>
-        </p:nvSpPr>
-        <p:spPr>
-          <a:xfrm>
-            <a:off x="1508760" y="4059936"/>
-            <a:ext cx="4206240" cy="274320"/>
-          </a:xfrm>
-          <a:prstGeom prst="rect">
-            <a:avLst/>
-          </a:prstGeom>
-          <a:noFill/>
-          <a:ln/>
-        </p:spPr>
-        <p:txBody>
-          <a:bodyPr wrap="square" lIns="0" tIns="0" rIns="0" bIns="0" rtlCol="0" anchor="ctr"/>
-          <a:lstStyle/>
-          <a:p>
-            <a:pPr indent="0" marL="0">
-              <a:buNone/>
-            </a:pPr>
-            <a:r>
-              <a:rPr lang="en-US" sz="1150" dirty="0">
-                <a:solidFill>
-                  <a:srgbClr val="FFFFFF"/>
-                </a:solidFill>
-                <a:latin typeface="Arial" pitchFamily="34" charset="0"/>
-                <a:ea typeface="Arial" pitchFamily="34" charset="-122"/>
-                <a:cs typeface="Arial" pitchFamily="34" charset="-120"/>
-              </a:rPr>
-              <a:t>[NOMBRE_ESTUDIANTE]</a:t>
-            </a:r>
-            <a:endParaRPr lang="en-US" sz="1150" dirty="0"/>
-          </a:p>
-        </p:txBody>
-      </p:sp>
-      <p:sp>
-        <p:nvSpPr>
-          <p:cNvPr id="14" name="Shape 11"/>
+          <p:cNvPr id="8" name="Shape 5"/>
           <p:cNvSpPr/>
           <p:nvPr/>
         </p:nvSpPr>
@@ -3068,7 +2834,7 @@
       </p:sp>
       <p:pic>
         <p:nvPicPr>
-          <p:cNvPr id="15" name="Image 1" descr="/home/user/My-Story-Marker/presentacion/build/img2/crops/portada.png">    </p:cNvPr>
+          <p:cNvPr id="9" name="Image 1" descr="/home/user/My-Story-Marker/presentacion/build/img2/crops/portada.png">    </p:cNvPr>
           <p:cNvPicPr>
             <a:picLocks noChangeAspect="1"/>
           </p:cNvPicPr>
@@ -3092,7 +2858,7 @@
       </p:pic>
       <p:sp>
         <p:nvSpPr>
-          <p:cNvPr id="16" name="Text 12"/>
+          <p:cNvPr id="10" name="Text 6"/>
           <p:cNvSpPr txBox="1"/>
           <p:nvPr/>
         </p:nvSpPr>

--- a/presentacion/presentacion-2.pptx
+++ b/presentacion/presentacion-2.pptx
@@ -20,11 +20,9 @@
     <p:sldId id="268" r:id="rId14"/>
     <p:sldId id="269" r:id="rId15"/>
     <p:sldId id="270" r:id="rId16"/>
-    <p:sldId id="271" r:id="rId17"/>
-    <p:sldId id="272" r:id="rId18"/>
   </p:sldIdLst>
   <p:notesMasterIdLst>
-    <p:notesMasterId r:id="rId19"/>
+    <p:notesMasterId r:id="rId17"/>
   </p:notesMasterIdLst>
   <p:sldSz cx="9144000" cy="5143500"/>
   <p:notesSz cx="5143500" cy="9144000"/>
@@ -1323,7 +1321,7 @@
             <a:r>
               <a:rPr lang="en-US" dirty="0"/>
               <a:t>[9:30–10:00] Si me tengo que quedar con una decisión: separar la verdad de la prosa. Lo que es cierto sobre la historia vive en una base de datos y lo comprueban validadores deterministas, Lean y TLA+; los modelos solo redactan, y solo se publica lo que pasa todo.
-Muchas gracias. En el anexo está la tabla completa de evals, y el resto del detalle en los anexos PDF; encantado de responder preguntas.</a:t>
+Muchas gracias. El detalle está en los anexos PDF; encantado de responder preguntas.</a:t>
             </a:r>
             <a:endParaRPr lang="en-US" dirty="0"/>
           </a:p>
@@ -1347,182 +1345,6 @@
             <a:fld id="{F7021451-1387-4CA6-816F-3879F97B5CBC}" type="slidenum">
               <a:rPr lang="en-US"/>
               <a:t>15</a:t>
-            </a:fld>
-            <a:endParaRPr lang="en-US"/>
-          </a:p>
-        </p:txBody>
-      </p:sp>
-    </p:spTree>
-    <p:extLst>
-      <p:ext uri="{BB962C8B-B14F-4D97-AF65-F5344CB8AC3E}">
-        <p14:creationId xmlns:p14="http://schemas.microsoft.com/office/powerpoint/2010/main" val="1024086991"/>
-      </p:ext>
-    </p:extLst>
-  </p:cSld>
-  <p:clrMapOvr>
-    <a:masterClrMapping/>
-  </p:clrMapOvr>
-</p:notes>
-</file>
-
-<file path=ppt/notesSlides/notesSlide16.xml><?xml version="1.0" encoding="utf-8"?>
-<p:notes xmlns:a="http://schemas.openxmlformats.org/drawingml/2006/main" xmlns:r="http://schemas.openxmlformats.org/officeDocument/2006/relationships" xmlns:p="http://schemas.openxmlformats.org/presentationml/2006/main">
-  <p:cSld>
-    <p:spTree>
-      <p:nvGrpSpPr>
-        <p:cNvPr id="1" name=""/>
-        <p:cNvGrpSpPr/>
-        <p:nvPr/>
-      </p:nvGrpSpPr>
-      <p:grpSpPr>
-        <a:xfrm>
-          <a:off x="0" y="0"/>
-          <a:ext cx="0" cy="0"/>
-          <a:chOff x="0" y="0"/>
-          <a:chExt cx="0" cy="0"/>
-        </a:xfrm>
-      </p:grpSpPr>
-      <p:sp>
-        <p:nvSpPr>
-          <p:cNvPr id="2" name="Slide Image Placeholder 1"/>
-          <p:cNvSpPr>
-            <a:spLocks noGrp="1" noRot="1" noChangeAspect="1"/>
-          </p:cNvSpPr>
-          <p:nvPr>
-            <p:ph type="sldImg"/>
-          </p:nvPr>
-        </p:nvSpPr>
-        <p:spPr/>
-      </p:sp>
-      <p:sp>
-        <p:nvSpPr>
-          <p:cNvPr id="3" name="Notes Placeholder 2"/>
-          <p:cNvSpPr>
-            <a:spLocks noGrp="1"/>
-          </p:cNvSpPr>
-          <p:nvPr>
-            <p:ph type="body" idx="1"/>
-          </p:nvPr>
-        </p:nvSpPr>
-        <p:spPr/>
-        <p:txBody>
-          <a:bodyPr/>
-          <a:lstStyle/>
-          <a:p>
-            <a:r>
-              <a:rPr lang="en-US" dirty="0"/>
-              <a:t>Anexo: la tabla completa de evals.</a:t>
-            </a:r>
-            <a:endParaRPr lang="en-US" dirty="0"/>
-          </a:p>
-        </p:txBody>
-      </p:sp>
-      <p:sp>
-        <p:nvSpPr>
-          <p:cNvPr id="4" name="Slide Number Placeholder 3"/>
-          <p:cNvSpPr>
-            <a:spLocks noGrp="1"/>
-          </p:cNvSpPr>
-          <p:nvPr>
-            <p:ph type="sldNum" sz="quarter" idx="10"/>
-          </p:nvPr>
-        </p:nvSpPr>
-        <p:spPr/>
-        <p:txBody>
-          <a:bodyPr/>
-          <a:lstStyle/>
-          <a:p>
-            <a:fld id="{F7021451-1387-4CA6-816F-3879F97B5CBC}" type="slidenum">
-              <a:rPr lang="en-US"/>
-              <a:t>16</a:t>
-            </a:fld>
-            <a:endParaRPr lang="en-US"/>
-          </a:p>
-        </p:txBody>
-      </p:sp>
-    </p:spTree>
-    <p:extLst>
-      <p:ext uri="{BB962C8B-B14F-4D97-AF65-F5344CB8AC3E}">
-        <p14:creationId xmlns:p14="http://schemas.microsoft.com/office/powerpoint/2010/main" val="1024086991"/>
-      </p:ext>
-    </p:extLst>
-  </p:cSld>
-  <p:clrMapOvr>
-    <a:masterClrMapping/>
-  </p:clrMapOvr>
-</p:notes>
-</file>
-
-<file path=ppt/notesSlides/notesSlide17.xml><?xml version="1.0" encoding="utf-8"?>
-<p:notes xmlns:a="http://schemas.openxmlformats.org/drawingml/2006/main" xmlns:r="http://schemas.openxmlformats.org/officeDocument/2006/relationships" xmlns:p="http://schemas.openxmlformats.org/presentationml/2006/main">
-  <p:cSld>
-    <p:spTree>
-      <p:nvGrpSpPr>
-        <p:cNvPr id="1" name=""/>
-        <p:cNvGrpSpPr/>
-        <p:nvPr/>
-      </p:nvGrpSpPr>
-      <p:grpSpPr>
-        <a:xfrm>
-          <a:off x="0" y="0"/>
-          <a:ext cx="0" cy="0"/>
-          <a:chOff x="0" y="0"/>
-          <a:chExt cx="0" cy="0"/>
-        </a:xfrm>
-      </p:grpSpPr>
-      <p:sp>
-        <p:nvSpPr>
-          <p:cNvPr id="2" name="Slide Image Placeholder 1"/>
-          <p:cNvSpPr>
-            <a:spLocks noGrp="1" noRot="1" noChangeAspect="1"/>
-          </p:cNvSpPr>
-          <p:nvPr>
-            <p:ph type="sldImg"/>
-          </p:nvPr>
-        </p:nvSpPr>
-        <p:spPr/>
-      </p:sp>
-      <p:sp>
-        <p:nvSpPr>
-          <p:cNvPr id="3" name="Notes Placeholder 2"/>
-          <p:cNvSpPr>
-            <a:spLocks noGrp="1"/>
-          </p:cNvSpPr>
-          <p:nvPr>
-            <p:ph type="body" idx="1"/>
-          </p:nvPr>
-        </p:nvSpPr>
-        <p:spPr/>
-        <p:txBody>
-          <a:bodyPr/>
-          <a:lstStyle/>
-          <a:p>
-            <a:r>
-              <a:rPr lang="en-US" dirty="0"/>
-              <a:t>Anexo: cómo reducir el coste de desarrollo. Datos reales: 27 USD de modelo, más de la mitad en intentos bloqueados de 10 capítulos que se podían haber descubierto con 1–3 capítulos. La idea: fijar la spec antes del código, iterar en pequeño y mover a código determinista todo lo que el modelo no tiene por qué decidir.</a:t>
-            </a:r>
-            <a:endParaRPr lang="en-US" dirty="0"/>
-          </a:p>
-        </p:txBody>
-      </p:sp>
-      <p:sp>
-        <p:nvSpPr>
-          <p:cNvPr id="4" name="Slide Number Placeholder 3"/>
-          <p:cNvSpPr>
-            <a:spLocks noGrp="1"/>
-          </p:cNvSpPr>
-          <p:nvPr>
-            <p:ph type="sldNum" sz="quarter" idx="10"/>
-          </p:nvPr>
-        </p:nvSpPr>
-        <p:spPr/>
-        <p:txBody>
-          <a:bodyPr/>
-          <a:lstStyle/>
-          <a:p>
-            <a:fld id="{F7021451-1387-4CA6-816F-3879F97B5CBC}" type="slidenum">
-              <a:rPr lang="en-US"/>
-              <a:t>17</a:t>
             </a:fld>
             <a:endParaRPr lang="en-US"/>
           </a:p>
@@ -14879,9136 +14701,6 @@
           </a:p>
         </p:txBody>
       </p:sp>
-      <p:sp>
-        <p:nvSpPr>
-          <p:cNvPr id="12" name="Text 8"/>
-          <p:cNvSpPr txBox="1"/>
-          <p:nvPr/>
-        </p:nvSpPr>
-        <p:spPr>
-          <a:xfrm>
-            <a:off x="5760720" y="4434840"/>
-            <a:ext cx="2926080" cy="228600"/>
-          </a:xfrm>
-          <a:prstGeom prst="rect">
-            <a:avLst/>
-          </a:prstGeom>
-          <a:noFill/>
-          <a:ln/>
-        </p:spPr>
-        <p:txBody>
-          <a:bodyPr wrap="square" lIns="0" tIns="0" rIns="0" bIns="0" rtlCol="0" anchor="t"/>
-          <a:lstStyle/>
-          <a:p>
-            <a:pPr algn="r" indent="0" marL="0">
-              <a:buNone/>
-            </a:pPr>
-            <a:r>
-              <a:rPr lang="en-US" sz="900" dirty="0">
-                <a:solidFill>
-                  <a:srgbClr val="AEB8C2"/>
-                </a:solidFill>
-                <a:latin typeface="Arial" pitchFamily="34" charset="0"/>
-                <a:ea typeface="Arial" pitchFamily="34" charset="-122"/>
-                <a:cs typeface="Arial" pitchFamily="34" charset="-120"/>
-              </a:rPr>
-              <a:t>Anexos: tabla completa de evals · coste de desarrollo</a:t>
-            </a:r>
-            <a:endParaRPr lang="en-US" sz="900" dirty="0"/>
-          </a:p>
-        </p:txBody>
-      </p:sp>
-    </p:spTree>
-  </p:cSld>
-  <p:clrMapOvr>
-    <a:masterClrMapping/>
-  </p:clrMapOvr>
-</p:sld>
-</file>
-
-<file path=ppt/slides/slide16.xml><?xml version="1.0" encoding="utf-8"?>
-<p:sld xmlns:a="http://schemas.openxmlformats.org/drawingml/2006/main" xmlns:r="http://schemas.openxmlformats.org/officeDocument/2006/relationships" xmlns:p="http://schemas.openxmlformats.org/presentationml/2006/main">
-  <p:cSld name="Slide 16">
-    <p:bg>
-      <p:bgPr>
-        <a:solidFill>
-          <a:srgbClr val="FFFFFF"/>
-        </a:solidFill>
-      </p:bgPr>
-    </p:bg>
-    <p:spTree>
-      <p:nvGrpSpPr>
-        <p:cNvPr id="1" name=""/>
-        <p:cNvGrpSpPr/>
-        <p:nvPr/>
-      </p:nvGrpSpPr>
-      <p:grpSpPr>
-        <a:xfrm>
-          <a:off x="0" y="0"/>
-          <a:ext cx="0" cy="0"/>
-          <a:chOff x="0" y="0"/>
-          <a:chExt cx="0" cy="0"/>
-        </a:xfrm>
-      </p:grpSpPr>
-      <p:pic>
-        <p:nvPicPr>
-          <p:cNvPr id="2" name="Image 0" descr="/home/user/My-Story-Marker/presentacion/build/img2/mark.png">    </p:cNvPr>
-          <p:cNvPicPr>
-            <a:picLocks noChangeAspect="1"/>
-          </p:cNvPicPr>
-          <p:nvPr/>
-        </p:nvPicPr>
-        <p:blipFill>
-          <a:blip r:embed="rId1"/>
-          <a:stretch>
-            <a:fillRect/>
-          </a:stretch>
-        </p:blipFill>
-        <p:spPr>
-          <a:xfrm>
-            <a:off x="457200" y="301752"/>
-            <a:ext cx="155448" cy="155448"/>
-          </a:xfrm>
-          <a:prstGeom prst="rect">
-            <a:avLst/>
-          </a:prstGeom>
-        </p:spPr>
-      </p:pic>
-      <p:sp>
-        <p:nvSpPr>
-          <p:cNvPr id="3" name="Text 0"/>
-          <p:cNvSpPr txBox="1"/>
-          <p:nvPr/>
-        </p:nvSpPr>
-        <p:spPr>
-          <a:xfrm>
-            <a:off x="694944" y="274320"/>
-            <a:ext cx="6400800" cy="219456"/>
-          </a:xfrm>
-          <a:prstGeom prst="rect">
-            <a:avLst/>
-          </a:prstGeom>
-          <a:noFill/>
-          <a:ln/>
-        </p:spPr>
-        <p:txBody>
-          <a:bodyPr wrap="square" lIns="0" tIns="0" rIns="0" bIns="0" rtlCol="0" anchor="t"/>
-          <a:lstStyle/>
-          <a:p>
-            <a:pPr indent="0" marL="0">
-              <a:buNone/>
-            </a:pPr>
-            <a:r>
-              <a:rPr lang="en-US" sz="950" b="1" spc="150" kern="0" dirty="0">
-                <a:solidFill>
-                  <a:srgbClr val="AE4E14"/>
-                </a:solidFill>
-                <a:latin typeface="Arial" pitchFamily="34" charset="0"/>
-                <a:ea typeface="Arial" pitchFamily="34" charset="-122"/>
-                <a:cs typeface="Arial" pitchFamily="34" charset="-120"/>
-              </a:rPr>
-              <a:t>ANEXO · EVALS</a:t>
-            </a:r>
-            <a:endParaRPr lang="en-US" sz="950" dirty="0"/>
-          </a:p>
-        </p:txBody>
-      </p:sp>
-      <p:sp>
-        <p:nvSpPr>
-          <p:cNvPr id="4" name="Text 1"/>
-          <p:cNvSpPr txBox="1"/>
-          <p:nvPr/>
-        </p:nvSpPr>
-        <p:spPr>
-          <a:xfrm>
-            <a:off x="457200" y="530352"/>
-            <a:ext cx="8229600" cy="502920"/>
-          </a:xfrm>
-          <a:prstGeom prst="rect">
-            <a:avLst/>
-          </a:prstGeom>
-          <a:noFill/>
-          <a:ln/>
-        </p:spPr>
-        <p:txBody>
-          <a:bodyPr wrap="square" lIns="0" tIns="0" rIns="0" bIns="0" rtlCol="0" anchor="ctr"/>
-          <a:lstStyle/>
-          <a:p>
-            <a:pPr indent="0" marL="0">
-              <a:buNone/>
-            </a:pPr>
-            <a:r>
-              <a:rPr lang="en-US" sz="2000" b="1" dirty="0">
-                <a:solidFill>
-                  <a:srgbClr val="1E2B37"/>
-                </a:solidFill>
-                <a:latin typeface="Arial" pitchFamily="34" charset="0"/>
-                <a:ea typeface="Arial" pitchFamily="34" charset="-122"/>
-                <a:cs typeface="Arial" pitchFamily="34" charset="-120"/>
-              </a:rPr>
-              <a:t>Tabla completa: validador × brief, antes y después del tuning 1</a:t>
-            </a:r>
-            <a:endParaRPr lang="en-US" sz="2000" dirty="0"/>
-          </a:p>
-        </p:txBody>
-      </p:sp>
-      <p:pic>
-        <p:nvPicPr>
-          <p:cNvPr id="5" name="Image 1" descr="/home/user/My-Story-Marker/presentacion/build/img2/logo.png">    </p:cNvPr>
-          <p:cNvPicPr>
-            <a:picLocks noChangeAspect="1"/>
-          </p:cNvPicPr>
-          <p:nvPr/>
-        </p:nvPicPr>
-        <p:blipFill>
-          <a:blip r:embed="rId2"/>
-          <a:stretch>
-            <a:fillRect/>
-          </a:stretch>
-        </p:blipFill>
-        <p:spPr>
-          <a:xfrm>
-            <a:off x="457200" y="4754880"/>
-            <a:ext cx="426720" cy="100584"/>
-          </a:xfrm>
-          <a:prstGeom prst="rect">
-            <a:avLst/>
-          </a:prstGeom>
-        </p:spPr>
-      </p:pic>
-      <p:sp>
-        <p:nvSpPr>
-          <p:cNvPr id="6" name="Text 2"/>
-          <p:cNvSpPr txBox="1"/>
-          <p:nvPr/>
-        </p:nvSpPr>
-        <p:spPr>
-          <a:xfrm>
-            <a:off x="1024128" y="4736592"/>
-            <a:ext cx="5486400" cy="146304"/>
-          </a:xfrm>
-          <a:prstGeom prst="rect">
-            <a:avLst/>
-          </a:prstGeom>
-          <a:noFill/>
-          <a:ln/>
-        </p:spPr>
-        <p:txBody>
-          <a:bodyPr wrap="square" lIns="0" tIns="0" rIns="0" bIns="0" rtlCol="0" anchor="ctr"/>
-          <a:lstStyle/>
-          <a:p>
-            <a:pPr indent="0" marL="0">
-              <a:buNone/>
-            </a:pPr>
-            <a:r>
-              <a:rPr lang="en-US" sz="750" dirty="0">
-                <a:solidFill>
-                  <a:srgbClr val="5E6A77"/>
-                </a:solidFill>
-                <a:latin typeface="Arial" pitchFamily="34" charset="0"/>
-                <a:ea typeface="Arial" pitchFamily="34" charset="-122"/>
-                <a:cs typeface="Arial" pitchFamily="34" charset="-120"/>
-              </a:rPr>
-              <a:t>My Story Marker · propuesta para Cuentalia · anexo</a:t>
-            </a:r>
-            <a:endParaRPr lang="en-US" sz="750" dirty="0"/>
-          </a:p>
-        </p:txBody>
-      </p:sp>
-      <p:sp>
-        <p:nvSpPr>
-          <p:cNvPr id="7" name="Text 3"/>
-          <p:cNvSpPr txBox="1"/>
-          <p:nvPr/>
-        </p:nvSpPr>
-        <p:spPr>
-          <a:xfrm>
-            <a:off x="8138160" y="4736592"/>
-            <a:ext cx="548640" cy="146304"/>
-          </a:xfrm>
-          <a:prstGeom prst="rect">
-            <a:avLst/>
-          </a:prstGeom>
-          <a:noFill/>
-          <a:ln/>
-        </p:spPr>
-        <p:txBody>
-          <a:bodyPr wrap="square" lIns="0" tIns="0" rIns="0" bIns="0" rtlCol="0" anchor="ctr"/>
-          <a:lstStyle/>
-          <a:p>
-            <a:pPr algn="r" indent="0" marL="0">
-              <a:buNone/>
-            </a:pPr>
-            <a:r>
-              <a:rPr lang="en-US" sz="750" dirty="0">
-                <a:solidFill>
-                  <a:srgbClr val="5E6A77"/>
-                </a:solidFill>
-                <a:latin typeface="Arial" pitchFamily="34" charset="0"/>
-                <a:ea typeface="Arial" pitchFamily="34" charset="-122"/>
-                <a:cs typeface="Arial" pitchFamily="34" charset="-120"/>
-              </a:rPr>
-              <a:t>16</a:t>
-            </a:r>
-            <a:endParaRPr lang="en-US" sz="750" dirty="0"/>
-          </a:p>
-        </p:txBody>
-      </p:sp>
-      <p:graphicFrame>
-        <p:nvGraphicFramePr>
-          <p:cNvPr id="17" name="Table 0"/>
-          <p:cNvGraphicFramePr>
-            <a:graphicFrameLocks noGrp="1"/>
-          </p:cNvGraphicFramePr>
-          <p:nvPr>
-            <p:extLst>
-              <p:ext uri="{D42A27DB-BD31-4B8C-83A1-F6EECF244321}">
-                <p14:modId xmlns:p14="http://schemas.microsoft.com/office/powerpoint/2010/main" val="1579011935"/>
-              </p:ext>
-            </p:extLst>
-          </p:nvPr>
-        </p:nvGraphicFramePr>
-        <p:xfrm>
-          <a:off x="457200" y="1143000"/>
-          <a:ext cx="8229600" cy="914400"/>
-        </p:xfrm>
-        <a:graphic>
-          <a:graphicData uri="http://schemas.openxmlformats.org/drawingml/2006/table">
-            <a:tbl>
-              <a:tblPr/>
-              <a:tblGrid>
-                <a:gridCol w="1920240"/>
-                <a:gridCol w="901337"/>
-                <a:gridCol w="901337"/>
-                <a:gridCol w="901337"/>
-                <a:gridCol w="901337"/>
-                <a:gridCol w="901337"/>
-                <a:gridCol w="901337"/>
-                <a:gridCol w="901337"/>
-              </a:tblGrid>
-              <a:tr h="237744">
-                <a:tc>
-                  <a:txBody>
-                    <a:bodyPr/>
-                    <a:lstStyle/>
-                    <a:p>
-                      <a:pPr indent="0" marL="0">
-                        <a:buNone/>
-                      </a:pPr>
-                      <a:r>
-                        <a:rPr lang="en-US" sz="750" b="1" dirty="0">
-                          <a:solidFill>
-                            <a:srgbClr val="FFFFFF"/>
-                          </a:solidFill>
-                          <a:latin typeface="Arial" pitchFamily="34" charset="0"/>
-                          <a:ea typeface="Arial" pitchFamily="34" charset="-122"/>
-                          <a:cs typeface="Arial" pitchFamily="34" charset="-120"/>
-                        </a:rPr>
-                        <a:t>Validador</a:t>
-                      </a:r>
-                      <a:endParaRPr lang="en-US" sz="750" dirty="0">
-                        <a:latin typeface="Arial" charset="0"/>
-                        <a:ea typeface="Arial" charset="0"/>
-                        <a:cs typeface="Arial" charset="0"/>
-                      </a:endParaRPr>
-                    </a:p>
-                  </a:txBody>
-                  <a:tcPr marL="45720" marR="45720" marT="45720" marB="45720" anchor="ctr">
-                    <a:lnL w="6350" cap="flat" cmpd="sng" algn="ctr">
-                      <a:solidFill>
-                        <a:srgbClr val="E6E9EC"/>
-                      </a:solidFill>
-                      <a:prstDash val="solid"/>
-                      <a:round/>
-                      <a:headEnd type="none" w="med" len="med"/>
-                      <a:tailEnd type="none" w="med" len="med"/>
-                    </a:lnL>
-                    <a:lnR w="6350" cap="flat" cmpd="sng" algn="ctr">
-                      <a:solidFill>
-                        <a:srgbClr val="E6E9EC"/>
-                      </a:solidFill>
-                      <a:prstDash val="solid"/>
-                      <a:round/>
-                      <a:headEnd type="none" w="med" len="med"/>
-                      <a:tailEnd type="none" w="med" len="med"/>
-                    </a:lnR>
-                    <a:lnT w="6350" cap="flat" cmpd="sng" algn="ctr">
-                      <a:solidFill>
-                        <a:srgbClr val="E6E9EC"/>
-                      </a:solidFill>
-                      <a:prstDash val="solid"/>
-                      <a:round/>
-                      <a:headEnd type="none" w="med" len="med"/>
-                      <a:tailEnd type="none" w="med" len="med"/>
-                    </a:lnT>
-                    <a:lnB w="6350" cap="flat" cmpd="sng" algn="ctr">
-                      <a:solidFill>
-                        <a:srgbClr val="E6E9EC"/>
-                      </a:solidFill>
-                      <a:prstDash val="solid"/>
-                      <a:round/>
-                      <a:headEnd type="none" w="med" len="med"/>
-                      <a:tailEnd type="none" w="med" len="med"/>
-                    </a:lnB>
-                    <a:solidFill>
-                      <a:srgbClr val="1E2B37"/>
-                    </a:solidFill>
-                  </a:tcPr>
-                </a:tc>
-                <a:tc>
-                  <a:txBody>
-                    <a:bodyPr/>
-                    <a:lstStyle/>
-                    <a:p>
-                      <a:pPr indent="0" marL="0">
-                        <a:buNone/>
-                      </a:pPr>
-                      <a:r>
-                        <a:rPr lang="en-US" sz="750" b="1" dirty="0">
-                          <a:solidFill>
-                            <a:srgbClr val="FFFFFF"/>
-                          </a:solidFill>
-                          <a:latin typeface="Arial" pitchFamily="34" charset="0"/>
-                          <a:ea typeface="Arial" pitchFamily="34" charset="-122"/>
-                          <a:cs typeface="Arial" pitchFamily="34" charset="-120"/>
-                        </a:rPr>
-                        <a:t>antes b2</a:t>
-                      </a:r>
-                      <a:endParaRPr lang="en-US" sz="750" dirty="0">
-                        <a:latin typeface="Arial" charset="0"/>
-                        <a:ea typeface="Arial" charset="0"/>
-                        <a:cs typeface="Arial" charset="0"/>
-                      </a:endParaRPr>
-                    </a:p>
-                  </a:txBody>
-                  <a:tcPr marL="45720" marR="45720" marT="45720" marB="45720" anchor="ctr">
-                    <a:lnL w="6350" cap="flat" cmpd="sng" algn="ctr">
-                      <a:solidFill>
-                        <a:srgbClr val="E6E9EC"/>
-                      </a:solidFill>
-                      <a:prstDash val="solid"/>
-                      <a:round/>
-                      <a:headEnd type="none" w="med" len="med"/>
-                      <a:tailEnd type="none" w="med" len="med"/>
-                    </a:lnL>
-                    <a:lnR w="6350" cap="flat" cmpd="sng" algn="ctr">
-                      <a:solidFill>
-                        <a:srgbClr val="E6E9EC"/>
-                      </a:solidFill>
-                      <a:prstDash val="solid"/>
-                      <a:round/>
-                      <a:headEnd type="none" w="med" len="med"/>
-                      <a:tailEnd type="none" w="med" len="med"/>
-                    </a:lnR>
-                    <a:lnT w="6350" cap="flat" cmpd="sng" algn="ctr">
-                      <a:solidFill>
-                        <a:srgbClr val="E6E9EC"/>
-                      </a:solidFill>
-                      <a:prstDash val="solid"/>
-                      <a:round/>
-                      <a:headEnd type="none" w="med" len="med"/>
-                      <a:tailEnd type="none" w="med" len="med"/>
-                    </a:lnT>
-                    <a:lnB w="6350" cap="flat" cmpd="sng" algn="ctr">
-                      <a:solidFill>
-                        <a:srgbClr val="E6E9EC"/>
-                      </a:solidFill>
-                      <a:prstDash val="solid"/>
-                      <a:round/>
-                      <a:headEnd type="none" w="med" len="med"/>
-                      <a:tailEnd type="none" w="med" len="med"/>
-                    </a:lnB>
-                    <a:solidFill>
-                      <a:srgbClr val="1E2B37"/>
-                    </a:solidFill>
-                  </a:tcPr>
-                </a:tc>
-                <a:tc>
-                  <a:txBody>
-                    <a:bodyPr/>
-                    <a:lstStyle/>
-                    <a:p>
-                      <a:pPr indent="0" marL="0">
-                        <a:buNone/>
-                      </a:pPr>
-                      <a:r>
-                        <a:rPr lang="en-US" sz="750" b="1" dirty="0">
-                          <a:solidFill>
-                            <a:srgbClr val="FFFFFF"/>
-                          </a:solidFill>
-                          <a:latin typeface="Arial" pitchFamily="34" charset="0"/>
-                          <a:ea typeface="Arial" pitchFamily="34" charset="-122"/>
-                          <a:cs typeface="Arial" pitchFamily="34" charset="-120"/>
-                        </a:rPr>
-                        <a:t>antes b3</a:t>
-                      </a:r>
-                      <a:endParaRPr lang="en-US" sz="750" dirty="0">
-                        <a:latin typeface="Arial" charset="0"/>
-                        <a:ea typeface="Arial" charset="0"/>
-                        <a:cs typeface="Arial" charset="0"/>
-                      </a:endParaRPr>
-                    </a:p>
-                  </a:txBody>
-                  <a:tcPr marL="45720" marR="45720" marT="45720" marB="45720" anchor="ctr">
-                    <a:lnL w="6350" cap="flat" cmpd="sng" algn="ctr">
-                      <a:solidFill>
-                        <a:srgbClr val="E6E9EC"/>
-                      </a:solidFill>
-                      <a:prstDash val="solid"/>
-                      <a:round/>
-                      <a:headEnd type="none" w="med" len="med"/>
-                      <a:tailEnd type="none" w="med" len="med"/>
-                    </a:lnL>
-                    <a:lnR w="6350" cap="flat" cmpd="sng" algn="ctr">
-                      <a:solidFill>
-                        <a:srgbClr val="E6E9EC"/>
-                      </a:solidFill>
-                      <a:prstDash val="solid"/>
-                      <a:round/>
-                      <a:headEnd type="none" w="med" len="med"/>
-                      <a:tailEnd type="none" w="med" len="med"/>
-                    </a:lnR>
-                    <a:lnT w="6350" cap="flat" cmpd="sng" algn="ctr">
-                      <a:solidFill>
-                        <a:srgbClr val="E6E9EC"/>
-                      </a:solidFill>
-                      <a:prstDash val="solid"/>
-                      <a:round/>
-                      <a:headEnd type="none" w="med" len="med"/>
-                      <a:tailEnd type="none" w="med" len="med"/>
-                    </a:lnT>
-                    <a:lnB w="6350" cap="flat" cmpd="sng" algn="ctr">
-                      <a:solidFill>
-                        <a:srgbClr val="E6E9EC"/>
-                      </a:solidFill>
-                      <a:prstDash val="solid"/>
-                      <a:round/>
-                      <a:headEnd type="none" w="med" len="med"/>
-                      <a:tailEnd type="none" w="med" len="med"/>
-                    </a:lnB>
-                    <a:solidFill>
-                      <a:srgbClr val="1E2B37"/>
-                    </a:solidFill>
-                  </a:tcPr>
-                </a:tc>
-                <a:tc>
-                  <a:txBody>
-                    <a:bodyPr/>
-                    <a:lstStyle/>
-                    <a:p>
-                      <a:pPr indent="0" marL="0">
-                        <a:buNone/>
-                      </a:pPr>
-                      <a:r>
-                        <a:rPr lang="en-US" sz="750" b="1" dirty="0">
-                          <a:solidFill>
-                            <a:srgbClr val="FFFFFF"/>
-                          </a:solidFill>
-                          <a:latin typeface="Arial" pitchFamily="34" charset="0"/>
-                          <a:ea typeface="Arial" pitchFamily="34" charset="-122"/>
-                          <a:cs typeface="Arial" pitchFamily="34" charset="-120"/>
-                        </a:rPr>
-                        <a:t>antes b4</a:t>
-                      </a:r>
-                      <a:endParaRPr lang="en-US" sz="750" dirty="0">
-                        <a:latin typeface="Arial" charset="0"/>
-                        <a:ea typeface="Arial" charset="0"/>
-                        <a:cs typeface="Arial" charset="0"/>
-                      </a:endParaRPr>
-                    </a:p>
-                  </a:txBody>
-                  <a:tcPr marL="45720" marR="45720" marT="45720" marB="45720" anchor="ctr">
-                    <a:lnL w="6350" cap="flat" cmpd="sng" algn="ctr">
-                      <a:solidFill>
-                        <a:srgbClr val="E6E9EC"/>
-                      </a:solidFill>
-                      <a:prstDash val="solid"/>
-                      <a:round/>
-                      <a:headEnd type="none" w="med" len="med"/>
-                      <a:tailEnd type="none" w="med" len="med"/>
-                    </a:lnL>
-                    <a:lnR w="6350" cap="flat" cmpd="sng" algn="ctr">
-                      <a:solidFill>
-                        <a:srgbClr val="E6E9EC"/>
-                      </a:solidFill>
-                      <a:prstDash val="solid"/>
-                      <a:round/>
-                      <a:headEnd type="none" w="med" len="med"/>
-                      <a:tailEnd type="none" w="med" len="med"/>
-                    </a:lnR>
-                    <a:lnT w="6350" cap="flat" cmpd="sng" algn="ctr">
-                      <a:solidFill>
-                        <a:srgbClr val="E6E9EC"/>
-                      </a:solidFill>
-                      <a:prstDash val="solid"/>
-                      <a:round/>
-                      <a:headEnd type="none" w="med" len="med"/>
-                      <a:tailEnd type="none" w="med" len="med"/>
-                    </a:lnT>
-                    <a:lnB w="6350" cap="flat" cmpd="sng" algn="ctr">
-                      <a:solidFill>
-                        <a:srgbClr val="E6E9EC"/>
-                      </a:solidFill>
-                      <a:prstDash val="solid"/>
-                      <a:round/>
-                      <a:headEnd type="none" w="med" len="med"/>
-                      <a:tailEnd type="none" w="med" len="med"/>
-                    </a:lnB>
-                    <a:solidFill>
-                      <a:srgbClr val="1E2B37"/>
-                    </a:solidFill>
-                  </a:tcPr>
-                </a:tc>
-                <a:tc>
-                  <a:txBody>
-                    <a:bodyPr/>
-                    <a:lstStyle/>
-                    <a:p>
-                      <a:pPr indent="0" marL="0">
-                        <a:buNone/>
-                      </a:pPr>
-                      <a:r>
-                        <a:rPr lang="en-US" sz="750" b="1" dirty="0">
-                          <a:solidFill>
-                            <a:srgbClr val="FFFFFF"/>
-                          </a:solidFill>
-                          <a:latin typeface="Arial" pitchFamily="34" charset="0"/>
-                          <a:ea typeface="Arial" pitchFamily="34" charset="-122"/>
-                          <a:cs typeface="Arial" pitchFamily="34" charset="-120"/>
-                        </a:rPr>
-                        <a:t>después b2</a:t>
-                      </a:r>
-                      <a:endParaRPr lang="en-US" sz="750" dirty="0">
-                        <a:latin typeface="Arial" charset="0"/>
-                        <a:ea typeface="Arial" charset="0"/>
-                        <a:cs typeface="Arial" charset="0"/>
-                      </a:endParaRPr>
-                    </a:p>
-                  </a:txBody>
-                  <a:tcPr marL="45720" marR="45720" marT="45720" marB="45720" anchor="ctr">
-                    <a:lnL w="6350" cap="flat" cmpd="sng" algn="ctr">
-                      <a:solidFill>
-                        <a:srgbClr val="E6E9EC"/>
-                      </a:solidFill>
-                      <a:prstDash val="solid"/>
-                      <a:round/>
-                      <a:headEnd type="none" w="med" len="med"/>
-                      <a:tailEnd type="none" w="med" len="med"/>
-                    </a:lnL>
-                    <a:lnR w="6350" cap="flat" cmpd="sng" algn="ctr">
-                      <a:solidFill>
-                        <a:srgbClr val="E6E9EC"/>
-                      </a:solidFill>
-                      <a:prstDash val="solid"/>
-                      <a:round/>
-                      <a:headEnd type="none" w="med" len="med"/>
-                      <a:tailEnd type="none" w="med" len="med"/>
-                    </a:lnR>
-                    <a:lnT w="6350" cap="flat" cmpd="sng" algn="ctr">
-                      <a:solidFill>
-                        <a:srgbClr val="E6E9EC"/>
-                      </a:solidFill>
-                      <a:prstDash val="solid"/>
-                      <a:round/>
-                      <a:headEnd type="none" w="med" len="med"/>
-                      <a:tailEnd type="none" w="med" len="med"/>
-                    </a:lnT>
-                    <a:lnB w="6350" cap="flat" cmpd="sng" algn="ctr">
-                      <a:solidFill>
-                        <a:srgbClr val="E6E9EC"/>
-                      </a:solidFill>
-                      <a:prstDash val="solid"/>
-                      <a:round/>
-                      <a:headEnd type="none" w="med" len="med"/>
-                      <a:tailEnd type="none" w="med" len="med"/>
-                    </a:lnB>
-                    <a:solidFill>
-                      <a:srgbClr val="1E2B37"/>
-                    </a:solidFill>
-                  </a:tcPr>
-                </a:tc>
-                <a:tc>
-                  <a:txBody>
-                    <a:bodyPr/>
-                    <a:lstStyle/>
-                    <a:p>
-                      <a:pPr indent="0" marL="0">
-                        <a:buNone/>
-                      </a:pPr>
-                      <a:r>
-                        <a:rPr lang="en-US" sz="750" b="1" dirty="0">
-                          <a:solidFill>
-                            <a:srgbClr val="FFFFFF"/>
-                          </a:solidFill>
-                          <a:latin typeface="Arial" pitchFamily="34" charset="0"/>
-                          <a:ea typeface="Arial" pitchFamily="34" charset="-122"/>
-                          <a:cs typeface="Arial" pitchFamily="34" charset="-120"/>
-                        </a:rPr>
-                        <a:t>después b3</a:t>
-                      </a:r>
-                      <a:endParaRPr lang="en-US" sz="750" dirty="0">
-                        <a:latin typeface="Arial" charset="0"/>
-                        <a:ea typeface="Arial" charset="0"/>
-                        <a:cs typeface="Arial" charset="0"/>
-                      </a:endParaRPr>
-                    </a:p>
-                  </a:txBody>
-                  <a:tcPr marL="45720" marR="45720" marT="45720" marB="45720" anchor="ctr">
-                    <a:lnL w="6350" cap="flat" cmpd="sng" algn="ctr">
-                      <a:solidFill>
-                        <a:srgbClr val="E6E9EC"/>
-                      </a:solidFill>
-                      <a:prstDash val="solid"/>
-                      <a:round/>
-                      <a:headEnd type="none" w="med" len="med"/>
-                      <a:tailEnd type="none" w="med" len="med"/>
-                    </a:lnL>
-                    <a:lnR w="6350" cap="flat" cmpd="sng" algn="ctr">
-                      <a:solidFill>
-                        <a:srgbClr val="E6E9EC"/>
-                      </a:solidFill>
-                      <a:prstDash val="solid"/>
-                      <a:round/>
-                      <a:headEnd type="none" w="med" len="med"/>
-                      <a:tailEnd type="none" w="med" len="med"/>
-                    </a:lnR>
-                    <a:lnT w="6350" cap="flat" cmpd="sng" algn="ctr">
-                      <a:solidFill>
-                        <a:srgbClr val="E6E9EC"/>
-                      </a:solidFill>
-                      <a:prstDash val="solid"/>
-                      <a:round/>
-                      <a:headEnd type="none" w="med" len="med"/>
-                      <a:tailEnd type="none" w="med" len="med"/>
-                    </a:lnT>
-                    <a:lnB w="6350" cap="flat" cmpd="sng" algn="ctr">
-                      <a:solidFill>
-                        <a:srgbClr val="E6E9EC"/>
-                      </a:solidFill>
-                      <a:prstDash val="solid"/>
-                      <a:round/>
-                      <a:headEnd type="none" w="med" len="med"/>
-                      <a:tailEnd type="none" w="med" len="med"/>
-                    </a:lnB>
-                    <a:solidFill>
-                      <a:srgbClr val="1E2B37"/>
-                    </a:solidFill>
-                  </a:tcPr>
-                </a:tc>
-                <a:tc>
-                  <a:txBody>
-                    <a:bodyPr/>
-                    <a:lstStyle/>
-                    <a:p>
-                      <a:pPr indent="0" marL="0">
-                        <a:buNone/>
-                      </a:pPr>
-                      <a:r>
-                        <a:rPr lang="en-US" sz="750" b="1" dirty="0">
-                          <a:solidFill>
-                            <a:srgbClr val="FFFFFF"/>
-                          </a:solidFill>
-                          <a:latin typeface="Arial" pitchFamily="34" charset="0"/>
-                          <a:ea typeface="Arial" pitchFamily="34" charset="-122"/>
-                          <a:cs typeface="Arial" pitchFamily="34" charset="-120"/>
-                        </a:rPr>
-                        <a:t>después b4</a:t>
-                      </a:r>
-                      <a:endParaRPr lang="en-US" sz="750" dirty="0">
-                        <a:latin typeface="Arial" charset="0"/>
-                        <a:ea typeface="Arial" charset="0"/>
-                        <a:cs typeface="Arial" charset="0"/>
-                      </a:endParaRPr>
-                    </a:p>
-                  </a:txBody>
-                  <a:tcPr marL="45720" marR="45720" marT="45720" marB="45720" anchor="ctr">
-                    <a:lnL w="6350" cap="flat" cmpd="sng" algn="ctr">
-                      <a:solidFill>
-                        <a:srgbClr val="E6E9EC"/>
-                      </a:solidFill>
-                      <a:prstDash val="solid"/>
-                      <a:round/>
-                      <a:headEnd type="none" w="med" len="med"/>
-                      <a:tailEnd type="none" w="med" len="med"/>
-                    </a:lnL>
-                    <a:lnR w="6350" cap="flat" cmpd="sng" algn="ctr">
-                      <a:solidFill>
-                        <a:srgbClr val="E6E9EC"/>
-                      </a:solidFill>
-                      <a:prstDash val="solid"/>
-                      <a:round/>
-                      <a:headEnd type="none" w="med" len="med"/>
-                      <a:tailEnd type="none" w="med" len="med"/>
-                    </a:lnR>
-                    <a:lnT w="6350" cap="flat" cmpd="sng" algn="ctr">
-                      <a:solidFill>
-                        <a:srgbClr val="E6E9EC"/>
-                      </a:solidFill>
-                      <a:prstDash val="solid"/>
-                      <a:round/>
-                      <a:headEnd type="none" w="med" len="med"/>
-                      <a:tailEnd type="none" w="med" len="med"/>
-                    </a:lnT>
-                    <a:lnB w="6350" cap="flat" cmpd="sng" algn="ctr">
-                      <a:solidFill>
-                        <a:srgbClr val="E6E9EC"/>
-                      </a:solidFill>
-                      <a:prstDash val="solid"/>
-                      <a:round/>
-                      <a:headEnd type="none" w="med" len="med"/>
-                      <a:tailEnd type="none" w="med" len="med"/>
-                    </a:lnB>
-                    <a:solidFill>
-                      <a:srgbClr val="1E2B37"/>
-                    </a:solidFill>
-                  </a:tcPr>
-                </a:tc>
-                <a:tc>
-                  <a:txBody>
-                    <a:bodyPr/>
-                    <a:lstStyle/>
-                    <a:p>
-                      <a:pPr indent="0" marL="0">
-                        <a:buNone/>
-                      </a:pPr>
-                      <a:r>
-                        <a:rPr lang="en-US" sz="750" b="1" dirty="0">
-                          <a:solidFill>
-                            <a:srgbClr val="FFFFFF"/>
-                          </a:solidFill>
-                          <a:latin typeface="Arial" pitchFamily="34" charset="0"/>
-                          <a:ea typeface="Arial" pitchFamily="34" charset="-122"/>
-                          <a:cs typeface="Arial" pitchFamily="34" charset="-120"/>
-                        </a:rPr>
-                        <a:t>después b5</a:t>
-                      </a:r>
-                      <a:endParaRPr lang="en-US" sz="750" dirty="0">
-                        <a:latin typeface="Arial" charset="0"/>
-                        <a:ea typeface="Arial" charset="0"/>
-                        <a:cs typeface="Arial" charset="0"/>
-                      </a:endParaRPr>
-                    </a:p>
-                  </a:txBody>
-                  <a:tcPr marL="45720" marR="45720" marT="45720" marB="45720" anchor="ctr">
-                    <a:lnL w="6350" cap="flat" cmpd="sng" algn="ctr">
-                      <a:solidFill>
-                        <a:srgbClr val="E6E9EC"/>
-                      </a:solidFill>
-                      <a:prstDash val="solid"/>
-                      <a:round/>
-                      <a:headEnd type="none" w="med" len="med"/>
-                      <a:tailEnd type="none" w="med" len="med"/>
-                    </a:lnL>
-                    <a:lnR w="6350" cap="flat" cmpd="sng" algn="ctr">
-                      <a:solidFill>
-                        <a:srgbClr val="E6E9EC"/>
-                      </a:solidFill>
-                      <a:prstDash val="solid"/>
-                      <a:round/>
-                      <a:headEnd type="none" w="med" len="med"/>
-                      <a:tailEnd type="none" w="med" len="med"/>
-                    </a:lnR>
-                    <a:lnT w="6350" cap="flat" cmpd="sng" algn="ctr">
-                      <a:solidFill>
-                        <a:srgbClr val="E6E9EC"/>
-                      </a:solidFill>
-                      <a:prstDash val="solid"/>
-                      <a:round/>
-                      <a:headEnd type="none" w="med" len="med"/>
-                      <a:tailEnd type="none" w="med" len="med"/>
-                    </a:lnT>
-                    <a:lnB w="6350" cap="flat" cmpd="sng" algn="ctr">
-                      <a:solidFill>
-                        <a:srgbClr val="E6E9EC"/>
-                      </a:solidFill>
-                      <a:prstDash val="solid"/>
-                      <a:round/>
-                      <a:headEnd type="none" w="med" len="med"/>
-                      <a:tailEnd type="none" w="med" len="med"/>
-                    </a:lnB>
-                    <a:solidFill>
-                      <a:srgbClr val="1E2B37"/>
-                    </a:solidFill>
-                  </a:tcPr>
-                </a:tc>
-              </a:tr>
-              <a:tr h="237744">
-                <a:tc>
-                  <a:txBody>
-                    <a:bodyPr/>
-                    <a:lstStyle/>
-                    <a:p>
-                      <a:pPr indent="0" marL="0">
-                        <a:buNone/>
-                      </a:pPr>
-                      <a:r>
-                        <a:rPr lang="en-US" sz="700" dirty="0">
-                          <a:solidFill>
-                            <a:srgbClr val="1E2B37"/>
-                          </a:solidFill>
-                          <a:latin typeface="Courier New" pitchFamily="34" charset="0"/>
-                          <a:ea typeface="Courier New" pitchFamily="34" charset="-122"/>
-                          <a:cs typeface="Courier New" pitchFamily="34" charset="-120"/>
-                        </a:rPr>
-                        <a:t>brief_schema</a:t>
-                      </a:r>
-                      <a:endParaRPr lang="en-US" sz="700" dirty="0">
-                        <a:latin typeface="Courier New" charset="0"/>
-                        <a:ea typeface="Courier New" charset="0"/>
-                        <a:cs typeface="Courier New" charset="0"/>
-                      </a:endParaRPr>
-                    </a:p>
-                  </a:txBody>
-                  <a:tcPr marL="45720" marR="45720" marT="45720" marB="45720" anchor="ctr">
-                    <a:lnL w="6350" cap="flat" cmpd="sng" algn="ctr">
-                      <a:solidFill>
-                        <a:srgbClr val="E6E9EC"/>
-                      </a:solidFill>
-                      <a:prstDash val="solid"/>
-                      <a:round/>
-                      <a:headEnd type="none" w="med" len="med"/>
-                      <a:tailEnd type="none" w="med" len="med"/>
-                    </a:lnL>
-                    <a:lnR w="6350" cap="flat" cmpd="sng" algn="ctr">
-                      <a:solidFill>
-                        <a:srgbClr val="E6E9EC"/>
-                      </a:solidFill>
-                      <a:prstDash val="solid"/>
-                      <a:round/>
-                      <a:headEnd type="none" w="med" len="med"/>
-                      <a:tailEnd type="none" w="med" len="med"/>
-                    </a:lnR>
-                    <a:lnT w="6350" cap="flat" cmpd="sng" algn="ctr">
-                      <a:solidFill>
-                        <a:srgbClr val="E6E9EC"/>
-                      </a:solidFill>
-                      <a:prstDash val="solid"/>
-                      <a:round/>
-                      <a:headEnd type="none" w="med" len="med"/>
-                      <a:tailEnd type="none" w="med" len="med"/>
-                    </a:lnT>
-                    <a:lnB w="6350" cap="flat" cmpd="sng" algn="ctr">
-                      <a:solidFill>
-                        <a:srgbClr val="E6E9EC"/>
-                      </a:solidFill>
-                      <a:prstDash val="solid"/>
-                      <a:round/>
-                      <a:headEnd type="none" w="med" len="med"/>
-                      <a:tailEnd type="none" w="med" len="med"/>
-                    </a:lnB>
-                    <a:solidFill>
-                      <a:srgbClr val="FFFFFF"/>
-                    </a:solidFill>
-                  </a:tcPr>
-                </a:tc>
-                <a:tc>
-                  <a:txBody>
-                    <a:bodyPr/>
-                    <a:lstStyle/>
-                    <a:p>
-                      <a:pPr algn="ctr" indent="0" marL="0">
-                        <a:buNone/>
-                      </a:pPr>
-                      <a:r>
-                        <a:rPr lang="en-US" sz="750" b="1" dirty="0">
-                          <a:solidFill>
-                            <a:srgbClr val="16794A"/>
-                          </a:solidFill>
-                          <a:latin typeface="Arial" pitchFamily="34" charset="0"/>
-                          <a:ea typeface="Arial" pitchFamily="34" charset="-122"/>
-                          <a:cs typeface="Arial" pitchFamily="34" charset="-120"/>
-                        </a:rPr>
-                        <a:t>✓</a:t>
-                      </a:r>
-                      <a:endParaRPr lang="en-US" sz="750" dirty="0">
-                        <a:latin typeface="Arial" charset="0"/>
-                        <a:ea typeface="Arial" charset="0"/>
-                        <a:cs typeface="Arial" charset="0"/>
-                      </a:endParaRPr>
-                    </a:p>
-                  </a:txBody>
-                  <a:tcPr marL="45720" marR="45720" marT="45720" marB="45720" anchor="ctr">
-                    <a:lnL w="6350" cap="flat" cmpd="sng" algn="ctr">
-                      <a:solidFill>
-                        <a:srgbClr val="E6E9EC"/>
-                      </a:solidFill>
-                      <a:prstDash val="solid"/>
-                      <a:round/>
-                      <a:headEnd type="none" w="med" len="med"/>
-                      <a:tailEnd type="none" w="med" len="med"/>
-                    </a:lnL>
-                    <a:lnR w="6350" cap="flat" cmpd="sng" algn="ctr">
-                      <a:solidFill>
-                        <a:srgbClr val="E6E9EC"/>
-                      </a:solidFill>
-                      <a:prstDash val="solid"/>
-                      <a:round/>
-                      <a:headEnd type="none" w="med" len="med"/>
-                      <a:tailEnd type="none" w="med" len="med"/>
-                    </a:lnR>
-                    <a:lnT w="6350" cap="flat" cmpd="sng" algn="ctr">
-                      <a:solidFill>
-                        <a:srgbClr val="E6E9EC"/>
-                      </a:solidFill>
-                      <a:prstDash val="solid"/>
-                      <a:round/>
-                      <a:headEnd type="none" w="med" len="med"/>
-                      <a:tailEnd type="none" w="med" len="med"/>
-                    </a:lnT>
-                    <a:lnB w="6350" cap="flat" cmpd="sng" algn="ctr">
-                      <a:solidFill>
-                        <a:srgbClr val="E6E9EC"/>
-                      </a:solidFill>
-                      <a:prstDash val="solid"/>
-                      <a:round/>
-                      <a:headEnd type="none" w="med" len="med"/>
-                      <a:tailEnd type="none" w="med" len="med"/>
-                    </a:lnB>
-                    <a:solidFill>
-                      <a:srgbClr val="FFFFFF"/>
-                    </a:solidFill>
-                  </a:tcPr>
-                </a:tc>
-                <a:tc>
-                  <a:txBody>
-                    <a:bodyPr/>
-                    <a:lstStyle/>
-                    <a:p>
-                      <a:pPr algn="ctr" indent="0" marL="0">
-                        <a:buNone/>
-                      </a:pPr>
-                      <a:r>
-                        <a:rPr lang="en-US" sz="750" b="1" dirty="0">
-                          <a:solidFill>
-                            <a:srgbClr val="16794A"/>
-                          </a:solidFill>
-                          <a:latin typeface="Arial" pitchFamily="34" charset="0"/>
-                          <a:ea typeface="Arial" pitchFamily="34" charset="-122"/>
-                          <a:cs typeface="Arial" pitchFamily="34" charset="-120"/>
-                        </a:rPr>
-                        <a:t>✓</a:t>
-                      </a:r>
-                      <a:endParaRPr lang="en-US" sz="750" dirty="0">
-                        <a:latin typeface="Arial" charset="0"/>
-                        <a:ea typeface="Arial" charset="0"/>
-                        <a:cs typeface="Arial" charset="0"/>
-                      </a:endParaRPr>
-                    </a:p>
-                  </a:txBody>
-                  <a:tcPr marL="45720" marR="45720" marT="45720" marB="45720" anchor="ctr">
-                    <a:lnL w="6350" cap="flat" cmpd="sng" algn="ctr">
-                      <a:solidFill>
-                        <a:srgbClr val="E6E9EC"/>
-                      </a:solidFill>
-                      <a:prstDash val="solid"/>
-                      <a:round/>
-                      <a:headEnd type="none" w="med" len="med"/>
-                      <a:tailEnd type="none" w="med" len="med"/>
-                    </a:lnL>
-                    <a:lnR w="6350" cap="flat" cmpd="sng" algn="ctr">
-                      <a:solidFill>
-                        <a:srgbClr val="E6E9EC"/>
-                      </a:solidFill>
-                      <a:prstDash val="solid"/>
-                      <a:round/>
-                      <a:headEnd type="none" w="med" len="med"/>
-                      <a:tailEnd type="none" w="med" len="med"/>
-                    </a:lnR>
-                    <a:lnT w="6350" cap="flat" cmpd="sng" algn="ctr">
-                      <a:solidFill>
-                        <a:srgbClr val="E6E9EC"/>
-                      </a:solidFill>
-                      <a:prstDash val="solid"/>
-                      <a:round/>
-                      <a:headEnd type="none" w="med" len="med"/>
-                      <a:tailEnd type="none" w="med" len="med"/>
-                    </a:lnT>
-                    <a:lnB w="6350" cap="flat" cmpd="sng" algn="ctr">
-                      <a:solidFill>
-                        <a:srgbClr val="E6E9EC"/>
-                      </a:solidFill>
-                      <a:prstDash val="solid"/>
-                      <a:round/>
-                      <a:headEnd type="none" w="med" len="med"/>
-                      <a:tailEnd type="none" w="med" len="med"/>
-                    </a:lnB>
-                    <a:solidFill>
-                      <a:srgbClr val="FFFFFF"/>
-                    </a:solidFill>
-                  </a:tcPr>
-                </a:tc>
-                <a:tc>
-                  <a:txBody>
-                    <a:bodyPr/>
-                    <a:lstStyle/>
-                    <a:p>
-                      <a:pPr algn="ctr" indent="0" marL="0">
-                        <a:buNone/>
-                      </a:pPr>
-                      <a:r>
-                        <a:rPr lang="en-US" sz="750" b="1" dirty="0">
-                          <a:solidFill>
-                            <a:srgbClr val="16794A"/>
-                          </a:solidFill>
-                          <a:latin typeface="Arial" pitchFamily="34" charset="0"/>
-                          <a:ea typeface="Arial" pitchFamily="34" charset="-122"/>
-                          <a:cs typeface="Arial" pitchFamily="34" charset="-120"/>
-                        </a:rPr>
-                        <a:t>✓</a:t>
-                      </a:r>
-                      <a:endParaRPr lang="en-US" sz="750" dirty="0">
-                        <a:latin typeface="Arial" charset="0"/>
-                        <a:ea typeface="Arial" charset="0"/>
-                        <a:cs typeface="Arial" charset="0"/>
-                      </a:endParaRPr>
-                    </a:p>
-                  </a:txBody>
-                  <a:tcPr marL="45720" marR="45720" marT="45720" marB="45720" anchor="ctr">
-                    <a:lnL w="6350" cap="flat" cmpd="sng" algn="ctr">
-                      <a:solidFill>
-                        <a:srgbClr val="E6E9EC"/>
-                      </a:solidFill>
-                      <a:prstDash val="solid"/>
-                      <a:round/>
-                      <a:headEnd type="none" w="med" len="med"/>
-                      <a:tailEnd type="none" w="med" len="med"/>
-                    </a:lnL>
-                    <a:lnR w="6350" cap="flat" cmpd="sng" algn="ctr">
-                      <a:solidFill>
-                        <a:srgbClr val="E6E9EC"/>
-                      </a:solidFill>
-                      <a:prstDash val="solid"/>
-                      <a:round/>
-                      <a:headEnd type="none" w="med" len="med"/>
-                      <a:tailEnd type="none" w="med" len="med"/>
-                    </a:lnR>
-                    <a:lnT w="6350" cap="flat" cmpd="sng" algn="ctr">
-                      <a:solidFill>
-                        <a:srgbClr val="E6E9EC"/>
-                      </a:solidFill>
-                      <a:prstDash val="solid"/>
-                      <a:round/>
-                      <a:headEnd type="none" w="med" len="med"/>
-                      <a:tailEnd type="none" w="med" len="med"/>
-                    </a:lnT>
-                    <a:lnB w="6350" cap="flat" cmpd="sng" algn="ctr">
-                      <a:solidFill>
-                        <a:srgbClr val="E6E9EC"/>
-                      </a:solidFill>
-                      <a:prstDash val="solid"/>
-                      <a:round/>
-                      <a:headEnd type="none" w="med" len="med"/>
-                      <a:tailEnd type="none" w="med" len="med"/>
-                    </a:lnB>
-                    <a:solidFill>
-                      <a:srgbClr val="FFFFFF"/>
-                    </a:solidFill>
-                  </a:tcPr>
-                </a:tc>
-                <a:tc>
-                  <a:txBody>
-                    <a:bodyPr/>
-                    <a:lstStyle/>
-                    <a:p>
-                      <a:pPr algn="ctr" indent="0" marL="0">
-                        <a:buNone/>
-                      </a:pPr>
-                      <a:r>
-                        <a:rPr lang="en-US" sz="750" b="1" dirty="0">
-                          <a:solidFill>
-                            <a:srgbClr val="16794A"/>
-                          </a:solidFill>
-                          <a:latin typeface="Arial" pitchFamily="34" charset="0"/>
-                          <a:ea typeface="Arial" pitchFamily="34" charset="-122"/>
-                          <a:cs typeface="Arial" pitchFamily="34" charset="-120"/>
-                        </a:rPr>
-                        <a:t>✓</a:t>
-                      </a:r>
-                      <a:endParaRPr lang="en-US" sz="750" dirty="0">
-                        <a:latin typeface="Arial" charset="0"/>
-                        <a:ea typeface="Arial" charset="0"/>
-                        <a:cs typeface="Arial" charset="0"/>
-                      </a:endParaRPr>
-                    </a:p>
-                  </a:txBody>
-                  <a:tcPr marL="45720" marR="45720" marT="45720" marB="45720" anchor="ctr">
-                    <a:lnL w="6350" cap="flat" cmpd="sng" algn="ctr">
-                      <a:solidFill>
-                        <a:srgbClr val="E6E9EC"/>
-                      </a:solidFill>
-                      <a:prstDash val="solid"/>
-                      <a:round/>
-                      <a:headEnd type="none" w="med" len="med"/>
-                      <a:tailEnd type="none" w="med" len="med"/>
-                    </a:lnL>
-                    <a:lnR w="6350" cap="flat" cmpd="sng" algn="ctr">
-                      <a:solidFill>
-                        <a:srgbClr val="E6E9EC"/>
-                      </a:solidFill>
-                      <a:prstDash val="solid"/>
-                      <a:round/>
-                      <a:headEnd type="none" w="med" len="med"/>
-                      <a:tailEnd type="none" w="med" len="med"/>
-                    </a:lnR>
-                    <a:lnT w="6350" cap="flat" cmpd="sng" algn="ctr">
-                      <a:solidFill>
-                        <a:srgbClr val="E6E9EC"/>
-                      </a:solidFill>
-                      <a:prstDash val="solid"/>
-                      <a:round/>
-                      <a:headEnd type="none" w="med" len="med"/>
-                      <a:tailEnd type="none" w="med" len="med"/>
-                    </a:lnT>
-                    <a:lnB w="6350" cap="flat" cmpd="sng" algn="ctr">
-                      <a:solidFill>
-                        <a:srgbClr val="E6E9EC"/>
-                      </a:solidFill>
-                      <a:prstDash val="solid"/>
-                      <a:round/>
-                      <a:headEnd type="none" w="med" len="med"/>
-                      <a:tailEnd type="none" w="med" len="med"/>
-                    </a:lnB>
-                    <a:solidFill>
-                      <a:srgbClr val="FFFFFF"/>
-                    </a:solidFill>
-                  </a:tcPr>
-                </a:tc>
-                <a:tc>
-                  <a:txBody>
-                    <a:bodyPr/>
-                    <a:lstStyle/>
-                    <a:p>
-                      <a:pPr algn="ctr" indent="0" marL="0">
-                        <a:buNone/>
-                      </a:pPr>
-                      <a:r>
-                        <a:rPr lang="en-US" sz="750" b="1" dirty="0">
-                          <a:solidFill>
-                            <a:srgbClr val="16794A"/>
-                          </a:solidFill>
-                          <a:latin typeface="Arial" pitchFamily="34" charset="0"/>
-                          <a:ea typeface="Arial" pitchFamily="34" charset="-122"/>
-                          <a:cs typeface="Arial" pitchFamily="34" charset="-120"/>
-                        </a:rPr>
-                        <a:t>✓</a:t>
-                      </a:r>
-                      <a:endParaRPr lang="en-US" sz="750" dirty="0">
-                        <a:latin typeface="Arial" charset="0"/>
-                        <a:ea typeface="Arial" charset="0"/>
-                        <a:cs typeface="Arial" charset="0"/>
-                      </a:endParaRPr>
-                    </a:p>
-                  </a:txBody>
-                  <a:tcPr marL="45720" marR="45720" marT="45720" marB="45720" anchor="ctr">
-                    <a:lnL w="6350" cap="flat" cmpd="sng" algn="ctr">
-                      <a:solidFill>
-                        <a:srgbClr val="E6E9EC"/>
-                      </a:solidFill>
-                      <a:prstDash val="solid"/>
-                      <a:round/>
-                      <a:headEnd type="none" w="med" len="med"/>
-                      <a:tailEnd type="none" w="med" len="med"/>
-                    </a:lnL>
-                    <a:lnR w="6350" cap="flat" cmpd="sng" algn="ctr">
-                      <a:solidFill>
-                        <a:srgbClr val="E6E9EC"/>
-                      </a:solidFill>
-                      <a:prstDash val="solid"/>
-                      <a:round/>
-                      <a:headEnd type="none" w="med" len="med"/>
-                      <a:tailEnd type="none" w="med" len="med"/>
-                    </a:lnR>
-                    <a:lnT w="6350" cap="flat" cmpd="sng" algn="ctr">
-                      <a:solidFill>
-                        <a:srgbClr val="E6E9EC"/>
-                      </a:solidFill>
-                      <a:prstDash val="solid"/>
-                      <a:round/>
-                      <a:headEnd type="none" w="med" len="med"/>
-                      <a:tailEnd type="none" w="med" len="med"/>
-                    </a:lnT>
-                    <a:lnB w="6350" cap="flat" cmpd="sng" algn="ctr">
-                      <a:solidFill>
-                        <a:srgbClr val="E6E9EC"/>
-                      </a:solidFill>
-                      <a:prstDash val="solid"/>
-                      <a:round/>
-                      <a:headEnd type="none" w="med" len="med"/>
-                      <a:tailEnd type="none" w="med" len="med"/>
-                    </a:lnB>
-                    <a:solidFill>
-                      <a:srgbClr val="FFFFFF"/>
-                    </a:solidFill>
-                  </a:tcPr>
-                </a:tc>
-                <a:tc>
-                  <a:txBody>
-                    <a:bodyPr/>
-                    <a:lstStyle/>
-                    <a:p>
-                      <a:pPr algn="ctr" indent="0" marL="0">
-                        <a:buNone/>
-                      </a:pPr>
-                      <a:r>
-                        <a:rPr lang="en-US" sz="750" b="1" dirty="0">
-                          <a:solidFill>
-                            <a:srgbClr val="16794A"/>
-                          </a:solidFill>
-                          <a:latin typeface="Arial" pitchFamily="34" charset="0"/>
-                          <a:ea typeface="Arial" pitchFamily="34" charset="-122"/>
-                          <a:cs typeface="Arial" pitchFamily="34" charset="-120"/>
-                        </a:rPr>
-                        <a:t>✓</a:t>
-                      </a:r>
-                      <a:endParaRPr lang="en-US" sz="750" dirty="0">
-                        <a:latin typeface="Arial" charset="0"/>
-                        <a:ea typeface="Arial" charset="0"/>
-                        <a:cs typeface="Arial" charset="0"/>
-                      </a:endParaRPr>
-                    </a:p>
-                  </a:txBody>
-                  <a:tcPr marL="45720" marR="45720" marT="45720" marB="45720" anchor="ctr">
-                    <a:lnL w="6350" cap="flat" cmpd="sng" algn="ctr">
-                      <a:solidFill>
-                        <a:srgbClr val="E6E9EC"/>
-                      </a:solidFill>
-                      <a:prstDash val="solid"/>
-                      <a:round/>
-                      <a:headEnd type="none" w="med" len="med"/>
-                      <a:tailEnd type="none" w="med" len="med"/>
-                    </a:lnL>
-                    <a:lnR w="6350" cap="flat" cmpd="sng" algn="ctr">
-                      <a:solidFill>
-                        <a:srgbClr val="E6E9EC"/>
-                      </a:solidFill>
-                      <a:prstDash val="solid"/>
-                      <a:round/>
-                      <a:headEnd type="none" w="med" len="med"/>
-                      <a:tailEnd type="none" w="med" len="med"/>
-                    </a:lnR>
-                    <a:lnT w="6350" cap="flat" cmpd="sng" algn="ctr">
-                      <a:solidFill>
-                        <a:srgbClr val="E6E9EC"/>
-                      </a:solidFill>
-                      <a:prstDash val="solid"/>
-                      <a:round/>
-                      <a:headEnd type="none" w="med" len="med"/>
-                      <a:tailEnd type="none" w="med" len="med"/>
-                    </a:lnT>
-                    <a:lnB w="6350" cap="flat" cmpd="sng" algn="ctr">
-                      <a:solidFill>
-                        <a:srgbClr val="E6E9EC"/>
-                      </a:solidFill>
-                      <a:prstDash val="solid"/>
-                      <a:round/>
-                      <a:headEnd type="none" w="med" len="med"/>
-                      <a:tailEnd type="none" w="med" len="med"/>
-                    </a:lnB>
-                    <a:solidFill>
-                      <a:srgbClr val="FFFFFF"/>
-                    </a:solidFill>
-                  </a:tcPr>
-                </a:tc>
-                <a:tc>
-                  <a:txBody>
-                    <a:bodyPr/>
-                    <a:lstStyle/>
-                    <a:p>
-                      <a:pPr algn="ctr" indent="0" marL="0">
-                        <a:buNone/>
-                      </a:pPr>
-                      <a:r>
-                        <a:rPr lang="en-US" sz="750" b="1" dirty="0">
-                          <a:solidFill>
-                            <a:srgbClr val="B83232"/>
-                          </a:solidFill>
-                          <a:latin typeface="Arial" pitchFamily="34" charset="0"/>
-                          <a:ea typeface="Arial" pitchFamily="34" charset="-122"/>
-                          <a:cs typeface="Arial" pitchFamily="34" charset="-120"/>
-                        </a:rPr>
-                        <a:t>✗</a:t>
-                      </a:r>
-                      <a:endParaRPr lang="en-US" sz="750" dirty="0">
-                        <a:latin typeface="Arial" charset="0"/>
-                        <a:ea typeface="Arial" charset="0"/>
-                        <a:cs typeface="Arial" charset="0"/>
-                      </a:endParaRPr>
-                    </a:p>
-                  </a:txBody>
-                  <a:tcPr marL="45720" marR="45720" marT="45720" marB="45720" anchor="ctr">
-                    <a:lnL w="6350" cap="flat" cmpd="sng" algn="ctr">
-                      <a:solidFill>
-                        <a:srgbClr val="E6E9EC"/>
-                      </a:solidFill>
-                      <a:prstDash val="solid"/>
-                      <a:round/>
-                      <a:headEnd type="none" w="med" len="med"/>
-                      <a:tailEnd type="none" w="med" len="med"/>
-                    </a:lnL>
-                    <a:lnR w="6350" cap="flat" cmpd="sng" algn="ctr">
-                      <a:solidFill>
-                        <a:srgbClr val="E6E9EC"/>
-                      </a:solidFill>
-                      <a:prstDash val="solid"/>
-                      <a:round/>
-                      <a:headEnd type="none" w="med" len="med"/>
-                      <a:tailEnd type="none" w="med" len="med"/>
-                    </a:lnR>
-                    <a:lnT w="6350" cap="flat" cmpd="sng" algn="ctr">
-                      <a:solidFill>
-                        <a:srgbClr val="E6E9EC"/>
-                      </a:solidFill>
-                      <a:prstDash val="solid"/>
-                      <a:round/>
-                      <a:headEnd type="none" w="med" len="med"/>
-                      <a:tailEnd type="none" w="med" len="med"/>
-                    </a:lnT>
-                    <a:lnB w="6350" cap="flat" cmpd="sng" algn="ctr">
-                      <a:solidFill>
-                        <a:srgbClr val="E6E9EC"/>
-                      </a:solidFill>
-                      <a:prstDash val="solid"/>
-                      <a:round/>
-                      <a:headEnd type="none" w="med" len="med"/>
-                      <a:tailEnd type="none" w="med" len="med"/>
-                    </a:lnB>
-                    <a:solidFill>
-                      <a:srgbClr val="FFFFFF"/>
-                    </a:solidFill>
-                  </a:tcPr>
-                </a:tc>
-              </a:tr>
-              <a:tr h="237744">
-                <a:tc>
-                  <a:txBody>
-                    <a:bodyPr/>
-                    <a:lstStyle/>
-                    <a:p>
-                      <a:pPr indent="0" marL="0">
-                        <a:buNone/>
-                      </a:pPr>
-                      <a:r>
-                        <a:rPr lang="en-US" sz="700" dirty="0">
-                          <a:solidFill>
-                            <a:srgbClr val="1E2B37"/>
-                          </a:solidFill>
-                          <a:latin typeface="Courier New" pitchFamily="34" charset="0"/>
-                          <a:ea typeface="Courier New" pitchFamily="34" charset="-122"/>
-                          <a:cs typeface="Courier New" pitchFamily="34" charset="-120"/>
-                        </a:rPr>
-                        <a:t>forbidden_words_scene</a:t>
-                      </a:r>
-                      <a:endParaRPr lang="en-US" sz="700" dirty="0">
-                        <a:latin typeface="Courier New" charset="0"/>
-                        <a:ea typeface="Courier New" charset="0"/>
-                        <a:cs typeface="Courier New" charset="0"/>
-                      </a:endParaRPr>
-                    </a:p>
-                  </a:txBody>
-                  <a:tcPr marL="45720" marR="45720" marT="45720" marB="45720" anchor="ctr">
-                    <a:lnL w="6350" cap="flat" cmpd="sng" algn="ctr">
-                      <a:solidFill>
-                        <a:srgbClr val="E6E9EC"/>
-                      </a:solidFill>
-                      <a:prstDash val="solid"/>
-                      <a:round/>
-                      <a:headEnd type="none" w="med" len="med"/>
-                      <a:tailEnd type="none" w="med" len="med"/>
-                    </a:lnL>
-                    <a:lnR w="6350" cap="flat" cmpd="sng" algn="ctr">
-                      <a:solidFill>
-                        <a:srgbClr val="E6E9EC"/>
-                      </a:solidFill>
-                      <a:prstDash val="solid"/>
-                      <a:round/>
-                      <a:headEnd type="none" w="med" len="med"/>
-                      <a:tailEnd type="none" w="med" len="med"/>
-                    </a:lnR>
-                    <a:lnT w="6350" cap="flat" cmpd="sng" algn="ctr">
-                      <a:solidFill>
-                        <a:srgbClr val="E6E9EC"/>
-                      </a:solidFill>
-                      <a:prstDash val="solid"/>
-                      <a:round/>
-                      <a:headEnd type="none" w="med" len="med"/>
-                      <a:tailEnd type="none" w="med" len="med"/>
-                    </a:lnT>
-                    <a:lnB w="6350" cap="flat" cmpd="sng" algn="ctr">
-                      <a:solidFill>
-                        <a:srgbClr val="E6E9EC"/>
-                      </a:solidFill>
-                      <a:prstDash val="solid"/>
-                      <a:round/>
-                      <a:headEnd type="none" w="med" len="med"/>
-                      <a:tailEnd type="none" w="med" len="med"/>
-                    </a:lnB>
-                    <a:solidFill>
-                      <a:srgbClr val="F7F8FA"/>
-                    </a:solidFill>
-                  </a:tcPr>
-                </a:tc>
-                <a:tc>
-                  <a:txBody>
-                    <a:bodyPr/>
-                    <a:lstStyle/>
-                    <a:p>
-                      <a:pPr algn="ctr" indent="0" marL="0">
-                        <a:buNone/>
-                      </a:pPr>
-                      <a:r>
-                        <a:rPr lang="en-US" sz="750" b="1" dirty="0">
-                          <a:solidFill>
-                            <a:srgbClr val="16794A"/>
-                          </a:solidFill>
-                          <a:latin typeface="Arial" pitchFamily="34" charset="0"/>
-                          <a:ea typeface="Arial" pitchFamily="34" charset="-122"/>
-                          <a:cs typeface="Arial" pitchFamily="34" charset="-120"/>
-                        </a:rPr>
-                        <a:t>✓</a:t>
-                      </a:r>
-                      <a:endParaRPr lang="en-US" sz="750" dirty="0">
-                        <a:latin typeface="Arial" charset="0"/>
-                        <a:ea typeface="Arial" charset="0"/>
-                        <a:cs typeface="Arial" charset="0"/>
-                      </a:endParaRPr>
-                    </a:p>
-                  </a:txBody>
-                  <a:tcPr marL="45720" marR="45720" marT="45720" marB="45720" anchor="ctr">
-                    <a:lnL w="6350" cap="flat" cmpd="sng" algn="ctr">
-                      <a:solidFill>
-                        <a:srgbClr val="E6E9EC"/>
-                      </a:solidFill>
-                      <a:prstDash val="solid"/>
-                      <a:round/>
-                      <a:headEnd type="none" w="med" len="med"/>
-                      <a:tailEnd type="none" w="med" len="med"/>
-                    </a:lnL>
-                    <a:lnR w="6350" cap="flat" cmpd="sng" algn="ctr">
-                      <a:solidFill>
-                        <a:srgbClr val="E6E9EC"/>
-                      </a:solidFill>
-                      <a:prstDash val="solid"/>
-                      <a:round/>
-                      <a:headEnd type="none" w="med" len="med"/>
-                      <a:tailEnd type="none" w="med" len="med"/>
-                    </a:lnR>
-                    <a:lnT w="6350" cap="flat" cmpd="sng" algn="ctr">
-                      <a:solidFill>
-                        <a:srgbClr val="E6E9EC"/>
-                      </a:solidFill>
-                      <a:prstDash val="solid"/>
-                      <a:round/>
-                      <a:headEnd type="none" w="med" len="med"/>
-                      <a:tailEnd type="none" w="med" len="med"/>
-                    </a:lnT>
-                    <a:lnB w="6350" cap="flat" cmpd="sng" algn="ctr">
-                      <a:solidFill>
-                        <a:srgbClr val="E6E9EC"/>
-                      </a:solidFill>
-                      <a:prstDash val="solid"/>
-                      <a:round/>
-                      <a:headEnd type="none" w="med" len="med"/>
-                      <a:tailEnd type="none" w="med" len="med"/>
-                    </a:lnB>
-                    <a:solidFill>
-                      <a:srgbClr val="F7F8FA"/>
-                    </a:solidFill>
-                  </a:tcPr>
-                </a:tc>
-                <a:tc>
-                  <a:txBody>
-                    <a:bodyPr/>
-                    <a:lstStyle/>
-                    <a:p>
-                      <a:pPr algn="ctr" indent="0" marL="0">
-                        <a:buNone/>
-                      </a:pPr>
-                      <a:r>
-                        <a:rPr lang="en-US" sz="750" b="1" dirty="0">
-                          <a:solidFill>
-                            <a:srgbClr val="16794A"/>
-                          </a:solidFill>
-                          <a:latin typeface="Arial" pitchFamily="34" charset="0"/>
-                          <a:ea typeface="Arial" pitchFamily="34" charset="-122"/>
-                          <a:cs typeface="Arial" pitchFamily="34" charset="-120"/>
-                        </a:rPr>
-                        <a:t>✓</a:t>
-                      </a:r>
-                      <a:endParaRPr lang="en-US" sz="750" dirty="0">
-                        <a:latin typeface="Arial" charset="0"/>
-                        <a:ea typeface="Arial" charset="0"/>
-                        <a:cs typeface="Arial" charset="0"/>
-                      </a:endParaRPr>
-                    </a:p>
-                  </a:txBody>
-                  <a:tcPr marL="45720" marR="45720" marT="45720" marB="45720" anchor="ctr">
-                    <a:lnL w="6350" cap="flat" cmpd="sng" algn="ctr">
-                      <a:solidFill>
-                        <a:srgbClr val="E6E9EC"/>
-                      </a:solidFill>
-                      <a:prstDash val="solid"/>
-                      <a:round/>
-                      <a:headEnd type="none" w="med" len="med"/>
-                      <a:tailEnd type="none" w="med" len="med"/>
-                    </a:lnL>
-                    <a:lnR w="6350" cap="flat" cmpd="sng" algn="ctr">
-                      <a:solidFill>
-                        <a:srgbClr val="E6E9EC"/>
-                      </a:solidFill>
-                      <a:prstDash val="solid"/>
-                      <a:round/>
-                      <a:headEnd type="none" w="med" len="med"/>
-                      <a:tailEnd type="none" w="med" len="med"/>
-                    </a:lnR>
-                    <a:lnT w="6350" cap="flat" cmpd="sng" algn="ctr">
-                      <a:solidFill>
-                        <a:srgbClr val="E6E9EC"/>
-                      </a:solidFill>
-                      <a:prstDash val="solid"/>
-                      <a:round/>
-                      <a:headEnd type="none" w="med" len="med"/>
-                      <a:tailEnd type="none" w="med" len="med"/>
-                    </a:lnT>
-                    <a:lnB w="6350" cap="flat" cmpd="sng" algn="ctr">
-                      <a:solidFill>
-                        <a:srgbClr val="E6E9EC"/>
-                      </a:solidFill>
-                      <a:prstDash val="solid"/>
-                      <a:round/>
-                      <a:headEnd type="none" w="med" len="med"/>
-                      <a:tailEnd type="none" w="med" len="med"/>
-                    </a:lnB>
-                    <a:solidFill>
-                      <a:srgbClr val="F7F8FA"/>
-                    </a:solidFill>
-                  </a:tcPr>
-                </a:tc>
-                <a:tc>
-                  <a:txBody>
-                    <a:bodyPr/>
-                    <a:lstStyle/>
-                    <a:p>
-                      <a:pPr algn="ctr" indent="0" marL="0">
-                        <a:buNone/>
-                      </a:pPr>
-                      <a:r>
-                        <a:rPr lang="en-US" sz="750" dirty="0">
-                          <a:solidFill>
-                            <a:srgbClr val="5E6A77"/>
-                          </a:solidFill>
-                          <a:latin typeface="Arial" pitchFamily="34" charset="0"/>
-                          <a:ea typeface="Arial" pitchFamily="34" charset="-122"/>
-                          <a:cs typeface="Arial" pitchFamily="34" charset="-120"/>
-                        </a:rPr>
-                        <a:t>—</a:t>
-                      </a:r>
-                      <a:endParaRPr lang="en-US" sz="750" dirty="0">
-                        <a:latin typeface="Arial" charset="0"/>
-                        <a:ea typeface="Arial" charset="0"/>
-                        <a:cs typeface="Arial" charset="0"/>
-                      </a:endParaRPr>
-                    </a:p>
-                  </a:txBody>
-                  <a:tcPr marL="45720" marR="45720" marT="45720" marB="45720" anchor="ctr">
-                    <a:lnL w="6350" cap="flat" cmpd="sng" algn="ctr">
-                      <a:solidFill>
-                        <a:srgbClr val="E6E9EC"/>
-                      </a:solidFill>
-                      <a:prstDash val="solid"/>
-                      <a:round/>
-                      <a:headEnd type="none" w="med" len="med"/>
-                      <a:tailEnd type="none" w="med" len="med"/>
-                    </a:lnL>
-                    <a:lnR w="6350" cap="flat" cmpd="sng" algn="ctr">
-                      <a:solidFill>
-                        <a:srgbClr val="E6E9EC"/>
-                      </a:solidFill>
-                      <a:prstDash val="solid"/>
-                      <a:round/>
-                      <a:headEnd type="none" w="med" len="med"/>
-                      <a:tailEnd type="none" w="med" len="med"/>
-                    </a:lnR>
-                    <a:lnT w="6350" cap="flat" cmpd="sng" algn="ctr">
-                      <a:solidFill>
-                        <a:srgbClr val="E6E9EC"/>
-                      </a:solidFill>
-                      <a:prstDash val="solid"/>
-                      <a:round/>
-                      <a:headEnd type="none" w="med" len="med"/>
-                      <a:tailEnd type="none" w="med" len="med"/>
-                    </a:lnT>
-                    <a:lnB w="6350" cap="flat" cmpd="sng" algn="ctr">
-                      <a:solidFill>
-                        <a:srgbClr val="E6E9EC"/>
-                      </a:solidFill>
-                      <a:prstDash val="solid"/>
-                      <a:round/>
-                      <a:headEnd type="none" w="med" len="med"/>
-                      <a:tailEnd type="none" w="med" len="med"/>
-                    </a:lnB>
-                    <a:solidFill>
-                      <a:srgbClr val="F7F8FA"/>
-                    </a:solidFill>
-                  </a:tcPr>
-                </a:tc>
-                <a:tc>
-                  <a:txBody>
-                    <a:bodyPr/>
-                    <a:lstStyle/>
-                    <a:p>
-                      <a:pPr algn="ctr" indent="0" marL="0">
-                        <a:buNone/>
-                      </a:pPr>
-                      <a:r>
-                        <a:rPr lang="en-US" sz="750" b="1" dirty="0">
-                          <a:solidFill>
-                            <a:srgbClr val="16794A"/>
-                          </a:solidFill>
-                          <a:latin typeface="Arial" pitchFamily="34" charset="0"/>
-                          <a:ea typeface="Arial" pitchFamily="34" charset="-122"/>
-                          <a:cs typeface="Arial" pitchFamily="34" charset="-120"/>
-                        </a:rPr>
-                        <a:t>✓</a:t>
-                      </a:r>
-                      <a:endParaRPr lang="en-US" sz="750" dirty="0">
-                        <a:latin typeface="Arial" charset="0"/>
-                        <a:ea typeface="Arial" charset="0"/>
-                        <a:cs typeface="Arial" charset="0"/>
-                      </a:endParaRPr>
-                    </a:p>
-                  </a:txBody>
-                  <a:tcPr marL="45720" marR="45720" marT="45720" marB="45720" anchor="ctr">
-                    <a:lnL w="6350" cap="flat" cmpd="sng" algn="ctr">
-                      <a:solidFill>
-                        <a:srgbClr val="E6E9EC"/>
-                      </a:solidFill>
-                      <a:prstDash val="solid"/>
-                      <a:round/>
-                      <a:headEnd type="none" w="med" len="med"/>
-                      <a:tailEnd type="none" w="med" len="med"/>
-                    </a:lnL>
-                    <a:lnR w="6350" cap="flat" cmpd="sng" algn="ctr">
-                      <a:solidFill>
-                        <a:srgbClr val="E6E9EC"/>
-                      </a:solidFill>
-                      <a:prstDash val="solid"/>
-                      <a:round/>
-                      <a:headEnd type="none" w="med" len="med"/>
-                      <a:tailEnd type="none" w="med" len="med"/>
-                    </a:lnR>
-                    <a:lnT w="6350" cap="flat" cmpd="sng" algn="ctr">
-                      <a:solidFill>
-                        <a:srgbClr val="E6E9EC"/>
-                      </a:solidFill>
-                      <a:prstDash val="solid"/>
-                      <a:round/>
-                      <a:headEnd type="none" w="med" len="med"/>
-                      <a:tailEnd type="none" w="med" len="med"/>
-                    </a:lnT>
-                    <a:lnB w="6350" cap="flat" cmpd="sng" algn="ctr">
-                      <a:solidFill>
-                        <a:srgbClr val="E6E9EC"/>
-                      </a:solidFill>
-                      <a:prstDash val="solid"/>
-                      <a:round/>
-                      <a:headEnd type="none" w="med" len="med"/>
-                      <a:tailEnd type="none" w="med" len="med"/>
-                    </a:lnB>
-                    <a:solidFill>
-                      <a:srgbClr val="F7F8FA"/>
-                    </a:solidFill>
-                  </a:tcPr>
-                </a:tc>
-                <a:tc>
-                  <a:txBody>
-                    <a:bodyPr/>
-                    <a:lstStyle/>
-                    <a:p>
-                      <a:pPr algn="ctr" indent="0" marL="0">
-                        <a:buNone/>
-                      </a:pPr>
-                      <a:r>
-                        <a:rPr lang="en-US" sz="750" b="1" dirty="0">
-                          <a:solidFill>
-                            <a:srgbClr val="16794A"/>
-                          </a:solidFill>
-                          <a:latin typeface="Arial" pitchFamily="34" charset="0"/>
-                          <a:ea typeface="Arial" pitchFamily="34" charset="-122"/>
-                          <a:cs typeface="Arial" pitchFamily="34" charset="-120"/>
-                        </a:rPr>
-                        <a:t>✓</a:t>
-                      </a:r>
-                      <a:endParaRPr lang="en-US" sz="750" dirty="0">
-                        <a:latin typeface="Arial" charset="0"/>
-                        <a:ea typeface="Arial" charset="0"/>
-                        <a:cs typeface="Arial" charset="0"/>
-                      </a:endParaRPr>
-                    </a:p>
-                  </a:txBody>
-                  <a:tcPr marL="45720" marR="45720" marT="45720" marB="45720" anchor="ctr">
-                    <a:lnL w="6350" cap="flat" cmpd="sng" algn="ctr">
-                      <a:solidFill>
-                        <a:srgbClr val="E6E9EC"/>
-                      </a:solidFill>
-                      <a:prstDash val="solid"/>
-                      <a:round/>
-                      <a:headEnd type="none" w="med" len="med"/>
-                      <a:tailEnd type="none" w="med" len="med"/>
-                    </a:lnL>
-                    <a:lnR w="6350" cap="flat" cmpd="sng" algn="ctr">
-                      <a:solidFill>
-                        <a:srgbClr val="E6E9EC"/>
-                      </a:solidFill>
-                      <a:prstDash val="solid"/>
-                      <a:round/>
-                      <a:headEnd type="none" w="med" len="med"/>
-                      <a:tailEnd type="none" w="med" len="med"/>
-                    </a:lnR>
-                    <a:lnT w="6350" cap="flat" cmpd="sng" algn="ctr">
-                      <a:solidFill>
-                        <a:srgbClr val="E6E9EC"/>
-                      </a:solidFill>
-                      <a:prstDash val="solid"/>
-                      <a:round/>
-                      <a:headEnd type="none" w="med" len="med"/>
-                      <a:tailEnd type="none" w="med" len="med"/>
-                    </a:lnT>
-                    <a:lnB w="6350" cap="flat" cmpd="sng" algn="ctr">
-                      <a:solidFill>
-                        <a:srgbClr val="E6E9EC"/>
-                      </a:solidFill>
-                      <a:prstDash val="solid"/>
-                      <a:round/>
-                      <a:headEnd type="none" w="med" len="med"/>
-                      <a:tailEnd type="none" w="med" len="med"/>
-                    </a:lnB>
-                    <a:solidFill>
-                      <a:srgbClr val="F7F8FA"/>
-                    </a:solidFill>
-                  </a:tcPr>
-                </a:tc>
-                <a:tc>
-                  <a:txBody>
-                    <a:bodyPr/>
-                    <a:lstStyle/>
-                    <a:p>
-                      <a:pPr algn="ctr" indent="0" marL="0">
-                        <a:buNone/>
-                      </a:pPr>
-                      <a:r>
-                        <a:rPr lang="en-US" sz="750" b="1" dirty="0">
-                          <a:solidFill>
-                            <a:srgbClr val="16794A"/>
-                          </a:solidFill>
-                          <a:latin typeface="Arial" pitchFamily="34" charset="0"/>
-                          <a:ea typeface="Arial" pitchFamily="34" charset="-122"/>
-                          <a:cs typeface="Arial" pitchFamily="34" charset="-120"/>
-                        </a:rPr>
-                        <a:t>✓</a:t>
-                      </a:r>
-                      <a:endParaRPr lang="en-US" sz="750" dirty="0">
-                        <a:latin typeface="Arial" charset="0"/>
-                        <a:ea typeface="Arial" charset="0"/>
-                        <a:cs typeface="Arial" charset="0"/>
-                      </a:endParaRPr>
-                    </a:p>
-                  </a:txBody>
-                  <a:tcPr marL="45720" marR="45720" marT="45720" marB="45720" anchor="ctr">
-                    <a:lnL w="6350" cap="flat" cmpd="sng" algn="ctr">
-                      <a:solidFill>
-                        <a:srgbClr val="E6E9EC"/>
-                      </a:solidFill>
-                      <a:prstDash val="solid"/>
-                      <a:round/>
-                      <a:headEnd type="none" w="med" len="med"/>
-                      <a:tailEnd type="none" w="med" len="med"/>
-                    </a:lnL>
-                    <a:lnR w="6350" cap="flat" cmpd="sng" algn="ctr">
-                      <a:solidFill>
-                        <a:srgbClr val="E6E9EC"/>
-                      </a:solidFill>
-                      <a:prstDash val="solid"/>
-                      <a:round/>
-                      <a:headEnd type="none" w="med" len="med"/>
-                      <a:tailEnd type="none" w="med" len="med"/>
-                    </a:lnR>
-                    <a:lnT w="6350" cap="flat" cmpd="sng" algn="ctr">
-                      <a:solidFill>
-                        <a:srgbClr val="E6E9EC"/>
-                      </a:solidFill>
-                      <a:prstDash val="solid"/>
-                      <a:round/>
-                      <a:headEnd type="none" w="med" len="med"/>
-                      <a:tailEnd type="none" w="med" len="med"/>
-                    </a:lnT>
-                    <a:lnB w="6350" cap="flat" cmpd="sng" algn="ctr">
-                      <a:solidFill>
-                        <a:srgbClr val="E6E9EC"/>
-                      </a:solidFill>
-                      <a:prstDash val="solid"/>
-                      <a:round/>
-                      <a:headEnd type="none" w="med" len="med"/>
-                      <a:tailEnd type="none" w="med" len="med"/>
-                    </a:lnB>
-                    <a:solidFill>
-                      <a:srgbClr val="F7F8FA"/>
-                    </a:solidFill>
-                  </a:tcPr>
-                </a:tc>
-                <a:tc>
-                  <a:txBody>
-                    <a:bodyPr/>
-                    <a:lstStyle/>
-                    <a:p>
-                      <a:pPr algn="ctr" indent="0" marL="0">
-                        <a:buNone/>
-                      </a:pPr>
-                      <a:r>
-                        <a:rPr lang="en-US" sz="750" dirty="0">
-                          <a:solidFill>
-                            <a:srgbClr val="5E6A77"/>
-                          </a:solidFill>
-                          <a:latin typeface="Arial" pitchFamily="34" charset="0"/>
-                          <a:ea typeface="Arial" pitchFamily="34" charset="-122"/>
-                          <a:cs typeface="Arial" pitchFamily="34" charset="-120"/>
-                        </a:rPr>
-                        <a:t>—</a:t>
-                      </a:r>
-                      <a:endParaRPr lang="en-US" sz="750" dirty="0">
-                        <a:latin typeface="Arial" charset="0"/>
-                        <a:ea typeface="Arial" charset="0"/>
-                        <a:cs typeface="Arial" charset="0"/>
-                      </a:endParaRPr>
-                    </a:p>
-                  </a:txBody>
-                  <a:tcPr marL="45720" marR="45720" marT="45720" marB="45720" anchor="ctr">
-                    <a:lnL w="6350" cap="flat" cmpd="sng" algn="ctr">
-                      <a:solidFill>
-                        <a:srgbClr val="E6E9EC"/>
-                      </a:solidFill>
-                      <a:prstDash val="solid"/>
-                      <a:round/>
-                      <a:headEnd type="none" w="med" len="med"/>
-                      <a:tailEnd type="none" w="med" len="med"/>
-                    </a:lnL>
-                    <a:lnR w="6350" cap="flat" cmpd="sng" algn="ctr">
-                      <a:solidFill>
-                        <a:srgbClr val="E6E9EC"/>
-                      </a:solidFill>
-                      <a:prstDash val="solid"/>
-                      <a:round/>
-                      <a:headEnd type="none" w="med" len="med"/>
-                      <a:tailEnd type="none" w="med" len="med"/>
-                    </a:lnR>
-                    <a:lnT w="6350" cap="flat" cmpd="sng" algn="ctr">
-                      <a:solidFill>
-                        <a:srgbClr val="E6E9EC"/>
-                      </a:solidFill>
-                      <a:prstDash val="solid"/>
-                      <a:round/>
-                      <a:headEnd type="none" w="med" len="med"/>
-                      <a:tailEnd type="none" w="med" len="med"/>
-                    </a:lnT>
-                    <a:lnB w="6350" cap="flat" cmpd="sng" algn="ctr">
-                      <a:solidFill>
-                        <a:srgbClr val="E6E9EC"/>
-                      </a:solidFill>
-                      <a:prstDash val="solid"/>
-                      <a:round/>
-                      <a:headEnd type="none" w="med" len="med"/>
-                      <a:tailEnd type="none" w="med" len="med"/>
-                    </a:lnB>
-                    <a:solidFill>
-                      <a:srgbClr val="F7F8FA"/>
-                    </a:solidFill>
-                  </a:tcPr>
-                </a:tc>
-              </a:tr>
-              <a:tr h="237744">
-                <a:tc>
-                  <a:txBody>
-                    <a:bodyPr/>
-                    <a:lstStyle/>
-                    <a:p>
-                      <a:pPr indent="0" marL="0">
-                        <a:buNone/>
-                      </a:pPr>
-                      <a:r>
-                        <a:rPr lang="en-US" sz="700" dirty="0">
-                          <a:solidFill>
-                            <a:srgbClr val="1E2B37"/>
-                          </a:solidFill>
-                          <a:latin typeface="Courier New" pitchFamily="34" charset="0"/>
-                          <a:ea typeface="Courier New" pitchFamily="34" charset="-122"/>
-                          <a:cs typeface="Courier New" pitchFamily="34" charset="-120"/>
-                        </a:rPr>
-                        <a:t>forbidden_words_chapter</a:t>
-                      </a:r>
-                      <a:endParaRPr lang="en-US" sz="700" dirty="0">
-                        <a:latin typeface="Courier New" charset="0"/>
-                        <a:ea typeface="Courier New" charset="0"/>
-                        <a:cs typeface="Courier New" charset="0"/>
-                      </a:endParaRPr>
-                    </a:p>
-                  </a:txBody>
-                  <a:tcPr marL="45720" marR="45720" marT="45720" marB="45720" anchor="ctr">
-                    <a:lnL w="6350" cap="flat" cmpd="sng" algn="ctr">
-                      <a:solidFill>
-                        <a:srgbClr val="E6E9EC"/>
-                      </a:solidFill>
-                      <a:prstDash val="solid"/>
-                      <a:round/>
-                      <a:headEnd type="none" w="med" len="med"/>
-                      <a:tailEnd type="none" w="med" len="med"/>
-                    </a:lnL>
-                    <a:lnR w="6350" cap="flat" cmpd="sng" algn="ctr">
-                      <a:solidFill>
-                        <a:srgbClr val="E6E9EC"/>
-                      </a:solidFill>
-                      <a:prstDash val="solid"/>
-                      <a:round/>
-                      <a:headEnd type="none" w="med" len="med"/>
-                      <a:tailEnd type="none" w="med" len="med"/>
-                    </a:lnR>
-                    <a:lnT w="6350" cap="flat" cmpd="sng" algn="ctr">
-                      <a:solidFill>
-                        <a:srgbClr val="E6E9EC"/>
-                      </a:solidFill>
-                      <a:prstDash val="solid"/>
-                      <a:round/>
-                      <a:headEnd type="none" w="med" len="med"/>
-                      <a:tailEnd type="none" w="med" len="med"/>
-                    </a:lnT>
-                    <a:lnB w="6350" cap="flat" cmpd="sng" algn="ctr">
-                      <a:solidFill>
-                        <a:srgbClr val="E6E9EC"/>
-                      </a:solidFill>
-                      <a:prstDash val="solid"/>
-                      <a:round/>
-                      <a:headEnd type="none" w="med" len="med"/>
-                      <a:tailEnd type="none" w="med" len="med"/>
-                    </a:lnB>
-                    <a:solidFill>
-                      <a:srgbClr val="FFFFFF"/>
-                    </a:solidFill>
-                  </a:tcPr>
-                </a:tc>
-                <a:tc>
-                  <a:txBody>
-                    <a:bodyPr/>
-                    <a:lstStyle/>
-                    <a:p>
-                      <a:pPr algn="ctr" indent="0" marL="0">
-                        <a:buNone/>
-                      </a:pPr>
-                      <a:r>
-                        <a:rPr lang="en-US" sz="750" b="1" dirty="0">
-                          <a:solidFill>
-                            <a:srgbClr val="16794A"/>
-                          </a:solidFill>
-                          <a:latin typeface="Arial" pitchFamily="34" charset="0"/>
-                          <a:ea typeface="Arial" pitchFamily="34" charset="-122"/>
-                          <a:cs typeface="Arial" pitchFamily="34" charset="-120"/>
-                        </a:rPr>
-                        <a:t>✓</a:t>
-                      </a:r>
-                      <a:endParaRPr lang="en-US" sz="750" dirty="0">
-                        <a:latin typeface="Arial" charset="0"/>
-                        <a:ea typeface="Arial" charset="0"/>
-                        <a:cs typeface="Arial" charset="0"/>
-                      </a:endParaRPr>
-                    </a:p>
-                  </a:txBody>
-                  <a:tcPr marL="45720" marR="45720" marT="45720" marB="45720" anchor="ctr">
-                    <a:lnL w="6350" cap="flat" cmpd="sng" algn="ctr">
-                      <a:solidFill>
-                        <a:srgbClr val="E6E9EC"/>
-                      </a:solidFill>
-                      <a:prstDash val="solid"/>
-                      <a:round/>
-                      <a:headEnd type="none" w="med" len="med"/>
-                      <a:tailEnd type="none" w="med" len="med"/>
-                    </a:lnL>
-                    <a:lnR w="6350" cap="flat" cmpd="sng" algn="ctr">
-                      <a:solidFill>
-                        <a:srgbClr val="E6E9EC"/>
-                      </a:solidFill>
-                      <a:prstDash val="solid"/>
-                      <a:round/>
-                      <a:headEnd type="none" w="med" len="med"/>
-                      <a:tailEnd type="none" w="med" len="med"/>
-                    </a:lnR>
-                    <a:lnT w="6350" cap="flat" cmpd="sng" algn="ctr">
-                      <a:solidFill>
-                        <a:srgbClr val="E6E9EC"/>
-                      </a:solidFill>
-                      <a:prstDash val="solid"/>
-                      <a:round/>
-                      <a:headEnd type="none" w="med" len="med"/>
-                      <a:tailEnd type="none" w="med" len="med"/>
-                    </a:lnT>
-                    <a:lnB w="6350" cap="flat" cmpd="sng" algn="ctr">
-                      <a:solidFill>
-                        <a:srgbClr val="E6E9EC"/>
-                      </a:solidFill>
-                      <a:prstDash val="solid"/>
-                      <a:round/>
-                      <a:headEnd type="none" w="med" len="med"/>
-                      <a:tailEnd type="none" w="med" len="med"/>
-                    </a:lnB>
-                    <a:solidFill>
-                      <a:srgbClr val="FFFFFF"/>
-                    </a:solidFill>
-                  </a:tcPr>
-                </a:tc>
-                <a:tc>
-                  <a:txBody>
-                    <a:bodyPr/>
-                    <a:lstStyle/>
-                    <a:p>
-                      <a:pPr algn="ctr" indent="0" marL="0">
-                        <a:buNone/>
-                      </a:pPr>
-                      <a:r>
-                        <a:rPr lang="en-US" sz="750" b="1" dirty="0">
-                          <a:solidFill>
-                            <a:srgbClr val="16794A"/>
-                          </a:solidFill>
-                          <a:latin typeface="Arial" pitchFamily="34" charset="0"/>
-                          <a:ea typeface="Arial" pitchFamily="34" charset="-122"/>
-                          <a:cs typeface="Arial" pitchFamily="34" charset="-120"/>
-                        </a:rPr>
-                        <a:t>✓</a:t>
-                      </a:r>
-                      <a:endParaRPr lang="en-US" sz="750" dirty="0">
-                        <a:latin typeface="Arial" charset="0"/>
-                        <a:ea typeface="Arial" charset="0"/>
-                        <a:cs typeface="Arial" charset="0"/>
-                      </a:endParaRPr>
-                    </a:p>
-                  </a:txBody>
-                  <a:tcPr marL="45720" marR="45720" marT="45720" marB="45720" anchor="ctr">
-                    <a:lnL w="6350" cap="flat" cmpd="sng" algn="ctr">
-                      <a:solidFill>
-                        <a:srgbClr val="E6E9EC"/>
-                      </a:solidFill>
-                      <a:prstDash val="solid"/>
-                      <a:round/>
-                      <a:headEnd type="none" w="med" len="med"/>
-                      <a:tailEnd type="none" w="med" len="med"/>
-                    </a:lnL>
-                    <a:lnR w="6350" cap="flat" cmpd="sng" algn="ctr">
-                      <a:solidFill>
-                        <a:srgbClr val="E6E9EC"/>
-                      </a:solidFill>
-                      <a:prstDash val="solid"/>
-                      <a:round/>
-                      <a:headEnd type="none" w="med" len="med"/>
-                      <a:tailEnd type="none" w="med" len="med"/>
-                    </a:lnR>
-                    <a:lnT w="6350" cap="flat" cmpd="sng" algn="ctr">
-                      <a:solidFill>
-                        <a:srgbClr val="E6E9EC"/>
-                      </a:solidFill>
-                      <a:prstDash val="solid"/>
-                      <a:round/>
-                      <a:headEnd type="none" w="med" len="med"/>
-                      <a:tailEnd type="none" w="med" len="med"/>
-                    </a:lnT>
-                    <a:lnB w="6350" cap="flat" cmpd="sng" algn="ctr">
-                      <a:solidFill>
-                        <a:srgbClr val="E6E9EC"/>
-                      </a:solidFill>
-                      <a:prstDash val="solid"/>
-                      <a:round/>
-                      <a:headEnd type="none" w="med" len="med"/>
-                      <a:tailEnd type="none" w="med" len="med"/>
-                    </a:lnB>
-                    <a:solidFill>
-                      <a:srgbClr val="FFFFFF"/>
-                    </a:solidFill>
-                  </a:tcPr>
-                </a:tc>
-                <a:tc>
-                  <a:txBody>
-                    <a:bodyPr/>
-                    <a:lstStyle/>
-                    <a:p>
-                      <a:pPr algn="ctr" indent="0" marL="0">
-                        <a:buNone/>
-                      </a:pPr>
-                      <a:r>
-                        <a:rPr lang="en-US" sz="750" dirty="0">
-                          <a:solidFill>
-                            <a:srgbClr val="5E6A77"/>
-                          </a:solidFill>
-                          <a:latin typeface="Arial" pitchFamily="34" charset="0"/>
-                          <a:ea typeface="Arial" pitchFamily="34" charset="-122"/>
-                          <a:cs typeface="Arial" pitchFamily="34" charset="-120"/>
-                        </a:rPr>
-                        <a:t>—</a:t>
-                      </a:r>
-                      <a:endParaRPr lang="en-US" sz="750" dirty="0">
-                        <a:latin typeface="Arial" charset="0"/>
-                        <a:ea typeface="Arial" charset="0"/>
-                        <a:cs typeface="Arial" charset="0"/>
-                      </a:endParaRPr>
-                    </a:p>
-                  </a:txBody>
-                  <a:tcPr marL="45720" marR="45720" marT="45720" marB="45720" anchor="ctr">
-                    <a:lnL w="6350" cap="flat" cmpd="sng" algn="ctr">
-                      <a:solidFill>
-                        <a:srgbClr val="E6E9EC"/>
-                      </a:solidFill>
-                      <a:prstDash val="solid"/>
-                      <a:round/>
-                      <a:headEnd type="none" w="med" len="med"/>
-                      <a:tailEnd type="none" w="med" len="med"/>
-                    </a:lnL>
-                    <a:lnR w="6350" cap="flat" cmpd="sng" algn="ctr">
-                      <a:solidFill>
-                        <a:srgbClr val="E6E9EC"/>
-                      </a:solidFill>
-                      <a:prstDash val="solid"/>
-                      <a:round/>
-                      <a:headEnd type="none" w="med" len="med"/>
-                      <a:tailEnd type="none" w="med" len="med"/>
-                    </a:lnR>
-                    <a:lnT w="6350" cap="flat" cmpd="sng" algn="ctr">
-                      <a:solidFill>
-                        <a:srgbClr val="E6E9EC"/>
-                      </a:solidFill>
-                      <a:prstDash val="solid"/>
-                      <a:round/>
-                      <a:headEnd type="none" w="med" len="med"/>
-                      <a:tailEnd type="none" w="med" len="med"/>
-                    </a:lnT>
-                    <a:lnB w="6350" cap="flat" cmpd="sng" algn="ctr">
-                      <a:solidFill>
-                        <a:srgbClr val="E6E9EC"/>
-                      </a:solidFill>
-                      <a:prstDash val="solid"/>
-                      <a:round/>
-                      <a:headEnd type="none" w="med" len="med"/>
-                      <a:tailEnd type="none" w="med" len="med"/>
-                    </a:lnB>
-                    <a:solidFill>
-                      <a:srgbClr val="FFFFFF"/>
-                    </a:solidFill>
-                  </a:tcPr>
-                </a:tc>
-                <a:tc>
-                  <a:txBody>
-                    <a:bodyPr/>
-                    <a:lstStyle/>
-                    <a:p>
-                      <a:pPr algn="ctr" indent="0" marL="0">
-                        <a:buNone/>
-                      </a:pPr>
-                      <a:r>
-                        <a:rPr lang="en-US" sz="750" b="1" dirty="0">
-                          <a:solidFill>
-                            <a:srgbClr val="16794A"/>
-                          </a:solidFill>
-                          <a:latin typeface="Arial" pitchFamily="34" charset="0"/>
-                          <a:ea typeface="Arial" pitchFamily="34" charset="-122"/>
-                          <a:cs typeface="Arial" pitchFamily="34" charset="-120"/>
-                        </a:rPr>
-                        <a:t>✓</a:t>
-                      </a:r>
-                      <a:endParaRPr lang="en-US" sz="750" dirty="0">
-                        <a:latin typeface="Arial" charset="0"/>
-                        <a:ea typeface="Arial" charset="0"/>
-                        <a:cs typeface="Arial" charset="0"/>
-                      </a:endParaRPr>
-                    </a:p>
-                  </a:txBody>
-                  <a:tcPr marL="45720" marR="45720" marT="45720" marB="45720" anchor="ctr">
-                    <a:lnL w="6350" cap="flat" cmpd="sng" algn="ctr">
-                      <a:solidFill>
-                        <a:srgbClr val="E6E9EC"/>
-                      </a:solidFill>
-                      <a:prstDash val="solid"/>
-                      <a:round/>
-                      <a:headEnd type="none" w="med" len="med"/>
-                      <a:tailEnd type="none" w="med" len="med"/>
-                    </a:lnL>
-                    <a:lnR w="6350" cap="flat" cmpd="sng" algn="ctr">
-                      <a:solidFill>
-                        <a:srgbClr val="E6E9EC"/>
-                      </a:solidFill>
-                      <a:prstDash val="solid"/>
-                      <a:round/>
-                      <a:headEnd type="none" w="med" len="med"/>
-                      <a:tailEnd type="none" w="med" len="med"/>
-                    </a:lnR>
-                    <a:lnT w="6350" cap="flat" cmpd="sng" algn="ctr">
-                      <a:solidFill>
-                        <a:srgbClr val="E6E9EC"/>
-                      </a:solidFill>
-                      <a:prstDash val="solid"/>
-                      <a:round/>
-                      <a:headEnd type="none" w="med" len="med"/>
-                      <a:tailEnd type="none" w="med" len="med"/>
-                    </a:lnT>
-                    <a:lnB w="6350" cap="flat" cmpd="sng" algn="ctr">
-                      <a:solidFill>
-                        <a:srgbClr val="E6E9EC"/>
-                      </a:solidFill>
-                      <a:prstDash val="solid"/>
-                      <a:round/>
-                      <a:headEnd type="none" w="med" len="med"/>
-                      <a:tailEnd type="none" w="med" len="med"/>
-                    </a:lnB>
-                    <a:solidFill>
-                      <a:srgbClr val="FFFFFF"/>
-                    </a:solidFill>
-                  </a:tcPr>
-                </a:tc>
-                <a:tc>
-                  <a:txBody>
-                    <a:bodyPr/>
-                    <a:lstStyle/>
-                    <a:p>
-                      <a:pPr algn="ctr" indent="0" marL="0">
-                        <a:buNone/>
-                      </a:pPr>
-                      <a:r>
-                        <a:rPr lang="en-US" sz="750" b="1" dirty="0">
-                          <a:solidFill>
-                            <a:srgbClr val="16794A"/>
-                          </a:solidFill>
-                          <a:latin typeface="Arial" pitchFamily="34" charset="0"/>
-                          <a:ea typeface="Arial" pitchFamily="34" charset="-122"/>
-                          <a:cs typeface="Arial" pitchFamily="34" charset="-120"/>
-                        </a:rPr>
-                        <a:t>✓</a:t>
-                      </a:r>
-                      <a:endParaRPr lang="en-US" sz="750" dirty="0">
-                        <a:latin typeface="Arial" charset="0"/>
-                        <a:ea typeface="Arial" charset="0"/>
-                        <a:cs typeface="Arial" charset="0"/>
-                      </a:endParaRPr>
-                    </a:p>
-                  </a:txBody>
-                  <a:tcPr marL="45720" marR="45720" marT="45720" marB="45720" anchor="ctr">
-                    <a:lnL w="6350" cap="flat" cmpd="sng" algn="ctr">
-                      <a:solidFill>
-                        <a:srgbClr val="E6E9EC"/>
-                      </a:solidFill>
-                      <a:prstDash val="solid"/>
-                      <a:round/>
-                      <a:headEnd type="none" w="med" len="med"/>
-                      <a:tailEnd type="none" w="med" len="med"/>
-                    </a:lnL>
-                    <a:lnR w="6350" cap="flat" cmpd="sng" algn="ctr">
-                      <a:solidFill>
-                        <a:srgbClr val="E6E9EC"/>
-                      </a:solidFill>
-                      <a:prstDash val="solid"/>
-                      <a:round/>
-                      <a:headEnd type="none" w="med" len="med"/>
-                      <a:tailEnd type="none" w="med" len="med"/>
-                    </a:lnR>
-                    <a:lnT w="6350" cap="flat" cmpd="sng" algn="ctr">
-                      <a:solidFill>
-                        <a:srgbClr val="E6E9EC"/>
-                      </a:solidFill>
-                      <a:prstDash val="solid"/>
-                      <a:round/>
-                      <a:headEnd type="none" w="med" len="med"/>
-                      <a:tailEnd type="none" w="med" len="med"/>
-                    </a:lnT>
-                    <a:lnB w="6350" cap="flat" cmpd="sng" algn="ctr">
-                      <a:solidFill>
-                        <a:srgbClr val="E6E9EC"/>
-                      </a:solidFill>
-                      <a:prstDash val="solid"/>
-                      <a:round/>
-                      <a:headEnd type="none" w="med" len="med"/>
-                      <a:tailEnd type="none" w="med" len="med"/>
-                    </a:lnB>
-                    <a:solidFill>
-                      <a:srgbClr val="FFFFFF"/>
-                    </a:solidFill>
-                  </a:tcPr>
-                </a:tc>
-                <a:tc>
-                  <a:txBody>
-                    <a:bodyPr/>
-                    <a:lstStyle/>
-                    <a:p>
-                      <a:pPr algn="ctr" indent="0" marL="0">
-                        <a:buNone/>
-                      </a:pPr>
-                      <a:r>
-                        <a:rPr lang="en-US" sz="750" b="1" dirty="0">
-                          <a:solidFill>
-                            <a:srgbClr val="16794A"/>
-                          </a:solidFill>
-                          <a:latin typeface="Arial" pitchFamily="34" charset="0"/>
-                          <a:ea typeface="Arial" pitchFamily="34" charset="-122"/>
-                          <a:cs typeface="Arial" pitchFamily="34" charset="-120"/>
-                        </a:rPr>
-                        <a:t>✓</a:t>
-                      </a:r>
-                      <a:endParaRPr lang="en-US" sz="750" dirty="0">
-                        <a:latin typeface="Arial" charset="0"/>
-                        <a:ea typeface="Arial" charset="0"/>
-                        <a:cs typeface="Arial" charset="0"/>
-                      </a:endParaRPr>
-                    </a:p>
-                  </a:txBody>
-                  <a:tcPr marL="45720" marR="45720" marT="45720" marB="45720" anchor="ctr">
-                    <a:lnL w="6350" cap="flat" cmpd="sng" algn="ctr">
-                      <a:solidFill>
-                        <a:srgbClr val="E6E9EC"/>
-                      </a:solidFill>
-                      <a:prstDash val="solid"/>
-                      <a:round/>
-                      <a:headEnd type="none" w="med" len="med"/>
-                      <a:tailEnd type="none" w="med" len="med"/>
-                    </a:lnL>
-                    <a:lnR w="6350" cap="flat" cmpd="sng" algn="ctr">
-                      <a:solidFill>
-                        <a:srgbClr val="E6E9EC"/>
-                      </a:solidFill>
-                      <a:prstDash val="solid"/>
-                      <a:round/>
-                      <a:headEnd type="none" w="med" len="med"/>
-                      <a:tailEnd type="none" w="med" len="med"/>
-                    </a:lnR>
-                    <a:lnT w="6350" cap="flat" cmpd="sng" algn="ctr">
-                      <a:solidFill>
-                        <a:srgbClr val="E6E9EC"/>
-                      </a:solidFill>
-                      <a:prstDash val="solid"/>
-                      <a:round/>
-                      <a:headEnd type="none" w="med" len="med"/>
-                      <a:tailEnd type="none" w="med" len="med"/>
-                    </a:lnT>
-                    <a:lnB w="6350" cap="flat" cmpd="sng" algn="ctr">
-                      <a:solidFill>
-                        <a:srgbClr val="E6E9EC"/>
-                      </a:solidFill>
-                      <a:prstDash val="solid"/>
-                      <a:round/>
-                      <a:headEnd type="none" w="med" len="med"/>
-                      <a:tailEnd type="none" w="med" len="med"/>
-                    </a:lnB>
-                    <a:solidFill>
-                      <a:srgbClr val="FFFFFF"/>
-                    </a:solidFill>
-                  </a:tcPr>
-                </a:tc>
-                <a:tc>
-                  <a:txBody>
-                    <a:bodyPr/>
-                    <a:lstStyle/>
-                    <a:p>
-                      <a:pPr algn="ctr" indent="0" marL="0">
-                        <a:buNone/>
-                      </a:pPr>
-                      <a:r>
-                        <a:rPr lang="en-US" sz="750" dirty="0">
-                          <a:solidFill>
-                            <a:srgbClr val="5E6A77"/>
-                          </a:solidFill>
-                          <a:latin typeface="Arial" pitchFamily="34" charset="0"/>
-                          <a:ea typeface="Arial" pitchFamily="34" charset="-122"/>
-                          <a:cs typeface="Arial" pitchFamily="34" charset="-120"/>
-                        </a:rPr>
-                        <a:t>—</a:t>
-                      </a:r>
-                      <a:endParaRPr lang="en-US" sz="750" dirty="0">
-                        <a:latin typeface="Arial" charset="0"/>
-                        <a:ea typeface="Arial" charset="0"/>
-                        <a:cs typeface="Arial" charset="0"/>
-                      </a:endParaRPr>
-                    </a:p>
-                  </a:txBody>
-                  <a:tcPr marL="45720" marR="45720" marT="45720" marB="45720" anchor="ctr">
-                    <a:lnL w="6350" cap="flat" cmpd="sng" algn="ctr">
-                      <a:solidFill>
-                        <a:srgbClr val="E6E9EC"/>
-                      </a:solidFill>
-                      <a:prstDash val="solid"/>
-                      <a:round/>
-                      <a:headEnd type="none" w="med" len="med"/>
-                      <a:tailEnd type="none" w="med" len="med"/>
-                    </a:lnL>
-                    <a:lnR w="6350" cap="flat" cmpd="sng" algn="ctr">
-                      <a:solidFill>
-                        <a:srgbClr val="E6E9EC"/>
-                      </a:solidFill>
-                      <a:prstDash val="solid"/>
-                      <a:round/>
-                      <a:headEnd type="none" w="med" len="med"/>
-                      <a:tailEnd type="none" w="med" len="med"/>
-                    </a:lnR>
-                    <a:lnT w="6350" cap="flat" cmpd="sng" algn="ctr">
-                      <a:solidFill>
-                        <a:srgbClr val="E6E9EC"/>
-                      </a:solidFill>
-                      <a:prstDash val="solid"/>
-                      <a:round/>
-                      <a:headEnd type="none" w="med" len="med"/>
-                      <a:tailEnd type="none" w="med" len="med"/>
-                    </a:lnT>
-                    <a:lnB w="6350" cap="flat" cmpd="sng" algn="ctr">
-                      <a:solidFill>
-                        <a:srgbClr val="E6E9EC"/>
-                      </a:solidFill>
-                      <a:prstDash val="solid"/>
-                      <a:round/>
-                      <a:headEnd type="none" w="med" len="med"/>
-                      <a:tailEnd type="none" w="med" len="med"/>
-                    </a:lnB>
-                    <a:solidFill>
-                      <a:srgbClr val="FFFFFF"/>
-                    </a:solidFill>
-                  </a:tcPr>
-                </a:tc>
-              </a:tr>
-              <a:tr h="237744">
-                <a:tc>
-                  <a:txBody>
-                    <a:bodyPr/>
-                    <a:lstStyle/>
-                    <a:p>
-                      <a:pPr indent="0" marL="0">
-                        <a:buNone/>
-                      </a:pPr>
-                      <a:r>
-                        <a:rPr lang="en-US" sz="700" dirty="0">
-                          <a:solidFill>
-                            <a:srgbClr val="1E2B37"/>
-                          </a:solidFill>
-                          <a:latin typeface="Courier New" pitchFamily="34" charset="0"/>
-                          <a:ea typeface="Courier New" pitchFamily="34" charset="-122"/>
-                          <a:cs typeface="Courier New" pitchFamily="34" charset="-120"/>
-                        </a:rPr>
-                        <a:t>chapter_length</a:t>
-                      </a:r>
-                      <a:endParaRPr lang="en-US" sz="700" dirty="0">
-                        <a:latin typeface="Courier New" charset="0"/>
-                        <a:ea typeface="Courier New" charset="0"/>
-                        <a:cs typeface="Courier New" charset="0"/>
-                      </a:endParaRPr>
-                    </a:p>
-                  </a:txBody>
-                  <a:tcPr marL="45720" marR="45720" marT="45720" marB="45720" anchor="ctr">
-                    <a:lnL w="6350" cap="flat" cmpd="sng" algn="ctr">
-                      <a:solidFill>
-                        <a:srgbClr val="E6E9EC"/>
-                      </a:solidFill>
-                      <a:prstDash val="solid"/>
-                      <a:round/>
-                      <a:headEnd type="none" w="med" len="med"/>
-                      <a:tailEnd type="none" w="med" len="med"/>
-                    </a:lnL>
-                    <a:lnR w="6350" cap="flat" cmpd="sng" algn="ctr">
-                      <a:solidFill>
-                        <a:srgbClr val="E6E9EC"/>
-                      </a:solidFill>
-                      <a:prstDash val="solid"/>
-                      <a:round/>
-                      <a:headEnd type="none" w="med" len="med"/>
-                      <a:tailEnd type="none" w="med" len="med"/>
-                    </a:lnR>
-                    <a:lnT w="6350" cap="flat" cmpd="sng" algn="ctr">
-                      <a:solidFill>
-                        <a:srgbClr val="E6E9EC"/>
-                      </a:solidFill>
-                      <a:prstDash val="solid"/>
-                      <a:round/>
-                      <a:headEnd type="none" w="med" len="med"/>
-                      <a:tailEnd type="none" w="med" len="med"/>
-                    </a:lnT>
-                    <a:lnB w="6350" cap="flat" cmpd="sng" algn="ctr">
-                      <a:solidFill>
-                        <a:srgbClr val="E6E9EC"/>
-                      </a:solidFill>
-                      <a:prstDash val="solid"/>
-                      <a:round/>
-                      <a:headEnd type="none" w="med" len="med"/>
-                      <a:tailEnd type="none" w="med" len="med"/>
-                    </a:lnB>
-                    <a:solidFill>
-                      <a:srgbClr val="F7F8FA"/>
-                    </a:solidFill>
-                  </a:tcPr>
-                </a:tc>
-                <a:tc>
-                  <a:txBody>
-                    <a:bodyPr/>
-                    <a:lstStyle/>
-                    <a:p>
-                      <a:pPr algn="ctr" indent="0" marL="0">
-                        <a:buNone/>
-                      </a:pPr>
-                      <a:r>
-                        <a:rPr lang="en-US" sz="750" b="1" dirty="0">
-                          <a:solidFill>
-                            <a:srgbClr val="16794A"/>
-                          </a:solidFill>
-                          <a:latin typeface="Arial" pitchFamily="34" charset="0"/>
-                          <a:ea typeface="Arial" pitchFamily="34" charset="-122"/>
-                          <a:cs typeface="Arial" pitchFamily="34" charset="-120"/>
-                        </a:rPr>
-                        <a:t>✓</a:t>
-                      </a:r>
-                      <a:endParaRPr lang="en-US" sz="750" dirty="0">
-                        <a:latin typeface="Arial" charset="0"/>
-                        <a:ea typeface="Arial" charset="0"/>
-                        <a:cs typeface="Arial" charset="0"/>
-                      </a:endParaRPr>
-                    </a:p>
-                  </a:txBody>
-                  <a:tcPr marL="45720" marR="45720" marT="45720" marB="45720" anchor="ctr">
-                    <a:lnL w="6350" cap="flat" cmpd="sng" algn="ctr">
-                      <a:solidFill>
-                        <a:srgbClr val="E6E9EC"/>
-                      </a:solidFill>
-                      <a:prstDash val="solid"/>
-                      <a:round/>
-                      <a:headEnd type="none" w="med" len="med"/>
-                      <a:tailEnd type="none" w="med" len="med"/>
-                    </a:lnL>
-                    <a:lnR w="6350" cap="flat" cmpd="sng" algn="ctr">
-                      <a:solidFill>
-                        <a:srgbClr val="E6E9EC"/>
-                      </a:solidFill>
-                      <a:prstDash val="solid"/>
-                      <a:round/>
-                      <a:headEnd type="none" w="med" len="med"/>
-                      <a:tailEnd type="none" w="med" len="med"/>
-                    </a:lnR>
-                    <a:lnT w="6350" cap="flat" cmpd="sng" algn="ctr">
-                      <a:solidFill>
-                        <a:srgbClr val="E6E9EC"/>
-                      </a:solidFill>
-                      <a:prstDash val="solid"/>
-                      <a:round/>
-                      <a:headEnd type="none" w="med" len="med"/>
-                      <a:tailEnd type="none" w="med" len="med"/>
-                    </a:lnT>
-                    <a:lnB w="6350" cap="flat" cmpd="sng" algn="ctr">
-                      <a:solidFill>
-                        <a:srgbClr val="E6E9EC"/>
-                      </a:solidFill>
-                      <a:prstDash val="solid"/>
-                      <a:round/>
-                      <a:headEnd type="none" w="med" len="med"/>
-                      <a:tailEnd type="none" w="med" len="med"/>
-                    </a:lnB>
-                    <a:solidFill>
-                      <a:srgbClr val="F7F8FA"/>
-                    </a:solidFill>
-                  </a:tcPr>
-                </a:tc>
-                <a:tc>
-                  <a:txBody>
-                    <a:bodyPr/>
-                    <a:lstStyle/>
-                    <a:p>
-                      <a:pPr algn="ctr" indent="0" marL="0">
-                        <a:buNone/>
-                      </a:pPr>
-                      <a:r>
-                        <a:rPr lang="en-US" sz="750" b="1" dirty="0">
-                          <a:solidFill>
-                            <a:srgbClr val="16794A"/>
-                          </a:solidFill>
-                          <a:latin typeface="Arial" pitchFamily="34" charset="0"/>
-                          <a:ea typeface="Arial" pitchFamily="34" charset="-122"/>
-                          <a:cs typeface="Arial" pitchFamily="34" charset="-120"/>
-                        </a:rPr>
-                        <a:t>✓</a:t>
-                      </a:r>
-                      <a:endParaRPr lang="en-US" sz="750" dirty="0">
-                        <a:latin typeface="Arial" charset="0"/>
-                        <a:ea typeface="Arial" charset="0"/>
-                        <a:cs typeface="Arial" charset="0"/>
-                      </a:endParaRPr>
-                    </a:p>
-                  </a:txBody>
-                  <a:tcPr marL="45720" marR="45720" marT="45720" marB="45720" anchor="ctr">
-                    <a:lnL w="6350" cap="flat" cmpd="sng" algn="ctr">
-                      <a:solidFill>
-                        <a:srgbClr val="E6E9EC"/>
-                      </a:solidFill>
-                      <a:prstDash val="solid"/>
-                      <a:round/>
-                      <a:headEnd type="none" w="med" len="med"/>
-                      <a:tailEnd type="none" w="med" len="med"/>
-                    </a:lnL>
-                    <a:lnR w="6350" cap="flat" cmpd="sng" algn="ctr">
-                      <a:solidFill>
-                        <a:srgbClr val="E6E9EC"/>
-                      </a:solidFill>
-                      <a:prstDash val="solid"/>
-                      <a:round/>
-                      <a:headEnd type="none" w="med" len="med"/>
-                      <a:tailEnd type="none" w="med" len="med"/>
-                    </a:lnR>
-                    <a:lnT w="6350" cap="flat" cmpd="sng" algn="ctr">
-                      <a:solidFill>
-                        <a:srgbClr val="E6E9EC"/>
-                      </a:solidFill>
-                      <a:prstDash val="solid"/>
-                      <a:round/>
-                      <a:headEnd type="none" w="med" len="med"/>
-                      <a:tailEnd type="none" w="med" len="med"/>
-                    </a:lnT>
-                    <a:lnB w="6350" cap="flat" cmpd="sng" algn="ctr">
-                      <a:solidFill>
-                        <a:srgbClr val="E6E9EC"/>
-                      </a:solidFill>
-                      <a:prstDash val="solid"/>
-                      <a:round/>
-                      <a:headEnd type="none" w="med" len="med"/>
-                      <a:tailEnd type="none" w="med" len="med"/>
-                    </a:lnB>
-                    <a:solidFill>
-                      <a:srgbClr val="F7F8FA"/>
-                    </a:solidFill>
-                  </a:tcPr>
-                </a:tc>
-                <a:tc>
-                  <a:txBody>
-                    <a:bodyPr/>
-                    <a:lstStyle/>
-                    <a:p>
-                      <a:pPr algn="ctr" indent="0" marL="0">
-                        <a:buNone/>
-                      </a:pPr>
-                      <a:r>
-                        <a:rPr lang="en-US" sz="750" dirty="0">
-                          <a:solidFill>
-                            <a:srgbClr val="5E6A77"/>
-                          </a:solidFill>
-                          <a:latin typeface="Arial" pitchFamily="34" charset="0"/>
-                          <a:ea typeface="Arial" pitchFamily="34" charset="-122"/>
-                          <a:cs typeface="Arial" pitchFamily="34" charset="-120"/>
-                        </a:rPr>
-                        <a:t>—</a:t>
-                      </a:r>
-                      <a:endParaRPr lang="en-US" sz="750" dirty="0">
-                        <a:latin typeface="Arial" charset="0"/>
-                        <a:ea typeface="Arial" charset="0"/>
-                        <a:cs typeface="Arial" charset="0"/>
-                      </a:endParaRPr>
-                    </a:p>
-                  </a:txBody>
-                  <a:tcPr marL="45720" marR="45720" marT="45720" marB="45720" anchor="ctr">
-                    <a:lnL w="6350" cap="flat" cmpd="sng" algn="ctr">
-                      <a:solidFill>
-                        <a:srgbClr val="E6E9EC"/>
-                      </a:solidFill>
-                      <a:prstDash val="solid"/>
-                      <a:round/>
-                      <a:headEnd type="none" w="med" len="med"/>
-                      <a:tailEnd type="none" w="med" len="med"/>
-                    </a:lnL>
-                    <a:lnR w="6350" cap="flat" cmpd="sng" algn="ctr">
-                      <a:solidFill>
-                        <a:srgbClr val="E6E9EC"/>
-                      </a:solidFill>
-                      <a:prstDash val="solid"/>
-                      <a:round/>
-                      <a:headEnd type="none" w="med" len="med"/>
-                      <a:tailEnd type="none" w="med" len="med"/>
-                    </a:lnR>
-                    <a:lnT w="6350" cap="flat" cmpd="sng" algn="ctr">
-                      <a:solidFill>
-                        <a:srgbClr val="E6E9EC"/>
-                      </a:solidFill>
-                      <a:prstDash val="solid"/>
-                      <a:round/>
-                      <a:headEnd type="none" w="med" len="med"/>
-                      <a:tailEnd type="none" w="med" len="med"/>
-                    </a:lnT>
-                    <a:lnB w="6350" cap="flat" cmpd="sng" algn="ctr">
-                      <a:solidFill>
-                        <a:srgbClr val="E6E9EC"/>
-                      </a:solidFill>
-                      <a:prstDash val="solid"/>
-                      <a:round/>
-                      <a:headEnd type="none" w="med" len="med"/>
-                      <a:tailEnd type="none" w="med" len="med"/>
-                    </a:lnB>
-                    <a:solidFill>
-                      <a:srgbClr val="F7F8FA"/>
-                    </a:solidFill>
-                  </a:tcPr>
-                </a:tc>
-                <a:tc>
-                  <a:txBody>
-                    <a:bodyPr/>
-                    <a:lstStyle/>
-                    <a:p>
-                      <a:pPr algn="ctr" indent="0" marL="0">
-                        <a:buNone/>
-                      </a:pPr>
-                      <a:r>
-                        <a:rPr lang="en-US" sz="750" b="1" dirty="0">
-                          <a:solidFill>
-                            <a:srgbClr val="16794A"/>
-                          </a:solidFill>
-                          <a:latin typeface="Arial" pitchFamily="34" charset="0"/>
-                          <a:ea typeface="Arial" pitchFamily="34" charset="-122"/>
-                          <a:cs typeface="Arial" pitchFamily="34" charset="-120"/>
-                        </a:rPr>
-                        <a:t>✓</a:t>
-                      </a:r>
-                      <a:endParaRPr lang="en-US" sz="750" dirty="0">
-                        <a:latin typeface="Arial" charset="0"/>
-                        <a:ea typeface="Arial" charset="0"/>
-                        <a:cs typeface="Arial" charset="0"/>
-                      </a:endParaRPr>
-                    </a:p>
-                  </a:txBody>
-                  <a:tcPr marL="45720" marR="45720" marT="45720" marB="45720" anchor="ctr">
-                    <a:lnL w="6350" cap="flat" cmpd="sng" algn="ctr">
-                      <a:solidFill>
-                        <a:srgbClr val="E6E9EC"/>
-                      </a:solidFill>
-                      <a:prstDash val="solid"/>
-                      <a:round/>
-                      <a:headEnd type="none" w="med" len="med"/>
-                      <a:tailEnd type="none" w="med" len="med"/>
-                    </a:lnL>
-                    <a:lnR w="6350" cap="flat" cmpd="sng" algn="ctr">
-                      <a:solidFill>
-                        <a:srgbClr val="E6E9EC"/>
-                      </a:solidFill>
-                      <a:prstDash val="solid"/>
-                      <a:round/>
-                      <a:headEnd type="none" w="med" len="med"/>
-                      <a:tailEnd type="none" w="med" len="med"/>
-                    </a:lnR>
-                    <a:lnT w="6350" cap="flat" cmpd="sng" algn="ctr">
-                      <a:solidFill>
-                        <a:srgbClr val="E6E9EC"/>
-                      </a:solidFill>
-                      <a:prstDash val="solid"/>
-                      <a:round/>
-                      <a:headEnd type="none" w="med" len="med"/>
-                      <a:tailEnd type="none" w="med" len="med"/>
-                    </a:lnT>
-                    <a:lnB w="6350" cap="flat" cmpd="sng" algn="ctr">
-                      <a:solidFill>
-                        <a:srgbClr val="E6E9EC"/>
-                      </a:solidFill>
-                      <a:prstDash val="solid"/>
-                      <a:round/>
-                      <a:headEnd type="none" w="med" len="med"/>
-                      <a:tailEnd type="none" w="med" len="med"/>
-                    </a:lnB>
-                    <a:solidFill>
-                      <a:srgbClr val="F7F8FA"/>
-                    </a:solidFill>
-                  </a:tcPr>
-                </a:tc>
-                <a:tc>
-                  <a:txBody>
-                    <a:bodyPr/>
-                    <a:lstStyle/>
-                    <a:p>
-                      <a:pPr algn="ctr" indent="0" marL="0">
-                        <a:buNone/>
-                      </a:pPr>
-                      <a:r>
-                        <a:rPr lang="en-US" sz="750" b="1" dirty="0">
-                          <a:solidFill>
-                            <a:srgbClr val="16794A"/>
-                          </a:solidFill>
-                          <a:latin typeface="Arial" pitchFamily="34" charset="0"/>
-                          <a:ea typeface="Arial" pitchFamily="34" charset="-122"/>
-                          <a:cs typeface="Arial" pitchFamily="34" charset="-120"/>
-                        </a:rPr>
-                        <a:t>✓</a:t>
-                      </a:r>
-                      <a:endParaRPr lang="en-US" sz="750" dirty="0">
-                        <a:latin typeface="Arial" charset="0"/>
-                        <a:ea typeface="Arial" charset="0"/>
-                        <a:cs typeface="Arial" charset="0"/>
-                      </a:endParaRPr>
-                    </a:p>
-                  </a:txBody>
-                  <a:tcPr marL="45720" marR="45720" marT="45720" marB="45720" anchor="ctr">
-                    <a:lnL w="6350" cap="flat" cmpd="sng" algn="ctr">
-                      <a:solidFill>
-                        <a:srgbClr val="E6E9EC"/>
-                      </a:solidFill>
-                      <a:prstDash val="solid"/>
-                      <a:round/>
-                      <a:headEnd type="none" w="med" len="med"/>
-                      <a:tailEnd type="none" w="med" len="med"/>
-                    </a:lnL>
-                    <a:lnR w="6350" cap="flat" cmpd="sng" algn="ctr">
-                      <a:solidFill>
-                        <a:srgbClr val="E6E9EC"/>
-                      </a:solidFill>
-                      <a:prstDash val="solid"/>
-                      <a:round/>
-                      <a:headEnd type="none" w="med" len="med"/>
-                      <a:tailEnd type="none" w="med" len="med"/>
-                    </a:lnR>
-                    <a:lnT w="6350" cap="flat" cmpd="sng" algn="ctr">
-                      <a:solidFill>
-                        <a:srgbClr val="E6E9EC"/>
-                      </a:solidFill>
-                      <a:prstDash val="solid"/>
-                      <a:round/>
-                      <a:headEnd type="none" w="med" len="med"/>
-                      <a:tailEnd type="none" w="med" len="med"/>
-                    </a:lnT>
-                    <a:lnB w="6350" cap="flat" cmpd="sng" algn="ctr">
-                      <a:solidFill>
-                        <a:srgbClr val="E6E9EC"/>
-                      </a:solidFill>
-                      <a:prstDash val="solid"/>
-                      <a:round/>
-                      <a:headEnd type="none" w="med" len="med"/>
-                      <a:tailEnd type="none" w="med" len="med"/>
-                    </a:lnB>
-                    <a:solidFill>
-                      <a:srgbClr val="F7F8FA"/>
-                    </a:solidFill>
-                  </a:tcPr>
-                </a:tc>
-                <a:tc>
-                  <a:txBody>
-                    <a:bodyPr/>
-                    <a:lstStyle/>
-                    <a:p>
-                      <a:pPr algn="ctr" indent="0" marL="0">
-                        <a:buNone/>
-                      </a:pPr>
-                      <a:r>
-                        <a:rPr lang="en-US" sz="750" b="1" dirty="0">
-                          <a:solidFill>
-                            <a:srgbClr val="16794A"/>
-                          </a:solidFill>
-                          <a:latin typeface="Arial" pitchFamily="34" charset="0"/>
-                          <a:ea typeface="Arial" pitchFamily="34" charset="-122"/>
-                          <a:cs typeface="Arial" pitchFamily="34" charset="-120"/>
-                        </a:rPr>
-                        <a:t>✓</a:t>
-                      </a:r>
-                      <a:endParaRPr lang="en-US" sz="750" dirty="0">
-                        <a:latin typeface="Arial" charset="0"/>
-                        <a:ea typeface="Arial" charset="0"/>
-                        <a:cs typeface="Arial" charset="0"/>
-                      </a:endParaRPr>
-                    </a:p>
-                  </a:txBody>
-                  <a:tcPr marL="45720" marR="45720" marT="45720" marB="45720" anchor="ctr">
-                    <a:lnL w="6350" cap="flat" cmpd="sng" algn="ctr">
-                      <a:solidFill>
-                        <a:srgbClr val="E6E9EC"/>
-                      </a:solidFill>
-                      <a:prstDash val="solid"/>
-                      <a:round/>
-                      <a:headEnd type="none" w="med" len="med"/>
-                      <a:tailEnd type="none" w="med" len="med"/>
-                    </a:lnL>
-                    <a:lnR w="6350" cap="flat" cmpd="sng" algn="ctr">
-                      <a:solidFill>
-                        <a:srgbClr val="E6E9EC"/>
-                      </a:solidFill>
-                      <a:prstDash val="solid"/>
-                      <a:round/>
-                      <a:headEnd type="none" w="med" len="med"/>
-                      <a:tailEnd type="none" w="med" len="med"/>
-                    </a:lnR>
-                    <a:lnT w="6350" cap="flat" cmpd="sng" algn="ctr">
-                      <a:solidFill>
-                        <a:srgbClr val="E6E9EC"/>
-                      </a:solidFill>
-                      <a:prstDash val="solid"/>
-                      <a:round/>
-                      <a:headEnd type="none" w="med" len="med"/>
-                      <a:tailEnd type="none" w="med" len="med"/>
-                    </a:lnT>
-                    <a:lnB w="6350" cap="flat" cmpd="sng" algn="ctr">
-                      <a:solidFill>
-                        <a:srgbClr val="E6E9EC"/>
-                      </a:solidFill>
-                      <a:prstDash val="solid"/>
-                      <a:round/>
-                      <a:headEnd type="none" w="med" len="med"/>
-                      <a:tailEnd type="none" w="med" len="med"/>
-                    </a:lnB>
-                    <a:solidFill>
-                      <a:srgbClr val="F7F8FA"/>
-                    </a:solidFill>
-                  </a:tcPr>
-                </a:tc>
-                <a:tc>
-                  <a:txBody>
-                    <a:bodyPr/>
-                    <a:lstStyle/>
-                    <a:p>
-                      <a:pPr algn="ctr" indent="0" marL="0">
-                        <a:buNone/>
-                      </a:pPr>
-                      <a:r>
-                        <a:rPr lang="en-US" sz="750" dirty="0">
-                          <a:solidFill>
-                            <a:srgbClr val="5E6A77"/>
-                          </a:solidFill>
-                          <a:latin typeface="Arial" pitchFamily="34" charset="0"/>
-                          <a:ea typeface="Arial" pitchFamily="34" charset="-122"/>
-                          <a:cs typeface="Arial" pitchFamily="34" charset="-120"/>
-                        </a:rPr>
-                        <a:t>—</a:t>
-                      </a:r>
-                      <a:endParaRPr lang="en-US" sz="750" dirty="0">
-                        <a:latin typeface="Arial" charset="0"/>
-                        <a:ea typeface="Arial" charset="0"/>
-                        <a:cs typeface="Arial" charset="0"/>
-                      </a:endParaRPr>
-                    </a:p>
-                  </a:txBody>
-                  <a:tcPr marL="45720" marR="45720" marT="45720" marB="45720" anchor="ctr">
-                    <a:lnL w="6350" cap="flat" cmpd="sng" algn="ctr">
-                      <a:solidFill>
-                        <a:srgbClr val="E6E9EC"/>
-                      </a:solidFill>
-                      <a:prstDash val="solid"/>
-                      <a:round/>
-                      <a:headEnd type="none" w="med" len="med"/>
-                      <a:tailEnd type="none" w="med" len="med"/>
-                    </a:lnL>
-                    <a:lnR w="6350" cap="flat" cmpd="sng" algn="ctr">
-                      <a:solidFill>
-                        <a:srgbClr val="E6E9EC"/>
-                      </a:solidFill>
-                      <a:prstDash val="solid"/>
-                      <a:round/>
-                      <a:headEnd type="none" w="med" len="med"/>
-                      <a:tailEnd type="none" w="med" len="med"/>
-                    </a:lnR>
-                    <a:lnT w="6350" cap="flat" cmpd="sng" algn="ctr">
-                      <a:solidFill>
-                        <a:srgbClr val="E6E9EC"/>
-                      </a:solidFill>
-                      <a:prstDash val="solid"/>
-                      <a:round/>
-                      <a:headEnd type="none" w="med" len="med"/>
-                      <a:tailEnd type="none" w="med" len="med"/>
-                    </a:lnT>
-                    <a:lnB w="6350" cap="flat" cmpd="sng" algn="ctr">
-                      <a:solidFill>
-                        <a:srgbClr val="E6E9EC"/>
-                      </a:solidFill>
-                      <a:prstDash val="solid"/>
-                      <a:round/>
-                      <a:headEnd type="none" w="med" len="med"/>
-                      <a:tailEnd type="none" w="med" len="med"/>
-                    </a:lnB>
-                    <a:solidFill>
-                      <a:srgbClr val="F7F8FA"/>
-                    </a:solidFill>
-                  </a:tcPr>
-                </a:tc>
-              </a:tr>
-              <a:tr h="237744">
-                <a:tc>
-                  <a:txBody>
-                    <a:bodyPr/>
-                    <a:lstStyle/>
-                    <a:p>
-                      <a:pPr indent="0" marL="0">
-                        <a:buNone/>
-                      </a:pPr>
-                      <a:r>
-                        <a:rPr lang="en-US" sz="700" dirty="0">
-                          <a:solidFill>
-                            <a:srgbClr val="1E2B37"/>
-                          </a:solidFill>
-                          <a:latin typeface="Courier New" pitchFamily="34" charset="0"/>
-                          <a:ea typeface="Courier New" pitchFamily="34" charset="-122"/>
-                          <a:cs typeface="Courier New" pitchFamily="34" charset="-120"/>
-                        </a:rPr>
-                        <a:t>exact_names</a:t>
-                      </a:r>
-                      <a:endParaRPr lang="en-US" sz="700" dirty="0">
-                        <a:latin typeface="Courier New" charset="0"/>
-                        <a:ea typeface="Courier New" charset="0"/>
-                        <a:cs typeface="Courier New" charset="0"/>
-                      </a:endParaRPr>
-                    </a:p>
-                  </a:txBody>
-                  <a:tcPr marL="45720" marR="45720" marT="45720" marB="45720" anchor="ctr">
-                    <a:lnL w="6350" cap="flat" cmpd="sng" algn="ctr">
-                      <a:solidFill>
-                        <a:srgbClr val="E6E9EC"/>
-                      </a:solidFill>
-                      <a:prstDash val="solid"/>
-                      <a:round/>
-                      <a:headEnd type="none" w="med" len="med"/>
-                      <a:tailEnd type="none" w="med" len="med"/>
-                    </a:lnL>
-                    <a:lnR w="6350" cap="flat" cmpd="sng" algn="ctr">
-                      <a:solidFill>
-                        <a:srgbClr val="E6E9EC"/>
-                      </a:solidFill>
-                      <a:prstDash val="solid"/>
-                      <a:round/>
-                      <a:headEnd type="none" w="med" len="med"/>
-                      <a:tailEnd type="none" w="med" len="med"/>
-                    </a:lnR>
-                    <a:lnT w="6350" cap="flat" cmpd="sng" algn="ctr">
-                      <a:solidFill>
-                        <a:srgbClr val="E6E9EC"/>
-                      </a:solidFill>
-                      <a:prstDash val="solid"/>
-                      <a:round/>
-                      <a:headEnd type="none" w="med" len="med"/>
-                      <a:tailEnd type="none" w="med" len="med"/>
-                    </a:lnT>
-                    <a:lnB w="6350" cap="flat" cmpd="sng" algn="ctr">
-                      <a:solidFill>
-                        <a:srgbClr val="E6E9EC"/>
-                      </a:solidFill>
-                      <a:prstDash val="solid"/>
-                      <a:round/>
-                      <a:headEnd type="none" w="med" len="med"/>
-                      <a:tailEnd type="none" w="med" len="med"/>
-                    </a:lnB>
-                    <a:solidFill>
-                      <a:srgbClr val="FFFFFF"/>
-                    </a:solidFill>
-                  </a:tcPr>
-                </a:tc>
-                <a:tc>
-                  <a:txBody>
-                    <a:bodyPr/>
-                    <a:lstStyle/>
-                    <a:p>
-                      <a:pPr algn="ctr" indent="0" marL="0">
-                        <a:buNone/>
-                      </a:pPr>
-                      <a:r>
-                        <a:rPr lang="en-US" sz="750" b="1" dirty="0">
-                          <a:solidFill>
-                            <a:srgbClr val="16794A"/>
-                          </a:solidFill>
-                          <a:latin typeface="Arial" pitchFamily="34" charset="0"/>
-                          <a:ea typeface="Arial" pitchFamily="34" charset="-122"/>
-                          <a:cs typeface="Arial" pitchFamily="34" charset="-120"/>
-                        </a:rPr>
-                        <a:t>✓</a:t>
-                      </a:r>
-                      <a:endParaRPr lang="en-US" sz="750" dirty="0">
-                        <a:latin typeface="Arial" charset="0"/>
-                        <a:ea typeface="Arial" charset="0"/>
-                        <a:cs typeface="Arial" charset="0"/>
-                      </a:endParaRPr>
-                    </a:p>
-                  </a:txBody>
-                  <a:tcPr marL="45720" marR="45720" marT="45720" marB="45720" anchor="ctr">
-                    <a:lnL w="6350" cap="flat" cmpd="sng" algn="ctr">
-                      <a:solidFill>
-                        <a:srgbClr val="E6E9EC"/>
-                      </a:solidFill>
-                      <a:prstDash val="solid"/>
-                      <a:round/>
-                      <a:headEnd type="none" w="med" len="med"/>
-                      <a:tailEnd type="none" w="med" len="med"/>
-                    </a:lnL>
-                    <a:lnR w="6350" cap="flat" cmpd="sng" algn="ctr">
-                      <a:solidFill>
-                        <a:srgbClr val="E6E9EC"/>
-                      </a:solidFill>
-                      <a:prstDash val="solid"/>
-                      <a:round/>
-                      <a:headEnd type="none" w="med" len="med"/>
-                      <a:tailEnd type="none" w="med" len="med"/>
-                    </a:lnR>
-                    <a:lnT w="6350" cap="flat" cmpd="sng" algn="ctr">
-                      <a:solidFill>
-                        <a:srgbClr val="E6E9EC"/>
-                      </a:solidFill>
-                      <a:prstDash val="solid"/>
-                      <a:round/>
-                      <a:headEnd type="none" w="med" len="med"/>
-                      <a:tailEnd type="none" w="med" len="med"/>
-                    </a:lnT>
-                    <a:lnB w="6350" cap="flat" cmpd="sng" algn="ctr">
-                      <a:solidFill>
-                        <a:srgbClr val="E6E9EC"/>
-                      </a:solidFill>
-                      <a:prstDash val="solid"/>
-                      <a:round/>
-                      <a:headEnd type="none" w="med" len="med"/>
-                      <a:tailEnd type="none" w="med" len="med"/>
-                    </a:lnB>
-                    <a:solidFill>
-                      <a:srgbClr val="FFFFFF"/>
-                    </a:solidFill>
-                  </a:tcPr>
-                </a:tc>
-                <a:tc>
-                  <a:txBody>
-                    <a:bodyPr/>
-                    <a:lstStyle/>
-                    <a:p>
-                      <a:pPr algn="ctr" indent="0" marL="0">
-                        <a:buNone/>
-                      </a:pPr>
-                      <a:r>
-                        <a:rPr lang="en-US" sz="750" b="1" dirty="0">
-                          <a:solidFill>
-                            <a:srgbClr val="16794A"/>
-                          </a:solidFill>
-                          <a:latin typeface="Arial" pitchFamily="34" charset="0"/>
-                          <a:ea typeface="Arial" pitchFamily="34" charset="-122"/>
-                          <a:cs typeface="Arial" pitchFamily="34" charset="-120"/>
-                        </a:rPr>
-                        <a:t>✓</a:t>
-                      </a:r>
-                      <a:endParaRPr lang="en-US" sz="750" dirty="0">
-                        <a:latin typeface="Arial" charset="0"/>
-                        <a:ea typeface="Arial" charset="0"/>
-                        <a:cs typeface="Arial" charset="0"/>
-                      </a:endParaRPr>
-                    </a:p>
-                  </a:txBody>
-                  <a:tcPr marL="45720" marR="45720" marT="45720" marB="45720" anchor="ctr">
-                    <a:lnL w="6350" cap="flat" cmpd="sng" algn="ctr">
-                      <a:solidFill>
-                        <a:srgbClr val="E6E9EC"/>
-                      </a:solidFill>
-                      <a:prstDash val="solid"/>
-                      <a:round/>
-                      <a:headEnd type="none" w="med" len="med"/>
-                      <a:tailEnd type="none" w="med" len="med"/>
-                    </a:lnL>
-                    <a:lnR w="6350" cap="flat" cmpd="sng" algn="ctr">
-                      <a:solidFill>
-                        <a:srgbClr val="E6E9EC"/>
-                      </a:solidFill>
-                      <a:prstDash val="solid"/>
-                      <a:round/>
-                      <a:headEnd type="none" w="med" len="med"/>
-                      <a:tailEnd type="none" w="med" len="med"/>
-                    </a:lnR>
-                    <a:lnT w="6350" cap="flat" cmpd="sng" algn="ctr">
-                      <a:solidFill>
-                        <a:srgbClr val="E6E9EC"/>
-                      </a:solidFill>
-                      <a:prstDash val="solid"/>
-                      <a:round/>
-                      <a:headEnd type="none" w="med" len="med"/>
-                      <a:tailEnd type="none" w="med" len="med"/>
-                    </a:lnT>
-                    <a:lnB w="6350" cap="flat" cmpd="sng" algn="ctr">
-                      <a:solidFill>
-                        <a:srgbClr val="E6E9EC"/>
-                      </a:solidFill>
-                      <a:prstDash val="solid"/>
-                      <a:round/>
-                      <a:headEnd type="none" w="med" len="med"/>
-                      <a:tailEnd type="none" w="med" len="med"/>
-                    </a:lnB>
-                    <a:solidFill>
-                      <a:srgbClr val="FFFFFF"/>
-                    </a:solidFill>
-                  </a:tcPr>
-                </a:tc>
-                <a:tc>
-                  <a:txBody>
-                    <a:bodyPr/>
-                    <a:lstStyle/>
-                    <a:p>
-                      <a:pPr algn="ctr" indent="0" marL="0">
-                        <a:buNone/>
-                      </a:pPr>
-                      <a:r>
-                        <a:rPr lang="en-US" sz="750" dirty="0">
-                          <a:solidFill>
-                            <a:srgbClr val="5E6A77"/>
-                          </a:solidFill>
-                          <a:latin typeface="Arial" pitchFamily="34" charset="0"/>
-                          <a:ea typeface="Arial" pitchFamily="34" charset="-122"/>
-                          <a:cs typeface="Arial" pitchFamily="34" charset="-120"/>
-                        </a:rPr>
-                        <a:t>—</a:t>
-                      </a:r>
-                      <a:endParaRPr lang="en-US" sz="750" dirty="0">
-                        <a:latin typeface="Arial" charset="0"/>
-                        <a:ea typeface="Arial" charset="0"/>
-                        <a:cs typeface="Arial" charset="0"/>
-                      </a:endParaRPr>
-                    </a:p>
-                  </a:txBody>
-                  <a:tcPr marL="45720" marR="45720" marT="45720" marB="45720" anchor="ctr">
-                    <a:lnL w="6350" cap="flat" cmpd="sng" algn="ctr">
-                      <a:solidFill>
-                        <a:srgbClr val="E6E9EC"/>
-                      </a:solidFill>
-                      <a:prstDash val="solid"/>
-                      <a:round/>
-                      <a:headEnd type="none" w="med" len="med"/>
-                      <a:tailEnd type="none" w="med" len="med"/>
-                    </a:lnL>
-                    <a:lnR w="6350" cap="flat" cmpd="sng" algn="ctr">
-                      <a:solidFill>
-                        <a:srgbClr val="E6E9EC"/>
-                      </a:solidFill>
-                      <a:prstDash val="solid"/>
-                      <a:round/>
-                      <a:headEnd type="none" w="med" len="med"/>
-                      <a:tailEnd type="none" w="med" len="med"/>
-                    </a:lnR>
-                    <a:lnT w="6350" cap="flat" cmpd="sng" algn="ctr">
-                      <a:solidFill>
-                        <a:srgbClr val="E6E9EC"/>
-                      </a:solidFill>
-                      <a:prstDash val="solid"/>
-                      <a:round/>
-                      <a:headEnd type="none" w="med" len="med"/>
-                      <a:tailEnd type="none" w="med" len="med"/>
-                    </a:lnT>
-                    <a:lnB w="6350" cap="flat" cmpd="sng" algn="ctr">
-                      <a:solidFill>
-                        <a:srgbClr val="E6E9EC"/>
-                      </a:solidFill>
-                      <a:prstDash val="solid"/>
-                      <a:round/>
-                      <a:headEnd type="none" w="med" len="med"/>
-                      <a:tailEnd type="none" w="med" len="med"/>
-                    </a:lnB>
-                    <a:solidFill>
-                      <a:srgbClr val="FFFFFF"/>
-                    </a:solidFill>
-                  </a:tcPr>
-                </a:tc>
-                <a:tc>
-                  <a:txBody>
-                    <a:bodyPr/>
-                    <a:lstStyle/>
-                    <a:p>
-                      <a:pPr algn="ctr" indent="0" marL="0">
-                        <a:buNone/>
-                      </a:pPr>
-                      <a:r>
-                        <a:rPr lang="en-US" sz="750" b="1" dirty="0">
-                          <a:solidFill>
-                            <a:srgbClr val="16794A"/>
-                          </a:solidFill>
-                          <a:latin typeface="Arial" pitchFamily="34" charset="0"/>
-                          <a:ea typeface="Arial" pitchFamily="34" charset="-122"/>
-                          <a:cs typeface="Arial" pitchFamily="34" charset="-120"/>
-                        </a:rPr>
-                        <a:t>✓</a:t>
-                      </a:r>
-                      <a:endParaRPr lang="en-US" sz="750" dirty="0">
-                        <a:latin typeface="Arial" charset="0"/>
-                        <a:ea typeface="Arial" charset="0"/>
-                        <a:cs typeface="Arial" charset="0"/>
-                      </a:endParaRPr>
-                    </a:p>
-                  </a:txBody>
-                  <a:tcPr marL="45720" marR="45720" marT="45720" marB="45720" anchor="ctr">
-                    <a:lnL w="6350" cap="flat" cmpd="sng" algn="ctr">
-                      <a:solidFill>
-                        <a:srgbClr val="E6E9EC"/>
-                      </a:solidFill>
-                      <a:prstDash val="solid"/>
-                      <a:round/>
-                      <a:headEnd type="none" w="med" len="med"/>
-                      <a:tailEnd type="none" w="med" len="med"/>
-                    </a:lnL>
-                    <a:lnR w="6350" cap="flat" cmpd="sng" algn="ctr">
-                      <a:solidFill>
-                        <a:srgbClr val="E6E9EC"/>
-                      </a:solidFill>
-                      <a:prstDash val="solid"/>
-                      <a:round/>
-                      <a:headEnd type="none" w="med" len="med"/>
-                      <a:tailEnd type="none" w="med" len="med"/>
-                    </a:lnR>
-                    <a:lnT w="6350" cap="flat" cmpd="sng" algn="ctr">
-                      <a:solidFill>
-                        <a:srgbClr val="E6E9EC"/>
-                      </a:solidFill>
-                      <a:prstDash val="solid"/>
-                      <a:round/>
-                      <a:headEnd type="none" w="med" len="med"/>
-                      <a:tailEnd type="none" w="med" len="med"/>
-                    </a:lnT>
-                    <a:lnB w="6350" cap="flat" cmpd="sng" algn="ctr">
-                      <a:solidFill>
-                        <a:srgbClr val="E6E9EC"/>
-                      </a:solidFill>
-                      <a:prstDash val="solid"/>
-                      <a:round/>
-                      <a:headEnd type="none" w="med" len="med"/>
-                      <a:tailEnd type="none" w="med" len="med"/>
-                    </a:lnB>
-                    <a:solidFill>
-                      <a:srgbClr val="FFFFFF"/>
-                    </a:solidFill>
-                  </a:tcPr>
-                </a:tc>
-                <a:tc>
-                  <a:txBody>
-                    <a:bodyPr/>
-                    <a:lstStyle/>
-                    <a:p>
-                      <a:pPr algn="ctr" indent="0" marL="0">
-                        <a:buNone/>
-                      </a:pPr>
-                      <a:r>
-                        <a:rPr lang="en-US" sz="750" b="1" dirty="0">
-                          <a:solidFill>
-                            <a:srgbClr val="16794A"/>
-                          </a:solidFill>
-                          <a:latin typeface="Arial" pitchFamily="34" charset="0"/>
-                          <a:ea typeface="Arial" pitchFamily="34" charset="-122"/>
-                          <a:cs typeface="Arial" pitchFamily="34" charset="-120"/>
-                        </a:rPr>
-                        <a:t>✓</a:t>
-                      </a:r>
-                      <a:endParaRPr lang="en-US" sz="750" dirty="0">
-                        <a:latin typeface="Arial" charset="0"/>
-                        <a:ea typeface="Arial" charset="0"/>
-                        <a:cs typeface="Arial" charset="0"/>
-                      </a:endParaRPr>
-                    </a:p>
-                  </a:txBody>
-                  <a:tcPr marL="45720" marR="45720" marT="45720" marB="45720" anchor="ctr">
-                    <a:lnL w="6350" cap="flat" cmpd="sng" algn="ctr">
-                      <a:solidFill>
-                        <a:srgbClr val="E6E9EC"/>
-                      </a:solidFill>
-                      <a:prstDash val="solid"/>
-                      <a:round/>
-                      <a:headEnd type="none" w="med" len="med"/>
-                      <a:tailEnd type="none" w="med" len="med"/>
-                    </a:lnL>
-                    <a:lnR w="6350" cap="flat" cmpd="sng" algn="ctr">
-                      <a:solidFill>
-                        <a:srgbClr val="E6E9EC"/>
-                      </a:solidFill>
-                      <a:prstDash val="solid"/>
-                      <a:round/>
-                      <a:headEnd type="none" w="med" len="med"/>
-                      <a:tailEnd type="none" w="med" len="med"/>
-                    </a:lnR>
-                    <a:lnT w="6350" cap="flat" cmpd="sng" algn="ctr">
-                      <a:solidFill>
-                        <a:srgbClr val="E6E9EC"/>
-                      </a:solidFill>
-                      <a:prstDash val="solid"/>
-                      <a:round/>
-                      <a:headEnd type="none" w="med" len="med"/>
-                      <a:tailEnd type="none" w="med" len="med"/>
-                    </a:lnT>
-                    <a:lnB w="6350" cap="flat" cmpd="sng" algn="ctr">
-                      <a:solidFill>
-                        <a:srgbClr val="E6E9EC"/>
-                      </a:solidFill>
-                      <a:prstDash val="solid"/>
-                      <a:round/>
-                      <a:headEnd type="none" w="med" len="med"/>
-                      <a:tailEnd type="none" w="med" len="med"/>
-                    </a:lnB>
-                    <a:solidFill>
-                      <a:srgbClr val="FFFFFF"/>
-                    </a:solidFill>
-                  </a:tcPr>
-                </a:tc>
-                <a:tc>
-                  <a:txBody>
-                    <a:bodyPr/>
-                    <a:lstStyle/>
-                    <a:p>
-                      <a:pPr algn="ctr" indent="0" marL="0">
-                        <a:buNone/>
-                      </a:pPr>
-                      <a:r>
-                        <a:rPr lang="en-US" sz="750" b="1" dirty="0">
-                          <a:solidFill>
-                            <a:srgbClr val="16794A"/>
-                          </a:solidFill>
-                          <a:latin typeface="Arial" pitchFamily="34" charset="0"/>
-                          <a:ea typeface="Arial" pitchFamily="34" charset="-122"/>
-                          <a:cs typeface="Arial" pitchFamily="34" charset="-120"/>
-                        </a:rPr>
-                        <a:t>✓</a:t>
-                      </a:r>
-                      <a:endParaRPr lang="en-US" sz="750" dirty="0">
-                        <a:latin typeface="Arial" charset="0"/>
-                        <a:ea typeface="Arial" charset="0"/>
-                        <a:cs typeface="Arial" charset="0"/>
-                      </a:endParaRPr>
-                    </a:p>
-                  </a:txBody>
-                  <a:tcPr marL="45720" marR="45720" marT="45720" marB="45720" anchor="ctr">
-                    <a:lnL w="6350" cap="flat" cmpd="sng" algn="ctr">
-                      <a:solidFill>
-                        <a:srgbClr val="E6E9EC"/>
-                      </a:solidFill>
-                      <a:prstDash val="solid"/>
-                      <a:round/>
-                      <a:headEnd type="none" w="med" len="med"/>
-                      <a:tailEnd type="none" w="med" len="med"/>
-                    </a:lnL>
-                    <a:lnR w="6350" cap="flat" cmpd="sng" algn="ctr">
-                      <a:solidFill>
-                        <a:srgbClr val="E6E9EC"/>
-                      </a:solidFill>
-                      <a:prstDash val="solid"/>
-                      <a:round/>
-                      <a:headEnd type="none" w="med" len="med"/>
-                      <a:tailEnd type="none" w="med" len="med"/>
-                    </a:lnR>
-                    <a:lnT w="6350" cap="flat" cmpd="sng" algn="ctr">
-                      <a:solidFill>
-                        <a:srgbClr val="E6E9EC"/>
-                      </a:solidFill>
-                      <a:prstDash val="solid"/>
-                      <a:round/>
-                      <a:headEnd type="none" w="med" len="med"/>
-                      <a:tailEnd type="none" w="med" len="med"/>
-                    </a:lnT>
-                    <a:lnB w="6350" cap="flat" cmpd="sng" algn="ctr">
-                      <a:solidFill>
-                        <a:srgbClr val="E6E9EC"/>
-                      </a:solidFill>
-                      <a:prstDash val="solid"/>
-                      <a:round/>
-                      <a:headEnd type="none" w="med" len="med"/>
-                      <a:tailEnd type="none" w="med" len="med"/>
-                    </a:lnB>
-                    <a:solidFill>
-                      <a:srgbClr val="FFFFFF"/>
-                    </a:solidFill>
-                  </a:tcPr>
-                </a:tc>
-                <a:tc>
-                  <a:txBody>
-                    <a:bodyPr/>
-                    <a:lstStyle/>
-                    <a:p>
-                      <a:pPr algn="ctr" indent="0" marL="0">
-                        <a:buNone/>
-                      </a:pPr>
-                      <a:r>
-                        <a:rPr lang="en-US" sz="750" dirty="0">
-                          <a:solidFill>
-                            <a:srgbClr val="5E6A77"/>
-                          </a:solidFill>
-                          <a:latin typeface="Arial" pitchFamily="34" charset="0"/>
-                          <a:ea typeface="Arial" pitchFamily="34" charset="-122"/>
-                          <a:cs typeface="Arial" pitchFamily="34" charset="-120"/>
-                        </a:rPr>
-                        <a:t>—</a:t>
-                      </a:r>
-                      <a:endParaRPr lang="en-US" sz="750" dirty="0">
-                        <a:latin typeface="Arial" charset="0"/>
-                        <a:ea typeface="Arial" charset="0"/>
-                        <a:cs typeface="Arial" charset="0"/>
-                      </a:endParaRPr>
-                    </a:p>
-                  </a:txBody>
-                  <a:tcPr marL="45720" marR="45720" marT="45720" marB="45720" anchor="ctr">
-                    <a:lnL w="6350" cap="flat" cmpd="sng" algn="ctr">
-                      <a:solidFill>
-                        <a:srgbClr val="E6E9EC"/>
-                      </a:solidFill>
-                      <a:prstDash val="solid"/>
-                      <a:round/>
-                      <a:headEnd type="none" w="med" len="med"/>
-                      <a:tailEnd type="none" w="med" len="med"/>
-                    </a:lnL>
-                    <a:lnR w="6350" cap="flat" cmpd="sng" algn="ctr">
-                      <a:solidFill>
-                        <a:srgbClr val="E6E9EC"/>
-                      </a:solidFill>
-                      <a:prstDash val="solid"/>
-                      <a:round/>
-                      <a:headEnd type="none" w="med" len="med"/>
-                      <a:tailEnd type="none" w="med" len="med"/>
-                    </a:lnR>
-                    <a:lnT w="6350" cap="flat" cmpd="sng" algn="ctr">
-                      <a:solidFill>
-                        <a:srgbClr val="E6E9EC"/>
-                      </a:solidFill>
-                      <a:prstDash val="solid"/>
-                      <a:round/>
-                      <a:headEnd type="none" w="med" len="med"/>
-                      <a:tailEnd type="none" w="med" len="med"/>
-                    </a:lnT>
-                    <a:lnB w="6350" cap="flat" cmpd="sng" algn="ctr">
-                      <a:solidFill>
-                        <a:srgbClr val="E6E9EC"/>
-                      </a:solidFill>
-                      <a:prstDash val="solid"/>
-                      <a:round/>
-                      <a:headEnd type="none" w="med" len="med"/>
-                      <a:tailEnd type="none" w="med" len="med"/>
-                    </a:lnB>
-                    <a:solidFill>
-                      <a:srgbClr val="FFFFFF"/>
-                    </a:solidFill>
-                  </a:tcPr>
-                </a:tc>
-              </a:tr>
-              <a:tr h="237744">
-                <a:tc>
-                  <a:txBody>
-                    <a:bodyPr/>
-                    <a:lstStyle/>
-                    <a:p>
-                      <a:pPr indent="0" marL="0">
-                        <a:buNone/>
-                      </a:pPr>
-                      <a:r>
-                        <a:rPr lang="en-US" sz="700" dirty="0">
-                          <a:solidFill>
-                            <a:srgbClr val="1E2B37"/>
-                          </a:solidFill>
-                          <a:latin typeface="Courier New" pitchFamily="34" charset="0"/>
-                          <a:ea typeface="Courier New" pitchFamily="34" charset="-122"/>
-                          <a:cs typeface="Courier New" pitchFamily="34" charset="-120"/>
-                        </a:rPr>
-                        <a:t>brief_coverage</a:t>
-                      </a:r>
-                      <a:endParaRPr lang="en-US" sz="700" dirty="0">
-                        <a:latin typeface="Courier New" charset="0"/>
-                        <a:ea typeface="Courier New" charset="0"/>
-                        <a:cs typeface="Courier New" charset="0"/>
-                      </a:endParaRPr>
-                    </a:p>
-                  </a:txBody>
-                  <a:tcPr marL="45720" marR="45720" marT="45720" marB="45720" anchor="ctr">
-                    <a:lnL w="6350" cap="flat" cmpd="sng" algn="ctr">
-                      <a:solidFill>
-                        <a:srgbClr val="E6E9EC"/>
-                      </a:solidFill>
-                      <a:prstDash val="solid"/>
-                      <a:round/>
-                      <a:headEnd type="none" w="med" len="med"/>
-                      <a:tailEnd type="none" w="med" len="med"/>
-                    </a:lnL>
-                    <a:lnR w="6350" cap="flat" cmpd="sng" algn="ctr">
-                      <a:solidFill>
-                        <a:srgbClr val="E6E9EC"/>
-                      </a:solidFill>
-                      <a:prstDash val="solid"/>
-                      <a:round/>
-                      <a:headEnd type="none" w="med" len="med"/>
-                      <a:tailEnd type="none" w="med" len="med"/>
-                    </a:lnR>
-                    <a:lnT w="6350" cap="flat" cmpd="sng" algn="ctr">
-                      <a:solidFill>
-                        <a:srgbClr val="E6E9EC"/>
-                      </a:solidFill>
-                      <a:prstDash val="solid"/>
-                      <a:round/>
-                      <a:headEnd type="none" w="med" len="med"/>
-                      <a:tailEnd type="none" w="med" len="med"/>
-                    </a:lnT>
-                    <a:lnB w="6350" cap="flat" cmpd="sng" algn="ctr">
-                      <a:solidFill>
-                        <a:srgbClr val="E6E9EC"/>
-                      </a:solidFill>
-                      <a:prstDash val="solid"/>
-                      <a:round/>
-                      <a:headEnd type="none" w="med" len="med"/>
-                      <a:tailEnd type="none" w="med" len="med"/>
-                    </a:lnB>
-                    <a:solidFill>
-                      <a:srgbClr val="F7F8FA"/>
-                    </a:solidFill>
-                  </a:tcPr>
-                </a:tc>
-                <a:tc>
-                  <a:txBody>
-                    <a:bodyPr/>
-                    <a:lstStyle/>
-                    <a:p>
-                      <a:pPr algn="ctr" indent="0" marL="0">
-                        <a:buNone/>
-                      </a:pPr>
-                      <a:r>
-                        <a:rPr lang="en-US" sz="750" b="1" dirty="0">
-                          <a:solidFill>
-                            <a:srgbClr val="B83232"/>
-                          </a:solidFill>
-                          <a:latin typeface="Arial" pitchFamily="34" charset="0"/>
-                          <a:ea typeface="Arial" pitchFamily="34" charset="-122"/>
-                          <a:cs typeface="Arial" pitchFamily="34" charset="-120"/>
-                        </a:rPr>
-                        <a:t>✗</a:t>
-                      </a:r>
-                      <a:endParaRPr lang="en-US" sz="750" dirty="0">
-                        <a:latin typeface="Arial" charset="0"/>
-                        <a:ea typeface="Arial" charset="0"/>
-                        <a:cs typeface="Arial" charset="0"/>
-                      </a:endParaRPr>
-                    </a:p>
-                  </a:txBody>
-                  <a:tcPr marL="45720" marR="45720" marT="45720" marB="45720" anchor="ctr">
-                    <a:lnL w="6350" cap="flat" cmpd="sng" algn="ctr">
-                      <a:solidFill>
-                        <a:srgbClr val="E6E9EC"/>
-                      </a:solidFill>
-                      <a:prstDash val="solid"/>
-                      <a:round/>
-                      <a:headEnd type="none" w="med" len="med"/>
-                      <a:tailEnd type="none" w="med" len="med"/>
-                    </a:lnL>
-                    <a:lnR w="6350" cap="flat" cmpd="sng" algn="ctr">
-                      <a:solidFill>
-                        <a:srgbClr val="E6E9EC"/>
-                      </a:solidFill>
-                      <a:prstDash val="solid"/>
-                      <a:round/>
-                      <a:headEnd type="none" w="med" len="med"/>
-                      <a:tailEnd type="none" w="med" len="med"/>
-                    </a:lnR>
-                    <a:lnT w="6350" cap="flat" cmpd="sng" algn="ctr">
-                      <a:solidFill>
-                        <a:srgbClr val="E6E9EC"/>
-                      </a:solidFill>
-                      <a:prstDash val="solid"/>
-                      <a:round/>
-                      <a:headEnd type="none" w="med" len="med"/>
-                      <a:tailEnd type="none" w="med" len="med"/>
-                    </a:lnT>
-                    <a:lnB w="6350" cap="flat" cmpd="sng" algn="ctr">
-                      <a:solidFill>
-                        <a:srgbClr val="E6E9EC"/>
-                      </a:solidFill>
-                      <a:prstDash val="solid"/>
-                      <a:round/>
-                      <a:headEnd type="none" w="med" len="med"/>
-                      <a:tailEnd type="none" w="med" len="med"/>
-                    </a:lnB>
-                    <a:solidFill>
-                      <a:srgbClr val="F7F8FA"/>
-                    </a:solidFill>
-                  </a:tcPr>
-                </a:tc>
-                <a:tc>
-                  <a:txBody>
-                    <a:bodyPr/>
-                    <a:lstStyle/>
-                    <a:p>
-                      <a:pPr algn="ctr" indent="0" marL="0">
-                        <a:buNone/>
-                      </a:pPr>
-                      <a:r>
-                        <a:rPr lang="en-US" sz="750" b="1" dirty="0">
-                          <a:solidFill>
-                            <a:srgbClr val="B83232"/>
-                          </a:solidFill>
-                          <a:latin typeface="Arial" pitchFamily="34" charset="0"/>
-                          <a:ea typeface="Arial" pitchFamily="34" charset="-122"/>
-                          <a:cs typeface="Arial" pitchFamily="34" charset="-120"/>
-                        </a:rPr>
-                        <a:t>✗</a:t>
-                      </a:r>
-                      <a:endParaRPr lang="en-US" sz="750" dirty="0">
-                        <a:latin typeface="Arial" charset="0"/>
-                        <a:ea typeface="Arial" charset="0"/>
-                        <a:cs typeface="Arial" charset="0"/>
-                      </a:endParaRPr>
-                    </a:p>
-                  </a:txBody>
-                  <a:tcPr marL="45720" marR="45720" marT="45720" marB="45720" anchor="ctr">
-                    <a:lnL w="6350" cap="flat" cmpd="sng" algn="ctr">
-                      <a:solidFill>
-                        <a:srgbClr val="E6E9EC"/>
-                      </a:solidFill>
-                      <a:prstDash val="solid"/>
-                      <a:round/>
-                      <a:headEnd type="none" w="med" len="med"/>
-                      <a:tailEnd type="none" w="med" len="med"/>
-                    </a:lnL>
-                    <a:lnR w="6350" cap="flat" cmpd="sng" algn="ctr">
-                      <a:solidFill>
-                        <a:srgbClr val="E6E9EC"/>
-                      </a:solidFill>
-                      <a:prstDash val="solid"/>
-                      <a:round/>
-                      <a:headEnd type="none" w="med" len="med"/>
-                      <a:tailEnd type="none" w="med" len="med"/>
-                    </a:lnR>
-                    <a:lnT w="6350" cap="flat" cmpd="sng" algn="ctr">
-                      <a:solidFill>
-                        <a:srgbClr val="E6E9EC"/>
-                      </a:solidFill>
-                      <a:prstDash val="solid"/>
-                      <a:round/>
-                      <a:headEnd type="none" w="med" len="med"/>
-                      <a:tailEnd type="none" w="med" len="med"/>
-                    </a:lnT>
-                    <a:lnB w="6350" cap="flat" cmpd="sng" algn="ctr">
-                      <a:solidFill>
-                        <a:srgbClr val="E6E9EC"/>
-                      </a:solidFill>
-                      <a:prstDash val="solid"/>
-                      <a:round/>
-                      <a:headEnd type="none" w="med" len="med"/>
-                      <a:tailEnd type="none" w="med" len="med"/>
-                    </a:lnB>
-                    <a:solidFill>
-                      <a:srgbClr val="F7F8FA"/>
-                    </a:solidFill>
-                  </a:tcPr>
-                </a:tc>
-                <a:tc>
-                  <a:txBody>
-                    <a:bodyPr/>
-                    <a:lstStyle/>
-                    <a:p>
-                      <a:pPr algn="ctr" indent="0" marL="0">
-                        <a:buNone/>
-                      </a:pPr>
-                      <a:r>
-                        <a:rPr lang="en-US" sz="750" dirty="0">
-                          <a:solidFill>
-                            <a:srgbClr val="5E6A77"/>
-                          </a:solidFill>
-                          <a:latin typeface="Arial" pitchFamily="34" charset="0"/>
-                          <a:ea typeface="Arial" pitchFamily="34" charset="-122"/>
-                          <a:cs typeface="Arial" pitchFamily="34" charset="-120"/>
-                        </a:rPr>
-                        <a:t>—</a:t>
-                      </a:r>
-                      <a:endParaRPr lang="en-US" sz="750" dirty="0">
-                        <a:latin typeface="Arial" charset="0"/>
-                        <a:ea typeface="Arial" charset="0"/>
-                        <a:cs typeface="Arial" charset="0"/>
-                      </a:endParaRPr>
-                    </a:p>
-                  </a:txBody>
-                  <a:tcPr marL="45720" marR="45720" marT="45720" marB="45720" anchor="ctr">
-                    <a:lnL w="6350" cap="flat" cmpd="sng" algn="ctr">
-                      <a:solidFill>
-                        <a:srgbClr val="E6E9EC"/>
-                      </a:solidFill>
-                      <a:prstDash val="solid"/>
-                      <a:round/>
-                      <a:headEnd type="none" w="med" len="med"/>
-                      <a:tailEnd type="none" w="med" len="med"/>
-                    </a:lnL>
-                    <a:lnR w="6350" cap="flat" cmpd="sng" algn="ctr">
-                      <a:solidFill>
-                        <a:srgbClr val="E6E9EC"/>
-                      </a:solidFill>
-                      <a:prstDash val="solid"/>
-                      <a:round/>
-                      <a:headEnd type="none" w="med" len="med"/>
-                      <a:tailEnd type="none" w="med" len="med"/>
-                    </a:lnR>
-                    <a:lnT w="6350" cap="flat" cmpd="sng" algn="ctr">
-                      <a:solidFill>
-                        <a:srgbClr val="E6E9EC"/>
-                      </a:solidFill>
-                      <a:prstDash val="solid"/>
-                      <a:round/>
-                      <a:headEnd type="none" w="med" len="med"/>
-                      <a:tailEnd type="none" w="med" len="med"/>
-                    </a:lnT>
-                    <a:lnB w="6350" cap="flat" cmpd="sng" algn="ctr">
-                      <a:solidFill>
-                        <a:srgbClr val="E6E9EC"/>
-                      </a:solidFill>
-                      <a:prstDash val="solid"/>
-                      <a:round/>
-                      <a:headEnd type="none" w="med" len="med"/>
-                      <a:tailEnd type="none" w="med" len="med"/>
-                    </a:lnB>
-                    <a:solidFill>
-                      <a:srgbClr val="F7F8FA"/>
-                    </a:solidFill>
-                  </a:tcPr>
-                </a:tc>
-                <a:tc>
-                  <a:txBody>
-                    <a:bodyPr/>
-                    <a:lstStyle/>
-                    <a:p>
-                      <a:pPr algn="ctr" indent="0" marL="0">
-                        <a:buNone/>
-                      </a:pPr>
-                      <a:r>
-                        <a:rPr lang="en-US" sz="750" b="1" dirty="0">
-                          <a:solidFill>
-                            <a:srgbClr val="16794A"/>
-                          </a:solidFill>
-                          <a:latin typeface="Arial" pitchFamily="34" charset="0"/>
-                          <a:ea typeface="Arial" pitchFamily="34" charset="-122"/>
-                          <a:cs typeface="Arial" pitchFamily="34" charset="-120"/>
-                        </a:rPr>
-                        <a:t>✓</a:t>
-                      </a:r>
-                      <a:endParaRPr lang="en-US" sz="750" dirty="0">
-                        <a:latin typeface="Arial" charset="0"/>
-                        <a:ea typeface="Arial" charset="0"/>
-                        <a:cs typeface="Arial" charset="0"/>
-                      </a:endParaRPr>
-                    </a:p>
-                  </a:txBody>
-                  <a:tcPr marL="45720" marR="45720" marT="45720" marB="45720" anchor="ctr">
-                    <a:lnL w="6350" cap="flat" cmpd="sng" algn="ctr">
-                      <a:solidFill>
-                        <a:srgbClr val="E6E9EC"/>
-                      </a:solidFill>
-                      <a:prstDash val="solid"/>
-                      <a:round/>
-                      <a:headEnd type="none" w="med" len="med"/>
-                      <a:tailEnd type="none" w="med" len="med"/>
-                    </a:lnL>
-                    <a:lnR w="6350" cap="flat" cmpd="sng" algn="ctr">
-                      <a:solidFill>
-                        <a:srgbClr val="E6E9EC"/>
-                      </a:solidFill>
-                      <a:prstDash val="solid"/>
-                      <a:round/>
-                      <a:headEnd type="none" w="med" len="med"/>
-                      <a:tailEnd type="none" w="med" len="med"/>
-                    </a:lnR>
-                    <a:lnT w="6350" cap="flat" cmpd="sng" algn="ctr">
-                      <a:solidFill>
-                        <a:srgbClr val="E6E9EC"/>
-                      </a:solidFill>
-                      <a:prstDash val="solid"/>
-                      <a:round/>
-                      <a:headEnd type="none" w="med" len="med"/>
-                      <a:tailEnd type="none" w="med" len="med"/>
-                    </a:lnT>
-                    <a:lnB w="6350" cap="flat" cmpd="sng" algn="ctr">
-                      <a:solidFill>
-                        <a:srgbClr val="E6E9EC"/>
-                      </a:solidFill>
-                      <a:prstDash val="solid"/>
-                      <a:round/>
-                      <a:headEnd type="none" w="med" len="med"/>
-                      <a:tailEnd type="none" w="med" len="med"/>
-                    </a:lnB>
-                    <a:solidFill>
-                      <a:srgbClr val="F7F8FA"/>
-                    </a:solidFill>
-                  </a:tcPr>
-                </a:tc>
-                <a:tc>
-                  <a:txBody>
-                    <a:bodyPr/>
-                    <a:lstStyle/>
-                    <a:p>
-                      <a:pPr algn="ctr" indent="0" marL="0">
-                        <a:buNone/>
-                      </a:pPr>
-                      <a:r>
-                        <a:rPr lang="en-US" sz="750" b="1" dirty="0">
-                          <a:solidFill>
-                            <a:srgbClr val="16794A"/>
-                          </a:solidFill>
-                          <a:latin typeface="Arial" pitchFamily="34" charset="0"/>
-                          <a:ea typeface="Arial" pitchFamily="34" charset="-122"/>
-                          <a:cs typeface="Arial" pitchFamily="34" charset="-120"/>
-                        </a:rPr>
-                        <a:t>✓</a:t>
-                      </a:r>
-                      <a:endParaRPr lang="en-US" sz="750" dirty="0">
-                        <a:latin typeface="Arial" charset="0"/>
-                        <a:ea typeface="Arial" charset="0"/>
-                        <a:cs typeface="Arial" charset="0"/>
-                      </a:endParaRPr>
-                    </a:p>
-                  </a:txBody>
-                  <a:tcPr marL="45720" marR="45720" marT="45720" marB="45720" anchor="ctr">
-                    <a:lnL w="6350" cap="flat" cmpd="sng" algn="ctr">
-                      <a:solidFill>
-                        <a:srgbClr val="E6E9EC"/>
-                      </a:solidFill>
-                      <a:prstDash val="solid"/>
-                      <a:round/>
-                      <a:headEnd type="none" w="med" len="med"/>
-                      <a:tailEnd type="none" w="med" len="med"/>
-                    </a:lnL>
-                    <a:lnR w="6350" cap="flat" cmpd="sng" algn="ctr">
-                      <a:solidFill>
-                        <a:srgbClr val="E6E9EC"/>
-                      </a:solidFill>
-                      <a:prstDash val="solid"/>
-                      <a:round/>
-                      <a:headEnd type="none" w="med" len="med"/>
-                      <a:tailEnd type="none" w="med" len="med"/>
-                    </a:lnR>
-                    <a:lnT w="6350" cap="flat" cmpd="sng" algn="ctr">
-                      <a:solidFill>
-                        <a:srgbClr val="E6E9EC"/>
-                      </a:solidFill>
-                      <a:prstDash val="solid"/>
-                      <a:round/>
-                      <a:headEnd type="none" w="med" len="med"/>
-                      <a:tailEnd type="none" w="med" len="med"/>
-                    </a:lnT>
-                    <a:lnB w="6350" cap="flat" cmpd="sng" algn="ctr">
-                      <a:solidFill>
-                        <a:srgbClr val="E6E9EC"/>
-                      </a:solidFill>
-                      <a:prstDash val="solid"/>
-                      <a:round/>
-                      <a:headEnd type="none" w="med" len="med"/>
-                      <a:tailEnd type="none" w="med" len="med"/>
-                    </a:lnB>
-                    <a:solidFill>
-                      <a:srgbClr val="F7F8FA"/>
-                    </a:solidFill>
-                  </a:tcPr>
-                </a:tc>
-                <a:tc>
-                  <a:txBody>
-                    <a:bodyPr/>
-                    <a:lstStyle/>
-                    <a:p>
-                      <a:pPr algn="ctr" indent="0" marL="0">
-                        <a:buNone/>
-                      </a:pPr>
-                      <a:r>
-                        <a:rPr lang="en-US" sz="750" b="1" dirty="0">
-                          <a:solidFill>
-                            <a:srgbClr val="16794A"/>
-                          </a:solidFill>
-                          <a:latin typeface="Arial" pitchFamily="34" charset="0"/>
-                          <a:ea typeface="Arial" pitchFamily="34" charset="-122"/>
-                          <a:cs typeface="Arial" pitchFamily="34" charset="-120"/>
-                        </a:rPr>
-                        <a:t>✓</a:t>
-                      </a:r>
-                      <a:endParaRPr lang="en-US" sz="750" dirty="0">
-                        <a:latin typeface="Arial" charset="0"/>
-                        <a:ea typeface="Arial" charset="0"/>
-                        <a:cs typeface="Arial" charset="0"/>
-                      </a:endParaRPr>
-                    </a:p>
-                  </a:txBody>
-                  <a:tcPr marL="45720" marR="45720" marT="45720" marB="45720" anchor="ctr">
-                    <a:lnL w="6350" cap="flat" cmpd="sng" algn="ctr">
-                      <a:solidFill>
-                        <a:srgbClr val="E6E9EC"/>
-                      </a:solidFill>
-                      <a:prstDash val="solid"/>
-                      <a:round/>
-                      <a:headEnd type="none" w="med" len="med"/>
-                      <a:tailEnd type="none" w="med" len="med"/>
-                    </a:lnL>
-                    <a:lnR w="6350" cap="flat" cmpd="sng" algn="ctr">
-                      <a:solidFill>
-                        <a:srgbClr val="E6E9EC"/>
-                      </a:solidFill>
-                      <a:prstDash val="solid"/>
-                      <a:round/>
-                      <a:headEnd type="none" w="med" len="med"/>
-                      <a:tailEnd type="none" w="med" len="med"/>
-                    </a:lnR>
-                    <a:lnT w="6350" cap="flat" cmpd="sng" algn="ctr">
-                      <a:solidFill>
-                        <a:srgbClr val="E6E9EC"/>
-                      </a:solidFill>
-                      <a:prstDash val="solid"/>
-                      <a:round/>
-                      <a:headEnd type="none" w="med" len="med"/>
-                      <a:tailEnd type="none" w="med" len="med"/>
-                    </a:lnT>
-                    <a:lnB w="6350" cap="flat" cmpd="sng" algn="ctr">
-                      <a:solidFill>
-                        <a:srgbClr val="E6E9EC"/>
-                      </a:solidFill>
-                      <a:prstDash val="solid"/>
-                      <a:round/>
-                      <a:headEnd type="none" w="med" len="med"/>
-                      <a:tailEnd type="none" w="med" len="med"/>
-                    </a:lnB>
-                    <a:solidFill>
-                      <a:srgbClr val="F7F8FA"/>
-                    </a:solidFill>
-                  </a:tcPr>
-                </a:tc>
-                <a:tc>
-                  <a:txBody>
-                    <a:bodyPr/>
-                    <a:lstStyle/>
-                    <a:p>
-                      <a:pPr algn="ctr" indent="0" marL="0">
-                        <a:buNone/>
-                      </a:pPr>
-                      <a:r>
-                        <a:rPr lang="en-US" sz="750" dirty="0">
-                          <a:solidFill>
-                            <a:srgbClr val="5E6A77"/>
-                          </a:solidFill>
-                          <a:latin typeface="Arial" pitchFamily="34" charset="0"/>
-                          <a:ea typeface="Arial" pitchFamily="34" charset="-122"/>
-                          <a:cs typeface="Arial" pitchFamily="34" charset="-120"/>
-                        </a:rPr>
-                        <a:t>—</a:t>
-                      </a:r>
-                      <a:endParaRPr lang="en-US" sz="750" dirty="0">
-                        <a:latin typeface="Arial" charset="0"/>
-                        <a:ea typeface="Arial" charset="0"/>
-                        <a:cs typeface="Arial" charset="0"/>
-                      </a:endParaRPr>
-                    </a:p>
-                  </a:txBody>
-                  <a:tcPr marL="45720" marR="45720" marT="45720" marB="45720" anchor="ctr">
-                    <a:lnL w="6350" cap="flat" cmpd="sng" algn="ctr">
-                      <a:solidFill>
-                        <a:srgbClr val="E6E9EC"/>
-                      </a:solidFill>
-                      <a:prstDash val="solid"/>
-                      <a:round/>
-                      <a:headEnd type="none" w="med" len="med"/>
-                      <a:tailEnd type="none" w="med" len="med"/>
-                    </a:lnL>
-                    <a:lnR w="6350" cap="flat" cmpd="sng" algn="ctr">
-                      <a:solidFill>
-                        <a:srgbClr val="E6E9EC"/>
-                      </a:solidFill>
-                      <a:prstDash val="solid"/>
-                      <a:round/>
-                      <a:headEnd type="none" w="med" len="med"/>
-                      <a:tailEnd type="none" w="med" len="med"/>
-                    </a:lnR>
-                    <a:lnT w="6350" cap="flat" cmpd="sng" algn="ctr">
-                      <a:solidFill>
-                        <a:srgbClr val="E6E9EC"/>
-                      </a:solidFill>
-                      <a:prstDash val="solid"/>
-                      <a:round/>
-                      <a:headEnd type="none" w="med" len="med"/>
-                      <a:tailEnd type="none" w="med" len="med"/>
-                    </a:lnT>
-                    <a:lnB w="6350" cap="flat" cmpd="sng" algn="ctr">
-                      <a:solidFill>
-                        <a:srgbClr val="E6E9EC"/>
-                      </a:solidFill>
-                      <a:prstDash val="solid"/>
-                      <a:round/>
-                      <a:headEnd type="none" w="med" len="med"/>
-                      <a:tailEnd type="none" w="med" len="med"/>
-                    </a:lnB>
-                    <a:solidFill>
-                      <a:srgbClr val="F7F8FA"/>
-                    </a:solidFill>
-                  </a:tcPr>
-                </a:tc>
-              </a:tr>
-              <a:tr h="237744">
-                <a:tc>
-                  <a:txBody>
-                    <a:bodyPr/>
-                    <a:lstStyle/>
-                    <a:p>
-                      <a:pPr indent="0" marL="0">
-                        <a:buNone/>
-                      </a:pPr>
-                      <a:r>
-                        <a:rPr lang="en-US" sz="700" dirty="0">
-                          <a:solidFill>
-                            <a:srgbClr val="1E2B37"/>
-                          </a:solidFill>
-                          <a:latin typeface="Courier New" pitchFamily="34" charset="0"/>
-                          <a:ea typeface="Courier New" pitchFamily="34" charset="-122"/>
-                          <a:cs typeface="Courier New" pitchFamily="34" charset="-120"/>
-                        </a:rPr>
-                        <a:t>prose_repetition</a:t>
-                      </a:r>
-                      <a:endParaRPr lang="en-US" sz="700" dirty="0">
-                        <a:latin typeface="Courier New" charset="0"/>
-                        <a:ea typeface="Courier New" charset="0"/>
-                        <a:cs typeface="Courier New" charset="0"/>
-                      </a:endParaRPr>
-                    </a:p>
-                  </a:txBody>
-                  <a:tcPr marL="45720" marR="45720" marT="45720" marB="45720" anchor="ctr">
-                    <a:lnL w="6350" cap="flat" cmpd="sng" algn="ctr">
-                      <a:solidFill>
-                        <a:srgbClr val="E6E9EC"/>
-                      </a:solidFill>
-                      <a:prstDash val="solid"/>
-                      <a:round/>
-                      <a:headEnd type="none" w="med" len="med"/>
-                      <a:tailEnd type="none" w="med" len="med"/>
-                    </a:lnL>
-                    <a:lnR w="6350" cap="flat" cmpd="sng" algn="ctr">
-                      <a:solidFill>
-                        <a:srgbClr val="E6E9EC"/>
-                      </a:solidFill>
-                      <a:prstDash val="solid"/>
-                      <a:round/>
-                      <a:headEnd type="none" w="med" len="med"/>
-                      <a:tailEnd type="none" w="med" len="med"/>
-                    </a:lnR>
-                    <a:lnT w="6350" cap="flat" cmpd="sng" algn="ctr">
-                      <a:solidFill>
-                        <a:srgbClr val="E6E9EC"/>
-                      </a:solidFill>
-                      <a:prstDash val="solid"/>
-                      <a:round/>
-                      <a:headEnd type="none" w="med" len="med"/>
-                      <a:tailEnd type="none" w="med" len="med"/>
-                    </a:lnT>
-                    <a:lnB w="6350" cap="flat" cmpd="sng" algn="ctr">
-                      <a:solidFill>
-                        <a:srgbClr val="E6E9EC"/>
-                      </a:solidFill>
-                      <a:prstDash val="solid"/>
-                      <a:round/>
-                      <a:headEnd type="none" w="med" len="med"/>
-                      <a:tailEnd type="none" w="med" len="med"/>
-                    </a:lnB>
-                    <a:solidFill>
-                      <a:srgbClr val="FFFFFF"/>
-                    </a:solidFill>
-                  </a:tcPr>
-                </a:tc>
-                <a:tc>
-                  <a:txBody>
-                    <a:bodyPr/>
-                    <a:lstStyle/>
-                    <a:p>
-                      <a:pPr algn="ctr" indent="0" marL="0">
-                        <a:buNone/>
-                      </a:pPr>
-                      <a:r>
-                        <a:rPr lang="en-US" sz="750" b="1" dirty="0">
-                          <a:solidFill>
-                            <a:srgbClr val="16794A"/>
-                          </a:solidFill>
-                          <a:latin typeface="Arial" pitchFamily="34" charset="0"/>
-                          <a:ea typeface="Arial" pitchFamily="34" charset="-122"/>
-                          <a:cs typeface="Arial" pitchFamily="34" charset="-120"/>
-                        </a:rPr>
-                        <a:t>✓</a:t>
-                      </a:r>
-                      <a:endParaRPr lang="en-US" sz="750" dirty="0">
-                        <a:latin typeface="Arial" charset="0"/>
-                        <a:ea typeface="Arial" charset="0"/>
-                        <a:cs typeface="Arial" charset="0"/>
-                      </a:endParaRPr>
-                    </a:p>
-                  </a:txBody>
-                  <a:tcPr marL="45720" marR="45720" marT="45720" marB="45720" anchor="ctr">
-                    <a:lnL w="6350" cap="flat" cmpd="sng" algn="ctr">
-                      <a:solidFill>
-                        <a:srgbClr val="E6E9EC"/>
-                      </a:solidFill>
-                      <a:prstDash val="solid"/>
-                      <a:round/>
-                      <a:headEnd type="none" w="med" len="med"/>
-                      <a:tailEnd type="none" w="med" len="med"/>
-                    </a:lnL>
-                    <a:lnR w="6350" cap="flat" cmpd="sng" algn="ctr">
-                      <a:solidFill>
-                        <a:srgbClr val="E6E9EC"/>
-                      </a:solidFill>
-                      <a:prstDash val="solid"/>
-                      <a:round/>
-                      <a:headEnd type="none" w="med" len="med"/>
-                      <a:tailEnd type="none" w="med" len="med"/>
-                    </a:lnR>
-                    <a:lnT w="6350" cap="flat" cmpd="sng" algn="ctr">
-                      <a:solidFill>
-                        <a:srgbClr val="E6E9EC"/>
-                      </a:solidFill>
-                      <a:prstDash val="solid"/>
-                      <a:round/>
-                      <a:headEnd type="none" w="med" len="med"/>
-                      <a:tailEnd type="none" w="med" len="med"/>
-                    </a:lnT>
-                    <a:lnB w="6350" cap="flat" cmpd="sng" algn="ctr">
-                      <a:solidFill>
-                        <a:srgbClr val="E6E9EC"/>
-                      </a:solidFill>
-                      <a:prstDash val="solid"/>
-                      <a:round/>
-                      <a:headEnd type="none" w="med" len="med"/>
-                      <a:tailEnd type="none" w="med" len="med"/>
-                    </a:lnB>
-                    <a:solidFill>
-                      <a:srgbClr val="FFFFFF"/>
-                    </a:solidFill>
-                  </a:tcPr>
-                </a:tc>
-                <a:tc>
-                  <a:txBody>
-                    <a:bodyPr/>
-                    <a:lstStyle/>
-                    <a:p>
-                      <a:pPr algn="ctr" indent="0" marL="0">
-                        <a:buNone/>
-                      </a:pPr>
-                      <a:r>
-                        <a:rPr lang="en-US" sz="750" b="1" dirty="0">
-                          <a:solidFill>
-                            <a:srgbClr val="16794A"/>
-                          </a:solidFill>
-                          <a:latin typeface="Arial" pitchFamily="34" charset="0"/>
-                          <a:ea typeface="Arial" pitchFamily="34" charset="-122"/>
-                          <a:cs typeface="Arial" pitchFamily="34" charset="-120"/>
-                        </a:rPr>
-                        <a:t>✓</a:t>
-                      </a:r>
-                      <a:endParaRPr lang="en-US" sz="750" dirty="0">
-                        <a:latin typeface="Arial" charset="0"/>
-                        <a:ea typeface="Arial" charset="0"/>
-                        <a:cs typeface="Arial" charset="0"/>
-                      </a:endParaRPr>
-                    </a:p>
-                  </a:txBody>
-                  <a:tcPr marL="45720" marR="45720" marT="45720" marB="45720" anchor="ctr">
-                    <a:lnL w="6350" cap="flat" cmpd="sng" algn="ctr">
-                      <a:solidFill>
-                        <a:srgbClr val="E6E9EC"/>
-                      </a:solidFill>
-                      <a:prstDash val="solid"/>
-                      <a:round/>
-                      <a:headEnd type="none" w="med" len="med"/>
-                      <a:tailEnd type="none" w="med" len="med"/>
-                    </a:lnL>
-                    <a:lnR w="6350" cap="flat" cmpd="sng" algn="ctr">
-                      <a:solidFill>
-                        <a:srgbClr val="E6E9EC"/>
-                      </a:solidFill>
-                      <a:prstDash val="solid"/>
-                      <a:round/>
-                      <a:headEnd type="none" w="med" len="med"/>
-                      <a:tailEnd type="none" w="med" len="med"/>
-                    </a:lnR>
-                    <a:lnT w="6350" cap="flat" cmpd="sng" algn="ctr">
-                      <a:solidFill>
-                        <a:srgbClr val="E6E9EC"/>
-                      </a:solidFill>
-                      <a:prstDash val="solid"/>
-                      <a:round/>
-                      <a:headEnd type="none" w="med" len="med"/>
-                      <a:tailEnd type="none" w="med" len="med"/>
-                    </a:lnT>
-                    <a:lnB w="6350" cap="flat" cmpd="sng" algn="ctr">
-                      <a:solidFill>
-                        <a:srgbClr val="E6E9EC"/>
-                      </a:solidFill>
-                      <a:prstDash val="solid"/>
-                      <a:round/>
-                      <a:headEnd type="none" w="med" len="med"/>
-                      <a:tailEnd type="none" w="med" len="med"/>
-                    </a:lnB>
-                    <a:solidFill>
-                      <a:srgbClr val="FFFFFF"/>
-                    </a:solidFill>
-                  </a:tcPr>
-                </a:tc>
-                <a:tc>
-                  <a:txBody>
-                    <a:bodyPr/>
-                    <a:lstStyle/>
-                    <a:p>
-                      <a:pPr algn="ctr" indent="0" marL="0">
-                        <a:buNone/>
-                      </a:pPr>
-                      <a:r>
-                        <a:rPr lang="en-US" sz="750" dirty="0">
-                          <a:solidFill>
-                            <a:srgbClr val="5E6A77"/>
-                          </a:solidFill>
-                          <a:latin typeface="Arial" pitchFamily="34" charset="0"/>
-                          <a:ea typeface="Arial" pitchFamily="34" charset="-122"/>
-                          <a:cs typeface="Arial" pitchFamily="34" charset="-120"/>
-                        </a:rPr>
-                        <a:t>—</a:t>
-                      </a:r>
-                      <a:endParaRPr lang="en-US" sz="750" dirty="0">
-                        <a:latin typeface="Arial" charset="0"/>
-                        <a:ea typeface="Arial" charset="0"/>
-                        <a:cs typeface="Arial" charset="0"/>
-                      </a:endParaRPr>
-                    </a:p>
-                  </a:txBody>
-                  <a:tcPr marL="45720" marR="45720" marT="45720" marB="45720" anchor="ctr">
-                    <a:lnL w="6350" cap="flat" cmpd="sng" algn="ctr">
-                      <a:solidFill>
-                        <a:srgbClr val="E6E9EC"/>
-                      </a:solidFill>
-                      <a:prstDash val="solid"/>
-                      <a:round/>
-                      <a:headEnd type="none" w="med" len="med"/>
-                      <a:tailEnd type="none" w="med" len="med"/>
-                    </a:lnL>
-                    <a:lnR w="6350" cap="flat" cmpd="sng" algn="ctr">
-                      <a:solidFill>
-                        <a:srgbClr val="E6E9EC"/>
-                      </a:solidFill>
-                      <a:prstDash val="solid"/>
-                      <a:round/>
-                      <a:headEnd type="none" w="med" len="med"/>
-                      <a:tailEnd type="none" w="med" len="med"/>
-                    </a:lnR>
-                    <a:lnT w="6350" cap="flat" cmpd="sng" algn="ctr">
-                      <a:solidFill>
-                        <a:srgbClr val="E6E9EC"/>
-                      </a:solidFill>
-                      <a:prstDash val="solid"/>
-                      <a:round/>
-                      <a:headEnd type="none" w="med" len="med"/>
-                      <a:tailEnd type="none" w="med" len="med"/>
-                    </a:lnT>
-                    <a:lnB w="6350" cap="flat" cmpd="sng" algn="ctr">
-                      <a:solidFill>
-                        <a:srgbClr val="E6E9EC"/>
-                      </a:solidFill>
-                      <a:prstDash val="solid"/>
-                      <a:round/>
-                      <a:headEnd type="none" w="med" len="med"/>
-                      <a:tailEnd type="none" w="med" len="med"/>
-                    </a:lnB>
-                    <a:solidFill>
-                      <a:srgbClr val="FFFFFF"/>
-                    </a:solidFill>
-                  </a:tcPr>
-                </a:tc>
-                <a:tc>
-                  <a:txBody>
-                    <a:bodyPr/>
-                    <a:lstStyle/>
-                    <a:p>
-                      <a:pPr algn="ctr" indent="0" marL="0">
-                        <a:buNone/>
-                      </a:pPr>
-                      <a:r>
-                        <a:rPr lang="en-US" sz="750" b="1" dirty="0">
-                          <a:solidFill>
-                            <a:srgbClr val="16794A"/>
-                          </a:solidFill>
-                          <a:latin typeface="Arial" pitchFamily="34" charset="0"/>
-                          <a:ea typeface="Arial" pitchFamily="34" charset="-122"/>
-                          <a:cs typeface="Arial" pitchFamily="34" charset="-120"/>
-                        </a:rPr>
-                        <a:t>✓</a:t>
-                      </a:r>
-                      <a:endParaRPr lang="en-US" sz="750" dirty="0">
-                        <a:latin typeface="Arial" charset="0"/>
-                        <a:ea typeface="Arial" charset="0"/>
-                        <a:cs typeface="Arial" charset="0"/>
-                      </a:endParaRPr>
-                    </a:p>
-                  </a:txBody>
-                  <a:tcPr marL="45720" marR="45720" marT="45720" marB="45720" anchor="ctr">
-                    <a:lnL w="6350" cap="flat" cmpd="sng" algn="ctr">
-                      <a:solidFill>
-                        <a:srgbClr val="E6E9EC"/>
-                      </a:solidFill>
-                      <a:prstDash val="solid"/>
-                      <a:round/>
-                      <a:headEnd type="none" w="med" len="med"/>
-                      <a:tailEnd type="none" w="med" len="med"/>
-                    </a:lnL>
-                    <a:lnR w="6350" cap="flat" cmpd="sng" algn="ctr">
-                      <a:solidFill>
-                        <a:srgbClr val="E6E9EC"/>
-                      </a:solidFill>
-                      <a:prstDash val="solid"/>
-                      <a:round/>
-                      <a:headEnd type="none" w="med" len="med"/>
-                      <a:tailEnd type="none" w="med" len="med"/>
-                    </a:lnR>
-                    <a:lnT w="6350" cap="flat" cmpd="sng" algn="ctr">
-                      <a:solidFill>
-                        <a:srgbClr val="E6E9EC"/>
-                      </a:solidFill>
-                      <a:prstDash val="solid"/>
-                      <a:round/>
-                      <a:headEnd type="none" w="med" len="med"/>
-                      <a:tailEnd type="none" w="med" len="med"/>
-                    </a:lnT>
-                    <a:lnB w="6350" cap="flat" cmpd="sng" algn="ctr">
-                      <a:solidFill>
-                        <a:srgbClr val="E6E9EC"/>
-                      </a:solidFill>
-                      <a:prstDash val="solid"/>
-                      <a:round/>
-                      <a:headEnd type="none" w="med" len="med"/>
-                      <a:tailEnd type="none" w="med" len="med"/>
-                    </a:lnB>
-                    <a:solidFill>
-                      <a:srgbClr val="FFFFFF"/>
-                    </a:solidFill>
-                  </a:tcPr>
-                </a:tc>
-                <a:tc>
-                  <a:txBody>
-                    <a:bodyPr/>
-                    <a:lstStyle/>
-                    <a:p>
-                      <a:pPr algn="ctr" indent="0" marL="0">
-                        <a:buNone/>
-                      </a:pPr>
-                      <a:r>
-                        <a:rPr lang="en-US" sz="750" b="1" dirty="0">
-                          <a:solidFill>
-                            <a:srgbClr val="16794A"/>
-                          </a:solidFill>
-                          <a:latin typeface="Arial" pitchFamily="34" charset="0"/>
-                          <a:ea typeface="Arial" pitchFamily="34" charset="-122"/>
-                          <a:cs typeface="Arial" pitchFamily="34" charset="-120"/>
-                        </a:rPr>
-                        <a:t>✓</a:t>
-                      </a:r>
-                      <a:endParaRPr lang="en-US" sz="750" dirty="0">
-                        <a:latin typeface="Arial" charset="0"/>
-                        <a:ea typeface="Arial" charset="0"/>
-                        <a:cs typeface="Arial" charset="0"/>
-                      </a:endParaRPr>
-                    </a:p>
-                  </a:txBody>
-                  <a:tcPr marL="45720" marR="45720" marT="45720" marB="45720" anchor="ctr">
-                    <a:lnL w="6350" cap="flat" cmpd="sng" algn="ctr">
-                      <a:solidFill>
-                        <a:srgbClr val="E6E9EC"/>
-                      </a:solidFill>
-                      <a:prstDash val="solid"/>
-                      <a:round/>
-                      <a:headEnd type="none" w="med" len="med"/>
-                      <a:tailEnd type="none" w="med" len="med"/>
-                    </a:lnL>
-                    <a:lnR w="6350" cap="flat" cmpd="sng" algn="ctr">
-                      <a:solidFill>
-                        <a:srgbClr val="E6E9EC"/>
-                      </a:solidFill>
-                      <a:prstDash val="solid"/>
-                      <a:round/>
-                      <a:headEnd type="none" w="med" len="med"/>
-                      <a:tailEnd type="none" w="med" len="med"/>
-                    </a:lnR>
-                    <a:lnT w="6350" cap="flat" cmpd="sng" algn="ctr">
-                      <a:solidFill>
-                        <a:srgbClr val="E6E9EC"/>
-                      </a:solidFill>
-                      <a:prstDash val="solid"/>
-                      <a:round/>
-                      <a:headEnd type="none" w="med" len="med"/>
-                      <a:tailEnd type="none" w="med" len="med"/>
-                    </a:lnT>
-                    <a:lnB w="6350" cap="flat" cmpd="sng" algn="ctr">
-                      <a:solidFill>
-                        <a:srgbClr val="E6E9EC"/>
-                      </a:solidFill>
-                      <a:prstDash val="solid"/>
-                      <a:round/>
-                      <a:headEnd type="none" w="med" len="med"/>
-                      <a:tailEnd type="none" w="med" len="med"/>
-                    </a:lnB>
-                    <a:solidFill>
-                      <a:srgbClr val="FFFFFF"/>
-                    </a:solidFill>
-                  </a:tcPr>
-                </a:tc>
-                <a:tc>
-                  <a:txBody>
-                    <a:bodyPr/>
-                    <a:lstStyle/>
-                    <a:p>
-                      <a:pPr algn="ctr" indent="0" marL="0">
-                        <a:buNone/>
-                      </a:pPr>
-                      <a:r>
-                        <a:rPr lang="en-US" sz="750" b="1" dirty="0">
-                          <a:solidFill>
-                            <a:srgbClr val="16794A"/>
-                          </a:solidFill>
-                          <a:latin typeface="Arial" pitchFamily="34" charset="0"/>
-                          <a:ea typeface="Arial" pitchFamily="34" charset="-122"/>
-                          <a:cs typeface="Arial" pitchFamily="34" charset="-120"/>
-                        </a:rPr>
-                        <a:t>✓</a:t>
-                      </a:r>
-                      <a:endParaRPr lang="en-US" sz="750" dirty="0">
-                        <a:latin typeface="Arial" charset="0"/>
-                        <a:ea typeface="Arial" charset="0"/>
-                        <a:cs typeface="Arial" charset="0"/>
-                      </a:endParaRPr>
-                    </a:p>
-                  </a:txBody>
-                  <a:tcPr marL="45720" marR="45720" marT="45720" marB="45720" anchor="ctr">
-                    <a:lnL w="6350" cap="flat" cmpd="sng" algn="ctr">
-                      <a:solidFill>
-                        <a:srgbClr val="E6E9EC"/>
-                      </a:solidFill>
-                      <a:prstDash val="solid"/>
-                      <a:round/>
-                      <a:headEnd type="none" w="med" len="med"/>
-                      <a:tailEnd type="none" w="med" len="med"/>
-                    </a:lnL>
-                    <a:lnR w="6350" cap="flat" cmpd="sng" algn="ctr">
-                      <a:solidFill>
-                        <a:srgbClr val="E6E9EC"/>
-                      </a:solidFill>
-                      <a:prstDash val="solid"/>
-                      <a:round/>
-                      <a:headEnd type="none" w="med" len="med"/>
-                      <a:tailEnd type="none" w="med" len="med"/>
-                    </a:lnR>
-                    <a:lnT w="6350" cap="flat" cmpd="sng" algn="ctr">
-                      <a:solidFill>
-                        <a:srgbClr val="E6E9EC"/>
-                      </a:solidFill>
-                      <a:prstDash val="solid"/>
-                      <a:round/>
-                      <a:headEnd type="none" w="med" len="med"/>
-                      <a:tailEnd type="none" w="med" len="med"/>
-                    </a:lnT>
-                    <a:lnB w="6350" cap="flat" cmpd="sng" algn="ctr">
-                      <a:solidFill>
-                        <a:srgbClr val="E6E9EC"/>
-                      </a:solidFill>
-                      <a:prstDash val="solid"/>
-                      <a:round/>
-                      <a:headEnd type="none" w="med" len="med"/>
-                      <a:tailEnd type="none" w="med" len="med"/>
-                    </a:lnB>
-                    <a:solidFill>
-                      <a:srgbClr val="FFFFFF"/>
-                    </a:solidFill>
-                  </a:tcPr>
-                </a:tc>
-                <a:tc>
-                  <a:txBody>
-                    <a:bodyPr/>
-                    <a:lstStyle/>
-                    <a:p>
-                      <a:pPr algn="ctr" indent="0" marL="0">
-                        <a:buNone/>
-                      </a:pPr>
-                      <a:r>
-                        <a:rPr lang="en-US" sz="750" dirty="0">
-                          <a:solidFill>
-                            <a:srgbClr val="5E6A77"/>
-                          </a:solidFill>
-                          <a:latin typeface="Arial" pitchFamily="34" charset="0"/>
-                          <a:ea typeface="Arial" pitchFamily="34" charset="-122"/>
-                          <a:cs typeface="Arial" pitchFamily="34" charset="-120"/>
-                        </a:rPr>
-                        <a:t>—</a:t>
-                      </a:r>
-                      <a:endParaRPr lang="en-US" sz="750" dirty="0">
-                        <a:latin typeface="Arial" charset="0"/>
-                        <a:ea typeface="Arial" charset="0"/>
-                        <a:cs typeface="Arial" charset="0"/>
-                      </a:endParaRPr>
-                    </a:p>
-                  </a:txBody>
-                  <a:tcPr marL="45720" marR="45720" marT="45720" marB="45720" anchor="ctr">
-                    <a:lnL w="6350" cap="flat" cmpd="sng" algn="ctr">
-                      <a:solidFill>
-                        <a:srgbClr val="E6E9EC"/>
-                      </a:solidFill>
-                      <a:prstDash val="solid"/>
-                      <a:round/>
-                      <a:headEnd type="none" w="med" len="med"/>
-                      <a:tailEnd type="none" w="med" len="med"/>
-                    </a:lnL>
-                    <a:lnR w="6350" cap="flat" cmpd="sng" algn="ctr">
-                      <a:solidFill>
-                        <a:srgbClr val="E6E9EC"/>
-                      </a:solidFill>
-                      <a:prstDash val="solid"/>
-                      <a:round/>
-                      <a:headEnd type="none" w="med" len="med"/>
-                      <a:tailEnd type="none" w="med" len="med"/>
-                    </a:lnR>
-                    <a:lnT w="6350" cap="flat" cmpd="sng" algn="ctr">
-                      <a:solidFill>
-                        <a:srgbClr val="E6E9EC"/>
-                      </a:solidFill>
-                      <a:prstDash val="solid"/>
-                      <a:round/>
-                      <a:headEnd type="none" w="med" len="med"/>
-                      <a:tailEnd type="none" w="med" len="med"/>
-                    </a:lnT>
-                    <a:lnB w="6350" cap="flat" cmpd="sng" algn="ctr">
-                      <a:solidFill>
-                        <a:srgbClr val="E6E9EC"/>
-                      </a:solidFill>
-                      <a:prstDash val="solid"/>
-                      <a:round/>
-                      <a:headEnd type="none" w="med" len="med"/>
-                      <a:tailEnd type="none" w="med" len="med"/>
-                    </a:lnB>
-                    <a:solidFill>
-                      <a:srgbClr val="FFFFFF"/>
-                    </a:solidFill>
-                  </a:tcPr>
-                </a:tc>
-              </a:tr>
-              <a:tr h="237744">
-                <a:tc>
-                  <a:txBody>
-                    <a:bodyPr/>
-                    <a:lstStyle/>
-                    <a:p>
-                      <a:pPr indent="0" marL="0">
-                        <a:buNone/>
-                      </a:pPr>
-                      <a:r>
-                        <a:rPr lang="en-US" sz="700" dirty="0">
-                          <a:solidFill>
-                            <a:srgbClr val="1E2B37"/>
-                          </a:solidFill>
-                          <a:latin typeface="Courier New" pitchFamily="34" charset="0"/>
-                          <a:ea typeface="Courier New" pitchFamily="34" charset="-122"/>
-                          <a:cs typeface="Courier New" pitchFamily="34" charset="-120"/>
-                        </a:rPr>
-                        <a:t>judge_chapter</a:t>
-                      </a:r>
-                      <a:endParaRPr lang="en-US" sz="700" dirty="0">
-                        <a:latin typeface="Courier New" charset="0"/>
-                        <a:ea typeface="Courier New" charset="0"/>
-                        <a:cs typeface="Courier New" charset="0"/>
-                      </a:endParaRPr>
-                    </a:p>
-                  </a:txBody>
-                  <a:tcPr marL="45720" marR="45720" marT="45720" marB="45720" anchor="ctr">
-                    <a:lnL w="6350" cap="flat" cmpd="sng" algn="ctr">
-                      <a:solidFill>
-                        <a:srgbClr val="E6E9EC"/>
-                      </a:solidFill>
-                      <a:prstDash val="solid"/>
-                      <a:round/>
-                      <a:headEnd type="none" w="med" len="med"/>
-                      <a:tailEnd type="none" w="med" len="med"/>
-                    </a:lnL>
-                    <a:lnR w="6350" cap="flat" cmpd="sng" algn="ctr">
-                      <a:solidFill>
-                        <a:srgbClr val="E6E9EC"/>
-                      </a:solidFill>
-                      <a:prstDash val="solid"/>
-                      <a:round/>
-                      <a:headEnd type="none" w="med" len="med"/>
-                      <a:tailEnd type="none" w="med" len="med"/>
-                    </a:lnR>
-                    <a:lnT w="6350" cap="flat" cmpd="sng" algn="ctr">
-                      <a:solidFill>
-                        <a:srgbClr val="E6E9EC"/>
-                      </a:solidFill>
-                      <a:prstDash val="solid"/>
-                      <a:round/>
-                      <a:headEnd type="none" w="med" len="med"/>
-                      <a:tailEnd type="none" w="med" len="med"/>
-                    </a:lnT>
-                    <a:lnB w="6350" cap="flat" cmpd="sng" algn="ctr">
-                      <a:solidFill>
-                        <a:srgbClr val="E6E9EC"/>
-                      </a:solidFill>
-                      <a:prstDash val="solid"/>
-                      <a:round/>
-                      <a:headEnd type="none" w="med" len="med"/>
-                      <a:tailEnd type="none" w="med" len="med"/>
-                    </a:lnB>
-                    <a:solidFill>
-                      <a:srgbClr val="F7F8FA"/>
-                    </a:solidFill>
-                  </a:tcPr>
-                </a:tc>
-                <a:tc>
-                  <a:txBody>
-                    <a:bodyPr/>
-                    <a:lstStyle/>
-                    <a:p>
-                      <a:pPr algn="ctr" indent="0" marL="0">
-                        <a:buNone/>
-                      </a:pPr>
-                      <a:r>
-                        <a:rPr lang="en-US" sz="750" b="1" dirty="0">
-                          <a:solidFill>
-                            <a:srgbClr val="16794A"/>
-                          </a:solidFill>
-                          <a:latin typeface="Arial" pitchFamily="34" charset="0"/>
-                          <a:ea typeface="Arial" pitchFamily="34" charset="-122"/>
-                          <a:cs typeface="Arial" pitchFamily="34" charset="-120"/>
-                        </a:rPr>
-                        <a:t>✓</a:t>
-                      </a:r>
-                      <a:endParaRPr lang="en-US" sz="750" dirty="0">
-                        <a:latin typeface="Arial" charset="0"/>
-                        <a:ea typeface="Arial" charset="0"/>
-                        <a:cs typeface="Arial" charset="0"/>
-                      </a:endParaRPr>
-                    </a:p>
-                  </a:txBody>
-                  <a:tcPr marL="45720" marR="45720" marT="45720" marB="45720" anchor="ctr">
-                    <a:lnL w="6350" cap="flat" cmpd="sng" algn="ctr">
-                      <a:solidFill>
-                        <a:srgbClr val="E6E9EC"/>
-                      </a:solidFill>
-                      <a:prstDash val="solid"/>
-                      <a:round/>
-                      <a:headEnd type="none" w="med" len="med"/>
-                      <a:tailEnd type="none" w="med" len="med"/>
-                    </a:lnL>
-                    <a:lnR w="6350" cap="flat" cmpd="sng" algn="ctr">
-                      <a:solidFill>
-                        <a:srgbClr val="E6E9EC"/>
-                      </a:solidFill>
-                      <a:prstDash val="solid"/>
-                      <a:round/>
-                      <a:headEnd type="none" w="med" len="med"/>
-                      <a:tailEnd type="none" w="med" len="med"/>
-                    </a:lnR>
-                    <a:lnT w="6350" cap="flat" cmpd="sng" algn="ctr">
-                      <a:solidFill>
-                        <a:srgbClr val="E6E9EC"/>
-                      </a:solidFill>
-                      <a:prstDash val="solid"/>
-                      <a:round/>
-                      <a:headEnd type="none" w="med" len="med"/>
-                      <a:tailEnd type="none" w="med" len="med"/>
-                    </a:lnT>
-                    <a:lnB w="6350" cap="flat" cmpd="sng" algn="ctr">
-                      <a:solidFill>
-                        <a:srgbClr val="E6E9EC"/>
-                      </a:solidFill>
-                      <a:prstDash val="solid"/>
-                      <a:round/>
-                      <a:headEnd type="none" w="med" len="med"/>
-                      <a:tailEnd type="none" w="med" len="med"/>
-                    </a:lnB>
-                    <a:solidFill>
-                      <a:srgbClr val="F7F8FA"/>
-                    </a:solidFill>
-                  </a:tcPr>
-                </a:tc>
-                <a:tc>
-                  <a:txBody>
-                    <a:bodyPr/>
-                    <a:lstStyle/>
-                    <a:p>
-                      <a:pPr algn="ctr" indent="0" marL="0">
-                        <a:buNone/>
-                      </a:pPr>
-                      <a:r>
-                        <a:rPr lang="en-US" sz="750" b="1" dirty="0">
-                          <a:solidFill>
-                            <a:srgbClr val="16794A"/>
-                          </a:solidFill>
-                          <a:latin typeface="Arial" pitchFamily="34" charset="0"/>
-                          <a:ea typeface="Arial" pitchFamily="34" charset="-122"/>
-                          <a:cs typeface="Arial" pitchFamily="34" charset="-120"/>
-                        </a:rPr>
-                        <a:t>✓</a:t>
-                      </a:r>
-                      <a:endParaRPr lang="en-US" sz="750" dirty="0">
-                        <a:latin typeface="Arial" charset="0"/>
-                        <a:ea typeface="Arial" charset="0"/>
-                        <a:cs typeface="Arial" charset="0"/>
-                      </a:endParaRPr>
-                    </a:p>
-                  </a:txBody>
-                  <a:tcPr marL="45720" marR="45720" marT="45720" marB="45720" anchor="ctr">
-                    <a:lnL w="6350" cap="flat" cmpd="sng" algn="ctr">
-                      <a:solidFill>
-                        <a:srgbClr val="E6E9EC"/>
-                      </a:solidFill>
-                      <a:prstDash val="solid"/>
-                      <a:round/>
-                      <a:headEnd type="none" w="med" len="med"/>
-                      <a:tailEnd type="none" w="med" len="med"/>
-                    </a:lnL>
-                    <a:lnR w="6350" cap="flat" cmpd="sng" algn="ctr">
-                      <a:solidFill>
-                        <a:srgbClr val="E6E9EC"/>
-                      </a:solidFill>
-                      <a:prstDash val="solid"/>
-                      <a:round/>
-                      <a:headEnd type="none" w="med" len="med"/>
-                      <a:tailEnd type="none" w="med" len="med"/>
-                    </a:lnR>
-                    <a:lnT w="6350" cap="flat" cmpd="sng" algn="ctr">
-                      <a:solidFill>
-                        <a:srgbClr val="E6E9EC"/>
-                      </a:solidFill>
-                      <a:prstDash val="solid"/>
-                      <a:round/>
-                      <a:headEnd type="none" w="med" len="med"/>
-                      <a:tailEnd type="none" w="med" len="med"/>
-                    </a:lnT>
-                    <a:lnB w="6350" cap="flat" cmpd="sng" algn="ctr">
-                      <a:solidFill>
-                        <a:srgbClr val="E6E9EC"/>
-                      </a:solidFill>
-                      <a:prstDash val="solid"/>
-                      <a:round/>
-                      <a:headEnd type="none" w="med" len="med"/>
-                      <a:tailEnd type="none" w="med" len="med"/>
-                    </a:lnB>
-                    <a:solidFill>
-                      <a:srgbClr val="F7F8FA"/>
-                    </a:solidFill>
-                  </a:tcPr>
-                </a:tc>
-                <a:tc>
-                  <a:txBody>
-                    <a:bodyPr/>
-                    <a:lstStyle/>
-                    <a:p>
-                      <a:pPr algn="ctr" indent="0" marL="0">
-                        <a:buNone/>
-                      </a:pPr>
-                      <a:r>
-                        <a:rPr lang="en-US" sz="750" dirty="0">
-                          <a:solidFill>
-                            <a:srgbClr val="5E6A77"/>
-                          </a:solidFill>
-                          <a:latin typeface="Arial" pitchFamily="34" charset="0"/>
-                          <a:ea typeface="Arial" pitchFamily="34" charset="-122"/>
-                          <a:cs typeface="Arial" pitchFamily="34" charset="-120"/>
-                        </a:rPr>
-                        <a:t>—</a:t>
-                      </a:r>
-                      <a:endParaRPr lang="en-US" sz="750" dirty="0">
-                        <a:latin typeface="Arial" charset="0"/>
-                        <a:ea typeface="Arial" charset="0"/>
-                        <a:cs typeface="Arial" charset="0"/>
-                      </a:endParaRPr>
-                    </a:p>
-                  </a:txBody>
-                  <a:tcPr marL="45720" marR="45720" marT="45720" marB="45720" anchor="ctr">
-                    <a:lnL w="6350" cap="flat" cmpd="sng" algn="ctr">
-                      <a:solidFill>
-                        <a:srgbClr val="E6E9EC"/>
-                      </a:solidFill>
-                      <a:prstDash val="solid"/>
-                      <a:round/>
-                      <a:headEnd type="none" w="med" len="med"/>
-                      <a:tailEnd type="none" w="med" len="med"/>
-                    </a:lnL>
-                    <a:lnR w="6350" cap="flat" cmpd="sng" algn="ctr">
-                      <a:solidFill>
-                        <a:srgbClr val="E6E9EC"/>
-                      </a:solidFill>
-                      <a:prstDash val="solid"/>
-                      <a:round/>
-                      <a:headEnd type="none" w="med" len="med"/>
-                      <a:tailEnd type="none" w="med" len="med"/>
-                    </a:lnR>
-                    <a:lnT w="6350" cap="flat" cmpd="sng" algn="ctr">
-                      <a:solidFill>
-                        <a:srgbClr val="E6E9EC"/>
-                      </a:solidFill>
-                      <a:prstDash val="solid"/>
-                      <a:round/>
-                      <a:headEnd type="none" w="med" len="med"/>
-                      <a:tailEnd type="none" w="med" len="med"/>
-                    </a:lnT>
-                    <a:lnB w="6350" cap="flat" cmpd="sng" algn="ctr">
-                      <a:solidFill>
-                        <a:srgbClr val="E6E9EC"/>
-                      </a:solidFill>
-                      <a:prstDash val="solid"/>
-                      <a:round/>
-                      <a:headEnd type="none" w="med" len="med"/>
-                      <a:tailEnd type="none" w="med" len="med"/>
-                    </a:lnB>
-                    <a:solidFill>
-                      <a:srgbClr val="F7F8FA"/>
-                    </a:solidFill>
-                  </a:tcPr>
-                </a:tc>
-                <a:tc>
-                  <a:txBody>
-                    <a:bodyPr/>
-                    <a:lstStyle/>
-                    <a:p>
-                      <a:pPr algn="ctr" indent="0" marL="0">
-                        <a:buNone/>
-                      </a:pPr>
-                      <a:r>
-                        <a:rPr lang="en-US" sz="750" b="1" dirty="0">
-                          <a:solidFill>
-                            <a:srgbClr val="16794A"/>
-                          </a:solidFill>
-                          <a:latin typeface="Arial" pitchFamily="34" charset="0"/>
-                          <a:ea typeface="Arial" pitchFamily="34" charset="-122"/>
-                          <a:cs typeface="Arial" pitchFamily="34" charset="-120"/>
-                        </a:rPr>
-                        <a:t>✓</a:t>
-                      </a:r>
-                      <a:endParaRPr lang="en-US" sz="750" dirty="0">
-                        <a:latin typeface="Arial" charset="0"/>
-                        <a:ea typeface="Arial" charset="0"/>
-                        <a:cs typeface="Arial" charset="0"/>
-                      </a:endParaRPr>
-                    </a:p>
-                  </a:txBody>
-                  <a:tcPr marL="45720" marR="45720" marT="45720" marB="45720" anchor="ctr">
-                    <a:lnL w="6350" cap="flat" cmpd="sng" algn="ctr">
-                      <a:solidFill>
-                        <a:srgbClr val="E6E9EC"/>
-                      </a:solidFill>
-                      <a:prstDash val="solid"/>
-                      <a:round/>
-                      <a:headEnd type="none" w="med" len="med"/>
-                      <a:tailEnd type="none" w="med" len="med"/>
-                    </a:lnL>
-                    <a:lnR w="6350" cap="flat" cmpd="sng" algn="ctr">
-                      <a:solidFill>
-                        <a:srgbClr val="E6E9EC"/>
-                      </a:solidFill>
-                      <a:prstDash val="solid"/>
-                      <a:round/>
-                      <a:headEnd type="none" w="med" len="med"/>
-                      <a:tailEnd type="none" w="med" len="med"/>
-                    </a:lnR>
-                    <a:lnT w="6350" cap="flat" cmpd="sng" algn="ctr">
-                      <a:solidFill>
-                        <a:srgbClr val="E6E9EC"/>
-                      </a:solidFill>
-                      <a:prstDash val="solid"/>
-                      <a:round/>
-                      <a:headEnd type="none" w="med" len="med"/>
-                      <a:tailEnd type="none" w="med" len="med"/>
-                    </a:lnT>
-                    <a:lnB w="6350" cap="flat" cmpd="sng" algn="ctr">
-                      <a:solidFill>
-                        <a:srgbClr val="E6E9EC"/>
-                      </a:solidFill>
-                      <a:prstDash val="solid"/>
-                      <a:round/>
-                      <a:headEnd type="none" w="med" len="med"/>
-                      <a:tailEnd type="none" w="med" len="med"/>
-                    </a:lnB>
-                    <a:solidFill>
-                      <a:srgbClr val="F7F8FA"/>
-                    </a:solidFill>
-                  </a:tcPr>
-                </a:tc>
-                <a:tc>
-                  <a:txBody>
-                    <a:bodyPr/>
-                    <a:lstStyle/>
-                    <a:p>
-                      <a:pPr algn="ctr" indent="0" marL="0">
-                        <a:buNone/>
-                      </a:pPr>
-                      <a:r>
-                        <a:rPr lang="en-US" sz="750" b="1" dirty="0">
-                          <a:solidFill>
-                            <a:srgbClr val="16794A"/>
-                          </a:solidFill>
-                          <a:latin typeface="Arial" pitchFamily="34" charset="0"/>
-                          <a:ea typeface="Arial" pitchFamily="34" charset="-122"/>
-                          <a:cs typeface="Arial" pitchFamily="34" charset="-120"/>
-                        </a:rPr>
-                        <a:t>✓</a:t>
-                      </a:r>
-                      <a:endParaRPr lang="en-US" sz="750" dirty="0">
-                        <a:latin typeface="Arial" charset="0"/>
-                        <a:ea typeface="Arial" charset="0"/>
-                        <a:cs typeface="Arial" charset="0"/>
-                      </a:endParaRPr>
-                    </a:p>
-                  </a:txBody>
-                  <a:tcPr marL="45720" marR="45720" marT="45720" marB="45720" anchor="ctr">
-                    <a:lnL w="6350" cap="flat" cmpd="sng" algn="ctr">
-                      <a:solidFill>
-                        <a:srgbClr val="E6E9EC"/>
-                      </a:solidFill>
-                      <a:prstDash val="solid"/>
-                      <a:round/>
-                      <a:headEnd type="none" w="med" len="med"/>
-                      <a:tailEnd type="none" w="med" len="med"/>
-                    </a:lnL>
-                    <a:lnR w="6350" cap="flat" cmpd="sng" algn="ctr">
-                      <a:solidFill>
-                        <a:srgbClr val="E6E9EC"/>
-                      </a:solidFill>
-                      <a:prstDash val="solid"/>
-                      <a:round/>
-                      <a:headEnd type="none" w="med" len="med"/>
-                      <a:tailEnd type="none" w="med" len="med"/>
-                    </a:lnR>
-                    <a:lnT w="6350" cap="flat" cmpd="sng" algn="ctr">
-                      <a:solidFill>
-                        <a:srgbClr val="E6E9EC"/>
-                      </a:solidFill>
-                      <a:prstDash val="solid"/>
-                      <a:round/>
-                      <a:headEnd type="none" w="med" len="med"/>
-                      <a:tailEnd type="none" w="med" len="med"/>
-                    </a:lnT>
-                    <a:lnB w="6350" cap="flat" cmpd="sng" algn="ctr">
-                      <a:solidFill>
-                        <a:srgbClr val="E6E9EC"/>
-                      </a:solidFill>
-                      <a:prstDash val="solid"/>
-                      <a:round/>
-                      <a:headEnd type="none" w="med" len="med"/>
-                      <a:tailEnd type="none" w="med" len="med"/>
-                    </a:lnB>
-                    <a:solidFill>
-                      <a:srgbClr val="F7F8FA"/>
-                    </a:solidFill>
-                  </a:tcPr>
-                </a:tc>
-                <a:tc>
-                  <a:txBody>
-                    <a:bodyPr/>
-                    <a:lstStyle/>
-                    <a:p>
-                      <a:pPr algn="ctr" indent="0" marL="0">
-                        <a:buNone/>
-                      </a:pPr>
-                      <a:r>
-                        <a:rPr lang="en-US" sz="750" b="1" dirty="0">
-                          <a:solidFill>
-                            <a:srgbClr val="B83232"/>
-                          </a:solidFill>
-                          <a:latin typeface="Arial" pitchFamily="34" charset="0"/>
-                          <a:ea typeface="Arial" pitchFamily="34" charset="-122"/>
-                          <a:cs typeface="Arial" pitchFamily="34" charset="-120"/>
-                        </a:rPr>
-                        <a:t>✗</a:t>
-                      </a:r>
-                      <a:endParaRPr lang="en-US" sz="750" dirty="0">
-                        <a:latin typeface="Arial" charset="0"/>
-                        <a:ea typeface="Arial" charset="0"/>
-                        <a:cs typeface="Arial" charset="0"/>
-                      </a:endParaRPr>
-                    </a:p>
-                  </a:txBody>
-                  <a:tcPr marL="45720" marR="45720" marT="45720" marB="45720" anchor="ctr">
-                    <a:lnL w="6350" cap="flat" cmpd="sng" algn="ctr">
-                      <a:solidFill>
-                        <a:srgbClr val="E6E9EC"/>
-                      </a:solidFill>
-                      <a:prstDash val="solid"/>
-                      <a:round/>
-                      <a:headEnd type="none" w="med" len="med"/>
-                      <a:tailEnd type="none" w="med" len="med"/>
-                    </a:lnL>
-                    <a:lnR w="6350" cap="flat" cmpd="sng" algn="ctr">
-                      <a:solidFill>
-                        <a:srgbClr val="E6E9EC"/>
-                      </a:solidFill>
-                      <a:prstDash val="solid"/>
-                      <a:round/>
-                      <a:headEnd type="none" w="med" len="med"/>
-                      <a:tailEnd type="none" w="med" len="med"/>
-                    </a:lnR>
-                    <a:lnT w="6350" cap="flat" cmpd="sng" algn="ctr">
-                      <a:solidFill>
-                        <a:srgbClr val="E6E9EC"/>
-                      </a:solidFill>
-                      <a:prstDash val="solid"/>
-                      <a:round/>
-                      <a:headEnd type="none" w="med" len="med"/>
-                      <a:tailEnd type="none" w="med" len="med"/>
-                    </a:lnT>
-                    <a:lnB w="6350" cap="flat" cmpd="sng" algn="ctr">
-                      <a:solidFill>
-                        <a:srgbClr val="E6E9EC"/>
-                      </a:solidFill>
-                      <a:prstDash val="solid"/>
-                      <a:round/>
-                      <a:headEnd type="none" w="med" len="med"/>
-                      <a:tailEnd type="none" w="med" len="med"/>
-                    </a:lnB>
-                    <a:solidFill>
-                      <a:srgbClr val="F7F8FA"/>
-                    </a:solidFill>
-                  </a:tcPr>
-                </a:tc>
-                <a:tc>
-                  <a:txBody>
-                    <a:bodyPr/>
-                    <a:lstStyle/>
-                    <a:p>
-                      <a:pPr algn="ctr" indent="0" marL="0">
-                        <a:buNone/>
-                      </a:pPr>
-                      <a:r>
-                        <a:rPr lang="en-US" sz="750" dirty="0">
-                          <a:solidFill>
-                            <a:srgbClr val="5E6A77"/>
-                          </a:solidFill>
-                          <a:latin typeface="Arial" pitchFamily="34" charset="0"/>
-                          <a:ea typeface="Arial" pitchFamily="34" charset="-122"/>
-                          <a:cs typeface="Arial" pitchFamily="34" charset="-120"/>
-                        </a:rPr>
-                        <a:t>—</a:t>
-                      </a:r>
-                      <a:endParaRPr lang="en-US" sz="750" dirty="0">
-                        <a:latin typeface="Arial" charset="0"/>
-                        <a:ea typeface="Arial" charset="0"/>
-                        <a:cs typeface="Arial" charset="0"/>
-                      </a:endParaRPr>
-                    </a:p>
-                  </a:txBody>
-                  <a:tcPr marL="45720" marR="45720" marT="45720" marB="45720" anchor="ctr">
-                    <a:lnL w="6350" cap="flat" cmpd="sng" algn="ctr">
-                      <a:solidFill>
-                        <a:srgbClr val="E6E9EC"/>
-                      </a:solidFill>
-                      <a:prstDash val="solid"/>
-                      <a:round/>
-                      <a:headEnd type="none" w="med" len="med"/>
-                      <a:tailEnd type="none" w="med" len="med"/>
-                    </a:lnL>
-                    <a:lnR w="6350" cap="flat" cmpd="sng" algn="ctr">
-                      <a:solidFill>
-                        <a:srgbClr val="E6E9EC"/>
-                      </a:solidFill>
-                      <a:prstDash val="solid"/>
-                      <a:round/>
-                      <a:headEnd type="none" w="med" len="med"/>
-                      <a:tailEnd type="none" w="med" len="med"/>
-                    </a:lnR>
-                    <a:lnT w="6350" cap="flat" cmpd="sng" algn="ctr">
-                      <a:solidFill>
-                        <a:srgbClr val="E6E9EC"/>
-                      </a:solidFill>
-                      <a:prstDash val="solid"/>
-                      <a:round/>
-                      <a:headEnd type="none" w="med" len="med"/>
-                      <a:tailEnd type="none" w="med" len="med"/>
-                    </a:lnT>
-                    <a:lnB w="6350" cap="flat" cmpd="sng" algn="ctr">
-                      <a:solidFill>
-                        <a:srgbClr val="E6E9EC"/>
-                      </a:solidFill>
-                      <a:prstDash val="solid"/>
-                      <a:round/>
-                      <a:headEnd type="none" w="med" len="med"/>
-                      <a:tailEnd type="none" w="med" len="med"/>
-                    </a:lnB>
-                    <a:solidFill>
-                      <a:srgbClr val="F7F8FA"/>
-                    </a:solidFill>
-                  </a:tcPr>
-                </a:tc>
-              </a:tr>
-              <a:tr h="237744">
-                <a:tc>
-                  <a:txBody>
-                    <a:bodyPr/>
-                    <a:lstStyle/>
-                    <a:p>
-                      <a:pPr indent="0" marL="0">
-                        <a:buNone/>
-                      </a:pPr>
-                      <a:r>
-                        <a:rPr lang="en-US" sz="700" dirty="0">
-                          <a:solidFill>
-                            <a:srgbClr val="1E2B37"/>
-                          </a:solidFill>
-                          <a:latin typeface="Courier New" pitchFamily="34" charset="0"/>
-                          <a:ea typeface="Courier New" pitchFamily="34" charset="-122"/>
-                          <a:cs typeface="Courier New" pitchFamily="34" charset="-120"/>
-                        </a:rPr>
-                        <a:t>judge_novel</a:t>
-                      </a:r>
-                      <a:endParaRPr lang="en-US" sz="700" dirty="0">
-                        <a:latin typeface="Courier New" charset="0"/>
-                        <a:ea typeface="Courier New" charset="0"/>
-                        <a:cs typeface="Courier New" charset="0"/>
-                      </a:endParaRPr>
-                    </a:p>
-                  </a:txBody>
-                  <a:tcPr marL="45720" marR="45720" marT="45720" marB="45720" anchor="ctr">
-                    <a:lnL w="6350" cap="flat" cmpd="sng" algn="ctr">
-                      <a:solidFill>
-                        <a:srgbClr val="E6E9EC"/>
-                      </a:solidFill>
-                      <a:prstDash val="solid"/>
-                      <a:round/>
-                      <a:headEnd type="none" w="med" len="med"/>
-                      <a:tailEnd type="none" w="med" len="med"/>
-                    </a:lnL>
-                    <a:lnR w="6350" cap="flat" cmpd="sng" algn="ctr">
-                      <a:solidFill>
-                        <a:srgbClr val="E6E9EC"/>
-                      </a:solidFill>
-                      <a:prstDash val="solid"/>
-                      <a:round/>
-                      <a:headEnd type="none" w="med" len="med"/>
-                      <a:tailEnd type="none" w="med" len="med"/>
-                    </a:lnR>
-                    <a:lnT w="6350" cap="flat" cmpd="sng" algn="ctr">
-                      <a:solidFill>
-                        <a:srgbClr val="E6E9EC"/>
-                      </a:solidFill>
-                      <a:prstDash val="solid"/>
-                      <a:round/>
-                      <a:headEnd type="none" w="med" len="med"/>
-                      <a:tailEnd type="none" w="med" len="med"/>
-                    </a:lnT>
-                    <a:lnB w="6350" cap="flat" cmpd="sng" algn="ctr">
-                      <a:solidFill>
-                        <a:srgbClr val="E6E9EC"/>
-                      </a:solidFill>
-                      <a:prstDash val="solid"/>
-                      <a:round/>
-                      <a:headEnd type="none" w="med" len="med"/>
-                      <a:tailEnd type="none" w="med" len="med"/>
-                    </a:lnB>
-                    <a:solidFill>
-                      <a:srgbClr val="FFFFFF"/>
-                    </a:solidFill>
-                  </a:tcPr>
-                </a:tc>
-                <a:tc>
-                  <a:txBody>
-                    <a:bodyPr/>
-                    <a:lstStyle/>
-                    <a:p>
-                      <a:pPr algn="ctr" indent="0" marL="0">
-                        <a:buNone/>
-                      </a:pPr>
-                      <a:r>
-                        <a:rPr lang="en-US" sz="750" b="1" dirty="0">
-                          <a:solidFill>
-                            <a:srgbClr val="16794A"/>
-                          </a:solidFill>
-                          <a:latin typeface="Arial" pitchFamily="34" charset="0"/>
-                          <a:ea typeface="Arial" pitchFamily="34" charset="-122"/>
-                          <a:cs typeface="Arial" pitchFamily="34" charset="-120"/>
-                        </a:rPr>
-                        <a:t>✓</a:t>
-                      </a:r>
-                      <a:endParaRPr lang="en-US" sz="750" dirty="0">
-                        <a:latin typeface="Arial" charset="0"/>
-                        <a:ea typeface="Arial" charset="0"/>
-                        <a:cs typeface="Arial" charset="0"/>
-                      </a:endParaRPr>
-                    </a:p>
-                  </a:txBody>
-                  <a:tcPr marL="45720" marR="45720" marT="45720" marB="45720" anchor="ctr">
-                    <a:lnL w="6350" cap="flat" cmpd="sng" algn="ctr">
-                      <a:solidFill>
-                        <a:srgbClr val="E6E9EC"/>
-                      </a:solidFill>
-                      <a:prstDash val="solid"/>
-                      <a:round/>
-                      <a:headEnd type="none" w="med" len="med"/>
-                      <a:tailEnd type="none" w="med" len="med"/>
-                    </a:lnL>
-                    <a:lnR w="6350" cap="flat" cmpd="sng" algn="ctr">
-                      <a:solidFill>
-                        <a:srgbClr val="E6E9EC"/>
-                      </a:solidFill>
-                      <a:prstDash val="solid"/>
-                      <a:round/>
-                      <a:headEnd type="none" w="med" len="med"/>
-                      <a:tailEnd type="none" w="med" len="med"/>
-                    </a:lnR>
-                    <a:lnT w="6350" cap="flat" cmpd="sng" algn="ctr">
-                      <a:solidFill>
-                        <a:srgbClr val="E6E9EC"/>
-                      </a:solidFill>
-                      <a:prstDash val="solid"/>
-                      <a:round/>
-                      <a:headEnd type="none" w="med" len="med"/>
-                      <a:tailEnd type="none" w="med" len="med"/>
-                    </a:lnT>
-                    <a:lnB w="6350" cap="flat" cmpd="sng" algn="ctr">
-                      <a:solidFill>
-                        <a:srgbClr val="E6E9EC"/>
-                      </a:solidFill>
-                      <a:prstDash val="solid"/>
-                      <a:round/>
-                      <a:headEnd type="none" w="med" len="med"/>
-                      <a:tailEnd type="none" w="med" len="med"/>
-                    </a:lnB>
-                    <a:solidFill>
-                      <a:srgbClr val="FFFFFF"/>
-                    </a:solidFill>
-                  </a:tcPr>
-                </a:tc>
-                <a:tc>
-                  <a:txBody>
-                    <a:bodyPr/>
-                    <a:lstStyle/>
-                    <a:p>
-                      <a:pPr algn="ctr" indent="0" marL="0">
-                        <a:buNone/>
-                      </a:pPr>
-                      <a:r>
-                        <a:rPr lang="en-US" sz="750" b="1" dirty="0">
-                          <a:solidFill>
-                            <a:srgbClr val="16794A"/>
-                          </a:solidFill>
-                          <a:latin typeface="Arial" pitchFamily="34" charset="0"/>
-                          <a:ea typeface="Arial" pitchFamily="34" charset="-122"/>
-                          <a:cs typeface="Arial" pitchFamily="34" charset="-120"/>
-                        </a:rPr>
-                        <a:t>✓</a:t>
-                      </a:r>
-                      <a:endParaRPr lang="en-US" sz="750" dirty="0">
-                        <a:latin typeface="Arial" charset="0"/>
-                        <a:ea typeface="Arial" charset="0"/>
-                        <a:cs typeface="Arial" charset="0"/>
-                      </a:endParaRPr>
-                    </a:p>
-                  </a:txBody>
-                  <a:tcPr marL="45720" marR="45720" marT="45720" marB="45720" anchor="ctr">
-                    <a:lnL w="6350" cap="flat" cmpd="sng" algn="ctr">
-                      <a:solidFill>
-                        <a:srgbClr val="E6E9EC"/>
-                      </a:solidFill>
-                      <a:prstDash val="solid"/>
-                      <a:round/>
-                      <a:headEnd type="none" w="med" len="med"/>
-                      <a:tailEnd type="none" w="med" len="med"/>
-                    </a:lnL>
-                    <a:lnR w="6350" cap="flat" cmpd="sng" algn="ctr">
-                      <a:solidFill>
-                        <a:srgbClr val="E6E9EC"/>
-                      </a:solidFill>
-                      <a:prstDash val="solid"/>
-                      <a:round/>
-                      <a:headEnd type="none" w="med" len="med"/>
-                      <a:tailEnd type="none" w="med" len="med"/>
-                    </a:lnR>
-                    <a:lnT w="6350" cap="flat" cmpd="sng" algn="ctr">
-                      <a:solidFill>
-                        <a:srgbClr val="E6E9EC"/>
-                      </a:solidFill>
-                      <a:prstDash val="solid"/>
-                      <a:round/>
-                      <a:headEnd type="none" w="med" len="med"/>
-                      <a:tailEnd type="none" w="med" len="med"/>
-                    </a:lnT>
-                    <a:lnB w="6350" cap="flat" cmpd="sng" algn="ctr">
-                      <a:solidFill>
-                        <a:srgbClr val="E6E9EC"/>
-                      </a:solidFill>
-                      <a:prstDash val="solid"/>
-                      <a:round/>
-                      <a:headEnd type="none" w="med" len="med"/>
-                      <a:tailEnd type="none" w="med" len="med"/>
-                    </a:lnB>
-                    <a:solidFill>
-                      <a:srgbClr val="FFFFFF"/>
-                    </a:solidFill>
-                  </a:tcPr>
-                </a:tc>
-                <a:tc>
-                  <a:txBody>
-                    <a:bodyPr/>
-                    <a:lstStyle/>
-                    <a:p>
-                      <a:pPr algn="ctr" indent="0" marL="0">
-                        <a:buNone/>
-                      </a:pPr>
-                      <a:r>
-                        <a:rPr lang="en-US" sz="750" dirty="0">
-                          <a:solidFill>
-                            <a:srgbClr val="5E6A77"/>
-                          </a:solidFill>
-                          <a:latin typeface="Arial" pitchFamily="34" charset="0"/>
-                          <a:ea typeface="Arial" pitchFamily="34" charset="-122"/>
-                          <a:cs typeface="Arial" pitchFamily="34" charset="-120"/>
-                        </a:rPr>
-                        <a:t>—</a:t>
-                      </a:r>
-                      <a:endParaRPr lang="en-US" sz="750" dirty="0">
-                        <a:latin typeface="Arial" charset="0"/>
-                        <a:ea typeface="Arial" charset="0"/>
-                        <a:cs typeface="Arial" charset="0"/>
-                      </a:endParaRPr>
-                    </a:p>
-                  </a:txBody>
-                  <a:tcPr marL="45720" marR="45720" marT="45720" marB="45720" anchor="ctr">
-                    <a:lnL w="6350" cap="flat" cmpd="sng" algn="ctr">
-                      <a:solidFill>
-                        <a:srgbClr val="E6E9EC"/>
-                      </a:solidFill>
-                      <a:prstDash val="solid"/>
-                      <a:round/>
-                      <a:headEnd type="none" w="med" len="med"/>
-                      <a:tailEnd type="none" w="med" len="med"/>
-                    </a:lnL>
-                    <a:lnR w="6350" cap="flat" cmpd="sng" algn="ctr">
-                      <a:solidFill>
-                        <a:srgbClr val="E6E9EC"/>
-                      </a:solidFill>
-                      <a:prstDash val="solid"/>
-                      <a:round/>
-                      <a:headEnd type="none" w="med" len="med"/>
-                      <a:tailEnd type="none" w="med" len="med"/>
-                    </a:lnR>
-                    <a:lnT w="6350" cap="flat" cmpd="sng" algn="ctr">
-                      <a:solidFill>
-                        <a:srgbClr val="E6E9EC"/>
-                      </a:solidFill>
-                      <a:prstDash val="solid"/>
-                      <a:round/>
-                      <a:headEnd type="none" w="med" len="med"/>
-                      <a:tailEnd type="none" w="med" len="med"/>
-                    </a:lnT>
-                    <a:lnB w="6350" cap="flat" cmpd="sng" algn="ctr">
-                      <a:solidFill>
-                        <a:srgbClr val="E6E9EC"/>
-                      </a:solidFill>
-                      <a:prstDash val="solid"/>
-                      <a:round/>
-                      <a:headEnd type="none" w="med" len="med"/>
-                      <a:tailEnd type="none" w="med" len="med"/>
-                    </a:lnB>
-                    <a:solidFill>
-                      <a:srgbClr val="FFFFFF"/>
-                    </a:solidFill>
-                  </a:tcPr>
-                </a:tc>
-                <a:tc>
-                  <a:txBody>
-                    <a:bodyPr/>
-                    <a:lstStyle/>
-                    <a:p>
-                      <a:pPr algn="ctr" indent="0" marL="0">
-                        <a:buNone/>
-                      </a:pPr>
-                      <a:r>
-                        <a:rPr lang="en-US" sz="750" b="1" dirty="0">
-                          <a:solidFill>
-                            <a:srgbClr val="16794A"/>
-                          </a:solidFill>
-                          <a:latin typeface="Arial" pitchFamily="34" charset="0"/>
-                          <a:ea typeface="Arial" pitchFamily="34" charset="-122"/>
-                          <a:cs typeface="Arial" pitchFamily="34" charset="-120"/>
-                        </a:rPr>
-                        <a:t>✓</a:t>
-                      </a:r>
-                      <a:endParaRPr lang="en-US" sz="750" dirty="0">
-                        <a:latin typeface="Arial" charset="0"/>
-                        <a:ea typeface="Arial" charset="0"/>
-                        <a:cs typeface="Arial" charset="0"/>
-                      </a:endParaRPr>
-                    </a:p>
-                  </a:txBody>
-                  <a:tcPr marL="45720" marR="45720" marT="45720" marB="45720" anchor="ctr">
-                    <a:lnL w="6350" cap="flat" cmpd="sng" algn="ctr">
-                      <a:solidFill>
-                        <a:srgbClr val="E6E9EC"/>
-                      </a:solidFill>
-                      <a:prstDash val="solid"/>
-                      <a:round/>
-                      <a:headEnd type="none" w="med" len="med"/>
-                      <a:tailEnd type="none" w="med" len="med"/>
-                    </a:lnL>
-                    <a:lnR w="6350" cap="flat" cmpd="sng" algn="ctr">
-                      <a:solidFill>
-                        <a:srgbClr val="E6E9EC"/>
-                      </a:solidFill>
-                      <a:prstDash val="solid"/>
-                      <a:round/>
-                      <a:headEnd type="none" w="med" len="med"/>
-                      <a:tailEnd type="none" w="med" len="med"/>
-                    </a:lnR>
-                    <a:lnT w="6350" cap="flat" cmpd="sng" algn="ctr">
-                      <a:solidFill>
-                        <a:srgbClr val="E6E9EC"/>
-                      </a:solidFill>
-                      <a:prstDash val="solid"/>
-                      <a:round/>
-                      <a:headEnd type="none" w="med" len="med"/>
-                      <a:tailEnd type="none" w="med" len="med"/>
-                    </a:lnT>
-                    <a:lnB w="6350" cap="flat" cmpd="sng" algn="ctr">
-                      <a:solidFill>
-                        <a:srgbClr val="E6E9EC"/>
-                      </a:solidFill>
-                      <a:prstDash val="solid"/>
-                      <a:round/>
-                      <a:headEnd type="none" w="med" len="med"/>
-                      <a:tailEnd type="none" w="med" len="med"/>
-                    </a:lnB>
-                    <a:solidFill>
-                      <a:srgbClr val="FFFFFF"/>
-                    </a:solidFill>
-                  </a:tcPr>
-                </a:tc>
-                <a:tc>
-                  <a:txBody>
-                    <a:bodyPr/>
-                    <a:lstStyle/>
-                    <a:p>
-                      <a:pPr algn="ctr" indent="0" marL="0">
-                        <a:buNone/>
-                      </a:pPr>
-                      <a:r>
-                        <a:rPr lang="en-US" sz="750" b="1" dirty="0">
-                          <a:solidFill>
-                            <a:srgbClr val="16794A"/>
-                          </a:solidFill>
-                          <a:latin typeface="Arial" pitchFamily="34" charset="0"/>
-                          <a:ea typeface="Arial" pitchFamily="34" charset="-122"/>
-                          <a:cs typeface="Arial" pitchFamily="34" charset="-120"/>
-                        </a:rPr>
-                        <a:t>✓</a:t>
-                      </a:r>
-                      <a:endParaRPr lang="en-US" sz="750" dirty="0">
-                        <a:latin typeface="Arial" charset="0"/>
-                        <a:ea typeface="Arial" charset="0"/>
-                        <a:cs typeface="Arial" charset="0"/>
-                      </a:endParaRPr>
-                    </a:p>
-                  </a:txBody>
-                  <a:tcPr marL="45720" marR="45720" marT="45720" marB="45720" anchor="ctr">
-                    <a:lnL w="6350" cap="flat" cmpd="sng" algn="ctr">
-                      <a:solidFill>
-                        <a:srgbClr val="E6E9EC"/>
-                      </a:solidFill>
-                      <a:prstDash val="solid"/>
-                      <a:round/>
-                      <a:headEnd type="none" w="med" len="med"/>
-                      <a:tailEnd type="none" w="med" len="med"/>
-                    </a:lnL>
-                    <a:lnR w="6350" cap="flat" cmpd="sng" algn="ctr">
-                      <a:solidFill>
-                        <a:srgbClr val="E6E9EC"/>
-                      </a:solidFill>
-                      <a:prstDash val="solid"/>
-                      <a:round/>
-                      <a:headEnd type="none" w="med" len="med"/>
-                      <a:tailEnd type="none" w="med" len="med"/>
-                    </a:lnR>
-                    <a:lnT w="6350" cap="flat" cmpd="sng" algn="ctr">
-                      <a:solidFill>
-                        <a:srgbClr val="E6E9EC"/>
-                      </a:solidFill>
-                      <a:prstDash val="solid"/>
-                      <a:round/>
-                      <a:headEnd type="none" w="med" len="med"/>
-                      <a:tailEnd type="none" w="med" len="med"/>
-                    </a:lnT>
-                    <a:lnB w="6350" cap="flat" cmpd="sng" algn="ctr">
-                      <a:solidFill>
-                        <a:srgbClr val="E6E9EC"/>
-                      </a:solidFill>
-                      <a:prstDash val="solid"/>
-                      <a:round/>
-                      <a:headEnd type="none" w="med" len="med"/>
-                      <a:tailEnd type="none" w="med" len="med"/>
-                    </a:lnB>
-                    <a:solidFill>
-                      <a:srgbClr val="FFFFFF"/>
-                    </a:solidFill>
-                  </a:tcPr>
-                </a:tc>
-                <a:tc>
-                  <a:txBody>
-                    <a:bodyPr/>
-                    <a:lstStyle/>
-                    <a:p>
-                      <a:pPr algn="ctr" indent="0" marL="0">
-                        <a:buNone/>
-                      </a:pPr>
-                      <a:r>
-                        <a:rPr lang="en-US" sz="750" b="1" dirty="0">
-                          <a:solidFill>
-                            <a:srgbClr val="B83232"/>
-                          </a:solidFill>
-                          <a:latin typeface="Arial" pitchFamily="34" charset="0"/>
-                          <a:ea typeface="Arial" pitchFamily="34" charset="-122"/>
-                          <a:cs typeface="Arial" pitchFamily="34" charset="-120"/>
-                        </a:rPr>
-                        <a:t>✗</a:t>
-                      </a:r>
-                      <a:endParaRPr lang="en-US" sz="750" dirty="0">
-                        <a:latin typeface="Arial" charset="0"/>
-                        <a:ea typeface="Arial" charset="0"/>
-                        <a:cs typeface="Arial" charset="0"/>
-                      </a:endParaRPr>
-                    </a:p>
-                  </a:txBody>
-                  <a:tcPr marL="45720" marR="45720" marT="45720" marB="45720" anchor="ctr">
-                    <a:lnL w="6350" cap="flat" cmpd="sng" algn="ctr">
-                      <a:solidFill>
-                        <a:srgbClr val="E6E9EC"/>
-                      </a:solidFill>
-                      <a:prstDash val="solid"/>
-                      <a:round/>
-                      <a:headEnd type="none" w="med" len="med"/>
-                      <a:tailEnd type="none" w="med" len="med"/>
-                    </a:lnL>
-                    <a:lnR w="6350" cap="flat" cmpd="sng" algn="ctr">
-                      <a:solidFill>
-                        <a:srgbClr val="E6E9EC"/>
-                      </a:solidFill>
-                      <a:prstDash val="solid"/>
-                      <a:round/>
-                      <a:headEnd type="none" w="med" len="med"/>
-                      <a:tailEnd type="none" w="med" len="med"/>
-                    </a:lnR>
-                    <a:lnT w="6350" cap="flat" cmpd="sng" algn="ctr">
-                      <a:solidFill>
-                        <a:srgbClr val="E6E9EC"/>
-                      </a:solidFill>
-                      <a:prstDash val="solid"/>
-                      <a:round/>
-                      <a:headEnd type="none" w="med" len="med"/>
-                      <a:tailEnd type="none" w="med" len="med"/>
-                    </a:lnT>
-                    <a:lnB w="6350" cap="flat" cmpd="sng" algn="ctr">
-                      <a:solidFill>
-                        <a:srgbClr val="E6E9EC"/>
-                      </a:solidFill>
-                      <a:prstDash val="solid"/>
-                      <a:round/>
-                      <a:headEnd type="none" w="med" len="med"/>
-                      <a:tailEnd type="none" w="med" len="med"/>
-                    </a:lnB>
-                    <a:solidFill>
-                      <a:srgbClr val="FFFFFF"/>
-                    </a:solidFill>
-                  </a:tcPr>
-                </a:tc>
-                <a:tc>
-                  <a:txBody>
-                    <a:bodyPr/>
-                    <a:lstStyle/>
-                    <a:p>
-                      <a:pPr algn="ctr" indent="0" marL="0">
-                        <a:buNone/>
-                      </a:pPr>
-                      <a:r>
-                        <a:rPr lang="en-US" sz="750" dirty="0">
-                          <a:solidFill>
-                            <a:srgbClr val="5E6A77"/>
-                          </a:solidFill>
-                          <a:latin typeface="Arial" pitchFamily="34" charset="0"/>
-                          <a:ea typeface="Arial" pitchFamily="34" charset="-122"/>
-                          <a:cs typeface="Arial" pitchFamily="34" charset="-120"/>
-                        </a:rPr>
-                        <a:t>—</a:t>
-                      </a:r>
-                      <a:endParaRPr lang="en-US" sz="750" dirty="0">
-                        <a:latin typeface="Arial" charset="0"/>
-                        <a:ea typeface="Arial" charset="0"/>
-                        <a:cs typeface="Arial" charset="0"/>
-                      </a:endParaRPr>
-                    </a:p>
-                  </a:txBody>
-                  <a:tcPr marL="45720" marR="45720" marT="45720" marB="45720" anchor="ctr">
-                    <a:lnL w="6350" cap="flat" cmpd="sng" algn="ctr">
-                      <a:solidFill>
-                        <a:srgbClr val="E6E9EC"/>
-                      </a:solidFill>
-                      <a:prstDash val="solid"/>
-                      <a:round/>
-                      <a:headEnd type="none" w="med" len="med"/>
-                      <a:tailEnd type="none" w="med" len="med"/>
-                    </a:lnL>
-                    <a:lnR w="6350" cap="flat" cmpd="sng" algn="ctr">
-                      <a:solidFill>
-                        <a:srgbClr val="E6E9EC"/>
-                      </a:solidFill>
-                      <a:prstDash val="solid"/>
-                      <a:round/>
-                      <a:headEnd type="none" w="med" len="med"/>
-                      <a:tailEnd type="none" w="med" len="med"/>
-                    </a:lnR>
-                    <a:lnT w="6350" cap="flat" cmpd="sng" algn="ctr">
-                      <a:solidFill>
-                        <a:srgbClr val="E6E9EC"/>
-                      </a:solidFill>
-                      <a:prstDash val="solid"/>
-                      <a:round/>
-                      <a:headEnd type="none" w="med" len="med"/>
-                      <a:tailEnd type="none" w="med" len="med"/>
-                    </a:lnT>
-                    <a:lnB w="6350" cap="flat" cmpd="sng" algn="ctr">
-                      <a:solidFill>
-                        <a:srgbClr val="E6E9EC"/>
-                      </a:solidFill>
-                      <a:prstDash val="solid"/>
-                      <a:round/>
-                      <a:headEnd type="none" w="med" len="med"/>
-                      <a:tailEnd type="none" w="med" len="med"/>
-                    </a:lnB>
-                    <a:solidFill>
-                      <a:srgbClr val="FFFFFF"/>
-                    </a:solidFill>
-                  </a:tcPr>
-                </a:tc>
-              </a:tr>
-              <a:tr h="237744">
-                <a:tc>
-                  <a:txBody>
-                    <a:bodyPr/>
-                    <a:lstStyle/>
-                    <a:p>
-                      <a:pPr indent="0" marL="0">
-                        <a:buNone/>
-                      </a:pPr>
-                      <a:r>
-                        <a:rPr lang="en-US" sz="700" dirty="0">
-                          <a:solidFill>
-                            <a:srgbClr val="1E2B37"/>
-                          </a:solidFill>
-                          <a:latin typeface="Courier New" pitchFamily="34" charset="0"/>
-                          <a:ea typeface="Courier New" pitchFamily="34" charset="-122"/>
-                          <a:cs typeface="Courier New" pitchFamily="34" charset="-120"/>
-                        </a:rPr>
-                        <a:t>lean_chronology</a:t>
-                      </a:r>
-                      <a:endParaRPr lang="en-US" sz="700" dirty="0">
-                        <a:latin typeface="Courier New" charset="0"/>
-                        <a:ea typeface="Courier New" charset="0"/>
-                        <a:cs typeface="Courier New" charset="0"/>
-                      </a:endParaRPr>
-                    </a:p>
-                  </a:txBody>
-                  <a:tcPr marL="45720" marR="45720" marT="45720" marB="45720" anchor="ctr">
-                    <a:lnL w="6350" cap="flat" cmpd="sng" algn="ctr">
-                      <a:solidFill>
-                        <a:srgbClr val="E6E9EC"/>
-                      </a:solidFill>
-                      <a:prstDash val="solid"/>
-                      <a:round/>
-                      <a:headEnd type="none" w="med" len="med"/>
-                      <a:tailEnd type="none" w="med" len="med"/>
-                    </a:lnL>
-                    <a:lnR w="6350" cap="flat" cmpd="sng" algn="ctr">
-                      <a:solidFill>
-                        <a:srgbClr val="E6E9EC"/>
-                      </a:solidFill>
-                      <a:prstDash val="solid"/>
-                      <a:round/>
-                      <a:headEnd type="none" w="med" len="med"/>
-                      <a:tailEnd type="none" w="med" len="med"/>
-                    </a:lnR>
-                    <a:lnT w="6350" cap="flat" cmpd="sng" algn="ctr">
-                      <a:solidFill>
-                        <a:srgbClr val="E6E9EC"/>
-                      </a:solidFill>
-                      <a:prstDash val="solid"/>
-                      <a:round/>
-                      <a:headEnd type="none" w="med" len="med"/>
-                      <a:tailEnd type="none" w="med" len="med"/>
-                    </a:lnT>
-                    <a:lnB w="6350" cap="flat" cmpd="sng" algn="ctr">
-                      <a:solidFill>
-                        <a:srgbClr val="E6E9EC"/>
-                      </a:solidFill>
-                      <a:prstDash val="solid"/>
-                      <a:round/>
-                      <a:headEnd type="none" w="med" len="med"/>
-                      <a:tailEnd type="none" w="med" len="med"/>
-                    </a:lnB>
-                    <a:solidFill>
-                      <a:srgbClr val="F7F8FA"/>
-                    </a:solidFill>
-                  </a:tcPr>
-                </a:tc>
-                <a:tc>
-                  <a:txBody>
-                    <a:bodyPr/>
-                    <a:lstStyle/>
-                    <a:p>
-                      <a:pPr algn="ctr" indent="0" marL="0">
-                        <a:buNone/>
-                      </a:pPr>
-                      <a:r>
-                        <a:rPr lang="en-US" sz="750" b="1" dirty="0">
-                          <a:solidFill>
-                            <a:srgbClr val="16794A"/>
-                          </a:solidFill>
-                          <a:latin typeface="Arial" pitchFamily="34" charset="0"/>
-                          <a:ea typeface="Arial" pitchFamily="34" charset="-122"/>
-                          <a:cs typeface="Arial" pitchFamily="34" charset="-120"/>
-                        </a:rPr>
-                        <a:t>✓</a:t>
-                      </a:r>
-                      <a:endParaRPr lang="en-US" sz="750" dirty="0">
-                        <a:latin typeface="Arial" charset="0"/>
-                        <a:ea typeface="Arial" charset="0"/>
-                        <a:cs typeface="Arial" charset="0"/>
-                      </a:endParaRPr>
-                    </a:p>
-                  </a:txBody>
-                  <a:tcPr marL="45720" marR="45720" marT="45720" marB="45720" anchor="ctr">
-                    <a:lnL w="6350" cap="flat" cmpd="sng" algn="ctr">
-                      <a:solidFill>
-                        <a:srgbClr val="E6E9EC"/>
-                      </a:solidFill>
-                      <a:prstDash val="solid"/>
-                      <a:round/>
-                      <a:headEnd type="none" w="med" len="med"/>
-                      <a:tailEnd type="none" w="med" len="med"/>
-                    </a:lnL>
-                    <a:lnR w="6350" cap="flat" cmpd="sng" algn="ctr">
-                      <a:solidFill>
-                        <a:srgbClr val="E6E9EC"/>
-                      </a:solidFill>
-                      <a:prstDash val="solid"/>
-                      <a:round/>
-                      <a:headEnd type="none" w="med" len="med"/>
-                      <a:tailEnd type="none" w="med" len="med"/>
-                    </a:lnR>
-                    <a:lnT w="6350" cap="flat" cmpd="sng" algn="ctr">
-                      <a:solidFill>
-                        <a:srgbClr val="E6E9EC"/>
-                      </a:solidFill>
-                      <a:prstDash val="solid"/>
-                      <a:round/>
-                      <a:headEnd type="none" w="med" len="med"/>
-                      <a:tailEnd type="none" w="med" len="med"/>
-                    </a:lnT>
-                    <a:lnB w="6350" cap="flat" cmpd="sng" algn="ctr">
-                      <a:solidFill>
-                        <a:srgbClr val="E6E9EC"/>
-                      </a:solidFill>
-                      <a:prstDash val="solid"/>
-                      <a:round/>
-                      <a:headEnd type="none" w="med" len="med"/>
-                      <a:tailEnd type="none" w="med" len="med"/>
-                    </a:lnB>
-                    <a:solidFill>
-                      <a:srgbClr val="F7F8FA"/>
-                    </a:solidFill>
-                  </a:tcPr>
-                </a:tc>
-                <a:tc>
-                  <a:txBody>
-                    <a:bodyPr/>
-                    <a:lstStyle/>
-                    <a:p>
-                      <a:pPr algn="ctr" indent="0" marL="0">
-                        <a:buNone/>
-                      </a:pPr>
-                      <a:r>
-                        <a:rPr lang="en-US" sz="750" b="1" dirty="0">
-                          <a:solidFill>
-                            <a:srgbClr val="16794A"/>
-                          </a:solidFill>
-                          <a:latin typeface="Arial" pitchFamily="34" charset="0"/>
-                          <a:ea typeface="Arial" pitchFamily="34" charset="-122"/>
-                          <a:cs typeface="Arial" pitchFamily="34" charset="-120"/>
-                        </a:rPr>
-                        <a:t>✓</a:t>
-                      </a:r>
-                      <a:endParaRPr lang="en-US" sz="750" dirty="0">
-                        <a:latin typeface="Arial" charset="0"/>
-                        <a:ea typeface="Arial" charset="0"/>
-                        <a:cs typeface="Arial" charset="0"/>
-                      </a:endParaRPr>
-                    </a:p>
-                  </a:txBody>
-                  <a:tcPr marL="45720" marR="45720" marT="45720" marB="45720" anchor="ctr">
-                    <a:lnL w="6350" cap="flat" cmpd="sng" algn="ctr">
-                      <a:solidFill>
-                        <a:srgbClr val="E6E9EC"/>
-                      </a:solidFill>
-                      <a:prstDash val="solid"/>
-                      <a:round/>
-                      <a:headEnd type="none" w="med" len="med"/>
-                      <a:tailEnd type="none" w="med" len="med"/>
-                    </a:lnL>
-                    <a:lnR w="6350" cap="flat" cmpd="sng" algn="ctr">
-                      <a:solidFill>
-                        <a:srgbClr val="E6E9EC"/>
-                      </a:solidFill>
-                      <a:prstDash val="solid"/>
-                      <a:round/>
-                      <a:headEnd type="none" w="med" len="med"/>
-                      <a:tailEnd type="none" w="med" len="med"/>
-                    </a:lnR>
-                    <a:lnT w="6350" cap="flat" cmpd="sng" algn="ctr">
-                      <a:solidFill>
-                        <a:srgbClr val="E6E9EC"/>
-                      </a:solidFill>
-                      <a:prstDash val="solid"/>
-                      <a:round/>
-                      <a:headEnd type="none" w="med" len="med"/>
-                      <a:tailEnd type="none" w="med" len="med"/>
-                    </a:lnT>
-                    <a:lnB w="6350" cap="flat" cmpd="sng" algn="ctr">
-                      <a:solidFill>
-                        <a:srgbClr val="E6E9EC"/>
-                      </a:solidFill>
-                      <a:prstDash val="solid"/>
-                      <a:round/>
-                      <a:headEnd type="none" w="med" len="med"/>
-                      <a:tailEnd type="none" w="med" len="med"/>
-                    </a:lnB>
-                    <a:solidFill>
-                      <a:srgbClr val="F7F8FA"/>
-                    </a:solidFill>
-                  </a:tcPr>
-                </a:tc>
-                <a:tc>
-                  <a:txBody>
-                    <a:bodyPr/>
-                    <a:lstStyle/>
-                    <a:p>
-                      <a:pPr algn="ctr" indent="0" marL="0">
-                        <a:buNone/>
-                      </a:pPr>
-                      <a:r>
-                        <a:rPr lang="en-US" sz="750" dirty="0">
-                          <a:solidFill>
-                            <a:srgbClr val="5E6A77"/>
-                          </a:solidFill>
-                          <a:latin typeface="Arial" pitchFamily="34" charset="0"/>
-                          <a:ea typeface="Arial" pitchFamily="34" charset="-122"/>
-                          <a:cs typeface="Arial" pitchFamily="34" charset="-120"/>
-                        </a:rPr>
-                        <a:t>—</a:t>
-                      </a:r>
-                      <a:endParaRPr lang="en-US" sz="750" dirty="0">
-                        <a:latin typeface="Arial" charset="0"/>
-                        <a:ea typeface="Arial" charset="0"/>
-                        <a:cs typeface="Arial" charset="0"/>
-                      </a:endParaRPr>
-                    </a:p>
-                  </a:txBody>
-                  <a:tcPr marL="45720" marR="45720" marT="45720" marB="45720" anchor="ctr">
-                    <a:lnL w="6350" cap="flat" cmpd="sng" algn="ctr">
-                      <a:solidFill>
-                        <a:srgbClr val="E6E9EC"/>
-                      </a:solidFill>
-                      <a:prstDash val="solid"/>
-                      <a:round/>
-                      <a:headEnd type="none" w="med" len="med"/>
-                      <a:tailEnd type="none" w="med" len="med"/>
-                    </a:lnL>
-                    <a:lnR w="6350" cap="flat" cmpd="sng" algn="ctr">
-                      <a:solidFill>
-                        <a:srgbClr val="E6E9EC"/>
-                      </a:solidFill>
-                      <a:prstDash val="solid"/>
-                      <a:round/>
-                      <a:headEnd type="none" w="med" len="med"/>
-                      <a:tailEnd type="none" w="med" len="med"/>
-                    </a:lnR>
-                    <a:lnT w="6350" cap="flat" cmpd="sng" algn="ctr">
-                      <a:solidFill>
-                        <a:srgbClr val="E6E9EC"/>
-                      </a:solidFill>
-                      <a:prstDash val="solid"/>
-                      <a:round/>
-                      <a:headEnd type="none" w="med" len="med"/>
-                      <a:tailEnd type="none" w="med" len="med"/>
-                    </a:lnT>
-                    <a:lnB w="6350" cap="flat" cmpd="sng" algn="ctr">
-                      <a:solidFill>
-                        <a:srgbClr val="E6E9EC"/>
-                      </a:solidFill>
-                      <a:prstDash val="solid"/>
-                      <a:round/>
-                      <a:headEnd type="none" w="med" len="med"/>
-                      <a:tailEnd type="none" w="med" len="med"/>
-                    </a:lnB>
-                    <a:solidFill>
-                      <a:srgbClr val="F7F8FA"/>
-                    </a:solidFill>
-                  </a:tcPr>
-                </a:tc>
-                <a:tc>
-                  <a:txBody>
-                    <a:bodyPr/>
-                    <a:lstStyle/>
-                    <a:p>
-                      <a:pPr algn="ctr" indent="0" marL="0">
-                        <a:buNone/>
-                      </a:pPr>
-                      <a:r>
-                        <a:rPr lang="en-US" sz="750" b="1" dirty="0">
-                          <a:solidFill>
-                            <a:srgbClr val="16794A"/>
-                          </a:solidFill>
-                          <a:latin typeface="Arial" pitchFamily="34" charset="0"/>
-                          <a:ea typeface="Arial" pitchFamily="34" charset="-122"/>
-                          <a:cs typeface="Arial" pitchFamily="34" charset="-120"/>
-                        </a:rPr>
-                        <a:t>✓</a:t>
-                      </a:r>
-                      <a:endParaRPr lang="en-US" sz="750" dirty="0">
-                        <a:latin typeface="Arial" charset="0"/>
-                        <a:ea typeface="Arial" charset="0"/>
-                        <a:cs typeface="Arial" charset="0"/>
-                      </a:endParaRPr>
-                    </a:p>
-                  </a:txBody>
-                  <a:tcPr marL="45720" marR="45720" marT="45720" marB="45720" anchor="ctr">
-                    <a:lnL w="6350" cap="flat" cmpd="sng" algn="ctr">
-                      <a:solidFill>
-                        <a:srgbClr val="E6E9EC"/>
-                      </a:solidFill>
-                      <a:prstDash val="solid"/>
-                      <a:round/>
-                      <a:headEnd type="none" w="med" len="med"/>
-                      <a:tailEnd type="none" w="med" len="med"/>
-                    </a:lnL>
-                    <a:lnR w="6350" cap="flat" cmpd="sng" algn="ctr">
-                      <a:solidFill>
-                        <a:srgbClr val="E6E9EC"/>
-                      </a:solidFill>
-                      <a:prstDash val="solid"/>
-                      <a:round/>
-                      <a:headEnd type="none" w="med" len="med"/>
-                      <a:tailEnd type="none" w="med" len="med"/>
-                    </a:lnR>
-                    <a:lnT w="6350" cap="flat" cmpd="sng" algn="ctr">
-                      <a:solidFill>
-                        <a:srgbClr val="E6E9EC"/>
-                      </a:solidFill>
-                      <a:prstDash val="solid"/>
-                      <a:round/>
-                      <a:headEnd type="none" w="med" len="med"/>
-                      <a:tailEnd type="none" w="med" len="med"/>
-                    </a:lnT>
-                    <a:lnB w="6350" cap="flat" cmpd="sng" algn="ctr">
-                      <a:solidFill>
-                        <a:srgbClr val="E6E9EC"/>
-                      </a:solidFill>
-                      <a:prstDash val="solid"/>
-                      <a:round/>
-                      <a:headEnd type="none" w="med" len="med"/>
-                      <a:tailEnd type="none" w="med" len="med"/>
-                    </a:lnB>
-                    <a:solidFill>
-                      <a:srgbClr val="F7F8FA"/>
-                    </a:solidFill>
-                  </a:tcPr>
-                </a:tc>
-                <a:tc>
-                  <a:txBody>
-                    <a:bodyPr/>
-                    <a:lstStyle/>
-                    <a:p>
-                      <a:pPr algn="ctr" indent="0" marL="0">
-                        <a:buNone/>
-                      </a:pPr>
-                      <a:r>
-                        <a:rPr lang="en-US" sz="750" b="1" dirty="0">
-                          <a:solidFill>
-                            <a:srgbClr val="16794A"/>
-                          </a:solidFill>
-                          <a:latin typeface="Arial" pitchFamily="34" charset="0"/>
-                          <a:ea typeface="Arial" pitchFamily="34" charset="-122"/>
-                          <a:cs typeface="Arial" pitchFamily="34" charset="-120"/>
-                        </a:rPr>
-                        <a:t>✓</a:t>
-                      </a:r>
-                      <a:endParaRPr lang="en-US" sz="750" dirty="0">
-                        <a:latin typeface="Arial" charset="0"/>
-                        <a:ea typeface="Arial" charset="0"/>
-                        <a:cs typeface="Arial" charset="0"/>
-                      </a:endParaRPr>
-                    </a:p>
-                  </a:txBody>
-                  <a:tcPr marL="45720" marR="45720" marT="45720" marB="45720" anchor="ctr">
-                    <a:lnL w="6350" cap="flat" cmpd="sng" algn="ctr">
-                      <a:solidFill>
-                        <a:srgbClr val="E6E9EC"/>
-                      </a:solidFill>
-                      <a:prstDash val="solid"/>
-                      <a:round/>
-                      <a:headEnd type="none" w="med" len="med"/>
-                      <a:tailEnd type="none" w="med" len="med"/>
-                    </a:lnL>
-                    <a:lnR w="6350" cap="flat" cmpd="sng" algn="ctr">
-                      <a:solidFill>
-                        <a:srgbClr val="E6E9EC"/>
-                      </a:solidFill>
-                      <a:prstDash val="solid"/>
-                      <a:round/>
-                      <a:headEnd type="none" w="med" len="med"/>
-                      <a:tailEnd type="none" w="med" len="med"/>
-                    </a:lnR>
-                    <a:lnT w="6350" cap="flat" cmpd="sng" algn="ctr">
-                      <a:solidFill>
-                        <a:srgbClr val="E6E9EC"/>
-                      </a:solidFill>
-                      <a:prstDash val="solid"/>
-                      <a:round/>
-                      <a:headEnd type="none" w="med" len="med"/>
-                      <a:tailEnd type="none" w="med" len="med"/>
-                    </a:lnT>
-                    <a:lnB w="6350" cap="flat" cmpd="sng" algn="ctr">
-                      <a:solidFill>
-                        <a:srgbClr val="E6E9EC"/>
-                      </a:solidFill>
-                      <a:prstDash val="solid"/>
-                      <a:round/>
-                      <a:headEnd type="none" w="med" len="med"/>
-                      <a:tailEnd type="none" w="med" len="med"/>
-                    </a:lnB>
-                    <a:solidFill>
-                      <a:srgbClr val="F7F8FA"/>
-                    </a:solidFill>
-                  </a:tcPr>
-                </a:tc>
-                <a:tc>
-                  <a:txBody>
-                    <a:bodyPr/>
-                    <a:lstStyle/>
-                    <a:p>
-                      <a:pPr algn="ctr" indent="0" marL="0">
-                        <a:buNone/>
-                      </a:pPr>
-                      <a:r>
-                        <a:rPr lang="en-US" sz="750" b="1" dirty="0">
-                          <a:solidFill>
-                            <a:srgbClr val="16794A"/>
-                          </a:solidFill>
-                          <a:latin typeface="Arial" pitchFamily="34" charset="0"/>
-                          <a:ea typeface="Arial" pitchFamily="34" charset="-122"/>
-                          <a:cs typeface="Arial" pitchFamily="34" charset="-120"/>
-                        </a:rPr>
-                        <a:t>✓</a:t>
-                      </a:r>
-                      <a:endParaRPr lang="en-US" sz="750" dirty="0">
-                        <a:latin typeface="Arial" charset="0"/>
-                        <a:ea typeface="Arial" charset="0"/>
-                        <a:cs typeface="Arial" charset="0"/>
-                      </a:endParaRPr>
-                    </a:p>
-                  </a:txBody>
-                  <a:tcPr marL="45720" marR="45720" marT="45720" marB="45720" anchor="ctr">
-                    <a:lnL w="6350" cap="flat" cmpd="sng" algn="ctr">
-                      <a:solidFill>
-                        <a:srgbClr val="E6E9EC"/>
-                      </a:solidFill>
-                      <a:prstDash val="solid"/>
-                      <a:round/>
-                      <a:headEnd type="none" w="med" len="med"/>
-                      <a:tailEnd type="none" w="med" len="med"/>
-                    </a:lnL>
-                    <a:lnR w="6350" cap="flat" cmpd="sng" algn="ctr">
-                      <a:solidFill>
-                        <a:srgbClr val="E6E9EC"/>
-                      </a:solidFill>
-                      <a:prstDash val="solid"/>
-                      <a:round/>
-                      <a:headEnd type="none" w="med" len="med"/>
-                      <a:tailEnd type="none" w="med" len="med"/>
-                    </a:lnR>
-                    <a:lnT w="6350" cap="flat" cmpd="sng" algn="ctr">
-                      <a:solidFill>
-                        <a:srgbClr val="E6E9EC"/>
-                      </a:solidFill>
-                      <a:prstDash val="solid"/>
-                      <a:round/>
-                      <a:headEnd type="none" w="med" len="med"/>
-                      <a:tailEnd type="none" w="med" len="med"/>
-                    </a:lnT>
-                    <a:lnB w="6350" cap="flat" cmpd="sng" algn="ctr">
-                      <a:solidFill>
-                        <a:srgbClr val="E6E9EC"/>
-                      </a:solidFill>
-                      <a:prstDash val="solid"/>
-                      <a:round/>
-                      <a:headEnd type="none" w="med" len="med"/>
-                      <a:tailEnd type="none" w="med" len="med"/>
-                    </a:lnB>
-                    <a:solidFill>
-                      <a:srgbClr val="F7F8FA"/>
-                    </a:solidFill>
-                  </a:tcPr>
-                </a:tc>
-                <a:tc>
-                  <a:txBody>
-                    <a:bodyPr/>
-                    <a:lstStyle/>
-                    <a:p>
-                      <a:pPr algn="ctr" indent="0" marL="0">
-                        <a:buNone/>
-                      </a:pPr>
-                      <a:r>
-                        <a:rPr lang="en-US" sz="750" dirty="0">
-                          <a:solidFill>
-                            <a:srgbClr val="5E6A77"/>
-                          </a:solidFill>
-                          <a:latin typeface="Arial" pitchFamily="34" charset="0"/>
-                          <a:ea typeface="Arial" pitchFamily="34" charset="-122"/>
-                          <a:cs typeface="Arial" pitchFamily="34" charset="-120"/>
-                        </a:rPr>
-                        <a:t>—</a:t>
-                      </a:r>
-                      <a:endParaRPr lang="en-US" sz="750" dirty="0">
-                        <a:latin typeface="Arial" charset="0"/>
-                        <a:ea typeface="Arial" charset="0"/>
-                        <a:cs typeface="Arial" charset="0"/>
-                      </a:endParaRPr>
-                    </a:p>
-                  </a:txBody>
-                  <a:tcPr marL="45720" marR="45720" marT="45720" marB="45720" anchor="ctr">
-                    <a:lnL w="6350" cap="flat" cmpd="sng" algn="ctr">
-                      <a:solidFill>
-                        <a:srgbClr val="E6E9EC"/>
-                      </a:solidFill>
-                      <a:prstDash val="solid"/>
-                      <a:round/>
-                      <a:headEnd type="none" w="med" len="med"/>
-                      <a:tailEnd type="none" w="med" len="med"/>
-                    </a:lnL>
-                    <a:lnR w="6350" cap="flat" cmpd="sng" algn="ctr">
-                      <a:solidFill>
-                        <a:srgbClr val="E6E9EC"/>
-                      </a:solidFill>
-                      <a:prstDash val="solid"/>
-                      <a:round/>
-                      <a:headEnd type="none" w="med" len="med"/>
-                      <a:tailEnd type="none" w="med" len="med"/>
-                    </a:lnR>
-                    <a:lnT w="6350" cap="flat" cmpd="sng" algn="ctr">
-                      <a:solidFill>
-                        <a:srgbClr val="E6E9EC"/>
-                      </a:solidFill>
-                      <a:prstDash val="solid"/>
-                      <a:round/>
-                      <a:headEnd type="none" w="med" len="med"/>
-                      <a:tailEnd type="none" w="med" len="med"/>
-                    </a:lnT>
-                    <a:lnB w="6350" cap="flat" cmpd="sng" algn="ctr">
-                      <a:solidFill>
-                        <a:srgbClr val="E6E9EC"/>
-                      </a:solidFill>
-                      <a:prstDash val="solid"/>
-                      <a:round/>
-                      <a:headEnd type="none" w="med" len="med"/>
-                      <a:tailEnd type="none" w="med" len="med"/>
-                    </a:lnB>
-                    <a:solidFill>
-                      <a:srgbClr val="F7F8FA"/>
-                    </a:solidFill>
-                  </a:tcPr>
-                </a:tc>
-              </a:tr>
-              <a:tr h="237744">
-                <a:tc>
-                  <a:txBody>
-                    <a:bodyPr/>
-                    <a:lstStyle/>
-                    <a:p>
-                      <a:pPr indent="0" marL="0">
-                        <a:buNone/>
-                      </a:pPr>
-                      <a:r>
-                        <a:rPr lang="en-US" sz="700" dirty="0">
-                          <a:solidFill>
-                            <a:srgbClr val="1E2B37"/>
-                          </a:solidFill>
-                          <a:latin typeface="Courier New" pitchFamily="34" charset="0"/>
-                          <a:ea typeface="Courier New" pitchFamily="34" charset="-122"/>
-                          <a:cs typeface="Courier New" pitchFamily="34" charset="-120"/>
-                        </a:rPr>
-                        <a:t>visual_check</a:t>
-                      </a:r>
-                      <a:endParaRPr lang="en-US" sz="700" dirty="0">
-                        <a:latin typeface="Courier New" charset="0"/>
-                        <a:ea typeface="Courier New" charset="0"/>
-                        <a:cs typeface="Courier New" charset="0"/>
-                      </a:endParaRPr>
-                    </a:p>
-                  </a:txBody>
-                  <a:tcPr marL="45720" marR="45720" marT="45720" marB="45720" anchor="ctr">
-                    <a:lnL w="6350" cap="flat" cmpd="sng" algn="ctr">
-                      <a:solidFill>
-                        <a:srgbClr val="E6E9EC"/>
-                      </a:solidFill>
-                      <a:prstDash val="solid"/>
-                      <a:round/>
-                      <a:headEnd type="none" w="med" len="med"/>
-                      <a:tailEnd type="none" w="med" len="med"/>
-                    </a:lnL>
-                    <a:lnR w="6350" cap="flat" cmpd="sng" algn="ctr">
-                      <a:solidFill>
-                        <a:srgbClr val="E6E9EC"/>
-                      </a:solidFill>
-                      <a:prstDash val="solid"/>
-                      <a:round/>
-                      <a:headEnd type="none" w="med" len="med"/>
-                      <a:tailEnd type="none" w="med" len="med"/>
-                    </a:lnR>
-                    <a:lnT w="6350" cap="flat" cmpd="sng" algn="ctr">
-                      <a:solidFill>
-                        <a:srgbClr val="E6E9EC"/>
-                      </a:solidFill>
-                      <a:prstDash val="solid"/>
-                      <a:round/>
-                      <a:headEnd type="none" w="med" len="med"/>
-                      <a:tailEnd type="none" w="med" len="med"/>
-                    </a:lnT>
-                    <a:lnB w="6350" cap="flat" cmpd="sng" algn="ctr">
-                      <a:solidFill>
-                        <a:srgbClr val="E6E9EC"/>
-                      </a:solidFill>
-                      <a:prstDash val="solid"/>
-                      <a:round/>
-                      <a:headEnd type="none" w="med" len="med"/>
-                      <a:tailEnd type="none" w="med" len="med"/>
-                    </a:lnB>
-                    <a:solidFill>
-                      <a:srgbClr val="FFFFFF"/>
-                    </a:solidFill>
-                  </a:tcPr>
-                </a:tc>
-                <a:tc>
-                  <a:txBody>
-                    <a:bodyPr/>
-                    <a:lstStyle/>
-                    <a:p>
-                      <a:pPr algn="ctr" indent="0" marL="0">
-                        <a:buNone/>
-                      </a:pPr>
-                      <a:r>
-                        <a:rPr lang="en-US" sz="750" b="1" dirty="0">
-                          <a:solidFill>
-                            <a:srgbClr val="16794A"/>
-                          </a:solidFill>
-                          <a:latin typeface="Arial" pitchFamily="34" charset="0"/>
-                          <a:ea typeface="Arial" pitchFamily="34" charset="-122"/>
-                          <a:cs typeface="Arial" pitchFamily="34" charset="-120"/>
-                        </a:rPr>
-                        <a:t>✓</a:t>
-                      </a:r>
-                      <a:endParaRPr lang="en-US" sz="750" dirty="0">
-                        <a:latin typeface="Arial" charset="0"/>
-                        <a:ea typeface="Arial" charset="0"/>
-                        <a:cs typeface="Arial" charset="0"/>
-                      </a:endParaRPr>
-                    </a:p>
-                  </a:txBody>
-                  <a:tcPr marL="45720" marR="45720" marT="45720" marB="45720" anchor="ctr">
-                    <a:lnL w="6350" cap="flat" cmpd="sng" algn="ctr">
-                      <a:solidFill>
-                        <a:srgbClr val="E6E9EC"/>
-                      </a:solidFill>
-                      <a:prstDash val="solid"/>
-                      <a:round/>
-                      <a:headEnd type="none" w="med" len="med"/>
-                      <a:tailEnd type="none" w="med" len="med"/>
-                    </a:lnL>
-                    <a:lnR w="6350" cap="flat" cmpd="sng" algn="ctr">
-                      <a:solidFill>
-                        <a:srgbClr val="E6E9EC"/>
-                      </a:solidFill>
-                      <a:prstDash val="solid"/>
-                      <a:round/>
-                      <a:headEnd type="none" w="med" len="med"/>
-                      <a:tailEnd type="none" w="med" len="med"/>
-                    </a:lnR>
-                    <a:lnT w="6350" cap="flat" cmpd="sng" algn="ctr">
-                      <a:solidFill>
-                        <a:srgbClr val="E6E9EC"/>
-                      </a:solidFill>
-                      <a:prstDash val="solid"/>
-                      <a:round/>
-                      <a:headEnd type="none" w="med" len="med"/>
-                      <a:tailEnd type="none" w="med" len="med"/>
-                    </a:lnT>
-                    <a:lnB w="6350" cap="flat" cmpd="sng" algn="ctr">
-                      <a:solidFill>
-                        <a:srgbClr val="E6E9EC"/>
-                      </a:solidFill>
-                      <a:prstDash val="solid"/>
-                      <a:round/>
-                      <a:headEnd type="none" w="med" len="med"/>
-                      <a:tailEnd type="none" w="med" len="med"/>
-                    </a:lnB>
-                    <a:solidFill>
-                      <a:srgbClr val="FFFFFF"/>
-                    </a:solidFill>
-                  </a:tcPr>
-                </a:tc>
-                <a:tc>
-                  <a:txBody>
-                    <a:bodyPr/>
-                    <a:lstStyle/>
-                    <a:p>
-                      <a:pPr algn="ctr" indent="0" marL="0">
-                        <a:buNone/>
-                      </a:pPr>
-                      <a:r>
-                        <a:rPr lang="en-US" sz="750" b="1" dirty="0">
-                          <a:solidFill>
-                            <a:srgbClr val="16794A"/>
-                          </a:solidFill>
-                          <a:latin typeface="Arial" pitchFamily="34" charset="0"/>
-                          <a:ea typeface="Arial" pitchFamily="34" charset="-122"/>
-                          <a:cs typeface="Arial" pitchFamily="34" charset="-120"/>
-                        </a:rPr>
-                        <a:t>✓</a:t>
-                      </a:r>
-                      <a:endParaRPr lang="en-US" sz="750" dirty="0">
-                        <a:latin typeface="Arial" charset="0"/>
-                        <a:ea typeface="Arial" charset="0"/>
-                        <a:cs typeface="Arial" charset="0"/>
-                      </a:endParaRPr>
-                    </a:p>
-                  </a:txBody>
-                  <a:tcPr marL="45720" marR="45720" marT="45720" marB="45720" anchor="ctr">
-                    <a:lnL w="6350" cap="flat" cmpd="sng" algn="ctr">
-                      <a:solidFill>
-                        <a:srgbClr val="E6E9EC"/>
-                      </a:solidFill>
-                      <a:prstDash val="solid"/>
-                      <a:round/>
-                      <a:headEnd type="none" w="med" len="med"/>
-                      <a:tailEnd type="none" w="med" len="med"/>
-                    </a:lnL>
-                    <a:lnR w="6350" cap="flat" cmpd="sng" algn="ctr">
-                      <a:solidFill>
-                        <a:srgbClr val="E6E9EC"/>
-                      </a:solidFill>
-                      <a:prstDash val="solid"/>
-                      <a:round/>
-                      <a:headEnd type="none" w="med" len="med"/>
-                      <a:tailEnd type="none" w="med" len="med"/>
-                    </a:lnR>
-                    <a:lnT w="6350" cap="flat" cmpd="sng" algn="ctr">
-                      <a:solidFill>
-                        <a:srgbClr val="E6E9EC"/>
-                      </a:solidFill>
-                      <a:prstDash val="solid"/>
-                      <a:round/>
-                      <a:headEnd type="none" w="med" len="med"/>
-                      <a:tailEnd type="none" w="med" len="med"/>
-                    </a:lnT>
-                    <a:lnB w="6350" cap="flat" cmpd="sng" algn="ctr">
-                      <a:solidFill>
-                        <a:srgbClr val="E6E9EC"/>
-                      </a:solidFill>
-                      <a:prstDash val="solid"/>
-                      <a:round/>
-                      <a:headEnd type="none" w="med" len="med"/>
-                      <a:tailEnd type="none" w="med" len="med"/>
-                    </a:lnB>
-                    <a:solidFill>
-                      <a:srgbClr val="FFFFFF"/>
-                    </a:solidFill>
-                  </a:tcPr>
-                </a:tc>
-                <a:tc>
-                  <a:txBody>
-                    <a:bodyPr/>
-                    <a:lstStyle/>
-                    <a:p>
-                      <a:pPr algn="ctr" indent="0" marL="0">
-                        <a:buNone/>
-                      </a:pPr>
-                      <a:r>
-                        <a:rPr lang="en-US" sz="750" dirty="0">
-                          <a:solidFill>
-                            <a:srgbClr val="5E6A77"/>
-                          </a:solidFill>
-                          <a:latin typeface="Arial" pitchFamily="34" charset="0"/>
-                          <a:ea typeface="Arial" pitchFamily="34" charset="-122"/>
-                          <a:cs typeface="Arial" pitchFamily="34" charset="-120"/>
-                        </a:rPr>
-                        <a:t>—</a:t>
-                      </a:r>
-                      <a:endParaRPr lang="en-US" sz="750" dirty="0">
-                        <a:latin typeface="Arial" charset="0"/>
-                        <a:ea typeface="Arial" charset="0"/>
-                        <a:cs typeface="Arial" charset="0"/>
-                      </a:endParaRPr>
-                    </a:p>
-                  </a:txBody>
-                  <a:tcPr marL="45720" marR="45720" marT="45720" marB="45720" anchor="ctr">
-                    <a:lnL w="6350" cap="flat" cmpd="sng" algn="ctr">
-                      <a:solidFill>
-                        <a:srgbClr val="E6E9EC"/>
-                      </a:solidFill>
-                      <a:prstDash val="solid"/>
-                      <a:round/>
-                      <a:headEnd type="none" w="med" len="med"/>
-                      <a:tailEnd type="none" w="med" len="med"/>
-                    </a:lnL>
-                    <a:lnR w="6350" cap="flat" cmpd="sng" algn="ctr">
-                      <a:solidFill>
-                        <a:srgbClr val="E6E9EC"/>
-                      </a:solidFill>
-                      <a:prstDash val="solid"/>
-                      <a:round/>
-                      <a:headEnd type="none" w="med" len="med"/>
-                      <a:tailEnd type="none" w="med" len="med"/>
-                    </a:lnR>
-                    <a:lnT w="6350" cap="flat" cmpd="sng" algn="ctr">
-                      <a:solidFill>
-                        <a:srgbClr val="E6E9EC"/>
-                      </a:solidFill>
-                      <a:prstDash val="solid"/>
-                      <a:round/>
-                      <a:headEnd type="none" w="med" len="med"/>
-                      <a:tailEnd type="none" w="med" len="med"/>
-                    </a:lnT>
-                    <a:lnB w="6350" cap="flat" cmpd="sng" algn="ctr">
-                      <a:solidFill>
-                        <a:srgbClr val="E6E9EC"/>
-                      </a:solidFill>
-                      <a:prstDash val="solid"/>
-                      <a:round/>
-                      <a:headEnd type="none" w="med" len="med"/>
-                      <a:tailEnd type="none" w="med" len="med"/>
-                    </a:lnB>
-                    <a:solidFill>
-                      <a:srgbClr val="FFFFFF"/>
-                    </a:solidFill>
-                  </a:tcPr>
-                </a:tc>
-                <a:tc>
-                  <a:txBody>
-                    <a:bodyPr/>
-                    <a:lstStyle/>
-                    <a:p>
-                      <a:pPr algn="ctr" indent="0" marL="0">
-                        <a:buNone/>
-                      </a:pPr>
-                      <a:r>
-                        <a:rPr lang="en-US" sz="750" b="1" dirty="0">
-                          <a:solidFill>
-                            <a:srgbClr val="16794A"/>
-                          </a:solidFill>
-                          <a:latin typeface="Arial" pitchFamily="34" charset="0"/>
-                          <a:ea typeface="Arial" pitchFamily="34" charset="-122"/>
-                          <a:cs typeface="Arial" pitchFamily="34" charset="-120"/>
-                        </a:rPr>
-                        <a:t>✓</a:t>
-                      </a:r>
-                      <a:endParaRPr lang="en-US" sz="750" dirty="0">
-                        <a:latin typeface="Arial" charset="0"/>
-                        <a:ea typeface="Arial" charset="0"/>
-                        <a:cs typeface="Arial" charset="0"/>
-                      </a:endParaRPr>
-                    </a:p>
-                  </a:txBody>
-                  <a:tcPr marL="45720" marR="45720" marT="45720" marB="45720" anchor="ctr">
-                    <a:lnL w="6350" cap="flat" cmpd="sng" algn="ctr">
-                      <a:solidFill>
-                        <a:srgbClr val="E6E9EC"/>
-                      </a:solidFill>
-                      <a:prstDash val="solid"/>
-                      <a:round/>
-                      <a:headEnd type="none" w="med" len="med"/>
-                      <a:tailEnd type="none" w="med" len="med"/>
-                    </a:lnL>
-                    <a:lnR w="6350" cap="flat" cmpd="sng" algn="ctr">
-                      <a:solidFill>
-                        <a:srgbClr val="E6E9EC"/>
-                      </a:solidFill>
-                      <a:prstDash val="solid"/>
-                      <a:round/>
-                      <a:headEnd type="none" w="med" len="med"/>
-                      <a:tailEnd type="none" w="med" len="med"/>
-                    </a:lnR>
-                    <a:lnT w="6350" cap="flat" cmpd="sng" algn="ctr">
-                      <a:solidFill>
-                        <a:srgbClr val="E6E9EC"/>
-                      </a:solidFill>
-                      <a:prstDash val="solid"/>
-                      <a:round/>
-                      <a:headEnd type="none" w="med" len="med"/>
-                      <a:tailEnd type="none" w="med" len="med"/>
-                    </a:lnT>
-                    <a:lnB w="6350" cap="flat" cmpd="sng" algn="ctr">
-                      <a:solidFill>
-                        <a:srgbClr val="E6E9EC"/>
-                      </a:solidFill>
-                      <a:prstDash val="solid"/>
-                      <a:round/>
-                      <a:headEnd type="none" w="med" len="med"/>
-                      <a:tailEnd type="none" w="med" len="med"/>
-                    </a:lnB>
-                    <a:solidFill>
-                      <a:srgbClr val="FFFFFF"/>
-                    </a:solidFill>
-                  </a:tcPr>
-                </a:tc>
-                <a:tc>
-                  <a:txBody>
-                    <a:bodyPr/>
-                    <a:lstStyle/>
-                    <a:p>
-                      <a:pPr algn="ctr" indent="0" marL="0">
-                        <a:buNone/>
-                      </a:pPr>
-                      <a:r>
-                        <a:rPr lang="en-US" sz="750" b="1" dirty="0">
-                          <a:solidFill>
-                            <a:srgbClr val="16794A"/>
-                          </a:solidFill>
-                          <a:latin typeface="Arial" pitchFamily="34" charset="0"/>
-                          <a:ea typeface="Arial" pitchFamily="34" charset="-122"/>
-                          <a:cs typeface="Arial" pitchFamily="34" charset="-120"/>
-                        </a:rPr>
-                        <a:t>✓</a:t>
-                      </a:r>
-                      <a:endParaRPr lang="en-US" sz="750" dirty="0">
-                        <a:latin typeface="Arial" charset="0"/>
-                        <a:ea typeface="Arial" charset="0"/>
-                        <a:cs typeface="Arial" charset="0"/>
-                      </a:endParaRPr>
-                    </a:p>
-                  </a:txBody>
-                  <a:tcPr marL="45720" marR="45720" marT="45720" marB="45720" anchor="ctr">
-                    <a:lnL w="6350" cap="flat" cmpd="sng" algn="ctr">
-                      <a:solidFill>
-                        <a:srgbClr val="E6E9EC"/>
-                      </a:solidFill>
-                      <a:prstDash val="solid"/>
-                      <a:round/>
-                      <a:headEnd type="none" w="med" len="med"/>
-                      <a:tailEnd type="none" w="med" len="med"/>
-                    </a:lnL>
-                    <a:lnR w="6350" cap="flat" cmpd="sng" algn="ctr">
-                      <a:solidFill>
-                        <a:srgbClr val="E6E9EC"/>
-                      </a:solidFill>
-                      <a:prstDash val="solid"/>
-                      <a:round/>
-                      <a:headEnd type="none" w="med" len="med"/>
-                      <a:tailEnd type="none" w="med" len="med"/>
-                    </a:lnR>
-                    <a:lnT w="6350" cap="flat" cmpd="sng" algn="ctr">
-                      <a:solidFill>
-                        <a:srgbClr val="E6E9EC"/>
-                      </a:solidFill>
-                      <a:prstDash val="solid"/>
-                      <a:round/>
-                      <a:headEnd type="none" w="med" len="med"/>
-                      <a:tailEnd type="none" w="med" len="med"/>
-                    </a:lnT>
-                    <a:lnB w="6350" cap="flat" cmpd="sng" algn="ctr">
-                      <a:solidFill>
-                        <a:srgbClr val="E6E9EC"/>
-                      </a:solidFill>
-                      <a:prstDash val="solid"/>
-                      <a:round/>
-                      <a:headEnd type="none" w="med" len="med"/>
-                      <a:tailEnd type="none" w="med" len="med"/>
-                    </a:lnB>
-                    <a:solidFill>
-                      <a:srgbClr val="FFFFFF"/>
-                    </a:solidFill>
-                  </a:tcPr>
-                </a:tc>
-                <a:tc>
-                  <a:txBody>
-                    <a:bodyPr/>
-                    <a:lstStyle/>
-                    <a:p>
-                      <a:pPr algn="ctr" indent="0" marL="0">
-                        <a:buNone/>
-                      </a:pPr>
-                      <a:r>
-                        <a:rPr lang="en-US" sz="750" b="1" dirty="0">
-                          <a:solidFill>
-                            <a:srgbClr val="16794A"/>
-                          </a:solidFill>
-                          <a:latin typeface="Arial" pitchFamily="34" charset="0"/>
-                          <a:ea typeface="Arial" pitchFamily="34" charset="-122"/>
-                          <a:cs typeface="Arial" pitchFamily="34" charset="-120"/>
-                        </a:rPr>
-                        <a:t>✓</a:t>
-                      </a:r>
-                      <a:endParaRPr lang="en-US" sz="750" dirty="0">
-                        <a:latin typeface="Arial" charset="0"/>
-                        <a:ea typeface="Arial" charset="0"/>
-                        <a:cs typeface="Arial" charset="0"/>
-                      </a:endParaRPr>
-                    </a:p>
-                  </a:txBody>
-                  <a:tcPr marL="45720" marR="45720" marT="45720" marB="45720" anchor="ctr">
-                    <a:lnL w="6350" cap="flat" cmpd="sng" algn="ctr">
-                      <a:solidFill>
-                        <a:srgbClr val="E6E9EC"/>
-                      </a:solidFill>
-                      <a:prstDash val="solid"/>
-                      <a:round/>
-                      <a:headEnd type="none" w="med" len="med"/>
-                      <a:tailEnd type="none" w="med" len="med"/>
-                    </a:lnL>
-                    <a:lnR w="6350" cap="flat" cmpd="sng" algn="ctr">
-                      <a:solidFill>
-                        <a:srgbClr val="E6E9EC"/>
-                      </a:solidFill>
-                      <a:prstDash val="solid"/>
-                      <a:round/>
-                      <a:headEnd type="none" w="med" len="med"/>
-                      <a:tailEnd type="none" w="med" len="med"/>
-                    </a:lnR>
-                    <a:lnT w="6350" cap="flat" cmpd="sng" algn="ctr">
-                      <a:solidFill>
-                        <a:srgbClr val="E6E9EC"/>
-                      </a:solidFill>
-                      <a:prstDash val="solid"/>
-                      <a:round/>
-                      <a:headEnd type="none" w="med" len="med"/>
-                      <a:tailEnd type="none" w="med" len="med"/>
-                    </a:lnT>
-                    <a:lnB w="6350" cap="flat" cmpd="sng" algn="ctr">
-                      <a:solidFill>
-                        <a:srgbClr val="E6E9EC"/>
-                      </a:solidFill>
-                      <a:prstDash val="solid"/>
-                      <a:round/>
-                      <a:headEnd type="none" w="med" len="med"/>
-                      <a:tailEnd type="none" w="med" len="med"/>
-                    </a:lnB>
-                    <a:solidFill>
-                      <a:srgbClr val="FFFFFF"/>
-                    </a:solidFill>
-                  </a:tcPr>
-                </a:tc>
-                <a:tc>
-                  <a:txBody>
-                    <a:bodyPr/>
-                    <a:lstStyle/>
-                    <a:p>
-                      <a:pPr algn="ctr" indent="0" marL="0">
-                        <a:buNone/>
-                      </a:pPr>
-                      <a:r>
-                        <a:rPr lang="en-US" sz="750" dirty="0">
-                          <a:solidFill>
-                            <a:srgbClr val="5E6A77"/>
-                          </a:solidFill>
-                          <a:latin typeface="Arial" pitchFamily="34" charset="0"/>
-                          <a:ea typeface="Arial" pitchFamily="34" charset="-122"/>
-                          <a:cs typeface="Arial" pitchFamily="34" charset="-120"/>
-                        </a:rPr>
-                        <a:t>—</a:t>
-                      </a:r>
-                      <a:endParaRPr lang="en-US" sz="750" dirty="0">
-                        <a:latin typeface="Arial" charset="0"/>
-                        <a:ea typeface="Arial" charset="0"/>
-                        <a:cs typeface="Arial" charset="0"/>
-                      </a:endParaRPr>
-                    </a:p>
-                  </a:txBody>
-                  <a:tcPr marL="45720" marR="45720" marT="45720" marB="45720" anchor="ctr">
-                    <a:lnL w="6350" cap="flat" cmpd="sng" algn="ctr">
-                      <a:solidFill>
-                        <a:srgbClr val="E6E9EC"/>
-                      </a:solidFill>
-                      <a:prstDash val="solid"/>
-                      <a:round/>
-                      <a:headEnd type="none" w="med" len="med"/>
-                      <a:tailEnd type="none" w="med" len="med"/>
-                    </a:lnL>
-                    <a:lnR w="6350" cap="flat" cmpd="sng" algn="ctr">
-                      <a:solidFill>
-                        <a:srgbClr val="E6E9EC"/>
-                      </a:solidFill>
-                      <a:prstDash val="solid"/>
-                      <a:round/>
-                      <a:headEnd type="none" w="med" len="med"/>
-                      <a:tailEnd type="none" w="med" len="med"/>
-                    </a:lnR>
-                    <a:lnT w="6350" cap="flat" cmpd="sng" algn="ctr">
-                      <a:solidFill>
-                        <a:srgbClr val="E6E9EC"/>
-                      </a:solidFill>
-                      <a:prstDash val="solid"/>
-                      <a:round/>
-                      <a:headEnd type="none" w="med" len="med"/>
-                      <a:tailEnd type="none" w="med" len="med"/>
-                    </a:lnT>
-                    <a:lnB w="6350" cap="flat" cmpd="sng" algn="ctr">
-                      <a:solidFill>
-                        <a:srgbClr val="E6E9EC"/>
-                      </a:solidFill>
-                      <a:prstDash val="solid"/>
-                      <a:round/>
-                      <a:headEnd type="none" w="med" len="med"/>
-                      <a:tailEnd type="none" w="med" len="med"/>
-                    </a:lnB>
-                    <a:solidFill>
-                      <a:srgbClr val="FFFFFF"/>
-                    </a:solidFill>
-                  </a:tcPr>
-                </a:tc>
-              </a:tr>
-              <a:tr h="237744">
-                <a:tc>
-                  <a:txBody>
-                    <a:bodyPr/>
-                    <a:lstStyle/>
-                    <a:p>
-                      <a:pPr indent="0" marL="0">
-                        <a:buNone/>
-                      </a:pPr>
-                      <a:r>
-                        <a:rPr lang="en-US" sz="750" b="1" dirty="0">
-                          <a:solidFill>
-                            <a:srgbClr val="1E2B37"/>
-                          </a:solidFill>
-                          <a:latin typeface="Arial" pitchFamily="34" charset="0"/>
-                          <a:ea typeface="Arial" pitchFamily="34" charset="-122"/>
-                          <a:cs typeface="Arial" pitchFamily="34" charset="-120"/>
-                        </a:rPr>
-                        <a:t>coste USD</a:t>
-                      </a:r>
-                      <a:endParaRPr lang="en-US" sz="750" dirty="0">
-                        <a:latin typeface="Arial" charset="0"/>
-                        <a:ea typeface="Arial" charset="0"/>
-                        <a:cs typeface="Arial" charset="0"/>
-                      </a:endParaRPr>
-                    </a:p>
-                  </a:txBody>
-                  <a:tcPr marL="45720" marR="45720" marT="45720" marB="45720" anchor="ctr">
-                    <a:lnL w="6350" cap="flat" cmpd="sng" algn="ctr">
-                      <a:solidFill>
-                        <a:srgbClr val="E6E9EC"/>
-                      </a:solidFill>
-                      <a:prstDash val="solid"/>
-                      <a:round/>
-                      <a:headEnd type="none" w="med" len="med"/>
-                      <a:tailEnd type="none" w="med" len="med"/>
-                    </a:lnL>
-                    <a:lnR w="6350" cap="flat" cmpd="sng" algn="ctr">
-                      <a:solidFill>
-                        <a:srgbClr val="E6E9EC"/>
-                      </a:solidFill>
-                      <a:prstDash val="solid"/>
-                      <a:round/>
-                      <a:headEnd type="none" w="med" len="med"/>
-                      <a:tailEnd type="none" w="med" len="med"/>
-                    </a:lnR>
-                    <a:lnT w="6350" cap="flat" cmpd="sng" algn="ctr">
-                      <a:solidFill>
-                        <a:srgbClr val="E6E9EC"/>
-                      </a:solidFill>
-                      <a:prstDash val="solid"/>
-                      <a:round/>
-                      <a:headEnd type="none" w="med" len="med"/>
-                      <a:tailEnd type="none" w="med" len="med"/>
-                    </a:lnT>
-                    <a:lnB w="6350" cap="flat" cmpd="sng" algn="ctr">
-                      <a:solidFill>
-                        <a:srgbClr val="E6E9EC"/>
-                      </a:solidFill>
-                      <a:prstDash val="solid"/>
-                      <a:round/>
-                      <a:headEnd type="none" w="med" len="med"/>
-                      <a:tailEnd type="none" w="med" len="med"/>
-                    </a:lnB>
-                    <a:solidFill>
-                      <a:srgbClr val="F7F8FA"/>
-                    </a:solidFill>
-                  </a:tcPr>
-                </a:tc>
-                <a:tc>
-                  <a:txBody>
-                    <a:bodyPr/>
-                    <a:lstStyle/>
-                    <a:p>
-                      <a:pPr indent="0" marL="0">
-                        <a:buNone/>
-                      </a:pPr>
-                      <a:r>
-                        <a:rPr lang="en-US" sz="750" dirty="0">
-                          <a:solidFill>
-                            <a:srgbClr val="1E2B37"/>
-                          </a:solidFill>
-                          <a:latin typeface="Arial" pitchFamily="34" charset="0"/>
-                          <a:ea typeface="Arial" pitchFamily="34" charset="-122"/>
-                          <a:cs typeface="Arial" pitchFamily="34" charset="-120"/>
-                        </a:rPr>
-                        <a:t>1,12</a:t>
-                      </a:r>
-                      <a:endParaRPr lang="en-US" sz="750" dirty="0">
-                        <a:latin typeface="Arial" charset="0"/>
-                        <a:ea typeface="Arial" charset="0"/>
-                        <a:cs typeface="Arial" charset="0"/>
-                      </a:endParaRPr>
-                    </a:p>
-                  </a:txBody>
-                  <a:tcPr marL="45720" marR="45720" marT="45720" marB="45720" anchor="ctr">
-                    <a:lnL w="6350" cap="flat" cmpd="sng" algn="ctr">
-                      <a:solidFill>
-                        <a:srgbClr val="E6E9EC"/>
-                      </a:solidFill>
-                      <a:prstDash val="solid"/>
-                      <a:round/>
-                      <a:headEnd type="none" w="med" len="med"/>
-                      <a:tailEnd type="none" w="med" len="med"/>
-                    </a:lnL>
-                    <a:lnR w="6350" cap="flat" cmpd="sng" algn="ctr">
-                      <a:solidFill>
-                        <a:srgbClr val="E6E9EC"/>
-                      </a:solidFill>
-                      <a:prstDash val="solid"/>
-                      <a:round/>
-                      <a:headEnd type="none" w="med" len="med"/>
-                      <a:tailEnd type="none" w="med" len="med"/>
-                    </a:lnR>
-                    <a:lnT w="6350" cap="flat" cmpd="sng" algn="ctr">
-                      <a:solidFill>
-                        <a:srgbClr val="E6E9EC"/>
-                      </a:solidFill>
-                      <a:prstDash val="solid"/>
-                      <a:round/>
-                      <a:headEnd type="none" w="med" len="med"/>
-                      <a:tailEnd type="none" w="med" len="med"/>
-                    </a:lnT>
-                    <a:lnB w="6350" cap="flat" cmpd="sng" algn="ctr">
-                      <a:solidFill>
-                        <a:srgbClr val="E6E9EC"/>
-                      </a:solidFill>
-                      <a:prstDash val="solid"/>
-                      <a:round/>
-                      <a:headEnd type="none" w="med" len="med"/>
-                      <a:tailEnd type="none" w="med" len="med"/>
-                    </a:lnB>
-                    <a:solidFill>
-                      <a:srgbClr val="F7F8FA"/>
-                    </a:solidFill>
-                  </a:tcPr>
-                </a:tc>
-                <a:tc>
-                  <a:txBody>
-                    <a:bodyPr/>
-                    <a:lstStyle/>
-                    <a:p>
-                      <a:pPr indent="0" marL="0">
-                        <a:buNone/>
-                      </a:pPr>
-                      <a:r>
-                        <a:rPr lang="en-US" sz="750" dirty="0">
-                          <a:solidFill>
-                            <a:srgbClr val="1E2B37"/>
-                          </a:solidFill>
-                          <a:latin typeface="Arial" pitchFamily="34" charset="0"/>
-                          <a:ea typeface="Arial" pitchFamily="34" charset="-122"/>
-                          <a:cs typeface="Arial" pitchFamily="34" charset="-120"/>
-                        </a:rPr>
-                        <a:t>1,24</a:t>
-                      </a:r>
-                      <a:endParaRPr lang="en-US" sz="750" dirty="0">
-                        <a:latin typeface="Arial" charset="0"/>
-                        <a:ea typeface="Arial" charset="0"/>
-                        <a:cs typeface="Arial" charset="0"/>
-                      </a:endParaRPr>
-                    </a:p>
-                  </a:txBody>
-                  <a:tcPr marL="45720" marR="45720" marT="45720" marB="45720" anchor="ctr">
-                    <a:lnL w="6350" cap="flat" cmpd="sng" algn="ctr">
-                      <a:solidFill>
-                        <a:srgbClr val="E6E9EC"/>
-                      </a:solidFill>
-                      <a:prstDash val="solid"/>
-                      <a:round/>
-                      <a:headEnd type="none" w="med" len="med"/>
-                      <a:tailEnd type="none" w="med" len="med"/>
-                    </a:lnL>
-                    <a:lnR w="6350" cap="flat" cmpd="sng" algn="ctr">
-                      <a:solidFill>
-                        <a:srgbClr val="E6E9EC"/>
-                      </a:solidFill>
-                      <a:prstDash val="solid"/>
-                      <a:round/>
-                      <a:headEnd type="none" w="med" len="med"/>
-                      <a:tailEnd type="none" w="med" len="med"/>
-                    </a:lnR>
-                    <a:lnT w="6350" cap="flat" cmpd="sng" algn="ctr">
-                      <a:solidFill>
-                        <a:srgbClr val="E6E9EC"/>
-                      </a:solidFill>
-                      <a:prstDash val="solid"/>
-                      <a:round/>
-                      <a:headEnd type="none" w="med" len="med"/>
-                      <a:tailEnd type="none" w="med" len="med"/>
-                    </a:lnT>
-                    <a:lnB w="6350" cap="flat" cmpd="sng" algn="ctr">
-                      <a:solidFill>
-                        <a:srgbClr val="E6E9EC"/>
-                      </a:solidFill>
-                      <a:prstDash val="solid"/>
-                      <a:round/>
-                      <a:headEnd type="none" w="med" len="med"/>
-                      <a:tailEnd type="none" w="med" len="med"/>
-                    </a:lnB>
-                    <a:solidFill>
-                      <a:srgbClr val="F7F8FA"/>
-                    </a:solidFill>
-                  </a:tcPr>
-                </a:tc>
-                <a:tc>
-                  <a:txBody>
-                    <a:bodyPr/>
-                    <a:lstStyle/>
-                    <a:p>
-                      <a:pPr indent="0" marL="0">
-                        <a:buNone/>
-                      </a:pPr>
-                      <a:r>
-                        <a:rPr lang="en-US" sz="750" dirty="0">
-                          <a:solidFill>
-                            <a:srgbClr val="1E2B37"/>
-                          </a:solidFill>
-                          <a:latin typeface="Arial" pitchFamily="34" charset="0"/>
-                          <a:ea typeface="Arial" pitchFamily="34" charset="-122"/>
-                          <a:cs typeface="Arial" pitchFamily="34" charset="-120"/>
-                        </a:rPr>
-                        <a:t>0,25</a:t>
-                      </a:r>
-                      <a:endParaRPr lang="en-US" sz="750" dirty="0">
-                        <a:latin typeface="Arial" charset="0"/>
-                        <a:ea typeface="Arial" charset="0"/>
-                        <a:cs typeface="Arial" charset="0"/>
-                      </a:endParaRPr>
-                    </a:p>
-                  </a:txBody>
-                  <a:tcPr marL="45720" marR="45720" marT="45720" marB="45720" anchor="ctr">
-                    <a:lnL w="6350" cap="flat" cmpd="sng" algn="ctr">
-                      <a:solidFill>
-                        <a:srgbClr val="E6E9EC"/>
-                      </a:solidFill>
-                      <a:prstDash val="solid"/>
-                      <a:round/>
-                      <a:headEnd type="none" w="med" len="med"/>
-                      <a:tailEnd type="none" w="med" len="med"/>
-                    </a:lnL>
-                    <a:lnR w="6350" cap="flat" cmpd="sng" algn="ctr">
-                      <a:solidFill>
-                        <a:srgbClr val="E6E9EC"/>
-                      </a:solidFill>
-                      <a:prstDash val="solid"/>
-                      <a:round/>
-                      <a:headEnd type="none" w="med" len="med"/>
-                      <a:tailEnd type="none" w="med" len="med"/>
-                    </a:lnR>
-                    <a:lnT w="6350" cap="flat" cmpd="sng" algn="ctr">
-                      <a:solidFill>
-                        <a:srgbClr val="E6E9EC"/>
-                      </a:solidFill>
-                      <a:prstDash val="solid"/>
-                      <a:round/>
-                      <a:headEnd type="none" w="med" len="med"/>
-                      <a:tailEnd type="none" w="med" len="med"/>
-                    </a:lnT>
-                    <a:lnB w="6350" cap="flat" cmpd="sng" algn="ctr">
-                      <a:solidFill>
-                        <a:srgbClr val="E6E9EC"/>
-                      </a:solidFill>
-                      <a:prstDash val="solid"/>
-                      <a:round/>
-                      <a:headEnd type="none" w="med" len="med"/>
-                      <a:tailEnd type="none" w="med" len="med"/>
-                    </a:lnB>
-                    <a:solidFill>
-                      <a:srgbClr val="F7F8FA"/>
-                    </a:solidFill>
-                  </a:tcPr>
-                </a:tc>
-                <a:tc>
-                  <a:txBody>
-                    <a:bodyPr/>
-                    <a:lstStyle/>
-                    <a:p>
-                      <a:pPr indent="0" marL="0">
-                        <a:buNone/>
-                      </a:pPr>
-                      <a:r>
-                        <a:rPr lang="en-US" sz="750" dirty="0">
-                          <a:solidFill>
-                            <a:srgbClr val="1E2B37"/>
-                          </a:solidFill>
-                          <a:latin typeface="Arial" pitchFamily="34" charset="0"/>
-                          <a:ea typeface="Arial" pitchFamily="34" charset="-122"/>
-                          <a:cs typeface="Arial" pitchFamily="34" charset="-120"/>
-                        </a:rPr>
-                        <a:t>0,97</a:t>
-                      </a:r>
-                      <a:endParaRPr lang="en-US" sz="750" dirty="0">
-                        <a:latin typeface="Arial" charset="0"/>
-                        <a:ea typeface="Arial" charset="0"/>
-                        <a:cs typeface="Arial" charset="0"/>
-                      </a:endParaRPr>
-                    </a:p>
-                  </a:txBody>
-                  <a:tcPr marL="45720" marR="45720" marT="45720" marB="45720" anchor="ctr">
-                    <a:lnL w="6350" cap="flat" cmpd="sng" algn="ctr">
-                      <a:solidFill>
-                        <a:srgbClr val="E6E9EC"/>
-                      </a:solidFill>
-                      <a:prstDash val="solid"/>
-                      <a:round/>
-                      <a:headEnd type="none" w="med" len="med"/>
-                      <a:tailEnd type="none" w="med" len="med"/>
-                    </a:lnL>
-                    <a:lnR w="6350" cap="flat" cmpd="sng" algn="ctr">
-                      <a:solidFill>
-                        <a:srgbClr val="E6E9EC"/>
-                      </a:solidFill>
-                      <a:prstDash val="solid"/>
-                      <a:round/>
-                      <a:headEnd type="none" w="med" len="med"/>
-                      <a:tailEnd type="none" w="med" len="med"/>
-                    </a:lnR>
-                    <a:lnT w="6350" cap="flat" cmpd="sng" algn="ctr">
-                      <a:solidFill>
-                        <a:srgbClr val="E6E9EC"/>
-                      </a:solidFill>
-                      <a:prstDash val="solid"/>
-                      <a:round/>
-                      <a:headEnd type="none" w="med" len="med"/>
-                      <a:tailEnd type="none" w="med" len="med"/>
-                    </a:lnT>
-                    <a:lnB w="6350" cap="flat" cmpd="sng" algn="ctr">
-                      <a:solidFill>
-                        <a:srgbClr val="E6E9EC"/>
-                      </a:solidFill>
-                      <a:prstDash val="solid"/>
-                      <a:round/>
-                      <a:headEnd type="none" w="med" len="med"/>
-                      <a:tailEnd type="none" w="med" len="med"/>
-                    </a:lnB>
-                    <a:solidFill>
-                      <a:srgbClr val="F7F8FA"/>
-                    </a:solidFill>
-                  </a:tcPr>
-                </a:tc>
-                <a:tc>
-                  <a:txBody>
-                    <a:bodyPr/>
-                    <a:lstStyle/>
-                    <a:p>
-                      <a:pPr indent="0" marL="0">
-                        <a:buNone/>
-                      </a:pPr>
-                      <a:r>
-                        <a:rPr lang="en-US" sz="750" dirty="0">
-                          <a:solidFill>
-                            <a:srgbClr val="1E2B37"/>
-                          </a:solidFill>
-                          <a:latin typeface="Arial" pitchFamily="34" charset="0"/>
-                          <a:ea typeface="Arial" pitchFamily="34" charset="-122"/>
-                          <a:cs typeface="Arial" pitchFamily="34" charset="-120"/>
-                        </a:rPr>
-                        <a:t>1,02</a:t>
-                      </a:r>
-                      <a:endParaRPr lang="en-US" sz="750" dirty="0">
-                        <a:latin typeface="Arial" charset="0"/>
-                        <a:ea typeface="Arial" charset="0"/>
-                        <a:cs typeface="Arial" charset="0"/>
-                      </a:endParaRPr>
-                    </a:p>
-                  </a:txBody>
-                  <a:tcPr marL="45720" marR="45720" marT="45720" marB="45720" anchor="ctr">
-                    <a:lnL w="6350" cap="flat" cmpd="sng" algn="ctr">
-                      <a:solidFill>
-                        <a:srgbClr val="E6E9EC"/>
-                      </a:solidFill>
-                      <a:prstDash val="solid"/>
-                      <a:round/>
-                      <a:headEnd type="none" w="med" len="med"/>
-                      <a:tailEnd type="none" w="med" len="med"/>
-                    </a:lnL>
-                    <a:lnR w="6350" cap="flat" cmpd="sng" algn="ctr">
-                      <a:solidFill>
-                        <a:srgbClr val="E6E9EC"/>
-                      </a:solidFill>
-                      <a:prstDash val="solid"/>
-                      <a:round/>
-                      <a:headEnd type="none" w="med" len="med"/>
-                      <a:tailEnd type="none" w="med" len="med"/>
-                    </a:lnR>
-                    <a:lnT w="6350" cap="flat" cmpd="sng" algn="ctr">
-                      <a:solidFill>
-                        <a:srgbClr val="E6E9EC"/>
-                      </a:solidFill>
-                      <a:prstDash val="solid"/>
-                      <a:round/>
-                      <a:headEnd type="none" w="med" len="med"/>
-                      <a:tailEnd type="none" w="med" len="med"/>
-                    </a:lnT>
-                    <a:lnB w="6350" cap="flat" cmpd="sng" algn="ctr">
-                      <a:solidFill>
-                        <a:srgbClr val="E6E9EC"/>
-                      </a:solidFill>
-                      <a:prstDash val="solid"/>
-                      <a:round/>
-                      <a:headEnd type="none" w="med" len="med"/>
-                      <a:tailEnd type="none" w="med" len="med"/>
-                    </a:lnB>
-                    <a:solidFill>
-                      <a:srgbClr val="F7F8FA"/>
-                    </a:solidFill>
-                  </a:tcPr>
-                </a:tc>
-                <a:tc>
-                  <a:txBody>
-                    <a:bodyPr/>
-                    <a:lstStyle/>
-                    <a:p>
-                      <a:pPr indent="0" marL="0">
-                        <a:buNone/>
-                      </a:pPr>
-                      <a:r>
-                        <a:rPr lang="en-US" sz="750" dirty="0">
-                          <a:solidFill>
-                            <a:srgbClr val="1E2B37"/>
-                          </a:solidFill>
-                          <a:latin typeface="Arial" pitchFamily="34" charset="0"/>
-                          <a:ea typeface="Arial" pitchFamily="34" charset="-122"/>
-                          <a:cs typeface="Arial" pitchFamily="34" charset="-120"/>
-                        </a:rPr>
-                        <a:t>1,93</a:t>
-                      </a:r>
-                      <a:endParaRPr lang="en-US" sz="750" dirty="0">
-                        <a:latin typeface="Arial" charset="0"/>
-                        <a:ea typeface="Arial" charset="0"/>
-                        <a:cs typeface="Arial" charset="0"/>
-                      </a:endParaRPr>
-                    </a:p>
-                  </a:txBody>
-                  <a:tcPr marL="45720" marR="45720" marT="45720" marB="45720" anchor="ctr">
-                    <a:lnL w="6350" cap="flat" cmpd="sng" algn="ctr">
-                      <a:solidFill>
-                        <a:srgbClr val="E6E9EC"/>
-                      </a:solidFill>
-                      <a:prstDash val="solid"/>
-                      <a:round/>
-                      <a:headEnd type="none" w="med" len="med"/>
-                      <a:tailEnd type="none" w="med" len="med"/>
-                    </a:lnL>
-                    <a:lnR w="6350" cap="flat" cmpd="sng" algn="ctr">
-                      <a:solidFill>
-                        <a:srgbClr val="E6E9EC"/>
-                      </a:solidFill>
-                      <a:prstDash val="solid"/>
-                      <a:round/>
-                      <a:headEnd type="none" w="med" len="med"/>
-                      <a:tailEnd type="none" w="med" len="med"/>
-                    </a:lnR>
-                    <a:lnT w="6350" cap="flat" cmpd="sng" algn="ctr">
-                      <a:solidFill>
-                        <a:srgbClr val="E6E9EC"/>
-                      </a:solidFill>
-                      <a:prstDash val="solid"/>
-                      <a:round/>
-                      <a:headEnd type="none" w="med" len="med"/>
-                      <a:tailEnd type="none" w="med" len="med"/>
-                    </a:lnT>
-                    <a:lnB w="6350" cap="flat" cmpd="sng" algn="ctr">
-                      <a:solidFill>
-                        <a:srgbClr val="E6E9EC"/>
-                      </a:solidFill>
-                      <a:prstDash val="solid"/>
-                      <a:round/>
-                      <a:headEnd type="none" w="med" len="med"/>
-                      <a:tailEnd type="none" w="med" len="med"/>
-                    </a:lnB>
-                    <a:solidFill>
-                      <a:srgbClr val="F7F8FA"/>
-                    </a:solidFill>
-                  </a:tcPr>
-                </a:tc>
-                <a:tc>
-                  <a:txBody>
-                    <a:bodyPr/>
-                    <a:lstStyle/>
-                    <a:p>
-                      <a:pPr indent="0" marL="0">
-                        <a:buNone/>
-                      </a:pPr>
-                      <a:r>
-                        <a:rPr lang="en-US" sz="750" dirty="0">
-                          <a:solidFill>
-                            <a:srgbClr val="1E2B37"/>
-                          </a:solidFill>
-                          <a:latin typeface="Arial" pitchFamily="34" charset="0"/>
-                          <a:ea typeface="Arial" pitchFamily="34" charset="-122"/>
-                          <a:cs typeface="Arial" pitchFamily="34" charset="-120"/>
-                        </a:rPr>
-                        <a:t>—</a:t>
-                      </a:r>
-                      <a:endParaRPr lang="en-US" sz="750" dirty="0">
-                        <a:latin typeface="Arial" charset="0"/>
-                        <a:ea typeface="Arial" charset="0"/>
-                        <a:cs typeface="Arial" charset="0"/>
-                      </a:endParaRPr>
-                    </a:p>
-                  </a:txBody>
-                  <a:tcPr marL="45720" marR="45720" marT="45720" marB="45720" anchor="ctr">
-                    <a:lnL w="6350" cap="flat" cmpd="sng" algn="ctr">
-                      <a:solidFill>
-                        <a:srgbClr val="E6E9EC"/>
-                      </a:solidFill>
-                      <a:prstDash val="solid"/>
-                      <a:round/>
-                      <a:headEnd type="none" w="med" len="med"/>
-                      <a:tailEnd type="none" w="med" len="med"/>
-                    </a:lnL>
-                    <a:lnR w="6350" cap="flat" cmpd="sng" algn="ctr">
-                      <a:solidFill>
-                        <a:srgbClr val="E6E9EC"/>
-                      </a:solidFill>
-                      <a:prstDash val="solid"/>
-                      <a:round/>
-                      <a:headEnd type="none" w="med" len="med"/>
-                      <a:tailEnd type="none" w="med" len="med"/>
-                    </a:lnR>
-                    <a:lnT w="6350" cap="flat" cmpd="sng" algn="ctr">
-                      <a:solidFill>
-                        <a:srgbClr val="E6E9EC"/>
-                      </a:solidFill>
-                      <a:prstDash val="solid"/>
-                      <a:round/>
-                      <a:headEnd type="none" w="med" len="med"/>
-                      <a:tailEnd type="none" w="med" len="med"/>
-                    </a:lnT>
-                    <a:lnB w="6350" cap="flat" cmpd="sng" algn="ctr">
-                      <a:solidFill>
-                        <a:srgbClr val="E6E9EC"/>
-                      </a:solidFill>
-                      <a:prstDash val="solid"/>
-                      <a:round/>
-                      <a:headEnd type="none" w="med" len="med"/>
-                      <a:tailEnd type="none" w="med" len="med"/>
-                    </a:lnB>
-                    <a:solidFill>
-                      <a:srgbClr val="F7F8FA"/>
-                    </a:solidFill>
-                  </a:tcPr>
-                </a:tc>
-              </a:tr>
-            </a:tbl>
-          </a:graphicData>
-        </a:graphic>
-      </p:graphicFrame>
-      <p:sp>
-        <p:nvSpPr>
-          <p:cNvPr id="9" name="Text 4"/>
-          <p:cNvSpPr txBox="1"/>
-          <p:nvPr/>
-        </p:nvSpPr>
-        <p:spPr>
-          <a:xfrm>
-            <a:off x="457200" y="4315968"/>
-            <a:ext cx="8229600" cy="274320"/>
-          </a:xfrm>
-          <a:prstGeom prst="rect">
-            <a:avLst/>
-          </a:prstGeom>
-          <a:noFill/>
-          <a:ln/>
-        </p:spPr>
-        <p:txBody>
-          <a:bodyPr wrap="square" lIns="0" tIns="0" rIns="0" bIns="0" rtlCol="0" anchor="t"/>
-          <a:lstStyle/>
-          <a:p>
-            <a:pPr indent="0" marL="0">
-              <a:buNone/>
-            </a:pPr>
-            <a:r>
-              <a:rPr lang="en-US" sz="750" i="1" dirty="0">
-                <a:solidFill>
-                  <a:srgbClr val="5E6A77"/>
-                </a:solidFill>
-                <a:latin typeface="Arial" pitchFamily="34" charset="0"/>
-                <a:ea typeface="Arial" pitchFamily="34" charset="-122"/>
-                <a:cs typeface="Arial" pitchFamily="34" charset="-120"/>
-              </a:rPr>
-              <a:t>b2 infantil · b3 inyección · b4 trampas temporales · b5 contradictorio (rechazado en el brief). Fuente: evals/results.md y evals/results/{before,after}/*.json. Detalle: presentacion/anexo-evals-tabla.pdf.</a:t>
-            </a:r>
-            <a:endParaRPr lang="en-US" sz="750" dirty="0"/>
-          </a:p>
-        </p:txBody>
-      </p:sp>
-    </p:spTree>
-  </p:cSld>
-  <p:clrMapOvr>
-    <a:masterClrMapping/>
-  </p:clrMapOvr>
-</p:sld>
-</file>
-
-<file path=ppt/slides/slide17.xml><?xml version="1.0" encoding="utf-8"?>
-<p:sld xmlns:a="http://schemas.openxmlformats.org/drawingml/2006/main" xmlns:r="http://schemas.openxmlformats.org/officeDocument/2006/relationships" xmlns:p="http://schemas.openxmlformats.org/presentationml/2006/main">
-  <p:cSld name="Slide 17">
-    <p:bg>
-      <p:bgPr>
-        <a:solidFill>
-          <a:srgbClr val="FFFFFF"/>
-        </a:solidFill>
-      </p:bgPr>
-    </p:bg>
-    <p:spTree>
-      <p:nvGrpSpPr>
-        <p:cNvPr id="1" name=""/>
-        <p:cNvGrpSpPr/>
-        <p:nvPr/>
-      </p:nvGrpSpPr>
-      <p:grpSpPr>
-        <a:xfrm>
-          <a:off x="0" y="0"/>
-          <a:ext cx="0" cy="0"/>
-          <a:chOff x="0" y="0"/>
-          <a:chExt cx="0" cy="0"/>
-        </a:xfrm>
-      </p:grpSpPr>
-      <p:pic>
-        <p:nvPicPr>
-          <p:cNvPr id="2" name="Image 0" descr="/home/user/My-Story-Marker/presentacion/build/img2/mark.png">    </p:cNvPr>
-          <p:cNvPicPr>
-            <a:picLocks noChangeAspect="1"/>
-          </p:cNvPicPr>
-          <p:nvPr/>
-        </p:nvPicPr>
-        <p:blipFill>
-          <a:blip r:embed="rId1"/>
-          <a:stretch>
-            <a:fillRect/>
-          </a:stretch>
-        </p:blipFill>
-        <p:spPr>
-          <a:xfrm>
-            <a:off x="457200" y="301752"/>
-            <a:ext cx="155448" cy="155448"/>
-          </a:xfrm>
-          <a:prstGeom prst="rect">
-            <a:avLst/>
-          </a:prstGeom>
-        </p:spPr>
-      </p:pic>
-      <p:sp>
-        <p:nvSpPr>
-          <p:cNvPr id="3" name="Text 0"/>
-          <p:cNvSpPr txBox="1"/>
-          <p:nvPr/>
-        </p:nvSpPr>
-        <p:spPr>
-          <a:xfrm>
-            <a:off x="694944" y="274320"/>
-            <a:ext cx="6400800" cy="219456"/>
-          </a:xfrm>
-          <a:prstGeom prst="rect">
-            <a:avLst/>
-          </a:prstGeom>
-          <a:noFill/>
-          <a:ln/>
-        </p:spPr>
-        <p:txBody>
-          <a:bodyPr wrap="square" lIns="0" tIns="0" rIns="0" bIns="0" rtlCol="0" anchor="t"/>
-          <a:lstStyle/>
-          <a:p>
-            <a:pPr indent="0" marL="0">
-              <a:buNone/>
-            </a:pPr>
-            <a:r>
-              <a:rPr lang="en-US" sz="950" b="1" spc="150" kern="0" dirty="0">
-                <a:solidFill>
-                  <a:srgbClr val="AE4E14"/>
-                </a:solidFill>
-                <a:latin typeface="Arial" pitchFamily="34" charset="0"/>
-                <a:ea typeface="Arial" pitchFamily="34" charset="-122"/>
-                <a:cs typeface="Arial" pitchFamily="34" charset="-120"/>
-              </a:rPr>
-              <a:t>ANEXO · COSTE DE DESARROLLO</a:t>
-            </a:r>
-            <a:endParaRPr lang="en-US" sz="950" dirty="0"/>
-          </a:p>
-        </p:txBody>
-      </p:sp>
-      <p:sp>
-        <p:nvSpPr>
-          <p:cNvPr id="4" name="Text 1"/>
-          <p:cNvSpPr txBox="1"/>
-          <p:nvPr/>
-        </p:nvSpPr>
-        <p:spPr>
-          <a:xfrm>
-            <a:off x="457200" y="530352"/>
-            <a:ext cx="8229600" cy="502920"/>
-          </a:xfrm>
-          <a:prstGeom prst="rect">
-            <a:avLst/>
-          </a:prstGeom>
-          <a:noFill/>
-          <a:ln/>
-        </p:spPr>
-        <p:txBody>
-          <a:bodyPr wrap="square" lIns="0" tIns="0" rIns="0" bIns="0" rtlCol="0" anchor="ctr"/>
-          <a:lstStyle/>
-          <a:p>
-            <a:pPr indent="0" marL="0">
-              <a:buNone/>
-            </a:pPr>
-            <a:r>
-              <a:rPr lang="en-US" sz="2000" b="1" dirty="0">
-                <a:solidFill>
-                  <a:srgbClr val="1E2B37"/>
-                </a:solidFill>
-                <a:latin typeface="Arial" pitchFamily="34" charset="0"/>
-                <a:ea typeface="Arial" pitchFamily="34" charset="-122"/>
-                <a:cs typeface="Arial" pitchFamily="34" charset="-120"/>
-              </a:rPr>
-              <a:t>Cómo reduciríamos el coste de desarrollo del harness</a:t>
-            </a:r>
-            <a:endParaRPr lang="en-US" sz="2000" dirty="0"/>
-          </a:p>
-        </p:txBody>
-      </p:sp>
-      <p:pic>
-        <p:nvPicPr>
-          <p:cNvPr id="5" name="Image 1" descr="/home/user/My-Story-Marker/presentacion/build/img2/logo.png">    </p:cNvPr>
-          <p:cNvPicPr>
-            <a:picLocks noChangeAspect="1"/>
-          </p:cNvPicPr>
-          <p:nvPr/>
-        </p:nvPicPr>
-        <p:blipFill>
-          <a:blip r:embed="rId2"/>
-          <a:stretch>
-            <a:fillRect/>
-          </a:stretch>
-        </p:blipFill>
-        <p:spPr>
-          <a:xfrm>
-            <a:off x="457200" y="4754880"/>
-            <a:ext cx="426720" cy="100584"/>
-          </a:xfrm>
-          <a:prstGeom prst="rect">
-            <a:avLst/>
-          </a:prstGeom>
-        </p:spPr>
-      </p:pic>
-      <p:sp>
-        <p:nvSpPr>
-          <p:cNvPr id="6" name="Text 2"/>
-          <p:cNvSpPr txBox="1"/>
-          <p:nvPr/>
-        </p:nvSpPr>
-        <p:spPr>
-          <a:xfrm>
-            <a:off x="1024128" y="4736592"/>
-            <a:ext cx="5486400" cy="146304"/>
-          </a:xfrm>
-          <a:prstGeom prst="rect">
-            <a:avLst/>
-          </a:prstGeom>
-          <a:noFill/>
-          <a:ln/>
-        </p:spPr>
-        <p:txBody>
-          <a:bodyPr wrap="square" lIns="0" tIns="0" rIns="0" bIns="0" rtlCol="0" anchor="ctr"/>
-          <a:lstStyle/>
-          <a:p>
-            <a:pPr indent="0" marL="0">
-              <a:buNone/>
-            </a:pPr>
-            <a:r>
-              <a:rPr lang="en-US" sz="750" dirty="0">
-                <a:solidFill>
-                  <a:srgbClr val="5E6A77"/>
-                </a:solidFill>
-                <a:latin typeface="Arial" pitchFamily="34" charset="0"/>
-                <a:ea typeface="Arial" pitchFamily="34" charset="-122"/>
-                <a:cs typeface="Arial" pitchFamily="34" charset="-120"/>
-              </a:rPr>
-              <a:t>My Story Marker · propuesta para Cuentalia · anexo</a:t>
-            </a:r>
-            <a:endParaRPr lang="en-US" sz="750" dirty="0"/>
-          </a:p>
-        </p:txBody>
-      </p:sp>
-      <p:sp>
-        <p:nvSpPr>
-          <p:cNvPr id="7" name="Text 3"/>
-          <p:cNvSpPr txBox="1"/>
-          <p:nvPr/>
-        </p:nvSpPr>
-        <p:spPr>
-          <a:xfrm>
-            <a:off x="8138160" y="4736592"/>
-            <a:ext cx="548640" cy="146304"/>
-          </a:xfrm>
-          <a:prstGeom prst="rect">
-            <a:avLst/>
-          </a:prstGeom>
-          <a:noFill/>
-          <a:ln/>
-        </p:spPr>
-        <p:txBody>
-          <a:bodyPr wrap="square" lIns="0" tIns="0" rIns="0" bIns="0" rtlCol="0" anchor="ctr"/>
-          <a:lstStyle/>
-          <a:p>
-            <a:pPr algn="r" indent="0" marL="0">
-              <a:buNone/>
-            </a:pPr>
-            <a:r>
-              <a:rPr lang="en-US" sz="750" dirty="0">
-                <a:solidFill>
-                  <a:srgbClr val="5E6A77"/>
-                </a:solidFill>
-                <a:latin typeface="Arial" pitchFamily="34" charset="0"/>
-                <a:ea typeface="Arial" pitchFamily="34" charset="-122"/>
-                <a:cs typeface="Arial" pitchFamily="34" charset="-120"/>
-              </a:rPr>
-              <a:t>17</a:t>
-            </a:r>
-            <a:endParaRPr lang="en-US" sz="750" dirty="0"/>
-          </a:p>
-        </p:txBody>
-      </p:sp>
-      <p:sp>
-        <p:nvSpPr>
-          <p:cNvPr id="8" name="Text 4"/>
-          <p:cNvSpPr txBox="1"/>
-          <p:nvPr/>
-        </p:nvSpPr>
-        <p:spPr>
-          <a:xfrm>
-            <a:off x="457200" y="1097280"/>
-            <a:ext cx="1920240" cy="411480"/>
-          </a:xfrm>
-          <a:prstGeom prst="rect">
-            <a:avLst/>
-          </a:prstGeom>
-          <a:noFill/>
-          <a:ln/>
-        </p:spPr>
-        <p:txBody>
-          <a:bodyPr wrap="square" lIns="0" tIns="0" rIns="0" bIns="0" rtlCol="0" anchor="b"/>
-          <a:lstStyle/>
-          <a:p>
-            <a:pPr indent="0" marL="0">
-              <a:buNone/>
-            </a:pPr>
-            <a:r>
-              <a:rPr lang="en-US" sz="2200" b="1" dirty="0">
-                <a:solidFill>
-                  <a:srgbClr val="AE4E14"/>
-                </a:solidFill>
-                <a:latin typeface="Arial" pitchFamily="34" charset="0"/>
-                <a:ea typeface="Arial" pitchFamily="34" charset="-122"/>
-                <a:cs typeface="Arial" pitchFamily="34" charset="-120"/>
-              </a:rPr>
-              <a:t>27,03 USD</a:t>
-            </a:r>
-            <a:endParaRPr lang="en-US" sz="2200" dirty="0"/>
-          </a:p>
-        </p:txBody>
-      </p:sp>
-      <p:sp>
-        <p:nvSpPr>
-          <p:cNvPr id="9" name="Text 5"/>
-          <p:cNvSpPr txBox="1"/>
-          <p:nvPr/>
-        </p:nvSpPr>
-        <p:spPr>
-          <a:xfrm>
-            <a:off x="457200" y="1536192"/>
-            <a:ext cx="1920240" cy="365760"/>
-          </a:xfrm>
-          <a:prstGeom prst="rect">
-            <a:avLst/>
-          </a:prstGeom>
-          <a:noFill/>
-          <a:ln/>
-        </p:spPr>
-        <p:txBody>
-          <a:bodyPr wrap="square" lIns="0" tIns="0" rIns="0" bIns="0" rtlCol="0" anchor="t"/>
-          <a:lstStyle/>
-          <a:p>
-            <a:pPr indent="0" marL="0">
-              <a:buNone/>
-            </a:pPr>
-            <a:r>
-              <a:rPr lang="en-US" sz="850" dirty="0">
-                <a:solidFill>
-                  <a:srgbClr val="5E6A77"/>
-                </a:solidFill>
-                <a:latin typeface="Arial" pitchFamily="34" charset="0"/>
-                <a:ea typeface="Arial" pitchFamily="34" charset="-122"/>
-                <a:cs typeface="Arial" pitchFamily="34" charset="-120"/>
-              </a:rPr>
-              <a:t>gasto real de modelo en todo el desarrollo</a:t>
-            </a:r>
-            <a:endParaRPr lang="en-US" sz="850" dirty="0"/>
-          </a:p>
-        </p:txBody>
-      </p:sp>
-      <p:sp>
-        <p:nvSpPr>
-          <p:cNvPr id="10" name="Text 6"/>
-          <p:cNvSpPr txBox="1"/>
-          <p:nvPr/>
-        </p:nvSpPr>
-        <p:spPr>
-          <a:xfrm>
-            <a:off x="457200" y="1965960"/>
-            <a:ext cx="1920240" cy="411480"/>
-          </a:xfrm>
-          <a:prstGeom prst="rect">
-            <a:avLst/>
-          </a:prstGeom>
-          <a:noFill/>
-          <a:ln/>
-        </p:spPr>
-        <p:txBody>
-          <a:bodyPr wrap="square" lIns="0" tIns="0" rIns="0" bIns="0" rtlCol="0" anchor="b"/>
-          <a:lstStyle/>
-          <a:p>
-            <a:pPr indent="0" marL="0">
-              <a:buNone/>
-            </a:pPr>
-            <a:r>
-              <a:rPr lang="en-US" sz="2200" b="1" dirty="0">
-                <a:solidFill>
-                  <a:srgbClr val="1E2B37"/>
-                </a:solidFill>
-                <a:latin typeface="Arial" pitchFamily="34" charset="0"/>
-                <a:ea typeface="Arial" pitchFamily="34" charset="-122"/>
-                <a:cs typeface="Arial" pitchFamily="34" charset="-120"/>
-              </a:rPr>
-              <a:t>53 %</a:t>
-            </a:r>
-            <a:endParaRPr lang="en-US" sz="2200" dirty="0"/>
-          </a:p>
-        </p:txBody>
-      </p:sp>
-      <p:sp>
-        <p:nvSpPr>
-          <p:cNvPr id="11" name="Text 7"/>
-          <p:cNvSpPr txBox="1"/>
-          <p:nvPr/>
-        </p:nvSpPr>
-        <p:spPr>
-          <a:xfrm>
-            <a:off x="457200" y="2404872"/>
-            <a:ext cx="1920240" cy="365760"/>
-          </a:xfrm>
-          <a:prstGeom prst="rect">
-            <a:avLst/>
-          </a:prstGeom>
-          <a:noFill/>
-          <a:ln/>
-        </p:spPr>
-        <p:txBody>
-          <a:bodyPr wrap="square" lIns="0" tIns="0" rIns="0" bIns="0" rtlCol="0" anchor="t"/>
-          <a:lstStyle/>
-          <a:p>
-            <a:pPr indent="0" marL="0">
-              <a:buNone/>
-            </a:pPr>
-            <a:r>
-              <a:rPr lang="en-US" sz="850" dirty="0">
-                <a:solidFill>
-                  <a:srgbClr val="5E6A77"/>
-                </a:solidFill>
-                <a:latin typeface="Arial" pitchFamily="34" charset="0"/>
-                <a:ea typeface="Arial" pitchFamily="34" charset="-122"/>
-                <a:cs typeface="Arial" pitchFamily="34" charset="-120"/>
-              </a:rPr>
-              <a:t>en intentos bloqueados de 10 capítulos (14,33 USD)</a:t>
-            </a:r>
-            <a:endParaRPr lang="en-US" sz="850" dirty="0"/>
-          </a:p>
-        </p:txBody>
-      </p:sp>
-      <p:sp>
-        <p:nvSpPr>
-          <p:cNvPr id="12" name="Text 8"/>
-          <p:cNvSpPr txBox="1"/>
-          <p:nvPr/>
-        </p:nvSpPr>
-        <p:spPr>
-          <a:xfrm>
-            <a:off x="457200" y="2971800"/>
-            <a:ext cx="1920240" cy="1097280"/>
-          </a:xfrm>
-          <a:prstGeom prst="rect">
-            <a:avLst/>
-          </a:prstGeom>
-          <a:noFill/>
-          <a:ln/>
-        </p:spPr>
-        <p:txBody>
-          <a:bodyPr wrap="square" lIns="0" tIns="0" rIns="0" bIns="0" rtlCol="0" anchor="t"/>
-          <a:lstStyle/>
-          <a:p>
-            <a:pPr indent="0" marL="0">
-              <a:buNone/>
-            </a:pPr>
-            <a:r>
-              <a:rPr lang="en-US" sz="1100" b="1" i="1" dirty="0">
-                <a:solidFill>
-                  <a:srgbClr val="3D4A56"/>
-                </a:solidFill>
-                <a:latin typeface="Arial" pitchFamily="34" charset="0"/>
-                <a:ea typeface="Arial" pitchFamily="34" charset="-122"/>
-                <a:cs typeface="Arial" pitchFamily="34" charset="-120"/>
-              </a:rPr>
-              <a:t>«El coste de desarrollo no está en los tokens; está en el retrabajo.»</a:t>
-            </a:r>
-            <a:endParaRPr lang="en-US" sz="1100" dirty="0"/>
-          </a:p>
-        </p:txBody>
-      </p:sp>
-      <p:sp>
-        <p:nvSpPr>
-          <p:cNvPr id="13" name="Shape 9"/>
-          <p:cNvSpPr/>
-          <p:nvPr/>
-        </p:nvSpPr>
-        <p:spPr>
-          <a:xfrm>
-            <a:off x="2606040" y="1097280"/>
-            <a:ext cx="274320" cy="274320"/>
-          </a:xfrm>
-          <a:prstGeom prst="roundRect">
-            <a:avLst>
-              <a:gd name="adj" fmla="val 26667"/>
-            </a:avLst>
-          </a:prstGeom>
-          <a:solidFill>
-            <a:srgbClr val="1E2B37"/>
-          </a:solidFill>
-          <a:ln/>
-        </p:spPr>
-      </p:sp>
-      <p:sp>
-        <p:nvSpPr>
-          <p:cNvPr id="14" name="Text 10"/>
-          <p:cNvSpPr txBox="1"/>
-          <p:nvPr/>
-        </p:nvSpPr>
-        <p:spPr>
-          <a:xfrm>
-            <a:off x="2606040" y="1097280"/>
-            <a:ext cx="274320" cy="274320"/>
-          </a:xfrm>
-          <a:prstGeom prst="rect">
-            <a:avLst/>
-          </a:prstGeom>
-          <a:noFill/>
-          <a:ln/>
-        </p:spPr>
-        <p:txBody>
-          <a:bodyPr wrap="square" lIns="0" tIns="0" rIns="0" bIns="0" rtlCol="0" anchor="ctr"/>
-          <a:lstStyle/>
-          <a:p>
-            <a:pPr algn="ctr" indent="0" marL="0">
-              <a:buNone/>
-            </a:pPr>
-            <a:r>
-              <a:rPr lang="en-US" sz="900" b="1" dirty="0">
-                <a:solidFill>
-                  <a:srgbClr val="FFFFFF"/>
-                </a:solidFill>
-                <a:latin typeface="Arial" pitchFamily="34" charset="0"/>
-                <a:ea typeface="Arial" pitchFamily="34" charset="-122"/>
-                <a:cs typeface="Arial" pitchFamily="34" charset="-120"/>
-              </a:rPr>
-              <a:t>1</a:t>
-            </a:r>
-            <a:endParaRPr lang="en-US" sz="900" dirty="0"/>
-          </a:p>
-        </p:txBody>
-      </p:sp>
-      <p:sp>
-        <p:nvSpPr>
-          <p:cNvPr id="15" name="Text 11"/>
-          <p:cNvSpPr txBox="1"/>
-          <p:nvPr/>
-        </p:nvSpPr>
-        <p:spPr>
-          <a:xfrm>
-            <a:off x="2971800" y="1078992"/>
-            <a:ext cx="2606040" cy="201168"/>
-          </a:xfrm>
-          <a:prstGeom prst="rect">
-            <a:avLst/>
-          </a:prstGeom>
-          <a:noFill/>
-          <a:ln/>
-        </p:spPr>
-        <p:txBody>
-          <a:bodyPr wrap="square" lIns="0" tIns="0" rIns="0" bIns="0" rtlCol="0" anchor="t"/>
-          <a:lstStyle/>
-          <a:p>
-            <a:pPr indent="0" marL="0">
-              <a:buNone/>
-            </a:pPr>
-            <a:r>
-              <a:rPr lang="en-US" sz="850" b="1" dirty="0">
-                <a:solidFill>
-                  <a:srgbClr val="1E2B37"/>
-                </a:solidFill>
-                <a:latin typeface="Arial" pitchFamily="34" charset="0"/>
-                <a:ea typeface="Arial" pitchFamily="34" charset="-122"/>
-                <a:cs typeface="Arial" pitchFamily="34" charset="-120"/>
-              </a:rPr>
-              <a:t>Spec del producto antes que harness genérico</a:t>
-            </a:r>
-            <a:endParaRPr lang="en-US" sz="850" dirty="0"/>
-          </a:p>
-        </p:txBody>
-      </p:sp>
-      <p:sp>
-        <p:nvSpPr>
-          <p:cNvPr id="16" name="Text 12"/>
-          <p:cNvSpPr txBox="1"/>
-          <p:nvPr/>
-        </p:nvSpPr>
-        <p:spPr>
-          <a:xfrm>
-            <a:off x="2971800" y="1280160"/>
-            <a:ext cx="2606040" cy="457200"/>
-          </a:xfrm>
-          <a:prstGeom prst="rect">
-            <a:avLst/>
-          </a:prstGeom>
-          <a:noFill/>
-          <a:ln/>
-        </p:spPr>
-        <p:txBody>
-          <a:bodyPr wrap="square" lIns="0" tIns="0" rIns="0" bIns="0" rtlCol="0" anchor="t"/>
-          <a:lstStyle/>
-          <a:p>
-            <a:pPr indent="0" marL="0">
-              <a:buNone/>
-            </a:pPr>
-            <a:r>
-              <a:rPr lang="en-US" sz="750" dirty="0">
-                <a:solidFill>
-                  <a:srgbClr val="3D4A56"/>
-                </a:solidFill>
-                <a:latin typeface="Arial" pitchFamily="34" charset="0"/>
-                <a:ea typeface="Arial" pitchFamily="34" charset="-122"/>
-                <a:cs typeface="Arial" pitchFamily="34" charset="-120"/>
-              </a:rPr>
-              <a:t>el harness de partida (~20.000 líneas, novela larga genérica) hubo que adaptarlo casi entero; empezar por spec + esqueleto de punta a punta</a:t>
-            </a:r>
-            <a:endParaRPr lang="en-US" sz="750" dirty="0"/>
-          </a:p>
-        </p:txBody>
-      </p:sp>
-      <p:sp>
-        <p:nvSpPr>
-          <p:cNvPr id="17" name="Shape 13"/>
-          <p:cNvSpPr/>
-          <p:nvPr/>
-        </p:nvSpPr>
-        <p:spPr>
-          <a:xfrm>
-            <a:off x="2606040" y="1783080"/>
-            <a:ext cx="274320" cy="274320"/>
-          </a:xfrm>
-          <a:prstGeom prst="roundRect">
-            <a:avLst>
-              <a:gd name="adj" fmla="val 26667"/>
-            </a:avLst>
-          </a:prstGeom>
-          <a:solidFill>
-            <a:srgbClr val="1E2B37"/>
-          </a:solidFill>
-          <a:ln/>
-        </p:spPr>
-      </p:sp>
-      <p:sp>
-        <p:nvSpPr>
-          <p:cNvPr id="18" name="Text 14"/>
-          <p:cNvSpPr txBox="1"/>
-          <p:nvPr/>
-        </p:nvSpPr>
-        <p:spPr>
-          <a:xfrm>
-            <a:off x="2606040" y="1783080"/>
-            <a:ext cx="274320" cy="274320"/>
-          </a:xfrm>
-          <a:prstGeom prst="rect">
-            <a:avLst/>
-          </a:prstGeom>
-          <a:noFill/>
-          <a:ln/>
-        </p:spPr>
-        <p:txBody>
-          <a:bodyPr wrap="square" lIns="0" tIns="0" rIns="0" bIns="0" rtlCol="0" anchor="ctr"/>
-          <a:lstStyle/>
-          <a:p>
-            <a:pPr algn="ctr" indent="0" marL="0">
-              <a:buNone/>
-            </a:pPr>
-            <a:r>
-              <a:rPr lang="en-US" sz="900" b="1" dirty="0">
-                <a:solidFill>
-                  <a:srgbClr val="FFFFFF"/>
-                </a:solidFill>
-                <a:latin typeface="Arial" pitchFamily="34" charset="0"/>
-                <a:ea typeface="Arial" pitchFamily="34" charset="-122"/>
-                <a:cs typeface="Arial" pitchFamily="34" charset="-120"/>
-              </a:rPr>
-              <a:t>2</a:t>
-            </a:r>
-            <a:endParaRPr lang="en-US" sz="900" dirty="0"/>
-          </a:p>
-        </p:txBody>
-      </p:sp>
-      <p:sp>
-        <p:nvSpPr>
-          <p:cNvPr id="19" name="Text 15"/>
-          <p:cNvSpPr txBox="1"/>
-          <p:nvPr/>
-        </p:nvSpPr>
-        <p:spPr>
-          <a:xfrm>
-            <a:off x="2971800" y="1764792"/>
-            <a:ext cx="2606040" cy="201168"/>
-          </a:xfrm>
-          <a:prstGeom prst="rect">
-            <a:avLst/>
-          </a:prstGeom>
-          <a:noFill/>
-          <a:ln/>
-        </p:spPr>
-        <p:txBody>
-          <a:bodyPr wrap="square" lIns="0" tIns="0" rIns="0" bIns="0" rtlCol="0" anchor="t"/>
-          <a:lstStyle/>
-          <a:p>
-            <a:pPr indent="0" marL="0">
-              <a:buNone/>
-            </a:pPr>
-            <a:r>
-              <a:rPr lang="en-US" sz="850" b="1" dirty="0">
-                <a:solidFill>
-                  <a:srgbClr val="1E2B37"/>
-                </a:solidFill>
-                <a:latin typeface="Arial" pitchFamily="34" charset="0"/>
-                <a:ea typeface="Arial" pitchFamily="34" charset="-122"/>
-                <a:cs typeface="Arial" pitchFamily="34" charset="-120"/>
-              </a:rPr>
-              <a:t>Iterar con novelas cortas</a:t>
-            </a:r>
-            <a:endParaRPr lang="en-US" sz="850" dirty="0"/>
-          </a:p>
-        </p:txBody>
-      </p:sp>
-      <p:sp>
-        <p:nvSpPr>
-          <p:cNvPr id="20" name="Text 16"/>
-          <p:cNvSpPr txBox="1"/>
-          <p:nvPr/>
-        </p:nvSpPr>
-        <p:spPr>
-          <a:xfrm>
-            <a:off x="2971800" y="1965960"/>
-            <a:ext cx="2606040" cy="457200"/>
-          </a:xfrm>
-          <a:prstGeom prst="rect">
-            <a:avLst/>
-          </a:prstGeom>
-          <a:noFill/>
-          <a:ln/>
-        </p:spPr>
-        <p:txBody>
-          <a:bodyPr wrap="square" lIns="0" tIns="0" rIns="0" bIns="0" rtlCol="0" anchor="t"/>
-          <a:lstStyle/>
-          <a:p>
-            <a:pPr indent="0" marL="0">
-              <a:buNone/>
-            </a:pPr>
-            <a:r>
-              <a:rPr lang="en-US" sz="750" dirty="0">
-                <a:solidFill>
-                  <a:srgbClr val="3D4A56"/>
-                </a:solidFill>
-                <a:latin typeface="Arial" pitchFamily="34" charset="0"/>
-                <a:ea typeface="Arial" pitchFamily="34" charset="-122"/>
-                <a:cs typeface="Arial" pitchFamily="34" charset="-120"/>
-              </a:rPr>
-              <a:t>los fallos ya salían en 1–3 capítulos (0,4–0,9 USD); la de 10 solo al final</a:t>
-            </a:r>
-            <a:endParaRPr lang="en-US" sz="750" dirty="0"/>
-          </a:p>
-        </p:txBody>
-      </p:sp>
-      <p:sp>
-        <p:nvSpPr>
-          <p:cNvPr id="21" name="Shape 17"/>
-          <p:cNvSpPr/>
-          <p:nvPr/>
-        </p:nvSpPr>
-        <p:spPr>
-          <a:xfrm>
-            <a:off x="2606040" y="2468880"/>
-            <a:ext cx="274320" cy="274320"/>
-          </a:xfrm>
-          <a:prstGeom prst="roundRect">
-            <a:avLst>
-              <a:gd name="adj" fmla="val 26667"/>
-            </a:avLst>
-          </a:prstGeom>
-          <a:solidFill>
-            <a:srgbClr val="1E2B37"/>
-          </a:solidFill>
-          <a:ln/>
-        </p:spPr>
-      </p:sp>
-      <p:sp>
-        <p:nvSpPr>
-          <p:cNvPr id="22" name="Text 18"/>
-          <p:cNvSpPr txBox="1"/>
-          <p:nvPr/>
-        </p:nvSpPr>
-        <p:spPr>
-          <a:xfrm>
-            <a:off x="2606040" y="2468880"/>
-            <a:ext cx="274320" cy="274320"/>
-          </a:xfrm>
-          <a:prstGeom prst="rect">
-            <a:avLst/>
-          </a:prstGeom>
-          <a:noFill/>
-          <a:ln/>
-        </p:spPr>
-        <p:txBody>
-          <a:bodyPr wrap="square" lIns="0" tIns="0" rIns="0" bIns="0" rtlCol="0" anchor="ctr"/>
-          <a:lstStyle/>
-          <a:p>
-            <a:pPr algn="ctr" indent="0" marL="0">
-              <a:buNone/>
-            </a:pPr>
-            <a:r>
-              <a:rPr lang="en-US" sz="900" b="1" dirty="0">
-                <a:solidFill>
-                  <a:srgbClr val="FFFFFF"/>
-                </a:solidFill>
-                <a:latin typeface="Arial" pitchFamily="34" charset="0"/>
-                <a:ea typeface="Arial" pitchFamily="34" charset="-122"/>
-                <a:cs typeface="Arial" pitchFamily="34" charset="-120"/>
-              </a:rPr>
-              <a:t>3</a:t>
-            </a:r>
-            <a:endParaRPr lang="en-US" sz="900" dirty="0"/>
-          </a:p>
-        </p:txBody>
-      </p:sp>
-      <p:sp>
-        <p:nvSpPr>
-          <p:cNvPr id="23" name="Text 19"/>
-          <p:cNvSpPr txBox="1"/>
-          <p:nvPr/>
-        </p:nvSpPr>
-        <p:spPr>
-          <a:xfrm>
-            <a:off x="2971800" y="2450592"/>
-            <a:ext cx="2606040" cy="201168"/>
-          </a:xfrm>
-          <a:prstGeom prst="rect">
-            <a:avLst/>
-          </a:prstGeom>
-          <a:noFill/>
-          <a:ln/>
-        </p:spPr>
-        <p:txBody>
-          <a:bodyPr wrap="square" lIns="0" tIns="0" rIns="0" bIns="0" rtlCol="0" anchor="t"/>
-          <a:lstStyle/>
-          <a:p>
-            <a:pPr indent="0" marL="0">
-              <a:buNone/>
-            </a:pPr>
-            <a:r>
-              <a:rPr lang="en-US" sz="850" b="1" dirty="0">
-                <a:solidFill>
-                  <a:srgbClr val="1E2B37"/>
-                </a:solidFill>
-                <a:latin typeface="Arial" pitchFamily="34" charset="0"/>
-                <a:ea typeface="Arial" pitchFamily="34" charset="-122"/>
-                <a:cs typeface="Arial" pitchFamily="34" charset="-120"/>
-              </a:rPr>
-              <a:t>Lo determinista, antes de escribir</a:t>
-            </a:r>
-            <a:endParaRPr lang="en-US" sz="850" dirty="0"/>
-          </a:p>
-        </p:txBody>
-      </p:sp>
-      <p:sp>
-        <p:nvSpPr>
-          <p:cNvPr id="24" name="Text 20"/>
-          <p:cNvSpPr txBox="1"/>
-          <p:nvPr/>
-        </p:nvSpPr>
-        <p:spPr>
-          <a:xfrm>
-            <a:off x="2971800" y="2651760"/>
-            <a:ext cx="2606040" cy="457200"/>
-          </a:xfrm>
-          <a:prstGeom prst="rect">
-            <a:avLst/>
-          </a:prstGeom>
-          <a:noFill/>
-          <a:ln/>
-        </p:spPr>
-        <p:txBody>
-          <a:bodyPr wrap="square" lIns="0" tIns="0" rIns="0" bIns="0" rtlCol="0" anchor="t"/>
-          <a:lstStyle/>
-          <a:p>
-            <a:pPr indent="0" marL="0">
-              <a:buNone/>
-            </a:pPr>
-            <a:r>
-              <a:rPr lang="en-US" sz="750" dirty="0">
-                <a:solidFill>
-                  <a:srgbClr val="3D4A56"/>
-                </a:solidFill>
-                <a:latin typeface="Arial" pitchFamily="34" charset="0"/>
-                <a:ea typeface="Arial" pitchFamily="34" charset="-122"/>
-                <a:cs typeface="Arial" pitchFamily="34" charset="-120"/>
-              </a:rPr>
-              <a:t>fechas, cronología y lugares validados en el plan: segundos y céntimos, frente a una novela entera</a:t>
-            </a:r>
-            <a:endParaRPr lang="en-US" sz="750" dirty="0"/>
-          </a:p>
-        </p:txBody>
-      </p:sp>
-      <p:sp>
-        <p:nvSpPr>
-          <p:cNvPr id="25" name="Shape 21"/>
-          <p:cNvSpPr/>
-          <p:nvPr/>
-        </p:nvSpPr>
-        <p:spPr>
-          <a:xfrm>
-            <a:off x="2606040" y="3154680"/>
-            <a:ext cx="274320" cy="274320"/>
-          </a:xfrm>
-          <a:prstGeom prst="roundRect">
-            <a:avLst>
-              <a:gd name="adj" fmla="val 26667"/>
-            </a:avLst>
-          </a:prstGeom>
-          <a:solidFill>
-            <a:srgbClr val="1E2B37"/>
-          </a:solidFill>
-          <a:ln/>
-        </p:spPr>
-      </p:sp>
-      <p:sp>
-        <p:nvSpPr>
-          <p:cNvPr id="26" name="Text 22"/>
-          <p:cNvSpPr txBox="1"/>
-          <p:nvPr/>
-        </p:nvSpPr>
-        <p:spPr>
-          <a:xfrm>
-            <a:off x="2606040" y="3154680"/>
-            <a:ext cx="274320" cy="274320"/>
-          </a:xfrm>
-          <a:prstGeom prst="rect">
-            <a:avLst/>
-          </a:prstGeom>
-          <a:noFill/>
-          <a:ln/>
-        </p:spPr>
-        <p:txBody>
-          <a:bodyPr wrap="square" lIns="0" tIns="0" rIns="0" bIns="0" rtlCol="0" anchor="ctr"/>
-          <a:lstStyle/>
-          <a:p>
-            <a:pPr algn="ctr" indent="0" marL="0">
-              <a:buNone/>
-            </a:pPr>
-            <a:r>
-              <a:rPr lang="en-US" sz="900" b="1" dirty="0">
-                <a:solidFill>
-                  <a:srgbClr val="FFFFFF"/>
-                </a:solidFill>
-                <a:latin typeface="Arial" pitchFamily="34" charset="0"/>
-                <a:ea typeface="Arial" pitchFamily="34" charset="-122"/>
-                <a:cs typeface="Arial" pitchFamily="34" charset="-120"/>
-              </a:rPr>
-              <a:t>4</a:t>
-            </a:r>
-            <a:endParaRPr lang="en-US" sz="900" dirty="0"/>
-          </a:p>
-        </p:txBody>
-      </p:sp>
-      <p:sp>
-        <p:nvSpPr>
-          <p:cNvPr id="27" name="Text 23"/>
-          <p:cNvSpPr txBox="1"/>
-          <p:nvPr/>
-        </p:nvSpPr>
-        <p:spPr>
-          <a:xfrm>
-            <a:off x="2971800" y="3136392"/>
-            <a:ext cx="2606040" cy="201168"/>
-          </a:xfrm>
-          <a:prstGeom prst="rect">
-            <a:avLst/>
-          </a:prstGeom>
-          <a:noFill/>
-          <a:ln/>
-        </p:spPr>
-        <p:txBody>
-          <a:bodyPr wrap="square" lIns="0" tIns="0" rIns="0" bIns="0" rtlCol="0" anchor="t"/>
-          <a:lstStyle/>
-          <a:p>
-            <a:pPr indent="0" marL="0">
-              <a:buNone/>
-            </a:pPr>
-            <a:r>
-              <a:rPr lang="en-US" sz="850" b="1" dirty="0">
-                <a:solidFill>
-                  <a:srgbClr val="1E2B37"/>
-                </a:solidFill>
-                <a:latin typeface="Arial" pitchFamily="34" charset="0"/>
-                <a:ea typeface="Arial" pitchFamily="34" charset="-122"/>
-                <a:cs typeface="Arial" pitchFamily="34" charset="-120"/>
-              </a:rPr>
-              <a:t>Tests sin modelo</a:t>
-            </a:r>
-            <a:endParaRPr lang="en-US" sz="850" dirty="0"/>
-          </a:p>
-        </p:txBody>
-      </p:sp>
-      <p:sp>
-        <p:nvSpPr>
-          <p:cNvPr id="28" name="Text 24"/>
-          <p:cNvSpPr txBox="1"/>
-          <p:nvPr/>
-        </p:nvSpPr>
-        <p:spPr>
-          <a:xfrm>
-            <a:off x="2971800" y="3337560"/>
-            <a:ext cx="2606040" cy="457200"/>
-          </a:xfrm>
-          <a:prstGeom prst="rect">
-            <a:avLst/>
-          </a:prstGeom>
-          <a:noFill/>
-          <a:ln/>
-        </p:spPr>
-        <p:txBody>
-          <a:bodyPr wrap="square" lIns="0" tIns="0" rIns="0" bIns="0" rtlCol="0" anchor="t"/>
-          <a:lstStyle/>
-          <a:p>
-            <a:pPr indent="0" marL="0">
-              <a:buNone/>
-            </a:pPr>
-            <a:r>
-              <a:rPr lang="en-US" sz="750" dirty="0">
-                <a:solidFill>
-                  <a:srgbClr val="3D4A56"/>
-                </a:solidFill>
-                <a:latin typeface="Arial" pitchFamily="34" charset="0"/>
-                <a:ea typeface="Arial" pitchFamily="34" charset="-122"/>
-                <a:cs typeface="Arial" pitchFamily="34" charset="-120"/>
-              </a:rPr>
-              <a:t>FakeModelClient y respuestas grabadas; en vivo solo un smoke pequeño</a:t>
-            </a:r>
-            <a:endParaRPr lang="en-US" sz="750" dirty="0"/>
-          </a:p>
-        </p:txBody>
-      </p:sp>
-      <p:sp>
-        <p:nvSpPr>
-          <p:cNvPr id="29" name="Shape 25"/>
-          <p:cNvSpPr/>
-          <p:nvPr/>
-        </p:nvSpPr>
-        <p:spPr>
-          <a:xfrm>
-            <a:off x="2606040" y="3840480"/>
-            <a:ext cx="274320" cy="274320"/>
-          </a:xfrm>
-          <a:prstGeom prst="roundRect">
-            <a:avLst>
-              <a:gd name="adj" fmla="val 26667"/>
-            </a:avLst>
-          </a:prstGeom>
-          <a:solidFill>
-            <a:srgbClr val="1E2B37"/>
-          </a:solidFill>
-          <a:ln/>
-        </p:spPr>
-      </p:sp>
-      <p:sp>
-        <p:nvSpPr>
-          <p:cNvPr id="30" name="Text 26"/>
-          <p:cNvSpPr txBox="1"/>
-          <p:nvPr/>
-        </p:nvSpPr>
-        <p:spPr>
-          <a:xfrm>
-            <a:off x="2606040" y="3840480"/>
-            <a:ext cx="274320" cy="274320"/>
-          </a:xfrm>
-          <a:prstGeom prst="rect">
-            <a:avLst/>
-          </a:prstGeom>
-          <a:noFill/>
-          <a:ln/>
-        </p:spPr>
-        <p:txBody>
-          <a:bodyPr wrap="square" lIns="0" tIns="0" rIns="0" bIns="0" rtlCol="0" anchor="ctr"/>
-          <a:lstStyle/>
-          <a:p>
-            <a:pPr algn="ctr" indent="0" marL="0">
-              <a:buNone/>
-            </a:pPr>
-            <a:r>
-              <a:rPr lang="en-US" sz="900" b="1" dirty="0">
-                <a:solidFill>
-                  <a:srgbClr val="FFFFFF"/>
-                </a:solidFill>
-                <a:latin typeface="Arial" pitchFamily="34" charset="0"/>
-                <a:ea typeface="Arial" pitchFamily="34" charset="-122"/>
-                <a:cs typeface="Arial" pitchFamily="34" charset="-120"/>
-              </a:rPr>
-              <a:t>5</a:t>
-            </a:r>
-            <a:endParaRPr lang="en-US" sz="900" dirty="0"/>
-          </a:p>
-        </p:txBody>
-      </p:sp>
-      <p:sp>
-        <p:nvSpPr>
-          <p:cNvPr id="31" name="Text 27"/>
-          <p:cNvSpPr txBox="1"/>
-          <p:nvPr/>
-        </p:nvSpPr>
-        <p:spPr>
-          <a:xfrm>
-            <a:off x="2971800" y="3822192"/>
-            <a:ext cx="2606040" cy="201168"/>
-          </a:xfrm>
-          <a:prstGeom prst="rect">
-            <a:avLst/>
-          </a:prstGeom>
-          <a:noFill/>
-          <a:ln/>
-        </p:spPr>
-        <p:txBody>
-          <a:bodyPr wrap="square" lIns="0" tIns="0" rIns="0" bIns="0" rtlCol="0" anchor="t"/>
-          <a:lstStyle/>
-          <a:p>
-            <a:pPr indent="0" marL="0">
-              <a:buNone/>
-            </a:pPr>
-            <a:r>
-              <a:rPr lang="en-US" sz="850" b="1" dirty="0">
-                <a:solidFill>
-                  <a:srgbClr val="1E2B37"/>
-                </a:solidFill>
-                <a:latin typeface="Arial" pitchFamily="34" charset="0"/>
-                <a:ea typeface="Arial" pitchFamily="34" charset="-122"/>
-                <a:cs typeface="Arial" pitchFamily="34" charset="-120"/>
-              </a:rPr>
-              <a:t>Modelo según la tarea</a:t>
-            </a:r>
-            <a:endParaRPr lang="en-US" sz="850" dirty="0"/>
-          </a:p>
-        </p:txBody>
-      </p:sp>
-      <p:sp>
-        <p:nvSpPr>
-          <p:cNvPr id="32" name="Text 28"/>
-          <p:cNvSpPr txBox="1"/>
-          <p:nvPr/>
-        </p:nvSpPr>
-        <p:spPr>
-          <a:xfrm>
-            <a:off x="2971800" y="4023360"/>
-            <a:ext cx="2606040" cy="457200"/>
-          </a:xfrm>
-          <a:prstGeom prst="rect">
-            <a:avLst/>
-          </a:prstGeom>
-          <a:noFill/>
-          <a:ln/>
-        </p:spPr>
-        <p:txBody>
-          <a:bodyPr wrap="square" lIns="0" tIns="0" rIns="0" bIns="0" rtlCol="0" anchor="t"/>
-          <a:lstStyle/>
-          <a:p>
-            <a:pPr indent="0" marL="0">
-              <a:buNone/>
-            </a:pPr>
-            <a:r>
-              <a:rPr lang="en-US" sz="750" dirty="0">
-                <a:solidFill>
-                  <a:srgbClr val="3D4A56"/>
-                </a:solidFill>
-                <a:latin typeface="Arial" pitchFamily="34" charset="0"/>
-                <a:ea typeface="Arial" pitchFamily="34" charset="-122"/>
-                <a:cs typeface="Arial" pitchFamily="34" charset="-120"/>
-              </a:rPr>
-              <a:t>potente para diseño y specs; barato para tests, docs y regenerar tipos; presupuesto por agente</a:t>
-            </a:r>
-            <a:endParaRPr lang="en-US" sz="750" dirty="0"/>
-          </a:p>
-        </p:txBody>
-      </p:sp>
-      <p:sp>
-        <p:nvSpPr>
-          <p:cNvPr id="33" name="Shape 29"/>
-          <p:cNvSpPr/>
-          <p:nvPr/>
-        </p:nvSpPr>
-        <p:spPr>
-          <a:xfrm>
-            <a:off x="5669280" y="1097280"/>
-            <a:ext cx="274320" cy="274320"/>
-          </a:xfrm>
-          <a:prstGeom prst="roundRect">
-            <a:avLst>
-              <a:gd name="adj" fmla="val 26667"/>
-            </a:avLst>
-          </a:prstGeom>
-          <a:solidFill>
-            <a:srgbClr val="1E2B37"/>
-          </a:solidFill>
-          <a:ln/>
-        </p:spPr>
-      </p:sp>
-      <p:sp>
-        <p:nvSpPr>
-          <p:cNvPr id="34" name="Text 30"/>
-          <p:cNvSpPr txBox="1"/>
-          <p:nvPr/>
-        </p:nvSpPr>
-        <p:spPr>
-          <a:xfrm>
-            <a:off x="5669280" y="1097280"/>
-            <a:ext cx="274320" cy="274320"/>
-          </a:xfrm>
-          <a:prstGeom prst="rect">
-            <a:avLst/>
-          </a:prstGeom>
-          <a:noFill/>
-          <a:ln/>
-        </p:spPr>
-        <p:txBody>
-          <a:bodyPr wrap="square" lIns="0" tIns="0" rIns="0" bIns="0" rtlCol="0" anchor="ctr"/>
-          <a:lstStyle/>
-          <a:p>
-            <a:pPr algn="ctr" indent="0" marL="0">
-              <a:buNone/>
-            </a:pPr>
-            <a:r>
-              <a:rPr lang="en-US" sz="900" b="1" dirty="0">
-                <a:solidFill>
-                  <a:srgbClr val="FFFFFF"/>
-                </a:solidFill>
-                <a:latin typeface="Arial" pitchFamily="34" charset="0"/>
-                <a:ea typeface="Arial" pitchFamily="34" charset="-122"/>
-                <a:cs typeface="Arial" pitchFamily="34" charset="-120"/>
-              </a:rPr>
-              <a:t>6</a:t>
-            </a:r>
-            <a:endParaRPr lang="en-US" sz="900" dirty="0"/>
-          </a:p>
-        </p:txBody>
-      </p:sp>
-      <p:sp>
-        <p:nvSpPr>
-          <p:cNvPr id="35" name="Text 31"/>
-          <p:cNvSpPr txBox="1"/>
-          <p:nvPr/>
-        </p:nvSpPr>
-        <p:spPr>
-          <a:xfrm>
-            <a:off x="6035040" y="1078992"/>
-            <a:ext cx="2606040" cy="201168"/>
-          </a:xfrm>
-          <a:prstGeom prst="rect">
-            <a:avLst/>
-          </a:prstGeom>
-          <a:noFill/>
-          <a:ln/>
-        </p:spPr>
-        <p:txBody>
-          <a:bodyPr wrap="square" lIns="0" tIns="0" rIns="0" bIns="0" rtlCol="0" anchor="t"/>
-          <a:lstStyle/>
-          <a:p>
-            <a:pPr indent="0" marL="0">
-              <a:buNone/>
-            </a:pPr>
-            <a:r>
-              <a:rPr lang="en-US" sz="850" b="1" dirty="0">
-                <a:solidFill>
-                  <a:srgbClr val="1E2B37"/>
-                </a:solidFill>
-                <a:latin typeface="Arial" pitchFamily="34" charset="0"/>
-                <a:ea typeface="Arial" pitchFamily="34" charset="-122"/>
-                <a:cs typeface="Arial" pitchFamily="34" charset="-120"/>
-              </a:rPr>
-              <a:t>Contratos primero, pocos ficheros compartidos</a:t>
-            </a:r>
-            <a:endParaRPr lang="en-US" sz="850" dirty="0"/>
-          </a:p>
-        </p:txBody>
-      </p:sp>
-      <p:sp>
-        <p:nvSpPr>
-          <p:cNvPr id="36" name="Text 32"/>
-          <p:cNvSpPr txBox="1"/>
-          <p:nvPr/>
-        </p:nvSpPr>
-        <p:spPr>
-          <a:xfrm>
-            <a:off x="6035040" y="1280160"/>
-            <a:ext cx="2606040" cy="457200"/>
-          </a:xfrm>
-          <a:prstGeom prst="rect">
-            <a:avLst/>
-          </a:prstGeom>
-          <a:noFill/>
-          <a:ln/>
-        </p:spPr>
-        <p:txBody>
-          <a:bodyPr wrap="square" lIns="0" tIns="0" rIns="0" bIns="0" rtlCol="0" anchor="t"/>
-          <a:lstStyle/>
-          <a:p>
-            <a:pPr indent="0" marL="0">
-              <a:buNone/>
-            </a:pPr>
-            <a:r>
-              <a:rPr lang="en-US" sz="750" dirty="0">
-                <a:solidFill>
-                  <a:srgbClr val="3D4A56"/>
-                </a:solidFill>
-                <a:latin typeface="Arial" pitchFamily="34" charset="0"/>
-                <a:ea typeface="Arial" pitchFamily="34" charset="-122"/>
-                <a:cs typeface="Arial" pitchFamily="34" charset="-120"/>
-              </a:rPr>
-              <a:t>K1–K5 evitaron retrabajo; rutas y dependencias compartidas costaron fusiones</a:t>
-            </a:r>
-            <a:endParaRPr lang="en-US" sz="750" dirty="0"/>
-          </a:p>
-        </p:txBody>
-      </p:sp>
-      <p:sp>
-        <p:nvSpPr>
-          <p:cNvPr id="37" name="Shape 33"/>
-          <p:cNvSpPr/>
-          <p:nvPr/>
-        </p:nvSpPr>
-        <p:spPr>
-          <a:xfrm>
-            <a:off x="5669280" y="1783080"/>
-            <a:ext cx="274320" cy="274320"/>
-          </a:xfrm>
-          <a:prstGeom prst="roundRect">
-            <a:avLst>
-              <a:gd name="adj" fmla="val 26667"/>
-            </a:avLst>
-          </a:prstGeom>
-          <a:solidFill>
-            <a:srgbClr val="1E2B37"/>
-          </a:solidFill>
-          <a:ln/>
-        </p:spPr>
-      </p:sp>
-      <p:sp>
-        <p:nvSpPr>
-          <p:cNvPr id="38" name="Text 34"/>
-          <p:cNvSpPr txBox="1"/>
-          <p:nvPr/>
-        </p:nvSpPr>
-        <p:spPr>
-          <a:xfrm>
-            <a:off x="5669280" y="1783080"/>
-            <a:ext cx="274320" cy="274320"/>
-          </a:xfrm>
-          <a:prstGeom prst="rect">
-            <a:avLst/>
-          </a:prstGeom>
-          <a:noFill/>
-          <a:ln/>
-        </p:spPr>
-        <p:txBody>
-          <a:bodyPr wrap="square" lIns="0" tIns="0" rIns="0" bIns="0" rtlCol="0" anchor="ctr"/>
-          <a:lstStyle/>
-          <a:p>
-            <a:pPr algn="ctr" indent="0" marL="0">
-              <a:buNone/>
-            </a:pPr>
-            <a:r>
-              <a:rPr lang="en-US" sz="900" b="1" dirty="0">
-                <a:solidFill>
-                  <a:srgbClr val="FFFFFF"/>
-                </a:solidFill>
-                <a:latin typeface="Arial" pitchFamily="34" charset="0"/>
-                <a:ea typeface="Arial" pitchFamily="34" charset="-122"/>
-                <a:cs typeface="Arial" pitchFamily="34" charset="-120"/>
-              </a:rPr>
-              <a:t>7</a:t>
-            </a:r>
-            <a:endParaRPr lang="en-US" sz="900" dirty="0"/>
-          </a:p>
-        </p:txBody>
-      </p:sp>
-      <p:sp>
-        <p:nvSpPr>
-          <p:cNvPr id="39" name="Text 35"/>
-          <p:cNvSpPr txBox="1"/>
-          <p:nvPr/>
-        </p:nvSpPr>
-        <p:spPr>
-          <a:xfrm>
-            <a:off x="6035040" y="1764792"/>
-            <a:ext cx="2606040" cy="201168"/>
-          </a:xfrm>
-          <a:prstGeom prst="rect">
-            <a:avLst/>
-          </a:prstGeom>
-          <a:noFill/>
-          <a:ln/>
-        </p:spPr>
-        <p:txBody>
-          <a:bodyPr wrap="square" lIns="0" tIns="0" rIns="0" bIns="0" rtlCol="0" anchor="t"/>
-          <a:lstStyle/>
-          <a:p>
-            <a:pPr indent="0" marL="0">
-              <a:buNone/>
-            </a:pPr>
-            <a:r>
-              <a:rPr lang="en-US" sz="850" b="1" dirty="0">
-                <a:solidFill>
-                  <a:srgbClr val="1E2B37"/>
-                </a:solidFill>
-                <a:latin typeface="Arial" pitchFamily="34" charset="0"/>
-                <a:ea typeface="Arial" pitchFamily="34" charset="-122"/>
-                <a:cs typeface="Arial" pitchFamily="34" charset="-120"/>
-              </a:rPr>
-              <a:t>Verificación proporcional al riesgo</a:t>
-            </a:r>
-            <a:endParaRPr lang="en-US" sz="850" dirty="0"/>
-          </a:p>
-        </p:txBody>
-      </p:sp>
-      <p:sp>
-        <p:nvSpPr>
-          <p:cNvPr id="40" name="Text 36"/>
-          <p:cNvSpPr txBox="1"/>
-          <p:nvPr/>
-        </p:nvSpPr>
-        <p:spPr>
-          <a:xfrm>
-            <a:off x="6035040" y="1965960"/>
-            <a:ext cx="2606040" cy="457200"/>
-          </a:xfrm>
-          <a:prstGeom prst="rect">
-            <a:avLst/>
-          </a:prstGeom>
-          <a:noFill/>
-          <a:ln/>
-        </p:spPr>
-        <p:txBody>
-          <a:bodyPr wrap="square" lIns="0" tIns="0" rIns="0" bIns="0" rtlCol="0" anchor="t"/>
-          <a:lstStyle/>
-          <a:p>
-            <a:pPr indent="0" marL="0">
-              <a:buNone/>
-            </a:pPr>
-            <a:r>
-              <a:rPr lang="en-US" sz="750" dirty="0">
-                <a:solidFill>
-                  <a:srgbClr val="3D4A56"/>
-                </a:solidFill>
-                <a:latin typeface="Arial" pitchFamily="34" charset="0"/>
-                <a:ea typeface="Arial" pitchFamily="34" charset="-122"/>
-                <a:cs typeface="Arial" pitchFamily="34" charset="-120"/>
-              </a:rPr>
-              <a:t>TLC y Lean con modelos pequeños; gate estricto solo en el núcleo</a:t>
-            </a:r>
-            <a:endParaRPr lang="en-US" sz="750" dirty="0"/>
-          </a:p>
-        </p:txBody>
-      </p:sp>
-      <p:sp>
-        <p:nvSpPr>
-          <p:cNvPr id="41" name="Shape 37"/>
-          <p:cNvSpPr/>
-          <p:nvPr/>
-        </p:nvSpPr>
-        <p:spPr>
-          <a:xfrm>
-            <a:off x="5669280" y="2468880"/>
-            <a:ext cx="274320" cy="274320"/>
-          </a:xfrm>
-          <a:prstGeom prst="roundRect">
-            <a:avLst>
-              <a:gd name="adj" fmla="val 26667"/>
-            </a:avLst>
-          </a:prstGeom>
-          <a:solidFill>
-            <a:srgbClr val="1E2B37"/>
-          </a:solidFill>
-          <a:ln/>
-        </p:spPr>
-      </p:sp>
-      <p:sp>
-        <p:nvSpPr>
-          <p:cNvPr id="42" name="Text 38"/>
-          <p:cNvSpPr txBox="1"/>
-          <p:nvPr/>
-        </p:nvSpPr>
-        <p:spPr>
-          <a:xfrm>
-            <a:off x="5669280" y="2468880"/>
-            <a:ext cx="274320" cy="274320"/>
-          </a:xfrm>
-          <a:prstGeom prst="rect">
-            <a:avLst/>
-          </a:prstGeom>
-          <a:noFill/>
-          <a:ln/>
-        </p:spPr>
-        <p:txBody>
-          <a:bodyPr wrap="square" lIns="0" tIns="0" rIns="0" bIns="0" rtlCol="0" anchor="ctr"/>
-          <a:lstStyle/>
-          <a:p>
-            <a:pPr algn="ctr" indent="0" marL="0">
-              <a:buNone/>
-            </a:pPr>
-            <a:r>
-              <a:rPr lang="en-US" sz="900" b="1" dirty="0">
-                <a:solidFill>
-                  <a:srgbClr val="FFFFFF"/>
-                </a:solidFill>
-                <a:latin typeface="Arial" pitchFamily="34" charset="0"/>
-                <a:ea typeface="Arial" pitchFamily="34" charset="-122"/>
-                <a:cs typeface="Arial" pitchFamily="34" charset="-120"/>
-              </a:rPr>
-              <a:t>8</a:t>
-            </a:r>
-            <a:endParaRPr lang="en-US" sz="900" dirty="0"/>
-          </a:p>
-        </p:txBody>
-      </p:sp>
-      <p:sp>
-        <p:nvSpPr>
-          <p:cNvPr id="43" name="Text 39"/>
-          <p:cNvSpPr txBox="1"/>
-          <p:nvPr/>
-        </p:nvSpPr>
-        <p:spPr>
-          <a:xfrm>
-            <a:off x="6035040" y="2450592"/>
-            <a:ext cx="2606040" cy="201168"/>
-          </a:xfrm>
-          <a:prstGeom prst="rect">
-            <a:avLst/>
-          </a:prstGeom>
-          <a:noFill/>
-          <a:ln/>
-        </p:spPr>
-        <p:txBody>
-          <a:bodyPr wrap="square" lIns="0" tIns="0" rIns="0" bIns="0" rtlCol="0" anchor="t"/>
-          <a:lstStyle/>
-          <a:p>
-            <a:pPr indent="0" marL="0">
-              <a:buNone/>
-            </a:pPr>
-            <a:r>
-              <a:rPr lang="en-US" sz="850" b="1" dirty="0">
-                <a:solidFill>
-                  <a:srgbClr val="1E2B37"/>
-                </a:solidFill>
-                <a:latin typeface="Arial" pitchFamily="34" charset="0"/>
-                <a:ea typeface="Arial" pitchFamily="34" charset="-122"/>
-                <a:cs typeface="Arial" pitchFamily="34" charset="-120"/>
-              </a:rPr>
-              <a:t>Reutilizar</a:t>
-            </a:r>
-            <a:endParaRPr lang="en-US" sz="850" dirty="0"/>
-          </a:p>
-        </p:txBody>
-      </p:sp>
-      <p:sp>
-        <p:nvSpPr>
-          <p:cNvPr id="44" name="Text 40"/>
-          <p:cNvSpPr txBox="1"/>
-          <p:nvPr/>
-        </p:nvSpPr>
-        <p:spPr>
-          <a:xfrm>
-            <a:off x="6035040" y="2651760"/>
-            <a:ext cx="2606040" cy="457200"/>
-          </a:xfrm>
-          <a:prstGeom prst="rect">
-            <a:avLst/>
-          </a:prstGeom>
-          <a:noFill/>
-          <a:ln/>
-        </p:spPr>
-        <p:txBody>
-          <a:bodyPr wrap="square" lIns="0" tIns="0" rIns="0" bIns="0" rtlCol="0" anchor="t"/>
-          <a:lstStyle/>
-          <a:p>
-            <a:pPr indent="0" marL="0">
-              <a:buNone/>
-            </a:pPr>
-            <a:r>
-              <a:rPr lang="en-US" sz="750" dirty="0">
-                <a:solidFill>
-                  <a:srgbClr val="3D4A56"/>
-                </a:solidFill>
-                <a:latin typeface="Arial" pitchFamily="34" charset="0"/>
-                <a:ea typeface="Arial" pitchFamily="34" charset="-122"/>
-                <a:cs typeface="Arial" pitchFamily="34" charset="-120"/>
-              </a:rPr>
-              <a:t>Langfuse, FastMCP, Playwright MCP, reportlab; llevar hooks, skills y el runner de evals a MyFactory</a:t>
-            </a:r>
-            <a:endParaRPr lang="en-US" sz="750" dirty="0"/>
-          </a:p>
-        </p:txBody>
-      </p:sp>
-      <p:sp>
-        <p:nvSpPr>
-          <p:cNvPr id="45" name="Shape 41"/>
-          <p:cNvSpPr/>
-          <p:nvPr/>
-        </p:nvSpPr>
-        <p:spPr>
-          <a:xfrm>
-            <a:off x="5669280" y="3154680"/>
-            <a:ext cx="274320" cy="274320"/>
-          </a:xfrm>
-          <a:prstGeom prst="roundRect">
-            <a:avLst>
-              <a:gd name="adj" fmla="val 26667"/>
-            </a:avLst>
-          </a:prstGeom>
-          <a:solidFill>
-            <a:srgbClr val="1E2B37"/>
-          </a:solidFill>
-          <a:ln/>
-        </p:spPr>
-      </p:sp>
-      <p:sp>
-        <p:nvSpPr>
-          <p:cNvPr id="46" name="Text 42"/>
-          <p:cNvSpPr txBox="1"/>
-          <p:nvPr/>
-        </p:nvSpPr>
-        <p:spPr>
-          <a:xfrm>
-            <a:off x="5669280" y="3154680"/>
-            <a:ext cx="274320" cy="274320"/>
-          </a:xfrm>
-          <a:prstGeom prst="rect">
-            <a:avLst/>
-          </a:prstGeom>
-          <a:noFill/>
-          <a:ln/>
-        </p:spPr>
-        <p:txBody>
-          <a:bodyPr wrap="square" lIns="0" tIns="0" rIns="0" bIns="0" rtlCol="0" anchor="ctr"/>
-          <a:lstStyle/>
-          <a:p>
-            <a:pPr algn="ctr" indent="0" marL="0">
-              <a:buNone/>
-            </a:pPr>
-            <a:r>
-              <a:rPr lang="en-US" sz="900" b="1" dirty="0">
-                <a:solidFill>
-                  <a:srgbClr val="FFFFFF"/>
-                </a:solidFill>
-                <a:latin typeface="Arial" pitchFamily="34" charset="0"/>
-                <a:ea typeface="Arial" pitchFamily="34" charset="-122"/>
-                <a:cs typeface="Arial" pitchFamily="34" charset="-120"/>
-              </a:rPr>
-              <a:t>9</a:t>
-            </a:r>
-            <a:endParaRPr lang="en-US" sz="900" dirty="0"/>
-          </a:p>
-        </p:txBody>
-      </p:sp>
-      <p:sp>
-        <p:nvSpPr>
-          <p:cNvPr id="47" name="Text 43"/>
-          <p:cNvSpPr txBox="1"/>
-          <p:nvPr/>
-        </p:nvSpPr>
-        <p:spPr>
-          <a:xfrm>
-            <a:off x="6035040" y="3136392"/>
-            <a:ext cx="2606040" cy="201168"/>
-          </a:xfrm>
-          <a:prstGeom prst="rect">
-            <a:avLst/>
-          </a:prstGeom>
-          <a:noFill/>
-          <a:ln/>
-        </p:spPr>
-        <p:txBody>
-          <a:bodyPr wrap="square" lIns="0" tIns="0" rIns="0" bIns="0" rtlCol="0" anchor="t"/>
-          <a:lstStyle/>
-          <a:p>
-            <a:pPr indent="0" marL="0">
-              <a:buNone/>
-            </a:pPr>
-            <a:r>
-              <a:rPr lang="en-US" sz="850" b="1" dirty="0">
-                <a:solidFill>
-                  <a:srgbClr val="1E2B37"/>
-                </a:solidFill>
-                <a:latin typeface="Arial" pitchFamily="34" charset="0"/>
-                <a:ea typeface="Arial" pitchFamily="34" charset="-122"/>
-                <a:cs typeface="Arial" pitchFamily="34" charset="-120"/>
-              </a:rPr>
-              <a:t>Observabilidad desde el día 1</a:t>
-            </a:r>
-            <a:endParaRPr lang="en-US" sz="850" dirty="0"/>
-          </a:p>
-        </p:txBody>
-      </p:sp>
-      <p:sp>
-        <p:nvSpPr>
-          <p:cNvPr id="48" name="Text 44"/>
-          <p:cNvSpPr txBox="1"/>
-          <p:nvPr/>
-        </p:nvSpPr>
-        <p:spPr>
-          <a:xfrm>
-            <a:off x="6035040" y="3337560"/>
-            <a:ext cx="2606040" cy="457200"/>
-          </a:xfrm>
-          <a:prstGeom prst="rect">
-            <a:avLst/>
-          </a:prstGeom>
-          <a:noFill/>
-          <a:ln/>
-        </p:spPr>
-        <p:txBody>
-          <a:bodyPr wrap="square" lIns="0" tIns="0" rIns="0" bIns="0" rtlCol="0" anchor="t"/>
-          <a:lstStyle/>
-          <a:p>
-            <a:pPr indent="0" marL="0">
-              <a:buNone/>
-            </a:pPr>
-            <a:r>
-              <a:rPr lang="en-US" sz="750" dirty="0">
-                <a:solidFill>
-                  <a:srgbClr val="3D4A56"/>
-                </a:solidFill>
-                <a:latin typeface="Arial" pitchFamily="34" charset="0"/>
-                <a:ea typeface="Arial" pitchFamily="34" charset="-122"/>
-                <a:cs typeface="Arial" pitchFamily="34" charset="-120"/>
-              </a:rPr>
-              <a:t>coste por llamada y por rol: se optimiza donde está el gasto (writer y editor)</a:t>
-            </a:r>
-            <a:endParaRPr lang="en-US" sz="750" dirty="0"/>
-          </a:p>
-        </p:txBody>
-      </p:sp>
     </p:spTree>
   </p:cSld>
   <p:clrMapOvr>

--- a/presentacion/presentacion-2.pptx
+++ b/presentacion/presentacion-2.pptx
@@ -19,10 +19,9 @@
     <p:sldId id="267" r:id="rId13"/>
     <p:sldId id="268" r:id="rId14"/>
     <p:sldId id="269" r:id="rId15"/>
-    <p:sldId id="270" r:id="rId16"/>
   </p:sldIdLst>
   <p:notesMasterIdLst>
-    <p:notesMasterId r:id="rId17"/>
+    <p:notesMasterId r:id="rId16"/>
   </p:notesMasterIdLst>
   <p:sldSz cx="9144000" cy="5143500"/>
   <p:notesSz cx="5143500" cy="9144000"/>
@@ -1231,8 +1230,8 @@
           <a:p>
             <a:r>
               <a:rPr lang="en-US" dirty="0"/>
-              <a:t>[8:30–9:30] Prefiero decir yo lo que no está demostrado: el calendario solo se valida junto a una fecha; Lean solo prueba lo que el planner registra; un brief contradictorio se bloquea bien pero caro; las fichas no están versionadas; y antes de producción hay que enmascarar los datos personales en las trazas y calibrar el juez con revisión humana.
-Todo eso está en el plan del piloto: ocho semanas hasta el catálogo de Navidad.</a:t>
+              <a:t>[9:30–10:00] Si me tengo que quedar con una decisión: separar la verdad de la prosa. Lo que es cierto sobre la historia vive en una base de datos y lo comprueban validadores deterministas, Lean y TLA+; los modelos solo redactan, y solo se publica lo que pasa todo.
+Muchas gracias. El detalle está en los anexos PDF; encantado de responder preguntas.</a:t>
             </a:r>
             <a:endParaRPr lang="en-US" dirty="0"/>
           </a:p>
@@ -1256,95 +1255,6 @@
             <a:fld id="{F7021451-1387-4CA6-816F-3879F97B5CBC}" type="slidenum">
               <a:rPr lang="en-US"/>
               <a:t>14</a:t>
-            </a:fld>
-            <a:endParaRPr lang="en-US"/>
-          </a:p>
-        </p:txBody>
-      </p:sp>
-    </p:spTree>
-    <p:extLst>
-      <p:ext uri="{BB962C8B-B14F-4D97-AF65-F5344CB8AC3E}">
-        <p14:creationId xmlns:p14="http://schemas.microsoft.com/office/powerpoint/2010/main" val="1024086991"/>
-      </p:ext>
-    </p:extLst>
-  </p:cSld>
-  <p:clrMapOvr>
-    <a:masterClrMapping/>
-  </p:clrMapOvr>
-</p:notes>
-</file>
-
-<file path=ppt/notesSlides/notesSlide15.xml><?xml version="1.0" encoding="utf-8"?>
-<p:notes xmlns:a="http://schemas.openxmlformats.org/drawingml/2006/main" xmlns:r="http://schemas.openxmlformats.org/officeDocument/2006/relationships" xmlns:p="http://schemas.openxmlformats.org/presentationml/2006/main">
-  <p:cSld>
-    <p:spTree>
-      <p:nvGrpSpPr>
-        <p:cNvPr id="1" name=""/>
-        <p:cNvGrpSpPr/>
-        <p:nvPr/>
-      </p:nvGrpSpPr>
-      <p:grpSpPr>
-        <a:xfrm>
-          <a:off x="0" y="0"/>
-          <a:ext cx="0" cy="0"/>
-          <a:chOff x="0" y="0"/>
-          <a:chExt cx="0" cy="0"/>
-        </a:xfrm>
-      </p:grpSpPr>
-      <p:sp>
-        <p:nvSpPr>
-          <p:cNvPr id="2" name="Slide Image Placeholder 1"/>
-          <p:cNvSpPr>
-            <a:spLocks noGrp="1" noRot="1" noChangeAspect="1"/>
-          </p:cNvSpPr>
-          <p:nvPr>
-            <p:ph type="sldImg"/>
-          </p:nvPr>
-        </p:nvSpPr>
-        <p:spPr/>
-      </p:sp>
-      <p:sp>
-        <p:nvSpPr>
-          <p:cNvPr id="3" name="Notes Placeholder 2"/>
-          <p:cNvSpPr>
-            <a:spLocks noGrp="1"/>
-          </p:cNvSpPr>
-          <p:nvPr>
-            <p:ph type="body" idx="1"/>
-          </p:nvPr>
-        </p:nvSpPr>
-        <p:spPr/>
-        <p:txBody>
-          <a:bodyPr/>
-          <a:lstStyle/>
-          <a:p>
-            <a:r>
-              <a:rPr lang="en-US" dirty="0"/>
-              <a:t>[9:30–10:00] Si me tengo que quedar con una decisión: separar la verdad de la prosa. Lo que es cierto sobre la historia vive en una base de datos y lo comprueban validadores deterministas, Lean y TLA+; los modelos solo redactan, y solo se publica lo que pasa todo.
-Muchas gracias. El detalle está en los anexos PDF; encantado de responder preguntas.</a:t>
-            </a:r>
-            <a:endParaRPr lang="en-US" dirty="0"/>
-          </a:p>
-        </p:txBody>
-      </p:sp>
-      <p:sp>
-        <p:nvSpPr>
-          <p:cNvPr id="4" name="Slide Number Placeholder 3"/>
-          <p:cNvSpPr>
-            <a:spLocks noGrp="1"/>
-          </p:cNvSpPr>
-          <p:nvPr>
-            <p:ph type="sldNum" sz="quarter" idx="10"/>
-          </p:nvPr>
-        </p:nvSpPr>
-        <p:spPr/>
-        <p:txBody>
-          <a:bodyPr/>
-          <a:lstStyle/>
-          <a:p>
-            <a:fld id="{F7021451-1387-4CA6-816F-3879F97B5CBC}" type="slidenum">
-              <a:rPr lang="en-US"/>
-              <a:t>15</a:t>
             </a:fld>
             <a:endParaRPr lang="en-US"/>
           </a:p>
@@ -12425,1902 +12335,6 @@
     <p:bg>
       <p:bgPr>
         <a:solidFill>
-          <a:srgbClr val="FFFFFF"/>
-        </a:solidFill>
-      </p:bgPr>
-    </p:bg>
-    <p:spTree>
-      <p:nvGrpSpPr>
-        <p:cNvPr id="1" name=""/>
-        <p:cNvGrpSpPr/>
-        <p:nvPr/>
-      </p:nvGrpSpPr>
-      <p:grpSpPr>
-        <a:xfrm>
-          <a:off x="0" y="0"/>
-          <a:ext cx="0" cy="0"/>
-          <a:chOff x="0" y="0"/>
-          <a:chExt cx="0" cy="0"/>
-        </a:xfrm>
-      </p:grpSpPr>
-      <p:pic>
-        <p:nvPicPr>
-          <p:cNvPr id="2" name="Image 0" descr="/home/user/My-Story-Marker/presentacion/build/img2/mark.png">    </p:cNvPr>
-          <p:cNvPicPr>
-            <a:picLocks noChangeAspect="1"/>
-          </p:cNvPicPr>
-          <p:nvPr/>
-        </p:nvPicPr>
-        <p:blipFill>
-          <a:blip r:embed="rId1"/>
-          <a:stretch>
-            <a:fillRect/>
-          </a:stretch>
-        </p:blipFill>
-        <p:spPr>
-          <a:xfrm>
-            <a:off x="457200" y="301752"/>
-            <a:ext cx="155448" cy="155448"/>
-          </a:xfrm>
-          <a:prstGeom prst="rect">
-            <a:avLst/>
-          </a:prstGeom>
-        </p:spPr>
-      </p:pic>
-      <p:sp>
-        <p:nvSpPr>
-          <p:cNvPr id="3" name="Text 0"/>
-          <p:cNvSpPr txBox="1"/>
-          <p:nvPr/>
-        </p:nvSpPr>
-        <p:spPr>
-          <a:xfrm>
-            <a:off x="694944" y="274320"/>
-            <a:ext cx="6400800" cy="219456"/>
-          </a:xfrm>
-          <a:prstGeom prst="rect">
-            <a:avLst/>
-          </a:prstGeom>
-          <a:noFill/>
-          <a:ln/>
-        </p:spPr>
-        <p:txBody>
-          <a:bodyPr wrap="square" lIns="0" tIns="0" rIns="0" bIns="0" rtlCol="0" anchor="t"/>
-          <a:lstStyle/>
-          <a:p>
-            <a:pPr indent="0" marL="0">
-              <a:buNone/>
-            </a:pPr>
-            <a:r>
-              <a:rPr lang="en-US" sz="950" b="1" spc="150" kern="0" dirty="0">
-                <a:solidFill>
-                  <a:srgbClr val="AE4E14"/>
-                </a:solidFill>
-                <a:latin typeface="Arial" pitchFamily="34" charset="0"/>
-                <a:ea typeface="Arial" pitchFamily="34" charset="-122"/>
-                <a:cs typeface="Arial" pitchFamily="34" charset="-120"/>
-              </a:rPr>
-              <a:t>RIESGOS Y SIGUIENTES PASOS</a:t>
-            </a:r>
-            <a:endParaRPr lang="en-US" sz="950" dirty="0"/>
-          </a:p>
-        </p:txBody>
-      </p:sp>
-      <p:sp>
-        <p:nvSpPr>
-          <p:cNvPr id="4" name="Text 1"/>
-          <p:cNvSpPr txBox="1"/>
-          <p:nvPr/>
-        </p:nvSpPr>
-        <p:spPr>
-          <a:xfrm>
-            <a:off x="457200" y="530352"/>
-            <a:ext cx="8229600" cy="502920"/>
-          </a:xfrm>
-          <a:prstGeom prst="rect">
-            <a:avLst/>
-          </a:prstGeom>
-          <a:noFill/>
-          <a:ln/>
-        </p:spPr>
-        <p:txBody>
-          <a:bodyPr wrap="square" lIns="0" tIns="0" rIns="0" bIns="0" rtlCol="0" anchor="ctr"/>
-          <a:lstStyle/>
-          <a:p>
-            <a:pPr indent="0" marL="0">
-              <a:buNone/>
-            </a:pPr>
-            <a:r>
-              <a:rPr lang="en-US" sz="2300" b="1" dirty="0">
-                <a:solidFill>
-                  <a:srgbClr val="1E2B37"/>
-                </a:solidFill>
-                <a:latin typeface="Arial" pitchFamily="34" charset="0"/>
-                <a:ea typeface="Arial" pitchFamily="34" charset="-122"/>
-                <a:cs typeface="Arial" pitchFamily="34" charset="-120"/>
-              </a:rPr>
-              <a:t>Lo que aún no está demostrado y cómo lo cerramos</a:t>
-            </a:r>
-            <a:endParaRPr lang="en-US" sz="2300" dirty="0"/>
-          </a:p>
-        </p:txBody>
-      </p:sp>
-      <p:pic>
-        <p:nvPicPr>
-          <p:cNvPr id="5" name="Image 1" descr="/home/user/My-Story-Marker/presentacion/build/img2/logo.png">    </p:cNvPr>
-          <p:cNvPicPr>
-            <a:picLocks noChangeAspect="1"/>
-          </p:cNvPicPr>
-          <p:nvPr/>
-        </p:nvPicPr>
-        <p:blipFill>
-          <a:blip r:embed="rId2"/>
-          <a:stretch>
-            <a:fillRect/>
-          </a:stretch>
-        </p:blipFill>
-        <p:spPr>
-          <a:xfrm>
-            <a:off x="457200" y="4754880"/>
-            <a:ext cx="426720" cy="100584"/>
-          </a:xfrm>
-          <a:prstGeom prst="rect">
-            <a:avLst/>
-          </a:prstGeom>
-        </p:spPr>
-      </p:pic>
-      <p:sp>
-        <p:nvSpPr>
-          <p:cNvPr id="6" name="Text 2"/>
-          <p:cNvSpPr txBox="1"/>
-          <p:nvPr/>
-        </p:nvSpPr>
-        <p:spPr>
-          <a:xfrm>
-            <a:off x="1024128" y="4736592"/>
-            <a:ext cx="5486400" cy="146304"/>
-          </a:xfrm>
-          <a:prstGeom prst="rect">
-            <a:avLst/>
-          </a:prstGeom>
-          <a:noFill/>
-          <a:ln/>
-        </p:spPr>
-        <p:txBody>
-          <a:bodyPr wrap="square" lIns="0" tIns="0" rIns="0" bIns="0" rtlCol="0" anchor="ctr"/>
-          <a:lstStyle/>
-          <a:p>
-            <a:pPr indent="0" marL="0">
-              <a:buNone/>
-            </a:pPr>
-            <a:r>
-              <a:rPr lang="en-US" sz="750" dirty="0">
-                <a:solidFill>
-                  <a:srgbClr val="5E6A77"/>
-                </a:solidFill>
-                <a:latin typeface="Arial" pitchFamily="34" charset="0"/>
-                <a:ea typeface="Arial" pitchFamily="34" charset="-122"/>
-                <a:cs typeface="Arial" pitchFamily="34" charset="-120"/>
-              </a:rPr>
-              <a:t>My Story Marker · propuesta para Cuentalia</a:t>
-            </a:r>
-            <a:endParaRPr lang="en-US" sz="750" dirty="0"/>
-          </a:p>
-        </p:txBody>
-      </p:sp>
-      <p:sp>
-        <p:nvSpPr>
-          <p:cNvPr id="7" name="Text 3"/>
-          <p:cNvSpPr txBox="1"/>
-          <p:nvPr/>
-        </p:nvSpPr>
-        <p:spPr>
-          <a:xfrm>
-            <a:off x="8138160" y="4736592"/>
-            <a:ext cx="548640" cy="146304"/>
-          </a:xfrm>
-          <a:prstGeom prst="rect">
-            <a:avLst/>
-          </a:prstGeom>
-          <a:noFill/>
-          <a:ln/>
-        </p:spPr>
-        <p:txBody>
-          <a:bodyPr wrap="square" lIns="0" tIns="0" rIns="0" bIns="0" rtlCol="0" anchor="ctr"/>
-          <a:lstStyle/>
-          <a:p>
-            <a:pPr algn="r" indent="0" marL="0">
-              <a:buNone/>
-            </a:pPr>
-            <a:r>
-              <a:rPr lang="en-US" sz="750" dirty="0">
-                <a:solidFill>
-                  <a:srgbClr val="5E6A77"/>
-                </a:solidFill>
-                <a:latin typeface="Arial" pitchFamily="34" charset="0"/>
-                <a:ea typeface="Arial" pitchFamily="34" charset="-122"/>
-                <a:cs typeface="Arial" pitchFamily="34" charset="-120"/>
-              </a:rPr>
-              <a:t>14</a:t>
-            </a:r>
-            <a:endParaRPr lang="en-US" sz="750" dirty="0"/>
-          </a:p>
-        </p:txBody>
-      </p:sp>
-      <p:graphicFrame>
-        <p:nvGraphicFramePr>
-          <p:cNvPr id="15" name="Table 0"/>
-          <p:cNvGraphicFramePr>
-            <a:graphicFrameLocks noGrp="1"/>
-          </p:cNvGraphicFramePr>
-          <p:nvPr>
-            <p:extLst>
-              <p:ext uri="{D42A27DB-BD31-4B8C-83A1-F6EECF244321}">
-                <p14:modId xmlns:p14="http://schemas.microsoft.com/office/powerpoint/2010/main" val="1579011935"/>
-              </p:ext>
-            </p:extLst>
-          </p:nvPr>
-        </p:nvGraphicFramePr>
-        <p:xfrm>
-          <a:off x="457200" y="1188720"/>
-          <a:ext cx="5212080" cy="914400"/>
-        </p:xfrm>
-        <a:graphic>
-          <a:graphicData uri="http://schemas.openxmlformats.org/drawingml/2006/table">
-            <a:tbl>
-              <a:tblPr/>
-              <a:tblGrid>
-                <a:gridCol w="2743200"/>
-                <a:gridCol w="2468880"/>
-              </a:tblGrid>
-              <a:tr h="384048">
-                <a:tc>
-                  <a:txBody>
-                    <a:bodyPr/>
-                    <a:lstStyle/>
-                    <a:p>
-                      <a:pPr indent="0" marL="0">
-                        <a:buNone/>
-                      </a:pPr>
-                      <a:r>
-                        <a:rPr lang="en-US" sz="800" b="1" dirty="0">
-                          <a:solidFill>
-                            <a:srgbClr val="FFFFFF"/>
-                          </a:solidFill>
-                          <a:latin typeface="Arial" pitchFamily="34" charset="0"/>
-                          <a:ea typeface="Arial" pitchFamily="34" charset="-122"/>
-                          <a:cs typeface="Arial" pitchFamily="34" charset="-120"/>
-                        </a:rPr>
-                        <a:t>Riesgo</a:t>
-                      </a:r>
-                      <a:endParaRPr lang="en-US" sz="800" dirty="0">
-                        <a:latin typeface="Arial" charset="0"/>
-                        <a:ea typeface="Arial" charset="0"/>
-                        <a:cs typeface="Arial" charset="0"/>
-                      </a:endParaRPr>
-                    </a:p>
-                  </a:txBody>
-                  <a:tcPr marL="45720" marR="45720" marT="45720" marB="45720" anchor="ctr">
-                    <a:lnL w="6350" cap="flat" cmpd="sng" algn="ctr">
-                      <a:solidFill>
-                        <a:srgbClr val="E6E9EC"/>
-                      </a:solidFill>
-                      <a:prstDash val="solid"/>
-                      <a:round/>
-                      <a:headEnd type="none" w="med" len="med"/>
-                      <a:tailEnd type="none" w="med" len="med"/>
-                    </a:lnL>
-                    <a:lnR w="6350" cap="flat" cmpd="sng" algn="ctr">
-                      <a:solidFill>
-                        <a:srgbClr val="E6E9EC"/>
-                      </a:solidFill>
-                      <a:prstDash val="solid"/>
-                      <a:round/>
-                      <a:headEnd type="none" w="med" len="med"/>
-                      <a:tailEnd type="none" w="med" len="med"/>
-                    </a:lnR>
-                    <a:lnT w="6350" cap="flat" cmpd="sng" algn="ctr">
-                      <a:solidFill>
-                        <a:srgbClr val="E6E9EC"/>
-                      </a:solidFill>
-                      <a:prstDash val="solid"/>
-                      <a:round/>
-                      <a:headEnd type="none" w="med" len="med"/>
-                      <a:tailEnd type="none" w="med" len="med"/>
-                    </a:lnT>
-                    <a:lnB w="6350" cap="flat" cmpd="sng" algn="ctr">
-                      <a:solidFill>
-                        <a:srgbClr val="E6E9EC"/>
-                      </a:solidFill>
-                      <a:prstDash val="solid"/>
-                      <a:round/>
-                      <a:headEnd type="none" w="med" len="med"/>
-                      <a:tailEnd type="none" w="med" len="med"/>
-                    </a:lnB>
-                    <a:solidFill>
-                      <a:srgbClr val="1E2B37"/>
-                    </a:solidFill>
-                  </a:tcPr>
-                </a:tc>
-                <a:tc>
-                  <a:txBody>
-                    <a:bodyPr/>
-                    <a:lstStyle/>
-                    <a:p>
-                      <a:pPr indent="0" marL="0">
-                        <a:buNone/>
-                      </a:pPr>
-                      <a:r>
-                        <a:rPr lang="en-US" sz="800" b="1" dirty="0">
-                          <a:solidFill>
-                            <a:srgbClr val="FFFFFF"/>
-                          </a:solidFill>
-                          <a:latin typeface="Arial" pitchFamily="34" charset="0"/>
-                          <a:ea typeface="Arial" pitchFamily="34" charset="-122"/>
-                          <a:cs typeface="Arial" pitchFamily="34" charset="-120"/>
-                        </a:rPr>
-                        <a:t>Mitigación</a:t>
-                      </a:r>
-                      <a:endParaRPr lang="en-US" sz="800" dirty="0">
-                        <a:latin typeface="Arial" charset="0"/>
-                        <a:ea typeface="Arial" charset="0"/>
-                        <a:cs typeface="Arial" charset="0"/>
-                      </a:endParaRPr>
-                    </a:p>
-                  </a:txBody>
-                  <a:tcPr marL="45720" marR="45720" marT="45720" marB="45720" anchor="ctr">
-                    <a:lnL w="6350" cap="flat" cmpd="sng" algn="ctr">
-                      <a:solidFill>
-                        <a:srgbClr val="E6E9EC"/>
-                      </a:solidFill>
-                      <a:prstDash val="solid"/>
-                      <a:round/>
-                      <a:headEnd type="none" w="med" len="med"/>
-                      <a:tailEnd type="none" w="med" len="med"/>
-                    </a:lnL>
-                    <a:lnR w="6350" cap="flat" cmpd="sng" algn="ctr">
-                      <a:solidFill>
-                        <a:srgbClr val="E6E9EC"/>
-                      </a:solidFill>
-                      <a:prstDash val="solid"/>
-                      <a:round/>
-                      <a:headEnd type="none" w="med" len="med"/>
-                      <a:tailEnd type="none" w="med" len="med"/>
-                    </a:lnR>
-                    <a:lnT w="6350" cap="flat" cmpd="sng" algn="ctr">
-                      <a:solidFill>
-                        <a:srgbClr val="E6E9EC"/>
-                      </a:solidFill>
-                      <a:prstDash val="solid"/>
-                      <a:round/>
-                      <a:headEnd type="none" w="med" len="med"/>
-                      <a:tailEnd type="none" w="med" len="med"/>
-                    </a:lnT>
-                    <a:lnB w="6350" cap="flat" cmpd="sng" algn="ctr">
-                      <a:solidFill>
-                        <a:srgbClr val="E6E9EC"/>
-                      </a:solidFill>
-                      <a:prstDash val="solid"/>
-                      <a:round/>
-                      <a:headEnd type="none" w="med" len="med"/>
-                      <a:tailEnd type="none" w="med" len="med"/>
-                    </a:lnB>
-                    <a:solidFill>
-                      <a:srgbClr val="1E2B37"/>
-                    </a:solidFill>
-                  </a:tcPr>
-                </a:tc>
-              </a:tr>
-              <a:tr h="384048">
-                <a:tc>
-                  <a:txBody>
-                    <a:bodyPr/>
-                    <a:lstStyle/>
-                    <a:p>
-                      <a:pPr indent="0" marL="0">
-                        <a:buNone/>
-                      </a:pPr>
-                      <a:r>
-                        <a:rPr lang="en-US" sz="800" dirty="0">
-                          <a:solidFill>
-                            <a:srgbClr val="1E2B37"/>
-                          </a:solidFill>
-                          <a:latin typeface="Arial" pitchFamily="34" charset="0"/>
-                          <a:ea typeface="Arial" pitchFamily="34" charset="-122"/>
-                          <a:cs typeface="Arial" pitchFamily="34" charset="-120"/>
-                        </a:rPr>
-                        <a:t>Días sin fecha al lado («aquel lunes») y duraciones no se validan</a:t>
-                      </a:r>
-                      <a:endParaRPr lang="en-US" sz="800" dirty="0">
-                        <a:latin typeface="Arial" charset="0"/>
-                        <a:ea typeface="Arial" charset="0"/>
-                        <a:cs typeface="Arial" charset="0"/>
-                      </a:endParaRPr>
-                    </a:p>
-                  </a:txBody>
-                  <a:tcPr marL="45720" marR="45720" marT="45720" marB="45720" anchor="ctr">
-                    <a:lnL w="6350" cap="flat" cmpd="sng" algn="ctr">
-                      <a:solidFill>
-                        <a:srgbClr val="E6E9EC"/>
-                      </a:solidFill>
-                      <a:prstDash val="solid"/>
-                      <a:round/>
-                      <a:headEnd type="none" w="med" len="med"/>
-                      <a:tailEnd type="none" w="med" len="med"/>
-                    </a:lnL>
-                    <a:lnR w="6350" cap="flat" cmpd="sng" algn="ctr">
-                      <a:solidFill>
-                        <a:srgbClr val="E6E9EC"/>
-                      </a:solidFill>
-                      <a:prstDash val="solid"/>
-                      <a:round/>
-                      <a:headEnd type="none" w="med" len="med"/>
-                      <a:tailEnd type="none" w="med" len="med"/>
-                    </a:lnR>
-                    <a:lnT w="6350" cap="flat" cmpd="sng" algn="ctr">
-                      <a:solidFill>
-                        <a:srgbClr val="E6E9EC"/>
-                      </a:solidFill>
-                      <a:prstDash val="solid"/>
-                      <a:round/>
-                      <a:headEnd type="none" w="med" len="med"/>
-                      <a:tailEnd type="none" w="med" len="med"/>
-                    </a:lnT>
-                    <a:lnB w="6350" cap="flat" cmpd="sng" algn="ctr">
-                      <a:solidFill>
-                        <a:srgbClr val="E6E9EC"/>
-                      </a:solidFill>
-                      <a:prstDash val="solid"/>
-                      <a:round/>
-                      <a:headEnd type="none" w="med" len="med"/>
-                      <a:tailEnd type="none" w="med" len="med"/>
-                    </a:lnB>
-                    <a:solidFill>
-                      <a:srgbClr val="FFFFFF"/>
-                    </a:solidFill>
-                  </a:tcPr>
-                </a:tc>
-                <a:tc>
-                  <a:txBody>
-                    <a:bodyPr/>
-                    <a:lstStyle/>
-                    <a:p>
-                      <a:pPr indent="0" marL="0">
-                        <a:buNone/>
-                      </a:pPr>
-                      <a:r>
-                        <a:rPr lang="en-US" sz="800" dirty="0">
-                          <a:solidFill>
-                            <a:srgbClr val="1E2B37"/>
-                          </a:solidFill>
-                          <a:latin typeface="Arial" pitchFamily="34" charset="0"/>
-                          <a:ea typeface="Arial" pitchFamily="34" charset="-122"/>
-                          <a:cs typeface="Arial" pitchFamily="34" charset="-120"/>
-                        </a:rPr>
-                        <a:t>extender calendar_consistency a la prosa</a:t>
-                      </a:r>
-                      <a:endParaRPr lang="en-US" sz="800" dirty="0">
-                        <a:latin typeface="Arial" charset="0"/>
-                        <a:ea typeface="Arial" charset="0"/>
-                        <a:cs typeface="Arial" charset="0"/>
-                      </a:endParaRPr>
-                    </a:p>
-                  </a:txBody>
-                  <a:tcPr marL="45720" marR="45720" marT="45720" marB="45720" anchor="ctr">
-                    <a:lnL w="6350" cap="flat" cmpd="sng" algn="ctr">
-                      <a:solidFill>
-                        <a:srgbClr val="E6E9EC"/>
-                      </a:solidFill>
-                      <a:prstDash val="solid"/>
-                      <a:round/>
-                      <a:headEnd type="none" w="med" len="med"/>
-                      <a:tailEnd type="none" w="med" len="med"/>
-                    </a:lnL>
-                    <a:lnR w="6350" cap="flat" cmpd="sng" algn="ctr">
-                      <a:solidFill>
-                        <a:srgbClr val="E6E9EC"/>
-                      </a:solidFill>
-                      <a:prstDash val="solid"/>
-                      <a:round/>
-                      <a:headEnd type="none" w="med" len="med"/>
-                      <a:tailEnd type="none" w="med" len="med"/>
-                    </a:lnR>
-                    <a:lnT w="6350" cap="flat" cmpd="sng" algn="ctr">
-                      <a:solidFill>
-                        <a:srgbClr val="E6E9EC"/>
-                      </a:solidFill>
-                      <a:prstDash val="solid"/>
-                      <a:round/>
-                      <a:headEnd type="none" w="med" len="med"/>
-                      <a:tailEnd type="none" w="med" len="med"/>
-                    </a:lnT>
-                    <a:lnB w="6350" cap="flat" cmpd="sng" algn="ctr">
-                      <a:solidFill>
-                        <a:srgbClr val="E6E9EC"/>
-                      </a:solidFill>
-                      <a:prstDash val="solid"/>
-                      <a:round/>
-                      <a:headEnd type="none" w="med" len="med"/>
-                      <a:tailEnd type="none" w="med" len="med"/>
-                    </a:lnB>
-                    <a:solidFill>
-                      <a:srgbClr val="FFFFFF"/>
-                    </a:solidFill>
-                  </a:tcPr>
-                </a:tc>
-              </a:tr>
-              <a:tr h="384048">
-                <a:tc>
-                  <a:txBody>
-                    <a:bodyPr/>
-                    <a:lstStyle/>
-                    <a:p>
-                      <a:pPr indent="0" marL="0">
-                        <a:buNone/>
-                      </a:pPr>
-                      <a:r>
-                        <a:rPr lang="en-US" sz="800" dirty="0">
-                          <a:solidFill>
-                            <a:srgbClr val="1E2B37"/>
-                          </a:solidFill>
-                          <a:latin typeface="Arial" pitchFamily="34" charset="0"/>
-                          <a:ea typeface="Arial" pitchFamily="34" charset="-122"/>
-                          <a:cs typeface="Arial" pitchFamily="34" charset="-120"/>
-                        </a:rPr>
-                        <a:t>Lean solo prueba lo que el planner registra en la cronología</a:t>
-                      </a:r>
-                      <a:endParaRPr lang="en-US" sz="800" dirty="0">
-                        <a:latin typeface="Arial" charset="0"/>
-                        <a:ea typeface="Arial" charset="0"/>
-                        <a:cs typeface="Arial" charset="0"/>
-                      </a:endParaRPr>
-                    </a:p>
-                  </a:txBody>
-                  <a:tcPr marL="45720" marR="45720" marT="45720" marB="45720" anchor="ctr">
-                    <a:lnL w="6350" cap="flat" cmpd="sng" algn="ctr">
-                      <a:solidFill>
-                        <a:srgbClr val="E6E9EC"/>
-                      </a:solidFill>
-                      <a:prstDash val="solid"/>
-                      <a:round/>
-                      <a:headEnd type="none" w="med" len="med"/>
-                      <a:tailEnd type="none" w="med" len="med"/>
-                    </a:lnL>
-                    <a:lnR w="6350" cap="flat" cmpd="sng" algn="ctr">
-                      <a:solidFill>
-                        <a:srgbClr val="E6E9EC"/>
-                      </a:solidFill>
-                      <a:prstDash val="solid"/>
-                      <a:round/>
-                      <a:headEnd type="none" w="med" len="med"/>
-                      <a:tailEnd type="none" w="med" len="med"/>
-                    </a:lnR>
-                    <a:lnT w="6350" cap="flat" cmpd="sng" algn="ctr">
-                      <a:solidFill>
-                        <a:srgbClr val="E6E9EC"/>
-                      </a:solidFill>
-                      <a:prstDash val="solid"/>
-                      <a:round/>
-                      <a:headEnd type="none" w="med" len="med"/>
-                      <a:tailEnd type="none" w="med" len="med"/>
-                    </a:lnT>
-                    <a:lnB w="6350" cap="flat" cmpd="sng" algn="ctr">
-                      <a:solidFill>
-                        <a:srgbClr val="E6E9EC"/>
-                      </a:solidFill>
-                      <a:prstDash val="solid"/>
-                      <a:round/>
-                      <a:headEnd type="none" w="med" len="med"/>
-                      <a:tailEnd type="none" w="med" len="med"/>
-                    </a:lnB>
-                    <a:solidFill>
-                      <a:srgbClr val="F7F8FA"/>
-                    </a:solidFill>
-                  </a:tcPr>
-                </a:tc>
-                <a:tc>
-                  <a:txBody>
-                    <a:bodyPr/>
-                    <a:lstStyle/>
-                    <a:p>
-                      <a:pPr indent="0" marL="0">
-                        <a:buNone/>
-                      </a:pPr>
-                      <a:r>
-                        <a:rPr lang="en-US" sz="800" dirty="0">
-                          <a:solidFill>
-                            <a:srgbClr val="1E2B37"/>
-                          </a:solidFill>
-                          <a:latin typeface="Arial" pitchFamily="34" charset="0"/>
-                          <a:ea typeface="Arial" pitchFamily="34" charset="-122"/>
-                          <a:cs typeface="Arial" pitchFamily="34" charset="-120"/>
-                        </a:rPr>
-                        <a:t>evento «departure» obligatorio si el brief dice que alguien se fue</a:t>
-                      </a:r>
-                      <a:endParaRPr lang="en-US" sz="800" dirty="0">
-                        <a:latin typeface="Arial" charset="0"/>
-                        <a:ea typeface="Arial" charset="0"/>
-                        <a:cs typeface="Arial" charset="0"/>
-                      </a:endParaRPr>
-                    </a:p>
-                  </a:txBody>
-                  <a:tcPr marL="45720" marR="45720" marT="45720" marB="45720" anchor="ctr">
-                    <a:lnL w="6350" cap="flat" cmpd="sng" algn="ctr">
-                      <a:solidFill>
-                        <a:srgbClr val="E6E9EC"/>
-                      </a:solidFill>
-                      <a:prstDash val="solid"/>
-                      <a:round/>
-                      <a:headEnd type="none" w="med" len="med"/>
-                      <a:tailEnd type="none" w="med" len="med"/>
-                    </a:lnL>
-                    <a:lnR w="6350" cap="flat" cmpd="sng" algn="ctr">
-                      <a:solidFill>
-                        <a:srgbClr val="E6E9EC"/>
-                      </a:solidFill>
-                      <a:prstDash val="solid"/>
-                      <a:round/>
-                      <a:headEnd type="none" w="med" len="med"/>
-                      <a:tailEnd type="none" w="med" len="med"/>
-                    </a:lnR>
-                    <a:lnT w="6350" cap="flat" cmpd="sng" algn="ctr">
-                      <a:solidFill>
-                        <a:srgbClr val="E6E9EC"/>
-                      </a:solidFill>
-                      <a:prstDash val="solid"/>
-                      <a:round/>
-                      <a:headEnd type="none" w="med" len="med"/>
-                      <a:tailEnd type="none" w="med" len="med"/>
-                    </a:lnT>
-                    <a:lnB w="6350" cap="flat" cmpd="sng" algn="ctr">
-                      <a:solidFill>
-                        <a:srgbClr val="E6E9EC"/>
-                      </a:solidFill>
-                      <a:prstDash val="solid"/>
-                      <a:round/>
-                      <a:headEnd type="none" w="med" len="med"/>
-                      <a:tailEnd type="none" w="med" len="med"/>
-                    </a:lnB>
-                    <a:solidFill>
-                      <a:srgbClr val="F7F8FA"/>
-                    </a:solidFill>
-                  </a:tcPr>
-                </a:tc>
-              </a:tr>
-              <a:tr h="384048">
-                <a:tc>
-                  <a:txBody>
-                    <a:bodyPr/>
-                    <a:lstStyle/>
-                    <a:p>
-                      <a:pPr indent="0" marL="0">
-                        <a:buNone/>
-                      </a:pPr>
-                      <a:r>
-                        <a:rPr lang="en-US" sz="800" dirty="0">
-                          <a:solidFill>
-                            <a:srgbClr val="1E2B37"/>
-                          </a:solidFill>
-                          <a:latin typeface="Arial" pitchFamily="34" charset="0"/>
-                          <a:ea typeface="Arial" pitchFamily="34" charset="-122"/>
-                          <a:cs typeface="Arial" pitchFamily="34" charset="-120"/>
-                        </a:rPr>
-                        <a:t>Un brief contradictorio bloquea bien pero caro (b4: timeout de 45 min)</a:t>
-                      </a:r>
-                      <a:endParaRPr lang="en-US" sz="800" dirty="0">
-                        <a:latin typeface="Arial" charset="0"/>
-                        <a:ea typeface="Arial" charset="0"/>
-                        <a:cs typeface="Arial" charset="0"/>
-                      </a:endParaRPr>
-                    </a:p>
-                  </a:txBody>
-                  <a:tcPr marL="45720" marR="45720" marT="45720" marB="45720" anchor="ctr">
-                    <a:lnL w="6350" cap="flat" cmpd="sng" algn="ctr">
-                      <a:solidFill>
-                        <a:srgbClr val="E6E9EC"/>
-                      </a:solidFill>
-                      <a:prstDash val="solid"/>
-                      <a:round/>
-                      <a:headEnd type="none" w="med" len="med"/>
-                      <a:tailEnd type="none" w="med" len="med"/>
-                    </a:lnL>
-                    <a:lnR w="6350" cap="flat" cmpd="sng" algn="ctr">
-                      <a:solidFill>
-                        <a:srgbClr val="E6E9EC"/>
-                      </a:solidFill>
-                      <a:prstDash val="solid"/>
-                      <a:round/>
-                      <a:headEnd type="none" w="med" len="med"/>
-                      <a:tailEnd type="none" w="med" len="med"/>
-                    </a:lnR>
-                    <a:lnT w="6350" cap="flat" cmpd="sng" algn="ctr">
-                      <a:solidFill>
-                        <a:srgbClr val="E6E9EC"/>
-                      </a:solidFill>
-                      <a:prstDash val="solid"/>
-                      <a:round/>
-                      <a:headEnd type="none" w="med" len="med"/>
-                      <a:tailEnd type="none" w="med" len="med"/>
-                    </a:lnT>
-                    <a:lnB w="6350" cap="flat" cmpd="sng" algn="ctr">
-                      <a:solidFill>
-                        <a:srgbClr val="E6E9EC"/>
-                      </a:solidFill>
-                      <a:prstDash val="solid"/>
-                      <a:round/>
-                      <a:headEnd type="none" w="med" len="med"/>
-                      <a:tailEnd type="none" w="med" len="med"/>
-                    </a:lnB>
-                    <a:solidFill>
-                      <a:srgbClr val="FFFFFF"/>
-                    </a:solidFill>
-                  </a:tcPr>
-                </a:tc>
-                <a:tc>
-                  <a:txBody>
-                    <a:bodyPr/>
-                    <a:lstStyle/>
-                    <a:p>
-                      <a:pPr indent="0" marL="0">
-                        <a:buNone/>
-                      </a:pPr>
-                      <a:r>
-                        <a:rPr lang="en-US" sz="800" dirty="0">
-                          <a:solidFill>
-                            <a:srgbClr val="1E2B37"/>
-                          </a:solidFill>
-                          <a:latin typeface="Arial" pitchFamily="34" charset="0"/>
-                          <a:ea typeface="Arial" pitchFamily="34" charset="-122"/>
-                          <a:cs typeface="Arial" pitchFamily="34" charset="-120"/>
-                        </a:rPr>
-                        <a:t>prechequeo del plan más estricto; parar antes de escribir</a:t>
-                      </a:r>
-                      <a:endParaRPr lang="en-US" sz="800" dirty="0">
-                        <a:latin typeface="Arial" charset="0"/>
-                        <a:ea typeface="Arial" charset="0"/>
-                        <a:cs typeface="Arial" charset="0"/>
-                      </a:endParaRPr>
-                    </a:p>
-                  </a:txBody>
-                  <a:tcPr marL="45720" marR="45720" marT="45720" marB="45720" anchor="ctr">
-                    <a:lnL w="6350" cap="flat" cmpd="sng" algn="ctr">
-                      <a:solidFill>
-                        <a:srgbClr val="E6E9EC"/>
-                      </a:solidFill>
-                      <a:prstDash val="solid"/>
-                      <a:round/>
-                      <a:headEnd type="none" w="med" len="med"/>
-                      <a:tailEnd type="none" w="med" len="med"/>
-                    </a:lnL>
-                    <a:lnR w="6350" cap="flat" cmpd="sng" algn="ctr">
-                      <a:solidFill>
-                        <a:srgbClr val="E6E9EC"/>
-                      </a:solidFill>
-                      <a:prstDash val="solid"/>
-                      <a:round/>
-                      <a:headEnd type="none" w="med" len="med"/>
-                      <a:tailEnd type="none" w="med" len="med"/>
-                    </a:lnR>
-                    <a:lnT w="6350" cap="flat" cmpd="sng" algn="ctr">
-                      <a:solidFill>
-                        <a:srgbClr val="E6E9EC"/>
-                      </a:solidFill>
-                      <a:prstDash val="solid"/>
-                      <a:round/>
-                      <a:headEnd type="none" w="med" len="med"/>
-                      <a:tailEnd type="none" w="med" len="med"/>
-                    </a:lnT>
-                    <a:lnB w="6350" cap="flat" cmpd="sng" algn="ctr">
-                      <a:solidFill>
-                        <a:srgbClr val="E6E9EC"/>
-                      </a:solidFill>
-                      <a:prstDash val="solid"/>
-                      <a:round/>
-                      <a:headEnd type="none" w="med" len="med"/>
-                      <a:tailEnd type="none" w="med" len="med"/>
-                    </a:lnB>
-                    <a:solidFill>
-                      <a:srgbClr val="FFFFFF"/>
-                    </a:solidFill>
-                  </a:tcPr>
-                </a:tc>
-              </a:tr>
-              <a:tr h="384048">
-                <a:tc>
-                  <a:txBody>
-                    <a:bodyPr/>
-                    <a:lstStyle/>
-                    <a:p>
-                      <a:pPr indent="0" marL="0">
-                        <a:buNone/>
-                      </a:pPr>
-                      <a:r>
-                        <a:rPr lang="en-US" sz="800" dirty="0">
-                          <a:solidFill>
-                            <a:srgbClr val="1E2B37"/>
-                          </a:solidFill>
-                          <a:latin typeface="Arial" pitchFamily="34" charset="0"/>
-                          <a:ea typeface="Arial" pitchFamily="34" charset="-122"/>
-                          <a:cs typeface="Arial" pitchFamily="34" charset="-120"/>
-                        </a:rPr>
-                        <a:t>Fichas de personajes sin versionar (solo el nombre)</a:t>
-                      </a:r>
-                      <a:endParaRPr lang="en-US" sz="800" dirty="0">
-                        <a:latin typeface="Arial" charset="0"/>
-                        <a:ea typeface="Arial" charset="0"/>
-                        <a:cs typeface="Arial" charset="0"/>
-                      </a:endParaRPr>
-                    </a:p>
-                  </a:txBody>
-                  <a:tcPr marL="45720" marR="45720" marT="45720" marB="45720" anchor="ctr">
-                    <a:lnL w="6350" cap="flat" cmpd="sng" algn="ctr">
-                      <a:solidFill>
-                        <a:srgbClr val="E6E9EC"/>
-                      </a:solidFill>
-                      <a:prstDash val="solid"/>
-                      <a:round/>
-                      <a:headEnd type="none" w="med" len="med"/>
-                      <a:tailEnd type="none" w="med" len="med"/>
-                    </a:lnL>
-                    <a:lnR w="6350" cap="flat" cmpd="sng" algn="ctr">
-                      <a:solidFill>
-                        <a:srgbClr val="E6E9EC"/>
-                      </a:solidFill>
-                      <a:prstDash val="solid"/>
-                      <a:round/>
-                      <a:headEnd type="none" w="med" len="med"/>
-                      <a:tailEnd type="none" w="med" len="med"/>
-                    </a:lnR>
-                    <a:lnT w="6350" cap="flat" cmpd="sng" algn="ctr">
-                      <a:solidFill>
-                        <a:srgbClr val="E6E9EC"/>
-                      </a:solidFill>
-                      <a:prstDash val="solid"/>
-                      <a:round/>
-                      <a:headEnd type="none" w="med" len="med"/>
-                      <a:tailEnd type="none" w="med" len="med"/>
-                    </a:lnT>
-                    <a:lnB w="6350" cap="flat" cmpd="sng" algn="ctr">
-                      <a:solidFill>
-                        <a:srgbClr val="E6E9EC"/>
-                      </a:solidFill>
-                      <a:prstDash val="solid"/>
-                      <a:round/>
-                      <a:headEnd type="none" w="med" len="med"/>
-                      <a:tailEnd type="none" w="med" len="med"/>
-                    </a:lnB>
-                    <a:solidFill>
-                      <a:srgbClr val="F7F8FA"/>
-                    </a:solidFill>
-                  </a:tcPr>
-                </a:tc>
-                <a:tc>
-                  <a:txBody>
-                    <a:bodyPr/>
-                    <a:lstStyle/>
-                    <a:p>
-                      <a:pPr indent="0" marL="0">
-                        <a:buNone/>
-                      </a:pPr>
-                      <a:r>
-                        <a:rPr lang="en-US" sz="800" dirty="0">
-                          <a:solidFill>
-                            <a:srgbClr val="1E2B37"/>
-                          </a:solidFill>
-                          <a:latin typeface="Arial" pitchFamily="34" charset="0"/>
-                          <a:ea typeface="Arial" pitchFamily="34" charset="-122"/>
-                          <a:cs typeface="Arial" pitchFamily="34" charset="-120"/>
-                        </a:rPr>
-                        <a:t>versionar reparto por versión</a:t>
-                      </a:r>
-                      <a:endParaRPr lang="en-US" sz="800" dirty="0">
-                        <a:latin typeface="Arial" charset="0"/>
-                        <a:ea typeface="Arial" charset="0"/>
-                        <a:cs typeface="Arial" charset="0"/>
-                      </a:endParaRPr>
-                    </a:p>
-                  </a:txBody>
-                  <a:tcPr marL="45720" marR="45720" marT="45720" marB="45720" anchor="ctr">
-                    <a:lnL w="6350" cap="flat" cmpd="sng" algn="ctr">
-                      <a:solidFill>
-                        <a:srgbClr val="E6E9EC"/>
-                      </a:solidFill>
-                      <a:prstDash val="solid"/>
-                      <a:round/>
-                      <a:headEnd type="none" w="med" len="med"/>
-                      <a:tailEnd type="none" w="med" len="med"/>
-                    </a:lnL>
-                    <a:lnR w="6350" cap="flat" cmpd="sng" algn="ctr">
-                      <a:solidFill>
-                        <a:srgbClr val="E6E9EC"/>
-                      </a:solidFill>
-                      <a:prstDash val="solid"/>
-                      <a:round/>
-                      <a:headEnd type="none" w="med" len="med"/>
-                      <a:tailEnd type="none" w="med" len="med"/>
-                    </a:lnR>
-                    <a:lnT w="6350" cap="flat" cmpd="sng" algn="ctr">
-                      <a:solidFill>
-                        <a:srgbClr val="E6E9EC"/>
-                      </a:solidFill>
-                      <a:prstDash val="solid"/>
-                      <a:round/>
-                      <a:headEnd type="none" w="med" len="med"/>
-                      <a:tailEnd type="none" w="med" len="med"/>
-                    </a:lnT>
-                    <a:lnB w="6350" cap="flat" cmpd="sng" algn="ctr">
-                      <a:solidFill>
-                        <a:srgbClr val="E6E9EC"/>
-                      </a:solidFill>
-                      <a:prstDash val="solid"/>
-                      <a:round/>
-                      <a:headEnd type="none" w="med" len="med"/>
-                      <a:tailEnd type="none" w="med" len="med"/>
-                    </a:lnB>
-                    <a:solidFill>
-                      <a:srgbClr val="F7F8FA"/>
-                    </a:solidFill>
-                  </a:tcPr>
-                </a:tc>
-              </a:tr>
-              <a:tr h="384048">
-                <a:tc>
-                  <a:txBody>
-                    <a:bodyPr/>
-                    <a:lstStyle/>
-                    <a:p>
-                      <a:pPr indent="0" marL="0">
-                        <a:buNone/>
-                      </a:pPr>
-                      <a:r>
-                        <a:rPr lang="en-US" sz="800" dirty="0">
-                          <a:solidFill>
-                            <a:srgbClr val="1E2B37"/>
-                          </a:solidFill>
-                          <a:latin typeface="Arial" pitchFamily="34" charset="0"/>
-                          <a:ea typeface="Arial" pitchFamily="34" charset="-122"/>
-                          <a:cs typeface="Arial" pitchFamily="34" charset="-120"/>
-                        </a:rPr>
-                        <a:t>Datos personales reales en prompts y trazas</a:t>
-                      </a:r>
-                      <a:endParaRPr lang="en-US" sz="800" dirty="0">
-                        <a:latin typeface="Arial" charset="0"/>
-                        <a:ea typeface="Arial" charset="0"/>
-                        <a:cs typeface="Arial" charset="0"/>
-                      </a:endParaRPr>
-                    </a:p>
-                  </a:txBody>
-                  <a:tcPr marL="45720" marR="45720" marT="45720" marB="45720" anchor="ctr">
-                    <a:lnL w="6350" cap="flat" cmpd="sng" algn="ctr">
-                      <a:solidFill>
-                        <a:srgbClr val="E6E9EC"/>
-                      </a:solidFill>
-                      <a:prstDash val="solid"/>
-                      <a:round/>
-                      <a:headEnd type="none" w="med" len="med"/>
-                      <a:tailEnd type="none" w="med" len="med"/>
-                    </a:lnL>
-                    <a:lnR w="6350" cap="flat" cmpd="sng" algn="ctr">
-                      <a:solidFill>
-                        <a:srgbClr val="E6E9EC"/>
-                      </a:solidFill>
-                      <a:prstDash val="solid"/>
-                      <a:round/>
-                      <a:headEnd type="none" w="med" len="med"/>
-                      <a:tailEnd type="none" w="med" len="med"/>
-                    </a:lnR>
-                    <a:lnT w="6350" cap="flat" cmpd="sng" algn="ctr">
-                      <a:solidFill>
-                        <a:srgbClr val="E6E9EC"/>
-                      </a:solidFill>
-                      <a:prstDash val="solid"/>
-                      <a:round/>
-                      <a:headEnd type="none" w="med" len="med"/>
-                      <a:tailEnd type="none" w="med" len="med"/>
-                    </a:lnT>
-                    <a:lnB w="6350" cap="flat" cmpd="sng" algn="ctr">
-                      <a:solidFill>
-                        <a:srgbClr val="E6E9EC"/>
-                      </a:solidFill>
-                      <a:prstDash val="solid"/>
-                      <a:round/>
-                      <a:headEnd type="none" w="med" len="med"/>
-                      <a:tailEnd type="none" w="med" len="med"/>
-                    </a:lnB>
-                    <a:solidFill>
-                      <a:srgbClr val="FFFFFF"/>
-                    </a:solidFill>
-                  </a:tcPr>
-                </a:tc>
-                <a:tc>
-                  <a:txBody>
-                    <a:bodyPr/>
-                    <a:lstStyle/>
-                    <a:p>
-                      <a:pPr indent="0" marL="0">
-                        <a:buNone/>
-                      </a:pPr>
-                      <a:r>
-                        <a:rPr lang="en-US" sz="800" dirty="0">
-                          <a:solidFill>
-                            <a:srgbClr val="1E2B37"/>
-                          </a:solidFill>
-                          <a:latin typeface="Arial" pitchFamily="34" charset="0"/>
-                          <a:ea typeface="Arial" pitchFamily="34" charset="-122"/>
-                          <a:cs typeface="Arial" pitchFamily="34" charset="-120"/>
-                        </a:rPr>
-                        <a:t>enmascarado en Langfuse, borrado a petición y DPA (piloto)</a:t>
-                      </a:r>
-                      <a:endParaRPr lang="en-US" sz="800" dirty="0">
-                        <a:latin typeface="Arial" charset="0"/>
-                        <a:ea typeface="Arial" charset="0"/>
-                        <a:cs typeface="Arial" charset="0"/>
-                      </a:endParaRPr>
-                    </a:p>
-                  </a:txBody>
-                  <a:tcPr marL="45720" marR="45720" marT="45720" marB="45720" anchor="ctr">
-                    <a:lnL w="6350" cap="flat" cmpd="sng" algn="ctr">
-                      <a:solidFill>
-                        <a:srgbClr val="E6E9EC"/>
-                      </a:solidFill>
-                      <a:prstDash val="solid"/>
-                      <a:round/>
-                      <a:headEnd type="none" w="med" len="med"/>
-                      <a:tailEnd type="none" w="med" len="med"/>
-                    </a:lnL>
-                    <a:lnR w="6350" cap="flat" cmpd="sng" algn="ctr">
-                      <a:solidFill>
-                        <a:srgbClr val="E6E9EC"/>
-                      </a:solidFill>
-                      <a:prstDash val="solid"/>
-                      <a:round/>
-                      <a:headEnd type="none" w="med" len="med"/>
-                      <a:tailEnd type="none" w="med" len="med"/>
-                    </a:lnR>
-                    <a:lnT w="6350" cap="flat" cmpd="sng" algn="ctr">
-                      <a:solidFill>
-                        <a:srgbClr val="E6E9EC"/>
-                      </a:solidFill>
-                      <a:prstDash val="solid"/>
-                      <a:round/>
-                      <a:headEnd type="none" w="med" len="med"/>
-                      <a:tailEnd type="none" w="med" len="med"/>
-                    </a:lnT>
-                    <a:lnB w="6350" cap="flat" cmpd="sng" algn="ctr">
-                      <a:solidFill>
-                        <a:srgbClr val="E6E9EC"/>
-                      </a:solidFill>
-                      <a:prstDash val="solid"/>
-                      <a:round/>
-                      <a:headEnd type="none" w="med" len="med"/>
-                      <a:tailEnd type="none" w="med" len="med"/>
-                    </a:lnB>
-                    <a:solidFill>
-                      <a:srgbClr val="FFFFFF"/>
-                    </a:solidFill>
-                  </a:tcPr>
-                </a:tc>
-              </a:tr>
-              <a:tr h="384048">
-                <a:tc>
-                  <a:txBody>
-                    <a:bodyPr/>
-                    <a:lstStyle/>
-                    <a:p>
-                      <a:pPr indent="0" marL="0">
-                        <a:buNone/>
-                      </a:pPr>
-                      <a:r>
-                        <a:rPr lang="en-US" sz="800" dirty="0">
-                          <a:solidFill>
-                            <a:srgbClr val="1E2B37"/>
-                          </a:solidFill>
-                          <a:latin typeface="Arial" pitchFamily="34" charset="0"/>
-                          <a:ea typeface="Arial" pitchFamily="34" charset="-122"/>
-                          <a:cs typeface="Arial" pitchFamily="34" charset="-120"/>
-                        </a:rPr>
-                        <a:t>Juez aún no calibrado con revisión humana</a:t>
-                      </a:r>
-                      <a:endParaRPr lang="en-US" sz="800" dirty="0">
-                        <a:latin typeface="Arial" charset="0"/>
-                        <a:ea typeface="Arial" charset="0"/>
-                        <a:cs typeface="Arial" charset="0"/>
-                      </a:endParaRPr>
-                    </a:p>
-                  </a:txBody>
-                  <a:tcPr marL="45720" marR="45720" marT="45720" marB="45720" anchor="ctr">
-                    <a:lnL w="6350" cap="flat" cmpd="sng" algn="ctr">
-                      <a:solidFill>
-                        <a:srgbClr val="E6E9EC"/>
-                      </a:solidFill>
-                      <a:prstDash val="solid"/>
-                      <a:round/>
-                      <a:headEnd type="none" w="med" len="med"/>
-                      <a:tailEnd type="none" w="med" len="med"/>
-                    </a:lnL>
-                    <a:lnR w="6350" cap="flat" cmpd="sng" algn="ctr">
-                      <a:solidFill>
-                        <a:srgbClr val="E6E9EC"/>
-                      </a:solidFill>
-                      <a:prstDash val="solid"/>
-                      <a:round/>
-                      <a:headEnd type="none" w="med" len="med"/>
-                      <a:tailEnd type="none" w="med" len="med"/>
-                    </a:lnR>
-                    <a:lnT w="6350" cap="flat" cmpd="sng" algn="ctr">
-                      <a:solidFill>
-                        <a:srgbClr val="E6E9EC"/>
-                      </a:solidFill>
-                      <a:prstDash val="solid"/>
-                      <a:round/>
-                      <a:headEnd type="none" w="med" len="med"/>
-                      <a:tailEnd type="none" w="med" len="med"/>
-                    </a:lnT>
-                    <a:lnB w="6350" cap="flat" cmpd="sng" algn="ctr">
-                      <a:solidFill>
-                        <a:srgbClr val="E6E9EC"/>
-                      </a:solidFill>
-                      <a:prstDash val="solid"/>
-                      <a:round/>
-                      <a:headEnd type="none" w="med" len="med"/>
-                      <a:tailEnd type="none" w="med" len="med"/>
-                    </a:lnB>
-                    <a:solidFill>
-                      <a:srgbClr val="F7F8FA"/>
-                    </a:solidFill>
-                  </a:tcPr>
-                </a:tc>
-                <a:tc>
-                  <a:txBody>
-                    <a:bodyPr/>
-                    <a:lstStyle/>
-                    <a:p>
-                      <a:pPr indent="0" marL="0">
-                        <a:buNone/>
-                      </a:pPr>
-                      <a:r>
-                        <a:rPr lang="en-US" sz="800" dirty="0">
-                          <a:solidFill>
-                            <a:srgbClr val="1E2B37"/>
-                          </a:solidFill>
-                          <a:latin typeface="Arial" pitchFamily="34" charset="0"/>
-                          <a:ea typeface="Arial" pitchFamily="34" charset="-122"/>
-                          <a:cs typeface="Arial" pitchFamily="34" charset="-120"/>
-                        </a:rPr>
-                        <a:t>QA editorial de 50 novelas con la misma rúbrica</a:t>
-                      </a:r>
-                      <a:endParaRPr lang="en-US" sz="800" dirty="0">
-                        <a:latin typeface="Arial" charset="0"/>
-                        <a:ea typeface="Arial" charset="0"/>
-                        <a:cs typeface="Arial" charset="0"/>
-                      </a:endParaRPr>
-                    </a:p>
-                  </a:txBody>
-                  <a:tcPr marL="45720" marR="45720" marT="45720" marB="45720" anchor="ctr">
-                    <a:lnL w="6350" cap="flat" cmpd="sng" algn="ctr">
-                      <a:solidFill>
-                        <a:srgbClr val="E6E9EC"/>
-                      </a:solidFill>
-                      <a:prstDash val="solid"/>
-                      <a:round/>
-                      <a:headEnd type="none" w="med" len="med"/>
-                      <a:tailEnd type="none" w="med" len="med"/>
-                    </a:lnL>
-                    <a:lnR w="6350" cap="flat" cmpd="sng" algn="ctr">
-                      <a:solidFill>
-                        <a:srgbClr val="E6E9EC"/>
-                      </a:solidFill>
-                      <a:prstDash val="solid"/>
-                      <a:round/>
-                      <a:headEnd type="none" w="med" len="med"/>
-                      <a:tailEnd type="none" w="med" len="med"/>
-                    </a:lnR>
-                    <a:lnT w="6350" cap="flat" cmpd="sng" algn="ctr">
-                      <a:solidFill>
-                        <a:srgbClr val="E6E9EC"/>
-                      </a:solidFill>
-                      <a:prstDash val="solid"/>
-                      <a:round/>
-                      <a:headEnd type="none" w="med" len="med"/>
-                      <a:tailEnd type="none" w="med" len="med"/>
-                    </a:lnT>
-                    <a:lnB w="6350" cap="flat" cmpd="sng" algn="ctr">
-                      <a:solidFill>
-                        <a:srgbClr val="E6E9EC"/>
-                      </a:solidFill>
-                      <a:prstDash val="solid"/>
-                      <a:round/>
-                      <a:headEnd type="none" w="med" len="med"/>
-                      <a:tailEnd type="none" w="med" len="med"/>
-                    </a:lnB>
-                    <a:solidFill>
-                      <a:srgbClr val="F7F8FA"/>
-                    </a:solidFill>
-                  </a:tcPr>
-                </a:tc>
-              </a:tr>
-            </a:tbl>
-          </a:graphicData>
-        </a:graphic>
-      </p:graphicFrame>
-      <p:sp>
-        <p:nvSpPr>
-          <p:cNvPr id="9" name="Text 4"/>
-          <p:cNvSpPr txBox="1"/>
-          <p:nvPr/>
-        </p:nvSpPr>
-        <p:spPr>
-          <a:xfrm>
-            <a:off x="5989320" y="1188720"/>
-            <a:ext cx="2743200" cy="256032"/>
-          </a:xfrm>
-          <a:prstGeom prst="rect">
-            <a:avLst/>
-          </a:prstGeom>
-          <a:noFill/>
-          <a:ln/>
-        </p:spPr>
-        <p:txBody>
-          <a:bodyPr wrap="square" lIns="0" tIns="0" rIns="0" bIns="0" rtlCol="0" anchor="t"/>
-          <a:lstStyle/>
-          <a:p>
-            <a:pPr indent="0" marL="0">
-              <a:buNone/>
-            </a:pPr>
-            <a:r>
-              <a:rPr lang="en-US" sz="1200" b="1" dirty="0">
-                <a:solidFill>
-                  <a:srgbClr val="1E2B37"/>
-                </a:solidFill>
-                <a:latin typeface="Arial" pitchFamily="34" charset="0"/>
-                <a:ea typeface="Arial" pitchFamily="34" charset="-122"/>
-                <a:cs typeface="Arial" pitchFamily="34" charset="-120"/>
-              </a:rPr>
-              <a:t>Siguientes pasos</a:t>
-            </a:r>
-            <a:endParaRPr lang="en-US" sz="1200" dirty="0"/>
-          </a:p>
-        </p:txBody>
-      </p:sp>
-      <p:sp>
-        <p:nvSpPr>
-          <p:cNvPr id="10" name="Shape 5"/>
-          <p:cNvSpPr/>
-          <p:nvPr/>
-        </p:nvSpPr>
-        <p:spPr>
-          <a:xfrm>
-            <a:off x="5989320" y="1554480"/>
-            <a:ext cx="329184" cy="329184"/>
-          </a:xfrm>
-          <a:prstGeom prst="roundRect">
-            <a:avLst>
-              <a:gd name="adj" fmla="val 22222"/>
-            </a:avLst>
-          </a:prstGeom>
-          <a:solidFill>
-            <a:srgbClr val="1E2B37"/>
-          </a:solidFill>
-          <a:ln/>
-        </p:spPr>
-      </p:sp>
-      <p:sp>
-        <p:nvSpPr>
-          <p:cNvPr id="11" name="Text 6"/>
-          <p:cNvSpPr txBox="1"/>
-          <p:nvPr/>
-        </p:nvSpPr>
-        <p:spPr>
-          <a:xfrm>
-            <a:off x="5989320" y="1554480"/>
-            <a:ext cx="329184" cy="329184"/>
-          </a:xfrm>
-          <a:prstGeom prst="rect">
-            <a:avLst/>
-          </a:prstGeom>
-          <a:noFill/>
-          <a:ln/>
-        </p:spPr>
-        <p:txBody>
-          <a:bodyPr wrap="square" lIns="0" tIns="0" rIns="0" bIns="0" rtlCol="0" anchor="ctr"/>
-          <a:lstStyle/>
-          <a:p>
-            <a:pPr algn="ctr" indent="0" marL="0">
-              <a:buNone/>
-            </a:pPr>
-            <a:r>
-              <a:rPr lang="en-US" sz="1100" b="1" dirty="0">
-                <a:solidFill>
-                  <a:srgbClr val="FFFFFF"/>
-                </a:solidFill>
-                <a:latin typeface="Arial" pitchFamily="34" charset="0"/>
-                <a:ea typeface="Arial" pitchFamily="34" charset="-122"/>
-                <a:cs typeface="Arial" pitchFamily="34" charset="-120"/>
-              </a:rPr>
-              <a:t>1</a:t>
-            </a:r>
-            <a:endParaRPr lang="en-US" sz="1100" dirty="0"/>
-          </a:p>
-        </p:txBody>
-      </p:sp>
-      <p:sp>
-        <p:nvSpPr>
-          <p:cNvPr id="12" name="Shape 7"/>
-          <p:cNvSpPr/>
-          <p:nvPr/>
-        </p:nvSpPr>
-        <p:spPr>
-          <a:xfrm>
-            <a:off x="6153912" y="1901952"/>
-            <a:ext cx="0" cy="365760"/>
-          </a:xfrm>
-          <a:prstGeom prst="line">
-            <a:avLst/>
-          </a:prstGeom>
-          <a:noFill/>
-          <a:ln w="19050">
-            <a:solidFill>
-              <a:srgbClr val="E6E9EC"/>
-            </a:solidFill>
-            <a:prstDash val="solid"/>
-          </a:ln>
-        </p:spPr>
-      </p:sp>
-      <p:sp>
-        <p:nvSpPr>
-          <p:cNvPr id="13" name="Text 8"/>
-          <p:cNvSpPr txBox="1"/>
-          <p:nvPr/>
-        </p:nvSpPr>
-        <p:spPr>
-          <a:xfrm>
-            <a:off x="6446520" y="1536192"/>
-            <a:ext cx="2194560" cy="201168"/>
-          </a:xfrm>
-          <a:prstGeom prst="rect">
-            <a:avLst/>
-          </a:prstGeom>
-          <a:noFill/>
-          <a:ln/>
-        </p:spPr>
-        <p:txBody>
-          <a:bodyPr wrap="square" lIns="0" tIns="0" rIns="0" bIns="0" rtlCol="0" anchor="t"/>
-          <a:lstStyle/>
-          <a:p>
-            <a:pPr indent="0" marL="0">
-              <a:buNone/>
-            </a:pPr>
-            <a:r>
-              <a:rPr lang="en-US" sz="950" b="1" dirty="0">
-                <a:solidFill>
-                  <a:srgbClr val="1E2B37"/>
-                </a:solidFill>
-                <a:latin typeface="Arial" pitchFamily="34" charset="0"/>
-                <a:ea typeface="Arial" pitchFamily="34" charset="-122"/>
-                <a:cs typeface="Arial" pitchFamily="34" charset="-120"/>
-              </a:rPr>
-              <a:t>Semanas 1–2</a:t>
-            </a:r>
-            <a:endParaRPr lang="en-US" sz="950" dirty="0"/>
-          </a:p>
-        </p:txBody>
-      </p:sp>
-      <p:sp>
-        <p:nvSpPr>
-          <p:cNvPr id="14" name="Text 9"/>
-          <p:cNvSpPr txBox="1"/>
-          <p:nvPr/>
-        </p:nvSpPr>
-        <p:spPr>
-          <a:xfrm>
-            <a:off x="6446520" y="1737360"/>
-            <a:ext cx="2194560" cy="365760"/>
-          </a:xfrm>
-          <a:prstGeom prst="rect">
-            <a:avLst/>
-          </a:prstGeom>
-          <a:noFill/>
-          <a:ln/>
-        </p:spPr>
-        <p:txBody>
-          <a:bodyPr wrap="square" lIns="0" tIns="0" rIns="0" bIns="0" rtlCol="0" anchor="t"/>
-          <a:lstStyle/>
-          <a:p>
-            <a:pPr indent="0" marL="0">
-              <a:buNone/>
-            </a:pPr>
-            <a:r>
-              <a:rPr lang="en-US" sz="850" dirty="0">
-                <a:solidFill>
-                  <a:srgbClr val="3D4A56"/>
-                </a:solidFill>
-                <a:latin typeface="Arial" pitchFamily="34" charset="0"/>
-                <a:ea typeface="Arial" pitchFamily="34" charset="-122"/>
-                <a:cs typeface="Arial" pitchFamily="34" charset="-120"/>
-              </a:rPr>
-              <a:t>integración y RGPD</a:t>
-            </a:r>
-            <a:endParaRPr lang="en-US" sz="850" dirty="0"/>
-          </a:p>
-        </p:txBody>
-      </p:sp>
-      <p:sp>
-        <p:nvSpPr>
-          <p:cNvPr id="15" name="Shape 10"/>
-          <p:cNvSpPr/>
-          <p:nvPr/>
-        </p:nvSpPr>
-        <p:spPr>
-          <a:xfrm>
-            <a:off x="5989320" y="2286000"/>
-            <a:ext cx="329184" cy="329184"/>
-          </a:xfrm>
-          <a:prstGeom prst="roundRect">
-            <a:avLst>
-              <a:gd name="adj" fmla="val 22222"/>
-            </a:avLst>
-          </a:prstGeom>
-          <a:solidFill>
-            <a:srgbClr val="1E2B37"/>
-          </a:solidFill>
-          <a:ln/>
-        </p:spPr>
-      </p:sp>
-      <p:sp>
-        <p:nvSpPr>
-          <p:cNvPr id="16" name="Text 11"/>
-          <p:cNvSpPr txBox="1"/>
-          <p:nvPr/>
-        </p:nvSpPr>
-        <p:spPr>
-          <a:xfrm>
-            <a:off x="5989320" y="2286000"/>
-            <a:ext cx="329184" cy="329184"/>
-          </a:xfrm>
-          <a:prstGeom prst="rect">
-            <a:avLst/>
-          </a:prstGeom>
-          <a:noFill/>
-          <a:ln/>
-        </p:spPr>
-        <p:txBody>
-          <a:bodyPr wrap="square" lIns="0" tIns="0" rIns="0" bIns="0" rtlCol="0" anchor="ctr"/>
-          <a:lstStyle/>
-          <a:p>
-            <a:pPr algn="ctr" indent="0" marL="0">
-              <a:buNone/>
-            </a:pPr>
-            <a:r>
-              <a:rPr lang="en-US" sz="1100" b="1" dirty="0">
-                <a:solidFill>
-                  <a:srgbClr val="FFFFFF"/>
-                </a:solidFill>
-                <a:latin typeface="Arial" pitchFamily="34" charset="0"/>
-                <a:ea typeface="Arial" pitchFamily="34" charset="-122"/>
-                <a:cs typeface="Arial" pitchFamily="34" charset="-120"/>
-              </a:rPr>
-              <a:t>2</a:t>
-            </a:r>
-            <a:endParaRPr lang="en-US" sz="1100" dirty="0"/>
-          </a:p>
-        </p:txBody>
-      </p:sp>
-      <p:sp>
-        <p:nvSpPr>
-          <p:cNvPr id="17" name="Shape 12"/>
-          <p:cNvSpPr/>
-          <p:nvPr/>
-        </p:nvSpPr>
-        <p:spPr>
-          <a:xfrm>
-            <a:off x="6153912" y="2633472"/>
-            <a:ext cx="0" cy="365760"/>
-          </a:xfrm>
-          <a:prstGeom prst="line">
-            <a:avLst/>
-          </a:prstGeom>
-          <a:noFill/>
-          <a:ln w="19050">
-            <a:solidFill>
-              <a:srgbClr val="E6E9EC"/>
-            </a:solidFill>
-            <a:prstDash val="solid"/>
-          </a:ln>
-        </p:spPr>
-      </p:sp>
-      <p:sp>
-        <p:nvSpPr>
-          <p:cNvPr id="18" name="Text 13"/>
-          <p:cNvSpPr txBox="1"/>
-          <p:nvPr/>
-        </p:nvSpPr>
-        <p:spPr>
-          <a:xfrm>
-            <a:off x="6446520" y="2267712"/>
-            <a:ext cx="2194560" cy="201168"/>
-          </a:xfrm>
-          <a:prstGeom prst="rect">
-            <a:avLst/>
-          </a:prstGeom>
-          <a:noFill/>
-          <a:ln/>
-        </p:spPr>
-        <p:txBody>
-          <a:bodyPr wrap="square" lIns="0" tIns="0" rIns="0" bIns="0" rtlCol="0" anchor="t"/>
-          <a:lstStyle/>
-          <a:p>
-            <a:pPr indent="0" marL="0">
-              <a:buNone/>
-            </a:pPr>
-            <a:r>
-              <a:rPr lang="en-US" sz="950" b="1" dirty="0">
-                <a:solidFill>
-                  <a:srgbClr val="1E2B37"/>
-                </a:solidFill>
-                <a:latin typeface="Arial" pitchFamily="34" charset="0"/>
-                <a:ea typeface="Arial" pitchFamily="34" charset="-122"/>
-                <a:cs typeface="Arial" pitchFamily="34" charset="-120"/>
-              </a:rPr>
-              <a:t>Semanas 3–5</a:t>
-            </a:r>
-            <a:endParaRPr lang="en-US" sz="950" dirty="0"/>
-          </a:p>
-        </p:txBody>
-      </p:sp>
-      <p:sp>
-        <p:nvSpPr>
-          <p:cNvPr id="19" name="Text 14"/>
-          <p:cNvSpPr txBox="1"/>
-          <p:nvPr/>
-        </p:nvSpPr>
-        <p:spPr>
-          <a:xfrm>
-            <a:off x="6446520" y="2468880"/>
-            <a:ext cx="2194560" cy="365760"/>
-          </a:xfrm>
-          <a:prstGeom prst="rect">
-            <a:avLst/>
-          </a:prstGeom>
-          <a:noFill/>
-          <a:ln/>
-        </p:spPr>
-        <p:txBody>
-          <a:bodyPr wrap="square" lIns="0" tIns="0" rIns="0" bIns="0" rtlCol="0" anchor="t"/>
-          <a:lstStyle/>
-          <a:p>
-            <a:pPr indent="0" marL="0">
-              <a:buNone/>
-            </a:pPr>
-            <a:r>
-              <a:rPr lang="en-US" sz="850" dirty="0">
-                <a:solidFill>
-                  <a:srgbClr val="3D4A56"/>
-                </a:solidFill>
-                <a:latin typeface="Arial" pitchFamily="34" charset="0"/>
-                <a:ea typeface="Arial" pitchFamily="34" charset="-122"/>
-                <a:cs typeface="Arial" pitchFamily="34" charset="-120"/>
-              </a:rPr>
-              <a:t>marca blanca y 50 novelas de QA</a:t>
-            </a:r>
-            <a:endParaRPr lang="en-US" sz="850" dirty="0"/>
-          </a:p>
-        </p:txBody>
-      </p:sp>
-      <p:sp>
-        <p:nvSpPr>
-          <p:cNvPr id="20" name="Shape 15"/>
-          <p:cNvSpPr/>
-          <p:nvPr/>
-        </p:nvSpPr>
-        <p:spPr>
-          <a:xfrm>
-            <a:off x="5989320" y="3017520"/>
-            <a:ext cx="329184" cy="329184"/>
-          </a:xfrm>
-          <a:prstGeom prst="roundRect">
-            <a:avLst>
-              <a:gd name="adj" fmla="val 22222"/>
-            </a:avLst>
-          </a:prstGeom>
-          <a:solidFill>
-            <a:srgbClr val="1E2B37"/>
-          </a:solidFill>
-          <a:ln/>
-        </p:spPr>
-      </p:sp>
-      <p:sp>
-        <p:nvSpPr>
-          <p:cNvPr id="21" name="Text 16"/>
-          <p:cNvSpPr txBox="1"/>
-          <p:nvPr/>
-        </p:nvSpPr>
-        <p:spPr>
-          <a:xfrm>
-            <a:off x="5989320" y="3017520"/>
-            <a:ext cx="329184" cy="329184"/>
-          </a:xfrm>
-          <a:prstGeom prst="rect">
-            <a:avLst/>
-          </a:prstGeom>
-          <a:noFill/>
-          <a:ln/>
-        </p:spPr>
-        <p:txBody>
-          <a:bodyPr wrap="square" lIns="0" tIns="0" rIns="0" bIns="0" rtlCol="0" anchor="ctr"/>
-          <a:lstStyle/>
-          <a:p>
-            <a:pPr algn="ctr" indent="0" marL="0">
-              <a:buNone/>
-            </a:pPr>
-            <a:r>
-              <a:rPr lang="en-US" sz="1100" b="1" dirty="0">
-                <a:solidFill>
-                  <a:srgbClr val="FFFFFF"/>
-                </a:solidFill>
-                <a:latin typeface="Arial" pitchFamily="34" charset="0"/>
-                <a:ea typeface="Arial" pitchFamily="34" charset="-122"/>
-                <a:cs typeface="Arial" pitchFamily="34" charset="-120"/>
-              </a:rPr>
-              <a:t>3</a:t>
-            </a:r>
-            <a:endParaRPr lang="en-US" sz="1100" dirty="0"/>
-          </a:p>
-        </p:txBody>
-      </p:sp>
-      <p:sp>
-        <p:nvSpPr>
-          <p:cNvPr id="22" name="Shape 17"/>
-          <p:cNvSpPr/>
-          <p:nvPr/>
-        </p:nvSpPr>
-        <p:spPr>
-          <a:xfrm>
-            <a:off x="6153912" y="3364992"/>
-            <a:ext cx="0" cy="365760"/>
-          </a:xfrm>
-          <a:prstGeom prst="line">
-            <a:avLst/>
-          </a:prstGeom>
-          <a:noFill/>
-          <a:ln w="19050">
-            <a:solidFill>
-              <a:srgbClr val="E6E9EC"/>
-            </a:solidFill>
-            <a:prstDash val="solid"/>
-          </a:ln>
-        </p:spPr>
-      </p:sp>
-      <p:sp>
-        <p:nvSpPr>
-          <p:cNvPr id="23" name="Text 18"/>
-          <p:cNvSpPr txBox="1"/>
-          <p:nvPr/>
-        </p:nvSpPr>
-        <p:spPr>
-          <a:xfrm>
-            <a:off x="6446520" y="2999232"/>
-            <a:ext cx="2194560" cy="201168"/>
-          </a:xfrm>
-          <a:prstGeom prst="rect">
-            <a:avLst/>
-          </a:prstGeom>
-          <a:noFill/>
-          <a:ln/>
-        </p:spPr>
-        <p:txBody>
-          <a:bodyPr wrap="square" lIns="0" tIns="0" rIns="0" bIns="0" rtlCol="0" anchor="t"/>
-          <a:lstStyle/>
-          <a:p>
-            <a:pPr indent="0" marL="0">
-              <a:buNone/>
-            </a:pPr>
-            <a:r>
-              <a:rPr lang="en-US" sz="950" b="1" dirty="0">
-                <a:solidFill>
-                  <a:srgbClr val="1E2B37"/>
-                </a:solidFill>
-                <a:latin typeface="Arial" pitchFamily="34" charset="0"/>
-                <a:ea typeface="Arial" pitchFamily="34" charset="-122"/>
-                <a:cs typeface="Arial" pitchFamily="34" charset="-120"/>
-              </a:rPr>
-              <a:t>Semanas 6–7</a:t>
-            </a:r>
-            <a:endParaRPr lang="en-US" sz="950" dirty="0"/>
-          </a:p>
-        </p:txBody>
-      </p:sp>
-      <p:sp>
-        <p:nvSpPr>
-          <p:cNvPr id="24" name="Text 19"/>
-          <p:cNvSpPr txBox="1"/>
-          <p:nvPr/>
-        </p:nvSpPr>
-        <p:spPr>
-          <a:xfrm>
-            <a:off x="6446520" y="3200400"/>
-            <a:ext cx="2194560" cy="365760"/>
-          </a:xfrm>
-          <a:prstGeom prst="rect">
-            <a:avLst/>
-          </a:prstGeom>
-          <a:noFill/>
-          <a:ln/>
-        </p:spPr>
-        <p:txBody>
-          <a:bodyPr wrap="square" lIns="0" tIns="0" rIns="0" bIns="0" rtlCol="0" anchor="t"/>
-          <a:lstStyle/>
-          <a:p>
-            <a:pPr indent="0" marL="0">
-              <a:buNone/>
-            </a:pPr>
-            <a:r>
-              <a:rPr lang="en-US" sz="850" dirty="0">
-                <a:solidFill>
-                  <a:srgbClr val="3D4A56"/>
-                </a:solidFill>
-                <a:latin typeface="Arial" pitchFamily="34" charset="0"/>
-                <a:ea typeface="Arial" pitchFamily="34" charset="-122"/>
-                <a:cs typeface="Arial" pitchFamily="34" charset="-120"/>
-              </a:rPr>
-              <a:t>calibración del juez y validadores nuevos</a:t>
-            </a:r>
-            <a:endParaRPr lang="en-US" sz="850" dirty="0"/>
-          </a:p>
-        </p:txBody>
-      </p:sp>
-      <p:sp>
-        <p:nvSpPr>
-          <p:cNvPr id="25" name="Shape 20"/>
-          <p:cNvSpPr/>
-          <p:nvPr/>
-        </p:nvSpPr>
-        <p:spPr>
-          <a:xfrm>
-            <a:off x="5989320" y="3749040"/>
-            <a:ext cx="329184" cy="329184"/>
-          </a:xfrm>
-          <a:prstGeom prst="roundRect">
-            <a:avLst>
-              <a:gd name="adj" fmla="val 22222"/>
-            </a:avLst>
-          </a:prstGeom>
-          <a:solidFill>
-            <a:srgbClr val="FF7A2F"/>
-          </a:solidFill>
-          <a:ln/>
-        </p:spPr>
-      </p:sp>
-      <p:sp>
-        <p:nvSpPr>
-          <p:cNvPr id="26" name="Text 21"/>
-          <p:cNvSpPr txBox="1"/>
-          <p:nvPr/>
-        </p:nvSpPr>
-        <p:spPr>
-          <a:xfrm>
-            <a:off x="5989320" y="3749040"/>
-            <a:ext cx="329184" cy="329184"/>
-          </a:xfrm>
-          <a:prstGeom prst="rect">
-            <a:avLst/>
-          </a:prstGeom>
-          <a:noFill/>
-          <a:ln/>
-        </p:spPr>
-        <p:txBody>
-          <a:bodyPr wrap="square" lIns="0" tIns="0" rIns="0" bIns="0" rtlCol="0" anchor="ctr"/>
-          <a:lstStyle/>
-          <a:p>
-            <a:pPr algn="ctr" indent="0" marL="0">
-              <a:buNone/>
-            </a:pPr>
-            <a:r>
-              <a:rPr lang="en-US" sz="1100" b="1" dirty="0">
-                <a:solidFill>
-                  <a:srgbClr val="FFFFFF"/>
-                </a:solidFill>
-                <a:latin typeface="Arial" pitchFamily="34" charset="0"/>
-                <a:ea typeface="Arial" pitchFamily="34" charset="-122"/>
-                <a:cs typeface="Arial" pitchFamily="34" charset="-120"/>
-              </a:rPr>
-              <a:t>4</a:t>
-            </a:r>
-            <a:endParaRPr lang="en-US" sz="1100" dirty="0"/>
-          </a:p>
-        </p:txBody>
-      </p:sp>
-      <p:sp>
-        <p:nvSpPr>
-          <p:cNvPr id="27" name="Text 22"/>
-          <p:cNvSpPr txBox="1"/>
-          <p:nvPr/>
-        </p:nvSpPr>
-        <p:spPr>
-          <a:xfrm>
-            <a:off x="6446520" y="3730752"/>
-            <a:ext cx="2194560" cy="201168"/>
-          </a:xfrm>
-          <a:prstGeom prst="rect">
-            <a:avLst/>
-          </a:prstGeom>
-          <a:noFill/>
-          <a:ln/>
-        </p:spPr>
-        <p:txBody>
-          <a:bodyPr wrap="square" lIns="0" tIns="0" rIns="0" bIns="0" rtlCol="0" anchor="t"/>
-          <a:lstStyle/>
-          <a:p>
-            <a:pPr indent="0" marL="0">
-              <a:buNone/>
-            </a:pPr>
-            <a:r>
-              <a:rPr lang="en-US" sz="950" b="1" dirty="0">
-                <a:solidFill>
-                  <a:srgbClr val="1E2B37"/>
-                </a:solidFill>
-                <a:latin typeface="Arial" pitchFamily="34" charset="0"/>
-                <a:ea typeface="Arial" pitchFamily="34" charset="-122"/>
-                <a:cs typeface="Arial" pitchFamily="34" charset="-120"/>
-              </a:rPr>
-              <a:t>Semana 8</a:t>
-            </a:r>
-            <a:endParaRPr lang="en-US" sz="950" dirty="0"/>
-          </a:p>
-        </p:txBody>
-      </p:sp>
-      <p:sp>
-        <p:nvSpPr>
-          <p:cNvPr id="28" name="Text 23"/>
-          <p:cNvSpPr txBox="1"/>
-          <p:nvPr/>
-        </p:nvSpPr>
-        <p:spPr>
-          <a:xfrm>
-            <a:off x="6446520" y="3931920"/>
-            <a:ext cx="2194560" cy="365760"/>
-          </a:xfrm>
-          <a:prstGeom prst="rect">
-            <a:avLst/>
-          </a:prstGeom>
-          <a:noFill/>
-          <a:ln/>
-        </p:spPr>
-        <p:txBody>
-          <a:bodyPr wrap="square" lIns="0" tIns="0" rIns="0" bIns="0" rtlCol="0" anchor="t"/>
-          <a:lstStyle/>
-          <a:p>
-            <a:pPr indent="0" marL="0">
-              <a:buNone/>
-            </a:pPr>
-            <a:r>
-              <a:rPr lang="en-US" sz="850" dirty="0">
-                <a:solidFill>
-                  <a:srgbClr val="3D4A56"/>
-                </a:solidFill>
-                <a:latin typeface="Arial" pitchFamily="34" charset="0"/>
-                <a:ea typeface="Arial" pitchFamily="34" charset="-122"/>
-                <a:cs typeface="Arial" pitchFamily="34" charset="-120"/>
-              </a:rPr>
-              <a:t>lanzamiento en el catálogo de Navidad</a:t>
-            </a:r>
-            <a:endParaRPr lang="en-US" sz="850" dirty="0"/>
-          </a:p>
-        </p:txBody>
-      </p:sp>
-    </p:spTree>
-  </p:cSld>
-  <p:clrMapOvr>
-    <a:masterClrMapping/>
-  </p:clrMapOvr>
-</p:sld>
-</file>
-
-<file path=ppt/slides/slide15.xml><?xml version="1.0" encoding="utf-8"?>
-<p:sld xmlns:a="http://schemas.openxmlformats.org/drawingml/2006/main" xmlns:r="http://schemas.openxmlformats.org/officeDocument/2006/relationships" xmlns:p="http://schemas.openxmlformats.org/presentationml/2006/main">
-  <p:cSld name="Slide 15">
-    <p:bg>
-      <p:bgPr>
-        <a:solidFill>
           <a:srgbClr val="1E2B37"/>
         </a:solidFill>
       </p:bgPr>
